--- a/slides/google-adk-voice-agents-workshop.pptx
+++ b/slides/google-adk-voice-agents-workshop.pptx
@@ -2,30 +2,30 @@
 <file path=ppt/presentation.xml><?xml version="1.0" encoding="utf-8"?>
 <p:presentation xmlns:p="http://schemas.openxmlformats.org/presentationml/2006/main">
   <p:sldMasterIdLst>
-    <p:sldMasterId xmlns:r="http://schemas.openxmlformats.org/officeDocument/2006/relationships" id="2147483648" r:id="R2a4d08fca3da482d"/>
+    <p:sldMasterId xmlns:r="http://schemas.openxmlformats.org/officeDocument/2006/relationships" id="2147483648" r:id="Rc027f456fa7049f2"/>
   </p:sldMasterIdLst>
   <p:notesMasterIdLst>
-    <p:notesMasterId xmlns:r="http://schemas.openxmlformats.org/officeDocument/2006/relationships" r:id="R7d25ae0086874995"/>
+    <p:notesMasterId xmlns:r="http://schemas.openxmlformats.org/officeDocument/2006/relationships" r:id="R653a0acc738c4bd5"/>
   </p:notesMasterIdLst>
   <p:sldIdLst>
-    <p:sldId xmlns:r="http://schemas.openxmlformats.org/officeDocument/2006/relationships" id="256" r:id="R9698b42e9ad44810"/>
-    <p:sldId xmlns:r="http://schemas.openxmlformats.org/officeDocument/2006/relationships" id="257" r:id="Rb635f51f8c6246a9"/>
-    <p:sldId xmlns:r="http://schemas.openxmlformats.org/officeDocument/2006/relationships" id="258" r:id="Rd7e845d5d6864b32"/>
-    <p:sldId xmlns:r="http://schemas.openxmlformats.org/officeDocument/2006/relationships" id="259" r:id="R94f3af1e0c5547b7"/>
-    <p:sldId xmlns:r="http://schemas.openxmlformats.org/officeDocument/2006/relationships" id="260" r:id="R0f1a88f7cd7b4c16"/>
-    <p:sldId xmlns:r="http://schemas.openxmlformats.org/officeDocument/2006/relationships" id="261" r:id="R75aa5bfad61c4aef"/>
-    <p:sldId xmlns:r="http://schemas.openxmlformats.org/officeDocument/2006/relationships" id="262" r:id="R66a071bb6aee4dc0"/>
-    <p:sldId xmlns:r="http://schemas.openxmlformats.org/officeDocument/2006/relationships" id="263" r:id="Rd30dc0e48e754129"/>
-    <p:sldId xmlns:r="http://schemas.openxmlformats.org/officeDocument/2006/relationships" id="264" r:id="R03b9a69bc73e4a5a"/>
-    <p:sldId xmlns:r="http://schemas.openxmlformats.org/officeDocument/2006/relationships" id="265" r:id="R3d019342b0244814"/>
-    <p:sldId xmlns:r="http://schemas.openxmlformats.org/officeDocument/2006/relationships" id="266" r:id="Rf81d01f47f35416f"/>
-    <p:sldId xmlns:r="http://schemas.openxmlformats.org/officeDocument/2006/relationships" id="267" r:id="Rfebe851030e94a86"/>
-    <p:sldId xmlns:r="http://schemas.openxmlformats.org/officeDocument/2006/relationships" id="268" r:id="Rc39ec45841544373"/>
-    <p:sldId xmlns:r="http://schemas.openxmlformats.org/officeDocument/2006/relationships" id="269" r:id="R46edadb1321e45de"/>
-    <p:sldId xmlns:r="http://schemas.openxmlformats.org/officeDocument/2006/relationships" id="270" r:id="Ra77a19a685a7464a"/>
-    <p:sldId xmlns:r="http://schemas.openxmlformats.org/officeDocument/2006/relationships" id="271" r:id="R9cfe373fc4b841f2"/>
-    <p:sldId xmlns:r="http://schemas.openxmlformats.org/officeDocument/2006/relationships" id="272" r:id="Rd404adefae8b4f7e"/>
-    <p:sldId xmlns:r="http://schemas.openxmlformats.org/officeDocument/2006/relationships" id="273" r:id="R6d826ef1bff04023"/>
+    <p:sldId xmlns:r="http://schemas.openxmlformats.org/officeDocument/2006/relationships" id="256" r:id="R8fa9e02d14954f11"/>
+    <p:sldId xmlns:r="http://schemas.openxmlformats.org/officeDocument/2006/relationships" id="257" r:id="R4d061925731146d9"/>
+    <p:sldId xmlns:r="http://schemas.openxmlformats.org/officeDocument/2006/relationships" id="258" r:id="R483187b41f764bd8"/>
+    <p:sldId xmlns:r="http://schemas.openxmlformats.org/officeDocument/2006/relationships" id="259" r:id="Red2005487d5845cc"/>
+    <p:sldId xmlns:r="http://schemas.openxmlformats.org/officeDocument/2006/relationships" id="260" r:id="Rd91716aefce14dc8"/>
+    <p:sldId xmlns:r="http://schemas.openxmlformats.org/officeDocument/2006/relationships" id="261" r:id="R76d4e58c5dc24b01"/>
+    <p:sldId xmlns:r="http://schemas.openxmlformats.org/officeDocument/2006/relationships" id="262" r:id="R975310531a4c4676"/>
+    <p:sldId xmlns:r="http://schemas.openxmlformats.org/officeDocument/2006/relationships" id="263" r:id="R969122d25c744314"/>
+    <p:sldId xmlns:r="http://schemas.openxmlformats.org/officeDocument/2006/relationships" id="264" r:id="R35379d50f49e4340"/>
+    <p:sldId xmlns:r="http://schemas.openxmlformats.org/officeDocument/2006/relationships" id="265" r:id="Rd94f5f2676694ef6"/>
+    <p:sldId xmlns:r="http://schemas.openxmlformats.org/officeDocument/2006/relationships" id="266" r:id="Rcd669b314bb241fc"/>
+    <p:sldId xmlns:r="http://schemas.openxmlformats.org/officeDocument/2006/relationships" id="267" r:id="Rcc6bcd922dba4057"/>
+    <p:sldId xmlns:r="http://schemas.openxmlformats.org/officeDocument/2006/relationships" id="268" r:id="R712c1edaf2d04008"/>
+    <p:sldId xmlns:r="http://schemas.openxmlformats.org/officeDocument/2006/relationships" id="269" r:id="Rfc9c0256e56940d0"/>
+    <p:sldId xmlns:r="http://schemas.openxmlformats.org/officeDocument/2006/relationships" id="270" r:id="R83693529bbcb4bb7"/>
+    <p:sldId xmlns:r="http://schemas.openxmlformats.org/officeDocument/2006/relationships" id="271" r:id="R948271030c7143fe"/>
+    <p:sldId xmlns:r="http://schemas.openxmlformats.org/officeDocument/2006/relationships" id="272" r:id="Rd45bcc75512e4438"/>
+    <p:sldId xmlns:r="http://schemas.openxmlformats.org/officeDocument/2006/relationships" id="273" r:id="R530a51e16e4f481c"/>
   </p:sldIdLst>
   <p:sldSz cx="12192000" cy="6858000"/>
   <p:notesSz cx="6858000" cy="9144000"/>
@@ -889,7 +889,7 @@
           <a:lstStyle xmlns:a="http://schemas.openxmlformats.org/drawingml/2006/main"/>
           <a:p xmlns:a="http://schemas.openxmlformats.org/drawingml/2006/main">
             <a:r>
-              <a:t>Demo checkpoint 04 with an intentional sleep in the tool. First let it succeed slowly. Then trigger a timeout or failure. Ask the room what they inferred during the silence. Target: 4 minutes.</a:t>
+              <a:t>Demo checkpoint 04. The agent acknowledges the check before calling the tool. The tool waits five seconds, then either returns normal room data or a structured error for 13:00 / ROOM_TOOL_FAIL=1. The agent apologizes and offers another time without retrying automatically. Target: 4 minutes.</a:t>
             </a:r>
           </a:p>
         </p:txBody>
@@ -959,7 +959,7 @@
           <a:lstStyle xmlns:a="http://schemas.openxmlformats.org/drawingml/2006/main"/>
           <a:p xmlns:a="http://schemas.openxmlformats.org/drawingml/2006/main">
             <a:r>
-              <a:t>Ask participants to propose the spoken recovery phrase before discussing implementation. Then reveal the three layers: acknowledgement, bound, recovery. Target: 3 minutes.</a:t>
+              <a:t>Walk through the actual checkpoint behavior: acknowledge before the call, wait five seconds, inspect the structured result, then apologize and offer another time. Emphasize that retryable is data for a future policy; this demo does not retry automatically. Target: 3 minutes.</a:t>
             </a:r>
           </a:p>
         </p:txBody>
@@ -1404,7 +1404,7 @@
           <a:lstStyle xmlns:a="http://schemas.openxmlformats.org/drawingml/2006/main"/>
           <a:p xmlns:a="http://schemas.openxmlformats.org/drawingml/2006/main">
             <a:r>
-              <a:t>Before presenting, replace the QR placeholder with the real repository QR and add the short URL beneath it. Ask helpers to resolve keys, microphones, and browser permissions. Target: 4–6 minutes.</a:t>
+              <a:t>Share the repository link through the event page or attendee chat. Ask helpers to resolve keys, microphones, and browser permissions. Target: 4–6 minutes.</a:t>
             </a:r>
           </a:p>
           <a:p xmlns:a="http://schemas.openxmlformats.org/drawingml/2006/main">
@@ -1414,7 +1414,7 @@
           </a:p>
           <a:p xmlns:a="http://schemas.openxmlformats.org/drawingml/2006/main">
             <a:r>
-              <a:t>Prerequisites to include in the repo README: modern Chromium browser, headphones, working mic, prepared Python environment, workshop credential path, and checkpoint folders.</a:t>
+              <a:t>Prerequisites in the repo README: modern Chromium browser, headphones, working mic, prepared Python environment, workshop credential path, and checkpoint folders.</a:t>
             </a:r>
           </a:p>
         </p:txBody>
@@ -1892,7 +1892,7 @@
   </p:cSld>
   <p:clrMap bg1="lt1" tx1="dk1" bg2="lt2" tx2="dk2" accent1="accent1" accent2="accent2" accent3="accent3" accent4="accent4" accent5="accent5" accent6="accent6" hlink="hlink" folHlink="folHlink"/>
   <p:sldLayoutIdLst>
-    <p:sldLayoutId xmlns:r="http://schemas.openxmlformats.org/officeDocument/2006/relationships" id="2147483649" r:id="R6da366cce47d4d21"/>
+    <p:sldLayoutId xmlns:r="http://schemas.openxmlformats.org/officeDocument/2006/relationships" id="2147483649" r:id="R006a8736866e447b"/>
   </p:sldLayoutIdLst>
   <p:txStyles>
     <p:titleStyle>
@@ -2443,7 +2443,7 @@
           <p:cNvPr id="26" name="">
             <a:extLst xmlns:a="http://schemas.openxmlformats.org/drawingml/2006/main">
               <a:ext uri="{FF2B5EF4-FFF2-40B4-BE49-F238E27FC236}">
-                <a16:creationId xmlns:a16="http://schemas.microsoft.com/office/drawing/2014/main" id="{D4D2FD94-7BB1-4BA8-85CD-E58C5F9B2BF9}"/>
+                <a16:creationId xmlns:a16="http://schemas.microsoft.com/office/drawing/2014/main" id="{918E7350-3552-4671-8002-B0F028E33537}"/>
               </a:ext>
             </a:extLst>
           </p:cNvPr>
@@ -2474,7 +2474,7 @@
           <p:cNvPr id="2" name="">
             <a:extLst xmlns:a="http://schemas.openxmlformats.org/drawingml/2006/main">
               <a:ext uri="{FF2B5EF4-FFF2-40B4-BE49-F238E27FC236}">
-                <a16:creationId xmlns:a16="http://schemas.microsoft.com/office/drawing/2014/main" id="{B1A70001-AA98-4CC0-9424-55D509416AF1}"/>
+                <a16:creationId xmlns:a16="http://schemas.microsoft.com/office/drawing/2014/main" id="{BA4DDBBC-F24C-4C39-8371-C8F6EE215DC4}"/>
               </a:ext>
             </a:extLst>
           </p:cNvPr>
@@ -2524,7 +2524,7 @@
           <p:cNvPr id="3" name="">
             <a:extLst xmlns:a="http://schemas.openxmlformats.org/drawingml/2006/main">
               <a:ext uri="{FF2B5EF4-FFF2-40B4-BE49-F238E27FC236}">
-                <a16:creationId xmlns:a16="http://schemas.microsoft.com/office/drawing/2014/main" id="{A124ED3C-32EB-492B-BC83-F1AFEADC97AB}"/>
+                <a16:creationId xmlns:a16="http://schemas.microsoft.com/office/drawing/2014/main" id="{8E1FA37F-D6D6-4508-95ED-081749BC420F}"/>
               </a:ext>
             </a:extLst>
           </p:cNvPr>
@@ -2591,7 +2591,7 @@
           <p:cNvPr id="4" name="">
             <a:extLst xmlns:a="http://schemas.openxmlformats.org/drawingml/2006/main">
               <a:ext uri="{FF2B5EF4-FFF2-40B4-BE49-F238E27FC236}">
-                <a16:creationId xmlns:a16="http://schemas.microsoft.com/office/drawing/2014/main" id="{46C51A1C-27EB-4CD3-89C7-19201544A991}"/>
+                <a16:creationId xmlns:a16="http://schemas.microsoft.com/office/drawing/2014/main" id="{94236C58-7A0D-48D9-8B8B-55B841313105}"/>
               </a:ext>
             </a:extLst>
           </p:cNvPr>
@@ -2641,7 +2641,7 @@
           <p:cNvPr id="5" name="">
             <a:extLst xmlns:a="http://schemas.openxmlformats.org/drawingml/2006/main">
               <a:ext uri="{FF2B5EF4-FFF2-40B4-BE49-F238E27FC236}">
-                <a16:creationId xmlns:a16="http://schemas.microsoft.com/office/drawing/2014/main" id="{CB5E628F-7FFC-4D37-B740-F858FCB33E01}"/>
+                <a16:creationId xmlns:a16="http://schemas.microsoft.com/office/drawing/2014/main" id="{733CC0BD-8523-4D6B-BC23-9FBF396BDC1F}"/>
               </a:ext>
             </a:extLst>
           </p:cNvPr>
@@ -2691,7 +2691,7 @@
           <p:cNvPr id="6" name="">
             <a:extLst xmlns:a="http://schemas.openxmlformats.org/drawingml/2006/main">
               <a:ext uri="{FF2B5EF4-FFF2-40B4-BE49-F238E27FC236}">
-                <a16:creationId xmlns:a16="http://schemas.microsoft.com/office/drawing/2014/main" id="{AA9F950C-7818-45BF-9943-0938E259D9D3}"/>
+                <a16:creationId xmlns:a16="http://schemas.microsoft.com/office/drawing/2014/main" id="{078D02A7-F4D3-4E46-9917-17E9D2E0A12A}"/>
               </a:ext>
             </a:extLst>
           </p:cNvPr>
@@ -2726,7 +2726,7 @@
           <p:cNvPr id="7" name="">
             <a:extLst xmlns:a="http://schemas.openxmlformats.org/drawingml/2006/main">
               <a:ext uri="{FF2B5EF4-FFF2-40B4-BE49-F238E27FC236}">
-                <a16:creationId xmlns:a16="http://schemas.microsoft.com/office/drawing/2014/main" id="{96DD44FF-B50F-42DC-9FED-F455651D6EF3}"/>
+                <a16:creationId xmlns:a16="http://schemas.microsoft.com/office/drawing/2014/main" id="{47399067-6DDC-402C-8CCB-82446BE19C82}"/>
               </a:ext>
             </a:extLst>
           </p:cNvPr>
@@ -2759,7 +2759,7 @@
           <p:cNvPr id="8" name="">
             <a:extLst xmlns:a="http://schemas.openxmlformats.org/drawingml/2006/main">
               <a:ext uri="{FF2B5EF4-FFF2-40B4-BE49-F238E27FC236}">
-                <a16:creationId xmlns:a16="http://schemas.microsoft.com/office/drawing/2014/main" id="{09D262C2-C6F0-49B8-A404-491682577BB8}"/>
+                <a16:creationId xmlns:a16="http://schemas.microsoft.com/office/drawing/2014/main" id="{C8B724E2-377F-443D-BD86-97864A2DFAD2}"/>
               </a:ext>
             </a:extLst>
           </p:cNvPr>
@@ -2792,7 +2792,7 @@
           <p:cNvPr id="9" name="">
             <a:extLst xmlns:a="http://schemas.openxmlformats.org/drawingml/2006/main">
               <a:ext uri="{FF2B5EF4-FFF2-40B4-BE49-F238E27FC236}">
-                <a16:creationId xmlns:a16="http://schemas.microsoft.com/office/drawing/2014/main" id="{AB15FF9F-B2F8-43A3-A0E1-B8A5996AA8F4}"/>
+                <a16:creationId xmlns:a16="http://schemas.microsoft.com/office/drawing/2014/main" id="{6D0E68F4-2734-4AE2-8AB7-69DC959EADDE}"/>
               </a:ext>
             </a:extLst>
           </p:cNvPr>
@@ -2825,7 +2825,7 @@
           <p:cNvPr id="10" name="">
             <a:extLst xmlns:a="http://schemas.openxmlformats.org/drawingml/2006/main">
               <a:ext uri="{FF2B5EF4-FFF2-40B4-BE49-F238E27FC236}">
-                <a16:creationId xmlns:a16="http://schemas.microsoft.com/office/drawing/2014/main" id="{5C6576CC-F3B4-4C6B-973D-CAD13C2534D8}"/>
+                <a16:creationId xmlns:a16="http://schemas.microsoft.com/office/drawing/2014/main" id="{390E576B-D4B8-4379-A402-843980F37E1E}"/>
               </a:ext>
             </a:extLst>
           </p:cNvPr>
@@ -2858,7 +2858,7 @@
           <p:cNvPr id="11" name="">
             <a:extLst xmlns:a="http://schemas.openxmlformats.org/drawingml/2006/main">
               <a:ext uri="{FF2B5EF4-FFF2-40B4-BE49-F238E27FC236}">
-                <a16:creationId xmlns:a16="http://schemas.microsoft.com/office/drawing/2014/main" id="{25A537B9-CD6B-4E52-9D6E-FCAAB81704DE}"/>
+                <a16:creationId xmlns:a16="http://schemas.microsoft.com/office/drawing/2014/main" id="{F9492DDF-2E97-4179-9D0A-4136ED62823A}"/>
               </a:ext>
             </a:extLst>
           </p:cNvPr>
@@ -2891,7 +2891,7 @@
           <p:cNvPr id="12" name="">
             <a:extLst xmlns:a="http://schemas.openxmlformats.org/drawingml/2006/main">
               <a:ext uri="{FF2B5EF4-FFF2-40B4-BE49-F238E27FC236}">
-                <a16:creationId xmlns:a16="http://schemas.microsoft.com/office/drawing/2014/main" id="{F376EAFD-31C4-43B9-9DAB-5CB4E5C29D48}"/>
+                <a16:creationId xmlns:a16="http://schemas.microsoft.com/office/drawing/2014/main" id="{F2CDE619-BC55-416F-81CD-D0A0AC1CBAAF}"/>
               </a:ext>
             </a:extLst>
           </p:cNvPr>
@@ -2924,7 +2924,7 @@
           <p:cNvPr id="13" name="">
             <a:extLst xmlns:a="http://schemas.openxmlformats.org/drawingml/2006/main">
               <a:ext uri="{FF2B5EF4-FFF2-40B4-BE49-F238E27FC236}">
-                <a16:creationId xmlns:a16="http://schemas.microsoft.com/office/drawing/2014/main" id="{2C27EB09-6772-4D14-A530-3F8F2D9BAF5E}"/>
+                <a16:creationId xmlns:a16="http://schemas.microsoft.com/office/drawing/2014/main" id="{BE740A2A-0A79-49C1-B2EB-EDA4E293DEA9}"/>
               </a:ext>
             </a:extLst>
           </p:cNvPr>
@@ -2957,7 +2957,7 @@
           <p:cNvPr id="14" name="">
             <a:extLst xmlns:a="http://schemas.openxmlformats.org/drawingml/2006/main">
               <a:ext uri="{FF2B5EF4-FFF2-40B4-BE49-F238E27FC236}">
-                <a16:creationId xmlns:a16="http://schemas.microsoft.com/office/drawing/2014/main" id="{9EB6F4A8-AA49-47CC-9F49-1C8EE5A8AC4F}"/>
+                <a16:creationId xmlns:a16="http://schemas.microsoft.com/office/drawing/2014/main" id="{D87C795D-2A3F-4455-8EFF-0CE945C4041A}"/>
               </a:ext>
             </a:extLst>
           </p:cNvPr>
@@ -2990,7 +2990,7 @@
           <p:cNvPr id="15" name="">
             <a:extLst xmlns:a="http://schemas.openxmlformats.org/drawingml/2006/main">
               <a:ext uri="{FF2B5EF4-FFF2-40B4-BE49-F238E27FC236}">
-                <a16:creationId xmlns:a16="http://schemas.microsoft.com/office/drawing/2014/main" id="{73FE8E7F-5577-4081-A471-672B4F0BE2FF}"/>
+                <a16:creationId xmlns:a16="http://schemas.microsoft.com/office/drawing/2014/main" id="{1A6434A0-BB6D-433D-967B-BF3E995049EF}"/>
               </a:ext>
             </a:extLst>
           </p:cNvPr>
@@ -3023,7 +3023,7 @@
           <p:cNvPr id="16" name="">
             <a:extLst xmlns:a="http://schemas.openxmlformats.org/drawingml/2006/main">
               <a:ext uri="{FF2B5EF4-FFF2-40B4-BE49-F238E27FC236}">
-                <a16:creationId xmlns:a16="http://schemas.microsoft.com/office/drawing/2014/main" id="{01C2DA10-8A0B-4627-8DED-BB2DF19F3572}"/>
+                <a16:creationId xmlns:a16="http://schemas.microsoft.com/office/drawing/2014/main" id="{80A33F56-7B29-4A68-A88F-DD58875D8007}"/>
               </a:ext>
             </a:extLst>
           </p:cNvPr>
@@ -3056,7 +3056,7 @@
           <p:cNvPr id="17" name="">
             <a:extLst xmlns:a="http://schemas.openxmlformats.org/drawingml/2006/main">
               <a:ext uri="{FF2B5EF4-FFF2-40B4-BE49-F238E27FC236}">
-                <a16:creationId xmlns:a16="http://schemas.microsoft.com/office/drawing/2014/main" id="{E3FC9B40-7B59-4212-9198-DE9DAC2B44BC}"/>
+                <a16:creationId xmlns:a16="http://schemas.microsoft.com/office/drawing/2014/main" id="{31CB5FF5-46CF-41E9-9E18-297CFE7FA14D}"/>
               </a:ext>
             </a:extLst>
           </p:cNvPr>
@@ -3089,7 +3089,7 @@
           <p:cNvPr id="18" name="">
             <a:extLst xmlns:a="http://schemas.openxmlformats.org/drawingml/2006/main">
               <a:ext uri="{FF2B5EF4-FFF2-40B4-BE49-F238E27FC236}">
-                <a16:creationId xmlns:a16="http://schemas.microsoft.com/office/drawing/2014/main" id="{76611C52-40DA-4A91-8FC4-AEB6E94A1791}"/>
+                <a16:creationId xmlns:a16="http://schemas.microsoft.com/office/drawing/2014/main" id="{64C33907-E015-4560-BFC1-075A35E7FAEE}"/>
               </a:ext>
             </a:extLst>
           </p:cNvPr>
@@ -3122,7 +3122,7 @@
           <p:cNvPr id="19" name="">
             <a:extLst xmlns:a="http://schemas.openxmlformats.org/drawingml/2006/main">
               <a:ext uri="{FF2B5EF4-FFF2-40B4-BE49-F238E27FC236}">
-                <a16:creationId xmlns:a16="http://schemas.microsoft.com/office/drawing/2014/main" id="{E0C9C687-69AE-42EB-BD02-4D537EB39391}"/>
+                <a16:creationId xmlns:a16="http://schemas.microsoft.com/office/drawing/2014/main" id="{9CECA5A8-4732-4668-A9AC-7C411EBA0D61}"/>
               </a:ext>
             </a:extLst>
           </p:cNvPr>
@@ -3155,7 +3155,7 @@
           <p:cNvPr id="20" name="">
             <a:extLst xmlns:a="http://schemas.openxmlformats.org/drawingml/2006/main">
               <a:ext uri="{FF2B5EF4-FFF2-40B4-BE49-F238E27FC236}">
-                <a16:creationId xmlns:a16="http://schemas.microsoft.com/office/drawing/2014/main" id="{5899D498-1AB7-4458-85EC-DD840DD0C7C2}"/>
+                <a16:creationId xmlns:a16="http://schemas.microsoft.com/office/drawing/2014/main" id="{75D747D3-988D-48E7-849A-7A2CDC932A61}"/>
               </a:ext>
             </a:extLst>
           </p:cNvPr>
@@ -3188,7 +3188,7 @@
           <p:cNvPr id="21" name="">
             <a:extLst xmlns:a="http://schemas.openxmlformats.org/drawingml/2006/main">
               <a:ext uri="{FF2B5EF4-FFF2-40B4-BE49-F238E27FC236}">
-                <a16:creationId xmlns:a16="http://schemas.microsoft.com/office/drawing/2014/main" id="{C9706957-4063-4E37-980A-88BAD086E3A3}"/>
+                <a16:creationId xmlns:a16="http://schemas.microsoft.com/office/drawing/2014/main" id="{33F14BA9-0610-4ADF-8B37-E20EF1D63158}"/>
               </a:ext>
             </a:extLst>
           </p:cNvPr>
@@ -3221,7 +3221,7 @@
           <p:cNvPr id="22" name="">
             <a:extLst xmlns:a="http://schemas.openxmlformats.org/drawingml/2006/main">
               <a:ext uri="{FF2B5EF4-FFF2-40B4-BE49-F238E27FC236}">
-                <a16:creationId xmlns:a16="http://schemas.microsoft.com/office/drawing/2014/main" id="{C44B5757-6911-4F7F-97EF-79E24BBAE87D}"/>
+                <a16:creationId xmlns:a16="http://schemas.microsoft.com/office/drawing/2014/main" id="{3C3E03B6-ECCE-4B01-AFAE-2347F16760A8}"/>
               </a:ext>
             </a:extLst>
           </p:cNvPr>
@@ -3254,7 +3254,7 @@
           <p:cNvPr id="23" name="">
             <a:extLst xmlns:a="http://schemas.openxmlformats.org/drawingml/2006/main">
               <a:ext uri="{FF2B5EF4-FFF2-40B4-BE49-F238E27FC236}">
-                <a16:creationId xmlns:a16="http://schemas.microsoft.com/office/drawing/2014/main" id="{E72BF8C9-E080-4344-9ABC-D5DC7D1DBCE2}"/>
+                <a16:creationId xmlns:a16="http://schemas.microsoft.com/office/drawing/2014/main" id="{21694FF3-702C-4EBE-A3D4-9E7650907AC6}"/>
               </a:ext>
             </a:extLst>
           </p:cNvPr>
@@ -3285,7 +3285,7 @@
           <p:cNvPr id="24" name="">
             <a:extLst xmlns:a="http://schemas.openxmlformats.org/drawingml/2006/main">
               <a:ext uri="{FF2B5EF4-FFF2-40B4-BE49-F238E27FC236}">
-                <a16:creationId xmlns:a16="http://schemas.microsoft.com/office/drawing/2014/main" id="{1233C244-4A81-4C7B-B20E-CC792F62EDDC}"/>
+                <a16:creationId xmlns:a16="http://schemas.microsoft.com/office/drawing/2014/main" id="{E006C130-E232-414E-964D-F4C238E05514}"/>
               </a:ext>
             </a:extLst>
           </p:cNvPr>
@@ -3335,7 +3335,7 @@
           <p:cNvPr id="25" name="">
             <a:extLst xmlns:a="http://schemas.openxmlformats.org/drawingml/2006/main">
               <a:ext uri="{FF2B5EF4-FFF2-40B4-BE49-F238E27FC236}">
-                <a16:creationId xmlns:a16="http://schemas.microsoft.com/office/drawing/2014/main" id="{3A58EE58-4DD2-4234-8E46-0D371B6530B3}"/>
+                <a16:creationId xmlns:a16="http://schemas.microsoft.com/office/drawing/2014/main" id="{3F1018E0-8908-49AB-8972-AECF123192DE}"/>
               </a:ext>
             </a:extLst>
           </p:cNvPr>
@@ -3383,7 +3383,7 @@
     </p:spTree>
     <p:extLst>
       <p:ext uri="{BB962C8B-B14F-4D97-AF65-F5344CB8AC3E}">
-        <p14:creationId xmlns:p14="http://schemas.microsoft.com/office/powerpoint/2010/main" val="594192531"/>
+        <p14:creationId xmlns:p14="http://schemas.microsoft.com/office/powerpoint/2010/main" val="860992036"/>
       </p:ext>
     </p:extLst>
   </p:cSld>
@@ -3414,7 +3414,7 @@
           <p:cNvPr id="25" name="">
             <a:extLst xmlns:a="http://schemas.openxmlformats.org/drawingml/2006/main">
               <a:ext uri="{FF2B5EF4-FFF2-40B4-BE49-F238E27FC236}">
-                <a16:creationId xmlns:a16="http://schemas.microsoft.com/office/drawing/2014/main" id="{B624C8D9-F39C-4C2A-B1C7-3611FD319E69}"/>
+                <a16:creationId xmlns:a16="http://schemas.microsoft.com/office/drawing/2014/main" id="{D9A64E5B-82E4-4836-90A1-FFB1C5AC3AF0}"/>
               </a:ext>
             </a:extLst>
           </p:cNvPr>
@@ -3447,7 +3447,7 @@
           <p:cNvPr id="2" name="">
             <a:extLst xmlns:a="http://schemas.openxmlformats.org/drawingml/2006/main">
               <a:ext uri="{FF2B5EF4-FFF2-40B4-BE49-F238E27FC236}">
-                <a16:creationId xmlns:a16="http://schemas.microsoft.com/office/drawing/2014/main" id="{5FFA08F7-99CA-43A5-8345-ABDC08710DA1}"/>
+                <a16:creationId xmlns:a16="http://schemas.microsoft.com/office/drawing/2014/main" id="{E33EF838-3930-49A0-BCB0-DC1E2911D776}"/>
               </a:ext>
             </a:extLst>
           </p:cNvPr>
@@ -3497,7 +3497,7 @@
           <p:cNvPr id="3" name="">
             <a:extLst xmlns:a="http://schemas.openxmlformats.org/drawingml/2006/main">
               <a:ext uri="{FF2B5EF4-FFF2-40B4-BE49-F238E27FC236}">
-                <a16:creationId xmlns:a16="http://schemas.microsoft.com/office/drawing/2014/main" id="{D931CD10-E93F-4E34-8FD4-266E87704D71}"/>
+                <a16:creationId xmlns:a16="http://schemas.microsoft.com/office/drawing/2014/main" id="{2599D120-A3E4-4B5C-9FB0-BAA787E3EB4F}"/>
               </a:ext>
             </a:extLst>
           </p:cNvPr>
@@ -3547,7 +3547,7 @@
           <p:cNvPr id="4" name="">
             <a:extLst xmlns:a="http://schemas.openxmlformats.org/drawingml/2006/main">
               <a:ext uri="{FF2B5EF4-FFF2-40B4-BE49-F238E27FC236}">
-                <a16:creationId xmlns:a16="http://schemas.microsoft.com/office/drawing/2014/main" id="{1FB4EAE3-C306-4B2E-BA1C-1F00952B9713}"/>
+                <a16:creationId xmlns:a16="http://schemas.microsoft.com/office/drawing/2014/main" id="{EA58DB10-3D94-4657-A3CC-74ACFE88306D}"/>
               </a:ext>
             </a:extLst>
           </p:cNvPr>
@@ -3597,7 +3597,7 @@
           <p:cNvPr id="5" name="">
             <a:extLst xmlns:a="http://schemas.openxmlformats.org/drawingml/2006/main">
               <a:ext uri="{FF2B5EF4-FFF2-40B4-BE49-F238E27FC236}">
-                <a16:creationId xmlns:a16="http://schemas.microsoft.com/office/drawing/2014/main" id="{41359DF3-83F7-41B6-A3B8-28823191C8D3}"/>
+                <a16:creationId xmlns:a16="http://schemas.microsoft.com/office/drawing/2014/main" id="{1C9EC00D-4F1E-455E-8976-645B9C1FA1FB}"/>
               </a:ext>
             </a:extLst>
           </p:cNvPr>
@@ -3628,7 +3628,7 @@
           <p:cNvPr id="6" name="">
             <a:extLst xmlns:a="http://schemas.openxmlformats.org/drawingml/2006/main">
               <a:ext uri="{FF2B5EF4-FFF2-40B4-BE49-F238E27FC236}">
-                <a16:creationId xmlns:a16="http://schemas.microsoft.com/office/drawing/2014/main" id="{48298FAF-ADDC-46AC-BF00-AC722FD20AB4}"/>
+                <a16:creationId xmlns:a16="http://schemas.microsoft.com/office/drawing/2014/main" id="{539F3FF7-324B-4496-B157-B647656DE612}"/>
               </a:ext>
             </a:extLst>
           </p:cNvPr>
@@ -3678,7 +3678,7 @@
           <p:cNvPr id="7" name="">
             <a:extLst xmlns:a="http://schemas.openxmlformats.org/drawingml/2006/main">
               <a:ext uri="{FF2B5EF4-FFF2-40B4-BE49-F238E27FC236}">
-                <a16:creationId xmlns:a16="http://schemas.microsoft.com/office/drawing/2014/main" id="{CFD1480A-39AC-46B2-B1C7-7C15A151A4F4}"/>
+                <a16:creationId xmlns:a16="http://schemas.microsoft.com/office/drawing/2014/main" id="{B20780F3-32C6-4583-AD92-F1D47D008883}"/>
               </a:ext>
             </a:extLst>
           </p:cNvPr>
@@ -3728,7 +3728,7 @@
           <p:cNvPr id="8" name="">
             <a:extLst xmlns:a="http://schemas.openxmlformats.org/drawingml/2006/main">
               <a:ext uri="{FF2B5EF4-FFF2-40B4-BE49-F238E27FC236}">
-                <a16:creationId xmlns:a16="http://schemas.microsoft.com/office/drawing/2014/main" id="{8F887BE6-131E-4986-B09F-A658F77C51C5}"/>
+                <a16:creationId xmlns:a16="http://schemas.microsoft.com/office/drawing/2014/main" id="{7B66ECEE-C433-4B27-A8A6-E496FBABEC1E}"/>
               </a:ext>
             </a:extLst>
           </p:cNvPr>
@@ -3778,7 +3778,7 @@
           <p:cNvPr id="9" name="">
             <a:extLst xmlns:a="http://schemas.openxmlformats.org/drawingml/2006/main">
               <a:ext uri="{FF2B5EF4-FFF2-40B4-BE49-F238E27FC236}">
-                <a16:creationId xmlns:a16="http://schemas.microsoft.com/office/drawing/2014/main" id="{B8630CE1-2D12-4D1B-BB0E-9D9DD3C631D1}"/>
+                <a16:creationId xmlns:a16="http://schemas.microsoft.com/office/drawing/2014/main" id="{81C6CB05-FC6D-4B4E-8BF0-3AF50F163D6C}"/>
               </a:ext>
             </a:extLst>
           </p:cNvPr>
@@ -3828,7 +3828,7 @@
           <p:cNvPr id="10" name="">
             <a:extLst xmlns:a="http://schemas.openxmlformats.org/drawingml/2006/main">
               <a:ext uri="{FF2B5EF4-FFF2-40B4-BE49-F238E27FC236}">
-                <a16:creationId xmlns:a16="http://schemas.microsoft.com/office/drawing/2014/main" id="{94563180-C1EA-4F5A-B45B-6CE9B49BF812}"/>
+                <a16:creationId xmlns:a16="http://schemas.microsoft.com/office/drawing/2014/main" id="{9A13BD07-8ECF-4820-8152-6236DF4E9A77}"/>
               </a:ext>
             </a:extLst>
           </p:cNvPr>
@@ -3878,7 +3878,7 @@
           <p:cNvPr id="11" name="">
             <a:extLst xmlns:a="http://schemas.openxmlformats.org/drawingml/2006/main">
               <a:ext uri="{FF2B5EF4-FFF2-40B4-BE49-F238E27FC236}">
-                <a16:creationId xmlns:a16="http://schemas.microsoft.com/office/drawing/2014/main" id="{057EC9F8-24C4-4024-AC2F-836380AA60B6}"/>
+                <a16:creationId xmlns:a16="http://schemas.microsoft.com/office/drawing/2014/main" id="{35108E62-30E5-4FDF-9414-C7183F5856FD}"/>
               </a:ext>
             </a:extLst>
           </p:cNvPr>
@@ -3909,7 +3909,7 @@
           <p:cNvPr id="12" name="">
             <a:extLst xmlns:a="http://schemas.openxmlformats.org/drawingml/2006/main">
               <a:ext uri="{FF2B5EF4-FFF2-40B4-BE49-F238E27FC236}">
-                <a16:creationId xmlns:a16="http://schemas.microsoft.com/office/drawing/2014/main" id="{22015144-D0AD-4D3C-BBF4-6D9638842109}"/>
+                <a16:creationId xmlns:a16="http://schemas.microsoft.com/office/drawing/2014/main" id="{AD3C36D9-042B-4363-85F0-BEA77A9DC186}"/>
               </a:ext>
             </a:extLst>
           </p:cNvPr>
@@ -3959,7 +3959,7 @@
           <p:cNvPr id="13" name="">
             <a:extLst xmlns:a="http://schemas.openxmlformats.org/drawingml/2006/main">
               <a:ext uri="{FF2B5EF4-FFF2-40B4-BE49-F238E27FC236}">
-                <a16:creationId xmlns:a16="http://schemas.microsoft.com/office/drawing/2014/main" id="{204465FC-F250-4599-9212-7438F6F07581}"/>
+                <a16:creationId xmlns:a16="http://schemas.microsoft.com/office/drawing/2014/main" id="{5D3FE557-1B9A-4523-8131-EDE07487D700}"/>
               </a:ext>
             </a:extLst>
           </p:cNvPr>
@@ -4009,7 +4009,7 @@
           <p:cNvPr id="14" name="">
             <a:extLst xmlns:a="http://schemas.openxmlformats.org/drawingml/2006/main">
               <a:ext uri="{FF2B5EF4-FFF2-40B4-BE49-F238E27FC236}">
-                <a16:creationId xmlns:a16="http://schemas.microsoft.com/office/drawing/2014/main" id="{FAF8F5E0-E631-4B5E-B5BF-6A2A078633DC}"/>
+                <a16:creationId xmlns:a16="http://schemas.microsoft.com/office/drawing/2014/main" id="{39D6B3D2-3E5D-4877-9A25-5CF3154E01F3}"/>
               </a:ext>
             </a:extLst>
           </p:cNvPr>
@@ -4059,7 +4059,7 @@
           <p:cNvPr id="15" name="">
             <a:extLst xmlns:a="http://schemas.openxmlformats.org/drawingml/2006/main">
               <a:ext uri="{FF2B5EF4-FFF2-40B4-BE49-F238E27FC236}">
-                <a16:creationId xmlns:a16="http://schemas.microsoft.com/office/drawing/2014/main" id="{E4979553-653F-4963-A8CE-89BBDD58FE9B}"/>
+                <a16:creationId xmlns:a16="http://schemas.microsoft.com/office/drawing/2014/main" id="{4EB36A9F-68D8-4EC7-9900-1A1AF106F4B5}"/>
               </a:ext>
             </a:extLst>
           </p:cNvPr>
@@ -4090,7 +4090,7 @@
           <p:cNvPr id="16" name="">
             <a:extLst xmlns:a="http://schemas.openxmlformats.org/drawingml/2006/main">
               <a:ext uri="{FF2B5EF4-FFF2-40B4-BE49-F238E27FC236}">
-                <a16:creationId xmlns:a16="http://schemas.microsoft.com/office/drawing/2014/main" id="{F9AA2CE9-6756-4537-9119-2156368EEDBF}"/>
+                <a16:creationId xmlns:a16="http://schemas.microsoft.com/office/drawing/2014/main" id="{110C645D-669F-4210-889B-9246BC2EB78A}"/>
               </a:ext>
             </a:extLst>
           </p:cNvPr>
@@ -4140,7 +4140,7 @@
           <p:cNvPr id="17" name="">
             <a:extLst xmlns:a="http://schemas.openxmlformats.org/drawingml/2006/main">
               <a:ext uri="{FF2B5EF4-FFF2-40B4-BE49-F238E27FC236}">
-                <a16:creationId xmlns:a16="http://schemas.microsoft.com/office/drawing/2014/main" id="{E1C14FE5-9D13-4821-B5A1-F64C6F77AA60}"/>
+                <a16:creationId xmlns:a16="http://schemas.microsoft.com/office/drawing/2014/main" id="{0E74DED3-B290-4B61-B59C-9898B54846C3}"/>
               </a:ext>
             </a:extLst>
           </p:cNvPr>
@@ -4190,7 +4190,7 @@
           <p:cNvPr id="18" name="">
             <a:extLst xmlns:a="http://schemas.openxmlformats.org/drawingml/2006/main">
               <a:ext uri="{FF2B5EF4-FFF2-40B4-BE49-F238E27FC236}">
-                <a16:creationId xmlns:a16="http://schemas.microsoft.com/office/drawing/2014/main" id="{02CCE235-B47F-4421-BA37-CED8C57691E9}"/>
+                <a16:creationId xmlns:a16="http://schemas.microsoft.com/office/drawing/2014/main" id="{B29537E9-0481-4C06-91D8-498258E2A5C8}"/>
               </a:ext>
             </a:extLst>
           </p:cNvPr>
@@ -4240,7 +4240,7 @@
           <p:cNvPr id="19" name="">
             <a:extLst xmlns:a="http://schemas.openxmlformats.org/drawingml/2006/main">
               <a:ext uri="{FF2B5EF4-FFF2-40B4-BE49-F238E27FC236}">
-                <a16:creationId xmlns:a16="http://schemas.microsoft.com/office/drawing/2014/main" id="{D5EE26CF-3778-406F-A033-D8E32697171F}"/>
+                <a16:creationId xmlns:a16="http://schemas.microsoft.com/office/drawing/2014/main" id="{AA17EF7F-ADA6-4CE9-BE50-6844C2E90C42}"/>
               </a:ext>
             </a:extLst>
           </p:cNvPr>
@@ -4271,7 +4271,7 @@
           <p:cNvPr id="20" name="">
             <a:extLst xmlns:a="http://schemas.openxmlformats.org/drawingml/2006/main">
               <a:ext uri="{FF2B5EF4-FFF2-40B4-BE49-F238E27FC236}">
-                <a16:creationId xmlns:a16="http://schemas.microsoft.com/office/drawing/2014/main" id="{E96DB8E4-FB63-4695-9060-D6BED1802E11}"/>
+                <a16:creationId xmlns:a16="http://schemas.microsoft.com/office/drawing/2014/main" id="{9408417B-E37E-4E5A-BF7B-A12C61C3EACB}"/>
               </a:ext>
             </a:extLst>
           </p:cNvPr>
@@ -4321,7 +4321,7 @@
           <p:cNvPr id="21" name="">
             <a:extLst xmlns:a="http://schemas.openxmlformats.org/drawingml/2006/main">
               <a:ext uri="{FF2B5EF4-FFF2-40B4-BE49-F238E27FC236}">
-                <a16:creationId xmlns:a16="http://schemas.microsoft.com/office/drawing/2014/main" id="{1D51C24A-2D3A-4BB2-BB85-BC96ECA2A282}"/>
+                <a16:creationId xmlns:a16="http://schemas.microsoft.com/office/drawing/2014/main" id="{C6641311-D2A1-4F36-B69E-48188879A804}"/>
               </a:ext>
             </a:extLst>
           </p:cNvPr>
@@ -4371,7 +4371,7 @@
           <p:cNvPr id="22" name="">
             <a:extLst xmlns:a="http://schemas.openxmlformats.org/drawingml/2006/main">
               <a:ext uri="{FF2B5EF4-FFF2-40B4-BE49-F238E27FC236}">
-                <a16:creationId xmlns:a16="http://schemas.microsoft.com/office/drawing/2014/main" id="{FA805D7D-C387-4C30-8A2B-97B18CEB61DD}"/>
+                <a16:creationId xmlns:a16="http://schemas.microsoft.com/office/drawing/2014/main" id="{7F28E9B4-8E87-4759-A198-70EDDC89BEF1}"/>
               </a:ext>
             </a:extLst>
           </p:cNvPr>
@@ -4421,7 +4421,7 @@
           <p:cNvPr id="23" name="">
             <a:extLst xmlns:a="http://schemas.openxmlformats.org/drawingml/2006/main">
               <a:ext uri="{FF2B5EF4-FFF2-40B4-BE49-F238E27FC236}">
-                <a16:creationId xmlns:a16="http://schemas.microsoft.com/office/drawing/2014/main" id="{FF1B8823-6589-4E07-9C1B-DC2DA9059E64}"/>
+                <a16:creationId xmlns:a16="http://schemas.microsoft.com/office/drawing/2014/main" id="{0EDE04C9-2ACA-4F4D-91EF-2A85A5E7CCD4}"/>
               </a:ext>
             </a:extLst>
           </p:cNvPr>
@@ -4452,7 +4452,7 @@
           <p:cNvPr id="24" name="">
             <a:extLst xmlns:a="http://schemas.openxmlformats.org/drawingml/2006/main">
               <a:ext uri="{FF2B5EF4-FFF2-40B4-BE49-F238E27FC236}">
-                <a16:creationId xmlns:a16="http://schemas.microsoft.com/office/drawing/2014/main" id="{4FFB3B8F-9D34-45EB-AF3D-AF08C2E29CB9}"/>
+                <a16:creationId xmlns:a16="http://schemas.microsoft.com/office/drawing/2014/main" id="{2A7D550B-2B6D-4B9F-B83B-6F242ADDB4D3}"/>
               </a:ext>
             </a:extLst>
           </p:cNvPr>
@@ -4500,7 +4500,7 @@
     </p:spTree>
     <p:extLst>
       <p:ext uri="{BB962C8B-B14F-4D97-AF65-F5344CB8AC3E}">
-        <p14:creationId xmlns:p14="http://schemas.microsoft.com/office/powerpoint/2010/main" val="234330945"/>
+        <p14:creationId xmlns:p14="http://schemas.microsoft.com/office/powerpoint/2010/main" val="1218927202"/>
       </p:ext>
     </p:extLst>
   </p:cSld>
@@ -4531,7 +4531,7 @@
           <p:cNvPr id="50" name="">
             <a:extLst xmlns:a="http://schemas.openxmlformats.org/drawingml/2006/main">
               <a:ext uri="{FF2B5EF4-FFF2-40B4-BE49-F238E27FC236}">
-                <a16:creationId xmlns:a16="http://schemas.microsoft.com/office/drawing/2014/main" id="{2A1D5F2B-2429-4EE0-BE96-1710DCF00482}"/>
+                <a16:creationId xmlns:a16="http://schemas.microsoft.com/office/drawing/2014/main" id="{88EC4414-263D-411B-A973-CC1DBFA0C36E}"/>
               </a:ext>
             </a:extLst>
           </p:cNvPr>
@@ -4564,7 +4564,7 @@
           <p:cNvPr id="2" name="">
             <a:extLst xmlns:a="http://schemas.openxmlformats.org/drawingml/2006/main">
               <a:ext uri="{FF2B5EF4-FFF2-40B4-BE49-F238E27FC236}">
-                <a16:creationId xmlns:a16="http://schemas.microsoft.com/office/drawing/2014/main" id="{35088532-00D6-4EE1-B492-7870B72A9AAE}"/>
+                <a16:creationId xmlns:a16="http://schemas.microsoft.com/office/drawing/2014/main" id="{39D123D9-B631-475B-8F92-5767E6D9C087}"/>
               </a:ext>
             </a:extLst>
           </p:cNvPr>
@@ -4614,7 +4614,7 @@
           <p:cNvPr id="3" name="">
             <a:extLst xmlns:a="http://schemas.openxmlformats.org/drawingml/2006/main">
               <a:ext uri="{FF2B5EF4-FFF2-40B4-BE49-F238E27FC236}">
-                <a16:creationId xmlns:a16="http://schemas.microsoft.com/office/drawing/2014/main" id="{DD6A02A7-C11A-44AF-92C7-96220341A635}"/>
+                <a16:creationId xmlns:a16="http://schemas.microsoft.com/office/drawing/2014/main" id="{6B70BCD0-9732-4662-AF77-6D2FA0F59143}"/>
               </a:ext>
             </a:extLst>
           </p:cNvPr>
@@ -4664,7 +4664,7 @@
           <p:cNvPr id="4" name="">
             <a:extLst xmlns:a="http://schemas.openxmlformats.org/drawingml/2006/main">
               <a:ext uri="{FF2B5EF4-FFF2-40B4-BE49-F238E27FC236}">
-                <a16:creationId xmlns:a16="http://schemas.microsoft.com/office/drawing/2014/main" id="{B6802A6C-A159-40CE-B68D-06D73BBCC27B}"/>
+                <a16:creationId xmlns:a16="http://schemas.microsoft.com/office/drawing/2014/main" id="{E343E318-83F9-4BEF-A775-ADD7B22D570D}"/>
               </a:ext>
             </a:extLst>
           </p:cNvPr>
@@ -4714,7 +4714,7 @@
           <p:cNvPr id="5" name="">
             <a:extLst xmlns:a="http://schemas.openxmlformats.org/drawingml/2006/main">
               <a:ext uri="{FF2B5EF4-FFF2-40B4-BE49-F238E27FC236}">
-                <a16:creationId xmlns:a16="http://schemas.microsoft.com/office/drawing/2014/main" id="{12D3CD40-E601-4836-897A-999902B9EBCC}"/>
+                <a16:creationId xmlns:a16="http://schemas.microsoft.com/office/drawing/2014/main" id="{71540052-8F48-4D48-948F-3B4FCEB7201F}"/>
               </a:ext>
             </a:extLst>
           </p:cNvPr>
@@ -4745,7 +4745,7 @@
           <p:cNvPr id="6" name="">
             <a:extLst xmlns:a="http://schemas.openxmlformats.org/drawingml/2006/main">
               <a:ext uri="{FF2B5EF4-FFF2-40B4-BE49-F238E27FC236}">
-                <a16:creationId xmlns:a16="http://schemas.microsoft.com/office/drawing/2014/main" id="{01E3FC11-6811-4034-806E-7D437CCBEF89}"/>
+                <a16:creationId xmlns:a16="http://schemas.microsoft.com/office/drawing/2014/main" id="{CED6E488-C94B-4C98-B184-7527F53F54DF}"/>
               </a:ext>
             </a:extLst>
           </p:cNvPr>
@@ -4795,7 +4795,7 @@
           <p:cNvPr id="7" name="">
             <a:extLst xmlns:a="http://schemas.openxmlformats.org/drawingml/2006/main">
               <a:ext uri="{FF2B5EF4-FFF2-40B4-BE49-F238E27FC236}">
-                <a16:creationId xmlns:a16="http://schemas.microsoft.com/office/drawing/2014/main" id="{9D40F6EA-B479-4EE9-95C1-93BCB69D5E88}"/>
+                <a16:creationId xmlns:a16="http://schemas.microsoft.com/office/drawing/2014/main" id="{A02BD9B5-7149-4207-B9DB-D45388075E4C}"/>
               </a:ext>
             </a:extLst>
           </p:cNvPr>
@@ -4845,7 +4845,7 @@
           <p:cNvPr id="8" name="">
             <a:extLst xmlns:a="http://schemas.openxmlformats.org/drawingml/2006/main">
               <a:ext uri="{FF2B5EF4-FFF2-40B4-BE49-F238E27FC236}">
-                <a16:creationId xmlns:a16="http://schemas.microsoft.com/office/drawing/2014/main" id="{E97D188D-F9D3-4A68-8EAC-BF6C9BFEA893}"/>
+                <a16:creationId xmlns:a16="http://schemas.microsoft.com/office/drawing/2014/main" id="{F7CD8972-28A9-4F3C-93D3-CC3272AA1084}"/>
               </a:ext>
             </a:extLst>
           </p:cNvPr>
@@ -4895,7 +4895,7 @@
           <p:cNvPr id="9" name="">
             <a:extLst xmlns:a="http://schemas.openxmlformats.org/drawingml/2006/main">
               <a:ext uri="{FF2B5EF4-FFF2-40B4-BE49-F238E27FC236}">
-                <a16:creationId xmlns:a16="http://schemas.microsoft.com/office/drawing/2014/main" id="{69C09954-948B-498C-AD7B-9A3766EDBC33}"/>
+                <a16:creationId xmlns:a16="http://schemas.microsoft.com/office/drawing/2014/main" id="{D173A720-ACD1-463E-97B5-4443DF0641B1}"/>
               </a:ext>
             </a:extLst>
           </p:cNvPr>
@@ -4928,7 +4928,7 @@
           <p:cNvPr id="10" name="">
             <a:extLst xmlns:a="http://schemas.openxmlformats.org/drawingml/2006/main">
               <a:ext uri="{FF2B5EF4-FFF2-40B4-BE49-F238E27FC236}">
-                <a16:creationId xmlns:a16="http://schemas.microsoft.com/office/drawing/2014/main" id="{5E9C686B-450E-4645-B305-AD61B1F7B4CB}"/>
+                <a16:creationId xmlns:a16="http://schemas.microsoft.com/office/drawing/2014/main" id="{1BFEF166-0E90-4AC7-929C-6B4FA4FCE124}"/>
               </a:ext>
             </a:extLst>
           </p:cNvPr>
@@ -4961,7 +4961,7 @@
           <p:cNvPr id="11" name="">
             <a:extLst xmlns:a="http://schemas.openxmlformats.org/drawingml/2006/main">
               <a:ext uri="{FF2B5EF4-FFF2-40B4-BE49-F238E27FC236}">
-                <a16:creationId xmlns:a16="http://schemas.microsoft.com/office/drawing/2014/main" id="{4D4779D2-C5E0-4CB4-8242-46C5C7160647}"/>
+                <a16:creationId xmlns:a16="http://schemas.microsoft.com/office/drawing/2014/main" id="{BAD8C9BB-8E84-4046-A5FB-48FF9A5A75FF}"/>
               </a:ext>
             </a:extLst>
           </p:cNvPr>
@@ -4994,7 +4994,7 @@
           <p:cNvPr id="12" name="">
             <a:extLst xmlns:a="http://schemas.openxmlformats.org/drawingml/2006/main">
               <a:ext uri="{FF2B5EF4-FFF2-40B4-BE49-F238E27FC236}">
-                <a16:creationId xmlns:a16="http://schemas.microsoft.com/office/drawing/2014/main" id="{F76A052F-3B4F-45F4-B031-11BD0EE4E27A}"/>
+                <a16:creationId xmlns:a16="http://schemas.microsoft.com/office/drawing/2014/main" id="{0B656A1A-3E2C-4808-A2C0-2D6E9E71F0F5}"/>
               </a:ext>
             </a:extLst>
           </p:cNvPr>
@@ -5027,7 +5027,7 @@
           <p:cNvPr id="13" name="">
             <a:extLst xmlns:a="http://schemas.openxmlformats.org/drawingml/2006/main">
               <a:ext uri="{FF2B5EF4-FFF2-40B4-BE49-F238E27FC236}">
-                <a16:creationId xmlns:a16="http://schemas.microsoft.com/office/drawing/2014/main" id="{5E946FAF-4F64-4240-9CC4-45E54687BB13}"/>
+                <a16:creationId xmlns:a16="http://schemas.microsoft.com/office/drawing/2014/main" id="{349FE50E-A544-49D0-8730-53653F5F768C}"/>
               </a:ext>
             </a:extLst>
           </p:cNvPr>
@@ -5060,7 +5060,7 @@
           <p:cNvPr id="14" name="">
             <a:extLst xmlns:a="http://schemas.openxmlformats.org/drawingml/2006/main">
               <a:ext uri="{FF2B5EF4-FFF2-40B4-BE49-F238E27FC236}">
-                <a16:creationId xmlns:a16="http://schemas.microsoft.com/office/drawing/2014/main" id="{66B7B31D-1B47-42F5-85FE-50BBC5BE9941}"/>
+                <a16:creationId xmlns:a16="http://schemas.microsoft.com/office/drawing/2014/main" id="{13D3566B-8CE6-419A-BC94-AA22E0A581A6}"/>
               </a:ext>
             </a:extLst>
           </p:cNvPr>
@@ -5093,7 +5093,7 @@
           <p:cNvPr id="15" name="">
             <a:extLst xmlns:a="http://schemas.openxmlformats.org/drawingml/2006/main">
               <a:ext uri="{FF2B5EF4-FFF2-40B4-BE49-F238E27FC236}">
-                <a16:creationId xmlns:a16="http://schemas.microsoft.com/office/drawing/2014/main" id="{02E03DF6-7EFE-4FCE-AF6F-4A698F1EE19C}"/>
+                <a16:creationId xmlns:a16="http://schemas.microsoft.com/office/drawing/2014/main" id="{0982828D-E30B-4770-B31E-3F56EC091097}"/>
               </a:ext>
             </a:extLst>
           </p:cNvPr>
@@ -5126,7 +5126,7 @@
           <p:cNvPr id="16" name="">
             <a:extLst xmlns:a="http://schemas.openxmlformats.org/drawingml/2006/main">
               <a:ext uri="{FF2B5EF4-FFF2-40B4-BE49-F238E27FC236}">
-                <a16:creationId xmlns:a16="http://schemas.microsoft.com/office/drawing/2014/main" id="{BA61AB1F-B46C-4A02-8F8C-137A33D6E6BE}"/>
+                <a16:creationId xmlns:a16="http://schemas.microsoft.com/office/drawing/2014/main" id="{EFD48C84-97F3-4FA1-B7BA-537CFE24806C}"/>
               </a:ext>
             </a:extLst>
           </p:cNvPr>
@@ -5159,7 +5159,7 @@
           <p:cNvPr id="17" name="">
             <a:extLst xmlns:a="http://schemas.openxmlformats.org/drawingml/2006/main">
               <a:ext uri="{FF2B5EF4-FFF2-40B4-BE49-F238E27FC236}">
-                <a16:creationId xmlns:a16="http://schemas.microsoft.com/office/drawing/2014/main" id="{E2C5CBDF-4693-4B0D-B96D-A4BF764C6BA5}"/>
+                <a16:creationId xmlns:a16="http://schemas.microsoft.com/office/drawing/2014/main" id="{9A20ADD3-C88C-4E23-8687-2AF605B8FDFB}"/>
               </a:ext>
             </a:extLst>
           </p:cNvPr>
@@ -5192,7 +5192,7 @@
           <p:cNvPr id="18" name="">
             <a:extLst xmlns:a="http://schemas.openxmlformats.org/drawingml/2006/main">
               <a:ext uri="{FF2B5EF4-FFF2-40B4-BE49-F238E27FC236}">
-                <a16:creationId xmlns:a16="http://schemas.microsoft.com/office/drawing/2014/main" id="{BE7C5AA4-D58B-4861-AE5B-64342AA76F26}"/>
+                <a16:creationId xmlns:a16="http://schemas.microsoft.com/office/drawing/2014/main" id="{319BEFE9-2126-4F18-9619-4CA21B1D2C1D}"/>
               </a:ext>
             </a:extLst>
           </p:cNvPr>
@@ -5225,7 +5225,7 @@
           <p:cNvPr id="19" name="">
             <a:extLst xmlns:a="http://schemas.openxmlformats.org/drawingml/2006/main">
               <a:ext uri="{FF2B5EF4-FFF2-40B4-BE49-F238E27FC236}">
-                <a16:creationId xmlns:a16="http://schemas.microsoft.com/office/drawing/2014/main" id="{7E08EF1F-137B-41CB-A610-DE59CA06D1CC}"/>
+                <a16:creationId xmlns:a16="http://schemas.microsoft.com/office/drawing/2014/main" id="{DA24C5DA-F18C-4B87-968E-BF17B616A066}"/>
               </a:ext>
             </a:extLst>
           </p:cNvPr>
@@ -5258,7 +5258,7 @@
           <p:cNvPr id="20" name="">
             <a:extLst xmlns:a="http://schemas.openxmlformats.org/drawingml/2006/main">
               <a:ext uri="{FF2B5EF4-FFF2-40B4-BE49-F238E27FC236}">
-                <a16:creationId xmlns:a16="http://schemas.microsoft.com/office/drawing/2014/main" id="{09714550-8588-4C46-AAFD-A135C3C0F4F2}"/>
+                <a16:creationId xmlns:a16="http://schemas.microsoft.com/office/drawing/2014/main" id="{6EA9ED61-F44E-41FA-B670-0403B4064A40}"/>
               </a:ext>
             </a:extLst>
           </p:cNvPr>
@@ -5291,7 +5291,7 @@
           <p:cNvPr id="21" name="">
             <a:extLst xmlns:a="http://schemas.openxmlformats.org/drawingml/2006/main">
               <a:ext uri="{FF2B5EF4-FFF2-40B4-BE49-F238E27FC236}">
-                <a16:creationId xmlns:a16="http://schemas.microsoft.com/office/drawing/2014/main" id="{A6142296-DAD0-414D-BD61-6EB81B073851}"/>
+                <a16:creationId xmlns:a16="http://schemas.microsoft.com/office/drawing/2014/main" id="{D626F9ED-887A-4169-8E4B-AA0A2B97CB0B}"/>
               </a:ext>
             </a:extLst>
           </p:cNvPr>
@@ -5324,7 +5324,7 @@
           <p:cNvPr id="22" name="">
             <a:extLst xmlns:a="http://schemas.openxmlformats.org/drawingml/2006/main">
               <a:ext uri="{FF2B5EF4-FFF2-40B4-BE49-F238E27FC236}">
-                <a16:creationId xmlns:a16="http://schemas.microsoft.com/office/drawing/2014/main" id="{9199B15C-C3EA-4364-BBD9-02BEF9B99CDC}"/>
+                <a16:creationId xmlns:a16="http://schemas.microsoft.com/office/drawing/2014/main" id="{4E11D2B9-A1A7-47E1-A02C-ECA1DB5D71FD}"/>
               </a:ext>
             </a:extLst>
           </p:cNvPr>
@@ -5374,7 +5374,7 @@
           <p:cNvPr id="23" name="">
             <a:extLst xmlns:a="http://schemas.openxmlformats.org/drawingml/2006/main">
               <a:ext uri="{FF2B5EF4-FFF2-40B4-BE49-F238E27FC236}">
-                <a16:creationId xmlns:a16="http://schemas.microsoft.com/office/drawing/2014/main" id="{2B5638C6-A843-4299-8B49-03A4F0B8AEF7}"/>
+                <a16:creationId xmlns:a16="http://schemas.microsoft.com/office/drawing/2014/main" id="{796F35F9-DE6B-40D0-8953-825F03A78E1C}"/>
               </a:ext>
             </a:extLst>
           </p:cNvPr>
@@ -5407,7 +5407,7 @@
           <p:cNvPr id="24" name="">
             <a:extLst xmlns:a="http://schemas.openxmlformats.org/drawingml/2006/main">
               <a:ext uri="{FF2B5EF4-FFF2-40B4-BE49-F238E27FC236}">
-                <a16:creationId xmlns:a16="http://schemas.microsoft.com/office/drawing/2014/main" id="{90D23569-ED71-4528-9CBF-5002632491D1}"/>
+                <a16:creationId xmlns:a16="http://schemas.microsoft.com/office/drawing/2014/main" id="{6832DB02-5190-404E-92C0-F6AE413E44DF}"/>
               </a:ext>
             </a:extLst>
           </p:cNvPr>
@@ -5440,7 +5440,7 @@
           <p:cNvPr id="25" name="">
             <a:extLst xmlns:a="http://schemas.openxmlformats.org/drawingml/2006/main">
               <a:ext uri="{FF2B5EF4-FFF2-40B4-BE49-F238E27FC236}">
-                <a16:creationId xmlns:a16="http://schemas.microsoft.com/office/drawing/2014/main" id="{D9D644EB-ED07-4F3E-BE42-BBA73937F632}"/>
+                <a16:creationId xmlns:a16="http://schemas.microsoft.com/office/drawing/2014/main" id="{A8211FB6-F817-44E4-BA34-294DD8E7B88F}"/>
               </a:ext>
             </a:extLst>
           </p:cNvPr>
@@ -5473,7 +5473,7 @@
           <p:cNvPr id="26" name="">
             <a:extLst xmlns:a="http://schemas.openxmlformats.org/drawingml/2006/main">
               <a:ext uri="{FF2B5EF4-FFF2-40B4-BE49-F238E27FC236}">
-                <a16:creationId xmlns:a16="http://schemas.microsoft.com/office/drawing/2014/main" id="{1B65FED2-8D2F-4430-A97C-86F4040EBADC}"/>
+                <a16:creationId xmlns:a16="http://schemas.microsoft.com/office/drawing/2014/main" id="{0007927D-C3C6-4B5B-8D03-3246A3CC4020}"/>
               </a:ext>
             </a:extLst>
           </p:cNvPr>
@@ -5506,7 +5506,7 @@
           <p:cNvPr id="27" name="">
             <a:extLst xmlns:a="http://schemas.openxmlformats.org/drawingml/2006/main">
               <a:ext uri="{FF2B5EF4-FFF2-40B4-BE49-F238E27FC236}">
-                <a16:creationId xmlns:a16="http://schemas.microsoft.com/office/drawing/2014/main" id="{E8E2E1FC-B52C-4C04-8444-B8F6AD483312}"/>
+                <a16:creationId xmlns:a16="http://schemas.microsoft.com/office/drawing/2014/main" id="{1FC7D17D-1D03-41EB-AAE9-05EBAAC10F72}"/>
               </a:ext>
             </a:extLst>
           </p:cNvPr>
@@ -5539,7 +5539,7 @@
           <p:cNvPr id="28" name="">
             <a:extLst xmlns:a="http://schemas.openxmlformats.org/drawingml/2006/main">
               <a:ext uri="{FF2B5EF4-FFF2-40B4-BE49-F238E27FC236}">
-                <a16:creationId xmlns:a16="http://schemas.microsoft.com/office/drawing/2014/main" id="{6FED4484-A8C7-433E-8C68-65182ABE9311}"/>
+                <a16:creationId xmlns:a16="http://schemas.microsoft.com/office/drawing/2014/main" id="{F7B0958B-C00A-48C4-9BA8-DF7DF7372C12}"/>
               </a:ext>
             </a:extLst>
           </p:cNvPr>
@@ -5572,7 +5572,7 @@
           <p:cNvPr id="29" name="">
             <a:extLst xmlns:a="http://schemas.openxmlformats.org/drawingml/2006/main">
               <a:ext uri="{FF2B5EF4-FFF2-40B4-BE49-F238E27FC236}">
-                <a16:creationId xmlns:a16="http://schemas.microsoft.com/office/drawing/2014/main" id="{6E81C42E-8094-4D6B-85B0-081DF1125718}"/>
+                <a16:creationId xmlns:a16="http://schemas.microsoft.com/office/drawing/2014/main" id="{C411CE38-25DD-4212-BDB1-B6A0E439B066}"/>
               </a:ext>
             </a:extLst>
           </p:cNvPr>
@@ -5605,7 +5605,7 @@
           <p:cNvPr id="30" name="">
             <a:extLst xmlns:a="http://schemas.openxmlformats.org/drawingml/2006/main">
               <a:ext uri="{FF2B5EF4-FFF2-40B4-BE49-F238E27FC236}">
-                <a16:creationId xmlns:a16="http://schemas.microsoft.com/office/drawing/2014/main" id="{1A4DA638-CD99-4AB0-A549-820752E89F89}"/>
+                <a16:creationId xmlns:a16="http://schemas.microsoft.com/office/drawing/2014/main" id="{AA3AEA55-4A3D-4352-84C6-A1F7DF3DD28F}"/>
               </a:ext>
             </a:extLst>
           </p:cNvPr>
@@ -5638,7 +5638,7 @@
           <p:cNvPr id="31" name="">
             <a:extLst xmlns:a="http://schemas.openxmlformats.org/drawingml/2006/main">
               <a:ext uri="{FF2B5EF4-FFF2-40B4-BE49-F238E27FC236}">
-                <a16:creationId xmlns:a16="http://schemas.microsoft.com/office/drawing/2014/main" id="{BDB5DDAF-2CFF-4CD7-B9AD-7CA65384C2DB}"/>
+                <a16:creationId xmlns:a16="http://schemas.microsoft.com/office/drawing/2014/main" id="{FCC4F5A2-1990-4CAE-8900-7F819EFF3E36}"/>
               </a:ext>
             </a:extLst>
           </p:cNvPr>
@@ -5671,7 +5671,7 @@
           <p:cNvPr id="32" name="">
             <a:extLst xmlns:a="http://schemas.openxmlformats.org/drawingml/2006/main">
               <a:ext uri="{FF2B5EF4-FFF2-40B4-BE49-F238E27FC236}">
-                <a16:creationId xmlns:a16="http://schemas.microsoft.com/office/drawing/2014/main" id="{02770D85-AD2E-46A0-8BD7-149F4454BA7D}"/>
+                <a16:creationId xmlns:a16="http://schemas.microsoft.com/office/drawing/2014/main" id="{4FD07B38-C17B-4C26-929A-6B649F3C1782}"/>
               </a:ext>
             </a:extLst>
           </p:cNvPr>
@@ -5704,7 +5704,7 @@
           <p:cNvPr id="33" name="">
             <a:extLst xmlns:a="http://schemas.openxmlformats.org/drawingml/2006/main">
               <a:ext uri="{FF2B5EF4-FFF2-40B4-BE49-F238E27FC236}">
-                <a16:creationId xmlns:a16="http://schemas.microsoft.com/office/drawing/2014/main" id="{F3C42BDA-7E00-43E8-ADF5-7DC05627B8FD}"/>
+                <a16:creationId xmlns:a16="http://schemas.microsoft.com/office/drawing/2014/main" id="{BC7D29D6-18C1-4E43-B351-A64858CBC55A}"/>
               </a:ext>
             </a:extLst>
           </p:cNvPr>
@@ -5737,7 +5737,7 @@
           <p:cNvPr id="34" name="">
             <a:extLst xmlns:a="http://schemas.openxmlformats.org/drawingml/2006/main">
               <a:ext uri="{FF2B5EF4-FFF2-40B4-BE49-F238E27FC236}">
-                <a16:creationId xmlns:a16="http://schemas.microsoft.com/office/drawing/2014/main" id="{EAB8DFD2-C79D-4984-B582-FCAE469D301F}"/>
+                <a16:creationId xmlns:a16="http://schemas.microsoft.com/office/drawing/2014/main" id="{DA2DBCA4-1558-4032-AE82-153E9B3249F2}"/>
               </a:ext>
             </a:extLst>
           </p:cNvPr>
@@ -5770,7 +5770,7 @@
           <p:cNvPr id="35" name="">
             <a:extLst xmlns:a="http://schemas.openxmlformats.org/drawingml/2006/main">
               <a:ext uri="{FF2B5EF4-FFF2-40B4-BE49-F238E27FC236}">
-                <a16:creationId xmlns:a16="http://schemas.microsoft.com/office/drawing/2014/main" id="{9BA9E908-FC25-41D6-9C02-A9487ECF268C}"/>
+                <a16:creationId xmlns:a16="http://schemas.microsoft.com/office/drawing/2014/main" id="{4B395BB9-D5CD-44DE-99F6-5C8D73E1A153}"/>
               </a:ext>
             </a:extLst>
           </p:cNvPr>
@@ -5803,7 +5803,7 @@
           <p:cNvPr id="36" name="">
             <a:extLst xmlns:a="http://schemas.openxmlformats.org/drawingml/2006/main">
               <a:ext uri="{FF2B5EF4-FFF2-40B4-BE49-F238E27FC236}">
-                <a16:creationId xmlns:a16="http://schemas.microsoft.com/office/drawing/2014/main" id="{E2E7AB89-34A6-485D-A6AB-A66569752839}"/>
+                <a16:creationId xmlns:a16="http://schemas.microsoft.com/office/drawing/2014/main" id="{04BB8F4D-352C-4613-A77B-17D44B3142DB}"/>
               </a:ext>
             </a:extLst>
           </p:cNvPr>
@@ -5836,7 +5836,7 @@
           <p:cNvPr id="37" name="">
             <a:extLst xmlns:a="http://schemas.openxmlformats.org/drawingml/2006/main">
               <a:ext uri="{FF2B5EF4-FFF2-40B4-BE49-F238E27FC236}">
-                <a16:creationId xmlns:a16="http://schemas.microsoft.com/office/drawing/2014/main" id="{55DD0A83-518F-404E-AE54-6260D0C87359}"/>
+                <a16:creationId xmlns:a16="http://schemas.microsoft.com/office/drawing/2014/main" id="{49E99031-37ED-45F2-AA66-C9F6C662E17E}"/>
               </a:ext>
             </a:extLst>
           </p:cNvPr>
@@ -5869,7 +5869,7 @@
           <p:cNvPr id="38" name="">
             <a:extLst xmlns:a="http://schemas.openxmlformats.org/drawingml/2006/main">
               <a:ext uri="{FF2B5EF4-FFF2-40B4-BE49-F238E27FC236}">
-                <a16:creationId xmlns:a16="http://schemas.microsoft.com/office/drawing/2014/main" id="{E1A711C9-E7B8-4A9F-8A13-79A8F50C663B}"/>
+                <a16:creationId xmlns:a16="http://schemas.microsoft.com/office/drawing/2014/main" id="{8743BE3B-207F-485A-B5A7-DAE532C54359}"/>
               </a:ext>
             </a:extLst>
           </p:cNvPr>
@@ -5902,7 +5902,7 @@
           <p:cNvPr id="39" name="">
             <a:extLst xmlns:a="http://schemas.openxmlformats.org/drawingml/2006/main">
               <a:ext uri="{FF2B5EF4-FFF2-40B4-BE49-F238E27FC236}">
-                <a16:creationId xmlns:a16="http://schemas.microsoft.com/office/drawing/2014/main" id="{852E551D-C0C9-4881-9BD5-2277C6E55646}"/>
+                <a16:creationId xmlns:a16="http://schemas.microsoft.com/office/drawing/2014/main" id="{3EA83A2B-7BEA-4C2E-9DD3-B68B78389B4E}"/>
               </a:ext>
             </a:extLst>
           </p:cNvPr>
@@ -5935,7 +5935,7 @@
           <p:cNvPr id="40" name="">
             <a:extLst xmlns:a="http://schemas.openxmlformats.org/drawingml/2006/main">
               <a:ext uri="{FF2B5EF4-FFF2-40B4-BE49-F238E27FC236}">
-                <a16:creationId xmlns:a16="http://schemas.microsoft.com/office/drawing/2014/main" id="{DBED291C-25DA-44E2-B6C5-57B9CB920596}"/>
+                <a16:creationId xmlns:a16="http://schemas.microsoft.com/office/drawing/2014/main" id="{1B409222-C79D-4541-AF8A-6338AFB9AAEC}"/>
               </a:ext>
             </a:extLst>
           </p:cNvPr>
@@ -5968,7 +5968,7 @@
           <p:cNvPr id="41" name="">
             <a:extLst xmlns:a="http://schemas.openxmlformats.org/drawingml/2006/main">
               <a:ext uri="{FF2B5EF4-FFF2-40B4-BE49-F238E27FC236}">
-                <a16:creationId xmlns:a16="http://schemas.microsoft.com/office/drawing/2014/main" id="{E95BD4EE-C7E3-48DD-A9F2-872E7FB80751}"/>
+                <a16:creationId xmlns:a16="http://schemas.microsoft.com/office/drawing/2014/main" id="{764A7981-2632-4858-A6AF-345384203B78}"/>
               </a:ext>
             </a:extLst>
           </p:cNvPr>
@@ -6001,7 +6001,7 @@
           <p:cNvPr id="42" name="">
             <a:extLst xmlns:a="http://schemas.openxmlformats.org/drawingml/2006/main">
               <a:ext uri="{FF2B5EF4-FFF2-40B4-BE49-F238E27FC236}">
-                <a16:creationId xmlns:a16="http://schemas.microsoft.com/office/drawing/2014/main" id="{65FDE8A8-CE7B-479E-B802-740EAC90824C}"/>
+                <a16:creationId xmlns:a16="http://schemas.microsoft.com/office/drawing/2014/main" id="{2056C4C4-47FB-451C-9CDB-C5019063667A}"/>
               </a:ext>
             </a:extLst>
           </p:cNvPr>
@@ -6051,7 +6051,7 @@
           <p:cNvPr id="43" name="">
             <a:extLst xmlns:a="http://schemas.openxmlformats.org/drawingml/2006/main">
               <a:ext uri="{FF2B5EF4-FFF2-40B4-BE49-F238E27FC236}">
-                <a16:creationId xmlns:a16="http://schemas.microsoft.com/office/drawing/2014/main" id="{B65C0F57-0D02-4EC5-B839-04C0267994BB}"/>
+                <a16:creationId xmlns:a16="http://schemas.microsoft.com/office/drawing/2014/main" id="{7096E0C5-B590-44ED-9091-83A4545F78EC}"/>
               </a:ext>
             </a:extLst>
           </p:cNvPr>
@@ -6101,7 +6101,7 @@
           <p:cNvPr id="44" name="">
             <a:extLst xmlns:a="http://schemas.openxmlformats.org/drawingml/2006/main">
               <a:ext uri="{FF2B5EF4-FFF2-40B4-BE49-F238E27FC236}">
-                <a16:creationId xmlns:a16="http://schemas.microsoft.com/office/drawing/2014/main" id="{FF322C8F-5A92-4A50-9F6F-84A804050850}"/>
+                <a16:creationId xmlns:a16="http://schemas.microsoft.com/office/drawing/2014/main" id="{EAE2C797-3DE6-4A56-B03F-DF2285B93D85}"/>
               </a:ext>
             </a:extLst>
           </p:cNvPr>
@@ -6151,7 +6151,7 @@
           <p:cNvPr id="45" name="">
             <a:extLst xmlns:a="http://schemas.openxmlformats.org/drawingml/2006/main">
               <a:ext uri="{FF2B5EF4-FFF2-40B4-BE49-F238E27FC236}">
-                <a16:creationId xmlns:a16="http://schemas.microsoft.com/office/drawing/2014/main" id="{5EABCFE0-39C1-45FE-86EE-AD7899453B93}"/>
+                <a16:creationId xmlns:a16="http://schemas.microsoft.com/office/drawing/2014/main" id="{939783B8-7A6B-4021-9A86-D79943A5D3F0}"/>
               </a:ext>
             </a:extLst>
           </p:cNvPr>
@@ -6201,7 +6201,7 @@
           <p:cNvPr id="46" name="">
             <a:extLst xmlns:a="http://schemas.openxmlformats.org/drawingml/2006/main">
               <a:ext uri="{FF2B5EF4-FFF2-40B4-BE49-F238E27FC236}">
-                <a16:creationId xmlns:a16="http://schemas.microsoft.com/office/drawing/2014/main" id="{ACD39C50-E04F-44D5-9CFB-ED4BCC046D9A}"/>
+                <a16:creationId xmlns:a16="http://schemas.microsoft.com/office/drawing/2014/main" id="{B5903A4D-F4A6-4567-8578-78146E45A30F}"/>
               </a:ext>
             </a:extLst>
           </p:cNvPr>
@@ -6251,7 +6251,7 @@
           <p:cNvPr id="47" name="">
             <a:extLst xmlns:a="http://schemas.openxmlformats.org/drawingml/2006/main">
               <a:ext uri="{FF2B5EF4-FFF2-40B4-BE49-F238E27FC236}">
-                <a16:creationId xmlns:a16="http://schemas.microsoft.com/office/drawing/2014/main" id="{158E2EC5-DFEF-4039-998B-1489DCAEFDBC}"/>
+                <a16:creationId xmlns:a16="http://schemas.microsoft.com/office/drawing/2014/main" id="{3491E695-B463-4B5F-822F-F2C4D8106049}"/>
               </a:ext>
             </a:extLst>
           </p:cNvPr>
@@ -6301,7 +6301,7 @@
           <p:cNvPr id="48" name="">
             <a:extLst xmlns:a="http://schemas.openxmlformats.org/drawingml/2006/main">
               <a:ext uri="{FF2B5EF4-FFF2-40B4-BE49-F238E27FC236}">
-                <a16:creationId xmlns:a16="http://schemas.microsoft.com/office/drawing/2014/main" id="{39D7C570-CB20-4441-BA59-A125A5D502B3}"/>
+                <a16:creationId xmlns:a16="http://schemas.microsoft.com/office/drawing/2014/main" id="{2431B453-756F-48E8-B6BD-C92B4157373D}"/>
               </a:ext>
             </a:extLst>
           </p:cNvPr>
@@ -6351,7 +6351,7 @@
           <p:cNvPr id="49" name="">
             <a:extLst xmlns:a="http://schemas.openxmlformats.org/drawingml/2006/main">
               <a:ext uri="{FF2B5EF4-FFF2-40B4-BE49-F238E27FC236}">
-                <a16:creationId xmlns:a16="http://schemas.microsoft.com/office/drawing/2014/main" id="{32930FBD-6E68-4E99-8531-0EFB1101F5BB}"/>
+                <a16:creationId xmlns:a16="http://schemas.microsoft.com/office/drawing/2014/main" id="{32ADC165-5507-402C-A6CC-99888EC0CB17}"/>
               </a:ext>
             </a:extLst>
           </p:cNvPr>
@@ -6399,7 +6399,7 @@
     </p:spTree>
     <p:extLst>
       <p:ext uri="{BB962C8B-B14F-4D97-AF65-F5344CB8AC3E}">
-        <p14:creationId xmlns:p14="http://schemas.microsoft.com/office/powerpoint/2010/main" val="1825786278"/>
+        <p14:creationId xmlns:p14="http://schemas.microsoft.com/office/powerpoint/2010/main" val="452014210"/>
       </p:ext>
     </p:extLst>
   </p:cSld>
@@ -6430,7 +6430,7 @@
           <p:cNvPr id="27" name="">
             <a:extLst xmlns:a="http://schemas.openxmlformats.org/drawingml/2006/main">
               <a:ext uri="{FF2B5EF4-FFF2-40B4-BE49-F238E27FC236}">
-                <a16:creationId xmlns:a16="http://schemas.microsoft.com/office/drawing/2014/main" id="{72F3FD1D-DF7D-4A8D-9EED-BF41F414F9FD}"/>
+                <a16:creationId xmlns:a16="http://schemas.microsoft.com/office/drawing/2014/main" id="{A9F1E1F0-71E4-4D2A-86C7-62044041296D}"/>
               </a:ext>
             </a:extLst>
           </p:cNvPr>
@@ -6463,7 +6463,7 @@
           <p:cNvPr id="2" name="">
             <a:extLst xmlns:a="http://schemas.openxmlformats.org/drawingml/2006/main">
               <a:ext uri="{FF2B5EF4-FFF2-40B4-BE49-F238E27FC236}">
-                <a16:creationId xmlns:a16="http://schemas.microsoft.com/office/drawing/2014/main" id="{3AB68E30-D75A-407A-A49C-81DCE3DC21EB}"/>
+                <a16:creationId xmlns:a16="http://schemas.microsoft.com/office/drawing/2014/main" id="{A85056C9-EBCE-4113-B353-627AA1D09210}"/>
               </a:ext>
             </a:extLst>
           </p:cNvPr>
@@ -6513,7 +6513,7 @@
           <p:cNvPr id="3" name="">
             <a:extLst xmlns:a="http://schemas.openxmlformats.org/drawingml/2006/main">
               <a:ext uri="{FF2B5EF4-FFF2-40B4-BE49-F238E27FC236}">
-                <a16:creationId xmlns:a16="http://schemas.microsoft.com/office/drawing/2014/main" id="{0C0468C9-4A23-44B1-945F-198F2FA7C84C}"/>
+                <a16:creationId xmlns:a16="http://schemas.microsoft.com/office/drawing/2014/main" id="{42935723-3966-46F4-94B1-25D1C17DF02F}"/>
               </a:ext>
             </a:extLst>
           </p:cNvPr>
@@ -6563,7 +6563,7 @@
           <p:cNvPr id="4" name="">
             <a:extLst xmlns:a="http://schemas.openxmlformats.org/drawingml/2006/main">
               <a:ext uri="{FF2B5EF4-FFF2-40B4-BE49-F238E27FC236}">
-                <a16:creationId xmlns:a16="http://schemas.microsoft.com/office/drawing/2014/main" id="{68B21956-79C0-4394-9067-8A1FF62B4740}"/>
+                <a16:creationId xmlns:a16="http://schemas.microsoft.com/office/drawing/2014/main" id="{18150C35-B9FB-4A61-B1FD-959CB45F5E54}"/>
               </a:ext>
             </a:extLst>
           </p:cNvPr>
@@ -6613,7 +6613,7 @@
           <p:cNvPr id="5" name="">
             <a:extLst xmlns:a="http://schemas.openxmlformats.org/drawingml/2006/main">
               <a:ext uri="{FF2B5EF4-FFF2-40B4-BE49-F238E27FC236}">
-                <a16:creationId xmlns:a16="http://schemas.microsoft.com/office/drawing/2014/main" id="{39FDAF68-87D2-4E49-86F3-C5B4387A4109}"/>
+                <a16:creationId xmlns:a16="http://schemas.microsoft.com/office/drawing/2014/main" id="{0412B314-EC81-445C-8F11-924D0ACE3149}"/>
               </a:ext>
             </a:extLst>
           </p:cNvPr>
@@ -6644,7 +6644,7 @@
           <p:cNvPr id="6" name="">
             <a:extLst xmlns:a="http://schemas.openxmlformats.org/drawingml/2006/main">
               <a:ext uri="{FF2B5EF4-FFF2-40B4-BE49-F238E27FC236}">
-                <a16:creationId xmlns:a16="http://schemas.microsoft.com/office/drawing/2014/main" id="{569CA985-E0CF-49B3-BF17-E8FD219191A4}"/>
+                <a16:creationId xmlns:a16="http://schemas.microsoft.com/office/drawing/2014/main" id="{0187933C-339F-42A1-B95A-A66189374D89}"/>
               </a:ext>
             </a:extLst>
           </p:cNvPr>
@@ -6694,7 +6694,7 @@
           <p:cNvPr id="7" name="">
             <a:extLst xmlns:a="http://schemas.openxmlformats.org/drawingml/2006/main">
               <a:ext uri="{FF2B5EF4-FFF2-40B4-BE49-F238E27FC236}">
-                <a16:creationId xmlns:a16="http://schemas.microsoft.com/office/drawing/2014/main" id="{D1F131E7-305B-42FD-BA75-6868962830BA}"/>
+                <a16:creationId xmlns:a16="http://schemas.microsoft.com/office/drawing/2014/main" id="{E4B6FC17-1289-48D9-BAA7-540455CE88C7}"/>
               </a:ext>
             </a:extLst>
           </p:cNvPr>
@@ -6744,7 +6744,7 @@
           <p:cNvPr id="8" name="">
             <a:extLst xmlns:a="http://schemas.openxmlformats.org/drawingml/2006/main">
               <a:ext uri="{FF2B5EF4-FFF2-40B4-BE49-F238E27FC236}">
-                <a16:creationId xmlns:a16="http://schemas.microsoft.com/office/drawing/2014/main" id="{42FEBDAC-A8EF-4CA6-8A63-DB6714600EBC}"/>
+                <a16:creationId xmlns:a16="http://schemas.microsoft.com/office/drawing/2014/main" id="{5D91963D-F051-47F2-91DC-5A8B4AC6CEA6}"/>
               </a:ext>
             </a:extLst>
           </p:cNvPr>
@@ -6777,7 +6777,7 @@
           <p:cNvPr id="9" name="">
             <a:extLst xmlns:a="http://schemas.openxmlformats.org/drawingml/2006/main">
               <a:ext uri="{FF2B5EF4-FFF2-40B4-BE49-F238E27FC236}">
-                <a16:creationId xmlns:a16="http://schemas.microsoft.com/office/drawing/2014/main" id="{237DBEBC-83E8-480F-B6EF-C0F4D0C2AD2A}"/>
+                <a16:creationId xmlns:a16="http://schemas.microsoft.com/office/drawing/2014/main" id="{33D7E748-CD87-4D78-9D42-3012EB3E01F7}"/>
               </a:ext>
             </a:extLst>
           </p:cNvPr>
@@ -6827,7 +6827,7 @@
           <p:cNvPr id="10" name="">
             <a:extLst xmlns:a="http://schemas.openxmlformats.org/drawingml/2006/main">
               <a:ext uri="{FF2B5EF4-FFF2-40B4-BE49-F238E27FC236}">
-                <a16:creationId xmlns:a16="http://schemas.microsoft.com/office/drawing/2014/main" id="{AD561A4F-0109-4D85-9F11-B9391D26C2C0}"/>
+                <a16:creationId xmlns:a16="http://schemas.microsoft.com/office/drawing/2014/main" id="{3AFCF36C-9FDB-4550-B1D8-A396E4DD4039}"/>
               </a:ext>
             </a:extLst>
           </p:cNvPr>
@@ -6860,7 +6860,7 @@
           <p:cNvPr id="11" name="">
             <a:extLst xmlns:a="http://schemas.openxmlformats.org/drawingml/2006/main">
               <a:ext uri="{FF2B5EF4-FFF2-40B4-BE49-F238E27FC236}">
-                <a16:creationId xmlns:a16="http://schemas.microsoft.com/office/drawing/2014/main" id="{EB79134F-1C6C-41B0-9C67-7AE0DBF46763}"/>
+                <a16:creationId xmlns:a16="http://schemas.microsoft.com/office/drawing/2014/main" id="{CD749514-E40B-4332-95C0-850AB868E916}"/>
               </a:ext>
             </a:extLst>
           </p:cNvPr>
@@ -6910,7 +6910,7 @@
           <p:cNvPr id="12" name="">
             <a:extLst xmlns:a="http://schemas.openxmlformats.org/drawingml/2006/main">
               <a:ext uri="{FF2B5EF4-FFF2-40B4-BE49-F238E27FC236}">
-                <a16:creationId xmlns:a16="http://schemas.microsoft.com/office/drawing/2014/main" id="{4E6373C1-FC66-4339-9EBE-0ADC78921B6D}"/>
+                <a16:creationId xmlns:a16="http://schemas.microsoft.com/office/drawing/2014/main" id="{F4683211-94BD-4BAD-B55F-AE2B9A1B8FF9}"/>
               </a:ext>
             </a:extLst>
           </p:cNvPr>
@@ -6945,7 +6945,7 @@
           <p:cNvPr id="13" name="">
             <a:extLst xmlns:a="http://schemas.openxmlformats.org/drawingml/2006/main">
               <a:ext uri="{FF2B5EF4-FFF2-40B4-BE49-F238E27FC236}">
-                <a16:creationId xmlns:a16="http://schemas.microsoft.com/office/drawing/2014/main" id="{081EEE69-C465-47A0-AE84-23BE33551390}"/>
+                <a16:creationId xmlns:a16="http://schemas.microsoft.com/office/drawing/2014/main" id="{ED77BA7A-8771-462B-A43A-0592B647D848}"/>
               </a:ext>
             </a:extLst>
           </p:cNvPr>
@@ -6995,7 +6995,7 @@
           <p:cNvPr id="14" name="">
             <a:extLst xmlns:a="http://schemas.openxmlformats.org/drawingml/2006/main">
               <a:ext uri="{FF2B5EF4-FFF2-40B4-BE49-F238E27FC236}">
-                <a16:creationId xmlns:a16="http://schemas.microsoft.com/office/drawing/2014/main" id="{2336ED69-5D6C-47FC-82E0-AB29DB060EB1}"/>
+                <a16:creationId xmlns:a16="http://schemas.microsoft.com/office/drawing/2014/main" id="{85FFA10B-D063-4F49-B360-77B047783ACC}"/>
               </a:ext>
             </a:extLst>
           </p:cNvPr>
@@ -7045,7 +7045,7 @@
           <p:cNvPr id="15" name="">
             <a:extLst xmlns:a="http://schemas.openxmlformats.org/drawingml/2006/main">
               <a:ext uri="{FF2B5EF4-FFF2-40B4-BE49-F238E27FC236}">
-                <a16:creationId xmlns:a16="http://schemas.microsoft.com/office/drawing/2014/main" id="{68A53BEF-0313-4AAA-B31D-FBE901608879}"/>
+                <a16:creationId xmlns:a16="http://schemas.microsoft.com/office/drawing/2014/main" id="{5C89F9EC-06CF-4460-B1A4-7D08AC57B44F}"/>
               </a:ext>
             </a:extLst>
           </p:cNvPr>
@@ -7080,7 +7080,7 @@
           <p:cNvPr id="16" name="">
             <a:extLst xmlns:a="http://schemas.openxmlformats.org/drawingml/2006/main">
               <a:ext uri="{FF2B5EF4-FFF2-40B4-BE49-F238E27FC236}">
-                <a16:creationId xmlns:a16="http://schemas.microsoft.com/office/drawing/2014/main" id="{8F53C932-6E53-4B06-B416-6CE937537EA4}"/>
+                <a16:creationId xmlns:a16="http://schemas.microsoft.com/office/drawing/2014/main" id="{9025FE4A-FB82-4D79-9522-653790E90EF8}"/>
               </a:ext>
             </a:extLst>
           </p:cNvPr>
@@ -7130,7 +7130,7 @@
           <p:cNvPr id="17" name="">
             <a:extLst xmlns:a="http://schemas.openxmlformats.org/drawingml/2006/main">
               <a:ext uri="{FF2B5EF4-FFF2-40B4-BE49-F238E27FC236}">
-                <a16:creationId xmlns:a16="http://schemas.microsoft.com/office/drawing/2014/main" id="{3F400D01-6EAD-4955-BC92-39AC62CE8FBB}"/>
+                <a16:creationId xmlns:a16="http://schemas.microsoft.com/office/drawing/2014/main" id="{D0914FF3-9DB2-4D4B-AB36-30B84E159AE9}"/>
               </a:ext>
             </a:extLst>
           </p:cNvPr>
@@ -7180,7 +7180,7 @@
           <p:cNvPr id="18" name="">
             <a:extLst xmlns:a="http://schemas.openxmlformats.org/drawingml/2006/main">
               <a:ext uri="{FF2B5EF4-FFF2-40B4-BE49-F238E27FC236}">
-                <a16:creationId xmlns:a16="http://schemas.microsoft.com/office/drawing/2014/main" id="{C57BFA6D-68F6-41F0-97F4-48F9C343BE7E}"/>
+                <a16:creationId xmlns:a16="http://schemas.microsoft.com/office/drawing/2014/main" id="{34D552D0-1A3F-47A7-A868-89F047876395}"/>
               </a:ext>
             </a:extLst>
           </p:cNvPr>
@@ -7215,7 +7215,7 @@
           <p:cNvPr id="19" name="">
             <a:extLst xmlns:a="http://schemas.openxmlformats.org/drawingml/2006/main">
               <a:ext uri="{FF2B5EF4-FFF2-40B4-BE49-F238E27FC236}">
-                <a16:creationId xmlns:a16="http://schemas.microsoft.com/office/drawing/2014/main" id="{C89DFC25-CD5C-4EB7-B9B2-DC1D85809511}"/>
+                <a16:creationId xmlns:a16="http://schemas.microsoft.com/office/drawing/2014/main" id="{906B0A23-0D7A-4271-86C8-14893D651FA0}"/>
               </a:ext>
             </a:extLst>
           </p:cNvPr>
@@ -7265,7 +7265,7 @@
           <p:cNvPr id="20" name="">
             <a:extLst xmlns:a="http://schemas.openxmlformats.org/drawingml/2006/main">
               <a:ext uri="{FF2B5EF4-FFF2-40B4-BE49-F238E27FC236}">
-                <a16:creationId xmlns:a16="http://schemas.microsoft.com/office/drawing/2014/main" id="{6EC8C529-F1AE-401B-9996-4415597CAB45}"/>
+                <a16:creationId xmlns:a16="http://schemas.microsoft.com/office/drawing/2014/main" id="{58BB0033-72CC-4783-AB3C-6E9EF81A890E}"/>
               </a:ext>
             </a:extLst>
           </p:cNvPr>
@@ -7315,7 +7315,7 @@
           <p:cNvPr id="21" name="">
             <a:extLst xmlns:a="http://schemas.openxmlformats.org/drawingml/2006/main">
               <a:ext uri="{FF2B5EF4-FFF2-40B4-BE49-F238E27FC236}">
-                <a16:creationId xmlns:a16="http://schemas.microsoft.com/office/drawing/2014/main" id="{5C1FD638-493B-4AE1-AFA5-0EC6D54A7AA8}"/>
+                <a16:creationId xmlns:a16="http://schemas.microsoft.com/office/drawing/2014/main" id="{A9BC9E5C-8A7D-4E38-A560-F6B08A65B56E}"/>
               </a:ext>
             </a:extLst>
           </p:cNvPr>
@@ -7350,7 +7350,7 @@
           <p:cNvPr id="22" name="">
             <a:extLst xmlns:a="http://schemas.openxmlformats.org/drawingml/2006/main">
               <a:ext uri="{FF2B5EF4-FFF2-40B4-BE49-F238E27FC236}">
-                <a16:creationId xmlns:a16="http://schemas.microsoft.com/office/drawing/2014/main" id="{1EC0DA1F-3DE0-4A17-96C7-778BA4D64B72}"/>
+                <a16:creationId xmlns:a16="http://schemas.microsoft.com/office/drawing/2014/main" id="{4145F85A-747A-4706-B88B-707B6CC34049}"/>
               </a:ext>
             </a:extLst>
           </p:cNvPr>
@@ -7400,7 +7400,7 @@
           <p:cNvPr id="23" name="">
             <a:extLst xmlns:a="http://schemas.openxmlformats.org/drawingml/2006/main">
               <a:ext uri="{FF2B5EF4-FFF2-40B4-BE49-F238E27FC236}">
-                <a16:creationId xmlns:a16="http://schemas.microsoft.com/office/drawing/2014/main" id="{2729442C-8B18-4111-8330-14982604D94B}"/>
+                <a16:creationId xmlns:a16="http://schemas.microsoft.com/office/drawing/2014/main" id="{6893A9D6-062A-4881-A351-32A2CD0E0055}"/>
               </a:ext>
             </a:extLst>
           </p:cNvPr>
@@ -7450,7 +7450,7 @@
           <p:cNvPr id="24" name="">
             <a:extLst xmlns:a="http://schemas.openxmlformats.org/drawingml/2006/main">
               <a:ext uri="{FF2B5EF4-FFF2-40B4-BE49-F238E27FC236}">
-                <a16:creationId xmlns:a16="http://schemas.microsoft.com/office/drawing/2014/main" id="{C3B24938-A552-4AF6-A198-2E7FF25D6C1A}"/>
+                <a16:creationId xmlns:a16="http://schemas.microsoft.com/office/drawing/2014/main" id="{563D4CA9-EA3D-4308-A086-A7AEFF64B49B}"/>
               </a:ext>
             </a:extLst>
           </p:cNvPr>
@@ -7500,7 +7500,7 @@
           <p:cNvPr id="25" name="">
             <a:extLst xmlns:a="http://schemas.openxmlformats.org/drawingml/2006/main">
               <a:ext uri="{FF2B5EF4-FFF2-40B4-BE49-F238E27FC236}">
-                <a16:creationId xmlns:a16="http://schemas.microsoft.com/office/drawing/2014/main" id="{DDAB886A-2AAE-4F90-A9C0-B3072B904C44}"/>
+                <a16:creationId xmlns:a16="http://schemas.microsoft.com/office/drawing/2014/main" id="{05BA4122-EBAD-43FB-BF47-E09F897C5B07}"/>
               </a:ext>
             </a:extLst>
           </p:cNvPr>
@@ -7550,7 +7550,7 @@
           <p:cNvPr id="26" name="">
             <a:extLst xmlns:a="http://schemas.openxmlformats.org/drawingml/2006/main">
               <a:ext uri="{FF2B5EF4-FFF2-40B4-BE49-F238E27FC236}">
-                <a16:creationId xmlns:a16="http://schemas.microsoft.com/office/drawing/2014/main" id="{5369C5CC-B8B1-4902-B9FC-AE83FA0633E4}"/>
+                <a16:creationId xmlns:a16="http://schemas.microsoft.com/office/drawing/2014/main" id="{E933DB4B-AEF1-44C4-8E11-879EA2C7F6C3}"/>
               </a:ext>
             </a:extLst>
           </p:cNvPr>
@@ -7598,7 +7598,7 @@
     </p:spTree>
     <p:extLst>
       <p:ext uri="{BB962C8B-B14F-4D97-AF65-F5344CB8AC3E}">
-        <p14:creationId xmlns:p14="http://schemas.microsoft.com/office/powerpoint/2010/main" val="993941427"/>
+        <p14:creationId xmlns:p14="http://schemas.microsoft.com/office/powerpoint/2010/main" val="1955752524"/>
       </p:ext>
     </p:extLst>
   </p:cSld>
@@ -7629,7 +7629,7 @@
           <p:cNvPr id="27" name="">
             <a:extLst xmlns:a="http://schemas.openxmlformats.org/drawingml/2006/main">
               <a:ext uri="{FF2B5EF4-FFF2-40B4-BE49-F238E27FC236}">
-                <a16:creationId xmlns:a16="http://schemas.microsoft.com/office/drawing/2014/main" id="{4E0CA02B-4A74-400B-A644-4E075265A08E}"/>
+                <a16:creationId xmlns:a16="http://schemas.microsoft.com/office/drawing/2014/main" id="{009931DC-E1A6-4E37-AC5C-40D3EA7BA2BA}"/>
               </a:ext>
             </a:extLst>
           </p:cNvPr>
@@ -7662,7 +7662,7 @@
           <p:cNvPr id="2" name="">
             <a:extLst xmlns:a="http://schemas.openxmlformats.org/drawingml/2006/main">
               <a:ext uri="{FF2B5EF4-FFF2-40B4-BE49-F238E27FC236}">
-                <a16:creationId xmlns:a16="http://schemas.microsoft.com/office/drawing/2014/main" id="{DFDD4AA6-A36F-4E02-BB69-1D47962D716B}"/>
+                <a16:creationId xmlns:a16="http://schemas.microsoft.com/office/drawing/2014/main" id="{FF773B66-A9E9-4FD4-81FA-007250E152AF}"/>
               </a:ext>
             </a:extLst>
           </p:cNvPr>
@@ -7712,7 +7712,7 @@
           <p:cNvPr id="3" name="">
             <a:extLst xmlns:a="http://schemas.openxmlformats.org/drawingml/2006/main">
               <a:ext uri="{FF2B5EF4-FFF2-40B4-BE49-F238E27FC236}">
-                <a16:creationId xmlns:a16="http://schemas.microsoft.com/office/drawing/2014/main" id="{DE9B69A8-67DC-4375-B4ED-43442C582D5D}"/>
+                <a16:creationId xmlns:a16="http://schemas.microsoft.com/office/drawing/2014/main" id="{A4795A91-0567-4F61-9CA1-3E62BFD2AD56}"/>
               </a:ext>
             </a:extLst>
           </p:cNvPr>
@@ -7762,7 +7762,7 @@
           <p:cNvPr id="4" name="">
             <a:extLst xmlns:a="http://schemas.openxmlformats.org/drawingml/2006/main">
               <a:ext uri="{FF2B5EF4-FFF2-40B4-BE49-F238E27FC236}">
-                <a16:creationId xmlns:a16="http://schemas.microsoft.com/office/drawing/2014/main" id="{13552528-F9F1-43A7-9B74-409FA2B277DF}"/>
+                <a16:creationId xmlns:a16="http://schemas.microsoft.com/office/drawing/2014/main" id="{5CADDCF0-B4B5-49C2-9262-6DBCCAF78196}"/>
               </a:ext>
             </a:extLst>
           </p:cNvPr>
@@ -7812,7 +7812,7 @@
           <p:cNvPr id="5" name="">
             <a:extLst xmlns:a="http://schemas.openxmlformats.org/drawingml/2006/main">
               <a:ext uri="{FF2B5EF4-FFF2-40B4-BE49-F238E27FC236}">
-                <a16:creationId xmlns:a16="http://schemas.microsoft.com/office/drawing/2014/main" id="{2221CDFD-D663-47BE-923C-2C785757432B}"/>
+                <a16:creationId xmlns:a16="http://schemas.microsoft.com/office/drawing/2014/main" id="{D44DB6E4-07B3-4CB5-868D-5CD69C412705}"/>
               </a:ext>
             </a:extLst>
           </p:cNvPr>
@@ -7843,7 +7843,7 @@
           <p:cNvPr id="6" name="">
             <a:extLst xmlns:a="http://schemas.openxmlformats.org/drawingml/2006/main">
               <a:ext uri="{FF2B5EF4-FFF2-40B4-BE49-F238E27FC236}">
-                <a16:creationId xmlns:a16="http://schemas.microsoft.com/office/drawing/2014/main" id="{4420723E-1539-40CE-914A-D720D7C5B372}"/>
+                <a16:creationId xmlns:a16="http://schemas.microsoft.com/office/drawing/2014/main" id="{28DA79C9-586C-4100-8479-E007134F7E51}"/>
               </a:ext>
             </a:extLst>
           </p:cNvPr>
@@ -7893,7 +7893,7 @@
           <p:cNvPr id="7" name="">
             <a:extLst xmlns:a="http://schemas.openxmlformats.org/drawingml/2006/main">
               <a:ext uri="{FF2B5EF4-FFF2-40B4-BE49-F238E27FC236}">
-                <a16:creationId xmlns:a16="http://schemas.microsoft.com/office/drawing/2014/main" id="{0F38067F-E32D-474D-BCE3-0DF5EF0CFE0F}"/>
+                <a16:creationId xmlns:a16="http://schemas.microsoft.com/office/drawing/2014/main" id="{4EF32AD9-8EB3-470D-9E4F-0383D3199B66}"/>
               </a:ext>
             </a:extLst>
           </p:cNvPr>
@@ -7943,7 +7943,7 @@
           <p:cNvPr id="8" name="">
             <a:extLst xmlns:a="http://schemas.openxmlformats.org/drawingml/2006/main">
               <a:ext uri="{FF2B5EF4-FFF2-40B4-BE49-F238E27FC236}">
-                <a16:creationId xmlns:a16="http://schemas.microsoft.com/office/drawing/2014/main" id="{B0480CEB-E0ED-4D10-9911-6344550501F7}"/>
+                <a16:creationId xmlns:a16="http://schemas.microsoft.com/office/drawing/2014/main" id="{18BAB9B8-E6DC-4629-83B0-D8287D2A284B}"/>
               </a:ext>
             </a:extLst>
           </p:cNvPr>
@@ -7978,7 +7978,7 @@
           <p:cNvPr id="9" name="">
             <a:extLst xmlns:a="http://schemas.openxmlformats.org/drawingml/2006/main">
               <a:ext uri="{FF2B5EF4-FFF2-40B4-BE49-F238E27FC236}">
-                <a16:creationId xmlns:a16="http://schemas.microsoft.com/office/drawing/2014/main" id="{335102FF-7FF3-4D6F-8A98-E5165F2D7B37}"/>
+                <a16:creationId xmlns:a16="http://schemas.microsoft.com/office/drawing/2014/main" id="{1FFEFC25-AB7C-4C7A-B030-9FC6CF0963FF}"/>
               </a:ext>
             </a:extLst>
           </p:cNvPr>
@@ -8011,7 +8011,7 @@
           <p:cNvPr id="10" name="">
             <a:extLst xmlns:a="http://schemas.openxmlformats.org/drawingml/2006/main">
               <a:ext uri="{FF2B5EF4-FFF2-40B4-BE49-F238E27FC236}">
-                <a16:creationId xmlns:a16="http://schemas.microsoft.com/office/drawing/2014/main" id="{A6C488E4-93D3-471F-AA42-8B9AC45765EF}"/>
+                <a16:creationId xmlns:a16="http://schemas.microsoft.com/office/drawing/2014/main" id="{43EFFDB8-DB14-47A6-BC26-AEF1BE6D3F2B}"/>
               </a:ext>
             </a:extLst>
           </p:cNvPr>
@@ -8042,7 +8042,7 @@
           <p:cNvPr id="11" name="">
             <a:extLst xmlns:a="http://schemas.openxmlformats.org/drawingml/2006/main">
               <a:ext uri="{FF2B5EF4-FFF2-40B4-BE49-F238E27FC236}">
-                <a16:creationId xmlns:a16="http://schemas.microsoft.com/office/drawing/2014/main" id="{014518F4-5865-4C92-90E2-DB03D51294CF}"/>
+                <a16:creationId xmlns:a16="http://schemas.microsoft.com/office/drawing/2014/main" id="{F561068C-0A3D-41FC-916F-7FA7E43EC4E1}"/>
               </a:ext>
             </a:extLst>
           </p:cNvPr>
@@ -8073,7 +8073,7 @@
           <p:cNvPr id="12" name="">
             <a:extLst xmlns:a="http://schemas.openxmlformats.org/drawingml/2006/main">
               <a:ext uri="{FF2B5EF4-FFF2-40B4-BE49-F238E27FC236}">
-                <a16:creationId xmlns:a16="http://schemas.microsoft.com/office/drawing/2014/main" id="{A7038976-0498-4C21-947A-96DDD0082BF9}"/>
+                <a16:creationId xmlns:a16="http://schemas.microsoft.com/office/drawing/2014/main" id="{05C78551-1E8F-42AB-9F02-38A7018FD590}"/>
               </a:ext>
             </a:extLst>
           </p:cNvPr>
@@ -8104,7 +8104,7 @@
           <p:cNvPr id="13" name="">
             <a:extLst xmlns:a="http://schemas.openxmlformats.org/drawingml/2006/main">
               <a:ext uri="{FF2B5EF4-FFF2-40B4-BE49-F238E27FC236}">
-                <a16:creationId xmlns:a16="http://schemas.microsoft.com/office/drawing/2014/main" id="{E79CBABB-D06C-482F-AC71-030B3863A842}"/>
+                <a16:creationId xmlns:a16="http://schemas.microsoft.com/office/drawing/2014/main" id="{C0AB4378-D0D2-43B8-9B1D-6CC34DC389BF}"/>
               </a:ext>
             </a:extLst>
           </p:cNvPr>
@@ -8256,7 +8256,7 @@
           <p:cNvPr id="14" name="">
             <a:extLst xmlns:a="http://schemas.openxmlformats.org/drawingml/2006/main">
               <a:ext uri="{FF2B5EF4-FFF2-40B4-BE49-F238E27FC236}">
-                <a16:creationId xmlns:a16="http://schemas.microsoft.com/office/drawing/2014/main" id="{1B7975FA-8749-4678-8080-4CC57E2C2D46}"/>
+                <a16:creationId xmlns:a16="http://schemas.microsoft.com/office/drawing/2014/main" id="{94989579-038A-427D-837E-1B3A39AC1F3F}"/>
               </a:ext>
             </a:extLst>
           </p:cNvPr>
@@ -8306,7 +8306,7 @@
           <p:cNvPr id="15" name="">
             <a:extLst xmlns:a="http://schemas.openxmlformats.org/drawingml/2006/main">
               <a:ext uri="{FF2B5EF4-FFF2-40B4-BE49-F238E27FC236}">
-                <a16:creationId xmlns:a16="http://schemas.microsoft.com/office/drawing/2014/main" id="{D62556F0-FF66-48CA-B2E6-3A29E85A0EC6}"/>
+                <a16:creationId xmlns:a16="http://schemas.microsoft.com/office/drawing/2014/main" id="{985A50C0-EA30-475B-B2D1-D0E04FDB0B07}"/>
               </a:ext>
             </a:extLst>
           </p:cNvPr>
@@ -8356,7 +8356,7 @@
           <p:cNvPr id="16" name="">
             <a:extLst xmlns:a="http://schemas.openxmlformats.org/drawingml/2006/main">
               <a:ext uri="{FF2B5EF4-FFF2-40B4-BE49-F238E27FC236}">
-                <a16:creationId xmlns:a16="http://schemas.microsoft.com/office/drawing/2014/main" id="{616A1053-25B9-4B4E-9EC6-BA7474A96EFE}"/>
+                <a16:creationId xmlns:a16="http://schemas.microsoft.com/office/drawing/2014/main" id="{65FAD91F-5712-4941-921D-579D4F093D04}"/>
               </a:ext>
             </a:extLst>
           </p:cNvPr>
@@ -8387,7 +8387,7 @@
           <p:cNvPr id="17" name="">
             <a:extLst xmlns:a="http://schemas.openxmlformats.org/drawingml/2006/main">
               <a:ext uri="{FF2B5EF4-FFF2-40B4-BE49-F238E27FC236}">
-                <a16:creationId xmlns:a16="http://schemas.microsoft.com/office/drawing/2014/main" id="{34048AEC-F046-42C5-B864-B3AC457AD672}"/>
+                <a16:creationId xmlns:a16="http://schemas.microsoft.com/office/drawing/2014/main" id="{7A187896-3CD4-42B6-A62E-FFC2032C98C4}"/>
               </a:ext>
             </a:extLst>
           </p:cNvPr>
@@ -8437,7 +8437,7 @@
           <p:cNvPr id="18" name="">
             <a:extLst xmlns:a="http://schemas.openxmlformats.org/drawingml/2006/main">
               <a:ext uri="{FF2B5EF4-FFF2-40B4-BE49-F238E27FC236}">
-                <a16:creationId xmlns:a16="http://schemas.microsoft.com/office/drawing/2014/main" id="{361DAD35-9471-4B66-AFC2-E78EC7BAA4E1}"/>
+                <a16:creationId xmlns:a16="http://schemas.microsoft.com/office/drawing/2014/main" id="{76C7F12C-BE2E-4EC1-8DC0-223D4E92FF24}"/>
               </a:ext>
             </a:extLst>
           </p:cNvPr>
@@ -8487,7 +8487,7 @@
           <p:cNvPr id="19" name="">
             <a:extLst xmlns:a="http://schemas.openxmlformats.org/drawingml/2006/main">
               <a:ext uri="{FF2B5EF4-FFF2-40B4-BE49-F238E27FC236}">
-                <a16:creationId xmlns:a16="http://schemas.microsoft.com/office/drawing/2014/main" id="{CEEE8164-91FA-4B06-B3B0-4B3B307415DE}"/>
+                <a16:creationId xmlns:a16="http://schemas.microsoft.com/office/drawing/2014/main" id="{03D8E165-7917-49F8-8974-E72D81886069}"/>
               </a:ext>
             </a:extLst>
           </p:cNvPr>
@@ -8518,7 +8518,7 @@
           <p:cNvPr id="20" name="">
             <a:extLst xmlns:a="http://schemas.openxmlformats.org/drawingml/2006/main">
               <a:ext uri="{FF2B5EF4-FFF2-40B4-BE49-F238E27FC236}">
-                <a16:creationId xmlns:a16="http://schemas.microsoft.com/office/drawing/2014/main" id="{865C1B9C-8BE2-42DA-B666-C299F6040BF2}"/>
+                <a16:creationId xmlns:a16="http://schemas.microsoft.com/office/drawing/2014/main" id="{B21981F1-5C79-4C80-86B3-932AEF231A62}"/>
               </a:ext>
             </a:extLst>
           </p:cNvPr>
@@ -8568,7 +8568,7 @@
           <p:cNvPr id="21" name="">
             <a:extLst xmlns:a="http://schemas.openxmlformats.org/drawingml/2006/main">
               <a:ext uri="{FF2B5EF4-FFF2-40B4-BE49-F238E27FC236}">
-                <a16:creationId xmlns:a16="http://schemas.microsoft.com/office/drawing/2014/main" id="{130FF316-DD4C-4B65-A9D0-1794A5491C7B}"/>
+                <a16:creationId xmlns:a16="http://schemas.microsoft.com/office/drawing/2014/main" id="{E94D8D70-3645-444D-B7FB-FC7726F7D425}"/>
               </a:ext>
             </a:extLst>
           </p:cNvPr>
@@ -8618,7 +8618,7 @@
           <p:cNvPr id="22" name="">
             <a:extLst xmlns:a="http://schemas.openxmlformats.org/drawingml/2006/main">
               <a:ext uri="{FF2B5EF4-FFF2-40B4-BE49-F238E27FC236}">
-                <a16:creationId xmlns:a16="http://schemas.microsoft.com/office/drawing/2014/main" id="{D0D7C31A-A7DB-4DDD-8511-0E14697FDD63}"/>
+                <a16:creationId xmlns:a16="http://schemas.microsoft.com/office/drawing/2014/main" id="{643567E5-4C33-4366-BCC7-91B2800C3739}"/>
               </a:ext>
             </a:extLst>
           </p:cNvPr>
@@ -8649,7 +8649,7 @@
           <p:cNvPr id="23" name="">
             <a:extLst xmlns:a="http://schemas.openxmlformats.org/drawingml/2006/main">
               <a:ext uri="{FF2B5EF4-FFF2-40B4-BE49-F238E27FC236}">
-                <a16:creationId xmlns:a16="http://schemas.microsoft.com/office/drawing/2014/main" id="{53074127-837D-4F04-9B1E-D964C16EB767}"/>
+                <a16:creationId xmlns:a16="http://schemas.microsoft.com/office/drawing/2014/main" id="{FFE5968E-6CFD-46A8-80E5-5E842A69AA23}"/>
               </a:ext>
             </a:extLst>
           </p:cNvPr>
@@ -8699,7 +8699,7 @@
           <p:cNvPr id="24" name="">
             <a:extLst xmlns:a="http://schemas.openxmlformats.org/drawingml/2006/main">
               <a:ext uri="{FF2B5EF4-FFF2-40B4-BE49-F238E27FC236}">
-                <a16:creationId xmlns:a16="http://schemas.microsoft.com/office/drawing/2014/main" id="{B72B4568-DEC5-4ABE-9E98-AF9991399FA8}"/>
+                <a16:creationId xmlns:a16="http://schemas.microsoft.com/office/drawing/2014/main" id="{91D17C05-1C8A-4CEF-AA45-B0629EF8B680}"/>
               </a:ext>
             </a:extLst>
           </p:cNvPr>
@@ -8749,7 +8749,7 @@
           <p:cNvPr id="25" name="">
             <a:extLst xmlns:a="http://schemas.openxmlformats.org/drawingml/2006/main">
               <a:ext uri="{FF2B5EF4-FFF2-40B4-BE49-F238E27FC236}">
-                <a16:creationId xmlns:a16="http://schemas.microsoft.com/office/drawing/2014/main" id="{AE2F2A9D-0ED5-4925-AB41-84AF596F8DDC}"/>
+                <a16:creationId xmlns:a16="http://schemas.microsoft.com/office/drawing/2014/main" id="{2FD460BC-8695-41D4-82C2-43464D139774}"/>
               </a:ext>
             </a:extLst>
           </p:cNvPr>
@@ -8780,7 +8780,7 @@
           <p:cNvPr id="26" name="">
             <a:extLst xmlns:a="http://schemas.openxmlformats.org/drawingml/2006/main">
               <a:ext uri="{FF2B5EF4-FFF2-40B4-BE49-F238E27FC236}">
-                <a16:creationId xmlns:a16="http://schemas.microsoft.com/office/drawing/2014/main" id="{F371BD78-81B5-469E-A4C6-BF5F4C795F0B}"/>
+                <a16:creationId xmlns:a16="http://schemas.microsoft.com/office/drawing/2014/main" id="{7FC830FE-48EB-4A6C-96E7-41DDADC4BFF5}"/>
               </a:ext>
             </a:extLst>
           </p:cNvPr>
@@ -8828,7 +8828,7 @@
     </p:spTree>
     <p:extLst>
       <p:ext uri="{BB962C8B-B14F-4D97-AF65-F5344CB8AC3E}">
-        <p14:creationId xmlns:p14="http://schemas.microsoft.com/office/powerpoint/2010/main" val="444589978"/>
+        <p14:creationId xmlns:p14="http://schemas.microsoft.com/office/powerpoint/2010/main" val="1311390783"/>
       </p:ext>
     </p:extLst>
   </p:cSld>
@@ -8856,10 +8856,10 @@
       </p:grpSpPr>
       <p:sp>
         <p:nvSpPr>
-          <p:cNvPr id="24" name="">
-            <a:extLst xmlns:a="http://schemas.openxmlformats.org/drawingml/2006/main">
-              <a:ext uri="{FF2B5EF4-FFF2-40B4-BE49-F238E27FC236}">
-                <a16:creationId xmlns:a16="http://schemas.microsoft.com/office/drawing/2014/main" id="{447182E3-5617-42D3-84DD-86E2E940EA2B}"/>
+          <p:cNvPr id="27" name="">
+            <a:extLst xmlns:a="http://schemas.openxmlformats.org/drawingml/2006/main">
+              <a:ext uri="{FF2B5EF4-FFF2-40B4-BE49-F238E27FC236}">
+                <a16:creationId xmlns:a16="http://schemas.microsoft.com/office/drawing/2014/main" id="{A3456B03-9B68-4F34-8561-C25503A12CC9}"/>
               </a:ext>
             </a:extLst>
           </p:cNvPr>
@@ -8892,7 +8892,7 @@
           <p:cNvPr id="2" name="">
             <a:extLst xmlns:a="http://schemas.openxmlformats.org/drawingml/2006/main">
               <a:ext uri="{FF2B5EF4-FFF2-40B4-BE49-F238E27FC236}">
-                <a16:creationId xmlns:a16="http://schemas.microsoft.com/office/drawing/2014/main" id="{1FDACD02-0343-4A7F-96F4-EFADF9F2D141}"/>
+                <a16:creationId xmlns:a16="http://schemas.microsoft.com/office/drawing/2014/main" id="{269BE868-73D2-448D-980F-1674DACA1FFA}"/>
               </a:ext>
             </a:extLst>
           </p:cNvPr>
@@ -8942,7 +8942,7 @@
           <p:cNvPr id="3" name="">
             <a:extLst xmlns:a="http://schemas.openxmlformats.org/drawingml/2006/main">
               <a:ext uri="{FF2B5EF4-FFF2-40B4-BE49-F238E27FC236}">
-                <a16:creationId xmlns:a16="http://schemas.microsoft.com/office/drawing/2014/main" id="{7BA092BD-2111-4C8A-8804-FA7009629BAF}"/>
+                <a16:creationId xmlns:a16="http://schemas.microsoft.com/office/drawing/2014/main" id="{3D269D06-36E1-4F91-8013-89B4A6AA2582}"/>
               </a:ext>
             </a:extLst>
           </p:cNvPr>
@@ -8982,7 +8982,7 @@
                   <a:srgbClr val="EAF2FF"/>
                 </a:solidFill>
               </a:rPr>
-              <a:t>A slow tool makes voice feel broken</a:t>
+              <a:t>The tool waits five seconds, then returns</a:t>
             </a:r>
           </a:p>
         </p:txBody>
@@ -8992,7 +8992,7 @@
           <p:cNvPr id="4" name="">
             <a:extLst xmlns:a="http://schemas.openxmlformats.org/drawingml/2006/main">
               <a:ext uri="{FF2B5EF4-FFF2-40B4-BE49-F238E27FC236}">
-                <a16:creationId xmlns:a16="http://schemas.microsoft.com/office/drawing/2014/main" id="{DCB98BFA-CF6F-41BD-B018-3E04D0C4CEF3}"/>
+                <a16:creationId xmlns:a16="http://schemas.microsoft.com/office/drawing/2014/main" id="{7AE917E2-E894-400F-A6EC-84D26C8EA942}"/>
               </a:ext>
             </a:extLst>
           </p:cNvPr>
@@ -9032,7 +9032,7 @@
                   <a:srgbClr val="9AAEC4"/>
                 </a:solidFill>
               </a:rPr>
-              <a:t>Silence is ambiguous: thinking, frozen, or failed?</a:t>
+              <a:t>It returns room data or a structured error—never a raw exception.</a:t>
             </a:r>
           </a:p>
         </p:txBody>
@@ -9042,7 +9042,7 @@
           <p:cNvPr id="5" name="">
             <a:extLst xmlns:a="http://schemas.openxmlformats.org/drawingml/2006/main">
               <a:ext uri="{FF2B5EF4-FFF2-40B4-BE49-F238E27FC236}">
-                <a16:creationId xmlns:a16="http://schemas.microsoft.com/office/drawing/2014/main" id="{BE67144A-76FD-4BEB-975C-AF2AF5BF9DCF}"/>
+                <a16:creationId xmlns:a16="http://schemas.microsoft.com/office/drawing/2014/main" id="{E09634C8-3FA3-4A51-B2B8-F8957CEBF697}"/>
               </a:ext>
             </a:extLst>
           </p:cNvPr>
@@ -9073,7 +9073,7 @@
           <p:cNvPr id="6" name="">
             <a:extLst xmlns:a="http://schemas.openxmlformats.org/drawingml/2006/main">
               <a:ext uri="{FF2B5EF4-FFF2-40B4-BE49-F238E27FC236}">
-                <a16:creationId xmlns:a16="http://schemas.microsoft.com/office/drawing/2014/main" id="{C3233FBD-452D-473B-9D3F-AA669ECA7429}"/>
+                <a16:creationId xmlns:a16="http://schemas.microsoft.com/office/drawing/2014/main" id="{80BB3648-4025-4038-8933-8A4636CF2131}"/>
               </a:ext>
             </a:extLst>
           </p:cNvPr>
@@ -9123,7 +9123,7 @@
           <p:cNvPr id="7" name="">
             <a:extLst xmlns:a="http://schemas.openxmlformats.org/drawingml/2006/main">
               <a:ext uri="{FF2B5EF4-FFF2-40B4-BE49-F238E27FC236}">
-                <a16:creationId xmlns:a16="http://schemas.microsoft.com/office/drawing/2014/main" id="{0A314F45-84B5-46E3-AB97-705949E28571}"/>
+                <a16:creationId xmlns:a16="http://schemas.microsoft.com/office/drawing/2014/main" id="{74F41A6C-157A-409F-B3E8-8652787821DF}"/>
               </a:ext>
             </a:extLst>
           </p:cNvPr>
@@ -9173,7 +9173,7 @@
           <p:cNvPr id="8" name="">
             <a:extLst xmlns:a="http://schemas.openxmlformats.org/drawingml/2006/main">
               <a:ext uri="{FF2B5EF4-FFF2-40B4-BE49-F238E27FC236}">
-                <a16:creationId xmlns:a16="http://schemas.microsoft.com/office/drawing/2014/main" id="{8765E7F1-0F80-43AB-A71A-BE38A39C0CDC}"/>
+                <a16:creationId xmlns:a16="http://schemas.microsoft.com/office/drawing/2014/main" id="{585CFDAF-BE2F-4EFF-BC25-CE93AB633CFA}"/>
               </a:ext>
             </a:extLst>
           </p:cNvPr>
@@ -9204,7 +9204,7 @@
           <p:cNvPr id="9" name="">
             <a:extLst xmlns:a="http://schemas.openxmlformats.org/drawingml/2006/main">
               <a:ext uri="{FF2B5EF4-FFF2-40B4-BE49-F238E27FC236}">
-                <a16:creationId xmlns:a16="http://schemas.microsoft.com/office/drawing/2014/main" id="{543E9440-15EB-4124-B3B0-D6ECFDA7C7A9}"/>
+                <a16:creationId xmlns:a16="http://schemas.microsoft.com/office/drawing/2014/main" id="{D18F92F9-FEA2-4CC8-89DE-0D61B4CD5695}"/>
               </a:ext>
             </a:extLst>
           </p:cNvPr>
@@ -9222,7 +9222,7 @@
             <a:avLst/>
           </a:prstGeom>
           <a:solidFill xmlns:a="http://schemas.openxmlformats.org/drawingml/2006/main">
-            <a:srgbClr val="78F0B2"/>
+            <a:srgbClr val="38D9FF"/>
           </a:solidFill>
           <a:ln xmlns:a="http://schemas.openxmlformats.org/drawingml/2006/main" w="0">
             <a:noFill/>
@@ -9235,7 +9235,7 @@
           <p:cNvPr id="10" name="">
             <a:extLst xmlns:a="http://schemas.openxmlformats.org/drawingml/2006/main">
               <a:ext uri="{FF2B5EF4-FFF2-40B4-BE49-F238E27FC236}">
-                <a16:creationId xmlns:a16="http://schemas.microsoft.com/office/drawing/2014/main" id="{F3BD6848-08BE-4702-A6E9-C4EBC6624CB7}"/>
+                <a16:creationId xmlns:a16="http://schemas.microsoft.com/office/drawing/2014/main" id="{5D73A685-A525-4C65-B28C-F1A288E43B7E}"/>
               </a:ext>
             </a:extLst>
           </p:cNvPr>
@@ -9265,14 +9265,14 @@
             <a:pPr algn="ctr">
               <a:defRPr sz="1350" b="1" i="0">
                 <a:solidFill>
-                  <a:srgbClr val="78F0B2"/>
+                  <a:srgbClr val="38D9FF"/>
                 </a:solidFill>
               </a:defRPr>
             </a:pPr>
             <a:r>
               <a:rPr sz="1350" b="1" i="0">
                 <a:solidFill>
-                  <a:srgbClr val="78F0B2"/>
+                  <a:srgbClr val="38D9FF"/>
                 </a:solidFill>
               </a:rPr>
               <a:t>0.0s</a:t>
@@ -9285,7 +9285,7 @@
           <p:cNvPr id="11" name="">
             <a:extLst xmlns:a="http://schemas.openxmlformats.org/drawingml/2006/main">
               <a:ext uri="{FF2B5EF4-FFF2-40B4-BE49-F238E27FC236}">
-                <a16:creationId xmlns:a16="http://schemas.microsoft.com/office/drawing/2014/main" id="{9C353B5D-043F-4BA1-9C7C-A2398B4A9727}"/>
+                <a16:creationId xmlns:a16="http://schemas.microsoft.com/office/drawing/2014/main" id="{15763FE9-07B0-4B0C-ACF1-BBC75A963BA5}"/>
               </a:ext>
             </a:extLst>
           </p:cNvPr>
@@ -9325,7 +9325,7 @@
                   <a:srgbClr val="EAF2FF"/>
                 </a:solidFill>
               </a:rPr>
-              <a:t>USER ENDS</a:t>
+              <a:t>ACKNOWLEDGE</a:t>
             </a:r>
           </a:p>
         </p:txBody>
@@ -9335,7 +9335,7 @@
           <p:cNvPr id="12" name="">
             <a:extLst xmlns:a="http://schemas.openxmlformats.org/drawingml/2006/main">
               <a:ext uri="{FF2B5EF4-FFF2-40B4-BE49-F238E27FC236}">
-                <a16:creationId xmlns:a16="http://schemas.microsoft.com/office/drawing/2014/main" id="{4F46211E-5E27-47D5-92E4-11454BBF7FC6}"/>
+                <a16:creationId xmlns:a16="http://schemas.microsoft.com/office/drawing/2014/main" id="{536CF8A4-D56F-40D9-8E32-D8259E48BEE6}"/>
               </a:ext>
             </a:extLst>
           </p:cNvPr>
@@ -9366,7 +9366,7 @@
           <p:cNvPr id="13" name="">
             <a:extLst xmlns:a="http://schemas.openxmlformats.org/drawingml/2006/main">
               <a:ext uri="{FF2B5EF4-FFF2-40B4-BE49-F238E27FC236}">
-                <a16:creationId xmlns:a16="http://schemas.microsoft.com/office/drawing/2014/main" id="{0C6637E1-E456-4B93-A6BB-90F8209094C6}"/>
+                <a16:creationId xmlns:a16="http://schemas.microsoft.com/office/drawing/2014/main" id="{48379A24-AF17-43D4-BCB0-4845ED41917E}"/>
               </a:ext>
             </a:extLst>
           </p:cNvPr>
@@ -9406,7 +9406,7 @@
                   <a:srgbClr val="FFC857"/>
                 </a:solidFill>
               </a:rPr>
-              <a:t>0.3s</a:t>
+              <a:t>0.2s</a:t>
             </a:r>
           </a:p>
         </p:txBody>
@@ -9416,7 +9416,7 @@
           <p:cNvPr id="14" name="">
             <a:extLst xmlns:a="http://schemas.openxmlformats.org/drawingml/2006/main">
               <a:ext uri="{FF2B5EF4-FFF2-40B4-BE49-F238E27FC236}">
-                <a16:creationId xmlns:a16="http://schemas.microsoft.com/office/drawing/2014/main" id="{AC0B11BD-EBA0-457F-BF98-4801BBE3F3C5}"/>
+                <a16:creationId xmlns:a16="http://schemas.microsoft.com/office/drawing/2014/main" id="{38347250-51D3-4708-8D67-3C226121991C}"/>
               </a:ext>
             </a:extLst>
           </p:cNvPr>
@@ -9466,7 +9466,7 @@
           <p:cNvPr id="15" name="">
             <a:extLst xmlns:a="http://schemas.openxmlformats.org/drawingml/2006/main">
               <a:ext uri="{FF2B5EF4-FFF2-40B4-BE49-F238E27FC236}">
-                <a16:creationId xmlns:a16="http://schemas.microsoft.com/office/drawing/2014/main" id="{619381BD-70FC-4FD6-8A18-51C4CD9AC9A7}"/>
+                <a16:creationId xmlns:a16="http://schemas.microsoft.com/office/drawing/2014/main" id="{9E7C3AA2-B7E0-4121-A703-2918108282CF}"/>
               </a:ext>
             </a:extLst>
           </p:cNvPr>
@@ -9484,7 +9484,7 @@
             <a:avLst/>
           </a:prstGeom>
           <a:solidFill xmlns:a="http://schemas.openxmlformats.org/drawingml/2006/main">
-            <a:srgbClr val="FF6B7A"/>
+            <a:srgbClr val="78F0B2"/>
           </a:solidFill>
           <a:ln xmlns:a="http://schemas.openxmlformats.org/drawingml/2006/main" w="0">
             <a:noFill/>
@@ -9497,7 +9497,7 @@
           <p:cNvPr id="16" name="">
             <a:extLst xmlns:a="http://schemas.openxmlformats.org/drawingml/2006/main">
               <a:ext uri="{FF2B5EF4-FFF2-40B4-BE49-F238E27FC236}">
-                <a16:creationId xmlns:a16="http://schemas.microsoft.com/office/drawing/2014/main" id="{50012CD3-3D1D-4935-A3CD-6D4F5BF90F60}"/>
+                <a16:creationId xmlns:a16="http://schemas.microsoft.com/office/drawing/2014/main" id="{2AFCE78A-8A65-4716-8823-62BB3178B6B7}"/>
               </a:ext>
             </a:extLst>
           </p:cNvPr>
@@ -9527,17 +9527,17 @@
             <a:pPr algn="ctr">
               <a:defRPr sz="1350" b="1" i="0">
                 <a:solidFill>
-                  <a:srgbClr val="FF6B7A"/>
+                  <a:srgbClr val="78F0B2"/>
                 </a:solidFill>
               </a:defRPr>
             </a:pPr>
             <a:r>
               <a:rPr sz="1350" b="1" i="0">
                 <a:solidFill>
-                  <a:srgbClr val="FF6B7A"/>
-                </a:solidFill>
-              </a:rPr>
-              <a:t>5.3s</a:t>
+                  <a:srgbClr val="78F0B2"/>
+                </a:solidFill>
+              </a:rPr>
+              <a:t>5.2s</a:t>
             </a:r>
           </a:p>
         </p:txBody>
@@ -9547,7 +9547,7 @@
           <p:cNvPr id="17" name="">
             <a:extLst xmlns:a="http://schemas.openxmlformats.org/drawingml/2006/main">
               <a:ext uri="{FF2B5EF4-FFF2-40B4-BE49-F238E27FC236}">
-                <a16:creationId xmlns:a16="http://schemas.microsoft.com/office/drawing/2014/main" id="{1D3D86CB-13F6-4297-A082-F779BC89DBF0}"/>
+                <a16:creationId xmlns:a16="http://schemas.microsoft.com/office/drawing/2014/main" id="{336C4133-F518-4B1A-85FE-9B74D91F1C39}"/>
               </a:ext>
             </a:extLst>
           </p:cNvPr>
@@ -9587,7 +9587,7 @@
                   <a:srgbClr val="EAF2FF"/>
                 </a:solidFill>
               </a:rPr>
-              <a:t>TOOL RETURNS</a:t>
+              <a:t>RESULT</a:t>
             </a:r>
           </a:p>
         </p:txBody>
@@ -9597,7 +9597,7 @@
           <p:cNvPr id="18" name="">
             <a:extLst xmlns:a="http://schemas.openxmlformats.org/drawingml/2006/main">
               <a:ext uri="{FF2B5EF4-FFF2-40B4-BE49-F238E27FC236}">
-                <a16:creationId xmlns:a16="http://schemas.microsoft.com/office/drawing/2014/main" id="{D5BD8217-3EAE-4290-A93E-D133A6697404}"/>
+                <a16:creationId xmlns:a16="http://schemas.microsoft.com/office/drawing/2014/main" id="{998A5CFC-F434-4C78-BFBE-F370643EF00A}"/>
               </a:ext>
             </a:extLst>
           </p:cNvPr>
@@ -9628,7 +9628,7 @@
           <p:cNvPr id="19" name="">
             <a:extLst xmlns:a="http://schemas.openxmlformats.org/drawingml/2006/main">
               <a:ext uri="{FF2B5EF4-FFF2-40B4-BE49-F238E27FC236}">
-                <a16:creationId xmlns:a16="http://schemas.microsoft.com/office/drawing/2014/main" id="{12C5DB66-102E-4FFF-8F3D-96CC05DB55F1}"/>
+                <a16:creationId xmlns:a16="http://schemas.microsoft.com/office/drawing/2014/main" id="{7B79FE54-6B29-4881-ACB2-010FAEC5FDBD}"/>
               </a:ext>
             </a:extLst>
           </p:cNvPr>
@@ -9668,7 +9668,7 @@
                   <a:srgbClr val="38D9FF"/>
                 </a:solidFill>
               </a:rPr>
-              <a:t>5.6s</a:t>
+              <a:t>5.5s</a:t>
             </a:r>
           </a:p>
         </p:txBody>
@@ -9678,7 +9678,7 @@
           <p:cNvPr id="20" name="">
             <a:extLst xmlns:a="http://schemas.openxmlformats.org/drawingml/2006/main">
               <a:ext uri="{FF2B5EF4-FFF2-40B4-BE49-F238E27FC236}">
-                <a16:creationId xmlns:a16="http://schemas.microsoft.com/office/drawing/2014/main" id="{C9697E8F-670D-4A92-B97D-DCFC8ADE52DE}"/>
+                <a16:creationId xmlns:a16="http://schemas.microsoft.com/office/drawing/2014/main" id="{78CFA0F2-7DF7-4E4F-A662-171F45E17309}"/>
               </a:ext>
             </a:extLst>
           </p:cNvPr>
@@ -9718,7 +9718,7 @@
                   <a:srgbClr val="EAF2FF"/>
                 </a:solidFill>
               </a:rPr>
-              <a:t>AUDIO</a:t>
+              <a:t>RECOVERY</a:t>
             </a:r>
           </a:p>
         </p:txBody>
@@ -9728,7 +9728,7 @@
           <p:cNvPr id="21" name="">
             <a:extLst xmlns:a="http://schemas.openxmlformats.org/drawingml/2006/main">
               <a:ext uri="{FF2B5EF4-FFF2-40B4-BE49-F238E27FC236}">
-                <a16:creationId xmlns:a16="http://schemas.microsoft.com/office/drawing/2014/main" id="{B597E501-D690-426F-B1ED-5D5C3F269A04}"/>
+                <a16:creationId xmlns:a16="http://schemas.microsoft.com/office/drawing/2014/main" id="{F78C18FC-7530-4F28-910C-6C981BEB9BFF}"/>
               </a:ext>
             </a:extLst>
           </p:cNvPr>
@@ -9748,7 +9748,7 @@
             </a:avLst>
           </a:prstGeom>
           <a:solidFill xmlns:a="http://schemas.openxmlformats.org/drawingml/2006/main">
-            <a:srgbClr val="FF6B7A"/>
+            <a:srgbClr val="FFC857"/>
           </a:solidFill>
           <a:ln xmlns:a="http://schemas.openxmlformats.org/drawingml/2006/main" w="0">
             <a:noFill/>
@@ -9761,7 +9761,7 @@
           <p:cNvPr id="22" name="">
             <a:extLst xmlns:a="http://schemas.openxmlformats.org/drawingml/2006/main">
               <a:ext uri="{FF2B5EF4-FFF2-40B4-BE49-F238E27FC236}">
-                <a16:creationId xmlns:a16="http://schemas.microsoft.com/office/drawing/2014/main" id="{099BD5D9-E5FB-4AED-87D4-7DEA9C99072F}"/>
+                <a16:creationId xmlns:a16="http://schemas.microsoft.com/office/drawing/2014/main" id="{4AAF4426-0171-4DD5-AF99-7FC506CD1D45}"/>
               </a:ext>
             </a:extLst>
           </p:cNvPr>
@@ -9801,7 +9801,7 @@
                   <a:srgbClr val="08111D"/>
                 </a:solidFill>
               </a:rPr>
-              <a:t>5 seconds of silence</a:t>
+              <a:t>asyncio.sleep(5)</a:t>
             </a:r>
           </a:p>
         </p:txBody>
@@ -9811,19 +9811,54 @@
           <p:cNvPr id="23" name="">
             <a:extLst xmlns:a="http://schemas.openxmlformats.org/drawingml/2006/main">
               <a:ext uri="{FF2B5EF4-FFF2-40B4-BE49-F238E27FC236}">
-                <a16:creationId xmlns:a16="http://schemas.microsoft.com/office/drawing/2014/main" id="{832481BA-77A9-4371-84DF-259A157C0670}"/>
-              </a:ext>
-            </a:extLst>
-          </p:cNvPr>
-          <p:cNvSpPr>
-            <a:spLocks xmlns:a="http://schemas.openxmlformats.org/drawingml/2006/main" noGrp="1"/>
-          </p:cNvSpPr>
-          <p:nvPr/>
-        </p:nvSpPr>
-        <p:spPr>
-          <a:xfrm xmlns:a="http://schemas.openxmlformats.org/drawingml/2006/main">
-            <a:off x="2152650" y="4953000"/>
-            <a:ext cx="7886700" cy="400050"/>
+                <a16:creationId xmlns:a16="http://schemas.microsoft.com/office/drawing/2014/main" id="{07CADF0E-096C-4F36-8187-0BA557FE165C}"/>
+              </a:ext>
+            </a:extLst>
+          </p:cNvPr>
+          <p:cNvSpPr>
+            <a:spLocks xmlns:a="http://schemas.openxmlformats.org/drawingml/2006/main" noGrp="1"/>
+          </p:cNvSpPr>
+          <p:nvPr/>
+        </p:nvSpPr>
+        <p:spPr>
+          <a:xfrm xmlns:a="http://schemas.openxmlformats.org/drawingml/2006/main">
+            <a:off x="2381250" y="4667250"/>
+            <a:ext cx="7429500" cy="819150"/>
+          </a:xfrm>
+          <a:prstGeom xmlns:a="http://schemas.openxmlformats.org/drawingml/2006/main" prst="roundRect">
+            <a:avLst>
+              <a:gd name="adj" fmla="val 9302"/>
+            </a:avLst>
+          </a:prstGeom>
+          <a:solidFill xmlns:a="http://schemas.openxmlformats.org/drawingml/2006/main">
+            <a:srgbClr val="0E1C2B"/>
+          </a:solidFill>
+          <a:ln xmlns:a="http://schemas.openxmlformats.org/drawingml/2006/main" w="9525">
+            <a:solidFill>
+              <a:srgbClr val="274158"/>
+            </a:solidFill>
+            <a:prstDash val="solid"/>
+          </a:ln>
+        </p:spPr>
+      </p:sp>
+      <p:sp>
+        <p:nvSpPr>
+          <p:cNvPr id="24" name="">
+            <a:extLst xmlns:a="http://schemas.openxmlformats.org/drawingml/2006/main">
+              <a:ext uri="{FF2B5EF4-FFF2-40B4-BE49-F238E27FC236}">
+                <a16:creationId xmlns:a16="http://schemas.microsoft.com/office/drawing/2014/main" id="{7DB1C92D-EE66-432A-A177-6BB48E652331}"/>
+              </a:ext>
+            </a:extLst>
+          </p:cNvPr>
+          <p:cNvSpPr>
+            <a:spLocks xmlns:a="http://schemas.openxmlformats.org/drawingml/2006/main" noGrp="1"/>
+          </p:cNvSpPr>
+          <p:nvPr/>
+        </p:nvSpPr>
+        <p:spPr>
+          <a:xfrm xmlns:a="http://schemas.openxmlformats.org/drawingml/2006/main">
+            <a:off x="2628900" y="4810125"/>
+            <a:ext cx="6934200" cy="266700"/>
           </a:xfrm>
           <a:prstGeom xmlns:a="http://schemas.openxmlformats.org/drawingml/2006/main" prst="rect">
             <a:avLst/>
@@ -9839,19 +9874,119 @@
           <a:lstStyle xmlns:a="http://schemas.openxmlformats.org/drawingml/2006/main"/>
           <a:p xmlns:a="http://schemas.openxmlformats.org/drawingml/2006/main">
             <a:pPr algn="ctr">
-              <a:defRPr sz="1950" b="1" i="0">
-                <a:solidFill>
-                  <a:srgbClr val="FF6B7A"/>
-                </a:solidFill>
-              </a:defRPr>
-            </a:pPr>
-            <a:r>
-              <a:rPr sz="1950" b="1" i="0">
-                <a:solidFill>
-                  <a:srgbClr val="FF6B7A"/>
-                </a:solidFill>
-              </a:rPr>
-              <a:t>Then fail it: timeout → raw exception → dead air</a:t>
+              <a:defRPr sz="1425" b="1" i="0">
+                <a:solidFill>
+                  <a:srgbClr val="78F0B2"/>
+                </a:solidFill>
+              </a:defRPr>
+            </a:pPr>
+            <a:r>
+              <a:rPr sz="1425" b="1" i="0">
+                <a:solidFill>
+                  <a:srgbClr val="78F0B2"/>
+                </a:solidFill>
+              </a:rPr>
+              <a:t>status: error   •   retryable: true</a:t>
+            </a:r>
+          </a:p>
+        </p:txBody>
+      </p:sp>
+      <p:sp>
+        <p:nvSpPr>
+          <p:cNvPr id="25" name="">
+            <a:extLst xmlns:a="http://schemas.openxmlformats.org/drawingml/2006/main">
+              <a:ext uri="{FF2B5EF4-FFF2-40B4-BE49-F238E27FC236}">
+                <a16:creationId xmlns:a16="http://schemas.microsoft.com/office/drawing/2014/main" id="{642FD863-B125-47D3-A2E2-4A6A91018999}"/>
+              </a:ext>
+            </a:extLst>
+          </p:cNvPr>
+          <p:cNvSpPr>
+            <a:spLocks xmlns:a="http://schemas.openxmlformats.org/drawingml/2006/main" noGrp="1"/>
+          </p:cNvSpPr>
+          <p:nvPr/>
+        </p:nvSpPr>
+        <p:spPr>
+          <a:xfrm xmlns:a="http://schemas.openxmlformats.org/drawingml/2006/main">
+            <a:off x="2628900" y="5124450"/>
+            <a:ext cx="6934200" cy="247650"/>
+          </a:xfrm>
+          <a:prstGeom xmlns:a="http://schemas.openxmlformats.org/drawingml/2006/main" prst="rect">
+            <a:avLst/>
+          </a:prstGeom>
+          <a:noFill xmlns:a="http://schemas.openxmlformats.org/drawingml/2006/main"/>
+          <a:ln xmlns:a="http://schemas.openxmlformats.org/drawingml/2006/main" w="0">
+            <a:noFill/>
+            <a:prstDash val="solid"/>
+          </a:ln>
+        </p:spPr>
+        <p:txBody>
+          <a:bodyPr xmlns:a="http://schemas.openxmlformats.org/drawingml/2006/main" anchor="t"/>
+          <a:lstStyle xmlns:a="http://schemas.openxmlformats.org/drawingml/2006/main"/>
+          <a:p xmlns:a="http://schemas.openxmlformats.org/drawingml/2006/main">
+            <a:pPr algn="ctr">
+              <a:defRPr sz="1275" b="0" i="0">
+                <a:solidFill>
+                  <a:srgbClr val="EAF2FF"/>
+                </a:solidFill>
+              </a:defRPr>
+            </a:pPr>
+            <a:r>
+              <a:rPr sz="1275" b="0" i="0">
+                <a:solidFill>
+                  <a:srgbClr val="EAF2FF"/>
+                </a:solidFill>
+              </a:rPr>
+              <a:t>“Room availability could not be checked right now.”</a:t>
+            </a:r>
+          </a:p>
+        </p:txBody>
+      </p:sp>
+      <p:sp>
+        <p:nvSpPr>
+          <p:cNvPr id="26" name="">
+            <a:extLst xmlns:a="http://schemas.openxmlformats.org/drawingml/2006/main">
+              <a:ext uri="{FF2B5EF4-FFF2-40B4-BE49-F238E27FC236}">
+                <a16:creationId xmlns:a16="http://schemas.microsoft.com/office/drawing/2014/main" id="{C22D594C-F9BB-418B-ACD3-7DFCE3C432DB}"/>
+              </a:ext>
+            </a:extLst>
+          </p:cNvPr>
+          <p:cNvSpPr>
+            <a:spLocks xmlns:a="http://schemas.openxmlformats.org/drawingml/2006/main" noGrp="1"/>
+          </p:cNvSpPr>
+          <p:nvPr/>
+        </p:nvSpPr>
+        <p:spPr>
+          <a:xfrm xmlns:a="http://schemas.openxmlformats.org/drawingml/2006/main">
+            <a:off x="2152650" y="5638800"/>
+            <a:ext cx="7886700" cy="266700"/>
+          </a:xfrm>
+          <a:prstGeom xmlns:a="http://schemas.openxmlformats.org/drawingml/2006/main" prst="rect">
+            <a:avLst/>
+          </a:prstGeom>
+          <a:noFill xmlns:a="http://schemas.openxmlformats.org/drawingml/2006/main"/>
+          <a:ln xmlns:a="http://schemas.openxmlformats.org/drawingml/2006/main" w="0">
+            <a:noFill/>
+            <a:prstDash val="solid"/>
+          </a:ln>
+        </p:spPr>
+        <p:txBody>
+          <a:bodyPr xmlns:a="http://schemas.openxmlformats.org/drawingml/2006/main" anchor="t"/>
+          <a:lstStyle xmlns:a="http://schemas.openxmlformats.org/drawingml/2006/main"/>
+          <a:p xmlns:a="http://schemas.openxmlformats.org/drawingml/2006/main">
+            <a:pPr algn="ctr">
+              <a:defRPr sz="1425" b="1" i="0">
+                <a:solidFill>
+                  <a:srgbClr val="9AAEC4"/>
+                </a:solidFill>
+              </a:defRPr>
+            </a:pPr>
+            <a:r>
+              <a:rPr sz="1425" b="1" i="0">
+                <a:solidFill>
+                  <a:srgbClr val="9AAEC4"/>
+                </a:solidFill>
+              </a:rPr>
+              <a:t>No timeout · no exception · no automatic retry</a:t>
             </a:r>
           </a:p>
         </p:txBody>
@@ -9859,7 +9994,7 @@
     </p:spTree>
     <p:extLst>
       <p:ext uri="{BB962C8B-B14F-4D97-AF65-F5344CB8AC3E}">
-        <p14:creationId xmlns:p14="http://schemas.microsoft.com/office/powerpoint/2010/main" val="1671477636"/>
+        <p14:creationId xmlns:p14="http://schemas.microsoft.com/office/powerpoint/2010/main" val="405791812"/>
       </p:ext>
     </p:extLst>
   </p:cSld>
@@ -9887,10 +10022,10 @@
       </p:grpSpPr>
       <p:sp>
         <p:nvSpPr>
-          <p:cNvPr id="22" name="">
-            <a:extLst xmlns:a="http://schemas.openxmlformats.org/drawingml/2006/main">
-              <a:ext uri="{FF2B5EF4-FFF2-40B4-BE49-F238E27FC236}">
-                <a16:creationId xmlns:a16="http://schemas.microsoft.com/office/drawing/2014/main" id="{2643C3BE-2A76-4038-8555-3F21D9839077}"/>
+          <p:cNvPr id="26" name="">
+            <a:extLst xmlns:a="http://schemas.openxmlformats.org/drawingml/2006/main">
+              <a:ext uri="{FF2B5EF4-FFF2-40B4-BE49-F238E27FC236}">
+                <a16:creationId xmlns:a16="http://schemas.microsoft.com/office/drawing/2014/main" id="{9335EAAE-8E63-49E4-8FA9-F93D07E17B3D}"/>
               </a:ext>
             </a:extLst>
           </p:cNvPr>
@@ -9923,7 +10058,7 @@
           <p:cNvPr id="2" name="">
             <a:extLst xmlns:a="http://schemas.openxmlformats.org/drawingml/2006/main">
               <a:ext uri="{FF2B5EF4-FFF2-40B4-BE49-F238E27FC236}">
-                <a16:creationId xmlns:a16="http://schemas.microsoft.com/office/drawing/2014/main" id="{684B76CD-82D6-41DE-B85C-330102ECE3C2}"/>
+                <a16:creationId xmlns:a16="http://schemas.microsoft.com/office/drawing/2014/main" id="{204E0B0C-E934-4454-9D79-1ABBA7CF96C0}"/>
               </a:ext>
             </a:extLst>
           </p:cNvPr>
@@ -9973,7 +10108,7 @@
           <p:cNvPr id="3" name="">
             <a:extLst xmlns:a="http://schemas.openxmlformats.org/drawingml/2006/main">
               <a:ext uri="{FF2B5EF4-FFF2-40B4-BE49-F238E27FC236}">
-                <a16:creationId xmlns:a16="http://schemas.microsoft.com/office/drawing/2014/main" id="{2E0B6B0A-BF3B-4467-9F5D-5EBC863D003E}"/>
+                <a16:creationId xmlns:a16="http://schemas.microsoft.com/office/drawing/2014/main" id="{9682B080-E2DF-43A5-AF7C-F022EB5A105E}"/>
               </a:ext>
             </a:extLst>
           </p:cNvPr>
@@ -10013,7 +10148,7 @@
                   <a:srgbClr val="EAF2FF"/>
                 </a:solidFill>
               </a:rPr>
-              <a:t>Design a spoken recovery before adding retries</a:t>
+              <a:t>Recovery is a result the agent can reason about</a:t>
             </a:r>
           </a:p>
         </p:txBody>
@@ -10023,7 +10158,7 @@
           <p:cNvPr id="4" name="">
             <a:extLst xmlns:a="http://schemas.openxmlformats.org/drawingml/2006/main">
               <a:ext uri="{FF2B5EF4-FFF2-40B4-BE49-F238E27FC236}">
-                <a16:creationId xmlns:a16="http://schemas.microsoft.com/office/drawing/2014/main" id="{C7AB0AB2-521C-4D7E-8537-120385141D8F}"/>
+                <a16:creationId xmlns:a16="http://schemas.microsoft.com/office/drawing/2014/main" id="{D500D8EE-F070-4213-B09D-2F9718077DB7}"/>
               </a:ext>
             </a:extLst>
           </p:cNvPr>
@@ -10063,7 +10198,7 @@
                   <a:srgbClr val="9AAEC4"/>
                 </a:solidFill>
               </a:rPr>
-              <a:t>The user needs acknowledgement, bounded waiting, and a next move.</a:t>
+              <a:t>This checkpoint uses acknowledgement, a five-second delay, and a safe next move.</a:t>
             </a:r>
           </a:p>
         </p:txBody>
@@ -10073,7 +10208,7 @@
           <p:cNvPr id="5" name="">
             <a:extLst xmlns:a="http://schemas.openxmlformats.org/drawingml/2006/main">
               <a:ext uri="{FF2B5EF4-FFF2-40B4-BE49-F238E27FC236}">
-                <a16:creationId xmlns:a16="http://schemas.microsoft.com/office/drawing/2014/main" id="{1CC7736E-58D6-43EE-939A-87A5F371EF3B}"/>
+                <a16:creationId xmlns:a16="http://schemas.microsoft.com/office/drawing/2014/main" id="{ADF8B6D5-0AEE-4D17-B1BC-AD75B2EF206A}"/>
               </a:ext>
             </a:extLst>
           </p:cNvPr>
@@ -10104,7 +10239,7 @@
           <p:cNvPr id="6" name="">
             <a:extLst xmlns:a="http://schemas.openxmlformats.org/drawingml/2006/main">
               <a:ext uri="{FF2B5EF4-FFF2-40B4-BE49-F238E27FC236}">
-                <a16:creationId xmlns:a16="http://schemas.microsoft.com/office/drawing/2014/main" id="{4CAAC4FE-774F-4EB4-A857-94A7E12DDDE8}"/>
+                <a16:creationId xmlns:a16="http://schemas.microsoft.com/office/drawing/2014/main" id="{C17C5984-33C7-426A-ACF2-FEE64F537D3E}"/>
               </a:ext>
             </a:extLst>
           </p:cNvPr>
@@ -10154,7 +10289,7 @@
           <p:cNvPr id="7" name="">
             <a:extLst xmlns:a="http://schemas.openxmlformats.org/drawingml/2006/main">
               <a:ext uri="{FF2B5EF4-FFF2-40B4-BE49-F238E27FC236}">
-                <a16:creationId xmlns:a16="http://schemas.microsoft.com/office/drawing/2014/main" id="{55EF5B7D-C720-4E81-877B-B20C7F5DCFD8}"/>
+                <a16:creationId xmlns:a16="http://schemas.microsoft.com/office/drawing/2014/main" id="{E13700F2-40E8-437C-8CE6-F56ADC03B14C}"/>
               </a:ext>
             </a:extLst>
           </p:cNvPr>
@@ -10204,18 +10339,18 @@
           <p:cNvPr id="8" name="">
             <a:extLst xmlns:a="http://schemas.openxmlformats.org/drawingml/2006/main">
               <a:ext uri="{FF2B5EF4-FFF2-40B4-BE49-F238E27FC236}">
-                <a16:creationId xmlns:a16="http://schemas.microsoft.com/office/drawing/2014/main" id="{5607D5A4-1459-427F-8CB8-2B07DD2E6871}"/>
-              </a:ext>
-            </a:extLst>
-          </p:cNvPr>
-          <p:cNvSpPr>
-            <a:spLocks xmlns:a="http://schemas.openxmlformats.org/drawingml/2006/main" noGrp="1"/>
-          </p:cNvSpPr>
-          <p:nvPr/>
-        </p:nvSpPr>
-        <p:spPr>
-          <a:xfrm xmlns:a="http://schemas.openxmlformats.org/drawingml/2006/main">
-            <a:off x="952500" y="2286000"/>
+                <a16:creationId xmlns:a16="http://schemas.microsoft.com/office/drawing/2014/main" id="{DCEF874C-EE8E-4900-9062-78A4552CF9FF}"/>
+              </a:ext>
+            </a:extLst>
+          </p:cNvPr>
+          <p:cNvSpPr>
+            <a:spLocks xmlns:a="http://schemas.openxmlformats.org/drawingml/2006/main" noGrp="1"/>
+          </p:cNvSpPr>
+          <p:nvPr/>
+        </p:nvSpPr>
+        <p:spPr>
+          <a:xfrm xmlns:a="http://schemas.openxmlformats.org/drawingml/2006/main">
+            <a:off x="685800" y="2286000"/>
             <a:ext cx="666750" cy="285750"/>
           </a:xfrm>
           <a:prstGeom xmlns:a="http://schemas.openxmlformats.org/drawingml/2006/main" prst="rect">
@@ -10254,19 +10389,19 @@
           <p:cNvPr id="9" name="">
             <a:extLst xmlns:a="http://schemas.openxmlformats.org/drawingml/2006/main">
               <a:ext uri="{FF2B5EF4-FFF2-40B4-BE49-F238E27FC236}">
-                <a16:creationId xmlns:a16="http://schemas.microsoft.com/office/drawing/2014/main" id="{1BF5A875-DFF6-4860-A8B9-57D1DDB5A43A}"/>
-              </a:ext>
-            </a:extLst>
-          </p:cNvPr>
-          <p:cNvSpPr>
-            <a:spLocks xmlns:a="http://schemas.openxmlformats.org/drawingml/2006/main" noGrp="1"/>
-          </p:cNvSpPr>
-          <p:nvPr/>
-        </p:nvSpPr>
-        <p:spPr>
-          <a:xfrm xmlns:a="http://schemas.openxmlformats.org/drawingml/2006/main">
-            <a:off x="952500" y="2781300"/>
-            <a:ext cx="2667000" cy="285750"/>
+                <a16:creationId xmlns:a16="http://schemas.microsoft.com/office/drawing/2014/main" id="{C2108761-95C9-4EDC-864A-8DBBA429D77F}"/>
+              </a:ext>
+            </a:extLst>
+          </p:cNvPr>
+          <p:cNvSpPr>
+            <a:spLocks xmlns:a="http://schemas.openxmlformats.org/drawingml/2006/main" noGrp="1"/>
+          </p:cNvSpPr>
+          <p:nvPr/>
+        </p:nvSpPr>
+        <p:spPr>
+          <a:xfrm xmlns:a="http://schemas.openxmlformats.org/drawingml/2006/main">
+            <a:off x="685800" y="2781300"/>
+            <a:ext cx="2324100" cy="285750"/>
           </a:xfrm>
           <a:prstGeom xmlns:a="http://schemas.openxmlformats.org/drawingml/2006/main" prst="rect">
             <a:avLst/>
@@ -10304,19 +10439,19 @@
           <p:cNvPr id="10" name="">
             <a:extLst xmlns:a="http://schemas.openxmlformats.org/drawingml/2006/main">
               <a:ext uri="{FF2B5EF4-FFF2-40B4-BE49-F238E27FC236}">
-                <a16:creationId xmlns:a16="http://schemas.microsoft.com/office/drawing/2014/main" id="{BCF2BE73-C692-4970-BC8C-F1C8A435A695}"/>
-              </a:ext>
-            </a:extLst>
-          </p:cNvPr>
-          <p:cNvSpPr>
-            <a:spLocks xmlns:a="http://schemas.openxmlformats.org/drawingml/2006/main" noGrp="1"/>
-          </p:cNvSpPr>
-          <p:nvPr/>
-        </p:nvSpPr>
-        <p:spPr>
-          <a:xfrm xmlns:a="http://schemas.openxmlformats.org/drawingml/2006/main">
-            <a:off x="952500" y="3219450"/>
-            <a:ext cx="2667000" cy="28575"/>
+                <a16:creationId xmlns:a16="http://schemas.microsoft.com/office/drawing/2014/main" id="{BE0DEDAD-C979-4D54-A4DB-EC73C1E819B6}"/>
+              </a:ext>
+            </a:extLst>
+          </p:cNvPr>
+          <p:cNvSpPr>
+            <a:spLocks xmlns:a="http://schemas.openxmlformats.org/drawingml/2006/main" noGrp="1"/>
+          </p:cNvSpPr>
+          <p:nvPr/>
+        </p:nvSpPr>
+        <p:spPr>
+          <a:xfrm xmlns:a="http://schemas.openxmlformats.org/drawingml/2006/main">
+            <a:off x="685800" y="3219450"/>
+            <a:ext cx="2324100" cy="28575"/>
           </a:xfrm>
           <a:prstGeom xmlns:a="http://schemas.openxmlformats.org/drawingml/2006/main" prst="rect">
             <a:avLst/>
@@ -10335,19 +10470,19 @@
           <p:cNvPr id="11" name="">
             <a:extLst xmlns:a="http://schemas.openxmlformats.org/drawingml/2006/main">
               <a:ext uri="{FF2B5EF4-FFF2-40B4-BE49-F238E27FC236}">
-                <a16:creationId xmlns:a16="http://schemas.microsoft.com/office/drawing/2014/main" id="{6D1065FE-557E-4026-8FB2-E454338643EA}"/>
-              </a:ext>
-            </a:extLst>
-          </p:cNvPr>
-          <p:cNvSpPr>
-            <a:spLocks xmlns:a="http://schemas.openxmlformats.org/drawingml/2006/main" noGrp="1"/>
-          </p:cNvSpPr>
-          <p:nvPr/>
-        </p:nvSpPr>
-        <p:spPr>
-          <a:xfrm xmlns:a="http://schemas.openxmlformats.org/drawingml/2006/main">
-            <a:off x="952500" y="3543300"/>
-            <a:ext cx="2781300" cy="781050"/>
+                <a16:creationId xmlns:a16="http://schemas.microsoft.com/office/drawing/2014/main" id="{4E2DFB43-8480-4D5A-8E74-F4D6996140FB}"/>
+              </a:ext>
+            </a:extLst>
+          </p:cNvPr>
+          <p:cNvSpPr>
+            <a:spLocks xmlns:a="http://schemas.openxmlformats.org/drawingml/2006/main" noGrp="1"/>
+          </p:cNvSpPr>
+          <p:nvPr/>
+        </p:nvSpPr>
+        <p:spPr>
+          <a:xfrm xmlns:a="http://schemas.openxmlformats.org/drawingml/2006/main">
+            <a:off x="685800" y="3543300"/>
+            <a:ext cx="2324100" cy="781050"/>
           </a:xfrm>
           <a:prstGeom xmlns:a="http://schemas.openxmlformats.org/drawingml/2006/main" prst="rect">
             <a:avLst/>
@@ -10363,14 +10498,14 @@
           <a:lstStyle xmlns:a="http://schemas.openxmlformats.org/drawingml/2006/main"/>
           <a:p xmlns:a="http://schemas.openxmlformats.org/drawingml/2006/main">
             <a:pPr algn="l">
-              <a:defRPr sz="1650" b="0" i="0">
+              <a:defRPr sz="1500" b="0" i="0">
                 <a:solidFill>
                   <a:srgbClr val="9AAEC4"/>
                 </a:solidFill>
               </a:defRPr>
             </a:pPr>
             <a:r>
-              <a:rPr sz="1650" b="0" i="0">
+              <a:rPr sz="1500" b="0" i="0">
                 <a:solidFill>
                   <a:srgbClr val="9AAEC4"/>
                 </a:solidFill>
@@ -10385,18 +10520,18 @@
           <p:cNvPr id="12" name="">
             <a:extLst xmlns:a="http://schemas.openxmlformats.org/drawingml/2006/main">
               <a:ext uri="{FF2B5EF4-FFF2-40B4-BE49-F238E27FC236}">
-                <a16:creationId xmlns:a16="http://schemas.microsoft.com/office/drawing/2014/main" id="{A65B0004-1E06-47D1-B6EF-349BD41E2C2E}"/>
-              </a:ext>
-            </a:extLst>
-          </p:cNvPr>
-          <p:cNvSpPr>
-            <a:spLocks xmlns:a="http://schemas.openxmlformats.org/drawingml/2006/main" noGrp="1"/>
-          </p:cNvSpPr>
-          <p:nvPr/>
-        </p:nvSpPr>
-        <p:spPr>
-          <a:xfrm xmlns:a="http://schemas.openxmlformats.org/drawingml/2006/main">
-            <a:off x="4229100" y="2286000"/>
+                <a16:creationId xmlns:a16="http://schemas.microsoft.com/office/drawing/2014/main" id="{A50A7A66-B68B-4171-B650-0EF517BD6F87}"/>
+              </a:ext>
+            </a:extLst>
+          </p:cNvPr>
+          <p:cNvSpPr>
+            <a:spLocks xmlns:a="http://schemas.openxmlformats.org/drawingml/2006/main" noGrp="1"/>
+          </p:cNvSpPr>
+          <p:nvPr/>
+        </p:nvSpPr>
+        <p:spPr>
+          <a:xfrm xmlns:a="http://schemas.openxmlformats.org/drawingml/2006/main">
+            <a:off x="3371850" y="2286000"/>
             <a:ext cx="666750" cy="285750"/>
           </a:xfrm>
           <a:prstGeom xmlns:a="http://schemas.openxmlformats.org/drawingml/2006/main" prst="rect">
@@ -10435,19 +10570,19 @@
           <p:cNvPr id="13" name="">
             <a:extLst xmlns:a="http://schemas.openxmlformats.org/drawingml/2006/main">
               <a:ext uri="{FF2B5EF4-FFF2-40B4-BE49-F238E27FC236}">
-                <a16:creationId xmlns:a16="http://schemas.microsoft.com/office/drawing/2014/main" id="{340B73BB-5A9D-47FB-9D96-CCCB5373E312}"/>
-              </a:ext>
-            </a:extLst>
-          </p:cNvPr>
-          <p:cNvSpPr>
-            <a:spLocks xmlns:a="http://schemas.openxmlformats.org/drawingml/2006/main" noGrp="1"/>
-          </p:cNvSpPr>
-          <p:nvPr/>
-        </p:nvSpPr>
-        <p:spPr>
-          <a:xfrm xmlns:a="http://schemas.openxmlformats.org/drawingml/2006/main">
-            <a:off x="4229100" y="2781300"/>
-            <a:ext cx="2667000" cy="285750"/>
+                <a16:creationId xmlns:a16="http://schemas.microsoft.com/office/drawing/2014/main" id="{71560432-8C5F-4211-B4A4-9D12C4594C1B}"/>
+              </a:ext>
+            </a:extLst>
+          </p:cNvPr>
+          <p:cNvSpPr>
+            <a:spLocks xmlns:a="http://schemas.openxmlformats.org/drawingml/2006/main" noGrp="1"/>
+          </p:cNvSpPr>
+          <p:nvPr/>
+        </p:nvSpPr>
+        <p:spPr>
+          <a:xfrm xmlns:a="http://schemas.openxmlformats.org/drawingml/2006/main">
+            <a:off x="3371850" y="2781300"/>
+            <a:ext cx="2324100" cy="285750"/>
           </a:xfrm>
           <a:prstGeom xmlns:a="http://schemas.openxmlformats.org/drawingml/2006/main" prst="rect">
             <a:avLst/>
@@ -10475,7 +10610,7 @@
                   <a:srgbClr val="EAF2FF"/>
                 </a:solidFill>
               </a:rPr>
-              <a:t>BOUND</a:t>
+              <a:t>WAIT</a:t>
             </a:r>
           </a:p>
         </p:txBody>
@@ -10485,19 +10620,19 @@
           <p:cNvPr id="14" name="">
             <a:extLst xmlns:a="http://schemas.openxmlformats.org/drawingml/2006/main">
               <a:ext uri="{FF2B5EF4-FFF2-40B4-BE49-F238E27FC236}">
-                <a16:creationId xmlns:a16="http://schemas.microsoft.com/office/drawing/2014/main" id="{BCE732C9-A0CC-4F65-8C80-CE57A132FF81}"/>
-              </a:ext>
-            </a:extLst>
-          </p:cNvPr>
-          <p:cNvSpPr>
-            <a:spLocks xmlns:a="http://schemas.openxmlformats.org/drawingml/2006/main" noGrp="1"/>
-          </p:cNvSpPr>
-          <p:nvPr/>
-        </p:nvSpPr>
-        <p:spPr>
-          <a:xfrm xmlns:a="http://schemas.openxmlformats.org/drawingml/2006/main">
-            <a:off x="4229100" y="3219450"/>
-            <a:ext cx="2667000" cy="28575"/>
+                <a16:creationId xmlns:a16="http://schemas.microsoft.com/office/drawing/2014/main" id="{33833115-C796-4E8C-8272-FAF71355F480}"/>
+              </a:ext>
+            </a:extLst>
+          </p:cNvPr>
+          <p:cNvSpPr>
+            <a:spLocks xmlns:a="http://schemas.openxmlformats.org/drawingml/2006/main" noGrp="1"/>
+          </p:cNvSpPr>
+          <p:nvPr/>
+        </p:nvSpPr>
+        <p:spPr>
+          <a:xfrm xmlns:a="http://schemas.openxmlformats.org/drawingml/2006/main">
+            <a:off x="3371850" y="3219450"/>
+            <a:ext cx="2324100" cy="28575"/>
           </a:xfrm>
           <a:prstGeom xmlns:a="http://schemas.openxmlformats.org/drawingml/2006/main" prst="rect">
             <a:avLst/>
@@ -10516,19 +10651,19 @@
           <p:cNvPr id="15" name="">
             <a:extLst xmlns:a="http://schemas.openxmlformats.org/drawingml/2006/main">
               <a:ext uri="{FF2B5EF4-FFF2-40B4-BE49-F238E27FC236}">
-                <a16:creationId xmlns:a16="http://schemas.microsoft.com/office/drawing/2014/main" id="{6D2341F3-1318-4015-829C-D5117B03F00A}"/>
-              </a:ext>
-            </a:extLst>
-          </p:cNvPr>
-          <p:cNvSpPr>
-            <a:spLocks xmlns:a="http://schemas.openxmlformats.org/drawingml/2006/main" noGrp="1"/>
-          </p:cNvSpPr>
-          <p:nvPr/>
-        </p:nvSpPr>
-        <p:spPr>
-          <a:xfrm xmlns:a="http://schemas.openxmlformats.org/drawingml/2006/main">
-            <a:off x="4229100" y="3543300"/>
-            <a:ext cx="2781300" cy="781050"/>
+                <a16:creationId xmlns:a16="http://schemas.microsoft.com/office/drawing/2014/main" id="{C082CD8A-FE54-4BB4-8B2D-9DB5AF265D9B}"/>
+              </a:ext>
+            </a:extLst>
+          </p:cNvPr>
+          <p:cNvSpPr>
+            <a:spLocks xmlns:a="http://schemas.openxmlformats.org/drawingml/2006/main" noGrp="1"/>
+          </p:cNvSpPr>
+          <p:nvPr/>
+        </p:nvSpPr>
+        <p:spPr>
+          <a:xfrm xmlns:a="http://schemas.openxmlformats.org/drawingml/2006/main">
+            <a:off x="3371850" y="3543300"/>
+            <a:ext cx="2324100" cy="781050"/>
           </a:xfrm>
           <a:prstGeom xmlns:a="http://schemas.openxmlformats.org/drawingml/2006/main" prst="rect">
             <a:avLst/>
@@ -10544,19 +10679,19 @@
           <a:lstStyle xmlns:a="http://schemas.openxmlformats.org/drawingml/2006/main"/>
           <a:p xmlns:a="http://schemas.openxmlformats.org/drawingml/2006/main">
             <a:pPr algn="l">
-              <a:defRPr sz="1650" b="0" i="0">
+              <a:defRPr sz="1500" b="0" i="0">
                 <a:solidFill>
                   <a:srgbClr val="9AAEC4"/>
                 </a:solidFill>
               </a:defRPr>
             </a:pPr>
             <a:r>
-              <a:rPr sz="1650" b="0" i="0">
+              <a:rPr sz="1500" b="0" i="0">
                 <a:solidFill>
                   <a:srgbClr val="9AAEC4"/>
                 </a:solidFill>
               </a:rPr>
-              <a:t>timeout + one retry</a:t>
+              <a:t>five-second tool delay</a:t>
             </a:r>
           </a:p>
         </p:txBody>
@@ -10566,18 +10701,18 @@
           <p:cNvPr id="16" name="">
             <a:extLst xmlns:a="http://schemas.openxmlformats.org/drawingml/2006/main">
               <a:ext uri="{FF2B5EF4-FFF2-40B4-BE49-F238E27FC236}">
-                <a16:creationId xmlns:a16="http://schemas.microsoft.com/office/drawing/2014/main" id="{4A7ECDAA-DCC7-427C-8A23-1C6E98B7F781}"/>
-              </a:ext>
-            </a:extLst>
-          </p:cNvPr>
-          <p:cNvSpPr>
-            <a:spLocks xmlns:a="http://schemas.openxmlformats.org/drawingml/2006/main" noGrp="1"/>
-          </p:cNvSpPr>
-          <p:nvPr/>
-        </p:nvSpPr>
-        <p:spPr>
-          <a:xfrm xmlns:a="http://schemas.openxmlformats.org/drawingml/2006/main">
-            <a:off x="7505700" y="2286000"/>
+                <a16:creationId xmlns:a16="http://schemas.microsoft.com/office/drawing/2014/main" id="{C7C0E2E1-23B6-4AC7-8DF6-50F6C5DCB938}"/>
+              </a:ext>
+            </a:extLst>
+          </p:cNvPr>
+          <p:cNvSpPr>
+            <a:spLocks xmlns:a="http://schemas.openxmlformats.org/drawingml/2006/main" noGrp="1"/>
+          </p:cNvSpPr>
+          <p:nvPr/>
+        </p:nvSpPr>
+        <p:spPr>
+          <a:xfrm xmlns:a="http://schemas.openxmlformats.org/drawingml/2006/main">
+            <a:off x="6057900" y="2286000"/>
             <a:ext cx="666750" cy="285750"/>
           </a:xfrm>
           <a:prstGeom xmlns:a="http://schemas.openxmlformats.org/drawingml/2006/main" prst="rect">
@@ -10616,19 +10751,19 @@
           <p:cNvPr id="17" name="">
             <a:extLst xmlns:a="http://schemas.openxmlformats.org/drawingml/2006/main">
               <a:ext uri="{FF2B5EF4-FFF2-40B4-BE49-F238E27FC236}">
-                <a16:creationId xmlns:a16="http://schemas.microsoft.com/office/drawing/2014/main" id="{8FA9CFC1-3F9C-49C7-A4D5-59B4B0715AC0}"/>
-              </a:ext>
-            </a:extLst>
-          </p:cNvPr>
-          <p:cNvSpPr>
-            <a:spLocks xmlns:a="http://schemas.openxmlformats.org/drawingml/2006/main" noGrp="1"/>
-          </p:cNvSpPr>
-          <p:nvPr/>
-        </p:nvSpPr>
-        <p:spPr>
-          <a:xfrm xmlns:a="http://schemas.openxmlformats.org/drawingml/2006/main">
-            <a:off x="7505700" y="2781300"/>
-            <a:ext cx="2667000" cy="285750"/>
+                <a16:creationId xmlns:a16="http://schemas.microsoft.com/office/drawing/2014/main" id="{E308E521-4231-47A2-841A-5726E5AD301C}"/>
+              </a:ext>
+            </a:extLst>
+          </p:cNvPr>
+          <p:cNvSpPr>
+            <a:spLocks xmlns:a="http://schemas.openxmlformats.org/drawingml/2006/main" noGrp="1"/>
+          </p:cNvSpPr>
+          <p:nvPr/>
+        </p:nvSpPr>
+        <p:spPr>
+          <a:xfrm xmlns:a="http://schemas.openxmlformats.org/drawingml/2006/main">
+            <a:off x="6057900" y="2781300"/>
+            <a:ext cx="2324100" cy="285750"/>
           </a:xfrm>
           <a:prstGeom xmlns:a="http://schemas.openxmlformats.org/drawingml/2006/main" prst="rect">
             <a:avLst/>
@@ -10656,7 +10791,7 @@
                   <a:srgbClr val="EAF2FF"/>
                 </a:solidFill>
               </a:rPr>
-              <a:t>RECOVER</a:t>
+              <a:t>RETURN</a:t>
             </a:r>
           </a:p>
         </p:txBody>
@@ -10666,19 +10801,19 @@
           <p:cNvPr id="18" name="">
             <a:extLst xmlns:a="http://schemas.openxmlformats.org/drawingml/2006/main">
               <a:ext uri="{FF2B5EF4-FFF2-40B4-BE49-F238E27FC236}">
-                <a16:creationId xmlns:a16="http://schemas.microsoft.com/office/drawing/2014/main" id="{88E4B12D-B45B-4F6A-B666-FD23419C2BEF}"/>
-              </a:ext>
-            </a:extLst>
-          </p:cNvPr>
-          <p:cNvSpPr>
-            <a:spLocks xmlns:a="http://schemas.openxmlformats.org/drawingml/2006/main" noGrp="1"/>
-          </p:cNvSpPr>
-          <p:nvPr/>
-        </p:nvSpPr>
-        <p:spPr>
-          <a:xfrm xmlns:a="http://schemas.openxmlformats.org/drawingml/2006/main">
-            <a:off x="7505700" y="3219450"/>
-            <a:ext cx="2667000" cy="28575"/>
+                <a16:creationId xmlns:a16="http://schemas.microsoft.com/office/drawing/2014/main" id="{9DAB291A-08D7-45C8-B345-51D8C3952328}"/>
+              </a:ext>
+            </a:extLst>
+          </p:cNvPr>
+          <p:cNvSpPr>
+            <a:spLocks xmlns:a="http://schemas.openxmlformats.org/drawingml/2006/main" noGrp="1"/>
+          </p:cNvSpPr>
+          <p:nvPr/>
+        </p:nvSpPr>
+        <p:spPr>
+          <a:xfrm xmlns:a="http://schemas.openxmlformats.org/drawingml/2006/main">
+            <a:off x="6057900" y="3219450"/>
+            <a:ext cx="2324100" cy="28575"/>
           </a:xfrm>
           <a:prstGeom xmlns:a="http://schemas.openxmlformats.org/drawingml/2006/main" prst="rect">
             <a:avLst/>
@@ -10697,19 +10832,19 @@
           <p:cNvPr id="19" name="">
             <a:extLst xmlns:a="http://schemas.openxmlformats.org/drawingml/2006/main">
               <a:ext uri="{FF2B5EF4-FFF2-40B4-BE49-F238E27FC236}">
-                <a16:creationId xmlns:a16="http://schemas.microsoft.com/office/drawing/2014/main" id="{223D8F2A-7868-47AC-BAA3-FEC5231B37B2}"/>
-              </a:ext>
-            </a:extLst>
-          </p:cNvPr>
-          <p:cNvSpPr>
-            <a:spLocks xmlns:a="http://schemas.openxmlformats.org/drawingml/2006/main" noGrp="1"/>
-          </p:cNvSpPr>
-          <p:nvPr/>
-        </p:nvSpPr>
-        <p:spPr>
-          <a:xfrm xmlns:a="http://schemas.openxmlformats.org/drawingml/2006/main">
-            <a:off x="7505700" y="3543300"/>
-            <a:ext cx="2781300" cy="781050"/>
+                <a16:creationId xmlns:a16="http://schemas.microsoft.com/office/drawing/2014/main" id="{DC199B58-E147-40D6-B64C-73D445E9DBCD}"/>
+              </a:ext>
+            </a:extLst>
+          </p:cNvPr>
+          <p:cNvSpPr>
+            <a:spLocks xmlns:a="http://schemas.openxmlformats.org/drawingml/2006/main" noGrp="1"/>
+          </p:cNvSpPr>
+          <p:nvPr/>
+        </p:nvSpPr>
+        <p:spPr>
+          <a:xfrm xmlns:a="http://schemas.openxmlformats.org/drawingml/2006/main">
+            <a:off x="6057900" y="3543300"/>
+            <a:ext cx="2324100" cy="781050"/>
           </a:xfrm>
           <a:prstGeom xmlns:a="http://schemas.openxmlformats.org/drawingml/2006/main" prst="rect">
             <a:avLst/>
@@ -10725,19 +10860,19 @@
           <a:lstStyle xmlns:a="http://schemas.openxmlformats.org/drawingml/2006/main"/>
           <a:p xmlns:a="http://schemas.openxmlformats.org/drawingml/2006/main">
             <a:pPr algn="l">
-              <a:defRPr sz="1650" b="0" i="0">
+              <a:defRPr sz="1500" b="0" i="0">
                 <a:solidFill>
                   <a:srgbClr val="9AAEC4"/>
                 </a:solidFill>
               </a:defRPr>
             </a:pPr>
             <a:r>
-              <a:rPr sz="1650" b="0" i="0">
+              <a:rPr sz="1500" b="0" i="0">
                 <a:solidFill>
                   <a:srgbClr val="9AAEC4"/>
                 </a:solidFill>
               </a:rPr>
-              <a:t>offer another path</a:t>
+              <a:t>status · message · retryable</a:t>
             </a:r>
           </a:p>
         </p:txBody>
@@ -10747,7 +10882,188 @@
           <p:cNvPr id="20" name="">
             <a:extLst xmlns:a="http://schemas.openxmlformats.org/drawingml/2006/main">
               <a:ext uri="{FF2B5EF4-FFF2-40B4-BE49-F238E27FC236}">
-                <a16:creationId xmlns:a16="http://schemas.microsoft.com/office/drawing/2014/main" id="{6D1FAA6E-F4A8-4C58-8E8D-CCE46FAE9CAF}"/>
+                <a16:creationId xmlns:a16="http://schemas.microsoft.com/office/drawing/2014/main" id="{07265A64-2C09-4331-B226-7253425438DD}"/>
+              </a:ext>
+            </a:extLst>
+          </p:cNvPr>
+          <p:cNvSpPr>
+            <a:spLocks xmlns:a="http://schemas.openxmlformats.org/drawingml/2006/main" noGrp="1"/>
+          </p:cNvSpPr>
+          <p:nvPr/>
+        </p:nvSpPr>
+        <p:spPr>
+          <a:xfrm xmlns:a="http://schemas.openxmlformats.org/drawingml/2006/main">
+            <a:off x="8743950" y="2286000"/>
+            <a:ext cx="666750" cy="285750"/>
+          </a:xfrm>
+          <a:prstGeom xmlns:a="http://schemas.openxmlformats.org/drawingml/2006/main" prst="rect">
+            <a:avLst/>
+          </a:prstGeom>
+          <a:noFill xmlns:a="http://schemas.openxmlformats.org/drawingml/2006/main"/>
+          <a:ln xmlns:a="http://schemas.openxmlformats.org/drawingml/2006/main" w="0">
+            <a:noFill/>
+            <a:prstDash val="solid"/>
+          </a:ln>
+        </p:spPr>
+        <p:txBody>
+          <a:bodyPr xmlns:a="http://schemas.openxmlformats.org/drawingml/2006/main" anchor="t"/>
+          <a:lstStyle xmlns:a="http://schemas.openxmlformats.org/drawingml/2006/main"/>
+          <a:p xmlns:a="http://schemas.openxmlformats.org/drawingml/2006/main">
+            <a:pPr algn="l">
+              <a:defRPr sz="1275" b="1" i="0">
+                <a:solidFill>
+                  <a:srgbClr val="A78BFA"/>
+                </a:solidFill>
+              </a:defRPr>
+            </a:pPr>
+            <a:r>
+              <a:rPr sz="1275" b="1" i="0">
+                <a:solidFill>
+                  <a:srgbClr val="A78BFA"/>
+                </a:solidFill>
+              </a:rPr>
+              <a:t>04</a:t>
+            </a:r>
+          </a:p>
+        </p:txBody>
+      </p:sp>
+      <p:sp>
+        <p:nvSpPr>
+          <p:cNvPr id="21" name="">
+            <a:extLst xmlns:a="http://schemas.openxmlformats.org/drawingml/2006/main">
+              <a:ext uri="{FF2B5EF4-FFF2-40B4-BE49-F238E27FC236}">
+                <a16:creationId xmlns:a16="http://schemas.microsoft.com/office/drawing/2014/main" id="{926A7734-3DA9-4BF7-8FA1-1F2C869F6207}"/>
+              </a:ext>
+            </a:extLst>
+          </p:cNvPr>
+          <p:cNvSpPr>
+            <a:spLocks xmlns:a="http://schemas.openxmlformats.org/drawingml/2006/main" noGrp="1"/>
+          </p:cNvSpPr>
+          <p:nvPr/>
+        </p:nvSpPr>
+        <p:spPr>
+          <a:xfrm xmlns:a="http://schemas.openxmlformats.org/drawingml/2006/main">
+            <a:off x="8743950" y="2781300"/>
+            <a:ext cx="2324100" cy="285750"/>
+          </a:xfrm>
+          <a:prstGeom xmlns:a="http://schemas.openxmlformats.org/drawingml/2006/main" prst="rect">
+            <a:avLst/>
+          </a:prstGeom>
+          <a:noFill xmlns:a="http://schemas.openxmlformats.org/drawingml/2006/main"/>
+          <a:ln xmlns:a="http://schemas.openxmlformats.org/drawingml/2006/main" w="0">
+            <a:noFill/>
+            <a:prstDash val="solid"/>
+          </a:ln>
+        </p:spPr>
+        <p:txBody>
+          <a:bodyPr xmlns:a="http://schemas.openxmlformats.org/drawingml/2006/main" anchor="t"/>
+          <a:lstStyle xmlns:a="http://schemas.openxmlformats.org/drawingml/2006/main"/>
+          <a:p xmlns:a="http://schemas.openxmlformats.org/drawingml/2006/main">
+            <a:pPr algn="l">
+              <a:defRPr sz="1725" b="1" i="0">
+                <a:solidFill>
+                  <a:srgbClr val="EAF2FF"/>
+                </a:solidFill>
+              </a:defRPr>
+            </a:pPr>
+            <a:r>
+              <a:rPr sz="1725" b="1" i="0">
+                <a:solidFill>
+                  <a:srgbClr val="EAF2FF"/>
+                </a:solidFill>
+              </a:rPr>
+              <a:t>RECOVER</a:t>
+            </a:r>
+          </a:p>
+        </p:txBody>
+      </p:sp>
+      <p:sp>
+        <p:nvSpPr>
+          <p:cNvPr id="22" name="">
+            <a:extLst xmlns:a="http://schemas.openxmlformats.org/drawingml/2006/main">
+              <a:ext uri="{FF2B5EF4-FFF2-40B4-BE49-F238E27FC236}">
+                <a16:creationId xmlns:a16="http://schemas.microsoft.com/office/drawing/2014/main" id="{686C5629-05B6-4762-88D5-8FD6D1F1A450}"/>
+              </a:ext>
+            </a:extLst>
+          </p:cNvPr>
+          <p:cNvSpPr>
+            <a:spLocks xmlns:a="http://schemas.openxmlformats.org/drawingml/2006/main" noGrp="1"/>
+          </p:cNvSpPr>
+          <p:nvPr/>
+        </p:nvSpPr>
+        <p:spPr>
+          <a:xfrm xmlns:a="http://schemas.openxmlformats.org/drawingml/2006/main">
+            <a:off x="8743950" y="3219450"/>
+            <a:ext cx="2324100" cy="28575"/>
+          </a:xfrm>
+          <a:prstGeom xmlns:a="http://schemas.openxmlformats.org/drawingml/2006/main" prst="rect">
+            <a:avLst/>
+          </a:prstGeom>
+          <a:solidFill xmlns:a="http://schemas.openxmlformats.org/drawingml/2006/main">
+            <a:srgbClr val="A78BFA"/>
+          </a:solidFill>
+          <a:ln xmlns:a="http://schemas.openxmlformats.org/drawingml/2006/main" w="0">
+            <a:noFill/>
+            <a:prstDash val="solid"/>
+          </a:ln>
+        </p:spPr>
+      </p:sp>
+      <p:sp>
+        <p:nvSpPr>
+          <p:cNvPr id="23" name="">
+            <a:extLst xmlns:a="http://schemas.openxmlformats.org/drawingml/2006/main">
+              <a:ext uri="{FF2B5EF4-FFF2-40B4-BE49-F238E27FC236}">
+                <a16:creationId xmlns:a16="http://schemas.microsoft.com/office/drawing/2014/main" id="{32C309E9-0F54-48E2-A245-96FA4090EF6F}"/>
+              </a:ext>
+            </a:extLst>
+          </p:cNvPr>
+          <p:cNvSpPr>
+            <a:spLocks xmlns:a="http://schemas.openxmlformats.org/drawingml/2006/main" noGrp="1"/>
+          </p:cNvSpPr>
+          <p:nvPr/>
+        </p:nvSpPr>
+        <p:spPr>
+          <a:xfrm xmlns:a="http://schemas.openxmlformats.org/drawingml/2006/main">
+            <a:off x="8743950" y="3543300"/>
+            <a:ext cx="2324100" cy="781050"/>
+          </a:xfrm>
+          <a:prstGeom xmlns:a="http://schemas.openxmlformats.org/drawingml/2006/main" prst="rect">
+            <a:avLst/>
+          </a:prstGeom>
+          <a:noFill xmlns:a="http://schemas.openxmlformats.org/drawingml/2006/main"/>
+          <a:ln xmlns:a="http://schemas.openxmlformats.org/drawingml/2006/main" w="0">
+            <a:noFill/>
+            <a:prstDash val="solid"/>
+          </a:ln>
+        </p:spPr>
+        <p:txBody>
+          <a:bodyPr xmlns:a="http://schemas.openxmlformats.org/drawingml/2006/main" anchor="t"/>
+          <a:lstStyle xmlns:a="http://schemas.openxmlformats.org/drawingml/2006/main"/>
+          <a:p xmlns:a="http://schemas.openxmlformats.org/drawingml/2006/main">
+            <a:pPr algn="l">
+              <a:defRPr sz="1500" b="0" i="0">
+                <a:solidFill>
+                  <a:srgbClr val="9AAEC4"/>
+                </a:solidFill>
+              </a:defRPr>
+            </a:pPr>
+            <a:r>
+              <a:rPr sz="1500" b="0" i="0">
+                <a:solidFill>
+                  <a:srgbClr val="9AAEC4"/>
+                </a:solidFill>
+              </a:rPr>
+              <a:t>apologize + offer another time</a:t>
+            </a:r>
+          </a:p>
+        </p:txBody>
+      </p:sp>
+      <p:sp>
+        <p:nvSpPr>
+          <p:cNvPr id="24" name="">
+            <a:extLst xmlns:a="http://schemas.openxmlformats.org/drawingml/2006/main">
+              <a:ext uri="{FF2B5EF4-FFF2-40B4-BE49-F238E27FC236}">
+                <a16:creationId xmlns:a16="http://schemas.microsoft.com/office/drawing/2014/main" id="{A5DDA728-3285-4618-A8A7-27898271B7E5}"/>
               </a:ext>
             </a:extLst>
           </p:cNvPr>
@@ -10779,10 +11095,10 @@
       </p:sp>
       <p:sp>
         <p:nvSpPr>
-          <p:cNvPr id="21" name="">
-            <a:extLst xmlns:a="http://schemas.openxmlformats.org/drawingml/2006/main">
-              <a:ext uri="{FF2B5EF4-FFF2-40B4-BE49-F238E27FC236}">
-                <a16:creationId xmlns:a16="http://schemas.microsoft.com/office/drawing/2014/main" id="{DF000C51-7EE0-4BBE-B4FF-DE586DD7CB81}"/>
+          <p:cNvPr id="25" name="">
+            <a:extLst xmlns:a="http://schemas.openxmlformats.org/drawingml/2006/main">
+              <a:ext uri="{FF2B5EF4-FFF2-40B4-BE49-F238E27FC236}">
+                <a16:creationId xmlns:a16="http://schemas.microsoft.com/office/drawing/2014/main" id="{2BC3A0C6-DAED-4088-89F3-4BAAE5EE99E7}"/>
               </a:ext>
             </a:extLst>
           </p:cNvPr>
@@ -10810,19 +11126,19 @@
           <a:lstStyle xmlns:a="http://schemas.openxmlformats.org/drawingml/2006/main"/>
           <a:p xmlns:a="http://schemas.openxmlformats.org/drawingml/2006/main">
             <a:pPr algn="ctr">
-              <a:defRPr sz="1500" b="1" i="0">
+              <a:defRPr sz="1575" b="1" i="0">
                 <a:solidFill>
                   <a:srgbClr val="78F0B2"/>
                 </a:solidFill>
               </a:defRPr>
             </a:pPr>
             <a:r>
-              <a:rPr sz="1500" b="1" i="0">
+              <a:rPr sz="1575" b="1" i="0">
                 <a:solidFill>
                   <a:srgbClr val="78F0B2"/>
                 </a:solidFill>
               </a:rPr>
-              <a:t>Instrument: time to first audio • tool latency • cancel success • error outcome</a:t>
+              <a:t>The agent does not retry unless the user asks.</a:t>
             </a:r>
           </a:p>
         </p:txBody>
@@ -10830,7 +11146,7 @@
     </p:spTree>
     <p:extLst>
       <p:ext uri="{BB962C8B-B14F-4D97-AF65-F5344CB8AC3E}">
-        <p14:creationId xmlns:p14="http://schemas.microsoft.com/office/powerpoint/2010/main" val="485737674"/>
+        <p14:creationId xmlns:p14="http://schemas.microsoft.com/office/powerpoint/2010/main" val="1769582974"/>
       </p:ext>
     </p:extLst>
   </p:cSld>
@@ -10861,7 +11177,7 @@
           <p:cNvPr id="24" name="">
             <a:extLst xmlns:a="http://schemas.openxmlformats.org/drawingml/2006/main">
               <a:ext uri="{FF2B5EF4-FFF2-40B4-BE49-F238E27FC236}">
-                <a16:creationId xmlns:a16="http://schemas.microsoft.com/office/drawing/2014/main" id="{F4510CC9-63D6-4CD5-95E1-F403F8E5E201}"/>
+                <a16:creationId xmlns:a16="http://schemas.microsoft.com/office/drawing/2014/main" id="{221E199F-C794-42BA-874B-1B22B0939954}"/>
               </a:ext>
             </a:extLst>
           </p:cNvPr>
@@ -10894,7 +11210,7 @@
           <p:cNvPr id="2" name="">
             <a:extLst xmlns:a="http://schemas.openxmlformats.org/drawingml/2006/main">
               <a:ext uri="{FF2B5EF4-FFF2-40B4-BE49-F238E27FC236}">
-                <a16:creationId xmlns:a16="http://schemas.microsoft.com/office/drawing/2014/main" id="{9243937F-BF72-4882-B771-E8E40F07AA91}"/>
+                <a16:creationId xmlns:a16="http://schemas.microsoft.com/office/drawing/2014/main" id="{9AD6B6E8-7359-4EB7-9282-587E72EAEBC1}"/>
               </a:ext>
             </a:extLst>
           </p:cNvPr>
@@ -10944,7 +11260,7 @@
           <p:cNvPr id="3" name="">
             <a:extLst xmlns:a="http://schemas.openxmlformats.org/drawingml/2006/main">
               <a:ext uri="{FF2B5EF4-FFF2-40B4-BE49-F238E27FC236}">
-                <a16:creationId xmlns:a16="http://schemas.microsoft.com/office/drawing/2014/main" id="{7A8133DC-BBB7-4AE6-A333-35C9F5CED7EA}"/>
+                <a16:creationId xmlns:a16="http://schemas.microsoft.com/office/drawing/2014/main" id="{59756AE7-955C-43ED-BD25-C8017609695E}"/>
               </a:ext>
             </a:extLst>
           </p:cNvPr>
@@ -10994,7 +11310,7 @@
           <p:cNvPr id="4" name="">
             <a:extLst xmlns:a="http://schemas.openxmlformats.org/drawingml/2006/main">
               <a:ext uri="{FF2B5EF4-FFF2-40B4-BE49-F238E27FC236}">
-                <a16:creationId xmlns:a16="http://schemas.microsoft.com/office/drawing/2014/main" id="{0268B90B-D23C-477A-99C3-229750753870}"/>
+                <a16:creationId xmlns:a16="http://schemas.microsoft.com/office/drawing/2014/main" id="{03F6BE11-AF13-4AFC-B2DE-8AA202973267}"/>
               </a:ext>
             </a:extLst>
           </p:cNvPr>
@@ -11044,7 +11360,7 @@
           <p:cNvPr id="5" name="">
             <a:extLst xmlns:a="http://schemas.openxmlformats.org/drawingml/2006/main">
               <a:ext uri="{FF2B5EF4-FFF2-40B4-BE49-F238E27FC236}">
-                <a16:creationId xmlns:a16="http://schemas.microsoft.com/office/drawing/2014/main" id="{8696F5C6-2A79-493E-97A5-FC388E6E05FA}"/>
+                <a16:creationId xmlns:a16="http://schemas.microsoft.com/office/drawing/2014/main" id="{8098850B-E95A-4E41-87B5-33424544D21F}"/>
               </a:ext>
             </a:extLst>
           </p:cNvPr>
@@ -11075,7 +11391,7 @@
           <p:cNvPr id="6" name="">
             <a:extLst xmlns:a="http://schemas.openxmlformats.org/drawingml/2006/main">
               <a:ext uri="{FF2B5EF4-FFF2-40B4-BE49-F238E27FC236}">
-                <a16:creationId xmlns:a16="http://schemas.microsoft.com/office/drawing/2014/main" id="{22FE18D2-BD7B-4A81-9CFD-4ECED4D101E6}"/>
+                <a16:creationId xmlns:a16="http://schemas.microsoft.com/office/drawing/2014/main" id="{29EEDFC1-920D-46E7-B8E8-7C8CCB9409C1}"/>
               </a:ext>
             </a:extLst>
           </p:cNvPr>
@@ -11125,7 +11441,7 @@
           <p:cNvPr id="7" name="">
             <a:extLst xmlns:a="http://schemas.openxmlformats.org/drawingml/2006/main">
               <a:ext uri="{FF2B5EF4-FFF2-40B4-BE49-F238E27FC236}">
-                <a16:creationId xmlns:a16="http://schemas.microsoft.com/office/drawing/2014/main" id="{7A2C80DC-A057-4101-8A03-D0F7F2A7EF18}"/>
+                <a16:creationId xmlns:a16="http://schemas.microsoft.com/office/drawing/2014/main" id="{A3A0EAD4-0EF4-446F-BD6F-782DC2FC8FDA}"/>
               </a:ext>
             </a:extLst>
           </p:cNvPr>
@@ -11175,7 +11491,7 @@
           <p:cNvPr id="8" name="">
             <a:extLst xmlns:a="http://schemas.openxmlformats.org/drawingml/2006/main">
               <a:ext uri="{FF2B5EF4-FFF2-40B4-BE49-F238E27FC236}">
-                <a16:creationId xmlns:a16="http://schemas.microsoft.com/office/drawing/2014/main" id="{FAD9D826-164B-4B1D-911C-910D4C2569D3}"/>
+                <a16:creationId xmlns:a16="http://schemas.microsoft.com/office/drawing/2014/main" id="{34073412-3991-4426-8738-D7E24AC1FF81}"/>
               </a:ext>
             </a:extLst>
           </p:cNvPr>
@@ -11225,7 +11541,7 @@
           <p:cNvPr id="9" name="">
             <a:extLst xmlns:a="http://schemas.openxmlformats.org/drawingml/2006/main">
               <a:ext uri="{FF2B5EF4-FFF2-40B4-BE49-F238E27FC236}">
-                <a16:creationId xmlns:a16="http://schemas.microsoft.com/office/drawing/2014/main" id="{077E5446-2FB8-4758-9C90-4D567BA39587}"/>
+                <a16:creationId xmlns:a16="http://schemas.microsoft.com/office/drawing/2014/main" id="{C959AC59-D9C2-43C7-966B-F2ED789FD95C}"/>
               </a:ext>
             </a:extLst>
           </p:cNvPr>
@@ -11256,7 +11572,7 @@
           <p:cNvPr id="10" name="">
             <a:extLst xmlns:a="http://schemas.openxmlformats.org/drawingml/2006/main">
               <a:ext uri="{FF2B5EF4-FFF2-40B4-BE49-F238E27FC236}">
-                <a16:creationId xmlns:a16="http://schemas.microsoft.com/office/drawing/2014/main" id="{E6A1B720-85AB-4878-B6AF-ABA8E28E5A25}"/>
+                <a16:creationId xmlns:a16="http://schemas.microsoft.com/office/drawing/2014/main" id="{29CC2053-B751-4EAE-8BFF-776C23D2AAC7}"/>
               </a:ext>
             </a:extLst>
           </p:cNvPr>
@@ -11306,7 +11622,7 @@
           <p:cNvPr id="11" name="">
             <a:extLst xmlns:a="http://schemas.openxmlformats.org/drawingml/2006/main">
               <a:ext uri="{FF2B5EF4-FFF2-40B4-BE49-F238E27FC236}">
-                <a16:creationId xmlns:a16="http://schemas.microsoft.com/office/drawing/2014/main" id="{D6117840-86E2-4489-A24C-3ECD08A32270}"/>
+                <a16:creationId xmlns:a16="http://schemas.microsoft.com/office/drawing/2014/main" id="{B5D549B3-4F62-4E0D-87DD-DD9D81C96BB0}"/>
               </a:ext>
             </a:extLst>
           </p:cNvPr>
@@ -11356,7 +11672,7 @@
           <p:cNvPr id="12" name="">
             <a:extLst xmlns:a="http://schemas.openxmlformats.org/drawingml/2006/main">
               <a:ext uri="{FF2B5EF4-FFF2-40B4-BE49-F238E27FC236}">
-                <a16:creationId xmlns:a16="http://schemas.microsoft.com/office/drawing/2014/main" id="{F5C2E0A1-4853-449D-8D00-FBB19EFA5941}"/>
+                <a16:creationId xmlns:a16="http://schemas.microsoft.com/office/drawing/2014/main" id="{FEA670C6-1EE0-4732-9E39-1A7109BD56EB}"/>
               </a:ext>
             </a:extLst>
           </p:cNvPr>
@@ -11387,7 +11703,7 @@
           <p:cNvPr id="13" name="">
             <a:extLst xmlns:a="http://schemas.openxmlformats.org/drawingml/2006/main">
               <a:ext uri="{FF2B5EF4-FFF2-40B4-BE49-F238E27FC236}">
-                <a16:creationId xmlns:a16="http://schemas.microsoft.com/office/drawing/2014/main" id="{A3B637F8-56A4-4F3C-9A0A-F2ED855C752F}"/>
+                <a16:creationId xmlns:a16="http://schemas.microsoft.com/office/drawing/2014/main" id="{DE7FD98F-A58C-49FE-AE3F-F7FC819F94EA}"/>
               </a:ext>
             </a:extLst>
           </p:cNvPr>
@@ -11437,7 +11753,7 @@
           <p:cNvPr id="14" name="">
             <a:extLst xmlns:a="http://schemas.openxmlformats.org/drawingml/2006/main">
               <a:ext uri="{FF2B5EF4-FFF2-40B4-BE49-F238E27FC236}">
-                <a16:creationId xmlns:a16="http://schemas.microsoft.com/office/drawing/2014/main" id="{00DD2B07-FB8D-440C-8024-4C69D08F2604}"/>
+                <a16:creationId xmlns:a16="http://schemas.microsoft.com/office/drawing/2014/main" id="{1D888CA9-63FB-4850-89B1-D2AF2DFFA235}"/>
               </a:ext>
             </a:extLst>
           </p:cNvPr>
@@ -11487,7 +11803,7 @@
           <p:cNvPr id="15" name="">
             <a:extLst xmlns:a="http://schemas.openxmlformats.org/drawingml/2006/main">
               <a:ext uri="{FF2B5EF4-FFF2-40B4-BE49-F238E27FC236}">
-                <a16:creationId xmlns:a16="http://schemas.microsoft.com/office/drawing/2014/main" id="{E7C32E6A-F8C6-44D8-8B27-6C5AE83BEDB7}"/>
+                <a16:creationId xmlns:a16="http://schemas.microsoft.com/office/drawing/2014/main" id="{5C1866CB-FF0E-4397-831E-F7F1B4B40561}"/>
               </a:ext>
             </a:extLst>
           </p:cNvPr>
@@ -11518,7 +11834,7 @@
           <p:cNvPr id="16" name="">
             <a:extLst xmlns:a="http://schemas.openxmlformats.org/drawingml/2006/main">
               <a:ext uri="{FF2B5EF4-FFF2-40B4-BE49-F238E27FC236}">
-                <a16:creationId xmlns:a16="http://schemas.microsoft.com/office/drawing/2014/main" id="{FE72E31D-F772-4ACF-8C55-6842575E7F74}"/>
+                <a16:creationId xmlns:a16="http://schemas.microsoft.com/office/drawing/2014/main" id="{44DCE23D-5390-4EA2-9605-4CDC3DD09909}"/>
               </a:ext>
             </a:extLst>
           </p:cNvPr>
@@ -11568,7 +11884,7 @@
           <p:cNvPr id="17" name="">
             <a:extLst xmlns:a="http://schemas.openxmlformats.org/drawingml/2006/main">
               <a:ext uri="{FF2B5EF4-FFF2-40B4-BE49-F238E27FC236}">
-                <a16:creationId xmlns:a16="http://schemas.microsoft.com/office/drawing/2014/main" id="{51B3AF13-BEF2-4C6D-9060-2305C82FD023}"/>
+                <a16:creationId xmlns:a16="http://schemas.microsoft.com/office/drawing/2014/main" id="{B195244C-4FA5-44B9-98C1-87168D7E71B0}"/>
               </a:ext>
             </a:extLst>
           </p:cNvPr>
@@ -11618,7 +11934,7 @@
           <p:cNvPr id="18" name="">
             <a:extLst xmlns:a="http://schemas.openxmlformats.org/drawingml/2006/main">
               <a:ext uri="{FF2B5EF4-FFF2-40B4-BE49-F238E27FC236}">
-                <a16:creationId xmlns:a16="http://schemas.microsoft.com/office/drawing/2014/main" id="{585CB52A-3117-4EBE-843F-D5EE4C2730D5}"/>
+                <a16:creationId xmlns:a16="http://schemas.microsoft.com/office/drawing/2014/main" id="{A117987D-3E0B-4D01-9A95-CE5424C110ED}"/>
               </a:ext>
             </a:extLst>
           </p:cNvPr>
@@ -11649,7 +11965,7 @@
           <p:cNvPr id="19" name="">
             <a:extLst xmlns:a="http://schemas.openxmlformats.org/drawingml/2006/main">
               <a:ext uri="{FF2B5EF4-FFF2-40B4-BE49-F238E27FC236}">
-                <a16:creationId xmlns:a16="http://schemas.microsoft.com/office/drawing/2014/main" id="{22F5DA44-59D5-4B6C-A273-5FC10DFFF7D9}"/>
+                <a16:creationId xmlns:a16="http://schemas.microsoft.com/office/drawing/2014/main" id="{E08E5A8B-D482-4BAE-AA3D-6DFC6B263EDC}"/>
               </a:ext>
             </a:extLst>
           </p:cNvPr>
@@ -11699,7 +12015,7 @@
           <p:cNvPr id="20" name="">
             <a:extLst xmlns:a="http://schemas.openxmlformats.org/drawingml/2006/main">
               <a:ext uri="{FF2B5EF4-FFF2-40B4-BE49-F238E27FC236}">
-                <a16:creationId xmlns:a16="http://schemas.microsoft.com/office/drawing/2014/main" id="{35377D6D-EC80-4D78-85CF-3064F8B30091}"/>
+                <a16:creationId xmlns:a16="http://schemas.microsoft.com/office/drawing/2014/main" id="{EFB790C3-1357-4E14-82F9-430D145D42F0}"/>
               </a:ext>
             </a:extLst>
           </p:cNvPr>
@@ -11749,7 +12065,7 @@
           <p:cNvPr id="21" name="">
             <a:extLst xmlns:a="http://schemas.openxmlformats.org/drawingml/2006/main">
               <a:ext uri="{FF2B5EF4-FFF2-40B4-BE49-F238E27FC236}">
-                <a16:creationId xmlns:a16="http://schemas.microsoft.com/office/drawing/2014/main" id="{DFFFD1B3-AAE6-40A5-B9AA-C8A4C556E80F}"/>
+                <a16:creationId xmlns:a16="http://schemas.microsoft.com/office/drawing/2014/main" id="{28D50C5F-B3C8-4079-98A6-AB9350D93C76}"/>
               </a:ext>
             </a:extLst>
           </p:cNvPr>
@@ -11780,7 +12096,7 @@
           <p:cNvPr id="22" name="">
             <a:extLst xmlns:a="http://schemas.openxmlformats.org/drawingml/2006/main">
               <a:ext uri="{FF2B5EF4-FFF2-40B4-BE49-F238E27FC236}">
-                <a16:creationId xmlns:a16="http://schemas.microsoft.com/office/drawing/2014/main" id="{10DC90AD-4D40-4A00-A6C7-B49870C3B173}"/>
+                <a16:creationId xmlns:a16="http://schemas.microsoft.com/office/drawing/2014/main" id="{8B40D4F6-7102-4A1A-8EDD-F1295CE1FBE7}"/>
               </a:ext>
             </a:extLst>
           </p:cNvPr>
@@ -11830,7 +12146,7 @@
           <p:cNvPr id="23" name="">
             <a:extLst xmlns:a="http://schemas.openxmlformats.org/drawingml/2006/main">
               <a:ext uri="{FF2B5EF4-FFF2-40B4-BE49-F238E27FC236}">
-                <a16:creationId xmlns:a16="http://schemas.microsoft.com/office/drawing/2014/main" id="{8213B80D-34CB-4FE3-B435-2B7819C936E7}"/>
+                <a16:creationId xmlns:a16="http://schemas.microsoft.com/office/drawing/2014/main" id="{8D739B22-F1BD-4A68-8F3D-B551F3F1273D}"/>
               </a:ext>
             </a:extLst>
           </p:cNvPr>
@@ -11878,7 +12194,7 @@
     </p:spTree>
     <p:extLst>
       <p:ext uri="{BB962C8B-B14F-4D97-AF65-F5344CB8AC3E}">
-        <p14:creationId xmlns:p14="http://schemas.microsoft.com/office/powerpoint/2010/main" val="2099569018"/>
+        <p14:creationId xmlns:p14="http://schemas.microsoft.com/office/powerpoint/2010/main" val="1150670460"/>
       </p:ext>
     </p:extLst>
   </p:cSld>
@@ -11909,7 +12225,7 @@
           <p:cNvPr id="28" name="">
             <a:extLst xmlns:a="http://schemas.openxmlformats.org/drawingml/2006/main">
               <a:ext uri="{FF2B5EF4-FFF2-40B4-BE49-F238E27FC236}">
-                <a16:creationId xmlns:a16="http://schemas.microsoft.com/office/drawing/2014/main" id="{E9271388-B4B6-418E-963A-828A6AA0385F}"/>
+                <a16:creationId xmlns:a16="http://schemas.microsoft.com/office/drawing/2014/main" id="{83AEACFC-C395-4984-86B6-756CE81FDA3F}"/>
               </a:ext>
             </a:extLst>
           </p:cNvPr>
@@ -11942,7 +12258,7 @@
           <p:cNvPr id="2" name="">
             <a:extLst xmlns:a="http://schemas.openxmlformats.org/drawingml/2006/main">
               <a:ext uri="{FF2B5EF4-FFF2-40B4-BE49-F238E27FC236}">
-                <a16:creationId xmlns:a16="http://schemas.microsoft.com/office/drawing/2014/main" id="{6D063BB0-79CF-495B-8B46-02863464F06C}"/>
+                <a16:creationId xmlns:a16="http://schemas.microsoft.com/office/drawing/2014/main" id="{0D4478F3-68C4-425A-A658-DF5981B1462D}"/>
               </a:ext>
             </a:extLst>
           </p:cNvPr>
@@ -11992,7 +12308,7 @@
           <p:cNvPr id="3" name="">
             <a:extLst xmlns:a="http://schemas.openxmlformats.org/drawingml/2006/main">
               <a:ext uri="{FF2B5EF4-FFF2-40B4-BE49-F238E27FC236}">
-                <a16:creationId xmlns:a16="http://schemas.microsoft.com/office/drawing/2014/main" id="{334713A4-E970-4556-BF37-C0F1EF89831C}"/>
+                <a16:creationId xmlns:a16="http://schemas.microsoft.com/office/drawing/2014/main" id="{CA38017C-EE1A-413C-A55B-6B4A52F90CE9}"/>
               </a:ext>
             </a:extLst>
           </p:cNvPr>
@@ -12042,7 +12358,7 @@
           <p:cNvPr id="4" name="">
             <a:extLst xmlns:a="http://schemas.openxmlformats.org/drawingml/2006/main">
               <a:ext uri="{FF2B5EF4-FFF2-40B4-BE49-F238E27FC236}">
-                <a16:creationId xmlns:a16="http://schemas.microsoft.com/office/drawing/2014/main" id="{B61CC01B-4F03-4C58-AB16-02E840E116D2}"/>
+                <a16:creationId xmlns:a16="http://schemas.microsoft.com/office/drawing/2014/main" id="{C9A8B3C1-1C51-463E-854A-3162B7F121C9}"/>
               </a:ext>
             </a:extLst>
           </p:cNvPr>
@@ -12092,7 +12408,7 @@
           <p:cNvPr id="5" name="">
             <a:extLst xmlns:a="http://schemas.openxmlformats.org/drawingml/2006/main">
               <a:ext uri="{FF2B5EF4-FFF2-40B4-BE49-F238E27FC236}">
-                <a16:creationId xmlns:a16="http://schemas.microsoft.com/office/drawing/2014/main" id="{39859FA0-D3AA-4DE0-8F88-0A7ACC25636B}"/>
+                <a16:creationId xmlns:a16="http://schemas.microsoft.com/office/drawing/2014/main" id="{6AF590B2-6DFC-45ED-80A1-11A4E4C4B092}"/>
               </a:ext>
             </a:extLst>
           </p:cNvPr>
@@ -12123,7 +12439,7 @@
           <p:cNvPr id="6" name="">
             <a:extLst xmlns:a="http://schemas.openxmlformats.org/drawingml/2006/main">
               <a:ext uri="{FF2B5EF4-FFF2-40B4-BE49-F238E27FC236}">
-                <a16:creationId xmlns:a16="http://schemas.microsoft.com/office/drawing/2014/main" id="{F7E2F428-2139-47B6-A38A-45BD785BA40D}"/>
+                <a16:creationId xmlns:a16="http://schemas.microsoft.com/office/drawing/2014/main" id="{8D8A6BC3-E661-4151-BC4F-E06CC83FD442}"/>
               </a:ext>
             </a:extLst>
           </p:cNvPr>
@@ -12173,7 +12489,7 @@
           <p:cNvPr id="7" name="">
             <a:extLst xmlns:a="http://schemas.openxmlformats.org/drawingml/2006/main">
               <a:ext uri="{FF2B5EF4-FFF2-40B4-BE49-F238E27FC236}">
-                <a16:creationId xmlns:a16="http://schemas.microsoft.com/office/drawing/2014/main" id="{39CFD95C-91D2-4F64-84AA-CD41B9FF276A}"/>
+                <a16:creationId xmlns:a16="http://schemas.microsoft.com/office/drawing/2014/main" id="{F3A5B7CD-0B70-4D08-96B1-2205AF9E2B6F}"/>
               </a:ext>
             </a:extLst>
           </p:cNvPr>
@@ -12223,7 +12539,7 @@
           <p:cNvPr id="8" name="">
             <a:extLst xmlns:a="http://schemas.openxmlformats.org/drawingml/2006/main">
               <a:ext uri="{FF2B5EF4-FFF2-40B4-BE49-F238E27FC236}">
-                <a16:creationId xmlns:a16="http://schemas.microsoft.com/office/drawing/2014/main" id="{A232008F-AFC6-4429-B3C0-EF5334680F00}"/>
+                <a16:creationId xmlns:a16="http://schemas.microsoft.com/office/drawing/2014/main" id="{64320849-725D-4C31-BA71-AD52443A97FA}"/>
               </a:ext>
             </a:extLst>
           </p:cNvPr>
@@ -12254,7 +12570,7 @@
           <p:cNvPr id="9" name="">
             <a:extLst xmlns:a="http://schemas.openxmlformats.org/drawingml/2006/main">
               <a:ext uri="{FF2B5EF4-FFF2-40B4-BE49-F238E27FC236}">
-                <a16:creationId xmlns:a16="http://schemas.microsoft.com/office/drawing/2014/main" id="{97CDAAED-63F6-41D8-A8F9-0DB0E43CAA6E}"/>
+                <a16:creationId xmlns:a16="http://schemas.microsoft.com/office/drawing/2014/main" id="{20351B2B-1549-4CC8-A197-4F36CB412F40}"/>
               </a:ext>
             </a:extLst>
           </p:cNvPr>
@@ -12304,7 +12620,7 @@
           <p:cNvPr id="10" name="">
             <a:extLst xmlns:a="http://schemas.openxmlformats.org/drawingml/2006/main">
               <a:ext uri="{FF2B5EF4-FFF2-40B4-BE49-F238E27FC236}">
-                <a16:creationId xmlns:a16="http://schemas.microsoft.com/office/drawing/2014/main" id="{B6241780-7A6B-4399-9709-E05E1C439629}"/>
+                <a16:creationId xmlns:a16="http://schemas.microsoft.com/office/drawing/2014/main" id="{A07128C1-45CA-40BB-94C2-793035604C2E}"/>
               </a:ext>
             </a:extLst>
           </p:cNvPr>
@@ -12354,7 +12670,7 @@
           <p:cNvPr id="11" name="">
             <a:extLst xmlns:a="http://schemas.openxmlformats.org/drawingml/2006/main">
               <a:ext uri="{FF2B5EF4-FFF2-40B4-BE49-F238E27FC236}">
-                <a16:creationId xmlns:a16="http://schemas.microsoft.com/office/drawing/2014/main" id="{B1BE8DCA-017B-4D5C-84C2-3359B0072BA6}"/>
+                <a16:creationId xmlns:a16="http://schemas.microsoft.com/office/drawing/2014/main" id="{9B83402D-50A5-46D5-90BB-4DCBC5F8B791}"/>
               </a:ext>
             </a:extLst>
           </p:cNvPr>
@@ -12404,7 +12720,7 @@
           <p:cNvPr id="12" name="">
             <a:extLst xmlns:a="http://schemas.openxmlformats.org/drawingml/2006/main">
               <a:ext uri="{FF2B5EF4-FFF2-40B4-BE49-F238E27FC236}">
-                <a16:creationId xmlns:a16="http://schemas.microsoft.com/office/drawing/2014/main" id="{8E582D4E-53DB-4718-A4C7-FAD5E3D896BF}"/>
+                <a16:creationId xmlns:a16="http://schemas.microsoft.com/office/drawing/2014/main" id="{259CB9A8-9062-4249-8B11-B8C9BFF35E65}"/>
               </a:ext>
             </a:extLst>
           </p:cNvPr>
@@ -12435,7 +12751,7 @@
           <p:cNvPr id="13" name="">
             <a:extLst xmlns:a="http://schemas.openxmlformats.org/drawingml/2006/main">
               <a:ext uri="{FF2B5EF4-FFF2-40B4-BE49-F238E27FC236}">
-                <a16:creationId xmlns:a16="http://schemas.microsoft.com/office/drawing/2014/main" id="{47AA1693-5A40-4E12-B55E-B29B95126FA3}"/>
+                <a16:creationId xmlns:a16="http://schemas.microsoft.com/office/drawing/2014/main" id="{EAC45D07-58BC-46E8-B809-026BA24F38B0}"/>
               </a:ext>
             </a:extLst>
           </p:cNvPr>
@@ -12466,7 +12782,7 @@
           <p:cNvPr id="14" name="">
             <a:extLst xmlns:a="http://schemas.openxmlformats.org/drawingml/2006/main">
               <a:ext uri="{FF2B5EF4-FFF2-40B4-BE49-F238E27FC236}">
-                <a16:creationId xmlns:a16="http://schemas.microsoft.com/office/drawing/2014/main" id="{F086BFD8-D814-4C46-8779-CA36E3F6D115}"/>
+                <a16:creationId xmlns:a16="http://schemas.microsoft.com/office/drawing/2014/main" id="{C60E3EF7-82E5-49EC-B51B-6283992FEECE}"/>
               </a:ext>
             </a:extLst>
           </p:cNvPr>
@@ -12516,7 +12832,7 @@
           <p:cNvPr id="15" name="">
             <a:extLst xmlns:a="http://schemas.openxmlformats.org/drawingml/2006/main">
               <a:ext uri="{FF2B5EF4-FFF2-40B4-BE49-F238E27FC236}">
-                <a16:creationId xmlns:a16="http://schemas.microsoft.com/office/drawing/2014/main" id="{282D1470-D019-4018-A90D-95C1D25333E3}"/>
+                <a16:creationId xmlns:a16="http://schemas.microsoft.com/office/drawing/2014/main" id="{A9053730-9BEF-41A5-AB2E-1FC9ED75AB3D}"/>
               </a:ext>
             </a:extLst>
           </p:cNvPr>
@@ -12566,7 +12882,7 @@
           <p:cNvPr id="16" name="">
             <a:extLst xmlns:a="http://schemas.openxmlformats.org/drawingml/2006/main">
               <a:ext uri="{FF2B5EF4-FFF2-40B4-BE49-F238E27FC236}">
-                <a16:creationId xmlns:a16="http://schemas.microsoft.com/office/drawing/2014/main" id="{F256C58C-AF04-4CB4-81B3-A765D44E1F23}"/>
+                <a16:creationId xmlns:a16="http://schemas.microsoft.com/office/drawing/2014/main" id="{16F68E1F-339E-4986-BB7D-F84F16E6EC46}"/>
               </a:ext>
             </a:extLst>
           </p:cNvPr>
@@ -12616,7 +12932,7 @@
           <p:cNvPr id="17" name="">
             <a:extLst xmlns:a="http://schemas.openxmlformats.org/drawingml/2006/main">
               <a:ext uri="{FF2B5EF4-FFF2-40B4-BE49-F238E27FC236}">
-                <a16:creationId xmlns:a16="http://schemas.microsoft.com/office/drawing/2014/main" id="{55776D3E-AA48-4065-A654-7B10F4CAC62C}"/>
+                <a16:creationId xmlns:a16="http://schemas.microsoft.com/office/drawing/2014/main" id="{E025688A-E918-40B9-A945-CFE18FA9AF06}"/>
               </a:ext>
             </a:extLst>
           </p:cNvPr>
@@ -12647,7 +12963,7 @@
           <p:cNvPr id="18" name="">
             <a:extLst xmlns:a="http://schemas.openxmlformats.org/drawingml/2006/main">
               <a:ext uri="{FF2B5EF4-FFF2-40B4-BE49-F238E27FC236}">
-                <a16:creationId xmlns:a16="http://schemas.microsoft.com/office/drawing/2014/main" id="{CC391A7E-D24D-4926-BA8E-1DB4AD0556A8}"/>
+                <a16:creationId xmlns:a16="http://schemas.microsoft.com/office/drawing/2014/main" id="{4D4A79C4-386A-432E-AB39-BCC40CB3BC1C}"/>
               </a:ext>
             </a:extLst>
           </p:cNvPr>
@@ -12678,7 +12994,7 @@
           <p:cNvPr id="19" name="">
             <a:extLst xmlns:a="http://schemas.openxmlformats.org/drawingml/2006/main">
               <a:ext uri="{FF2B5EF4-FFF2-40B4-BE49-F238E27FC236}">
-                <a16:creationId xmlns:a16="http://schemas.microsoft.com/office/drawing/2014/main" id="{77436295-0AC8-4513-8DA7-7A0B59681DC3}"/>
+                <a16:creationId xmlns:a16="http://schemas.microsoft.com/office/drawing/2014/main" id="{3A1EF82C-8A2A-4BBC-B0B9-A4781804F620}"/>
               </a:ext>
             </a:extLst>
           </p:cNvPr>
@@ -12728,7 +13044,7 @@
           <p:cNvPr id="20" name="">
             <a:extLst xmlns:a="http://schemas.openxmlformats.org/drawingml/2006/main">
               <a:ext uri="{FF2B5EF4-FFF2-40B4-BE49-F238E27FC236}">
-                <a16:creationId xmlns:a16="http://schemas.microsoft.com/office/drawing/2014/main" id="{1FE32D73-52D9-4550-A35E-10A77DA6E37A}"/>
+                <a16:creationId xmlns:a16="http://schemas.microsoft.com/office/drawing/2014/main" id="{31A9CD79-B48C-4BA8-96C4-482CF1726920}"/>
               </a:ext>
             </a:extLst>
           </p:cNvPr>
@@ -12778,7 +13094,7 @@
           <p:cNvPr id="21" name="">
             <a:extLst xmlns:a="http://schemas.openxmlformats.org/drawingml/2006/main">
               <a:ext uri="{FF2B5EF4-FFF2-40B4-BE49-F238E27FC236}">
-                <a16:creationId xmlns:a16="http://schemas.microsoft.com/office/drawing/2014/main" id="{B69EAC0D-5C22-4E11-AD55-70E64E8B9A08}"/>
+                <a16:creationId xmlns:a16="http://schemas.microsoft.com/office/drawing/2014/main" id="{B841170A-6592-4FC9-9802-0E90A26E8B31}"/>
               </a:ext>
             </a:extLst>
           </p:cNvPr>
@@ -12828,7 +13144,7 @@
           <p:cNvPr id="22" name="">
             <a:extLst xmlns:a="http://schemas.openxmlformats.org/drawingml/2006/main">
               <a:ext uri="{FF2B5EF4-FFF2-40B4-BE49-F238E27FC236}">
-                <a16:creationId xmlns:a16="http://schemas.microsoft.com/office/drawing/2014/main" id="{35130BFB-AEDF-4169-A33F-21B5F742BF57}"/>
+                <a16:creationId xmlns:a16="http://schemas.microsoft.com/office/drawing/2014/main" id="{26D9524E-D700-4D82-B9B6-7E872347481E}"/>
               </a:ext>
             </a:extLst>
           </p:cNvPr>
@@ -12859,7 +13175,7 @@
           <p:cNvPr id="23" name="">
             <a:extLst xmlns:a="http://schemas.openxmlformats.org/drawingml/2006/main">
               <a:ext uri="{FF2B5EF4-FFF2-40B4-BE49-F238E27FC236}">
-                <a16:creationId xmlns:a16="http://schemas.microsoft.com/office/drawing/2014/main" id="{94F2FFE5-E236-4790-9963-24B23C39A2D7}"/>
+                <a16:creationId xmlns:a16="http://schemas.microsoft.com/office/drawing/2014/main" id="{0166E98E-96B1-4D0F-B6CB-E9094013F7E4}"/>
               </a:ext>
             </a:extLst>
           </p:cNvPr>
@@ -12909,7 +13225,7 @@
           <p:cNvPr id="24" name="">
             <a:extLst xmlns:a="http://schemas.openxmlformats.org/drawingml/2006/main">
               <a:ext uri="{FF2B5EF4-FFF2-40B4-BE49-F238E27FC236}">
-                <a16:creationId xmlns:a16="http://schemas.microsoft.com/office/drawing/2014/main" id="{9C5AF3C8-4EE7-48AF-8A9F-01D7DD7E8CE5}"/>
+                <a16:creationId xmlns:a16="http://schemas.microsoft.com/office/drawing/2014/main" id="{2F839735-E109-426A-9995-320DF4E0C624}"/>
               </a:ext>
             </a:extLst>
           </p:cNvPr>
@@ -12959,7 +13275,7 @@
           <p:cNvPr id="25" name="">
             <a:extLst xmlns:a="http://schemas.openxmlformats.org/drawingml/2006/main">
               <a:ext uri="{FF2B5EF4-FFF2-40B4-BE49-F238E27FC236}">
-                <a16:creationId xmlns:a16="http://schemas.microsoft.com/office/drawing/2014/main" id="{EFEB759C-5F39-4582-A296-54F8BBA29974}"/>
+                <a16:creationId xmlns:a16="http://schemas.microsoft.com/office/drawing/2014/main" id="{12E913C5-B256-4FA7-8D1F-ECFD4FA89000}"/>
               </a:ext>
             </a:extLst>
           </p:cNvPr>
@@ -12994,7 +13310,7 @@
           <p:cNvPr id="26" name="">
             <a:extLst xmlns:a="http://schemas.openxmlformats.org/drawingml/2006/main">
               <a:ext uri="{FF2B5EF4-FFF2-40B4-BE49-F238E27FC236}">
-                <a16:creationId xmlns:a16="http://schemas.microsoft.com/office/drawing/2014/main" id="{A20A2880-171D-4F5D-81B2-7AF4243F0E52}"/>
+                <a16:creationId xmlns:a16="http://schemas.microsoft.com/office/drawing/2014/main" id="{5E58EDB3-E44A-4EB4-91B8-E63C69406343}"/>
               </a:ext>
             </a:extLst>
           </p:cNvPr>
@@ -13044,7 +13360,7 @@
           <p:cNvPr id="27" name="">
             <a:extLst xmlns:a="http://schemas.openxmlformats.org/drawingml/2006/main">
               <a:ext uri="{FF2B5EF4-FFF2-40B4-BE49-F238E27FC236}">
-                <a16:creationId xmlns:a16="http://schemas.microsoft.com/office/drawing/2014/main" id="{5DF1BDBA-6F70-4E40-9382-FE3A555EA08E}"/>
+                <a16:creationId xmlns:a16="http://schemas.microsoft.com/office/drawing/2014/main" id="{DC5CBD59-3096-46A3-A315-8DB3D3EE6C98}"/>
               </a:ext>
             </a:extLst>
           </p:cNvPr>
@@ -13092,7 +13408,7 @@
     </p:spTree>
     <p:extLst>
       <p:ext uri="{BB962C8B-B14F-4D97-AF65-F5344CB8AC3E}">
-        <p14:creationId xmlns:p14="http://schemas.microsoft.com/office/powerpoint/2010/main" val="859268237"/>
+        <p14:creationId xmlns:p14="http://schemas.microsoft.com/office/powerpoint/2010/main" val="682540930"/>
       </p:ext>
     </p:extLst>
   </p:cSld>
@@ -13123,7 +13439,7 @@
           <p:cNvPr id="46" name="">
             <a:extLst xmlns:a="http://schemas.openxmlformats.org/drawingml/2006/main">
               <a:ext uri="{FF2B5EF4-FFF2-40B4-BE49-F238E27FC236}">
-                <a16:creationId xmlns:a16="http://schemas.microsoft.com/office/drawing/2014/main" id="{EA30836D-87AB-4BB1-83CD-593219FA4C9B}"/>
+                <a16:creationId xmlns:a16="http://schemas.microsoft.com/office/drawing/2014/main" id="{A91DB826-DB4C-464D-AC10-430B5712D921}"/>
               </a:ext>
             </a:extLst>
           </p:cNvPr>
@@ -13156,7 +13472,7 @@
           <p:cNvPr id="2" name="">
             <a:extLst xmlns:a="http://schemas.openxmlformats.org/drawingml/2006/main">
               <a:ext uri="{FF2B5EF4-FFF2-40B4-BE49-F238E27FC236}">
-                <a16:creationId xmlns:a16="http://schemas.microsoft.com/office/drawing/2014/main" id="{863B23F3-FE73-4CEA-AEBC-332553C816D4}"/>
+                <a16:creationId xmlns:a16="http://schemas.microsoft.com/office/drawing/2014/main" id="{53C4C494-DEEA-429F-9359-DBB6250B89FF}"/>
               </a:ext>
             </a:extLst>
           </p:cNvPr>
@@ -13206,7 +13522,7 @@
           <p:cNvPr id="3" name="">
             <a:extLst xmlns:a="http://schemas.openxmlformats.org/drawingml/2006/main">
               <a:ext uri="{FF2B5EF4-FFF2-40B4-BE49-F238E27FC236}">
-                <a16:creationId xmlns:a16="http://schemas.microsoft.com/office/drawing/2014/main" id="{1B340214-6006-490F-B433-D4F12123EDAD}"/>
+                <a16:creationId xmlns:a16="http://schemas.microsoft.com/office/drawing/2014/main" id="{1C726C7B-49F0-4814-AE4B-F4E43E7685EE}"/>
               </a:ext>
             </a:extLst>
           </p:cNvPr>
@@ -13256,7 +13572,7 @@
           <p:cNvPr id="4" name="">
             <a:extLst xmlns:a="http://schemas.openxmlformats.org/drawingml/2006/main">
               <a:ext uri="{FF2B5EF4-FFF2-40B4-BE49-F238E27FC236}">
-                <a16:creationId xmlns:a16="http://schemas.microsoft.com/office/drawing/2014/main" id="{5F9A4496-991F-40C8-A733-4C6F559B72C0}"/>
+                <a16:creationId xmlns:a16="http://schemas.microsoft.com/office/drawing/2014/main" id="{62A458ED-DB86-41E9-B506-695F8F835E3A}"/>
               </a:ext>
             </a:extLst>
           </p:cNvPr>
@@ -13306,7 +13622,7 @@
           <p:cNvPr id="5" name="">
             <a:extLst xmlns:a="http://schemas.openxmlformats.org/drawingml/2006/main">
               <a:ext uri="{FF2B5EF4-FFF2-40B4-BE49-F238E27FC236}">
-                <a16:creationId xmlns:a16="http://schemas.microsoft.com/office/drawing/2014/main" id="{F4E9F676-002F-4DE4-95F9-970D80154B48}"/>
+                <a16:creationId xmlns:a16="http://schemas.microsoft.com/office/drawing/2014/main" id="{8173153E-5BF7-4CC2-8D3A-C586F2155816}"/>
               </a:ext>
             </a:extLst>
           </p:cNvPr>
@@ -13337,7 +13653,7 @@
           <p:cNvPr id="6" name="">
             <a:extLst xmlns:a="http://schemas.openxmlformats.org/drawingml/2006/main">
               <a:ext uri="{FF2B5EF4-FFF2-40B4-BE49-F238E27FC236}">
-                <a16:creationId xmlns:a16="http://schemas.microsoft.com/office/drawing/2014/main" id="{2E32D733-5A08-4112-945B-D81736472FD4}"/>
+                <a16:creationId xmlns:a16="http://schemas.microsoft.com/office/drawing/2014/main" id="{CF248CA6-32E5-4B14-8971-F3007BBB853C}"/>
               </a:ext>
             </a:extLst>
           </p:cNvPr>
@@ -13387,7 +13703,7 @@
           <p:cNvPr id="7" name="">
             <a:extLst xmlns:a="http://schemas.openxmlformats.org/drawingml/2006/main">
               <a:ext uri="{FF2B5EF4-FFF2-40B4-BE49-F238E27FC236}">
-                <a16:creationId xmlns:a16="http://schemas.microsoft.com/office/drawing/2014/main" id="{4E3388D6-1FA0-4268-91F5-3AC6B770C4E4}"/>
+                <a16:creationId xmlns:a16="http://schemas.microsoft.com/office/drawing/2014/main" id="{6C76C157-1721-42E0-8F36-717629BDC261}"/>
               </a:ext>
             </a:extLst>
           </p:cNvPr>
@@ -13437,7 +13753,7 @@
           <p:cNvPr id="8" name="">
             <a:extLst xmlns:a="http://schemas.openxmlformats.org/drawingml/2006/main">
               <a:ext uri="{FF2B5EF4-FFF2-40B4-BE49-F238E27FC236}">
-                <a16:creationId xmlns:a16="http://schemas.microsoft.com/office/drawing/2014/main" id="{AC1086D4-5C95-42A7-A988-3B5921BE5FB2}"/>
+                <a16:creationId xmlns:a16="http://schemas.microsoft.com/office/drawing/2014/main" id="{B7BF440B-C612-41B0-9793-A3DC388E2E47}"/>
               </a:ext>
             </a:extLst>
           </p:cNvPr>
@@ -13487,7 +13803,7 @@
           <p:cNvPr id="9" name="">
             <a:extLst xmlns:a="http://schemas.openxmlformats.org/drawingml/2006/main">
               <a:ext uri="{FF2B5EF4-FFF2-40B4-BE49-F238E27FC236}">
-                <a16:creationId xmlns:a16="http://schemas.microsoft.com/office/drawing/2014/main" id="{A84F464A-5D11-4768-B285-1DA8BA499295}"/>
+                <a16:creationId xmlns:a16="http://schemas.microsoft.com/office/drawing/2014/main" id="{0DB1F818-5800-4ABC-AA59-D29C9E9BB003}"/>
               </a:ext>
             </a:extLst>
           </p:cNvPr>
@@ -13537,7 +13853,7 @@
           <p:cNvPr id="10" name="">
             <a:extLst xmlns:a="http://schemas.openxmlformats.org/drawingml/2006/main">
               <a:ext uri="{FF2B5EF4-FFF2-40B4-BE49-F238E27FC236}">
-                <a16:creationId xmlns:a16="http://schemas.microsoft.com/office/drawing/2014/main" id="{FA9FAFE4-7341-42D0-BC23-65D409C3BD72}"/>
+                <a16:creationId xmlns:a16="http://schemas.microsoft.com/office/drawing/2014/main" id="{EEF9631C-548A-4989-81A7-F5AA78ACD6D6}"/>
               </a:ext>
             </a:extLst>
           </p:cNvPr>
@@ -13587,7 +13903,7 @@
           <p:cNvPr id="11" name="">
             <a:extLst xmlns:a="http://schemas.openxmlformats.org/drawingml/2006/main">
               <a:ext uri="{FF2B5EF4-FFF2-40B4-BE49-F238E27FC236}">
-                <a16:creationId xmlns:a16="http://schemas.microsoft.com/office/drawing/2014/main" id="{ACE335DD-6B36-4337-8A8A-F2829F9A7FDC}"/>
+                <a16:creationId xmlns:a16="http://schemas.microsoft.com/office/drawing/2014/main" id="{64752557-A239-4039-95A3-2FBB1E0F0893}"/>
               </a:ext>
             </a:extLst>
           </p:cNvPr>
@@ -13637,7 +13953,7 @@
           <p:cNvPr id="12" name="">
             <a:extLst xmlns:a="http://schemas.openxmlformats.org/drawingml/2006/main">
               <a:ext uri="{FF2B5EF4-FFF2-40B4-BE49-F238E27FC236}">
-                <a16:creationId xmlns:a16="http://schemas.microsoft.com/office/drawing/2014/main" id="{24D9D4A2-3C9C-4603-8403-0A4E39ABD8A5}"/>
+                <a16:creationId xmlns:a16="http://schemas.microsoft.com/office/drawing/2014/main" id="{580FB945-CBEA-4E7F-9F54-A93300D69EBA}"/>
               </a:ext>
             </a:extLst>
           </p:cNvPr>
@@ -13687,7 +14003,7 @@
           <p:cNvPr id="13" name="">
             <a:extLst xmlns:a="http://schemas.openxmlformats.org/drawingml/2006/main">
               <a:ext uri="{FF2B5EF4-FFF2-40B4-BE49-F238E27FC236}">
-                <a16:creationId xmlns:a16="http://schemas.microsoft.com/office/drawing/2014/main" id="{88F66E3F-E2D1-4554-96D7-F3350D69075D}"/>
+                <a16:creationId xmlns:a16="http://schemas.microsoft.com/office/drawing/2014/main" id="{F9939961-0CDC-48F3-A662-C2CD902031E4}"/>
               </a:ext>
             </a:extLst>
           </p:cNvPr>
@@ -13737,7 +14053,7 @@
           <p:cNvPr id="14" name="">
             <a:extLst xmlns:a="http://schemas.openxmlformats.org/drawingml/2006/main">
               <a:ext uri="{FF2B5EF4-FFF2-40B4-BE49-F238E27FC236}">
-                <a16:creationId xmlns:a16="http://schemas.microsoft.com/office/drawing/2014/main" id="{7E4C3C7A-4C08-46A6-849F-C815000A65D2}"/>
+                <a16:creationId xmlns:a16="http://schemas.microsoft.com/office/drawing/2014/main" id="{4818A2ED-375F-45F2-A4C9-781BC83A6AA3}"/>
               </a:ext>
             </a:extLst>
           </p:cNvPr>
@@ -13768,7 +14084,7 @@
           <p:cNvPr id="15" name="">
             <a:extLst xmlns:a="http://schemas.openxmlformats.org/drawingml/2006/main">
               <a:ext uri="{FF2B5EF4-FFF2-40B4-BE49-F238E27FC236}">
-                <a16:creationId xmlns:a16="http://schemas.microsoft.com/office/drawing/2014/main" id="{1874A3AE-7066-449B-978D-AD3DB788A277}"/>
+                <a16:creationId xmlns:a16="http://schemas.microsoft.com/office/drawing/2014/main" id="{B3F9E142-9725-4458-8E64-5981C31C1D76}"/>
               </a:ext>
             </a:extLst>
           </p:cNvPr>
@@ -13801,7 +14117,7 @@
           <p:cNvPr id="16" name="">
             <a:extLst xmlns:a="http://schemas.openxmlformats.org/drawingml/2006/main">
               <a:ext uri="{FF2B5EF4-FFF2-40B4-BE49-F238E27FC236}">
-                <a16:creationId xmlns:a16="http://schemas.microsoft.com/office/drawing/2014/main" id="{6C3A3080-2A6E-46B3-92AF-DC8EF4B78F24}"/>
+                <a16:creationId xmlns:a16="http://schemas.microsoft.com/office/drawing/2014/main" id="{C3E22418-C876-4D89-A483-B47A0C365190}"/>
               </a:ext>
             </a:extLst>
           </p:cNvPr>
@@ -13834,7 +14150,7 @@
           <p:cNvPr id="17" name="">
             <a:extLst xmlns:a="http://schemas.openxmlformats.org/drawingml/2006/main">
               <a:ext uri="{FF2B5EF4-FFF2-40B4-BE49-F238E27FC236}">
-                <a16:creationId xmlns:a16="http://schemas.microsoft.com/office/drawing/2014/main" id="{7B6795F5-5345-4E57-A261-BC4D59C7A924}"/>
+                <a16:creationId xmlns:a16="http://schemas.microsoft.com/office/drawing/2014/main" id="{E1291C6A-AA9D-4072-8421-B1EAB7D11A5E}"/>
               </a:ext>
             </a:extLst>
           </p:cNvPr>
@@ -13867,7 +14183,7 @@
           <p:cNvPr id="18" name="">
             <a:extLst xmlns:a="http://schemas.openxmlformats.org/drawingml/2006/main">
               <a:ext uri="{FF2B5EF4-FFF2-40B4-BE49-F238E27FC236}">
-                <a16:creationId xmlns:a16="http://schemas.microsoft.com/office/drawing/2014/main" id="{9697EE67-F0B3-4345-A92F-ED5A57E50D58}"/>
+                <a16:creationId xmlns:a16="http://schemas.microsoft.com/office/drawing/2014/main" id="{A620BE64-5282-46E9-B7FE-580B9F14B1F3}"/>
               </a:ext>
             </a:extLst>
           </p:cNvPr>
@@ -13900,7 +14216,7 @@
           <p:cNvPr id="19" name="">
             <a:extLst xmlns:a="http://schemas.openxmlformats.org/drawingml/2006/main">
               <a:ext uri="{FF2B5EF4-FFF2-40B4-BE49-F238E27FC236}">
-                <a16:creationId xmlns:a16="http://schemas.microsoft.com/office/drawing/2014/main" id="{38DE039A-F5DF-4A76-A168-36AB09952D9B}"/>
+                <a16:creationId xmlns:a16="http://schemas.microsoft.com/office/drawing/2014/main" id="{63F6115D-667C-4731-B62B-4DB0E0E540E9}"/>
               </a:ext>
             </a:extLst>
           </p:cNvPr>
@@ -13933,7 +14249,7 @@
           <p:cNvPr id="20" name="">
             <a:extLst xmlns:a="http://schemas.openxmlformats.org/drawingml/2006/main">
               <a:ext uri="{FF2B5EF4-FFF2-40B4-BE49-F238E27FC236}">
-                <a16:creationId xmlns:a16="http://schemas.microsoft.com/office/drawing/2014/main" id="{2F82D05F-34AB-45BF-A92C-DB6AF2398FD6}"/>
+                <a16:creationId xmlns:a16="http://schemas.microsoft.com/office/drawing/2014/main" id="{C05FE3DE-E421-4266-87B1-711B38E83ECA}"/>
               </a:ext>
             </a:extLst>
           </p:cNvPr>
@@ -13966,7 +14282,7 @@
           <p:cNvPr id="21" name="">
             <a:extLst xmlns:a="http://schemas.openxmlformats.org/drawingml/2006/main">
               <a:ext uri="{FF2B5EF4-FFF2-40B4-BE49-F238E27FC236}">
-                <a16:creationId xmlns:a16="http://schemas.microsoft.com/office/drawing/2014/main" id="{BB46E7B5-A72C-4BE7-9A55-11EEC456397F}"/>
+                <a16:creationId xmlns:a16="http://schemas.microsoft.com/office/drawing/2014/main" id="{7DD87C0C-C797-4F37-83FD-F9E842FEA08A}"/>
               </a:ext>
             </a:extLst>
           </p:cNvPr>
@@ -13999,7 +14315,7 @@
           <p:cNvPr id="22" name="">
             <a:extLst xmlns:a="http://schemas.openxmlformats.org/drawingml/2006/main">
               <a:ext uri="{FF2B5EF4-FFF2-40B4-BE49-F238E27FC236}">
-                <a16:creationId xmlns:a16="http://schemas.microsoft.com/office/drawing/2014/main" id="{D50854A9-B10B-4390-8D82-062EFDEE71EA}"/>
+                <a16:creationId xmlns:a16="http://schemas.microsoft.com/office/drawing/2014/main" id="{5052D120-487D-476D-AB8C-96A28EC18B31}"/>
               </a:ext>
             </a:extLst>
           </p:cNvPr>
@@ -14032,7 +14348,7 @@
           <p:cNvPr id="23" name="">
             <a:extLst xmlns:a="http://schemas.openxmlformats.org/drawingml/2006/main">
               <a:ext uri="{FF2B5EF4-FFF2-40B4-BE49-F238E27FC236}">
-                <a16:creationId xmlns:a16="http://schemas.microsoft.com/office/drawing/2014/main" id="{D464C079-078C-4D1D-AAEE-A8A0C358FF65}"/>
+                <a16:creationId xmlns:a16="http://schemas.microsoft.com/office/drawing/2014/main" id="{930BC9A4-D672-4B2D-9A37-58E72791383D}"/>
               </a:ext>
             </a:extLst>
           </p:cNvPr>
@@ -14065,7 +14381,7 @@
           <p:cNvPr id="24" name="">
             <a:extLst xmlns:a="http://schemas.openxmlformats.org/drawingml/2006/main">
               <a:ext uri="{FF2B5EF4-FFF2-40B4-BE49-F238E27FC236}">
-                <a16:creationId xmlns:a16="http://schemas.microsoft.com/office/drawing/2014/main" id="{CCC4D137-1153-4B2D-A9A5-6C140B805FB1}"/>
+                <a16:creationId xmlns:a16="http://schemas.microsoft.com/office/drawing/2014/main" id="{17C9C8A2-114F-4558-A55B-51BD9051812D}"/>
               </a:ext>
             </a:extLst>
           </p:cNvPr>
@@ -14098,7 +14414,7 @@
           <p:cNvPr id="25" name="">
             <a:extLst xmlns:a="http://schemas.openxmlformats.org/drawingml/2006/main">
               <a:ext uri="{FF2B5EF4-FFF2-40B4-BE49-F238E27FC236}">
-                <a16:creationId xmlns:a16="http://schemas.microsoft.com/office/drawing/2014/main" id="{13277061-6ACF-42AC-B219-F9F0BFDD37BC}"/>
+                <a16:creationId xmlns:a16="http://schemas.microsoft.com/office/drawing/2014/main" id="{7FE3243A-4926-4776-B786-521246A22D3C}"/>
               </a:ext>
             </a:extLst>
           </p:cNvPr>
@@ -14131,7 +14447,7 @@
           <p:cNvPr id="26" name="">
             <a:extLst xmlns:a="http://schemas.openxmlformats.org/drawingml/2006/main">
               <a:ext uri="{FF2B5EF4-FFF2-40B4-BE49-F238E27FC236}">
-                <a16:creationId xmlns:a16="http://schemas.microsoft.com/office/drawing/2014/main" id="{D95875A7-6BC2-4A5B-9373-DFFD2932EDD3}"/>
+                <a16:creationId xmlns:a16="http://schemas.microsoft.com/office/drawing/2014/main" id="{850E090E-973D-4601-8FA2-A4D5DEC00FA1}"/>
               </a:ext>
             </a:extLst>
           </p:cNvPr>
@@ -14164,7 +14480,7 @@
           <p:cNvPr id="27" name="">
             <a:extLst xmlns:a="http://schemas.openxmlformats.org/drawingml/2006/main">
               <a:ext uri="{FF2B5EF4-FFF2-40B4-BE49-F238E27FC236}">
-                <a16:creationId xmlns:a16="http://schemas.microsoft.com/office/drawing/2014/main" id="{A01E7924-4112-4574-A6A1-810344B09036}"/>
+                <a16:creationId xmlns:a16="http://schemas.microsoft.com/office/drawing/2014/main" id="{1C96BACD-4ED4-4149-9EE4-C825360EA502}"/>
               </a:ext>
             </a:extLst>
           </p:cNvPr>
@@ -14197,7 +14513,7 @@
           <p:cNvPr id="28" name="">
             <a:extLst xmlns:a="http://schemas.openxmlformats.org/drawingml/2006/main">
               <a:ext uri="{FF2B5EF4-FFF2-40B4-BE49-F238E27FC236}">
-                <a16:creationId xmlns:a16="http://schemas.microsoft.com/office/drawing/2014/main" id="{FDCE4DED-6140-4A5F-9292-8D59CA25EC98}"/>
+                <a16:creationId xmlns:a16="http://schemas.microsoft.com/office/drawing/2014/main" id="{A8A8ECE1-4716-4C00-AD69-8C178CFE1D14}"/>
               </a:ext>
             </a:extLst>
           </p:cNvPr>
@@ -14230,7 +14546,7 @@
           <p:cNvPr id="29" name="">
             <a:extLst xmlns:a="http://schemas.openxmlformats.org/drawingml/2006/main">
               <a:ext uri="{FF2B5EF4-FFF2-40B4-BE49-F238E27FC236}">
-                <a16:creationId xmlns:a16="http://schemas.microsoft.com/office/drawing/2014/main" id="{19823C16-1E5D-46B7-90B3-014F98533B6B}"/>
+                <a16:creationId xmlns:a16="http://schemas.microsoft.com/office/drawing/2014/main" id="{FF458BE1-43B2-4033-A845-0D0A14ADF544}"/>
               </a:ext>
             </a:extLst>
           </p:cNvPr>
@@ -14263,7 +14579,7 @@
           <p:cNvPr id="30" name="">
             <a:extLst xmlns:a="http://schemas.openxmlformats.org/drawingml/2006/main">
               <a:ext uri="{FF2B5EF4-FFF2-40B4-BE49-F238E27FC236}">
-                <a16:creationId xmlns:a16="http://schemas.microsoft.com/office/drawing/2014/main" id="{EEC08156-58EE-4749-B2F4-779889F49F86}"/>
+                <a16:creationId xmlns:a16="http://schemas.microsoft.com/office/drawing/2014/main" id="{2B616F35-D78A-4A34-AED8-C5295CCD5857}"/>
               </a:ext>
             </a:extLst>
           </p:cNvPr>
@@ -14296,7 +14612,7 @@
           <p:cNvPr id="31" name="">
             <a:extLst xmlns:a="http://schemas.openxmlformats.org/drawingml/2006/main">
               <a:ext uri="{FF2B5EF4-FFF2-40B4-BE49-F238E27FC236}">
-                <a16:creationId xmlns:a16="http://schemas.microsoft.com/office/drawing/2014/main" id="{313FE9A3-A08E-475D-9DD1-61559FCD0E99}"/>
+                <a16:creationId xmlns:a16="http://schemas.microsoft.com/office/drawing/2014/main" id="{22E3DC0E-587F-465D-ACCA-A0E214642572}"/>
               </a:ext>
             </a:extLst>
           </p:cNvPr>
@@ -14329,7 +14645,7 @@
           <p:cNvPr id="32" name="">
             <a:extLst xmlns:a="http://schemas.openxmlformats.org/drawingml/2006/main">
               <a:ext uri="{FF2B5EF4-FFF2-40B4-BE49-F238E27FC236}">
-                <a16:creationId xmlns:a16="http://schemas.microsoft.com/office/drawing/2014/main" id="{1F7750F3-33B8-4F51-BCDB-B635B5F758C3}"/>
+                <a16:creationId xmlns:a16="http://schemas.microsoft.com/office/drawing/2014/main" id="{B3CBA1AC-A4B5-4428-9B39-AEF5E5C97AA8}"/>
               </a:ext>
             </a:extLst>
           </p:cNvPr>
@@ -14362,7 +14678,7 @@
           <p:cNvPr id="33" name="">
             <a:extLst xmlns:a="http://schemas.openxmlformats.org/drawingml/2006/main">
               <a:ext uri="{FF2B5EF4-FFF2-40B4-BE49-F238E27FC236}">
-                <a16:creationId xmlns:a16="http://schemas.microsoft.com/office/drawing/2014/main" id="{F3F40CD4-87A2-4DCC-8186-ECD6A835DB20}"/>
+                <a16:creationId xmlns:a16="http://schemas.microsoft.com/office/drawing/2014/main" id="{8563FFC0-2CF4-4F5A-9C85-E9DED38A34A0}"/>
               </a:ext>
             </a:extLst>
           </p:cNvPr>
@@ -14395,7 +14711,7 @@
           <p:cNvPr id="34" name="">
             <a:extLst xmlns:a="http://schemas.openxmlformats.org/drawingml/2006/main">
               <a:ext uri="{FF2B5EF4-FFF2-40B4-BE49-F238E27FC236}">
-                <a16:creationId xmlns:a16="http://schemas.microsoft.com/office/drawing/2014/main" id="{82E59EC9-68CB-4A52-8AEB-A437B4ABFFD7}"/>
+                <a16:creationId xmlns:a16="http://schemas.microsoft.com/office/drawing/2014/main" id="{D0CC90CC-FC14-4346-AAD5-ECAC92631BA0}"/>
               </a:ext>
             </a:extLst>
           </p:cNvPr>
@@ -14428,7 +14744,7 @@
           <p:cNvPr id="35" name="">
             <a:extLst xmlns:a="http://schemas.openxmlformats.org/drawingml/2006/main">
               <a:ext uri="{FF2B5EF4-FFF2-40B4-BE49-F238E27FC236}">
-                <a16:creationId xmlns:a16="http://schemas.microsoft.com/office/drawing/2014/main" id="{770814E6-9FF5-44E8-86B0-D8171E236DDD}"/>
+                <a16:creationId xmlns:a16="http://schemas.microsoft.com/office/drawing/2014/main" id="{87A64CDD-0834-4D8F-8C9E-BD34C0F4DCA5}"/>
               </a:ext>
             </a:extLst>
           </p:cNvPr>
@@ -14461,7 +14777,7 @@
           <p:cNvPr id="36" name="">
             <a:extLst xmlns:a="http://schemas.openxmlformats.org/drawingml/2006/main">
               <a:ext uri="{FF2B5EF4-FFF2-40B4-BE49-F238E27FC236}">
-                <a16:creationId xmlns:a16="http://schemas.microsoft.com/office/drawing/2014/main" id="{DF1AB872-A124-4EB9-8DA9-6D09E5D5F262}"/>
+                <a16:creationId xmlns:a16="http://schemas.microsoft.com/office/drawing/2014/main" id="{75CA725C-6100-403D-9C35-71AFA3EEAA7C}"/>
               </a:ext>
             </a:extLst>
           </p:cNvPr>
@@ -14494,7 +14810,7 @@
           <p:cNvPr id="37" name="">
             <a:extLst xmlns:a="http://schemas.openxmlformats.org/drawingml/2006/main">
               <a:ext uri="{FF2B5EF4-FFF2-40B4-BE49-F238E27FC236}">
-                <a16:creationId xmlns:a16="http://schemas.microsoft.com/office/drawing/2014/main" id="{7D503C69-42D1-4EBA-8B95-68F69FAD6F6A}"/>
+                <a16:creationId xmlns:a16="http://schemas.microsoft.com/office/drawing/2014/main" id="{C814B44E-2BB0-4B0E-96B8-8DBD6D10AC0F}"/>
               </a:ext>
             </a:extLst>
           </p:cNvPr>
@@ -14527,7 +14843,7 @@
           <p:cNvPr id="38" name="">
             <a:extLst xmlns:a="http://schemas.openxmlformats.org/drawingml/2006/main">
               <a:ext uri="{FF2B5EF4-FFF2-40B4-BE49-F238E27FC236}">
-                <a16:creationId xmlns:a16="http://schemas.microsoft.com/office/drawing/2014/main" id="{2950E20B-F6B6-48BA-AD17-37E5509B5DF5}"/>
+                <a16:creationId xmlns:a16="http://schemas.microsoft.com/office/drawing/2014/main" id="{BC582904-66B0-4DD8-8D46-8E3343E643F9}"/>
               </a:ext>
             </a:extLst>
           </p:cNvPr>
@@ -14560,7 +14876,7 @@
           <p:cNvPr id="39" name="">
             <a:extLst xmlns:a="http://schemas.openxmlformats.org/drawingml/2006/main">
               <a:ext uri="{FF2B5EF4-FFF2-40B4-BE49-F238E27FC236}">
-                <a16:creationId xmlns:a16="http://schemas.microsoft.com/office/drawing/2014/main" id="{53CEF353-23DD-4271-BA75-BF814732D1D1}"/>
+                <a16:creationId xmlns:a16="http://schemas.microsoft.com/office/drawing/2014/main" id="{B45071DD-E5A6-4188-B7EF-2FF62270929A}"/>
               </a:ext>
             </a:extLst>
           </p:cNvPr>
@@ -14593,7 +14909,7 @@
           <p:cNvPr id="40" name="">
             <a:extLst xmlns:a="http://schemas.openxmlformats.org/drawingml/2006/main">
               <a:ext uri="{FF2B5EF4-FFF2-40B4-BE49-F238E27FC236}">
-                <a16:creationId xmlns:a16="http://schemas.microsoft.com/office/drawing/2014/main" id="{D2E15630-CAD8-4549-B9EF-31A621F13BBC}"/>
+                <a16:creationId xmlns:a16="http://schemas.microsoft.com/office/drawing/2014/main" id="{B90A2588-D4C7-4E55-81E7-C609AE7DFFD2}"/>
               </a:ext>
             </a:extLst>
           </p:cNvPr>
@@ -14626,7 +14942,7 @@
           <p:cNvPr id="41" name="">
             <a:extLst xmlns:a="http://schemas.openxmlformats.org/drawingml/2006/main">
               <a:ext uri="{FF2B5EF4-FFF2-40B4-BE49-F238E27FC236}">
-                <a16:creationId xmlns:a16="http://schemas.microsoft.com/office/drawing/2014/main" id="{ADFCD962-1FFE-4813-B299-1244247AF1C8}"/>
+                <a16:creationId xmlns:a16="http://schemas.microsoft.com/office/drawing/2014/main" id="{3726F3F0-C24E-49B7-B767-F43C65B4FEA2}"/>
               </a:ext>
             </a:extLst>
           </p:cNvPr>
@@ -14659,7 +14975,7 @@
           <p:cNvPr id="42" name="">
             <a:extLst xmlns:a="http://schemas.openxmlformats.org/drawingml/2006/main">
               <a:ext uri="{FF2B5EF4-FFF2-40B4-BE49-F238E27FC236}">
-                <a16:creationId xmlns:a16="http://schemas.microsoft.com/office/drawing/2014/main" id="{ECCBAEC8-5A95-470E-BB9D-47684B6022B2}"/>
+                <a16:creationId xmlns:a16="http://schemas.microsoft.com/office/drawing/2014/main" id="{A44E97DA-53EA-4263-B6D4-730F37C3192E}"/>
               </a:ext>
             </a:extLst>
           </p:cNvPr>
@@ -14692,7 +15008,7 @@
           <p:cNvPr id="43" name="">
             <a:extLst xmlns:a="http://schemas.openxmlformats.org/drawingml/2006/main">
               <a:ext uri="{FF2B5EF4-FFF2-40B4-BE49-F238E27FC236}">
-                <a16:creationId xmlns:a16="http://schemas.microsoft.com/office/drawing/2014/main" id="{491FBE60-FC75-4033-A482-12773DDD73E6}"/>
+                <a16:creationId xmlns:a16="http://schemas.microsoft.com/office/drawing/2014/main" id="{991C0010-0118-459D-8AAD-0C45E7613F7F}"/>
               </a:ext>
             </a:extLst>
           </p:cNvPr>
@@ -14725,7 +15041,7 @@
           <p:cNvPr id="44" name="">
             <a:extLst xmlns:a="http://schemas.openxmlformats.org/drawingml/2006/main">
               <a:ext uri="{FF2B5EF4-FFF2-40B4-BE49-F238E27FC236}">
-                <a16:creationId xmlns:a16="http://schemas.microsoft.com/office/drawing/2014/main" id="{C2328D8E-2532-4E3F-B37B-3BF863C6FAAE}"/>
+                <a16:creationId xmlns:a16="http://schemas.microsoft.com/office/drawing/2014/main" id="{CBB57FF4-45AA-4B70-BAAA-A1BF229DA93D}"/>
               </a:ext>
             </a:extLst>
           </p:cNvPr>
@@ -14758,7 +15074,7 @@
           <p:cNvPr id="45" name="">
             <a:extLst xmlns:a="http://schemas.openxmlformats.org/drawingml/2006/main">
               <a:ext uri="{FF2B5EF4-FFF2-40B4-BE49-F238E27FC236}">
-                <a16:creationId xmlns:a16="http://schemas.microsoft.com/office/drawing/2014/main" id="{9C68AC21-60FE-4F08-9196-CAC2A91ADF65}"/>
+                <a16:creationId xmlns:a16="http://schemas.microsoft.com/office/drawing/2014/main" id="{063DEB61-C474-405E-9579-40D507AD8B9F}"/>
               </a:ext>
             </a:extLst>
           </p:cNvPr>
@@ -14806,7 +15122,7 @@
     </p:spTree>
     <p:extLst>
       <p:ext uri="{BB962C8B-B14F-4D97-AF65-F5344CB8AC3E}">
-        <p14:creationId xmlns:p14="http://schemas.microsoft.com/office/powerpoint/2010/main" val="2004731761"/>
+        <p14:creationId xmlns:p14="http://schemas.microsoft.com/office/powerpoint/2010/main" val="1241260106"/>
       </p:ext>
     </p:extLst>
   </p:cSld>
@@ -14837,7 +15153,7 @@
           <p:cNvPr id="31" name="">
             <a:extLst xmlns:a="http://schemas.openxmlformats.org/drawingml/2006/main">
               <a:ext uri="{FF2B5EF4-FFF2-40B4-BE49-F238E27FC236}">
-                <a16:creationId xmlns:a16="http://schemas.microsoft.com/office/drawing/2014/main" id="{00DBFBD2-847B-46B8-AF05-22860448C5F1}"/>
+                <a16:creationId xmlns:a16="http://schemas.microsoft.com/office/drawing/2014/main" id="{3001D520-23B5-4B61-A1E5-E151B245F4BD}"/>
               </a:ext>
             </a:extLst>
           </p:cNvPr>
@@ -14870,7 +15186,7 @@
           <p:cNvPr id="2" name="">
             <a:extLst xmlns:a="http://schemas.openxmlformats.org/drawingml/2006/main">
               <a:ext uri="{FF2B5EF4-FFF2-40B4-BE49-F238E27FC236}">
-                <a16:creationId xmlns:a16="http://schemas.microsoft.com/office/drawing/2014/main" id="{484AAB32-D33A-4FA5-8B23-FE967CCC6311}"/>
+                <a16:creationId xmlns:a16="http://schemas.microsoft.com/office/drawing/2014/main" id="{BFB83694-BF27-44C2-BFCC-B1AF79B5953D}"/>
               </a:ext>
             </a:extLst>
           </p:cNvPr>
@@ -14920,7 +15236,7 @@
           <p:cNvPr id="3" name="">
             <a:extLst xmlns:a="http://schemas.openxmlformats.org/drawingml/2006/main">
               <a:ext uri="{FF2B5EF4-FFF2-40B4-BE49-F238E27FC236}">
-                <a16:creationId xmlns:a16="http://schemas.microsoft.com/office/drawing/2014/main" id="{026D7114-B999-428C-BBBB-BB8FA9ACD5F9}"/>
+                <a16:creationId xmlns:a16="http://schemas.microsoft.com/office/drawing/2014/main" id="{4AB33BAD-5051-400D-9F85-4C0702AB5093}"/>
               </a:ext>
             </a:extLst>
           </p:cNvPr>
@@ -14970,7 +15286,7 @@
           <p:cNvPr id="4" name="">
             <a:extLst xmlns:a="http://schemas.openxmlformats.org/drawingml/2006/main">
               <a:ext uri="{FF2B5EF4-FFF2-40B4-BE49-F238E27FC236}">
-                <a16:creationId xmlns:a16="http://schemas.microsoft.com/office/drawing/2014/main" id="{F70B991A-617B-4539-81C8-34892E24AB03}"/>
+                <a16:creationId xmlns:a16="http://schemas.microsoft.com/office/drawing/2014/main" id="{7C81F418-29E9-4E05-AD47-8161DB8F9105}"/>
               </a:ext>
             </a:extLst>
           </p:cNvPr>
@@ -15020,7 +15336,7 @@
           <p:cNvPr id="5" name="">
             <a:extLst xmlns:a="http://schemas.openxmlformats.org/drawingml/2006/main">
               <a:ext uri="{FF2B5EF4-FFF2-40B4-BE49-F238E27FC236}">
-                <a16:creationId xmlns:a16="http://schemas.microsoft.com/office/drawing/2014/main" id="{D23A7B74-A61D-443C-9CEF-6E311AB40829}"/>
+                <a16:creationId xmlns:a16="http://schemas.microsoft.com/office/drawing/2014/main" id="{437A582B-B2F7-49F6-93DA-984CAD8AEFE3}"/>
               </a:ext>
             </a:extLst>
           </p:cNvPr>
@@ -15051,7 +15367,7 @@
           <p:cNvPr id="6" name="">
             <a:extLst xmlns:a="http://schemas.openxmlformats.org/drawingml/2006/main">
               <a:ext uri="{FF2B5EF4-FFF2-40B4-BE49-F238E27FC236}">
-                <a16:creationId xmlns:a16="http://schemas.microsoft.com/office/drawing/2014/main" id="{9AC9E6CA-3763-4C04-8234-CBB696531A17}"/>
+                <a16:creationId xmlns:a16="http://schemas.microsoft.com/office/drawing/2014/main" id="{70B53DEE-1CF8-4D38-A9C6-2A60675DCCD8}"/>
               </a:ext>
             </a:extLst>
           </p:cNvPr>
@@ -15101,7 +15417,7 @@
           <p:cNvPr id="7" name="">
             <a:extLst xmlns:a="http://schemas.openxmlformats.org/drawingml/2006/main">
               <a:ext uri="{FF2B5EF4-FFF2-40B4-BE49-F238E27FC236}">
-                <a16:creationId xmlns:a16="http://schemas.microsoft.com/office/drawing/2014/main" id="{F167C6EF-4357-45A8-9514-E06AB60821FB}"/>
+                <a16:creationId xmlns:a16="http://schemas.microsoft.com/office/drawing/2014/main" id="{73DD5927-F2D0-4E88-B5FF-D618E2B8B385}"/>
               </a:ext>
             </a:extLst>
           </p:cNvPr>
@@ -15151,7 +15467,7 @@
           <p:cNvPr id="8" name="">
             <a:extLst xmlns:a="http://schemas.openxmlformats.org/drawingml/2006/main">
               <a:ext uri="{FF2B5EF4-FFF2-40B4-BE49-F238E27FC236}">
-                <a16:creationId xmlns:a16="http://schemas.microsoft.com/office/drawing/2014/main" id="{B010C830-B998-4A5B-8DFD-4F2705C2B316}"/>
+                <a16:creationId xmlns:a16="http://schemas.microsoft.com/office/drawing/2014/main" id="{7E430C20-B307-4009-8A69-10C29C7444C1}"/>
               </a:ext>
             </a:extLst>
           </p:cNvPr>
@@ -15201,7 +15517,7 @@
           <p:cNvPr id="9" name="">
             <a:extLst xmlns:a="http://schemas.openxmlformats.org/drawingml/2006/main">
               <a:ext uri="{FF2B5EF4-FFF2-40B4-BE49-F238E27FC236}">
-                <a16:creationId xmlns:a16="http://schemas.microsoft.com/office/drawing/2014/main" id="{6F2CC4CF-418E-4812-B68C-204F486B1729}"/>
+                <a16:creationId xmlns:a16="http://schemas.microsoft.com/office/drawing/2014/main" id="{15FD73CA-8DB3-49C5-A643-D43448FEFAF1}"/>
               </a:ext>
             </a:extLst>
           </p:cNvPr>
@@ -15251,7 +15567,7 @@
           <p:cNvPr id="10" name="">
             <a:extLst xmlns:a="http://schemas.openxmlformats.org/drawingml/2006/main">
               <a:ext uri="{FF2B5EF4-FFF2-40B4-BE49-F238E27FC236}">
-                <a16:creationId xmlns:a16="http://schemas.microsoft.com/office/drawing/2014/main" id="{EF0688D5-B92A-419D-BECB-36660DA2B1BF}"/>
+                <a16:creationId xmlns:a16="http://schemas.microsoft.com/office/drawing/2014/main" id="{F8EC3741-C097-4CC5-A248-238387E379AC}"/>
               </a:ext>
             </a:extLst>
           </p:cNvPr>
@@ -15301,7 +15617,7 @@
           <p:cNvPr id="11" name="">
             <a:extLst xmlns:a="http://schemas.openxmlformats.org/drawingml/2006/main">
               <a:ext uri="{FF2B5EF4-FFF2-40B4-BE49-F238E27FC236}">
-                <a16:creationId xmlns:a16="http://schemas.microsoft.com/office/drawing/2014/main" id="{781680C9-9A02-4EF1-B1AC-A7F2F7D4B98F}"/>
+                <a16:creationId xmlns:a16="http://schemas.microsoft.com/office/drawing/2014/main" id="{8D79EBF6-C47E-4698-9A24-61F6C1572415}"/>
               </a:ext>
             </a:extLst>
           </p:cNvPr>
@@ -15336,7 +15652,7 @@
           <p:cNvPr id="12" name="">
             <a:extLst xmlns:a="http://schemas.openxmlformats.org/drawingml/2006/main">
               <a:ext uri="{FF2B5EF4-FFF2-40B4-BE49-F238E27FC236}">
-                <a16:creationId xmlns:a16="http://schemas.microsoft.com/office/drawing/2014/main" id="{FA301173-337E-4045-BFEE-CD038A9D0C1C}"/>
+                <a16:creationId xmlns:a16="http://schemas.microsoft.com/office/drawing/2014/main" id="{78F30044-C537-49E6-8666-438939D031F8}"/>
               </a:ext>
             </a:extLst>
           </p:cNvPr>
@@ -15369,7 +15685,7 @@
           <p:cNvPr id="13" name="">
             <a:extLst xmlns:a="http://schemas.openxmlformats.org/drawingml/2006/main">
               <a:ext uri="{FF2B5EF4-FFF2-40B4-BE49-F238E27FC236}">
-                <a16:creationId xmlns:a16="http://schemas.microsoft.com/office/drawing/2014/main" id="{5BD71DA9-1DEB-43EF-B53D-9CCA6394987C}"/>
+                <a16:creationId xmlns:a16="http://schemas.microsoft.com/office/drawing/2014/main" id="{4F06FF46-8538-4811-A1FF-90379BE2165F}"/>
               </a:ext>
             </a:extLst>
           </p:cNvPr>
@@ -15402,7 +15718,7 @@
           <p:cNvPr id="14" name="">
             <a:extLst xmlns:a="http://schemas.openxmlformats.org/drawingml/2006/main">
               <a:ext uri="{FF2B5EF4-FFF2-40B4-BE49-F238E27FC236}">
-                <a16:creationId xmlns:a16="http://schemas.microsoft.com/office/drawing/2014/main" id="{B90794E7-BACC-42DF-92A9-8CD2DA1CDB39}"/>
+                <a16:creationId xmlns:a16="http://schemas.microsoft.com/office/drawing/2014/main" id="{E949B873-2BCA-4630-A249-DA0629C622D1}"/>
               </a:ext>
             </a:extLst>
           </p:cNvPr>
@@ -15435,7 +15751,7 @@
           <p:cNvPr id="15" name="">
             <a:extLst xmlns:a="http://schemas.openxmlformats.org/drawingml/2006/main">
               <a:ext uri="{FF2B5EF4-FFF2-40B4-BE49-F238E27FC236}">
-                <a16:creationId xmlns:a16="http://schemas.microsoft.com/office/drawing/2014/main" id="{B2A3D999-F3D0-41D2-BBA8-BDC3B841EFD2}"/>
+                <a16:creationId xmlns:a16="http://schemas.microsoft.com/office/drawing/2014/main" id="{717373E9-B34D-416C-94BE-9E298813057E}"/>
               </a:ext>
             </a:extLst>
           </p:cNvPr>
@@ -15468,7 +15784,7 @@
           <p:cNvPr id="16" name="">
             <a:extLst xmlns:a="http://schemas.openxmlformats.org/drawingml/2006/main">
               <a:ext uri="{FF2B5EF4-FFF2-40B4-BE49-F238E27FC236}">
-                <a16:creationId xmlns:a16="http://schemas.microsoft.com/office/drawing/2014/main" id="{4332D503-0663-4598-8950-BB634364E3A6}"/>
+                <a16:creationId xmlns:a16="http://schemas.microsoft.com/office/drawing/2014/main" id="{3799445A-5C86-4398-B068-62267E8AABFD}"/>
               </a:ext>
             </a:extLst>
           </p:cNvPr>
@@ -15501,7 +15817,7 @@
           <p:cNvPr id="17" name="">
             <a:extLst xmlns:a="http://schemas.openxmlformats.org/drawingml/2006/main">
               <a:ext uri="{FF2B5EF4-FFF2-40B4-BE49-F238E27FC236}">
-                <a16:creationId xmlns:a16="http://schemas.microsoft.com/office/drawing/2014/main" id="{6576FC4C-0BCF-4DC2-9F05-002FEF170FB7}"/>
+                <a16:creationId xmlns:a16="http://schemas.microsoft.com/office/drawing/2014/main" id="{AC551676-12BA-4B38-A5FF-6D0201C56ACD}"/>
               </a:ext>
             </a:extLst>
           </p:cNvPr>
@@ -15534,7 +15850,7 @@
           <p:cNvPr id="18" name="">
             <a:extLst xmlns:a="http://schemas.openxmlformats.org/drawingml/2006/main">
               <a:ext uri="{FF2B5EF4-FFF2-40B4-BE49-F238E27FC236}">
-                <a16:creationId xmlns:a16="http://schemas.microsoft.com/office/drawing/2014/main" id="{B864DECB-B393-4397-A7F3-9AE57EE67C95}"/>
+                <a16:creationId xmlns:a16="http://schemas.microsoft.com/office/drawing/2014/main" id="{4CE72577-BABA-4609-8290-15724D8FFA04}"/>
               </a:ext>
             </a:extLst>
           </p:cNvPr>
@@ -15567,7 +15883,7 @@
           <p:cNvPr id="19" name="">
             <a:extLst xmlns:a="http://schemas.openxmlformats.org/drawingml/2006/main">
               <a:ext uri="{FF2B5EF4-FFF2-40B4-BE49-F238E27FC236}">
-                <a16:creationId xmlns:a16="http://schemas.microsoft.com/office/drawing/2014/main" id="{4BE22F1F-C02E-46F1-A352-A2C338409681}"/>
+                <a16:creationId xmlns:a16="http://schemas.microsoft.com/office/drawing/2014/main" id="{87023A73-C0F2-4476-A19A-144708C5789B}"/>
               </a:ext>
             </a:extLst>
           </p:cNvPr>
@@ -15600,7 +15916,7 @@
           <p:cNvPr id="20" name="">
             <a:extLst xmlns:a="http://schemas.openxmlformats.org/drawingml/2006/main">
               <a:ext uri="{FF2B5EF4-FFF2-40B4-BE49-F238E27FC236}">
-                <a16:creationId xmlns:a16="http://schemas.microsoft.com/office/drawing/2014/main" id="{E0F091D0-69AA-49B7-AF28-2EAED7244FEF}"/>
+                <a16:creationId xmlns:a16="http://schemas.microsoft.com/office/drawing/2014/main" id="{5AE3713F-8509-4055-9A0B-BBF8CE4972BC}"/>
               </a:ext>
             </a:extLst>
           </p:cNvPr>
@@ -15633,7 +15949,7 @@
           <p:cNvPr id="21" name="">
             <a:extLst xmlns:a="http://schemas.openxmlformats.org/drawingml/2006/main">
               <a:ext uri="{FF2B5EF4-FFF2-40B4-BE49-F238E27FC236}">
-                <a16:creationId xmlns:a16="http://schemas.microsoft.com/office/drawing/2014/main" id="{C340CB20-167D-4931-B95D-7EE58947EE91}"/>
+                <a16:creationId xmlns:a16="http://schemas.microsoft.com/office/drawing/2014/main" id="{8BB6F751-49C3-41DD-9CE0-8A1DD145F44D}"/>
               </a:ext>
             </a:extLst>
           </p:cNvPr>
@@ -15666,7 +15982,7 @@
           <p:cNvPr id="22" name="">
             <a:extLst xmlns:a="http://schemas.openxmlformats.org/drawingml/2006/main">
               <a:ext uri="{FF2B5EF4-FFF2-40B4-BE49-F238E27FC236}">
-                <a16:creationId xmlns:a16="http://schemas.microsoft.com/office/drawing/2014/main" id="{45336C6A-966C-4629-BAB2-578E70742F47}"/>
+                <a16:creationId xmlns:a16="http://schemas.microsoft.com/office/drawing/2014/main" id="{F950DF0D-01EB-4962-870A-D82E848619B7}"/>
               </a:ext>
             </a:extLst>
           </p:cNvPr>
@@ -15699,7 +16015,7 @@
           <p:cNvPr id="23" name="">
             <a:extLst xmlns:a="http://schemas.openxmlformats.org/drawingml/2006/main">
               <a:ext uri="{FF2B5EF4-FFF2-40B4-BE49-F238E27FC236}">
-                <a16:creationId xmlns:a16="http://schemas.microsoft.com/office/drawing/2014/main" id="{4CA966C3-BD50-4AC2-AA1A-6C99A58F17B2}"/>
+                <a16:creationId xmlns:a16="http://schemas.microsoft.com/office/drawing/2014/main" id="{82C68991-7951-4F06-8809-BA0288D8B440}"/>
               </a:ext>
             </a:extLst>
           </p:cNvPr>
@@ -15732,7 +16048,7 @@
           <p:cNvPr id="24" name="">
             <a:extLst xmlns:a="http://schemas.openxmlformats.org/drawingml/2006/main">
               <a:ext uri="{FF2B5EF4-FFF2-40B4-BE49-F238E27FC236}">
-                <a16:creationId xmlns:a16="http://schemas.microsoft.com/office/drawing/2014/main" id="{E22399C8-A291-4FAE-9F6F-963E907F37E6}"/>
+                <a16:creationId xmlns:a16="http://schemas.microsoft.com/office/drawing/2014/main" id="{16BFBE33-89AA-457F-8AD4-4D491292D050}"/>
               </a:ext>
             </a:extLst>
           </p:cNvPr>
@@ -15765,7 +16081,7 @@
           <p:cNvPr id="25" name="">
             <a:extLst xmlns:a="http://schemas.openxmlformats.org/drawingml/2006/main">
               <a:ext uri="{FF2B5EF4-FFF2-40B4-BE49-F238E27FC236}">
-                <a16:creationId xmlns:a16="http://schemas.microsoft.com/office/drawing/2014/main" id="{8823A8E7-4891-473A-BF08-73B3B1F57A3C}"/>
+                <a16:creationId xmlns:a16="http://schemas.microsoft.com/office/drawing/2014/main" id="{28C74DC2-8F34-4BBB-B91D-C3E8766344EA}"/>
               </a:ext>
             </a:extLst>
           </p:cNvPr>
@@ -15798,7 +16114,7 @@
           <p:cNvPr id="26" name="">
             <a:extLst xmlns:a="http://schemas.openxmlformats.org/drawingml/2006/main">
               <a:ext uri="{FF2B5EF4-FFF2-40B4-BE49-F238E27FC236}">
-                <a16:creationId xmlns:a16="http://schemas.microsoft.com/office/drawing/2014/main" id="{1C0A1AD5-947C-4FD4-8095-F510D745D00C}"/>
+                <a16:creationId xmlns:a16="http://schemas.microsoft.com/office/drawing/2014/main" id="{7B969C63-8550-4188-9117-D1A4FCDC53E3}"/>
               </a:ext>
             </a:extLst>
           </p:cNvPr>
@@ -15831,7 +16147,7 @@
           <p:cNvPr id="27" name="">
             <a:extLst xmlns:a="http://schemas.openxmlformats.org/drawingml/2006/main">
               <a:ext uri="{FF2B5EF4-FFF2-40B4-BE49-F238E27FC236}">
-                <a16:creationId xmlns:a16="http://schemas.microsoft.com/office/drawing/2014/main" id="{0AC64F6B-795D-4338-B200-B2CBBAEA753D}"/>
+                <a16:creationId xmlns:a16="http://schemas.microsoft.com/office/drawing/2014/main" id="{AB5D0DA8-B9A2-4DEA-8881-8FF1BC0F293D}"/>
               </a:ext>
             </a:extLst>
           </p:cNvPr>
@@ -15864,7 +16180,7 @@
           <p:cNvPr id="28" name="">
             <a:extLst xmlns:a="http://schemas.openxmlformats.org/drawingml/2006/main">
               <a:ext uri="{FF2B5EF4-FFF2-40B4-BE49-F238E27FC236}">
-                <a16:creationId xmlns:a16="http://schemas.microsoft.com/office/drawing/2014/main" id="{7A3D62E9-4840-4D3D-888C-875845792B16}"/>
+                <a16:creationId xmlns:a16="http://schemas.microsoft.com/office/drawing/2014/main" id="{5F5B4EE7-D5CA-4FC7-901F-A99384CFFDE4}"/>
               </a:ext>
             </a:extLst>
           </p:cNvPr>
@@ -15914,7 +16230,7 @@
           <p:cNvPr id="29" name="">
             <a:extLst xmlns:a="http://schemas.openxmlformats.org/drawingml/2006/main">
               <a:ext uri="{FF2B5EF4-FFF2-40B4-BE49-F238E27FC236}">
-                <a16:creationId xmlns:a16="http://schemas.microsoft.com/office/drawing/2014/main" id="{CB9A41E4-843E-4E0B-86CA-8F2C8882C332}"/>
+                <a16:creationId xmlns:a16="http://schemas.microsoft.com/office/drawing/2014/main" id="{49B54639-FCA8-472A-B426-CE6A0228737C}"/>
               </a:ext>
             </a:extLst>
           </p:cNvPr>
@@ -15964,7 +16280,7 @@
           <p:cNvPr id="30" name="">
             <a:extLst xmlns:a="http://schemas.openxmlformats.org/drawingml/2006/main">
               <a:ext uri="{FF2B5EF4-FFF2-40B4-BE49-F238E27FC236}">
-                <a16:creationId xmlns:a16="http://schemas.microsoft.com/office/drawing/2014/main" id="{65BEB792-0F74-4722-B1F9-3DADDA7F5E82}"/>
+                <a16:creationId xmlns:a16="http://schemas.microsoft.com/office/drawing/2014/main" id="{D83F2372-5C25-4207-B437-BEB08545FE87}"/>
               </a:ext>
             </a:extLst>
           </p:cNvPr>
@@ -16012,7 +16328,7 @@
     </p:spTree>
     <p:extLst>
       <p:ext uri="{BB962C8B-B14F-4D97-AF65-F5344CB8AC3E}">
-        <p14:creationId xmlns:p14="http://schemas.microsoft.com/office/powerpoint/2010/main" val="1007809738"/>
+        <p14:creationId xmlns:p14="http://schemas.microsoft.com/office/powerpoint/2010/main" val="670711082"/>
       </p:ext>
     </p:extLst>
   </p:cSld>
@@ -16043,7 +16359,7 @@
           <p:cNvPr id="26" name="">
             <a:extLst xmlns:a="http://schemas.openxmlformats.org/drawingml/2006/main">
               <a:ext uri="{FF2B5EF4-FFF2-40B4-BE49-F238E27FC236}">
-                <a16:creationId xmlns:a16="http://schemas.microsoft.com/office/drawing/2014/main" id="{538A132C-4EDF-449C-AC5B-8C2EC7D3AE65}"/>
+                <a16:creationId xmlns:a16="http://schemas.microsoft.com/office/drawing/2014/main" id="{DE22A753-1066-40F2-AFF3-F51E60EE8CFA}"/>
               </a:ext>
             </a:extLst>
           </p:cNvPr>
@@ -16076,7 +16392,7 @@
           <p:cNvPr id="2" name="">
             <a:extLst xmlns:a="http://schemas.openxmlformats.org/drawingml/2006/main">
               <a:ext uri="{FF2B5EF4-FFF2-40B4-BE49-F238E27FC236}">
-                <a16:creationId xmlns:a16="http://schemas.microsoft.com/office/drawing/2014/main" id="{9639FFCE-ACC7-4A8A-A45F-26374931EF0F}"/>
+                <a16:creationId xmlns:a16="http://schemas.microsoft.com/office/drawing/2014/main" id="{B8EBE487-EC80-4C19-84A5-2E4EBF6064CB}"/>
               </a:ext>
             </a:extLst>
           </p:cNvPr>
@@ -16126,7 +16442,7 @@
           <p:cNvPr id="3" name="">
             <a:extLst xmlns:a="http://schemas.openxmlformats.org/drawingml/2006/main">
               <a:ext uri="{FF2B5EF4-FFF2-40B4-BE49-F238E27FC236}">
-                <a16:creationId xmlns:a16="http://schemas.microsoft.com/office/drawing/2014/main" id="{C0D4E0DD-F66D-4F60-B452-D59F39A3EA65}"/>
+                <a16:creationId xmlns:a16="http://schemas.microsoft.com/office/drawing/2014/main" id="{9FCDEE53-8F9A-416B-92F0-32F5FA0CAB8A}"/>
               </a:ext>
             </a:extLst>
           </p:cNvPr>
@@ -16176,7 +16492,7 @@
           <p:cNvPr id="4" name="">
             <a:extLst xmlns:a="http://schemas.openxmlformats.org/drawingml/2006/main">
               <a:ext uri="{FF2B5EF4-FFF2-40B4-BE49-F238E27FC236}">
-                <a16:creationId xmlns:a16="http://schemas.microsoft.com/office/drawing/2014/main" id="{AE6A9AA1-08E7-443D-A692-326CDE837E4D}"/>
+                <a16:creationId xmlns:a16="http://schemas.microsoft.com/office/drawing/2014/main" id="{EA3F1711-74BF-49CA-A6DF-4118BBB5E1E6}"/>
               </a:ext>
             </a:extLst>
           </p:cNvPr>
@@ -16226,7 +16542,7 @@
           <p:cNvPr id="5" name="">
             <a:extLst xmlns:a="http://schemas.openxmlformats.org/drawingml/2006/main">
               <a:ext uri="{FF2B5EF4-FFF2-40B4-BE49-F238E27FC236}">
-                <a16:creationId xmlns:a16="http://schemas.microsoft.com/office/drawing/2014/main" id="{0D2FC3FF-90DE-4034-8F83-07B498BE3B7F}"/>
+                <a16:creationId xmlns:a16="http://schemas.microsoft.com/office/drawing/2014/main" id="{E71F610E-CCD7-4142-B941-17CA18CB4D60}"/>
               </a:ext>
             </a:extLst>
           </p:cNvPr>
@@ -16257,7 +16573,7 @@
           <p:cNvPr id="6" name="">
             <a:extLst xmlns:a="http://schemas.openxmlformats.org/drawingml/2006/main">
               <a:ext uri="{FF2B5EF4-FFF2-40B4-BE49-F238E27FC236}">
-                <a16:creationId xmlns:a16="http://schemas.microsoft.com/office/drawing/2014/main" id="{CFAF3023-740C-4882-82A6-DF5CF9695879}"/>
+                <a16:creationId xmlns:a16="http://schemas.microsoft.com/office/drawing/2014/main" id="{C0275933-3CB8-4B7C-8CC0-0AEC8A3427A8}"/>
               </a:ext>
             </a:extLst>
           </p:cNvPr>
@@ -16307,7 +16623,7 @@
           <p:cNvPr id="7" name="">
             <a:extLst xmlns:a="http://schemas.openxmlformats.org/drawingml/2006/main">
               <a:ext uri="{FF2B5EF4-FFF2-40B4-BE49-F238E27FC236}">
-                <a16:creationId xmlns:a16="http://schemas.microsoft.com/office/drawing/2014/main" id="{21A79595-9442-4B8B-A3E5-E3CE8E4D68CD}"/>
+                <a16:creationId xmlns:a16="http://schemas.microsoft.com/office/drawing/2014/main" id="{7FC12BDF-6B22-4E67-BEF1-9CD14B66594F}"/>
               </a:ext>
             </a:extLst>
           </p:cNvPr>
@@ -16357,7 +16673,7 @@
           <p:cNvPr id="8" name="">
             <a:extLst xmlns:a="http://schemas.openxmlformats.org/drawingml/2006/main">
               <a:ext uri="{FF2B5EF4-FFF2-40B4-BE49-F238E27FC236}">
-                <a16:creationId xmlns:a16="http://schemas.microsoft.com/office/drawing/2014/main" id="{0DF55D07-2617-465E-A37B-86C5F57EDF8A}"/>
+                <a16:creationId xmlns:a16="http://schemas.microsoft.com/office/drawing/2014/main" id="{6E3224D0-77D1-43C3-9A6E-8A0DC28BC70A}"/>
               </a:ext>
             </a:extLst>
           </p:cNvPr>
@@ -16388,7 +16704,7 @@
           <p:cNvPr id="9" name="">
             <a:extLst xmlns:a="http://schemas.openxmlformats.org/drawingml/2006/main">
               <a:ext uri="{FF2B5EF4-FFF2-40B4-BE49-F238E27FC236}">
-                <a16:creationId xmlns:a16="http://schemas.microsoft.com/office/drawing/2014/main" id="{73F0C0BC-34EC-427E-A03B-E4CB95A56584}"/>
+                <a16:creationId xmlns:a16="http://schemas.microsoft.com/office/drawing/2014/main" id="{C734D1AC-FC44-49AB-85AE-D8B98D75ACD1}"/>
               </a:ext>
             </a:extLst>
           </p:cNvPr>
@@ -16421,7 +16737,7 @@
           <p:cNvPr id="10" name="">
             <a:extLst xmlns:a="http://schemas.openxmlformats.org/drawingml/2006/main">
               <a:ext uri="{FF2B5EF4-FFF2-40B4-BE49-F238E27FC236}">
-                <a16:creationId xmlns:a16="http://schemas.microsoft.com/office/drawing/2014/main" id="{3962CF76-E026-4676-8A99-497F7A1CF81F}"/>
+                <a16:creationId xmlns:a16="http://schemas.microsoft.com/office/drawing/2014/main" id="{88B79A19-DBCC-47B4-8BFA-AC47ABE6039C}"/>
               </a:ext>
             </a:extLst>
           </p:cNvPr>
@@ -16471,7 +16787,7 @@
           <p:cNvPr id="11" name="">
             <a:extLst xmlns:a="http://schemas.openxmlformats.org/drawingml/2006/main">
               <a:ext uri="{FF2B5EF4-FFF2-40B4-BE49-F238E27FC236}">
-                <a16:creationId xmlns:a16="http://schemas.microsoft.com/office/drawing/2014/main" id="{80F4D31F-5B0A-4C6A-AB48-77531A4C2310}"/>
+                <a16:creationId xmlns:a16="http://schemas.microsoft.com/office/drawing/2014/main" id="{5C9A8A8A-000B-4951-B139-771CB5F3E90B}"/>
               </a:ext>
             </a:extLst>
           </p:cNvPr>
@@ -16509,7 +16825,7 @@
           <p:cNvPr id="12" name="">
             <a:extLst xmlns:a="http://schemas.openxmlformats.org/drawingml/2006/main">
               <a:ext uri="{FF2B5EF4-FFF2-40B4-BE49-F238E27FC236}">
-                <a16:creationId xmlns:a16="http://schemas.microsoft.com/office/drawing/2014/main" id="{8D24966C-7F05-4526-BD0D-E491EBA29CC9}"/>
+                <a16:creationId xmlns:a16="http://schemas.microsoft.com/office/drawing/2014/main" id="{CEA31A80-C5A0-482B-9B0C-07190080AC71}"/>
               </a:ext>
             </a:extLst>
           </p:cNvPr>
@@ -16542,7 +16858,7 @@
           <p:cNvPr id="13" name="">
             <a:extLst xmlns:a="http://schemas.openxmlformats.org/drawingml/2006/main">
               <a:ext uri="{FF2B5EF4-FFF2-40B4-BE49-F238E27FC236}">
-                <a16:creationId xmlns:a16="http://schemas.microsoft.com/office/drawing/2014/main" id="{1012224D-4810-4D94-A515-6CD7B24FCF35}"/>
+                <a16:creationId xmlns:a16="http://schemas.microsoft.com/office/drawing/2014/main" id="{DAABB618-0090-453E-AB6C-BCE553BE304A}"/>
               </a:ext>
             </a:extLst>
           </p:cNvPr>
@@ -16592,7 +16908,7 @@
           <p:cNvPr id="14" name="">
             <a:extLst xmlns:a="http://schemas.openxmlformats.org/drawingml/2006/main">
               <a:ext uri="{FF2B5EF4-FFF2-40B4-BE49-F238E27FC236}">
-                <a16:creationId xmlns:a16="http://schemas.microsoft.com/office/drawing/2014/main" id="{C5283DBB-C699-4A8B-8E95-3460519332DD}"/>
+                <a16:creationId xmlns:a16="http://schemas.microsoft.com/office/drawing/2014/main" id="{E6C873B3-7B5E-49D5-99F8-0A91BEFD723F}"/>
               </a:ext>
             </a:extLst>
           </p:cNvPr>
@@ -16630,7 +16946,7 @@
           <p:cNvPr id="15" name="">
             <a:extLst xmlns:a="http://schemas.openxmlformats.org/drawingml/2006/main">
               <a:ext uri="{FF2B5EF4-FFF2-40B4-BE49-F238E27FC236}">
-                <a16:creationId xmlns:a16="http://schemas.microsoft.com/office/drawing/2014/main" id="{AE2AABAD-0816-4B33-A3D9-561A139A15DD}"/>
+                <a16:creationId xmlns:a16="http://schemas.microsoft.com/office/drawing/2014/main" id="{1C56E189-A818-422A-822B-941817782407}"/>
               </a:ext>
             </a:extLst>
           </p:cNvPr>
@@ -16663,7 +16979,7 @@
           <p:cNvPr id="16" name="">
             <a:extLst xmlns:a="http://schemas.openxmlformats.org/drawingml/2006/main">
               <a:ext uri="{FF2B5EF4-FFF2-40B4-BE49-F238E27FC236}">
-                <a16:creationId xmlns:a16="http://schemas.microsoft.com/office/drawing/2014/main" id="{E77E9B5E-77C4-410C-AB43-DAFBBFA8AAF4}"/>
+                <a16:creationId xmlns:a16="http://schemas.microsoft.com/office/drawing/2014/main" id="{E539C111-9068-4E52-8284-271AAA3E70A2}"/>
               </a:ext>
             </a:extLst>
           </p:cNvPr>
@@ -16713,7 +17029,7 @@
           <p:cNvPr id="17" name="">
             <a:extLst xmlns:a="http://schemas.openxmlformats.org/drawingml/2006/main">
               <a:ext uri="{FF2B5EF4-FFF2-40B4-BE49-F238E27FC236}">
-                <a16:creationId xmlns:a16="http://schemas.microsoft.com/office/drawing/2014/main" id="{065FC6D2-57CA-44AC-8A30-F8830F7A6EDA}"/>
+                <a16:creationId xmlns:a16="http://schemas.microsoft.com/office/drawing/2014/main" id="{56719780-21E5-4692-84AF-9EDA4C7A08D3}"/>
               </a:ext>
             </a:extLst>
           </p:cNvPr>
@@ -16751,7 +17067,7 @@
           <p:cNvPr id="18" name="">
             <a:extLst xmlns:a="http://schemas.openxmlformats.org/drawingml/2006/main">
               <a:ext uri="{FF2B5EF4-FFF2-40B4-BE49-F238E27FC236}">
-                <a16:creationId xmlns:a16="http://schemas.microsoft.com/office/drawing/2014/main" id="{984DABD2-DAE1-4FCE-9AB3-B6F7AE63FF18}"/>
+                <a16:creationId xmlns:a16="http://schemas.microsoft.com/office/drawing/2014/main" id="{E670AA2A-C2D3-40FA-B204-43E94E15151D}"/>
               </a:ext>
             </a:extLst>
           </p:cNvPr>
@@ -16784,7 +17100,7 @@
           <p:cNvPr id="19" name="">
             <a:extLst xmlns:a="http://schemas.openxmlformats.org/drawingml/2006/main">
               <a:ext uri="{FF2B5EF4-FFF2-40B4-BE49-F238E27FC236}">
-                <a16:creationId xmlns:a16="http://schemas.microsoft.com/office/drawing/2014/main" id="{5F976473-398F-4C66-B2B3-B0F895EF25F9}"/>
+                <a16:creationId xmlns:a16="http://schemas.microsoft.com/office/drawing/2014/main" id="{FE80832D-A2D5-4D3C-A73E-C0F4B4A5006D}"/>
               </a:ext>
             </a:extLst>
           </p:cNvPr>
@@ -16834,7 +17150,7 @@
           <p:cNvPr id="20" name="">
             <a:extLst xmlns:a="http://schemas.openxmlformats.org/drawingml/2006/main">
               <a:ext uri="{FF2B5EF4-FFF2-40B4-BE49-F238E27FC236}">
-                <a16:creationId xmlns:a16="http://schemas.microsoft.com/office/drawing/2014/main" id="{7C7E4B0C-38A4-4572-BCB4-075290B2B1D4}"/>
+                <a16:creationId xmlns:a16="http://schemas.microsoft.com/office/drawing/2014/main" id="{F6A6B28B-4BDA-4A29-881A-0AA42F60D600}"/>
               </a:ext>
             </a:extLst>
           </p:cNvPr>
@@ -16872,7 +17188,7 @@
           <p:cNvPr id="21" name="">
             <a:extLst xmlns:a="http://schemas.openxmlformats.org/drawingml/2006/main">
               <a:ext uri="{FF2B5EF4-FFF2-40B4-BE49-F238E27FC236}">
-                <a16:creationId xmlns:a16="http://schemas.microsoft.com/office/drawing/2014/main" id="{DA28E2DB-DFA3-4615-8C2C-ACC879547235}"/>
+                <a16:creationId xmlns:a16="http://schemas.microsoft.com/office/drawing/2014/main" id="{70C80F2B-5661-4EB0-8924-058E89093C8B}"/>
               </a:ext>
             </a:extLst>
           </p:cNvPr>
@@ -16922,7 +17238,7 @@
           <p:cNvPr id="22" name="">
             <a:extLst xmlns:a="http://schemas.openxmlformats.org/drawingml/2006/main">
               <a:ext uri="{FF2B5EF4-FFF2-40B4-BE49-F238E27FC236}">
-                <a16:creationId xmlns:a16="http://schemas.microsoft.com/office/drawing/2014/main" id="{4831A15C-DEEC-4C3D-88CD-839CDAAED6EC}"/>
+                <a16:creationId xmlns:a16="http://schemas.microsoft.com/office/drawing/2014/main" id="{4CD2DEEB-F4EF-41D3-B2CA-B5DF6066B8D9}"/>
               </a:ext>
             </a:extLst>
           </p:cNvPr>
@@ -16972,7 +17288,7 @@
           <p:cNvPr id="23" name="">
             <a:extLst xmlns:a="http://schemas.openxmlformats.org/drawingml/2006/main">
               <a:ext uri="{FF2B5EF4-FFF2-40B4-BE49-F238E27FC236}">
-                <a16:creationId xmlns:a16="http://schemas.microsoft.com/office/drawing/2014/main" id="{F9B4DFFE-C689-4FE9-B952-4ED557548A43}"/>
+                <a16:creationId xmlns:a16="http://schemas.microsoft.com/office/drawing/2014/main" id="{46A58527-6C28-4ECD-87AB-0A41604FCA7C}"/>
               </a:ext>
             </a:extLst>
           </p:cNvPr>
@@ -17022,7 +17338,7 @@
           <p:cNvPr id="24" name="">
             <a:extLst xmlns:a="http://schemas.openxmlformats.org/drawingml/2006/main">
               <a:ext uri="{FF2B5EF4-FFF2-40B4-BE49-F238E27FC236}">
-                <a16:creationId xmlns:a16="http://schemas.microsoft.com/office/drawing/2014/main" id="{15A6E063-0F73-46BD-9EB0-4DCC9310D2AD}"/>
+                <a16:creationId xmlns:a16="http://schemas.microsoft.com/office/drawing/2014/main" id="{BDD9F7EF-8676-4972-BED8-7C4EE61D9F1A}"/>
               </a:ext>
             </a:extLst>
           </p:cNvPr>
@@ -17072,7 +17388,7 @@
           <p:cNvPr id="25" name="">
             <a:extLst xmlns:a="http://schemas.openxmlformats.org/drawingml/2006/main">
               <a:ext uri="{FF2B5EF4-FFF2-40B4-BE49-F238E27FC236}">
-                <a16:creationId xmlns:a16="http://schemas.microsoft.com/office/drawing/2014/main" id="{A826A28D-872A-4B01-A834-CDC95AB78A84}"/>
+                <a16:creationId xmlns:a16="http://schemas.microsoft.com/office/drawing/2014/main" id="{2F2FCCF4-8DCA-42F3-8152-9944923A6ED9}"/>
               </a:ext>
             </a:extLst>
           </p:cNvPr>
@@ -17120,7 +17436,7 @@
     </p:spTree>
     <p:extLst>
       <p:ext uri="{BB962C8B-B14F-4D97-AF65-F5344CB8AC3E}">
-        <p14:creationId xmlns:p14="http://schemas.microsoft.com/office/powerpoint/2010/main" val="768436325"/>
+        <p14:creationId xmlns:p14="http://schemas.microsoft.com/office/powerpoint/2010/main" val="1878440181"/>
       </p:ext>
     </p:extLst>
   </p:cSld>
@@ -17148,10 +17464,10 @@
       </p:grpSpPr>
       <p:sp>
         <p:nvSpPr>
-          <p:cNvPr id="62" name="">
-            <a:extLst xmlns:a="http://schemas.openxmlformats.org/drawingml/2006/main">
-              <a:ext uri="{FF2B5EF4-FFF2-40B4-BE49-F238E27FC236}">
-                <a16:creationId xmlns:a16="http://schemas.microsoft.com/office/drawing/2014/main" id="{59E049F8-EE0A-40AE-8105-8C8F381E5558}"/>
+          <p:cNvPr id="22" name="">
+            <a:extLst xmlns:a="http://schemas.openxmlformats.org/drawingml/2006/main">
+              <a:ext uri="{FF2B5EF4-FFF2-40B4-BE49-F238E27FC236}">
+                <a16:creationId xmlns:a16="http://schemas.microsoft.com/office/drawing/2014/main" id="{7D1DFF24-4157-4A2E-A1B8-2222E7254DF0}"/>
               </a:ext>
             </a:extLst>
           </p:cNvPr>
@@ -17184,7 +17500,7 @@
           <p:cNvPr id="2" name="">
             <a:extLst xmlns:a="http://schemas.openxmlformats.org/drawingml/2006/main">
               <a:ext uri="{FF2B5EF4-FFF2-40B4-BE49-F238E27FC236}">
-                <a16:creationId xmlns:a16="http://schemas.microsoft.com/office/drawing/2014/main" id="{A6E23F53-6BF0-44D0-9BDE-15DBD151CA8D}"/>
+                <a16:creationId xmlns:a16="http://schemas.microsoft.com/office/drawing/2014/main" id="{61EAD535-4A09-4A98-9B95-16DA43D71775}"/>
               </a:ext>
             </a:extLst>
           </p:cNvPr>
@@ -17234,7 +17550,7 @@
           <p:cNvPr id="3" name="">
             <a:extLst xmlns:a="http://schemas.openxmlformats.org/drawingml/2006/main">
               <a:ext uri="{FF2B5EF4-FFF2-40B4-BE49-F238E27FC236}">
-                <a16:creationId xmlns:a16="http://schemas.microsoft.com/office/drawing/2014/main" id="{6415A6B4-BDDC-4E41-998B-62FF153A481A}"/>
+                <a16:creationId xmlns:a16="http://schemas.microsoft.com/office/drawing/2014/main" id="{FC9747BC-E9AB-4594-A2CB-836E8EB0EDC1}"/>
               </a:ext>
             </a:extLst>
           </p:cNvPr>
@@ -17284,7 +17600,7 @@
           <p:cNvPr id="4" name="">
             <a:extLst xmlns:a="http://schemas.openxmlformats.org/drawingml/2006/main">
               <a:ext uri="{FF2B5EF4-FFF2-40B4-BE49-F238E27FC236}">
-                <a16:creationId xmlns:a16="http://schemas.microsoft.com/office/drawing/2014/main" id="{ED885DB1-AE0A-4DC9-B70B-A342CBB07CBE}"/>
+                <a16:creationId xmlns:a16="http://schemas.microsoft.com/office/drawing/2014/main" id="{018785F1-9928-41D0-93DC-C68A7CF5940F}"/>
               </a:ext>
             </a:extLst>
           </p:cNvPr>
@@ -17334,7 +17650,7 @@
           <p:cNvPr id="5" name="">
             <a:extLst xmlns:a="http://schemas.openxmlformats.org/drawingml/2006/main">
               <a:ext uri="{FF2B5EF4-FFF2-40B4-BE49-F238E27FC236}">
-                <a16:creationId xmlns:a16="http://schemas.microsoft.com/office/drawing/2014/main" id="{74399AFF-044B-4F03-9792-9D314ED69DCE}"/>
+                <a16:creationId xmlns:a16="http://schemas.microsoft.com/office/drawing/2014/main" id="{161766DE-0BC0-4755-8D8B-EBC745997A0E}"/>
               </a:ext>
             </a:extLst>
           </p:cNvPr>
@@ -17365,7 +17681,7 @@
           <p:cNvPr id="6" name="">
             <a:extLst xmlns:a="http://schemas.openxmlformats.org/drawingml/2006/main">
               <a:ext uri="{FF2B5EF4-FFF2-40B4-BE49-F238E27FC236}">
-                <a16:creationId xmlns:a16="http://schemas.microsoft.com/office/drawing/2014/main" id="{72997565-32E6-475D-AD2B-A7E542892B0C}"/>
+                <a16:creationId xmlns:a16="http://schemas.microsoft.com/office/drawing/2014/main" id="{D9AB6863-48C2-4B11-8C38-531524DE985C}"/>
               </a:ext>
             </a:extLst>
           </p:cNvPr>
@@ -17415,7 +17731,7 @@
           <p:cNvPr id="7" name="">
             <a:extLst xmlns:a="http://schemas.openxmlformats.org/drawingml/2006/main">
               <a:ext uri="{FF2B5EF4-FFF2-40B4-BE49-F238E27FC236}">
-                <a16:creationId xmlns:a16="http://schemas.microsoft.com/office/drawing/2014/main" id="{141783BA-BD25-4CC7-8455-41E6BE2891DD}"/>
+                <a16:creationId xmlns:a16="http://schemas.microsoft.com/office/drawing/2014/main" id="{F112C43A-826B-438C-AE2D-B2304C242566}"/>
               </a:ext>
             </a:extLst>
           </p:cNvPr>
@@ -17465,7 +17781,7 @@
           <p:cNvPr id="8" name="">
             <a:extLst xmlns:a="http://schemas.openxmlformats.org/drawingml/2006/main">
               <a:ext uri="{FF2B5EF4-FFF2-40B4-BE49-F238E27FC236}">
-                <a16:creationId xmlns:a16="http://schemas.microsoft.com/office/drawing/2014/main" id="{7635ABF7-6319-41F8-8C06-FC7E49FCA0F5}"/>
+                <a16:creationId xmlns:a16="http://schemas.microsoft.com/office/drawing/2014/main" id="{646723B7-8A21-48FE-A8DC-A2D68EDFB9D6}"/>
               </a:ext>
             </a:extLst>
           </p:cNvPr>
@@ -17477,7 +17793,7 @@
         <p:spPr>
           <a:xfrm xmlns:a="http://schemas.openxmlformats.org/drawingml/2006/main">
             <a:off x="781050" y="2238375"/>
-            <a:ext cx="2628900" cy="2628900"/>
+            <a:ext cx="2628900" cy="3048000"/>
           </a:xfrm>
           <a:prstGeom xmlns:a="http://schemas.openxmlformats.org/drawingml/2006/main" prst="roundRect">
             <a:avLst>
@@ -17485,10 +17801,12 @@
             </a:avLst>
           </a:prstGeom>
           <a:solidFill xmlns:a="http://schemas.openxmlformats.org/drawingml/2006/main">
-            <a:srgbClr val="FFFFFF"/>
-          </a:solidFill>
-          <a:ln xmlns:a="http://schemas.openxmlformats.org/drawingml/2006/main" w="0">
-            <a:noFill/>
+            <a:srgbClr val="050A10"/>
+          </a:solidFill>
+          <a:ln xmlns:a="http://schemas.openxmlformats.org/drawingml/2006/main" w="9525">
+            <a:solidFill>
+              <a:srgbClr val="274158"/>
+            </a:solidFill>
             <a:prstDash val="solid"/>
           </a:ln>
         </p:spPr>
@@ -17498,25 +17816,27 @@
           <p:cNvPr id="9" name="">
             <a:extLst xmlns:a="http://schemas.openxmlformats.org/drawingml/2006/main">
               <a:ext uri="{FF2B5EF4-FFF2-40B4-BE49-F238E27FC236}">
-                <a16:creationId xmlns:a16="http://schemas.microsoft.com/office/drawing/2014/main" id="{12F6F34F-6704-40F4-901B-920D927A1A18}"/>
-              </a:ext>
-            </a:extLst>
-          </p:cNvPr>
-          <p:cNvSpPr>
-            <a:spLocks xmlns:a="http://schemas.openxmlformats.org/drawingml/2006/main" noGrp="1"/>
-          </p:cNvSpPr>
-          <p:nvPr/>
-        </p:nvSpPr>
-        <p:spPr>
-          <a:xfrm xmlns:a="http://schemas.openxmlformats.org/drawingml/2006/main">
-            <a:off x="1066800" y="2524125"/>
-            <a:ext cx="190500" cy="190500"/>
-          </a:xfrm>
-          <a:prstGeom xmlns:a="http://schemas.openxmlformats.org/drawingml/2006/main" prst="rect">
-            <a:avLst/>
+                <a16:creationId xmlns:a16="http://schemas.microsoft.com/office/drawing/2014/main" id="{57262A6A-1463-477B-ADE4-2007EC15D0C1}"/>
+              </a:ext>
+            </a:extLst>
+          </p:cNvPr>
+          <p:cNvSpPr>
+            <a:spLocks xmlns:a="http://schemas.openxmlformats.org/drawingml/2006/main" noGrp="1"/>
+          </p:cNvSpPr>
+          <p:nvPr/>
+        </p:nvSpPr>
+        <p:spPr>
+          <a:xfrm xmlns:a="http://schemas.openxmlformats.org/drawingml/2006/main">
+            <a:off x="781050" y="2238375"/>
+            <a:ext cx="66675" cy="3048000"/>
+          </a:xfrm>
+          <a:prstGeom xmlns:a="http://schemas.openxmlformats.org/drawingml/2006/main" prst="roundRect">
+            <a:avLst>
+              <a:gd name="adj" fmla="val 50000"/>
+            </a:avLst>
           </a:prstGeom>
           <a:solidFill xmlns:a="http://schemas.openxmlformats.org/drawingml/2006/main">
-            <a:srgbClr val="08111D"/>
+            <a:srgbClr val="38D9FF"/>
           </a:solidFill>
           <a:ln xmlns:a="http://schemas.openxmlformats.org/drawingml/2006/main" w="0">
             <a:noFill/>
@@ -17529,25 +17849,25 @@
           <p:cNvPr id="10" name="">
             <a:extLst xmlns:a="http://schemas.openxmlformats.org/drawingml/2006/main">
               <a:ext uri="{FF2B5EF4-FFF2-40B4-BE49-F238E27FC236}">
-                <a16:creationId xmlns:a16="http://schemas.microsoft.com/office/drawing/2014/main" id="{3CE6BEAE-47E9-423D-822B-E60813EA9627}"/>
-              </a:ext>
-            </a:extLst>
-          </p:cNvPr>
-          <p:cNvSpPr>
-            <a:spLocks xmlns:a="http://schemas.openxmlformats.org/drawingml/2006/main" noGrp="1"/>
-          </p:cNvSpPr>
-          <p:nvPr/>
-        </p:nvSpPr>
-        <p:spPr>
-          <a:xfrm xmlns:a="http://schemas.openxmlformats.org/drawingml/2006/main">
-            <a:off x="1295400" y="2524125"/>
-            <a:ext cx="190500" cy="190500"/>
-          </a:xfrm>
-          <a:prstGeom xmlns:a="http://schemas.openxmlformats.org/drawingml/2006/main" prst="rect">
+                <a16:creationId xmlns:a16="http://schemas.microsoft.com/office/drawing/2014/main" id="{819464BD-39D9-432B-BF9F-52071DF8D8E6}"/>
+              </a:ext>
+            </a:extLst>
+          </p:cNvPr>
+          <p:cNvSpPr>
+            <a:spLocks xmlns:a="http://schemas.openxmlformats.org/drawingml/2006/main" noGrp="1"/>
+          </p:cNvSpPr>
+          <p:nvPr/>
+        </p:nvSpPr>
+        <p:spPr>
+          <a:xfrm xmlns:a="http://schemas.openxmlformats.org/drawingml/2006/main">
+            <a:off x="1009650" y="2409825"/>
+            <a:ext cx="95250" cy="95250"/>
+          </a:xfrm>
+          <a:prstGeom xmlns:a="http://schemas.openxmlformats.org/drawingml/2006/main" prst="ellipse">
             <a:avLst/>
           </a:prstGeom>
           <a:solidFill xmlns:a="http://schemas.openxmlformats.org/drawingml/2006/main">
-            <a:srgbClr val="08111D"/>
+            <a:srgbClr val="FF6B7A"/>
           </a:solidFill>
           <a:ln xmlns:a="http://schemas.openxmlformats.org/drawingml/2006/main" w="0">
             <a:noFill/>
@@ -17560,25 +17880,25 @@
           <p:cNvPr id="11" name="">
             <a:extLst xmlns:a="http://schemas.openxmlformats.org/drawingml/2006/main">
               <a:ext uri="{FF2B5EF4-FFF2-40B4-BE49-F238E27FC236}">
-                <a16:creationId xmlns:a16="http://schemas.microsoft.com/office/drawing/2014/main" id="{DEE8FCD0-2292-4E58-B14B-37B774BD1F23}"/>
-              </a:ext>
-            </a:extLst>
-          </p:cNvPr>
-          <p:cNvSpPr>
-            <a:spLocks xmlns:a="http://schemas.openxmlformats.org/drawingml/2006/main" noGrp="1"/>
-          </p:cNvSpPr>
-          <p:nvPr/>
-        </p:nvSpPr>
-        <p:spPr>
-          <a:xfrm xmlns:a="http://schemas.openxmlformats.org/drawingml/2006/main">
-            <a:off x="1524000" y="2524125"/>
-            <a:ext cx="190500" cy="190500"/>
-          </a:xfrm>
-          <a:prstGeom xmlns:a="http://schemas.openxmlformats.org/drawingml/2006/main" prst="rect">
+                <a16:creationId xmlns:a16="http://schemas.microsoft.com/office/drawing/2014/main" id="{97BF7614-A0DA-4F1B-8ADE-5DDE57EF96E5}"/>
+              </a:ext>
+            </a:extLst>
+          </p:cNvPr>
+          <p:cNvSpPr>
+            <a:spLocks xmlns:a="http://schemas.openxmlformats.org/drawingml/2006/main" noGrp="1"/>
+          </p:cNvSpPr>
+          <p:nvPr/>
+        </p:nvSpPr>
+        <p:spPr>
+          <a:xfrm xmlns:a="http://schemas.openxmlformats.org/drawingml/2006/main">
+            <a:off x="1181100" y="2409825"/>
+            <a:ext cx="95250" cy="95250"/>
+          </a:xfrm>
+          <a:prstGeom xmlns:a="http://schemas.openxmlformats.org/drawingml/2006/main" prst="ellipse">
             <a:avLst/>
           </a:prstGeom>
           <a:solidFill xmlns:a="http://schemas.openxmlformats.org/drawingml/2006/main">
-            <a:srgbClr val="08111D"/>
+            <a:srgbClr val="FFC857"/>
           </a:solidFill>
           <a:ln xmlns:a="http://schemas.openxmlformats.org/drawingml/2006/main" w="0">
             <a:noFill/>
@@ -17591,25 +17911,25 @@
           <p:cNvPr id="12" name="">
             <a:extLst xmlns:a="http://schemas.openxmlformats.org/drawingml/2006/main">
               <a:ext uri="{FF2B5EF4-FFF2-40B4-BE49-F238E27FC236}">
-                <a16:creationId xmlns:a16="http://schemas.microsoft.com/office/drawing/2014/main" id="{0B40E4DB-B394-40DD-AA07-AA38427B268C}"/>
-              </a:ext>
-            </a:extLst>
-          </p:cNvPr>
-          <p:cNvSpPr>
-            <a:spLocks xmlns:a="http://schemas.openxmlformats.org/drawingml/2006/main" noGrp="1"/>
-          </p:cNvSpPr>
-          <p:nvPr/>
-        </p:nvSpPr>
-        <p:spPr>
-          <a:xfrm xmlns:a="http://schemas.openxmlformats.org/drawingml/2006/main">
-            <a:off x="2209800" y="2524125"/>
-            <a:ext cx="190500" cy="190500"/>
-          </a:xfrm>
-          <a:prstGeom xmlns:a="http://schemas.openxmlformats.org/drawingml/2006/main" prst="rect">
+                <a16:creationId xmlns:a16="http://schemas.microsoft.com/office/drawing/2014/main" id="{A09E6A9B-3B16-463C-B067-BB9E9D1DEDDE}"/>
+              </a:ext>
+            </a:extLst>
+          </p:cNvPr>
+          <p:cNvSpPr>
+            <a:spLocks xmlns:a="http://schemas.openxmlformats.org/drawingml/2006/main" noGrp="1"/>
+          </p:cNvSpPr>
+          <p:nvPr/>
+        </p:nvSpPr>
+        <p:spPr>
+          <a:xfrm xmlns:a="http://schemas.openxmlformats.org/drawingml/2006/main">
+            <a:off x="1352550" y="2409825"/>
+            <a:ext cx="95250" cy="95250"/>
+          </a:xfrm>
+          <a:prstGeom xmlns:a="http://schemas.openxmlformats.org/drawingml/2006/main" prst="ellipse">
             <a:avLst/>
           </a:prstGeom>
           <a:solidFill xmlns:a="http://schemas.openxmlformats.org/drawingml/2006/main">
-            <a:srgbClr val="08111D"/>
+            <a:srgbClr val="78F0B2"/>
           </a:solidFill>
           <a:ln xmlns:a="http://schemas.openxmlformats.org/drawingml/2006/main" w="0">
             <a:noFill/>
@@ -17622,1297 +17942,118 @@
           <p:cNvPr id="13" name="">
             <a:extLst xmlns:a="http://schemas.openxmlformats.org/drawingml/2006/main">
               <a:ext uri="{FF2B5EF4-FFF2-40B4-BE49-F238E27FC236}">
-                <a16:creationId xmlns:a16="http://schemas.microsoft.com/office/drawing/2014/main" id="{F6CA84B9-FCAB-4AFD-A818-7C6F48BEA410}"/>
-              </a:ext>
-            </a:extLst>
-          </p:cNvPr>
-          <p:cNvSpPr>
-            <a:spLocks xmlns:a="http://schemas.openxmlformats.org/drawingml/2006/main" noGrp="1"/>
-          </p:cNvSpPr>
-          <p:nvPr/>
-        </p:nvSpPr>
-        <p:spPr>
-          <a:xfrm xmlns:a="http://schemas.openxmlformats.org/drawingml/2006/main">
-            <a:off x="2438400" y="2524125"/>
-            <a:ext cx="190500" cy="190500"/>
-          </a:xfrm>
-          <a:prstGeom xmlns:a="http://schemas.openxmlformats.org/drawingml/2006/main" prst="rect">
-            <a:avLst/>
-          </a:prstGeom>
-          <a:solidFill xmlns:a="http://schemas.openxmlformats.org/drawingml/2006/main">
-            <a:srgbClr val="08111D"/>
-          </a:solidFill>
-          <a:ln xmlns:a="http://schemas.openxmlformats.org/drawingml/2006/main" w="0">
-            <a:noFill/>
-            <a:prstDash val="solid"/>
-          </a:ln>
-        </p:spPr>
+                <a16:creationId xmlns:a16="http://schemas.microsoft.com/office/drawing/2014/main" id="{D2A357D9-5770-4712-9C4A-84AF507392B3}"/>
+              </a:ext>
+            </a:extLst>
+          </p:cNvPr>
+          <p:cNvSpPr>
+            <a:spLocks xmlns:a="http://schemas.openxmlformats.org/drawingml/2006/main" noGrp="1"/>
+          </p:cNvSpPr>
+          <p:nvPr/>
+        </p:nvSpPr>
+        <p:spPr>
+          <a:xfrm xmlns:a="http://schemas.openxmlformats.org/drawingml/2006/main">
+            <a:off x="1028700" y="2714625"/>
+            <a:ext cx="2152650" cy="2457450"/>
+          </a:xfrm>
+          <a:prstGeom xmlns:a="http://schemas.openxmlformats.org/drawingml/2006/main" prst="rect">
+            <a:avLst/>
+          </a:prstGeom>
+          <a:noFill xmlns:a="http://schemas.openxmlformats.org/drawingml/2006/main"/>
+          <a:ln xmlns:a="http://schemas.openxmlformats.org/drawingml/2006/main" w="0">
+            <a:noFill/>
+            <a:prstDash val="solid"/>
+          </a:ln>
+        </p:spPr>
+        <p:txBody>
+          <a:bodyPr xmlns:a="http://schemas.openxmlformats.org/drawingml/2006/main" anchor="t"/>
+          <a:lstStyle xmlns:a="http://schemas.openxmlformats.org/drawingml/2006/main"/>
+          <a:p xmlns:a="http://schemas.openxmlformats.org/drawingml/2006/main">
+            <a:pPr algn="l">
+              <a:defRPr sz="1200" b="0" i="0">
+                <a:solidFill>
+                  <a:srgbClr val="EAF2FF"/>
+                </a:solidFill>
+              </a:defRPr>
+            </a:pPr>
+            <a:r>
+              <a:rPr sz="1200" b="0" i="0">
+                <a:solidFill>
+                  <a:srgbClr val="EAF2FF"/>
+                </a:solidFill>
+              </a:rPr>
+              <a:t>uv sync</a:t>
+            </a:r>
+          </a:p>
+          <a:p xmlns:a="http://schemas.openxmlformats.org/drawingml/2006/main">
+            <a:r>
+              <a:t/>
+            </a:r>
+          </a:p>
+          <a:p xmlns:a="http://schemas.openxmlformats.org/drawingml/2006/main">
+            <a:pPr algn="l">
+              <a:defRPr sz="1200" b="0" i="0">
+                <a:solidFill>
+                  <a:srgbClr val="EAF2FF"/>
+                </a:solidFill>
+              </a:defRPr>
+            </a:pPr>
+            <a:r>
+              <a:rPr sz="1200" b="0" i="0">
+                <a:solidFill>
+                  <a:srgbClr val="EAF2FF"/>
+                </a:solidFill>
+              </a:rPr>
+              <a:t>uv run python scripts/preflight.py</a:t>
+            </a:r>
+          </a:p>
+          <a:p xmlns:a="http://schemas.openxmlformats.org/drawingml/2006/main">
+            <a:r>
+              <a:t/>
+            </a:r>
+          </a:p>
+          <a:p xmlns:a="http://schemas.openxmlformats.org/drawingml/2006/main">
+            <a:pPr algn="l">
+              <a:defRPr sz="1200" b="0" i="0">
+                <a:solidFill>
+                  <a:srgbClr val="EAF2FF"/>
+                </a:solidFill>
+              </a:defRPr>
+            </a:pPr>
+            <a:r>
+              <a:rPr sz="1200" b="0" i="0">
+                <a:solidFill>
+                  <a:srgbClr val="EAF2FF"/>
+                </a:solidFill>
+              </a:rPr>
+              <a:t># Expected</a:t>
+            </a:r>
+          </a:p>
+          <a:p xmlns:a="http://schemas.openxmlformats.org/drawingml/2006/main">
+            <a:pPr algn="l">
+              <a:defRPr sz="1200" b="0" i="0">
+                <a:solidFill>
+                  <a:srgbClr val="EAF2FF"/>
+                </a:solidFill>
+              </a:defRPr>
+            </a:pPr>
+            <a:r>
+              <a:rPr sz="1200" b="0" i="0">
+                <a:solidFill>
+                  <a:srgbClr val="EAF2FF"/>
+                </a:solidFill>
+              </a:rPr>
+              <a:t>✓ READY</a:t>
+            </a:r>
+          </a:p>
+        </p:txBody>
       </p:sp>
       <p:sp>
         <p:nvSpPr>
           <p:cNvPr id="14" name="">
             <a:extLst xmlns:a="http://schemas.openxmlformats.org/drawingml/2006/main">
               <a:ext uri="{FF2B5EF4-FFF2-40B4-BE49-F238E27FC236}">
-                <a16:creationId xmlns:a16="http://schemas.microsoft.com/office/drawing/2014/main" id="{E15C773B-B19B-490C-A5D6-3A5CA7C53A0A}"/>
-              </a:ext>
-            </a:extLst>
-          </p:cNvPr>
-          <p:cNvSpPr>
-            <a:spLocks xmlns:a="http://schemas.openxmlformats.org/drawingml/2006/main" noGrp="1"/>
-          </p:cNvSpPr>
-          <p:nvPr/>
-        </p:nvSpPr>
-        <p:spPr>
-          <a:xfrm xmlns:a="http://schemas.openxmlformats.org/drawingml/2006/main">
-            <a:off x="2667000" y="2524125"/>
-            <a:ext cx="190500" cy="190500"/>
-          </a:xfrm>
-          <a:prstGeom xmlns:a="http://schemas.openxmlformats.org/drawingml/2006/main" prst="rect">
-            <a:avLst/>
-          </a:prstGeom>
-          <a:solidFill xmlns:a="http://schemas.openxmlformats.org/drawingml/2006/main">
-            <a:srgbClr val="08111D"/>
-          </a:solidFill>
-          <a:ln xmlns:a="http://schemas.openxmlformats.org/drawingml/2006/main" w="0">
-            <a:noFill/>
-            <a:prstDash val="solid"/>
-          </a:ln>
-        </p:spPr>
-      </p:sp>
-      <p:sp>
-        <p:nvSpPr>
-          <p:cNvPr id="15" name="">
-            <a:extLst xmlns:a="http://schemas.openxmlformats.org/drawingml/2006/main">
-              <a:ext uri="{FF2B5EF4-FFF2-40B4-BE49-F238E27FC236}">
-                <a16:creationId xmlns:a16="http://schemas.microsoft.com/office/drawing/2014/main" id="{19C87C96-35B5-42BD-A61D-E82E51333AB9}"/>
-              </a:ext>
-            </a:extLst>
-          </p:cNvPr>
-          <p:cNvSpPr>
-            <a:spLocks xmlns:a="http://schemas.openxmlformats.org/drawingml/2006/main" noGrp="1"/>
-          </p:cNvSpPr>
-          <p:nvPr/>
-        </p:nvSpPr>
-        <p:spPr>
-          <a:xfrm xmlns:a="http://schemas.openxmlformats.org/drawingml/2006/main">
-            <a:off x="2895600" y="2524125"/>
-            <a:ext cx="190500" cy="190500"/>
-          </a:xfrm>
-          <a:prstGeom xmlns:a="http://schemas.openxmlformats.org/drawingml/2006/main" prst="rect">
-            <a:avLst/>
-          </a:prstGeom>
-          <a:solidFill xmlns:a="http://schemas.openxmlformats.org/drawingml/2006/main">
-            <a:srgbClr val="08111D"/>
-          </a:solidFill>
-          <a:ln xmlns:a="http://schemas.openxmlformats.org/drawingml/2006/main" w="0">
-            <a:noFill/>
-            <a:prstDash val="solid"/>
-          </a:ln>
-        </p:spPr>
-      </p:sp>
-      <p:sp>
-        <p:nvSpPr>
-          <p:cNvPr id="16" name="">
-            <a:extLst xmlns:a="http://schemas.openxmlformats.org/drawingml/2006/main">
-              <a:ext uri="{FF2B5EF4-FFF2-40B4-BE49-F238E27FC236}">
-                <a16:creationId xmlns:a16="http://schemas.microsoft.com/office/drawing/2014/main" id="{90252C2E-DB56-4649-A4D9-475821D45EEC}"/>
-              </a:ext>
-            </a:extLst>
-          </p:cNvPr>
-          <p:cNvSpPr>
-            <a:spLocks xmlns:a="http://schemas.openxmlformats.org/drawingml/2006/main" noGrp="1"/>
-          </p:cNvSpPr>
-          <p:nvPr/>
-        </p:nvSpPr>
-        <p:spPr>
-          <a:xfrm xmlns:a="http://schemas.openxmlformats.org/drawingml/2006/main">
-            <a:off x="1066800" y="2752725"/>
-            <a:ext cx="190500" cy="190500"/>
-          </a:xfrm>
-          <a:prstGeom xmlns:a="http://schemas.openxmlformats.org/drawingml/2006/main" prst="rect">
-            <a:avLst/>
-          </a:prstGeom>
-          <a:solidFill xmlns:a="http://schemas.openxmlformats.org/drawingml/2006/main">
-            <a:srgbClr val="08111D"/>
-          </a:solidFill>
-          <a:ln xmlns:a="http://schemas.openxmlformats.org/drawingml/2006/main" w="0">
-            <a:noFill/>
-            <a:prstDash val="solid"/>
-          </a:ln>
-        </p:spPr>
-      </p:sp>
-      <p:sp>
-        <p:nvSpPr>
-          <p:cNvPr id="17" name="">
-            <a:extLst xmlns:a="http://schemas.openxmlformats.org/drawingml/2006/main">
-              <a:ext uri="{FF2B5EF4-FFF2-40B4-BE49-F238E27FC236}">
-                <a16:creationId xmlns:a16="http://schemas.microsoft.com/office/drawing/2014/main" id="{4E8A1047-9BC5-4792-8968-257350D850DC}"/>
-              </a:ext>
-            </a:extLst>
-          </p:cNvPr>
-          <p:cNvSpPr>
-            <a:spLocks xmlns:a="http://schemas.openxmlformats.org/drawingml/2006/main" noGrp="1"/>
-          </p:cNvSpPr>
-          <p:nvPr/>
-        </p:nvSpPr>
-        <p:spPr>
-          <a:xfrm xmlns:a="http://schemas.openxmlformats.org/drawingml/2006/main">
-            <a:off x="1295400" y="2752725"/>
-            <a:ext cx="190500" cy="190500"/>
-          </a:xfrm>
-          <a:prstGeom xmlns:a="http://schemas.openxmlformats.org/drawingml/2006/main" prst="rect">
-            <a:avLst/>
-          </a:prstGeom>
-          <a:solidFill xmlns:a="http://schemas.openxmlformats.org/drawingml/2006/main">
-            <a:srgbClr val="08111D"/>
-          </a:solidFill>
-          <a:ln xmlns:a="http://schemas.openxmlformats.org/drawingml/2006/main" w="0">
-            <a:noFill/>
-            <a:prstDash val="solid"/>
-          </a:ln>
-        </p:spPr>
-      </p:sp>
-      <p:sp>
-        <p:nvSpPr>
-          <p:cNvPr id="18" name="">
-            <a:extLst xmlns:a="http://schemas.openxmlformats.org/drawingml/2006/main">
-              <a:ext uri="{FF2B5EF4-FFF2-40B4-BE49-F238E27FC236}">
-                <a16:creationId xmlns:a16="http://schemas.microsoft.com/office/drawing/2014/main" id="{999D59F4-E500-463C-915D-DE9EB183B5A1}"/>
-              </a:ext>
-            </a:extLst>
-          </p:cNvPr>
-          <p:cNvSpPr>
-            <a:spLocks xmlns:a="http://schemas.openxmlformats.org/drawingml/2006/main" noGrp="1"/>
-          </p:cNvSpPr>
-          <p:nvPr/>
-        </p:nvSpPr>
-        <p:spPr>
-          <a:xfrm xmlns:a="http://schemas.openxmlformats.org/drawingml/2006/main">
-            <a:off x="1524000" y="2752725"/>
-            <a:ext cx="190500" cy="190500"/>
-          </a:xfrm>
-          <a:prstGeom xmlns:a="http://schemas.openxmlformats.org/drawingml/2006/main" prst="rect">
-            <a:avLst/>
-          </a:prstGeom>
-          <a:solidFill xmlns:a="http://schemas.openxmlformats.org/drawingml/2006/main">
-            <a:srgbClr val="08111D"/>
-          </a:solidFill>
-          <a:ln xmlns:a="http://schemas.openxmlformats.org/drawingml/2006/main" w="0">
-            <a:noFill/>
-            <a:prstDash val="solid"/>
-          </a:ln>
-        </p:spPr>
-      </p:sp>
-      <p:sp>
-        <p:nvSpPr>
-          <p:cNvPr id="19" name="">
-            <a:extLst xmlns:a="http://schemas.openxmlformats.org/drawingml/2006/main">
-              <a:ext uri="{FF2B5EF4-FFF2-40B4-BE49-F238E27FC236}">
-                <a16:creationId xmlns:a16="http://schemas.microsoft.com/office/drawing/2014/main" id="{C2C63083-04BF-4F49-ADF9-953D0163EBD3}"/>
-              </a:ext>
-            </a:extLst>
-          </p:cNvPr>
-          <p:cNvSpPr>
-            <a:spLocks xmlns:a="http://schemas.openxmlformats.org/drawingml/2006/main" noGrp="1"/>
-          </p:cNvSpPr>
-          <p:nvPr/>
-        </p:nvSpPr>
-        <p:spPr>
-          <a:xfrm xmlns:a="http://schemas.openxmlformats.org/drawingml/2006/main">
-            <a:off x="1981200" y="2752725"/>
-            <a:ext cx="190500" cy="190500"/>
-          </a:xfrm>
-          <a:prstGeom xmlns:a="http://schemas.openxmlformats.org/drawingml/2006/main" prst="rect">
-            <a:avLst/>
-          </a:prstGeom>
-          <a:solidFill xmlns:a="http://schemas.openxmlformats.org/drawingml/2006/main">
-            <a:srgbClr val="08111D"/>
-          </a:solidFill>
-          <a:ln xmlns:a="http://schemas.openxmlformats.org/drawingml/2006/main" w="0">
-            <a:noFill/>
-            <a:prstDash val="solid"/>
-          </a:ln>
-        </p:spPr>
-      </p:sp>
-      <p:sp>
-        <p:nvSpPr>
-          <p:cNvPr id="20" name="">
-            <a:extLst xmlns:a="http://schemas.openxmlformats.org/drawingml/2006/main">
-              <a:ext uri="{FF2B5EF4-FFF2-40B4-BE49-F238E27FC236}">
-                <a16:creationId xmlns:a16="http://schemas.microsoft.com/office/drawing/2014/main" id="{E3CC1F8C-D301-4293-900E-A743D31DAF36}"/>
-              </a:ext>
-            </a:extLst>
-          </p:cNvPr>
-          <p:cNvSpPr>
-            <a:spLocks xmlns:a="http://schemas.openxmlformats.org/drawingml/2006/main" noGrp="1"/>
-          </p:cNvSpPr>
-          <p:nvPr/>
-        </p:nvSpPr>
-        <p:spPr>
-          <a:xfrm xmlns:a="http://schemas.openxmlformats.org/drawingml/2006/main">
-            <a:off x="2438400" y="2752725"/>
-            <a:ext cx="190500" cy="190500"/>
-          </a:xfrm>
-          <a:prstGeom xmlns:a="http://schemas.openxmlformats.org/drawingml/2006/main" prst="rect">
-            <a:avLst/>
-          </a:prstGeom>
-          <a:solidFill xmlns:a="http://schemas.openxmlformats.org/drawingml/2006/main">
-            <a:srgbClr val="08111D"/>
-          </a:solidFill>
-          <a:ln xmlns:a="http://schemas.openxmlformats.org/drawingml/2006/main" w="0">
-            <a:noFill/>
-            <a:prstDash val="solid"/>
-          </a:ln>
-        </p:spPr>
-      </p:sp>
-      <p:sp>
-        <p:nvSpPr>
-          <p:cNvPr id="21" name="">
-            <a:extLst xmlns:a="http://schemas.openxmlformats.org/drawingml/2006/main">
-              <a:ext uri="{FF2B5EF4-FFF2-40B4-BE49-F238E27FC236}">
-                <a16:creationId xmlns:a16="http://schemas.microsoft.com/office/drawing/2014/main" id="{995560F4-5BB9-4069-B80F-B57618AA03D8}"/>
-              </a:ext>
-            </a:extLst>
-          </p:cNvPr>
-          <p:cNvSpPr>
-            <a:spLocks xmlns:a="http://schemas.openxmlformats.org/drawingml/2006/main" noGrp="1"/>
-          </p:cNvSpPr>
-          <p:nvPr/>
-        </p:nvSpPr>
-        <p:spPr>
-          <a:xfrm xmlns:a="http://schemas.openxmlformats.org/drawingml/2006/main">
-            <a:off x="2667000" y="2752725"/>
-            <a:ext cx="190500" cy="190500"/>
-          </a:xfrm>
-          <a:prstGeom xmlns:a="http://schemas.openxmlformats.org/drawingml/2006/main" prst="rect">
-            <a:avLst/>
-          </a:prstGeom>
-          <a:solidFill xmlns:a="http://schemas.openxmlformats.org/drawingml/2006/main">
-            <a:srgbClr val="08111D"/>
-          </a:solidFill>
-          <a:ln xmlns:a="http://schemas.openxmlformats.org/drawingml/2006/main" w="0">
-            <a:noFill/>
-            <a:prstDash val="solid"/>
-          </a:ln>
-        </p:spPr>
-      </p:sp>
-      <p:sp>
-        <p:nvSpPr>
-          <p:cNvPr id="22" name="">
-            <a:extLst xmlns:a="http://schemas.openxmlformats.org/drawingml/2006/main">
-              <a:ext uri="{FF2B5EF4-FFF2-40B4-BE49-F238E27FC236}">
-                <a16:creationId xmlns:a16="http://schemas.microsoft.com/office/drawing/2014/main" id="{A55D3DDD-7FE7-4537-A0BB-DE7C94F2713C}"/>
-              </a:ext>
-            </a:extLst>
-          </p:cNvPr>
-          <p:cNvSpPr>
-            <a:spLocks xmlns:a="http://schemas.openxmlformats.org/drawingml/2006/main" noGrp="1"/>
-          </p:cNvSpPr>
-          <p:nvPr/>
-        </p:nvSpPr>
-        <p:spPr>
-          <a:xfrm xmlns:a="http://schemas.openxmlformats.org/drawingml/2006/main">
-            <a:off x="2895600" y="2752725"/>
-            <a:ext cx="190500" cy="190500"/>
-          </a:xfrm>
-          <a:prstGeom xmlns:a="http://schemas.openxmlformats.org/drawingml/2006/main" prst="rect">
-            <a:avLst/>
-          </a:prstGeom>
-          <a:solidFill xmlns:a="http://schemas.openxmlformats.org/drawingml/2006/main">
-            <a:srgbClr val="08111D"/>
-          </a:solidFill>
-          <a:ln xmlns:a="http://schemas.openxmlformats.org/drawingml/2006/main" w="0">
-            <a:noFill/>
-            <a:prstDash val="solid"/>
-          </a:ln>
-        </p:spPr>
-      </p:sp>
-      <p:sp>
-        <p:nvSpPr>
-          <p:cNvPr id="23" name="">
-            <a:extLst xmlns:a="http://schemas.openxmlformats.org/drawingml/2006/main">
-              <a:ext uri="{FF2B5EF4-FFF2-40B4-BE49-F238E27FC236}">
-                <a16:creationId xmlns:a16="http://schemas.microsoft.com/office/drawing/2014/main" id="{DADA8A96-2238-4835-B81E-409507694A0A}"/>
-              </a:ext>
-            </a:extLst>
-          </p:cNvPr>
-          <p:cNvSpPr>
-            <a:spLocks xmlns:a="http://schemas.openxmlformats.org/drawingml/2006/main" noGrp="1"/>
-          </p:cNvSpPr>
-          <p:nvPr/>
-        </p:nvSpPr>
-        <p:spPr>
-          <a:xfrm xmlns:a="http://schemas.openxmlformats.org/drawingml/2006/main">
-            <a:off x="1066800" y="2981325"/>
-            <a:ext cx="190500" cy="190500"/>
-          </a:xfrm>
-          <a:prstGeom xmlns:a="http://schemas.openxmlformats.org/drawingml/2006/main" prst="rect">
-            <a:avLst/>
-          </a:prstGeom>
-          <a:solidFill xmlns:a="http://schemas.openxmlformats.org/drawingml/2006/main">
-            <a:srgbClr val="08111D"/>
-          </a:solidFill>
-          <a:ln xmlns:a="http://schemas.openxmlformats.org/drawingml/2006/main" w="0">
-            <a:noFill/>
-            <a:prstDash val="solid"/>
-          </a:ln>
-        </p:spPr>
-      </p:sp>
-      <p:sp>
-        <p:nvSpPr>
-          <p:cNvPr id="24" name="">
-            <a:extLst xmlns:a="http://schemas.openxmlformats.org/drawingml/2006/main">
-              <a:ext uri="{FF2B5EF4-FFF2-40B4-BE49-F238E27FC236}">
-                <a16:creationId xmlns:a16="http://schemas.microsoft.com/office/drawing/2014/main" id="{69AF282F-663D-47FF-AF44-E17932362F32}"/>
-              </a:ext>
-            </a:extLst>
-          </p:cNvPr>
-          <p:cNvSpPr>
-            <a:spLocks xmlns:a="http://schemas.openxmlformats.org/drawingml/2006/main" noGrp="1"/>
-          </p:cNvSpPr>
-          <p:nvPr/>
-        </p:nvSpPr>
-        <p:spPr>
-          <a:xfrm xmlns:a="http://schemas.openxmlformats.org/drawingml/2006/main">
-            <a:off x="1295400" y="2981325"/>
-            <a:ext cx="190500" cy="190500"/>
-          </a:xfrm>
-          <a:prstGeom xmlns:a="http://schemas.openxmlformats.org/drawingml/2006/main" prst="rect">
-            <a:avLst/>
-          </a:prstGeom>
-          <a:solidFill xmlns:a="http://schemas.openxmlformats.org/drawingml/2006/main">
-            <a:srgbClr val="08111D"/>
-          </a:solidFill>
-          <a:ln xmlns:a="http://schemas.openxmlformats.org/drawingml/2006/main" w="0">
-            <a:noFill/>
-            <a:prstDash val="solid"/>
-          </a:ln>
-        </p:spPr>
-      </p:sp>
-      <p:sp>
-        <p:nvSpPr>
-          <p:cNvPr id="25" name="">
-            <a:extLst xmlns:a="http://schemas.openxmlformats.org/drawingml/2006/main">
-              <a:ext uri="{FF2B5EF4-FFF2-40B4-BE49-F238E27FC236}">
-                <a16:creationId xmlns:a16="http://schemas.microsoft.com/office/drawing/2014/main" id="{2594C938-88A9-424F-98AC-69FCBD818279}"/>
-              </a:ext>
-            </a:extLst>
-          </p:cNvPr>
-          <p:cNvSpPr>
-            <a:spLocks xmlns:a="http://schemas.openxmlformats.org/drawingml/2006/main" noGrp="1"/>
-          </p:cNvSpPr>
-          <p:nvPr/>
-        </p:nvSpPr>
-        <p:spPr>
-          <a:xfrm xmlns:a="http://schemas.openxmlformats.org/drawingml/2006/main">
-            <a:off x="1524000" y="2981325"/>
-            <a:ext cx="190500" cy="190500"/>
-          </a:xfrm>
-          <a:prstGeom xmlns:a="http://schemas.openxmlformats.org/drawingml/2006/main" prst="rect">
-            <a:avLst/>
-          </a:prstGeom>
-          <a:solidFill xmlns:a="http://schemas.openxmlformats.org/drawingml/2006/main">
-            <a:srgbClr val="08111D"/>
-          </a:solidFill>
-          <a:ln xmlns:a="http://schemas.openxmlformats.org/drawingml/2006/main" w="0">
-            <a:noFill/>
-            <a:prstDash val="solid"/>
-          </a:ln>
-        </p:spPr>
-      </p:sp>
-      <p:sp>
-        <p:nvSpPr>
-          <p:cNvPr id="26" name="">
-            <a:extLst xmlns:a="http://schemas.openxmlformats.org/drawingml/2006/main">
-              <a:ext uri="{FF2B5EF4-FFF2-40B4-BE49-F238E27FC236}">
-                <a16:creationId xmlns:a16="http://schemas.microsoft.com/office/drawing/2014/main" id="{54C32385-F0CA-4FBC-8841-31A1D03335E3}"/>
-              </a:ext>
-            </a:extLst>
-          </p:cNvPr>
-          <p:cNvSpPr>
-            <a:spLocks xmlns:a="http://schemas.openxmlformats.org/drawingml/2006/main" noGrp="1"/>
-          </p:cNvSpPr>
-          <p:nvPr/>
-        </p:nvSpPr>
-        <p:spPr>
-          <a:xfrm xmlns:a="http://schemas.openxmlformats.org/drawingml/2006/main">
-            <a:off x="1981200" y="2981325"/>
-            <a:ext cx="190500" cy="190500"/>
-          </a:xfrm>
-          <a:prstGeom xmlns:a="http://schemas.openxmlformats.org/drawingml/2006/main" prst="rect">
-            <a:avLst/>
-          </a:prstGeom>
-          <a:solidFill xmlns:a="http://schemas.openxmlformats.org/drawingml/2006/main">
-            <a:srgbClr val="08111D"/>
-          </a:solidFill>
-          <a:ln xmlns:a="http://schemas.openxmlformats.org/drawingml/2006/main" w="0">
-            <a:noFill/>
-            <a:prstDash val="solid"/>
-          </a:ln>
-        </p:spPr>
-      </p:sp>
-      <p:sp>
-        <p:nvSpPr>
-          <p:cNvPr id="27" name="">
-            <a:extLst xmlns:a="http://schemas.openxmlformats.org/drawingml/2006/main">
-              <a:ext uri="{FF2B5EF4-FFF2-40B4-BE49-F238E27FC236}">
-                <a16:creationId xmlns:a16="http://schemas.microsoft.com/office/drawing/2014/main" id="{2107E73A-8114-4478-A82C-87BE186941C9}"/>
-              </a:ext>
-            </a:extLst>
-          </p:cNvPr>
-          <p:cNvSpPr>
-            <a:spLocks xmlns:a="http://schemas.openxmlformats.org/drawingml/2006/main" noGrp="1"/>
-          </p:cNvSpPr>
-          <p:nvPr/>
-        </p:nvSpPr>
-        <p:spPr>
-          <a:xfrm xmlns:a="http://schemas.openxmlformats.org/drawingml/2006/main">
-            <a:off x="2438400" y="2981325"/>
-            <a:ext cx="190500" cy="190500"/>
-          </a:xfrm>
-          <a:prstGeom xmlns:a="http://schemas.openxmlformats.org/drawingml/2006/main" prst="rect">
-            <a:avLst/>
-          </a:prstGeom>
-          <a:solidFill xmlns:a="http://schemas.openxmlformats.org/drawingml/2006/main">
-            <a:srgbClr val="08111D"/>
-          </a:solidFill>
-          <a:ln xmlns:a="http://schemas.openxmlformats.org/drawingml/2006/main" w="0">
-            <a:noFill/>
-            <a:prstDash val="solid"/>
-          </a:ln>
-        </p:spPr>
-      </p:sp>
-      <p:sp>
-        <p:nvSpPr>
-          <p:cNvPr id="28" name="">
-            <a:extLst xmlns:a="http://schemas.openxmlformats.org/drawingml/2006/main">
-              <a:ext uri="{FF2B5EF4-FFF2-40B4-BE49-F238E27FC236}">
-                <a16:creationId xmlns:a16="http://schemas.microsoft.com/office/drawing/2014/main" id="{FA37AF66-4746-4470-BD63-38F36FF3DE95}"/>
-              </a:ext>
-            </a:extLst>
-          </p:cNvPr>
-          <p:cNvSpPr>
-            <a:spLocks xmlns:a="http://schemas.openxmlformats.org/drawingml/2006/main" noGrp="1"/>
-          </p:cNvSpPr>
-          <p:nvPr/>
-        </p:nvSpPr>
-        <p:spPr>
-          <a:xfrm xmlns:a="http://schemas.openxmlformats.org/drawingml/2006/main">
-            <a:off x="2667000" y="2981325"/>
-            <a:ext cx="190500" cy="190500"/>
-          </a:xfrm>
-          <a:prstGeom xmlns:a="http://schemas.openxmlformats.org/drawingml/2006/main" prst="rect">
-            <a:avLst/>
-          </a:prstGeom>
-          <a:solidFill xmlns:a="http://schemas.openxmlformats.org/drawingml/2006/main">
-            <a:srgbClr val="08111D"/>
-          </a:solidFill>
-          <a:ln xmlns:a="http://schemas.openxmlformats.org/drawingml/2006/main" w="0">
-            <a:noFill/>
-            <a:prstDash val="solid"/>
-          </a:ln>
-        </p:spPr>
-      </p:sp>
-      <p:sp>
-        <p:nvSpPr>
-          <p:cNvPr id="29" name="">
-            <a:extLst xmlns:a="http://schemas.openxmlformats.org/drawingml/2006/main">
-              <a:ext uri="{FF2B5EF4-FFF2-40B4-BE49-F238E27FC236}">
-                <a16:creationId xmlns:a16="http://schemas.microsoft.com/office/drawing/2014/main" id="{71F91D43-DA09-4A2E-AFFC-9E014EA18D71}"/>
-              </a:ext>
-            </a:extLst>
-          </p:cNvPr>
-          <p:cNvSpPr>
-            <a:spLocks xmlns:a="http://schemas.openxmlformats.org/drawingml/2006/main" noGrp="1"/>
-          </p:cNvSpPr>
-          <p:nvPr/>
-        </p:nvSpPr>
-        <p:spPr>
-          <a:xfrm xmlns:a="http://schemas.openxmlformats.org/drawingml/2006/main">
-            <a:off x="2895600" y="2981325"/>
-            <a:ext cx="190500" cy="190500"/>
-          </a:xfrm>
-          <a:prstGeom xmlns:a="http://schemas.openxmlformats.org/drawingml/2006/main" prst="rect">
-            <a:avLst/>
-          </a:prstGeom>
-          <a:solidFill xmlns:a="http://schemas.openxmlformats.org/drawingml/2006/main">
-            <a:srgbClr val="08111D"/>
-          </a:solidFill>
-          <a:ln xmlns:a="http://schemas.openxmlformats.org/drawingml/2006/main" w="0">
-            <a:noFill/>
-            <a:prstDash val="solid"/>
-          </a:ln>
-        </p:spPr>
-      </p:sp>
-      <p:sp>
-        <p:nvSpPr>
-          <p:cNvPr id="30" name="">
-            <a:extLst xmlns:a="http://schemas.openxmlformats.org/drawingml/2006/main">
-              <a:ext uri="{FF2B5EF4-FFF2-40B4-BE49-F238E27FC236}">
-                <a16:creationId xmlns:a16="http://schemas.microsoft.com/office/drawing/2014/main" id="{4FCC2A0D-3D94-4F0C-9EB6-2B678B2F2B4C}"/>
-              </a:ext>
-            </a:extLst>
-          </p:cNvPr>
-          <p:cNvSpPr>
-            <a:spLocks xmlns:a="http://schemas.openxmlformats.org/drawingml/2006/main" noGrp="1"/>
-          </p:cNvSpPr>
-          <p:nvPr/>
-        </p:nvSpPr>
-        <p:spPr>
-          <a:xfrm xmlns:a="http://schemas.openxmlformats.org/drawingml/2006/main">
-            <a:off x="1066800" y="3209925"/>
-            <a:ext cx="190500" cy="190500"/>
-          </a:xfrm>
-          <a:prstGeom xmlns:a="http://schemas.openxmlformats.org/drawingml/2006/main" prst="rect">
-            <a:avLst/>
-          </a:prstGeom>
-          <a:solidFill xmlns:a="http://schemas.openxmlformats.org/drawingml/2006/main">
-            <a:srgbClr val="08111D"/>
-          </a:solidFill>
-          <a:ln xmlns:a="http://schemas.openxmlformats.org/drawingml/2006/main" w="0">
-            <a:noFill/>
-            <a:prstDash val="solid"/>
-          </a:ln>
-        </p:spPr>
-      </p:sp>
-      <p:sp>
-        <p:nvSpPr>
-          <p:cNvPr id="31" name="">
-            <a:extLst xmlns:a="http://schemas.openxmlformats.org/drawingml/2006/main">
-              <a:ext uri="{FF2B5EF4-FFF2-40B4-BE49-F238E27FC236}">
-                <a16:creationId xmlns:a16="http://schemas.microsoft.com/office/drawing/2014/main" id="{5E4CAF66-AC3F-471D-8B31-C3F0B0514FB4}"/>
-              </a:ext>
-            </a:extLst>
-          </p:cNvPr>
-          <p:cNvSpPr>
-            <a:spLocks xmlns:a="http://schemas.openxmlformats.org/drawingml/2006/main" noGrp="1"/>
-          </p:cNvSpPr>
-          <p:nvPr/>
-        </p:nvSpPr>
-        <p:spPr>
-          <a:xfrm xmlns:a="http://schemas.openxmlformats.org/drawingml/2006/main">
-            <a:off x="1295400" y="3209925"/>
-            <a:ext cx="190500" cy="190500"/>
-          </a:xfrm>
-          <a:prstGeom xmlns:a="http://schemas.openxmlformats.org/drawingml/2006/main" prst="rect">
-            <a:avLst/>
-          </a:prstGeom>
-          <a:solidFill xmlns:a="http://schemas.openxmlformats.org/drawingml/2006/main">
-            <a:srgbClr val="08111D"/>
-          </a:solidFill>
-          <a:ln xmlns:a="http://schemas.openxmlformats.org/drawingml/2006/main" w="0">
-            <a:noFill/>
-            <a:prstDash val="solid"/>
-          </a:ln>
-        </p:spPr>
-      </p:sp>
-      <p:sp>
-        <p:nvSpPr>
-          <p:cNvPr id="32" name="">
-            <a:extLst xmlns:a="http://schemas.openxmlformats.org/drawingml/2006/main">
-              <a:ext uri="{FF2B5EF4-FFF2-40B4-BE49-F238E27FC236}">
-                <a16:creationId xmlns:a16="http://schemas.microsoft.com/office/drawing/2014/main" id="{B3DA0850-313A-401B-96EC-B131F933A269}"/>
-              </a:ext>
-            </a:extLst>
-          </p:cNvPr>
-          <p:cNvSpPr>
-            <a:spLocks xmlns:a="http://schemas.openxmlformats.org/drawingml/2006/main" noGrp="1"/>
-          </p:cNvSpPr>
-          <p:nvPr/>
-        </p:nvSpPr>
-        <p:spPr>
-          <a:xfrm xmlns:a="http://schemas.openxmlformats.org/drawingml/2006/main">
-            <a:off x="2209800" y="3209925"/>
-            <a:ext cx="190500" cy="190500"/>
-          </a:xfrm>
-          <a:prstGeom xmlns:a="http://schemas.openxmlformats.org/drawingml/2006/main" prst="rect">
-            <a:avLst/>
-          </a:prstGeom>
-          <a:solidFill xmlns:a="http://schemas.openxmlformats.org/drawingml/2006/main">
-            <a:srgbClr val="08111D"/>
-          </a:solidFill>
-          <a:ln xmlns:a="http://schemas.openxmlformats.org/drawingml/2006/main" w="0">
-            <a:noFill/>
-            <a:prstDash val="solid"/>
-          </a:ln>
-        </p:spPr>
-      </p:sp>
-      <p:sp>
-        <p:nvSpPr>
-          <p:cNvPr id="33" name="">
-            <a:extLst xmlns:a="http://schemas.openxmlformats.org/drawingml/2006/main">
-              <a:ext uri="{FF2B5EF4-FFF2-40B4-BE49-F238E27FC236}">
-                <a16:creationId xmlns:a16="http://schemas.microsoft.com/office/drawing/2014/main" id="{B18C63C1-A04B-4F46-9F3D-BC9B3E737042}"/>
-              </a:ext>
-            </a:extLst>
-          </p:cNvPr>
-          <p:cNvSpPr>
-            <a:spLocks xmlns:a="http://schemas.openxmlformats.org/drawingml/2006/main" noGrp="1"/>
-          </p:cNvSpPr>
-          <p:nvPr/>
-        </p:nvSpPr>
-        <p:spPr>
-          <a:xfrm xmlns:a="http://schemas.openxmlformats.org/drawingml/2006/main">
-            <a:off x="2438400" y="3209925"/>
-            <a:ext cx="190500" cy="190500"/>
-          </a:xfrm>
-          <a:prstGeom xmlns:a="http://schemas.openxmlformats.org/drawingml/2006/main" prst="rect">
-            <a:avLst/>
-          </a:prstGeom>
-          <a:solidFill xmlns:a="http://schemas.openxmlformats.org/drawingml/2006/main">
-            <a:srgbClr val="08111D"/>
-          </a:solidFill>
-          <a:ln xmlns:a="http://schemas.openxmlformats.org/drawingml/2006/main" w="0">
-            <a:noFill/>
-            <a:prstDash val="solid"/>
-          </a:ln>
-        </p:spPr>
-      </p:sp>
-      <p:sp>
-        <p:nvSpPr>
-          <p:cNvPr id="34" name="">
-            <a:extLst xmlns:a="http://schemas.openxmlformats.org/drawingml/2006/main">
-              <a:ext uri="{FF2B5EF4-FFF2-40B4-BE49-F238E27FC236}">
-                <a16:creationId xmlns:a16="http://schemas.microsoft.com/office/drawing/2014/main" id="{1150A41F-419F-4727-89C5-9D7058876F0F}"/>
-              </a:ext>
-            </a:extLst>
-          </p:cNvPr>
-          <p:cNvSpPr>
-            <a:spLocks xmlns:a="http://schemas.openxmlformats.org/drawingml/2006/main" noGrp="1"/>
-          </p:cNvSpPr>
-          <p:nvPr/>
-        </p:nvSpPr>
-        <p:spPr>
-          <a:xfrm xmlns:a="http://schemas.openxmlformats.org/drawingml/2006/main">
-            <a:off x="1066800" y="3667125"/>
-            <a:ext cx="190500" cy="190500"/>
-          </a:xfrm>
-          <a:prstGeom xmlns:a="http://schemas.openxmlformats.org/drawingml/2006/main" prst="rect">
-            <a:avLst/>
-          </a:prstGeom>
-          <a:solidFill xmlns:a="http://schemas.openxmlformats.org/drawingml/2006/main">
-            <a:srgbClr val="08111D"/>
-          </a:solidFill>
-          <a:ln xmlns:a="http://schemas.openxmlformats.org/drawingml/2006/main" w="0">
-            <a:noFill/>
-            <a:prstDash val="solid"/>
-          </a:ln>
-        </p:spPr>
-      </p:sp>
-      <p:sp>
-        <p:nvSpPr>
-          <p:cNvPr id="35" name="">
-            <a:extLst xmlns:a="http://schemas.openxmlformats.org/drawingml/2006/main">
-              <a:ext uri="{FF2B5EF4-FFF2-40B4-BE49-F238E27FC236}">
-                <a16:creationId xmlns:a16="http://schemas.microsoft.com/office/drawing/2014/main" id="{6C1636D3-D2A8-4D9B-8D34-0AD9DF471F0E}"/>
-              </a:ext>
-            </a:extLst>
-          </p:cNvPr>
-          <p:cNvSpPr>
-            <a:spLocks xmlns:a="http://schemas.openxmlformats.org/drawingml/2006/main" noGrp="1"/>
-          </p:cNvSpPr>
-          <p:nvPr/>
-        </p:nvSpPr>
-        <p:spPr>
-          <a:xfrm xmlns:a="http://schemas.openxmlformats.org/drawingml/2006/main">
-            <a:off x="1295400" y="3667125"/>
-            <a:ext cx="190500" cy="190500"/>
-          </a:xfrm>
-          <a:prstGeom xmlns:a="http://schemas.openxmlformats.org/drawingml/2006/main" prst="rect">
-            <a:avLst/>
-          </a:prstGeom>
-          <a:solidFill xmlns:a="http://schemas.openxmlformats.org/drawingml/2006/main">
-            <a:srgbClr val="08111D"/>
-          </a:solidFill>
-          <a:ln xmlns:a="http://schemas.openxmlformats.org/drawingml/2006/main" w="0">
-            <a:noFill/>
-            <a:prstDash val="solid"/>
-          </a:ln>
-        </p:spPr>
-      </p:sp>
-      <p:sp>
-        <p:nvSpPr>
-          <p:cNvPr id="36" name="">
-            <a:extLst xmlns:a="http://schemas.openxmlformats.org/drawingml/2006/main">
-              <a:ext uri="{FF2B5EF4-FFF2-40B4-BE49-F238E27FC236}">
-                <a16:creationId xmlns:a16="http://schemas.microsoft.com/office/drawing/2014/main" id="{04E237D3-5302-4D31-AB8A-D973FC38CFED}"/>
-              </a:ext>
-            </a:extLst>
-          </p:cNvPr>
-          <p:cNvSpPr>
-            <a:spLocks xmlns:a="http://schemas.openxmlformats.org/drawingml/2006/main" noGrp="1"/>
-          </p:cNvSpPr>
-          <p:nvPr/>
-        </p:nvSpPr>
-        <p:spPr>
-          <a:xfrm xmlns:a="http://schemas.openxmlformats.org/drawingml/2006/main">
-            <a:off x="2209800" y="3667125"/>
-            <a:ext cx="190500" cy="190500"/>
-          </a:xfrm>
-          <a:prstGeom xmlns:a="http://schemas.openxmlformats.org/drawingml/2006/main" prst="rect">
-            <a:avLst/>
-          </a:prstGeom>
-          <a:solidFill xmlns:a="http://schemas.openxmlformats.org/drawingml/2006/main">
-            <a:srgbClr val="08111D"/>
-          </a:solidFill>
-          <a:ln xmlns:a="http://schemas.openxmlformats.org/drawingml/2006/main" w="0">
-            <a:noFill/>
-            <a:prstDash val="solid"/>
-          </a:ln>
-        </p:spPr>
-      </p:sp>
-      <p:sp>
-        <p:nvSpPr>
-          <p:cNvPr id="37" name="">
-            <a:extLst xmlns:a="http://schemas.openxmlformats.org/drawingml/2006/main">
-              <a:ext uri="{FF2B5EF4-FFF2-40B4-BE49-F238E27FC236}">
-                <a16:creationId xmlns:a16="http://schemas.microsoft.com/office/drawing/2014/main" id="{FC57E561-C57A-45DE-B5C1-9B71A9D27D90}"/>
-              </a:ext>
-            </a:extLst>
-          </p:cNvPr>
-          <p:cNvSpPr>
-            <a:spLocks xmlns:a="http://schemas.openxmlformats.org/drawingml/2006/main" noGrp="1"/>
-          </p:cNvSpPr>
-          <p:nvPr/>
-        </p:nvSpPr>
-        <p:spPr>
-          <a:xfrm xmlns:a="http://schemas.openxmlformats.org/drawingml/2006/main">
-            <a:off x="2438400" y="3667125"/>
-            <a:ext cx="190500" cy="190500"/>
-          </a:xfrm>
-          <a:prstGeom xmlns:a="http://schemas.openxmlformats.org/drawingml/2006/main" prst="rect">
-            <a:avLst/>
-          </a:prstGeom>
-          <a:solidFill xmlns:a="http://schemas.openxmlformats.org/drawingml/2006/main">
-            <a:srgbClr val="08111D"/>
-          </a:solidFill>
-          <a:ln xmlns:a="http://schemas.openxmlformats.org/drawingml/2006/main" w="0">
-            <a:noFill/>
-            <a:prstDash val="solid"/>
-          </a:ln>
-        </p:spPr>
-      </p:sp>
-      <p:sp>
-        <p:nvSpPr>
-          <p:cNvPr id="38" name="">
-            <a:extLst xmlns:a="http://schemas.openxmlformats.org/drawingml/2006/main">
-              <a:ext uri="{FF2B5EF4-FFF2-40B4-BE49-F238E27FC236}">
-                <a16:creationId xmlns:a16="http://schemas.microsoft.com/office/drawing/2014/main" id="{6129335B-A52B-4636-B5A9-6C0AB753F98C}"/>
-              </a:ext>
-            </a:extLst>
-          </p:cNvPr>
-          <p:cNvSpPr>
-            <a:spLocks xmlns:a="http://schemas.openxmlformats.org/drawingml/2006/main" noGrp="1"/>
-          </p:cNvSpPr>
-          <p:nvPr/>
-        </p:nvSpPr>
-        <p:spPr>
-          <a:xfrm xmlns:a="http://schemas.openxmlformats.org/drawingml/2006/main">
-            <a:off x="1066800" y="3895725"/>
-            <a:ext cx="190500" cy="190500"/>
-          </a:xfrm>
-          <a:prstGeom xmlns:a="http://schemas.openxmlformats.org/drawingml/2006/main" prst="rect">
-            <a:avLst/>
-          </a:prstGeom>
-          <a:solidFill xmlns:a="http://schemas.openxmlformats.org/drawingml/2006/main">
-            <a:srgbClr val="08111D"/>
-          </a:solidFill>
-          <a:ln xmlns:a="http://schemas.openxmlformats.org/drawingml/2006/main" w="0">
-            <a:noFill/>
-            <a:prstDash val="solid"/>
-          </a:ln>
-        </p:spPr>
-      </p:sp>
-      <p:sp>
-        <p:nvSpPr>
-          <p:cNvPr id="39" name="">
-            <a:extLst xmlns:a="http://schemas.openxmlformats.org/drawingml/2006/main">
-              <a:ext uri="{FF2B5EF4-FFF2-40B4-BE49-F238E27FC236}">
-                <a16:creationId xmlns:a16="http://schemas.microsoft.com/office/drawing/2014/main" id="{01305C5A-758D-4F4A-A864-AB364298AAEF}"/>
-              </a:ext>
-            </a:extLst>
-          </p:cNvPr>
-          <p:cNvSpPr>
-            <a:spLocks xmlns:a="http://schemas.openxmlformats.org/drawingml/2006/main" noGrp="1"/>
-          </p:cNvSpPr>
-          <p:nvPr/>
-        </p:nvSpPr>
-        <p:spPr>
-          <a:xfrm xmlns:a="http://schemas.openxmlformats.org/drawingml/2006/main">
-            <a:off x="1295400" y="3895725"/>
-            <a:ext cx="190500" cy="190500"/>
-          </a:xfrm>
-          <a:prstGeom xmlns:a="http://schemas.openxmlformats.org/drawingml/2006/main" prst="rect">
-            <a:avLst/>
-          </a:prstGeom>
-          <a:solidFill xmlns:a="http://schemas.openxmlformats.org/drawingml/2006/main">
-            <a:srgbClr val="08111D"/>
-          </a:solidFill>
-          <a:ln xmlns:a="http://schemas.openxmlformats.org/drawingml/2006/main" w="0">
-            <a:noFill/>
-            <a:prstDash val="solid"/>
-          </a:ln>
-        </p:spPr>
-      </p:sp>
-      <p:sp>
-        <p:nvSpPr>
-          <p:cNvPr id="40" name="">
-            <a:extLst xmlns:a="http://schemas.openxmlformats.org/drawingml/2006/main">
-              <a:ext uri="{FF2B5EF4-FFF2-40B4-BE49-F238E27FC236}">
-                <a16:creationId xmlns:a16="http://schemas.microsoft.com/office/drawing/2014/main" id="{F155E2A9-E89E-41E2-8842-9E492C27F5D6}"/>
-              </a:ext>
-            </a:extLst>
-          </p:cNvPr>
-          <p:cNvSpPr>
-            <a:spLocks xmlns:a="http://schemas.openxmlformats.org/drawingml/2006/main" noGrp="1"/>
-          </p:cNvSpPr>
-          <p:nvPr/>
-        </p:nvSpPr>
-        <p:spPr>
-          <a:xfrm xmlns:a="http://schemas.openxmlformats.org/drawingml/2006/main">
-            <a:off x="1524000" y="3895725"/>
-            <a:ext cx="190500" cy="190500"/>
-          </a:xfrm>
-          <a:prstGeom xmlns:a="http://schemas.openxmlformats.org/drawingml/2006/main" prst="rect">
-            <a:avLst/>
-          </a:prstGeom>
-          <a:solidFill xmlns:a="http://schemas.openxmlformats.org/drawingml/2006/main">
-            <a:srgbClr val="08111D"/>
-          </a:solidFill>
-          <a:ln xmlns:a="http://schemas.openxmlformats.org/drawingml/2006/main" w="0">
-            <a:noFill/>
-            <a:prstDash val="solid"/>
-          </a:ln>
-        </p:spPr>
-      </p:sp>
-      <p:sp>
-        <p:nvSpPr>
-          <p:cNvPr id="41" name="">
-            <a:extLst xmlns:a="http://schemas.openxmlformats.org/drawingml/2006/main">
-              <a:ext uri="{FF2B5EF4-FFF2-40B4-BE49-F238E27FC236}">
-                <a16:creationId xmlns:a16="http://schemas.microsoft.com/office/drawing/2014/main" id="{49657570-45D3-4571-8E8B-426BFAD90F0F}"/>
-              </a:ext>
-            </a:extLst>
-          </p:cNvPr>
-          <p:cNvSpPr>
-            <a:spLocks xmlns:a="http://schemas.openxmlformats.org/drawingml/2006/main" noGrp="1"/>
-          </p:cNvSpPr>
-          <p:nvPr/>
-        </p:nvSpPr>
-        <p:spPr>
-          <a:xfrm xmlns:a="http://schemas.openxmlformats.org/drawingml/2006/main">
-            <a:off x="1981200" y="3895725"/>
-            <a:ext cx="190500" cy="190500"/>
-          </a:xfrm>
-          <a:prstGeom xmlns:a="http://schemas.openxmlformats.org/drawingml/2006/main" prst="rect">
-            <a:avLst/>
-          </a:prstGeom>
-          <a:solidFill xmlns:a="http://schemas.openxmlformats.org/drawingml/2006/main">
-            <a:srgbClr val="08111D"/>
-          </a:solidFill>
-          <a:ln xmlns:a="http://schemas.openxmlformats.org/drawingml/2006/main" w="0">
-            <a:noFill/>
-            <a:prstDash val="solid"/>
-          </a:ln>
-        </p:spPr>
-      </p:sp>
-      <p:sp>
-        <p:nvSpPr>
-          <p:cNvPr id="42" name="">
-            <a:extLst xmlns:a="http://schemas.openxmlformats.org/drawingml/2006/main">
-              <a:ext uri="{FF2B5EF4-FFF2-40B4-BE49-F238E27FC236}">
-                <a16:creationId xmlns:a16="http://schemas.microsoft.com/office/drawing/2014/main" id="{6EFD47DB-90AB-4A66-AF0D-0B47D8CD088A}"/>
-              </a:ext>
-            </a:extLst>
-          </p:cNvPr>
-          <p:cNvSpPr>
-            <a:spLocks xmlns:a="http://schemas.openxmlformats.org/drawingml/2006/main" noGrp="1"/>
-          </p:cNvSpPr>
-          <p:nvPr/>
-        </p:nvSpPr>
-        <p:spPr>
-          <a:xfrm xmlns:a="http://schemas.openxmlformats.org/drawingml/2006/main">
-            <a:off x="2667000" y="3895725"/>
-            <a:ext cx="190500" cy="190500"/>
-          </a:xfrm>
-          <a:prstGeom xmlns:a="http://schemas.openxmlformats.org/drawingml/2006/main" prst="rect">
-            <a:avLst/>
-          </a:prstGeom>
-          <a:solidFill xmlns:a="http://schemas.openxmlformats.org/drawingml/2006/main">
-            <a:srgbClr val="08111D"/>
-          </a:solidFill>
-          <a:ln xmlns:a="http://schemas.openxmlformats.org/drawingml/2006/main" w="0">
-            <a:noFill/>
-            <a:prstDash val="solid"/>
-          </a:ln>
-        </p:spPr>
-      </p:sp>
-      <p:sp>
-        <p:nvSpPr>
-          <p:cNvPr id="43" name="">
-            <a:extLst xmlns:a="http://schemas.openxmlformats.org/drawingml/2006/main">
-              <a:ext uri="{FF2B5EF4-FFF2-40B4-BE49-F238E27FC236}">
-                <a16:creationId xmlns:a16="http://schemas.microsoft.com/office/drawing/2014/main" id="{79BE60D5-DDF4-4ACD-8C27-D6E05B27A07B}"/>
-              </a:ext>
-            </a:extLst>
-          </p:cNvPr>
-          <p:cNvSpPr>
-            <a:spLocks xmlns:a="http://schemas.openxmlformats.org/drawingml/2006/main" noGrp="1"/>
-          </p:cNvSpPr>
-          <p:nvPr/>
-        </p:nvSpPr>
-        <p:spPr>
-          <a:xfrm xmlns:a="http://schemas.openxmlformats.org/drawingml/2006/main">
-            <a:off x="1066800" y="4124325"/>
-            <a:ext cx="190500" cy="190500"/>
-          </a:xfrm>
-          <a:prstGeom xmlns:a="http://schemas.openxmlformats.org/drawingml/2006/main" prst="rect">
-            <a:avLst/>
-          </a:prstGeom>
-          <a:solidFill xmlns:a="http://schemas.openxmlformats.org/drawingml/2006/main">
-            <a:srgbClr val="08111D"/>
-          </a:solidFill>
-          <a:ln xmlns:a="http://schemas.openxmlformats.org/drawingml/2006/main" w="0">
-            <a:noFill/>
-            <a:prstDash val="solid"/>
-          </a:ln>
-        </p:spPr>
-      </p:sp>
-      <p:sp>
-        <p:nvSpPr>
-          <p:cNvPr id="44" name="">
-            <a:extLst xmlns:a="http://schemas.openxmlformats.org/drawingml/2006/main">
-              <a:ext uri="{FF2B5EF4-FFF2-40B4-BE49-F238E27FC236}">
-                <a16:creationId xmlns:a16="http://schemas.microsoft.com/office/drawing/2014/main" id="{DAC48EA7-0DE1-42EA-B6D6-D58FEBFCAADF}"/>
-              </a:ext>
-            </a:extLst>
-          </p:cNvPr>
-          <p:cNvSpPr>
-            <a:spLocks xmlns:a="http://schemas.openxmlformats.org/drawingml/2006/main" noGrp="1"/>
-          </p:cNvSpPr>
-          <p:nvPr/>
-        </p:nvSpPr>
-        <p:spPr>
-          <a:xfrm xmlns:a="http://schemas.openxmlformats.org/drawingml/2006/main">
-            <a:off x="1295400" y="4124325"/>
-            <a:ext cx="190500" cy="190500"/>
-          </a:xfrm>
-          <a:prstGeom xmlns:a="http://schemas.openxmlformats.org/drawingml/2006/main" prst="rect">
-            <a:avLst/>
-          </a:prstGeom>
-          <a:solidFill xmlns:a="http://schemas.openxmlformats.org/drawingml/2006/main">
-            <a:srgbClr val="08111D"/>
-          </a:solidFill>
-          <a:ln xmlns:a="http://schemas.openxmlformats.org/drawingml/2006/main" w="0">
-            <a:noFill/>
-            <a:prstDash val="solid"/>
-          </a:ln>
-        </p:spPr>
-      </p:sp>
-      <p:sp>
-        <p:nvSpPr>
-          <p:cNvPr id="45" name="">
-            <a:extLst xmlns:a="http://schemas.openxmlformats.org/drawingml/2006/main">
-              <a:ext uri="{FF2B5EF4-FFF2-40B4-BE49-F238E27FC236}">
-                <a16:creationId xmlns:a16="http://schemas.microsoft.com/office/drawing/2014/main" id="{433C9346-DB4A-48C3-996E-7CF39B81111E}"/>
-              </a:ext>
-            </a:extLst>
-          </p:cNvPr>
-          <p:cNvSpPr>
-            <a:spLocks xmlns:a="http://schemas.openxmlformats.org/drawingml/2006/main" noGrp="1"/>
-          </p:cNvSpPr>
-          <p:nvPr/>
-        </p:nvSpPr>
-        <p:spPr>
-          <a:xfrm xmlns:a="http://schemas.openxmlformats.org/drawingml/2006/main">
-            <a:off x="1524000" y="4124325"/>
-            <a:ext cx="190500" cy="190500"/>
-          </a:xfrm>
-          <a:prstGeom xmlns:a="http://schemas.openxmlformats.org/drawingml/2006/main" prst="rect">
-            <a:avLst/>
-          </a:prstGeom>
-          <a:solidFill xmlns:a="http://schemas.openxmlformats.org/drawingml/2006/main">
-            <a:srgbClr val="08111D"/>
-          </a:solidFill>
-          <a:ln xmlns:a="http://schemas.openxmlformats.org/drawingml/2006/main" w="0">
-            <a:noFill/>
-            <a:prstDash val="solid"/>
-          </a:ln>
-        </p:spPr>
-      </p:sp>
-      <p:sp>
-        <p:nvSpPr>
-          <p:cNvPr id="46" name="">
-            <a:extLst xmlns:a="http://schemas.openxmlformats.org/drawingml/2006/main">
-              <a:ext uri="{FF2B5EF4-FFF2-40B4-BE49-F238E27FC236}">
-                <a16:creationId xmlns:a16="http://schemas.microsoft.com/office/drawing/2014/main" id="{24ED9133-FA25-499C-BAF1-FC8AFA50317D}"/>
-              </a:ext>
-            </a:extLst>
-          </p:cNvPr>
-          <p:cNvSpPr>
-            <a:spLocks xmlns:a="http://schemas.openxmlformats.org/drawingml/2006/main" noGrp="1"/>
-          </p:cNvSpPr>
-          <p:nvPr/>
-        </p:nvSpPr>
-        <p:spPr>
-          <a:xfrm xmlns:a="http://schemas.openxmlformats.org/drawingml/2006/main">
-            <a:off x="1981200" y="4124325"/>
-            <a:ext cx="190500" cy="190500"/>
-          </a:xfrm>
-          <a:prstGeom xmlns:a="http://schemas.openxmlformats.org/drawingml/2006/main" prst="rect">
-            <a:avLst/>
-          </a:prstGeom>
-          <a:solidFill xmlns:a="http://schemas.openxmlformats.org/drawingml/2006/main">
-            <a:srgbClr val="08111D"/>
-          </a:solidFill>
-          <a:ln xmlns:a="http://schemas.openxmlformats.org/drawingml/2006/main" w="0">
-            <a:noFill/>
-            <a:prstDash val="solid"/>
-          </a:ln>
-        </p:spPr>
-      </p:sp>
-      <p:sp>
-        <p:nvSpPr>
-          <p:cNvPr id="47" name="">
-            <a:extLst xmlns:a="http://schemas.openxmlformats.org/drawingml/2006/main">
-              <a:ext uri="{FF2B5EF4-FFF2-40B4-BE49-F238E27FC236}">
-                <a16:creationId xmlns:a16="http://schemas.microsoft.com/office/drawing/2014/main" id="{0D9D88A3-32C2-4BFF-9ED2-8792B34095DE}"/>
-              </a:ext>
-            </a:extLst>
-          </p:cNvPr>
-          <p:cNvSpPr>
-            <a:spLocks xmlns:a="http://schemas.openxmlformats.org/drawingml/2006/main" noGrp="1"/>
-          </p:cNvSpPr>
-          <p:nvPr/>
-        </p:nvSpPr>
-        <p:spPr>
-          <a:xfrm xmlns:a="http://schemas.openxmlformats.org/drawingml/2006/main">
-            <a:off x="2667000" y="4124325"/>
-            <a:ext cx="190500" cy="190500"/>
-          </a:xfrm>
-          <a:prstGeom xmlns:a="http://schemas.openxmlformats.org/drawingml/2006/main" prst="rect">
-            <a:avLst/>
-          </a:prstGeom>
-          <a:solidFill xmlns:a="http://schemas.openxmlformats.org/drawingml/2006/main">
-            <a:srgbClr val="08111D"/>
-          </a:solidFill>
-          <a:ln xmlns:a="http://schemas.openxmlformats.org/drawingml/2006/main" w="0">
-            <a:noFill/>
-            <a:prstDash val="solid"/>
-          </a:ln>
-        </p:spPr>
-      </p:sp>
-      <p:sp>
-        <p:nvSpPr>
-          <p:cNvPr id="48" name="">
-            <a:extLst xmlns:a="http://schemas.openxmlformats.org/drawingml/2006/main">
-              <a:ext uri="{FF2B5EF4-FFF2-40B4-BE49-F238E27FC236}">
-                <a16:creationId xmlns:a16="http://schemas.microsoft.com/office/drawing/2014/main" id="{E8A86B6D-1844-471D-8922-22047D6F1816}"/>
-              </a:ext>
-            </a:extLst>
-          </p:cNvPr>
-          <p:cNvSpPr>
-            <a:spLocks xmlns:a="http://schemas.openxmlformats.org/drawingml/2006/main" noGrp="1"/>
-          </p:cNvSpPr>
-          <p:nvPr/>
-        </p:nvSpPr>
-        <p:spPr>
-          <a:xfrm xmlns:a="http://schemas.openxmlformats.org/drawingml/2006/main">
-            <a:off x="1066800" y="4352925"/>
-            <a:ext cx="190500" cy="190500"/>
-          </a:xfrm>
-          <a:prstGeom xmlns:a="http://schemas.openxmlformats.org/drawingml/2006/main" prst="rect">
-            <a:avLst/>
-          </a:prstGeom>
-          <a:solidFill xmlns:a="http://schemas.openxmlformats.org/drawingml/2006/main">
-            <a:srgbClr val="08111D"/>
-          </a:solidFill>
-          <a:ln xmlns:a="http://schemas.openxmlformats.org/drawingml/2006/main" w="0">
-            <a:noFill/>
-            <a:prstDash val="solid"/>
-          </a:ln>
-        </p:spPr>
-      </p:sp>
-      <p:sp>
-        <p:nvSpPr>
-          <p:cNvPr id="49" name="">
-            <a:extLst xmlns:a="http://schemas.openxmlformats.org/drawingml/2006/main">
-              <a:ext uri="{FF2B5EF4-FFF2-40B4-BE49-F238E27FC236}">
-                <a16:creationId xmlns:a16="http://schemas.microsoft.com/office/drawing/2014/main" id="{0DA17D69-6C5F-46E3-9D1F-C046765EDD55}"/>
-              </a:ext>
-            </a:extLst>
-          </p:cNvPr>
-          <p:cNvSpPr>
-            <a:spLocks xmlns:a="http://schemas.openxmlformats.org/drawingml/2006/main" noGrp="1"/>
-          </p:cNvSpPr>
-          <p:nvPr/>
-        </p:nvSpPr>
-        <p:spPr>
-          <a:xfrm xmlns:a="http://schemas.openxmlformats.org/drawingml/2006/main">
-            <a:off x="1295400" y="4352925"/>
-            <a:ext cx="190500" cy="190500"/>
-          </a:xfrm>
-          <a:prstGeom xmlns:a="http://schemas.openxmlformats.org/drawingml/2006/main" prst="rect">
-            <a:avLst/>
-          </a:prstGeom>
-          <a:solidFill xmlns:a="http://schemas.openxmlformats.org/drawingml/2006/main">
-            <a:srgbClr val="08111D"/>
-          </a:solidFill>
-          <a:ln xmlns:a="http://schemas.openxmlformats.org/drawingml/2006/main" w="0">
-            <a:noFill/>
-            <a:prstDash val="solid"/>
-          </a:ln>
-        </p:spPr>
-      </p:sp>
-      <p:sp>
-        <p:nvSpPr>
-          <p:cNvPr id="50" name="">
-            <a:extLst xmlns:a="http://schemas.openxmlformats.org/drawingml/2006/main">
-              <a:ext uri="{FF2B5EF4-FFF2-40B4-BE49-F238E27FC236}">
-                <a16:creationId xmlns:a16="http://schemas.microsoft.com/office/drawing/2014/main" id="{042F672F-A95F-4A97-94D6-2C385AA9E743}"/>
-              </a:ext>
-            </a:extLst>
-          </p:cNvPr>
-          <p:cNvSpPr>
-            <a:spLocks xmlns:a="http://schemas.openxmlformats.org/drawingml/2006/main" noGrp="1"/>
-          </p:cNvSpPr>
-          <p:nvPr/>
-        </p:nvSpPr>
-        <p:spPr>
-          <a:xfrm xmlns:a="http://schemas.openxmlformats.org/drawingml/2006/main">
-            <a:off x="1524000" y="4352925"/>
-            <a:ext cx="190500" cy="190500"/>
-          </a:xfrm>
-          <a:prstGeom xmlns:a="http://schemas.openxmlformats.org/drawingml/2006/main" prst="rect">
-            <a:avLst/>
-          </a:prstGeom>
-          <a:solidFill xmlns:a="http://schemas.openxmlformats.org/drawingml/2006/main">
-            <a:srgbClr val="08111D"/>
-          </a:solidFill>
-          <a:ln xmlns:a="http://schemas.openxmlformats.org/drawingml/2006/main" w="0">
-            <a:noFill/>
-            <a:prstDash val="solid"/>
-          </a:ln>
-        </p:spPr>
-      </p:sp>
-      <p:sp>
-        <p:nvSpPr>
-          <p:cNvPr id="51" name="">
-            <a:extLst xmlns:a="http://schemas.openxmlformats.org/drawingml/2006/main">
-              <a:ext uri="{FF2B5EF4-FFF2-40B4-BE49-F238E27FC236}">
-                <a16:creationId xmlns:a16="http://schemas.microsoft.com/office/drawing/2014/main" id="{5AC73DB5-9386-4BA7-83B7-7371554CFFD4}"/>
-              </a:ext>
-            </a:extLst>
-          </p:cNvPr>
-          <p:cNvSpPr>
-            <a:spLocks xmlns:a="http://schemas.openxmlformats.org/drawingml/2006/main" noGrp="1"/>
-          </p:cNvSpPr>
-          <p:nvPr/>
-        </p:nvSpPr>
-        <p:spPr>
-          <a:xfrm xmlns:a="http://schemas.openxmlformats.org/drawingml/2006/main">
-            <a:off x="2209800" y="4352925"/>
-            <a:ext cx="190500" cy="190500"/>
-          </a:xfrm>
-          <a:prstGeom xmlns:a="http://schemas.openxmlformats.org/drawingml/2006/main" prst="rect">
-            <a:avLst/>
-          </a:prstGeom>
-          <a:solidFill xmlns:a="http://schemas.openxmlformats.org/drawingml/2006/main">
-            <a:srgbClr val="08111D"/>
-          </a:solidFill>
-          <a:ln xmlns:a="http://schemas.openxmlformats.org/drawingml/2006/main" w="0">
-            <a:noFill/>
-            <a:prstDash val="solid"/>
-          </a:ln>
-        </p:spPr>
-      </p:sp>
-      <p:sp>
-        <p:nvSpPr>
-          <p:cNvPr id="52" name="">
-            <a:extLst xmlns:a="http://schemas.openxmlformats.org/drawingml/2006/main">
-              <a:ext uri="{FF2B5EF4-FFF2-40B4-BE49-F238E27FC236}">
-                <a16:creationId xmlns:a16="http://schemas.microsoft.com/office/drawing/2014/main" id="{FBE8F751-0998-48C0-B8D1-4A52207D1F75}"/>
-              </a:ext>
-            </a:extLst>
-          </p:cNvPr>
-          <p:cNvSpPr>
-            <a:spLocks xmlns:a="http://schemas.openxmlformats.org/drawingml/2006/main" noGrp="1"/>
-          </p:cNvSpPr>
-          <p:nvPr/>
-        </p:nvSpPr>
-        <p:spPr>
-          <a:xfrm xmlns:a="http://schemas.openxmlformats.org/drawingml/2006/main">
-            <a:off x="2438400" y="4352925"/>
-            <a:ext cx="190500" cy="190500"/>
-          </a:xfrm>
-          <a:prstGeom xmlns:a="http://schemas.openxmlformats.org/drawingml/2006/main" prst="rect">
-            <a:avLst/>
-          </a:prstGeom>
-          <a:solidFill xmlns:a="http://schemas.openxmlformats.org/drawingml/2006/main">
-            <a:srgbClr val="08111D"/>
-          </a:solidFill>
-          <a:ln xmlns:a="http://schemas.openxmlformats.org/drawingml/2006/main" w="0">
-            <a:noFill/>
-            <a:prstDash val="solid"/>
-          </a:ln>
-        </p:spPr>
-      </p:sp>
-      <p:sp>
-        <p:nvSpPr>
-          <p:cNvPr id="53" name="">
-            <a:extLst xmlns:a="http://schemas.openxmlformats.org/drawingml/2006/main">
-              <a:ext uri="{FF2B5EF4-FFF2-40B4-BE49-F238E27FC236}">
-                <a16:creationId xmlns:a16="http://schemas.microsoft.com/office/drawing/2014/main" id="{37F79BF4-FB1D-439C-A064-BFD09578D1B3}"/>
-              </a:ext>
-            </a:extLst>
-          </p:cNvPr>
-          <p:cNvSpPr>
-            <a:spLocks xmlns:a="http://schemas.openxmlformats.org/drawingml/2006/main" noGrp="1"/>
-          </p:cNvSpPr>
-          <p:nvPr/>
-        </p:nvSpPr>
-        <p:spPr>
-          <a:xfrm xmlns:a="http://schemas.openxmlformats.org/drawingml/2006/main">
-            <a:off x="819150" y="5048250"/>
-            <a:ext cx="2571750" cy="285750"/>
-          </a:xfrm>
-          <a:prstGeom xmlns:a="http://schemas.openxmlformats.org/drawingml/2006/main" prst="rect">
-            <a:avLst/>
-          </a:prstGeom>
-          <a:noFill xmlns:a="http://schemas.openxmlformats.org/drawingml/2006/main"/>
-          <a:ln xmlns:a="http://schemas.openxmlformats.org/drawingml/2006/main" w="0">
-            <a:noFill/>
-            <a:prstDash val="solid"/>
-          </a:ln>
-        </p:spPr>
-        <p:txBody>
-          <a:bodyPr xmlns:a="http://schemas.openxmlformats.org/drawingml/2006/main" anchor="t"/>
-          <a:lstStyle xmlns:a="http://schemas.openxmlformats.org/drawingml/2006/main"/>
-          <a:p xmlns:a="http://schemas.openxmlformats.org/drawingml/2006/main">
-            <a:pPr algn="ctr">
-              <a:defRPr sz="1050" b="1" i="0">
-                <a:solidFill>
-                  <a:srgbClr val="FFC857"/>
-                </a:solidFill>
-              </a:defRPr>
-            </a:pPr>
-            <a:r>
-              <a:rPr sz="1050" b="1" i="0">
-                <a:solidFill>
-                  <a:srgbClr val="FFC857"/>
-                </a:solidFill>
-              </a:rPr>
-              <a:t>REPLACE WITH REPO QR</a:t>
-            </a:r>
-          </a:p>
-        </p:txBody>
-      </p:sp>
-      <p:sp>
-        <p:nvSpPr>
-          <p:cNvPr id="54" name="">
-            <a:extLst xmlns:a="http://schemas.openxmlformats.org/drawingml/2006/main">
-              <a:ext uri="{FF2B5EF4-FFF2-40B4-BE49-F238E27FC236}">
-                <a16:creationId xmlns:a16="http://schemas.microsoft.com/office/drawing/2014/main" id="{48EA9721-3FA8-4D9C-9486-2773AEA59B74}"/>
+                <a16:creationId xmlns:a16="http://schemas.microsoft.com/office/drawing/2014/main" id="{AD604C0F-D316-4EFA-B580-1D6899B4C8C9}"/>
               </a:ext>
             </a:extLst>
           </p:cNvPr>
@@ -18959,10 +18100,10 @@
       </p:sp>
       <p:sp>
         <p:nvSpPr>
-          <p:cNvPr id="55" name="">
-            <a:extLst xmlns:a="http://schemas.openxmlformats.org/drawingml/2006/main">
-              <a:ext uri="{FF2B5EF4-FFF2-40B4-BE49-F238E27FC236}">
-                <a16:creationId xmlns:a16="http://schemas.microsoft.com/office/drawing/2014/main" id="{74046DDC-7200-4225-9C3D-86E93A84D310}"/>
+          <p:cNvPr id="15" name="">
+            <a:extLst xmlns:a="http://schemas.openxmlformats.org/drawingml/2006/main">
+              <a:ext uri="{FF2B5EF4-FFF2-40B4-BE49-F238E27FC236}">
+                <a16:creationId xmlns:a16="http://schemas.microsoft.com/office/drawing/2014/main" id="{412B8801-660E-4C08-BD8D-3109B273C6C8}"/>
               </a:ext>
             </a:extLst>
           </p:cNvPr>
@@ -19009,10 +18150,10 @@
       </p:sp>
       <p:sp>
         <p:nvSpPr>
-          <p:cNvPr id="56" name="">
-            <a:extLst xmlns:a="http://schemas.openxmlformats.org/drawingml/2006/main">
-              <a:ext uri="{FF2B5EF4-FFF2-40B4-BE49-F238E27FC236}">
-                <a16:creationId xmlns:a16="http://schemas.microsoft.com/office/drawing/2014/main" id="{D322BD67-1C5C-4D8D-B571-6505949AA8A3}"/>
+          <p:cNvPr id="16" name="">
+            <a:extLst xmlns:a="http://schemas.openxmlformats.org/drawingml/2006/main">
+              <a:ext uri="{FF2B5EF4-FFF2-40B4-BE49-F238E27FC236}">
+                <a16:creationId xmlns:a16="http://schemas.microsoft.com/office/drawing/2014/main" id="{B33D634B-2EB9-42FD-8919-EE59AD834722}"/>
               </a:ext>
             </a:extLst>
           </p:cNvPr>
@@ -19059,10 +18200,10 @@
       </p:sp>
       <p:sp>
         <p:nvSpPr>
-          <p:cNvPr id="57" name="">
-            <a:extLst xmlns:a="http://schemas.openxmlformats.org/drawingml/2006/main">
-              <a:ext uri="{FF2B5EF4-FFF2-40B4-BE49-F238E27FC236}">
-                <a16:creationId xmlns:a16="http://schemas.microsoft.com/office/drawing/2014/main" id="{DCE778F8-0220-4FEE-840C-D3ECB24DEFF8}"/>
+          <p:cNvPr id="17" name="">
+            <a:extLst xmlns:a="http://schemas.openxmlformats.org/drawingml/2006/main">
+              <a:ext uri="{FF2B5EF4-FFF2-40B4-BE49-F238E27FC236}">
+                <a16:creationId xmlns:a16="http://schemas.microsoft.com/office/drawing/2014/main" id="{AE708EB4-0111-454F-8DA9-BBAC8EF124D5}"/>
               </a:ext>
             </a:extLst>
           </p:cNvPr>
@@ -19109,10 +18250,10 @@
       </p:sp>
       <p:sp>
         <p:nvSpPr>
-          <p:cNvPr id="58" name="">
-            <a:extLst xmlns:a="http://schemas.openxmlformats.org/drawingml/2006/main">
-              <a:ext uri="{FF2B5EF4-FFF2-40B4-BE49-F238E27FC236}">
-                <a16:creationId xmlns:a16="http://schemas.microsoft.com/office/drawing/2014/main" id="{3E2F5078-00D7-4B3E-90C7-6C3460203A20}"/>
+          <p:cNvPr id="18" name="">
+            <a:extLst xmlns:a="http://schemas.openxmlformats.org/drawingml/2006/main">
+              <a:ext uri="{FF2B5EF4-FFF2-40B4-BE49-F238E27FC236}">
+                <a16:creationId xmlns:a16="http://schemas.microsoft.com/office/drawing/2014/main" id="{7CDCB728-7F91-42AE-90DD-620852E478C8}"/>
               </a:ext>
             </a:extLst>
           </p:cNvPr>
@@ -19159,10 +18300,10 @@
       </p:sp>
       <p:sp>
         <p:nvSpPr>
-          <p:cNvPr id="59" name="">
-            <a:extLst xmlns:a="http://schemas.openxmlformats.org/drawingml/2006/main">
-              <a:ext uri="{FF2B5EF4-FFF2-40B4-BE49-F238E27FC236}">
-                <a16:creationId xmlns:a16="http://schemas.microsoft.com/office/drawing/2014/main" id="{73E5C7AA-EF73-4108-B8E4-23D9E40BDC06}"/>
+          <p:cNvPr id="19" name="">
+            <a:extLst xmlns:a="http://schemas.openxmlformats.org/drawingml/2006/main">
+              <a:ext uri="{FF2B5EF4-FFF2-40B4-BE49-F238E27FC236}">
+                <a16:creationId xmlns:a16="http://schemas.microsoft.com/office/drawing/2014/main" id="{C39AF7CF-E78B-48B1-A6ED-007BB18D6E29}"/>
               </a:ext>
             </a:extLst>
           </p:cNvPr>
@@ -19209,10 +18350,10 @@
       </p:sp>
       <p:sp>
         <p:nvSpPr>
-          <p:cNvPr id="60" name="">
-            <a:extLst xmlns:a="http://schemas.openxmlformats.org/drawingml/2006/main">
-              <a:ext uri="{FF2B5EF4-FFF2-40B4-BE49-F238E27FC236}">
-                <a16:creationId xmlns:a16="http://schemas.microsoft.com/office/drawing/2014/main" id="{C45D43E5-8E99-4C41-B1C3-4A06A94BB1FE}"/>
+          <p:cNvPr id="20" name="">
+            <a:extLst xmlns:a="http://schemas.openxmlformats.org/drawingml/2006/main">
+              <a:ext uri="{FF2B5EF4-FFF2-40B4-BE49-F238E27FC236}">
+                <a16:creationId xmlns:a16="http://schemas.microsoft.com/office/drawing/2014/main" id="{C3D1D149-AB56-4294-AA28-265E9EE36C22}"/>
               </a:ext>
             </a:extLst>
           </p:cNvPr>
@@ -19244,10 +18385,10 @@
       </p:sp>
       <p:sp>
         <p:nvSpPr>
-          <p:cNvPr id="61" name="">
-            <a:extLst xmlns:a="http://schemas.openxmlformats.org/drawingml/2006/main">
-              <a:ext uri="{FF2B5EF4-FFF2-40B4-BE49-F238E27FC236}">
-                <a16:creationId xmlns:a16="http://schemas.microsoft.com/office/drawing/2014/main" id="{C846D27B-4425-456E-942C-7B2055EB3D77}"/>
+          <p:cNvPr id="21" name="">
+            <a:extLst xmlns:a="http://schemas.openxmlformats.org/drawingml/2006/main">
+              <a:ext uri="{FF2B5EF4-FFF2-40B4-BE49-F238E27FC236}">
+                <a16:creationId xmlns:a16="http://schemas.microsoft.com/office/drawing/2014/main" id="{FB1A249E-FE28-4310-B388-16D8C0868F4E}"/>
               </a:ext>
             </a:extLst>
           </p:cNvPr>
@@ -19295,7 +18436,7 @@
     </p:spTree>
     <p:extLst>
       <p:ext uri="{BB962C8B-B14F-4D97-AF65-F5344CB8AC3E}">
-        <p14:creationId xmlns:p14="http://schemas.microsoft.com/office/powerpoint/2010/main" val="416739601"/>
+        <p14:creationId xmlns:p14="http://schemas.microsoft.com/office/powerpoint/2010/main" val="141629824"/>
       </p:ext>
     </p:extLst>
   </p:cSld>
@@ -19326,7 +18467,7 @@
           <p:cNvPr id="34" name="">
             <a:extLst xmlns:a="http://schemas.openxmlformats.org/drawingml/2006/main">
               <a:ext uri="{FF2B5EF4-FFF2-40B4-BE49-F238E27FC236}">
-                <a16:creationId xmlns:a16="http://schemas.microsoft.com/office/drawing/2014/main" id="{2C10A5AB-F346-4AF8-988F-1AA473BA7567}"/>
+                <a16:creationId xmlns:a16="http://schemas.microsoft.com/office/drawing/2014/main" id="{8BF92868-306F-4D70-8380-8AE89981289F}"/>
               </a:ext>
             </a:extLst>
           </p:cNvPr>
@@ -19359,7 +18500,7 @@
           <p:cNvPr id="2" name="">
             <a:extLst xmlns:a="http://schemas.openxmlformats.org/drawingml/2006/main">
               <a:ext uri="{FF2B5EF4-FFF2-40B4-BE49-F238E27FC236}">
-                <a16:creationId xmlns:a16="http://schemas.microsoft.com/office/drawing/2014/main" id="{BAC2885A-9C81-4F07-AF6B-DAF474412183}"/>
+                <a16:creationId xmlns:a16="http://schemas.microsoft.com/office/drawing/2014/main" id="{A12209A9-4EDD-4710-941B-B31CBB761628}"/>
               </a:ext>
             </a:extLst>
           </p:cNvPr>
@@ -19409,7 +18550,7 @@
           <p:cNvPr id="3" name="">
             <a:extLst xmlns:a="http://schemas.openxmlformats.org/drawingml/2006/main">
               <a:ext uri="{FF2B5EF4-FFF2-40B4-BE49-F238E27FC236}">
-                <a16:creationId xmlns:a16="http://schemas.microsoft.com/office/drawing/2014/main" id="{06EE389E-E153-41B5-AD2C-904ACE5FDD5F}"/>
+                <a16:creationId xmlns:a16="http://schemas.microsoft.com/office/drawing/2014/main" id="{AB9585C3-D1F2-4005-B547-C71518DBB55D}"/>
               </a:ext>
             </a:extLst>
           </p:cNvPr>
@@ -19459,7 +18600,7 @@
           <p:cNvPr id="4" name="">
             <a:extLst xmlns:a="http://schemas.openxmlformats.org/drawingml/2006/main">
               <a:ext uri="{FF2B5EF4-FFF2-40B4-BE49-F238E27FC236}">
-                <a16:creationId xmlns:a16="http://schemas.microsoft.com/office/drawing/2014/main" id="{EA64BE1B-F018-4FFA-B631-5B141BECC926}"/>
+                <a16:creationId xmlns:a16="http://schemas.microsoft.com/office/drawing/2014/main" id="{2E904F6A-9209-4286-9AD2-AC72A257BB49}"/>
               </a:ext>
             </a:extLst>
           </p:cNvPr>
@@ -19509,7 +18650,7 @@
           <p:cNvPr id="5" name="">
             <a:extLst xmlns:a="http://schemas.openxmlformats.org/drawingml/2006/main">
               <a:ext uri="{FF2B5EF4-FFF2-40B4-BE49-F238E27FC236}">
-                <a16:creationId xmlns:a16="http://schemas.microsoft.com/office/drawing/2014/main" id="{97E9158C-422F-451B-9CA2-934E4CE8C116}"/>
+                <a16:creationId xmlns:a16="http://schemas.microsoft.com/office/drawing/2014/main" id="{03BFA478-ED5A-46F3-9A6F-8E6DE45248D3}"/>
               </a:ext>
             </a:extLst>
           </p:cNvPr>
@@ -19540,7 +18681,7 @@
           <p:cNvPr id="6" name="">
             <a:extLst xmlns:a="http://schemas.openxmlformats.org/drawingml/2006/main">
               <a:ext uri="{FF2B5EF4-FFF2-40B4-BE49-F238E27FC236}">
-                <a16:creationId xmlns:a16="http://schemas.microsoft.com/office/drawing/2014/main" id="{7FC641B2-BD95-4BDB-B86F-F13BA4FD03B2}"/>
+                <a16:creationId xmlns:a16="http://schemas.microsoft.com/office/drawing/2014/main" id="{61933D40-A075-41A9-8F08-AD5675FDED30}"/>
               </a:ext>
             </a:extLst>
           </p:cNvPr>
@@ -19590,7 +18731,7 @@
           <p:cNvPr id="7" name="">
             <a:extLst xmlns:a="http://schemas.openxmlformats.org/drawingml/2006/main">
               <a:ext uri="{FF2B5EF4-FFF2-40B4-BE49-F238E27FC236}">
-                <a16:creationId xmlns:a16="http://schemas.microsoft.com/office/drawing/2014/main" id="{90D86F8E-58CF-4017-A936-7B4CF46BA618}"/>
+                <a16:creationId xmlns:a16="http://schemas.microsoft.com/office/drawing/2014/main" id="{ADE21316-BF00-4165-9308-4C4621637567}"/>
               </a:ext>
             </a:extLst>
           </p:cNvPr>
@@ -19640,7 +18781,7 @@
           <p:cNvPr id="8" name="">
             <a:extLst xmlns:a="http://schemas.openxmlformats.org/drawingml/2006/main">
               <a:ext uri="{FF2B5EF4-FFF2-40B4-BE49-F238E27FC236}">
-                <a16:creationId xmlns:a16="http://schemas.microsoft.com/office/drawing/2014/main" id="{15FCD9EE-28C0-4419-B3B0-9DCEFF9356EF}"/>
+                <a16:creationId xmlns:a16="http://schemas.microsoft.com/office/drawing/2014/main" id="{9B0083D2-E2BB-42CB-AB7F-431CC57B4369}"/>
               </a:ext>
             </a:extLst>
           </p:cNvPr>
@@ -19671,7 +18812,7 @@
           <p:cNvPr id="9" name="">
             <a:extLst xmlns:a="http://schemas.openxmlformats.org/drawingml/2006/main">
               <a:ext uri="{FF2B5EF4-FFF2-40B4-BE49-F238E27FC236}">
-                <a16:creationId xmlns:a16="http://schemas.microsoft.com/office/drawing/2014/main" id="{F95D05A5-B866-4E04-9B84-6F40EA5BCBBC}"/>
+                <a16:creationId xmlns:a16="http://schemas.microsoft.com/office/drawing/2014/main" id="{D9B16D30-E203-41F4-AEB1-CB4D525B8873}"/>
               </a:ext>
             </a:extLst>
           </p:cNvPr>
@@ -19702,7 +18843,7 @@
           <p:cNvPr id="10" name="">
             <a:extLst xmlns:a="http://schemas.openxmlformats.org/drawingml/2006/main">
               <a:ext uri="{FF2B5EF4-FFF2-40B4-BE49-F238E27FC236}">
-                <a16:creationId xmlns:a16="http://schemas.microsoft.com/office/drawing/2014/main" id="{727C25A9-99C5-4777-89F8-1B842E833384}"/>
+                <a16:creationId xmlns:a16="http://schemas.microsoft.com/office/drawing/2014/main" id="{96394A3D-41A3-42A7-A351-2E5B29A02C75}"/>
               </a:ext>
             </a:extLst>
           </p:cNvPr>
@@ -19752,7 +18893,7 @@
           <p:cNvPr id="11" name="">
             <a:extLst xmlns:a="http://schemas.openxmlformats.org/drawingml/2006/main">
               <a:ext uri="{FF2B5EF4-FFF2-40B4-BE49-F238E27FC236}">
-                <a16:creationId xmlns:a16="http://schemas.microsoft.com/office/drawing/2014/main" id="{2184D198-9D40-4292-AC72-6257F4D7E05C}"/>
+                <a16:creationId xmlns:a16="http://schemas.microsoft.com/office/drawing/2014/main" id="{DC367B4F-8764-48A7-9B54-80260BC1B4D4}"/>
               </a:ext>
             </a:extLst>
           </p:cNvPr>
@@ -19802,7 +18943,7 @@
           <p:cNvPr id="12" name="">
             <a:extLst xmlns:a="http://schemas.openxmlformats.org/drawingml/2006/main">
               <a:ext uri="{FF2B5EF4-FFF2-40B4-BE49-F238E27FC236}">
-                <a16:creationId xmlns:a16="http://schemas.microsoft.com/office/drawing/2014/main" id="{FCC58095-FEAA-4E40-9CFD-C4E975EEB26C}"/>
+                <a16:creationId xmlns:a16="http://schemas.microsoft.com/office/drawing/2014/main" id="{4B0D975F-024C-4152-ADE1-756FD979E5A1}"/>
               </a:ext>
             </a:extLst>
           </p:cNvPr>
@@ -19852,7 +18993,7 @@
           <p:cNvPr id="13" name="">
             <a:extLst xmlns:a="http://schemas.openxmlformats.org/drawingml/2006/main">
               <a:ext uri="{FF2B5EF4-FFF2-40B4-BE49-F238E27FC236}">
-                <a16:creationId xmlns:a16="http://schemas.microsoft.com/office/drawing/2014/main" id="{5BB66034-8C53-4139-80B4-927F4CA47644}"/>
+                <a16:creationId xmlns:a16="http://schemas.microsoft.com/office/drawing/2014/main" id="{18DBA795-11ED-49F6-BB44-19FE85CA3289}"/>
               </a:ext>
             </a:extLst>
           </p:cNvPr>
@@ -19883,7 +19024,7 @@
           <p:cNvPr id="14" name="">
             <a:extLst xmlns:a="http://schemas.openxmlformats.org/drawingml/2006/main">
               <a:ext uri="{FF2B5EF4-FFF2-40B4-BE49-F238E27FC236}">
-                <a16:creationId xmlns:a16="http://schemas.microsoft.com/office/drawing/2014/main" id="{374B9071-A133-4E7E-800A-308550604C53}"/>
+                <a16:creationId xmlns:a16="http://schemas.microsoft.com/office/drawing/2014/main" id="{6D0DCAD7-3EBD-4914-B093-B3AE6EB3C908}"/>
               </a:ext>
             </a:extLst>
           </p:cNvPr>
@@ -19933,7 +19074,7 @@
           <p:cNvPr id="15" name="">
             <a:extLst xmlns:a="http://schemas.openxmlformats.org/drawingml/2006/main">
               <a:ext uri="{FF2B5EF4-FFF2-40B4-BE49-F238E27FC236}">
-                <a16:creationId xmlns:a16="http://schemas.microsoft.com/office/drawing/2014/main" id="{62E0F4F2-B899-4164-B96F-963644D5EFC8}"/>
+                <a16:creationId xmlns:a16="http://schemas.microsoft.com/office/drawing/2014/main" id="{FBE98967-2937-43EB-AEE8-6F32725C619C}"/>
               </a:ext>
             </a:extLst>
           </p:cNvPr>
@@ -19983,7 +19124,7 @@
           <p:cNvPr id="16" name="">
             <a:extLst xmlns:a="http://schemas.openxmlformats.org/drawingml/2006/main">
               <a:ext uri="{FF2B5EF4-FFF2-40B4-BE49-F238E27FC236}">
-                <a16:creationId xmlns:a16="http://schemas.microsoft.com/office/drawing/2014/main" id="{1EA4FBD0-B21B-4C0E-BC1F-F562FCFC6847}"/>
+                <a16:creationId xmlns:a16="http://schemas.microsoft.com/office/drawing/2014/main" id="{9ACC8FFA-BBCB-4236-8CCB-E6C14C04CA8B}"/>
               </a:ext>
             </a:extLst>
           </p:cNvPr>
@@ -20033,7 +19174,7 @@
           <p:cNvPr id="17" name="">
             <a:extLst xmlns:a="http://schemas.openxmlformats.org/drawingml/2006/main">
               <a:ext uri="{FF2B5EF4-FFF2-40B4-BE49-F238E27FC236}">
-                <a16:creationId xmlns:a16="http://schemas.microsoft.com/office/drawing/2014/main" id="{BA984B40-FCC8-4886-8110-ACDDD7F709B8}"/>
+                <a16:creationId xmlns:a16="http://schemas.microsoft.com/office/drawing/2014/main" id="{27888B86-EC68-4D6F-B200-4E5EA258BAB8}"/>
               </a:ext>
             </a:extLst>
           </p:cNvPr>
@@ -20064,7 +19205,7 @@
           <p:cNvPr id="18" name="">
             <a:extLst xmlns:a="http://schemas.openxmlformats.org/drawingml/2006/main">
               <a:ext uri="{FF2B5EF4-FFF2-40B4-BE49-F238E27FC236}">
-                <a16:creationId xmlns:a16="http://schemas.microsoft.com/office/drawing/2014/main" id="{10D0895C-7EE5-42B4-A403-2233603CC7FD}"/>
+                <a16:creationId xmlns:a16="http://schemas.microsoft.com/office/drawing/2014/main" id="{5DD701C6-D4BE-455F-99C8-C32201E846E6}"/>
               </a:ext>
             </a:extLst>
           </p:cNvPr>
@@ -20114,7 +19255,7 @@
           <p:cNvPr id="19" name="">
             <a:extLst xmlns:a="http://schemas.openxmlformats.org/drawingml/2006/main">
               <a:ext uri="{FF2B5EF4-FFF2-40B4-BE49-F238E27FC236}">
-                <a16:creationId xmlns:a16="http://schemas.microsoft.com/office/drawing/2014/main" id="{D2E10035-4E28-407C-B051-75908DEA5BF8}"/>
+                <a16:creationId xmlns:a16="http://schemas.microsoft.com/office/drawing/2014/main" id="{B7752563-89A1-4D98-BA94-075AE8B703D3}"/>
               </a:ext>
             </a:extLst>
           </p:cNvPr>
@@ -20164,7 +19305,7 @@
           <p:cNvPr id="20" name="">
             <a:extLst xmlns:a="http://schemas.openxmlformats.org/drawingml/2006/main">
               <a:ext uri="{FF2B5EF4-FFF2-40B4-BE49-F238E27FC236}">
-                <a16:creationId xmlns:a16="http://schemas.microsoft.com/office/drawing/2014/main" id="{04926CD1-7090-451F-A7FA-61BC06FB26DF}"/>
+                <a16:creationId xmlns:a16="http://schemas.microsoft.com/office/drawing/2014/main" id="{361D8987-27F8-4EEC-A686-998BC891F2D3}"/>
               </a:ext>
             </a:extLst>
           </p:cNvPr>
@@ -20214,7 +19355,7 @@
           <p:cNvPr id="21" name="">
             <a:extLst xmlns:a="http://schemas.openxmlformats.org/drawingml/2006/main">
               <a:ext uri="{FF2B5EF4-FFF2-40B4-BE49-F238E27FC236}">
-                <a16:creationId xmlns:a16="http://schemas.microsoft.com/office/drawing/2014/main" id="{24FFC9BF-2648-4052-8889-83667437A62D}"/>
+                <a16:creationId xmlns:a16="http://schemas.microsoft.com/office/drawing/2014/main" id="{9BDCE8C2-687C-4399-9489-60F15E4AA3CE}"/>
               </a:ext>
             </a:extLst>
           </p:cNvPr>
@@ -20245,7 +19386,7 @@
           <p:cNvPr id="22" name="">
             <a:extLst xmlns:a="http://schemas.openxmlformats.org/drawingml/2006/main">
               <a:ext uri="{FF2B5EF4-FFF2-40B4-BE49-F238E27FC236}">
-                <a16:creationId xmlns:a16="http://schemas.microsoft.com/office/drawing/2014/main" id="{CE1694A3-C42A-45CE-AED1-6578DC1DE9CC}"/>
+                <a16:creationId xmlns:a16="http://schemas.microsoft.com/office/drawing/2014/main" id="{7CC40D6B-A80C-4DBB-8507-E7002CE40EC4}"/>
               </a:ext>
             </a:extLst>
           </p:cNvPr>
@@ -20295,7 +19436,7 @@
           <p:cNvPr id="23" name="">
             <a:extLst xmlns:a="http://schemas.openxmlformats.org/drawingml/2006/main">
               <a:ext uri="{FF2B5EF4-FFF2-40B4-BE49-F238E27FC236}">
-                <a16:creationId xmlns:a16="http://schemas.microsoft.com/office/drawing/2014/main" id="{7053F569-203A-40A7-802B-BE194A04EEAC}"/>
+                <a16:creationId xmlns:a16="http://schemas.microsoft.com/office/drawing/2014/main" id="{228C47BE-8C41-47AD-89CC-C6C95459CAD5}"/>
               </a:ext>
             </a:extLst>
           </p:cNvPr>
@@ -20345,7 +19486,7 @@
           <p:cNvPr id="24" name="">
             <a:extLst xmlns:a="http://schemas.openxmlformats.org/drawingml/2006/main">
               <a:ext uri="{FF2B5EF4-FFF2-40B4-BE49-F238E27FC236}">
-                <a16:creationId xmlns:a16="http://schemas.microsoft.com/office/drawing/2014/main" id="{5D99A0BC-16EE-4AA4-AB0E-43C15CBCE0D9}"/>
+                <a16:creationId xmlns:a16="http://schemas.microsoft.com/office/drawing/2014/main" id="{0D88F323-C301-4B4F-8CF0-EA7C66ED3ED1}"/>
               </a:ext>
             </a:extLst>
           </p:cNvPr>
@@ -20395,7 +19536,7 @@
           <p:cNvPr id="25" name="">
             <a:extLst xmlns:a="http://schemas.openxmlformats.org/drawingml/2006/main">
               <a:ext uri="{FF2B5EF4-FFF2-40B4-BE49-F238E27FC236}">
-                <a16:creationId xmlns:a16="http://schemas.microsoft.com/office/drawing/2014/main" id="{DBC74DFF-FF9C-4828-B138-0D49452D2A6B}"/>
+                <a16:creationId xmlns:a16="http://schemas.microsoft.com/office/drawing/2014/main" id="{EC09321E-16A7-4C6E-875A-773CEBC204AD}"/>
               </a:ext>
             </a:extLst>
           </p:cNvPr>
@@ -20426,7 +19567,7 @@
           <p:cNvPr id="26" name="">
             <a:extLst xmlns:a="http://schemas.openxmlformats.org/drawingml/2006/main">
               <a:ext uri="{FF2B5EF4-FFF2-40B4-BE49-F238E27FC236}">
-                <a16:creationId xmlns:a16="http://schemas.microsoft.com/office/drawing/2014/main" id="{012DF334-BBB0-48FB-B0D4-D4735323E04F}"/>
+                <a16:creationId xmlns:a16="http://schemas.microsoft.com/office/drawing/2014/main" id="{39328AEE-2B66-4902-8A2E-F28973031CF9}"/>
               </a:ext>
             </a:extLst>
           </p:cNvPr>
@@ -20476,7 +19617,7 @@
           <p:cNvPr id="27" name="">
             <a:extLst xmlns:a="http://schemas.openxmlformats.org/drawingml/2006/main">
               <a:ext uri="{FF2B5EF4-FFF2-40B4-BE49-F238E27FC236}">
-                <a16:creationId xmlns:a16="http://schemas.microsoft.com/office/drawing/2014/main" id="{CAF021AC-7954-491A-A22B-2374215A1F11}"/>
+                <a16:creationId xmlns:a16="http://schemas.microsoft.com/office/drawing/2014/main" id="{DB656A6F-BAD2-4324-B600-0A8B27D09DEE}"/>
               </a:ext>
             </a:extLst>
           </p:cNvPr>
@@ -20526,7 +19667,7 @@
           <p:cNvPr id="28" name="">
             <a:extLst xmlns:a="http://schemas.openxmlformats.org/drawingml/2006/main">
               <a:ext uri="{FF2B5EF4-FFF2-40B4-BE49-F238E27FC236}">
-                <a16:creationId xmlns:a16="http://schemas.microsoft.com/office/drawing/2014/main" id="{F0A77E7F-8DBA-4DD5-A24C-91E2FDEF0F8A}"/>
+                <a16:creationId xmlns:a16="http://schemas.microsoft.com/office/drawing/2014/main" id="{3E3BC25F-2603-465A-B523-E031E8E8DE45}"/>
               </a:ext>
             </a:extLst>
           </p:cNvPr>
@@ -20576,7 +19717,7 @@
           <p:cNvPr id="29" name="">
             <a:extLst xmlns:a="http://schemas.openxmlformats.org/drawingml/2006/main">
               <a:ext uri="{FF2B5EF4-FFF2-40B4-BE49-F238E27FC236}">
-                <a16:creationId xmlns:a16="http://schemas.microsoft.com/office/drawing/2014/main" id="{94AE189A-82D5-45C4-B4C5-C273EE1449BA}"/>
+                <a16:creationId xmlns:a16="http://schemas.microsoft.com/office/drawing/2014/main" id="{7E7D5E58-2DFD-4D08-AEF9-95F57C843AD9}"/>
               </a:ext>
             </a:extLst>
           </p:cNvPr>
@@ -20607,7 +19748,7 @@
           <p:cNvPr id="30" name="">
             <a:extLst xmlns:a="http://schemas.openxmlformats.org/drawingml/2006/main">
               <a:ext uri="{FF2B5EF4-FFF2-40B4-BE49-F238E27FC236}">
-                <a16:creationId xmlns:a16="http://schemas.microsoft.com/office/drawing/2014/main" id="{2554C5BA-B850-4416-8716-4C8CF0CD5904}"/>
+                <a16:creationId xmlns:a16="http://schemas.microsoft.com/office/drawing/2014/main" id="{B9552D65-7EB7-407A-B02A-EEB11B991736}"/>
               </a:ext>
             </a:extLst>
           </p:cNvPr>
@@ -20657,7 +19798,7 @@
           <p:cNvPr id="31" name="">
             <a:extLst xmlns:a="http://schemas.openxmlformats.org/drawingml/2006/main">
               <a:ext uri="{FF2B5EF4-FFF2-40B4-BE49-F238E27FC236}">
-                <a16:creationId xmlns:a16="http://schemas.microsoft.com/office/drawing/2014/main" id="{55E38E3E-8D54-44B2-8D90-8FD8488DD244}"/>
+                <a16:creationId xmlns:a16="http://schemas.microsoft.com/office/drawing/2014/main" id="{55D815E0-A084-4DF1-945D-3E71E97ABCC5}"/>
               </a:ext>
             </a:extLst>
           </p:cNvPr>
@@ -20707,7 +19848,7 @@
           <p:cNvPr id="32" name="">
             <a:extLst xmlns:a="http://schemas.openxmlformats.org/drawingml/2006/main">
               <a:ext uri="{FF2B5EF4-FFF2-40B4-BE49-F238E27FC236}">
-                <a16:creationId xmlns:a16="http://schemas.microsoft.com/office/drawing/2014/main" id="{DF2E21A4-7CE8-4641-BBAA-9B5FE1083FEB}"/>
+                <a16:creationId xmlns:a16="http://schemas.microsoft.com/office/drawing/2014/main" id="{372E1570-465A-452B-B220-6BB2EB3F21E1}"/>
               </a:ext>
             </a:extLst>
           </p:cNvPr>
@@ -20757,7 +19898,7 @@
           <p:cNvPr id="33" name="">
             <a:extLst xmlns:a="http://schemas.openxmlformats.org/drawingml/2006/main">
               <a:ext uri="{FF2B5EF4-FFF2-40B4-BE49-F238E27FC236}">
-                <a16:creationId xmlns:a16="http://schemas.microsoft.com/office/drawing/2014/main" id="{36CCA4C9-1C2E-4709-BFDD-B253F5ABC6F6}"/>
+                <a16:creationId xmlns:a16="http://schemas.microsoft.com/office/drawing/2014/main" id="{8A691327-224F-4CAE-9997-52F06C460564}"/>
               </a:ext>
             </a:extLst>
           </p:cNvPr>
@@ -20805,7 +19946,7 @@
     </p:spTree>
     <p:extLst>
       <p:ext uri="{BB962C8B-B14F-4D97-AF65-F5344CB8AC3E}">
-        <p14:creationId xmlns:p14="http://schemas.microsoft.com/office/powerpoint/2010/main" val="546225194"/>
+        <p14:creationId xmlns:p14="http://schemas.microsoft.com/office/powerpoint/2010/main" val="605280646"/>
       </p:ext>
     </p:extLst>
   </p:cSld>
@@ -20836,7 +19977,7 @@
           <p:cNvPr id="23" name="">
             <a:extLst xmlns:a="http://schemas.openxmlformats.org/drawingml/2006/main">
               <a:ext uri="{FF2B5EF4-FFF2-40B4-BE49-F238E27FC236}">
-                <a16:creationId xmlns:a16="http://schemas.microsoft.com/office/drawing/2014/main" id="{C113DC7C-B054-4B76-A949-BB917E777D98}"/>
+                <a16:creationId xmlns:a16="http://schemas.microsoft.com/office/drawing/2014/main" id="{D4A32DF8-8579-463C-BBF8-F7796B0361ED}"/>
               </a:ext>
             </a:extLst>
           </p:cNvPr>
@@ -20869,7 +20010,7 @@
           <p:cNvPr id="2" name="">
             <a:extLst xmlns:a="http://schemas.openxmlformats.org/drawingml/2006/main">
               <a:ext uri="{FF2B5EF4-FFF2-40B4-BE49-F238E27FC236}">
-                <a16:creationId xmlns:a16="http://schemas.microsoft.com/office/drawing/2014/main" id="{C98DECDC-07C9-4675-9BA5-32C9F4C9A7D0}"/>
+                <a16:creationId xmlns:a16="http://schemas.microsoft.com/office/drawing/2014/main" id="{CE0D8097-15A0-46C9-B9A8-C2B790EF9A51}"/>
               </a:ext>
             </a:extLst>
           </p:cNvPr>
@@ -20919,7 +20060,7 @@
           <p:cNvPr id="3" name="">
             <a:extLst xmlns:a="http://schemas.openxmlformats.org/drawingml/2006/main">
               <a:ext uri="{FF2B5EF4-FFF2-40B4-BE49-F238E27FC236}">
-                <a16:creationId xmlns:a16="http://schemas.microsoft.com/office/drawing/2014/main" id="{BAA5EB91-F13A-43E3-80B7-11B75A6C0484}"/>
+                <a16:creationId xmlns:a16="http://schemas.microsoft.com/office/drawing/2014/main" id="{E5932182-B146-42A4-B8BF-63D08F5E9132}"/>
               </a:ext>
             </a:extLst>
           </p:cNvPr>
@@ -20969,7 +20110,7 @@
           <p:cNvPr id="4" name="">
             <a:extLst xmlns:a="http://schemas.openxmlformats.org/drawingml/2006/main">
               <a:ext uri="{FF2B5EF4-FFF2-40B4-BE49-F238E27FC236}">
-                <a16:creationId xmlns:a16="http://schemas.microsoft.com/office/drawing/2014/main" id="{5CA6280D-4673-4D01-95E6-24A5A4438464}"/>
+                <a16:creationId xmlns:a16="http://schemas.microsoft.com/office/drawing/2014/main" id="{16957BEC-51A0-4B11-8C7D-3F0F4A69D2DC}"/>
               </a:ext>
             </a:extLst>
           </p:cNvPr>
@@ -21019,7 +20160,7 @@
           <p:cNvPr id="5" name="">
             <a:extLst xmlns:a="http://schemas.openxmlformats.org/drawingml/2006/main">
               <a:ext uri="{FF2B5EF4-FFF2-40B4-BE49-F238E27FC236}">
-                <a16:creationId xmlns:a16="http://schemas.microsoft.com/office/drawing/2014/main" id="{83CFE61E-84E3-4F1C-8E0A-F7C139DB04E8}"/>
+                <a16:creationId xmlns:a16="http://schemas.microsoft.com/office/drawing/2014/main" id="{8B9B49BB-7B68-4511-A87E-19ADC71E38D7}"/>
               </a:ext>
             </a:extLst>
           </p:cNvPr>
@@ -21050,7 +20191,7 @@
           <p:cNvPr id="6" name="">
             <a:extLst xmlns:a="http://schemas.openxmlformats.org/drawingml/2006/main">
               <a:ext uri="{FF2B5EF4-FFF2-40B4-BE49-F238E27FC236}">
-                <a16:creationId xmlns:a16="http://schemas.microsoft.com/office/drawing/2014/main" id="{4E9FDB4F-F376-45B3-AF0A-3AC944CCED1B}"/>
+                <a16:creationId xmlns:a16="http://schemas.microsoft.com/office/drawing/2014/main" id="{BEB732FC-3EEC-4A51-955D-AFD569A93355}"/>
               </a:ext>
             </a:extLst>
           </p:cNvPr>
@@ -21100,7 +20241,7 @@
           <p:cNvPr id="7" name="">
             <a:extLst xmlns:a="http://schemas.openxmlformats.org/drawingml/2006/main">
               <a:ext uri="{FF2B5EF4-FFF2-40B4-BE49-F238E27FC236}">
-                <a16:creationId xmlns:a16="http://schemas.microsoft.com/office/drawing/2014/main" id="{E9890CB3-493B-4A1E-8DBC-7D9701AD3577}"/>
+                <a16:creationId xmlns:a16="http://schemas.microsoft.com/office/drawing/2014/main" id="{0815DBB2-5043-4BD4-86B3-C3C19B7337CD}"/>
               </a:ext>
             </a:extLst>
           </p:cNvPr>
@@ -21150,7 +20291,7 @@
           <p:cNvPr id="8" name="">
             <a:extLst xmlns:a="http://schemas.openxmlformats.org/drawingml/2006/main">
               <a:ext uri="{FF2B5EF4-FFF2-40B4-BE49-F238E27FC236}">
-                <a16:creationId xmlns:a16="http://schemas.microsoft.com/office/drawing/2014/main" id="{91CC92AC-C279-4716-A8E5-2423F8A98A5D}"/>
+                <a16:creationId xmlns:a16="http://schemas.microsoft.com/office/drawing/2014/main" id="{DAF4E3ED-ABC9-49BB-844A-751F346939FD}"/>
               </a:ext>
             </a:extLst>
           </p:cNvPr>
@@ -21185,7 +20326,7 @@
           <p:cNvPr id="9" name="">
             <a:extLst xmlns:a="http://schemas.openxmlformats.org/drawingml/2006/main">
               <a:ext uri="{FF2B5EF4-FFF2-40B4-BE49-F238E27FC236}">
-                <a16:creationId xmlns:a16="http://schemas.microsoft.com/office/drawing/2014/main" id="{7BA68D42-DBDB-4B55-90B1-72476671F174}"/>
+                <a16:creationId xmlns:a16="http://schemas.microsoft.com/office/drawing/2014/main" id="{5602C4E7-A10C-4436-A76A-C6C4279A7ACC}"/>
               </a:ext>
             </a:extLst>
           </p:cNvPr>
@@ -21218,7 +20359,7 @@
           <p:cNvPr id="10" name="">
             <a:extLst xmlns:a="http://schemas.openxmlformats.org/drawingml/2006/main">
               <a:ext uri="{FF2B5EF4-FFF2-40B4-BE49-F238E27FC236}">
-                <a16:creationId xmlns:a16="http://schemas.microsoft.com/office/drawing/2014/main" id="{D9520754-FADC-4C15-98A3-D440051B3AB3}"/>
+                <a16:creationId xmlns:a16="http://schemas.microsoft.com/office/drawing/2014/main" id="{90DBC5F0-DAC2-4298-89C8-FEBCA40C343D}"/>
               </a:ext>
             </a:extLst>
           </p:cNvPr>
@@ -21249,7 +20390,7 @@
           <p:cNvPr id="11" name="">
             <a:extLst xmlns:a="http://schemas.openxmlformats.org/drawingml/2006/main">
               <a:ext uri="{FF2B5EF4-FFF2-40B4-BE49-F238E27FC236}">
-                <a16:creationId xmlns:a16="http://schemas.microsoft.com/office/drawing/2014/main" id="{0171CEF7-E842-4DAC-BE86-8AE6F667F8F3}"/>
+                <a16:creationId xmlns:a16="http://schemas.microsoft.com/office/drawing/2014/main" id="{AA038FB0-66E5-475E-B923-4241B925259D}"/>
               </a:ext>
             </a:extLst>
           </p:cNvPr>
@@ -21280,7 +20421,7 @@
           <p:cNvPr id="12" name="">
             <a:extLst xmlns:a="http://schemas.openxmlformats.org/drawingml/2006/main">
               <a:ext uri="{FF2B5EF4-FFF2-40B4-BE49-F238E27FC236}">
-                <a16:creationId xmlns:a16="http://schemas.microsoft.com/office/drawing/2014/main" id="{9463C155-2343-4709-A2C1-3A781FC8B545}"/>
+                <a16:creationId xmlns:a16="http://schemas.microsoft.com/office/drawing/2014/main" id="{EC7F2BB9-25D8-4A03-8927-EBBD7AF11C7F}"/>
               </a:ext>
             </a:extLst>
           </p:cNvPr>
@@ -21311,7 +20452,7 @@
           <p:cNvPr id="13" name="">
             <a:extLst xmlns:a="http://schemas.openxmlformats.org/drawingml/2006/main">
               <a:ext uri="{FF2B5EF4-FFF2-40B4-BE49-F238E27FC236}">
-                <a16:creationId xmlns:a16="http://schemas.microsoft.com/office/drawing/2014/main" id="{A6342255-0D9D-4BD5-B963-5FA3B2A50F7A}"/>
+                <a16:creationId xmlns:a16="http://schemas.microsoft.com/office/drawing/2014/main" id="{71709110-3302-44AA-8AF6-43CBA4B4F27B}"/>
               </a:ext>
             </a:extLst>
           </p:cNvPr>
@@ -21355,11 +20496,6 @@
             </a:r>
           </a:p>
           <a:p xmlns:a="http://schemas.openxmlformats.org/drawingml/2006/main">
-            <a:r>
-              <a:t/>
-            </a:r>
-          </a:p>
-          <a:p xmlns:a="http://schemas.openxmlformats.org/drawingml/2006/main">
             <a:pPr algn="l">
               <a:defRPr sz="1200" b="0" i="0">
                 <a:solidFill>
@@ -21373,7 +20509,12 @@
                   <a:srgbClr val="EAF2FF"/>
                 </a:solidFill>
               </a:rPr>
-              <a:t>root_agent = Agent(</a:t>
+              <a:t>from adk_voice_workshop.config import text_model</a:t>
+            </a:r>
+          </a:p>
+          <a:p xmlns:a="http://schemas.openxmlformats.org/drawingml/2006/main">
+            <a:r>
+              <a:t/>
             </a:r>
           </a:p>
           <a:p xmlns:a="http://schemas.openxmlformats.org/drawingml/2006/main">
@@ -21390,7 +20531,7 @@
                   <a:srgbClr val="EAF2FF"/>
                 </a:solidFill>
               </a:rPr>
-              <a:t>    name="room_agent",</a:t>
+              <a:t>root_agent = Agent(</a:t>
             </a:r>
           </a:p>
           <a:p xmlns:a="http://schemas.openxmlformats.org/drawingml/2006/main">
@@ -21407,7 +20548,7 @@
                   <a:srgbClr val="EAF2FF"/>
                 </a:solidFill>
               </a:rPr>
-              <a:t>    model=LIVE_MODEL,</a:t>
+              <a:t>    name="room_agent",</a:t>
             </a:r>
           </a:p>
           <a:p xmlns:a="http://schemas.openxmlformats.org/drawingml/2006/main">
@@ -21424,7 +20565,7 @@
                   <a:srgbClr val="EAF2FF"/>
                 </a:solidFill>
               </a:rPr>
-              <a:t>    instruction="Help people find a room.",</a:t>
+              <a:t>    model=text_model(),</a:t>
             </a:r>
           </a:p>
           <a:p xmlns:a="http://schemas.openxmlformats.org/drawingml/2006/main">
@@ -21441,6 +20582,23 @@
                   <a:srgbClr val="EAF2FF"/>
                 </a:solidFill>
               </a:rPr>
+              <a:t>    instruction="Help people find a room.",</a:t>
+            </a:r>
+          </a:p>
+          <a:p xmlns:a="http://schemas.openxmlformats.org/drawingml/2006/main">
+            <a:pPr algn="l">
+              <a:defRPr sz="1200" b="0" i="0">
+                <a:solidFill>
+                  <a:srgbClr val="EAF2FF"/>
+                </a:solidFill>
+              </a:defRPr>
+            </a:pPr>
+            <a:r>
+              <a:rPr sz="1200" b="0" i="0">
+                <a:solidFill>
+                  <a:srgbClr val="EAF2FF"/>
+                </a:solidFill>
+              </a:rPr>
               <a:t>)</a:t>
             </a:r>
           </a:p>
@@ -21451,7 +20609,7 @@
           <p:cNvPr id="14" name="">
             <a:extLst xmlns:a="http://schemas.openxmlformats.org/drawingml/2006/main">
               <a:ext uri="{FF2B5EF4-FFF2-40B4-BE49-F238E27FC236}">
-                <a16:creationId xmlns:a16="http://schemas.microsoft.com/office/drawing/2014/main" id="{BC84EF0B-46CE-4F26-A29C-6F7F9E99175D}"/>
+                <a16:creationId xmlns:a16="http://schemas.microsoft.com/office/drawing/2014/main" id="{E98A7437-706F-42A4-8074-D6820A547B9E}"/>
               </a:ext>
             </a:extLst>
           </p:cNvPr>
@@ -21501,7 +20659,7 @@
           <p:cNvPr id="15" name="">
             <a:extLst xmlns:a="http://schemas.openxmlformats.org/drawingml/2006/main">
               <a:ext uri="{FF2B5EF4-FFF2-40B4-BE49-F238E27FC236}">
-                <a16:creationId xmlns:a16="http://schemas.microsoft.com/office/drawing/2014/main" id="{C47D609E-CA4F-445B-ABA0-043058047A38}"/>
+                <a16:creationId xmlns:a16="http://schemas.microsoft.com/office/drawing/2014/main" id="{5F95FD76-E6B1-4D09-B1DB-6216F92D4A09}"/>
               </a:ext>
             </a:extLst>
           </p:cNvPr>
@@ -21551,7 +20709,7 @@
           <p:cNvPr id="16" name="">
             <a:extLst xmlns:a="http://schemas.openxmlformats.org/drawingml/2006/main">
               <a:ext uri="{FF2B5EF4-FFF2-40B4-BE49-F238E27FC236}">
-                <a16:creationId xmlns:a16="http://schemas.microsoft.com/office/drawing/2014/main" id="{871D5E47-6113-4B8C-A540-15AAA7C4E57A}"/>
+                <a16:creationId xmlns:a16="http://schemas.microsoft.com/office/drawing/2014/main" id="{AB095EF4-14C3-48C6-87CE-A01D2D929467}"/>
               </a:ext>
             </a:extLst>
           </p:cNvPr>
@@ -21601,7 +20759,7 @@
           <p:cNvPr id="17" name="">
             <a:extLst xmlns:a="http://schemas.openxmlformats.org/drawingml/2006/main">
               <a:ext uri="{FF2B5EF4-FFF2-40B4-BE49-F238E27FC236}">
-                <a16:creationId xmlns:a16="http://schemas.microsoft.com/office/drawing/2014/main" id="{34977859-5AE9-412E-92BE-FA95A8A93957}"/>
+                <a16:creationId xmlns:a16="http://schemas.microsoft.com/office/drawing/2014/main" id="{E5DA404D-E54A-4E89-A339-EE98C8BFC3C8}"/>
               </a:ext>
             </a:extLst>
           </p:cNvPr>
@@ -21651,7 +20809,7 @@
           <p:cNvPr id="18" name="">
             <a:extLst xmlns:a="http://schemas.openxmlformats.org/drawingml/2006/main">
               <a:ext uri="{FF2B5EF4-FFF2-40B4-BE49-F238E27FC236}">
-                <a16:creationId xmlns:a16="http://schemas.microsoft.com/office/drawing/2014/main" id="{C8298DE8-6864-4A9F-A3D6-1790D1C40B92}"/>
+                <a16:creationId xmlns:a16="http://schemas.microsoft.com/office/drawing/2014/main" id="{C86FD58B-75D0-403D-8CB9-144DA45345D9}"/>
               </a:ext>
             </a:extLst>
           </p:cNvPr>
@@ -21691,7 +20849,7 @@
                   <a:srgbClr val="EAF2FF"/>
                 </a:solidFill>
               </a:rPr>
-              <a:t>Live API capable</a:t>
+              <a:t>text model first</a:t>
             </a:r>
           </a:p>
         </p:txBody>
@@ -21701,7 +20859,7 @@
           <p:cNvPr id="19" name="">
             <a:extLst xmlns:a="http://schemas.openxmlformats.org/drawingml/2006/main">
               <a:ext uri="{FF2B5EF4-FFF2-40B4-BE49-F238E27FC236}">
-                <a16:creationId xmlns:a16="http://schemas.microsoft.com/office/drawing/2014/main" id="{E5CB9E46-4BBD-4583-9868-EC49257A1B8A}"/>
+                <a16:creationId xmlns:a16="http://schemas.microsoft.com/office/drawing/2014/main" id="{6C0AA9E0-A136-45AB-BCB3-B3B2BA82AC20}"/>
               </a:ext>
             </a:extLst>
           </p:cNvPr>
@@ -21751,7 +20909,7 @@
           <p:cNvPr id="20" name="">
             <a:extLst xmlns:a="http://schemas.openxmlformats.org/drawingml/2006/main">
               <a:ext uri="{FF2B5EF4-FFF2-40B4-BE49-F238E27FC236}">
-                <a16:creationId xmlns:a16="http://schemas.microsoft.com/office/drawing/2014/main" id="{8C0DD364-491D-4F43-8711-D574C15AEF19}"/>
+                <a16:creationId xmlns:a16="http://schemas.microsoft.com/office/drawing/2014/main" id="{B03F7ACC-948F-4EF9-B2D0-CBAD19A2FB09}"/>
               </a:ext>
             </a:extLst>
           </p:cNvPr>
@@ -21801,7 +20959,7 @@
           <p:cNvPr id="21" name="">
             <a:extLst xmlns:a="http://schemas.openxmlformats.org/drawingml/2006/main">
               <a:ext uri="{FF2B5EF4-FFF2-40B4-BE49-F238E27FC236}">
-                <a16:creationId xmlns:a16="http://schemas.microsoft.com/office/drawing/2014/main" id="{65079CBE-CAD1-482C-80C7-0AADB329E6E2}"/>
+                <a16:creationId xmlns:a16="http://schemas.microsoft.com/office/drawing/2014/main" id="{9227B3B3-92A4-45B9-A535-04F949F0BA19}"/>
               </a:ext>
             </a:extLst>
           </p:cNvPr>
@@ -21836,7 +20994,7 @@
           <p:cNvPr id="22" name="">
             <a:extLst xmlns:a="http://schemas.openxmlformats.org/drawingml/2006/main">
               <a:ext uri="{FF2B5EF4-FFF2-40B4-BE49-F238E27FC236}">
-                <a16:creationId xmlns:a16="http://schemas.microsoft.com/office/drawing/2014/main" id="{7D838ACE-8ECD-41FB-BAAF-C45AD3544A15}"/>
+                <a16:creationId xmlns:a16="http://schemas.microsoft.com/office/drawing/2014/main" id="{4C393CF1-2F22-457E-9BE2-E382216ACF2E}"/>
               </a:ext>
             </a:extLst>
           </p:cNvPr>
@@ -21884,7 +21042,7 @@
     </p:spTree>
     <p:extLst>
       <p:ext uri="{BB962C8B-B14F-4D97-AF65-F5344CB8AC3E}">
-        <p14:creationId xmlns:p14="http://schemas.microsoft.com/office/powerpoint/2010/main" val="364043099"/>
+        <p14:creationId xmlns:p14="http://schemas.microsoft.com/office/powerpoint/2010/main" val="1687523729"/>
       </p:ext>
     </p:extLst>
   </p:cSld>
@@ -21915,7 +21073,7 @@
           <p:cNvPr id="19" name="">
             <a:extLst xmlns:a="http://schemas.openxmlformats.org/drawingml/2006/main">
               <a:ext uri="{FF2B5EF4-FFF2-40B4-BE49-F238E27FC236}">
-                <a16:creationId xmlns:a16="http://schemas.microsoft.com/office/drawing/2014/main" id="{DCD32166-36BA-4796-9A36-123C55FDCC87}"/>
+                <a16:creationId xmlns:a16="http://schemas.microsoft.com/office/drawing/2014/main" id="{9599BE7C-69AB-477C-B2F2-CA860779BBEF}"/>
               </a:ext>
             </a:extLst>
           </p:cNvPr>
@@ -21948,7 +21106,7 @@
           <p:cNvPr id="2" name="">
             <a:extLst xmlns:a="http://schemas.openxmlformats.org/drawingml/2006/main">
               <a:ext uri="{FF2B5EF4-FFF2-40B4-BE49-F238E27FC236}">
-                <a16:creationId xmlns:a16="http://schemas.microsoft.com/office/drawing/2014/main" id="{487B4D0C-FF44-4117-B592-F1BDFA240CBA}"/>
+                <a16:creationId xmlns:a16="http://schemas.microsoft.com/office/drawing/2014/main" id="{5C5137DD-55C1-416C-85EC-57AA67768228}"/>
               </a:ext>
             </a:extLst>
           </p:cNvPr>
@@ -21998,7 +21156,7 @@
           <p:cNvPr id="3" name="">
             <a:extLst xmlns:a="http://schemas.openxmlformats.org/drawingml/2006/main">
               <a:ext uri="{FF2B5EF4-FFF2-40B4-BE49-F238E27FC236}">
-                <a16:creationId xmlns:a16="http://schemas.microsoft.com/office/drawing/2014/main" id="{05C64247-3811-4BC1-A7E6-108C66428F07}"/>
+                <a16:creationId xmlns:a16="http://schemas.microsoft.com/office/drawing/2014/main" id="{1C71E70E-87C9-4CD8-BE41-48F788258155}"/>
               </a:ext>
             </a:extLst>
           </p:cNvPr>
@@ -22048,7 +21206,7 @@
           <p:cNvPr id="4" name="">
             <a:extLst xmlns:a="http://schemas.openxmlformats.org/drawingml/2006/main">
               <a:ext uri="{FF2B5EF4-FFF2-40B4-BE49-F238E27FC236}">
-                <a16:creationId xmlns:a16="http://schemas.microsoft.com/office/drawing/2014/main" id="{0D685BD5-9497-461B-A738-AD092A8DEA88}"/>
+                <a16:creationId xmlns:a16="http://schemas.microsoft.com/office/drawing/2014/main" id="{F6B0555C-81A1-46B9-8B61-58C8903A476F}"/>
               </a:ext>
             </a:extLst>
           </p:cNvPr>
@@ -22098,7 +21256,7 @@
           <p:cNvPr id="5" name="">
             <a:extLst xmlns:a="http://schemas.openxmlformats.org/drawingml/2006/main">
               <a:ext uri="{FF2B5EF4-FFF2-40B4-BE49-F238E27FC236}">
-                <a16:creationId xmlns:a16="http://schemas.microsoft.com/office/drawing/2014/main" id="{B360E4F3-0295-4795-A50F-575DC2DC3EF0}"/>
+                <a16:creationId xmlns:a16="http://schemas.microsoft.com/office/drawing/2014/main" id="{546110FF-E9D0-4E0F-94B6-5B7645373E07}"/>
               </a:ext>
             </a:extLst>
           </p:cNvPr>
@@ -22129,7 +21287,7 @@
           <p:cNvPr id="6" name="">
             <a:extLst xmlns:a="http://schemas.openxmlformats.org/drawingml/2006/main">
               <a:ext uri="{FF2B5EF4-FFF2-40B4-BE49-F238E27FC236}">
-                <a16:creationId xmlns:a16="http://schemas.microsoft.com/office/drawing/2014/main" id="{0AD8E9A6-04AE-4B8F-89A8-A2115AB46532}"/>
+                <a16:creationId xmlns:a16="http://schemas.microsoft.com/office/drawing/2014/main" id="{CC45C0B5-4DCF-43B0-BA32-2F525AE7BC0A}"/>
               </a:ext>
             </a:extLst>
           </p:cNvPr>
@@ -22179,7 +21337,7 @@
           <p:cNvPr id="7" name="">
             <a:extLst xmlns:a="http://schemas.openxmlformats.org/drawingml/2006/main">
               <a:ext uri="{FF2B5EF4-FFF2-40B4-BE49-F238E27FC236}">
-                <a16:creationId xmlns:a16="http://schemas.microsoft.com/office/drawing/2014/main" id="{F654D674-F500-4C31-8072-340C7FBFB29E}"/>
+                <a16:creationId xmlns:a16="http://schemas.microsoft.com/office/drawing/2014/main" id="{0BCBF2A9-7C88-4DAC-B2FB-4BE94D2EDCA7}"/>
               </a:ext>
             </a:extLst>
           </p:cNvPr>
@@ -22229,7 +21387,7 @@
           <p:cNvPr id="8" name="">
             <a:extLst xmlns:a="http://schemas.openxmlformats.org/drawingml/2006/main">
               <a:ext uri="{FF2B5EF4-FFF2-40B4-BE49-F238E27FC236}">
-                <a16:creationId xmlns:a16="http://schemas.microsoft.com/office/drawing/2014/main" id="{44BA42B6-863D-4B71-A7DD-9C8FBB38D36E}"/>
+                <a16:creationId xmlns:a16="http://schemas.microsoft.com/office/drawing/2014/main" id="{B64773BA-505C-4506-8908-E2B1FAED6405}"/>
               </a:ext>
             </a:extLst>
           </p:cNvPr>
@@ -22279,7 +21437,7 @@
           <p:cNvPr id="9" name="">
             <a:extLst xmlns:a="http://schemas.openxmlformats.org/drawingml/2006/main">
               <a:ext uri="{FF2B5EF4-FFF2-40B4-BE49-F238E27FC236}">
-                <a16:creationId xmlns:a16="http://schemas.microsoft.com/office/drawing/2014/main" id="{102D3872-A2E5-4AE2-82B7-0D79657BEA75}"/>
+                <a16:creationId xmlns:a16="http://schemas.microsoft.com/office/drawing/2014/main" id="{AE2455F8-1C03-4DF3-A885-86A197C7F1B9}"/>
               </a:ext>
             </a:extLst>
           </p:cNvPr>
@@ -22329,7 +21487,7 @@
           <p:cNvPr id="10" name="">
             <a:extLst xmlns:a="http://schemas.openxmlformats.org/drawingml/2006/main">
               <a:ext uri="{FF2B5EF4-FFF2-40B4-BE49-F238E27FC236}">
-                <a16:creationId xmlns:a16="http://schemas.microsoft.com/office/drawing/2014/main" id="{E9CA14A6-2D6F-4209-BE23-3A7FB1A7CD3C}"/>
+                <a16:creationId xmlns:a16="http://schemas.microsoft.com/office/drawing/2014/main" id="{83539976-146C-4651-815F-C97243F090A3}"/>
               </a:ext>
             </a:extLst>
           </p:cNvPr>
@@ -22379,7 +21537,7 @@
           <p:cNvPr id="11" name="">
             <a:extLst xmlns:a="http://schemas.openxmlformats.org/drawingml/2006/main">
               <a:ext uri="{FF2B5EF4-FFF2-40B4-BE49-F238E27FC236}">
-                <a16:creationId xmlns:a16="http://schemas.microsoft.com/office/drawing/2014/main" id="{754BE229-BECE-4F1F-B4E4-4CDB959F3B60}"/>
+                <a16:creationId xmlns:a16="http://schemas.microsoft.com/office/drawing/2014/main" id="{530DD49F-DFDB-440D-A018-8F89184D6C03}"/>
               </a:ext>
             </a:extLst>
           </p:cNvPr>
@@ -22429,7 +21587,7 @@
           <p:cNvPr id="12" name="">
             <a:extLst xmlns:a="http://schemas.openxmlformats.org/drawingml/2006/main">
               <a:ext uri="{FF2B5EF4-FFF2-40B4-BE49-F238E27FC236}">
-                <a16:creationId xmlns:a16="http://schemas.microsoft.com/office/drawing/2014/main" id="{8791142D-2858-4B87-AE47-E51A7E000F75}"/>
+                <a16:creationId xmlns:a16="http://schemas.microsoft.com/office/drawing/2014/main" id="{2176C5FA-A98F-4639-8F1B-045B23A3EF0A}"/>
               </a:ext>
             </a:extLst>
           </p:cNvPr>
@@ -22464,7 +21622,7 @@
           <p:cNvPr id="13" name="">
             <a:extLst xmlns:a="http://schemas.openxmlformats.org/drawingml/2006/main">
               <a:ext uri="{FF2B5EF4-FFF2-40B4-BE49-F238E27FC236}">
-                <a16:creationId xmlns:a16="http://schemas.microsoft.com/office/drawing/2014/main" id="{2C7A6A87-C794-4071-AF81-5F48A6005E3D}"/>
+                <a16:creationId xmlns:a16="http://schemas.microsoft.com/office/drawing/2014/main" id="{D46AF2EA-9FA3-42CD-BC44-62A71E8BA656}"/>
               </a:ext>
             </a:extLst>
           </p:cNvPr>
@@ -22514,7 +21672,7 @@
           <p:cNvPr id="14" name="">
             <a:extLst xmlns:a="http://schemas.openxmlformats.org/drawingml/2006/main">
               <a:ext uri="{FF2B5EF4-FFF2-40B4-BE49-F238E27FC236}">
-                <a16:creationId xmlns:a16="http://schemas.microsoft.com/office/drawing/2014/main" id="{BA8F1401-CA82-441C-B582-FD530F48E3F7}"/>
+                <a16:creationId xmlns:a16="http://schemas.microsoft.com/office/drawing/2014/main" id="{D8B33B95-923E-47B6-A09A-930F023BCEF4}"/>
               </a:ext>
             </a:extLst>
           </p:cNvPr>
@@ -22564,7 +21722,7 @@
           <p:cNvPr id="15" name="">
             <a:extLst xmlns:a="http://schemas.openxmlformats.org/drawingml/2006/main">
               <a:ext uri="{FF2B5EF4-FFF2-40B4-BE49-F238E27FC236}">
-                <a16:creationId xmlns:a16="http://schemas.microsoft.com/office/drawing/2014/main" id="{840A1520-23C6-42DE-9228-63B6C08F9CED}"/>
+                <a16:creationId xmlns:a16="http://schemas.microsoft.com/office/drawing/2014/main" id="{5B749DEA-5F10-4EE0-A4D6-591D0ECC19E6}"/>
               </a:ext>
             </a:extLst>
           </p:cNvPr>
@@ -22614,7 +21772,7 @@
           <p:cNvPr id="16" name="">
             <a:extLst xmlns:a="http://schemas.openxmlformats.org/drawingml/2006/main">
               <a:ext uri="{FF2B5EF4-FFF2-40B4-BE49-F238E27FC236}">
-                <a16:creationId xmlns:a16="http://schemas.microsoft.com/office/drawing/2014/main" id="{3E904051-5C6E-40AC-81CE-A656BC2BD8B8}"/>
+                <a16:creationId xmlns:a16="http://schemas.microsoft.com/office/drawing/2014/main" id="{9371772B-FC67-4A5F-BC5D-4FE167EA680D}"/>
               </a:ext>
             </a:extLst>
           </p:cNvPr>
@@ -22664,7 +21822,7 @@
           <p:cNvPr id="17" name="">
             <a:extLst xmlns:a="http://schemas.openxmlformats.org/drawingml/2006/main">
               <a:ext uri="{FF2B5EF4-FFF2-40B4-BE49-F238E27FC236}">
-                <a16:creationId xmlns:a16="http://schemas.microsoft.com/office/drawing/2014/main" id="{6872461F-7526-4871-8CF0-7E5BF05C03B2}"/>
+                <a16:creationId xmlns:a16="http://schemas.microsoft.com/office/drawing/2014/main" id="{8415ADE8-EC5F-45CA-A9B2-69BAA3C71453}"/>
               </a:ext>
             </a:extLst>
           </p:cNvPr>
@@ -22714,7 +21872,7 @@
           <p:cNvPr id="18" name="">
             <a:extLst xmlns:a="http://schemas.openxmlformats.org/drawingml/2006/main">
               <a:ext uri="{FF2B5EF4-FFF2-40B4-BE49-F238E27FC236}">
-                <a16:creationId xmlns:a16="http://schemas.microsoft.com/office/drawing/2014/main" id="{06779C77-FDE4-4475-9730-FBF16CDFC0F2}"/>
+                <a16:creationId xmlns:a16="http://schemas.microsoft.com/office/drawing/2014/main" id="{6880A4DC-F73B-42DB-8187-FA2A1089DDC2}"/>
               </a:ext>
             </a:extLst>
           </p:cNvPr>
@@ -22762,7 +21920,7 @@
     </p:spTree>
     <p:extLst>
       <p:ext uri="{BB962C8B-B14F-4D97-AF65-F5344CB8AC3E}">
-        <p14:creationId xmlns:p14="http://schemas.microsoft.com/office/powerpoint/2010/main" val="1213311482"/>
+        <p14:creationId xmlns:p14="http://schemas.microsoft.com/office/powerpoint/2010/main" val="711935445"/>
       </p:ext>
     </p:extLst>
   </p:cSld>
@@ -22790,10 +21948,10 @@
       </p:grpSpPr>
       <p:sp>
         <p:nvSpPr>
-          <p:cNvPr id="22" name="">
-            <a:extLst xmlns:a="http://schemas.openxmlformats.org/drawingml/2006/main">
-              <a:ext uri="{FF2B5EF4-FFF2-40B4-BE49-F238E27FC236}">
-                <a16:creationId xmlns:a16="http://schemas.microsoft.com/office/drawing/2014/main" id="{96BBA0D3-14CB-40FC-8FBD-C3452E0019B6}"/>
+          <p:cNvPr id="23" name="">
+            <a:extLst xmlns:a="http://schemas.openxmlformats.org/drawingml/2006/main">
+              <a:ext uri="{FF2B5EF4-FFF2-40B4-BE49-F238E27FC236}">
+                <a16:creationId xmlns:a16="http://schemas.microsoft.com/office/drawing/2014/main" id="{6AD7F6B3-2F7D-4B87-8ED8-ED1CA7A7F55D}"/>
               </a:ext>
             </a:extLst>
           </p:cNvPr>
@@ -22826,7 +21984,7 @@
           <p:cNvPr id="2" name="">
             <a:extLst xmlns:a="http://schemas.openxmlformats.org/drawingml/2006/main">
               <a:ext uri="{FF2B5EF4-FFF2-40B4-BE49-F238E27FC236}">
-                <a16:creationId xmlns:a16="http://schemas.microsoft.com/office/drawing/2014/main" id="{D22BF1ED-DF4A-4F3D-BB88-B1AD0BF2B11E}"/>
+                <a16:creationId xmlns:a16="http://schemas.microsoft.com/office/drawing/2014/main" id="{EB06AF2E-365C-4A3B-9B95-684FF9607C1C}"/>
               </a:ext>
             </a:extLst>
           </p:cNvPr>
@@ -22876,7 +22034,7 @@
           <p:cNvPr id="3" name="">
             <a:extLst xmlns:a="http://schemas.openxmlformats.org/drawingml/2006/main">
               <a:ext uri="{FF2B5EF4-FFF2-40B4-BE49-F238E27FC236}">
-                <a16:creationId xmlns:a16="http://schemas.microsoft.com/office/drawing/2014/main" id="{CEA74B75-9CB0-4CB7-A089-DADAD7E95DC5}"/>
+                <a16:creationId xmlns:a16="http://schemas.microsoft.com/office/drawing/2014/main" id="{2EE5B3AB-47F3-4D39-AA54-06181EE2901C}"/>
               </a:ext>
             </a:extLst>
           </p:cNvPr>
@@ -22916,7 +22074,7 @@
                   <a:srgbClr val="EAF2FF"/>
                 </a:solidFill>
               </a:rPr>
-              <a:t>A clear function becomes an agent capability</a:t>
+              <a:t>A clear function becomes a capability</a:t>
             </a:r>
           </a:p>
         </p:txBody>
@@ -22926,7 +22084,7 @@
           <p:cNvPr id="4" name="">
             <a:extLst xmlns:a="http://schemas.openxmlformats.org/drawingml/2006/main">
               <a:ext uri="{FF2B5EF4-FFF2-40B4-BE49-F238E27FC236}">
-                <a16:creationId xmlns:a16="http://schemas.microsoft.com/office/drawing/2014/main" id="{85B4AAB9-27BC-4044-A887-76C857C717EE}"/>
+                <a16:creationId xmlns:a16="http://schemas.microsoft.com/office/drawing/2014/main" id="{AE15D9A4-A658-42B6-8552-BCC80D5BCF3D}"/>
               </a:ext>
             </a:extLst>
           </p:cNvPr>
@@ -22976,7 +22134,7 @@
           <p:cNvPr id="5" name="">
             <a:extLst xmlns:a="http://schemas.openxmlformats.org/drawingml/2006/main">
               <a:ext uri="{FF2B5EF4-FFF2-40B4-BE49-F238E27FC236}">
-                <a16:creationId xmlns:a16="http://schemas.microsoft.com/office/drawing/2014/main" id="{A4CDA408-CE06-4EF5-9625-D318471E5CC8}"/>
+                <a16:creationId xmlns:a16="http://schemas.microsoft.com/office/drawing/2014/main" id="{BEA09695-2D47-43A7-BEA3-D0F3A54855E2}"/>
               </a:ext>
             </a:extLst>
           </p:cNvPr>
@@ -23007,7 +22165,7 @@
           <p:cNvPr id="6" name="">
             <a:extLst xmlns:a="http://schemas.openxmlformats.org/drawingml/2006/main">
               <a:ext uri="{FF2B5EF4-FFF2-40B4-BE49-F238E27FC236}">
-                <a16:creationId xmlns:a16="http://schemas.microsoft.com/office/drawing/2014/main" id="{072E30AF-57E6-41EF-ADD6-3D2424062AC2}"/>
+                <a16:creationId xmlns:a16="http://schemas.microsoft.com/office/drawing/2014/main" id="{4034C47D-2276-41A3-A36E-B795B6ABA92E}"/>
               </a:ext>
             </a:extLst>
           </p:cNvPr>
@@ -23057,7 +22215,7 @@
           <p:cNvPr id="7" name="">
             <a:extLst xmlns:a="http://schemas.openxmlformats.org/drawingml/2006/main">
               <a:ext uri="{FF2B5EF4-FFF2-40B4-BE49-F238E27FC236}">
-                <a16:creationId xmlns:a16="http://schemas.microsoft.com/office/drawing/2014/main" id="{E708AB7C-BAC7-4CCF-B8DC-8BE686FBC2B6}"/>
+                <a16:creationId xmlns:a16="http://schemas.microsoft.com/office/drawing/2014/main" id="{9722861F-C9E3-4F66-9D82-672EBF520401}"/>
               </a:ext>
             </a:extLst>
           </p:cNvPr>
@@ -23107,7 +22265,7 @@
           <p:cNvPr id="8" name="">
             <a:extLst xmlns:a="http://schemas.openxmlformats.org/drawingml/2006/main">
               <a:ext uri="{FF2B5EF4-FFF2-40B4-BE49-F238E27FC236}">
-                <a16:creationId xmlns:a16="http://schemas.microsoft.com/office/drawing/2014/main" id="{967498F5-BC62-402F-A503-645F72DC5FFC}"/>
+                <a16:creationId xmlns:a16="http://schemas.microsoft.com/office/drawing/2014/main" id="{3E2A198E-7A01-4DB2-8DC7-0B17D38FB12F}"/>
               </a:ext>
             </a:extLst>
           </p:cNvPr>
@@ -23119,11 +22277,11 @@
         <p:spPr>
           <a:xfrm xmlns:a="http://schemas.openxmlformats.org/drawingml/2006/main">
             <a:off x="685800" y="2152650"/>
-            <a:ext cx="7105650" cy="3524250"/>
+            <a:ext cx="5905500" cy="3048000"/>
           </a:xfrm>
           <a:prstGeom xmlns:a="http://schemas.openxmlformats.org/drawingml/2006/main" prst="roundRect">
             <a:avLst>
-              <a:gd name="adj" fmla="val 2162"/>
+              <a:gd name="adj" fmla="val 2500"/>
             </a:avLst>
           </a:prstGeom>
           <a:solidFill xmlns:a="http://schemas.openxmlformats.org/drawingml/2006/main">
@@ -23142,7 +22300,7 @@
           <p:cNvPr id="9" name="">
             <a:extLst xmlns:a="http://schemas.openxmlformats.org/drawingml/2006/main">
               <a:ext uri="{FF2B5EF4-FFF2-40B4-BE49-F238E27FC236}">
-                <a16:creationId xmlns:a16="http://schemas.microsoft.com/office/drawing/2014/main" id="{29E6A7D1-986B-431B-8375-64874DC6A351}"/>
+                <a16:creationId xmlns:a16="http://schemas.microsoft.com/office/drawing/2014/main" id="{0505C95E-9CE0-4694-8C79-58F6D2D34D34}"/>
               </a:ext>
             </a:extLst>
           </p:cNvPr>
@@ -23154,7 +22312,7 @@
         <p:spPr>
           <a:xfrm xmlns:a="http://schemas.openxmlformats.org/drawingml/2006/main">
             <a:off x="685800" y="2152650"/>
-            <a:ext cx="66675" cy="3524250"/>
+            <a:ext cx="66675" cy="3048000"/>
           </a:xfrm>
           <a:prstGeom xmlns:a="http://schemas.openxmlformats.org/drawingml/2006/main" prst="roundRect">
             <a:avLst>
@@ -23175,7 +22333,7 @@
           <p:cNvPr id="10" name="">
             <a:extLst xmlns:a="http://schemas.openxmlformats.org/drawingml/2006/main">
               <a:ext uri="{FF2B5EF4-FFF2-40B4-BE49-F238E27FC236}">
-                <a16:creationId xmlns:a16="http://schemas.microsoft.com/office/drawing/2014/main" id="{E4B3F62E-13C0-482E-94DE-0B3B14877BCA}"/>
+                <a16:creationId xmlns:a16="http://schemas.microsoft.com/office/drawing/2014/main" id="{730A0E84-0CDF-40E0-95F4-47D96810F7B5}"/>
               </a:ext>
             </a:extLst>
           </p:cNvPr>
@@ -23206,7 +22364,7 @@
           <p:cNvPr id="11" name="">
             <a:extLst xmlns:a="http://schemas.openxmlformats.org/drawingml/2006/main">
               <a:ext uri="{FF2B5EF4-FFF2-40B4-BE49-F238E27FC236}">
-                <a16:creationId xmlns:a16="http://schemas.microsoft.com/office/drawing/2014/main" id="{89CCCE43-5B6E-43A1-A243-95429009BA09}"/>
+                <a16:creationId xmlns:a16="http://schemas.microsoft.com/office/drawing/2014/main" id="{C605C8DB-74F1-4165-9A7E-2AF10F772BA8}"/>
               </a:ext>
             </a:extLst>
           </p:cNvPr>
@@ -23237,7 +22395,7 @@
           <p:cNvPr id="12" name="">
             <a:extLst xmlns:a="http://schemas.openxmlformats.org/drawingml/2006/main">
               <a:ext uri="{FF2B5EF4-FFF2-40B4-BE49-F238E27FC236}">
-                <a16:creationId xmlns:a16="http://schemas.microsoft.com/office/drawing/2014/main" id="{CD2382BD-25B6-407E-990A-E0019F6F298E}"/>
+                <a16:creationId xmlns:a16="http://schemas.microsoft.com/office/drawing/2014/main" id="{9733C247-9B5F-439B-A2CF-35A5F035C41F}"/>
               </a:ext>
             </a:extLst>
           </p:cNvPr>
@@ -23268,7 +22426,7 @@
           <p:cNvPr id="13" name="">
             <a:extLst xmlns:a="http://schemas.openxmlformats.org/drawingml/2006/main">
               <a:ext uri="{FF2B5EF4-FFF2-40B4-BE49-F238E27FC236}">
-                <a16:creationId xmlns:a16="http://schemas.microsoft.com/office/drawing/2014/main" id="{657FD397-F709-47BC-A8A1-A332B2B2F0A5}"/>
+                <a16:creationId xmlns:a16="http://schemas.microsoft.com/office/drawing/2014/main" id="{E389BBD6-6DED-4424-8CBC-8117378947B5}"/>
               </a:ext>
             </a:extLst>
           </p:cNvPr>
@@ -23280,7 +22438,7 @@
         <p:spPr>
           <a:xfrm xmlns:a="http://schemas.openxmlformats.org/drawingml/2006/main">
             <a:off x="933450" y="2628900"/>
-            <a:ext cx="6629400" cy="2933700"/>
+            <a:ext cx="5429250" cy="2457450"/>
           </a:xfrm>
           <a:prstGeom xmlns:a="http://schemas.openxmlformats.org/drawingml/2006/main" prst="rect">
             <a:avLst/>
@@ -23308,7 +22466,7 @@
                   <a:srgbClr val="EAF2FF"/>
                 </a:solidFill>
               </a:rPr>
-              <a:t>def find_rooms(after_hour: int) -&gt; list[str]:</a:t>
+              <a:t>def find_rooms(</a:t>
             </a:r>
           </a:p>
           <a:p xmlns:a="http://schemas.openxmlformats.org/drawingml/2006/main">
@@ -23325,7 +22483,7 @@
                   <a:srgbClr val="EAF2FF"/>
                 </a:solidFill>
               </a:rPr>
-              <a:t>    """Return rooms free after the given hour."""</a:t>
+              <a:t>    after_hour: int,</a:t>
             </a:r>
           </a:p>
           <a:p xmlns:a="http://schemas.openxmlformats.org/drawingml/2006/main">
@@ -23342,12 +22500,7 @@
                   <a:srgbClr val="EAF2FF"/>
                 </a:solidFill>
               </a:rPr>
-              <a:t>    return ["Orchid · 3:30", "Atlas · 4:00"]</a:t>
-            </a:r>
-          </a:p>
-          <a:p xmlns:a="http://schemas.openxmlformats.org/drawingml/2006/main">
-            <a:r>
-              <a:t/>
+              <a:t>    minimum_capacity: int = 1,</a:t>
             </a:r>
           </a:p>
           <a:p xmlns:a="http://schemas.openxmlformats.org/drawingml/2006/main">
@@ -23364,7 +22517,7 @@
                   <a:srgbClr val="EAF2FF"/>
                 </a:solidFill>
               </a:rPr>
-              <a:t>root_agent = Agent(</a:t>
+              <a:t>) -&gt; dict:</a:t>
             </a:r>
           </a:p>
           <a:p xmlns:a="http://schemas.openxmlformats.org/drawingml/2006/main">
@@ -23398,7 +22551,7 @@
                   <a:srgbClr val="EAF2FF"/>
                 </a:solidFill>
               </a:rPr>
-              <a:t>    tools=[find_rooms],</a:t>
+              <a:t>    return {</a:t>
             </a:r>
           </a:p>
           <a:p xmlns:a="http://schemas.openxmlformats.org/drawingml/2006/main">
@@ -23415,7 +22568,41 @@
                   <a:srgbClr val="EAF2FF"/>
                 </a:solidFill>
               </a:rPr>
-              <a:t>)</a:t>
+              <a:t>        "status": "success",</a:t>
+            </a:r>
+          </a:p>
+          <a:p xmlns:a="http://schemas.openxmlformats.org/drawingml/2006/main">
+            <a:pPr algn="l">
+              <a:defRPr sz="1200" b="0" i="0">
+                <a:solidFill>
+                  <a:srgbClr val="EAF2FF"/>
+                </a:solidFill>
+              </a:defRPr>
+            </a:pPr>
+            <a:r>
+              <a:rPr sz="1200" b="0" i="0">
+                <a:solidFill>
+                  <a:srgbClr val="EAF2FF"/>
+                </a:solidFill>
+              </a:rPr>
+              <a:t>        "rooms": matches,</a:t>
+            </a:r>
+          </a:p>
+          <a:p xmlns:a="http://schemas.openxmlformats.org/drawingml/2006/main">
+            <a:pPr algn="l">
+              <a:defRPr sz="1200" b="0" i="0">
+                <a:solidFill>
+                  <a:srgbClr val="EAF2FF"/>
+                </a:solidFill>
+              </a:defRPr>
+            </a:pPr>
+            <a:r>
+              <a:rPr sz="1200" b="0" i="0">
+                <a:solidFill>
+                  <a:srgbClr val="EAF2FF"/>
+                </a:solidFill>
+              </a:rPr>
+              <a:t>    }</a:t>
             </a:r>
           </a:p>
         </p:txBody>
@@ -23425,19 +22612,19 @@
           <p:cNvPr id="14" name="">
             <a:extLst xmlns:a="http://schemas.openxmlformats.org/drawingml/2006/main">
               <a:ext uri="{FF2B5EF4-FFF2-40B4-BE49-F238E27FC236}">
-                <a16:creationId xmlns:a16="http://schemas.microsoft.com/office/drawing/2014/main" id="{654A8037-5B79-450C-90B1-7E21AD0B834B}"/>
-              </a:ext>
-            </a:extLst>
-          </p:cNvPr>
-          <p:cNvSpPr>
-            <a:spLocks xmlns:a="http://schemas.openxmlformats.org/drawingml/2006/main" noGrp="1"/>
-          </p:cNvSpPr>
-          <p:nvPr/>
-        </p:nvSpPr>
-        <p:spPr>
-          <a:xfrm xmlns:a="http://schemas.openxmlformats.org/drawingml/2006/main">
-            <a:off x="8286750" y="2362200"/>
-            <a:ext cx="2571750" cy="304800"/>
+                <a16:creationId xmlns:a16="http://schemas.microsoft.com/office/drawing/2014/main" id="{B8E127B0-B359-43CF-821C-D93300C6EE4B}"/>
+              </a:ext>
+            </a:extLst>
+          </p:cNvPr>
+          <p:cNvSpPr>
+            <a:spLocks xmlns:a="http://schemas.openxmlformats.org/drawingml/2006/main" noGrp="1"/>
+          </p:cNvSpPr>
+          <p:nvPr/>
+        </p:nvSpPr>
+        <p:spPr>
+          <a:xfrm xmlns:a="http://schemas.openxmlformats.org/drawingml/2006/main">
+            <a:off x="7162800" y="2152650"/>
+            <a:ext cx="4000500" cy="266700"/>
           </a:xfrm>
           <a:prstGeom xmlns:a="http://schemas.openxmlformats.org/drawingml/2006/main" prst="rect">
             <a:avLst/>
@@ -23453,19 +22640,19 @@
           <a:lstStyle xmlns:a="http://schemas.openxmlformats.org/drawingml/2006/main"/>
           <a:p xmlns:a="http://schemas.openxmlformats.org/drawingml/2006/main">
             <a:pPr algn="l">
-              <a:defRPr sz="1800" b="1" i="0">
+              <a:defRPr sz="1200" b="1" i="0">
                 <a:solidFill>
                   <a:srgbClr val="78F0B2"/>
                 </a:solidFill>
               </a:defRPr>
             </a:pPr>
             <a:r>
-              <a:rPr sz="1800" b="1" i="0">
+              <a:rPr sz="1200" b="1" i="0">
                 <a:solidFill>
                   <a:srgbClr val="78F0B2"/>
                 </a:solidFill>
               </a:rPr>
-              <a:t>Watch the trace</a:t>
+              <a:t>STRUCTURED RESULT · find_rooms(16, 10)</a:t>
             </a:r>
           </a:p>
         </p:txBody>
@@ -23475,19 +22662,180 @@
           <p:cNvPr id="15" name="">
             <a:extLst xmlns:a="http://schemas.openxmlformats.org/drawingml/2006/main">
               <a:ext uri="{FF2B5EF4-FFF2-40B4-BE49-F238E27FC236}">
-                <a16:creationId xmlns:a16="http://schemas.microsoft.com/office/drawing/2014/main" id="{854BBC9C-8389-4A15-8387-254CA105EBD1}"/>
-              </a:ext>
-            </a:extLst>
-          </p:cNvPr>
-          <p:cNvSpPr>
-            <a:spLocks xmlns:a="http://schemas.openxmlformats.org/drawingml/2006/main" noGrp="1"/>
-          </p:cNvSpPr>
-          <p:nvPr/>
-        </p:nvSpPr>
-        <p:spPr>
-          <a:xfrm xmlns:a="http://schemas.openxmlformats.org/drawingml/2006/main">
-            <a:off x="8286750" y="3028950"/>
-            <a:ext cx="2095500" cy="266700"/>
+                <a16:creationId xmlns:a16="http://schemas.microsoft.com/office/drawing/2014/main" id="{1507DB37-FEA0-49D6-B343-0C81F92BE8CF}"/>
+              </a:ext>
+            </a:extLst>
+          </p:cNvPr>
+          <p:cNvSpPr>
+            <a:spLocks xmlns:a="http://schemas.openxmlformats.org/drawingml/2006/main" noGrp="1"/>
+          </p:cNvSpPr>
+          <p:nvPr/>
+        </p:nvSpPr>
+        <p:spPr>
+          <a:xfrm xmlns:a="http://schemas.openxmlformats.org/drawingml/2006/main">
+            <a:off x="7162800" y="2514600"/>
+            <a:ext cx="4000500" cy="2686050"/>
+          </a:xfrm>
+          <a:prstGeom xmlns:a="http://schemas.openxmlformats.org/drawingml/2006/main" prst="roundRect">
+            <a:avLst>
+              <a:gd name="adj" fmla="val 2837"/>
+            </a:avLst>
+          </a:prstGeom>
+          <a:solidFill xmlns:a="http://schemas.openxmlformats.org/drawingml/2006/main">
+            <a:srgbClr val="050A10"/>
+          </a:solidFill>
+          <a:ln xmlns:a="http://schemas.openxmlformats.org/drawingml/2006/main" w="9525">
+            <a:solidFill>
+              <a:srgbClr val="274158"/>
+            </a:solidFill>
+            <a:prstDash val="solid"/>
+          </a:ln>
+        </p:spPr>
+      </p:sp>
+      <p:sp>
+        <p:nvSpPr>
+          <p:cNvPr id="16" name="">
+            <a:extLst xmlns:a="http://schemas.openxmlformats.org/drawingml/2006/main">
+              <a:ext uri="{FF2B5EF4-FFF2-40B4-BE49-F238E27FC236}">
+                <a16:creationId xmlns:a16="http://schemas.microsoft.com/office/drawing/2014/main" id="{68247BEE-F295-4A28-82D9-60699C9AB721}"/>
+              </a:ext>
+            </a:extLst>
+          </p:cNvPr>
+          <p:cNvSpPr>
+            <a:spLocks xmlns:a="http://schemas.openxmlformats.org/drawingml/2006/main" noGrp="1"/>
+          </p:cNvSpPr>
+          <p:nvPr/>
+        </p:nvSpPr>
+        <p:spPr>
+          <a:xfrm xmlns:a="http://schemas.openxmlformats.org/drawingml/2006/main">
+            <a:off x="7162800" y="2514600"/>
+            <a:ext cx="66675" cy="2686050"/>
+          </a:xfrm>
+          <a:prstGeom xmlns:a="http://schemas.openxmlformats.org/drawingml/2006/main" prst="roundRect">
+            <a:avLst>
+              <a:gd name="adj" fmla="val 50000"/>
+            </a:avLst>
+          </a:prstGeom>
+          <a:solidFill xmlns:a="http://schemas.openxmlformats.org/drawingml/2006/main">
+            <a:srgbClr val="38D9FF"/>
+          </a:solidFill>
+          <a:ln xmlns:a="http://schemas.openxmlformats.org/drawingml/2006/main" w="0">
+            <a:noFill/>
+            <a:prstDash val="solid"/>
+          </a:ln>
+        </p:spPr>
+      </p:sp>
+      <p:sp>
+        <p:nvSpPr>
+          <p:cNvPr id="17" name="">
+            <a:extLst xmlns:a="http://schemas.openxmlformats.org/drawingml/2006/main">
+              <a:ext uri="{FF2B5EF4-FFF2-40B4-BE49-F238E27FC236}">
+                <a16:creationId xmlns:a16="http://schemas.microsoft.com/office/drawing/2014/main" id="{A1B0BC88-3342-4AEA-886B-7BF955D052E4}"/>
+              </a:ext>
+            </a:extLst>
+          </p:cNvPr>
+          <p:cNvSpPr>
+            <a:spLocks xmlns:a="http://schemas.openxmlformats.org/drawingml/2006/main" noGrp="1"/>
+          </p:cNvSpPr>
+          <p:nvPr/>
+        </p:nvSpPr>
+        <p:spPr>
+          <a:xfrm xmlns:a="http://schemas.openxmlformats.org/drawingml/2006/main">
+            <a:off x="7391400" y="2686050"/>
+            <a:ext cx="95250" cy="95250"/>
+          </a:xfrm>
+          <a:prstGeom xmlns:a="http://schemas.openxmlformats.org/drawingml/2006/main" prst="ellipse">
+            <a:avLst/>
+          </a:prstGeom>
+          <a:solidFill xmlns:a="http://schemas.openxmlformats.org/drawingml/2006/main">
+            <a:srgbClr val="FF6B7A"/>
+          </a:solidFill>
+          <a:ln xmlns:a="http://schemas.openxmlformats.org/drawingml/2006/main" w="0">
+            <a:noFill/>
+            <a:prstDash val="solid"/>
+          </a:ln>
+        </p:spPr>
+      </p:sp>
+      <p:sp>
+        <p:nvSpPr>
+          <p:cNvPr id="18" name="">
+            <a:extLst xmlns:a="http://schemas.openxmlformats.org/drawingml/2006/main">
+              <a:ext uri="{FF2B5EF4-FFF2-40B4-BE49-F238E27FC236}">
+                <a16:creationId xmlns:a16="http://schemas.microsoft.com/office/drawing/2014/main" id="{81F4A881-19D5-4E56-BDA6-EF7F5ABB93C1}"/>
+              </a:ext>
+            </a:extLst>
+          </p:cNvPr>
+          <p:cNvSpPr>
+            <a:spLocks xmlns:a="http://schemas.openxmlformats.org/drawingml/2006/main" noGrp="1"/>
+          </p:cNvSpPr>
+          <p:nvPr/>
+        </p:nvSpPr>
+        <p:spPr>
+          <a:xfrm xmlns:a="http://schemas.openxmlformats.org/drawingml/2006/main">
+            <a:off x="7562850" y="2686050"/>
+            <a:ext cx="95250" cy="95250"/>
+          </a:xfrm>
+          <a:prstGeom xmlns:a="http://schemas.openxmlformats.org/drawingml/2006/main" prst="ellipse">
+            <a:avLst/>
+          </a:prstGeom>
+          <a:solidFill xmlns:a="http://schemas.openxmlformats.org/drawingml/2006/main">
+            <a:srgbClr val="FFC857"/>
+          </a:solidFill>
+          <a:ln xmlns:a="http://schemas.openxmlformats.org/drawingml/2006/main" w="0">
+            <a:noFill/>
+            <a:prstDash val="solid"/>
+          </a:ln>
+        </p:spPr>
+      </p:sp>
+      <p:sp>
+        <p:nvSpPr>
+          <p:cNvPr id="19" name="">
+            <a:extLst xmlns:a="http://schemas.openxmlformats.org/drawingml/2006/main">
+              <a:ext uri="{FF2B5EF4-FFF2-40B4-BE49-F238E27FC236}">
+                <a16:creationId xmlns:a16="http://schemas.microsoft.com/office/drawing/2014/main" id="{A50A398F-1AB9-4C92-AEBA-01F74A564E8C}"/>
+              </a:ext>
+            </a:extLst>
+          </p:cNvPr>
+          <p:cNvSpPr>
+            <a:spLocks xmlns:a="http://schemas.openxmlformats.org/drawingml/2006/main" noGrp="1"/>
+          </p:cNvSpPr>
+          <p:nvPr/>
+        </p:nvSpPr>
+        <p:spPr>
+          <a:xfrm xmlns:a="http://schemas.openxmlformats.org/drawingml/2006/main">
+            <a:off x="7734300" y="2686050"/>
+            <a:ext cx="95250" cy="95250"/>
+          </a:xfrm>
+          <a:prstGeom xmlns:a="http://schemas.openxmlformats.org/drawingml/2006/main" prst="ellipse">
+            <a:avLst/>
+          </a:prstGeom>
+          <a:solidFill xmlns:a="http://schemas.openxmlformats.org/drawingml/2006/main">
+            <a:srgbClr val="78F0B2"/>
+          </a:solidFill>
+          <a:ln xmlns:a="http://schemas.openxmlformats.org/drawingml/2006/main" w="0">
+            <a:noFill/>
+            <a:prstDash val="solid"/>
+          </a:ln>
+        </p:spPr>
+      </p:sp>
+      <p:sp>
+        <p:nvSpPr>
+          <p:cNvPr id="20" name="">
+            <a:extLst xmlns:a="http://schemas.openxmlformats.org/drawingml/2006/main">
+              <a:ext uri="{FF2B5EF4-FFF2-40B4-BE49-F238E27FC236}">
+                <a16:creationId xmlns:a16="http://schemas.microsoft.com/office/drawing/2014/main" id="{4870DF83-25AC-4109-9963-680F3B24697F}"/>
+              </a:ext>
+            </a:extLst>
+          </p:cNvPr>
+          <p:cNvSpPr>
+            <a:spLocks xmlns:a="http://schemas.openxmlformats.org/drawingml/2006/main" noGrp="1"/>
+          </p:cNvSpPr>
+          <p:nvPr/>
+        </p:nvSpPr>
+        <p:spPr>
+          <a:xfrm xmlns:a="http://schemas.openxmlformats.org/drawingml/2006/main">
+            <a:off x="7410450" y="2990850"/>
+            <a:ext cx="3524250" cy="2095500"/>
           </a:xfrm>
           <a:prstGeom xmlns:a="http://schemas.openxmlformats.org/drawingml/2006/main" prst="rect">
             <a:avLst/>
@@ -23503,41 +22851,195 @@
           <a:lstStyle xmlns:a="http://schemas.openxmlformats.org/drawingml/2006/main"/>
           <a:p xmlns:a="http://schemas.openxmlformats.org/drawingml/2006/main">
             <a:pPr algn="l">
-              <a:defRPr sz="1425" b="0" i="0">
-                <a:solidFill>
-                  <a:srgbClr val="9AAEC4"/>
-                </a:solidFill>
-              </a:defRPr>
-            </a:pPr>
-            <a:r>
-              <a:rPr sz="1425" b="0" i="0">
-                <a:solidFill>
-                  <a:srgbClr val="9AAEC4"/>
-                </a:solidFill>
-              </a:rPr>
-              <a:t>user intent</a:t>
-            </a:r>
-          </a:p>
-        </p:txBody>
-      </p:sp>
-      <p:sp>
-        <p:nvSpPr>
-          <p:cNvPr id="16" name="">
-            <a:extLst xmlns:a="http://schemas.openxmlformats.org/drawingml/2006/main">
-              <a:ext uri="{FF2B5EF4-FFF2-40B4-BE49-F238E27FC236}">
-                <a16:creationId xmlns:a16="http://schemas.microsoft.com/office/drawing/2014/main" id="{96B57142-D431-41B8-BA45-0CFF5DC30C53}"/>
-              </a:ext>
-            </a:extLst>
-          </p:cNvPr>
-          <p:cNvSpPr>
-            <a:spLocks xmlns:a="http://schemas.openxmlformats.org/drawingml/2006/main" noGrp="1"/>
-          </p:cNvSpPr>
-          <p:nvPr/>
-        </p:nvSpPr>
-        <p:spPr>
-          <a:xfrm xmlns:a="http://schemas.openxmlformats.org/drawingml/2006/main">
-            <a:off x="9010650" y="3295650"/>
-            <a:ext cx="476250" cy="285750"/>
+              <a:defRPr sz="1200" b="0" i="0">
+                <a:solidFill>
+                  <a:srgbClr val="EAF2FF"/>
+                </a:solidFill>
+              </a:defRPr>
+            </a:pPr>
+            <a:r>
+              <a:rPr sz="1200" b="0" i="0">
+                <a:solidFill>
+                  <a:srgbClr val="EAF2FF"/>
+                </a:solidFill>
+              </a:rPr>
+              <a:t>{</a:t>
+            </a:r>
+          </a:p>
+          <a:p xmlns:a="http://schemas.openxmlformats.org/drawingml/2006/main">
+            <a:pPr algn="l">
+              <a:defRPr sz="1200" b="0" i="0">
+                <a:solidFill>
+                  <a:srgbClr val="EAF2FF"/>
+                </a:solidFill>
+              </a:defRPr>
+            </a:pPr>
+            <a:r>
+              <a:rPr sz="1200" b="0" i="0">
+                <a:solidFill>
+                  <a:srgbClr val="EAF2FF"/>
+                </a:solidFill>
+              </a:rPr>
+              <a:t>  "status": "success",</a:t>
+            </a:r>
+          </a:p>
+          <a:p xmlns:a="http://schemas.openxmlformats.org/drawingml/2006/main">
+            <a:pPr algn="l">
+              <a:defRPr sz="1200" b="0" i="0">
+                <a:solidFill>
+                  <a:srgbClr val="EAF2FF"/>
+                </a:solidFill>
+              </a:defRPr>
+            </a:pPr>
+            <a:r>
+              <a:rPr sz="1200" b="0" i="0">
+                <a:solidFill>
+                  <a:srgbClr val="EAF2FF"/>
+                </a:solidFill>
+              </a:rPr>
+              <a:t>  "rooms": [{</a:t>
+            </a:r>
+          </a:p>
+          <a:p xmlns:a="http://schemas.openxmlformats.org/drawingml/2006/main">
+            <a:pPr algn="l">
+              <a:defRPr sz="1200" b="0" i="0">
+                <a:solidFill>
+                  <a:srgbClr val="EAF2FF"/>
+                </a:solidFill>
+              </a:defRPr>
+            </a:pPr>
+            <a:r>
+              <a:rPr sz="1200" b="0" i="0">
+                <a:solidFill>
+                  <a:srgbClr val="EAF2FF"/>
+                </a:solidFill>
+              </a:rPr>
+              <a:t>    "name": "Cedar",</a:t>
+            </a:r>
+          </a:p>
+          <a:p xmlns:a="http://schemas.openxmlformats.org/drawingml/2006/main">
+            <a:pPr algn="l">
+              <a:defRPr sz="1200" b="0" i="0">
+                <a:solidFill>
+                  <a:srgbClr val="EAF2FF"/>
+                </a:solidFill>
+              </a:defRPr>
+            </a:pPr>
+            <a:r>
+              <a:rPr sz="1200" b="0" i="0">
+                <a:solidFill>
+                  <a:srgbClr val="EAF2FF"/>
+                </a:solidFill>
+              </a:rPr>
+              <a:t>    "available_from": 17,</a:t>
+            </a:r>
+          </a:p>
+          <a:p xmlns:a="http://schemas.openxmlformats.org/drawingml/2006/main">
+            <a:pPr algn="l">
+              <a:defRPr sz="1200" b="0" i="0">
+                <a:solidFill>
+                  <a:srgbClr val="EAF2FF"/>
+                </a:solidFill>
+              </a:defRPr>
+            </a:pPr>
+            <a:r>
+              <a:rPr sz="1200" b="0" i="0">
+                <a:solidFill>
+                  <a:srgbClr val="EAF2FF"/>
+                </a:solidFill>
+              </a:rPr>
+              <a:t>    "capacity": 12</a:t>
+            </a:r>
+          </a:p>
+          <a:p xmlns:a="http://schemas.openxmlformats.org/drawingml/2006/main">
+            <a:pPr algn="l">
+              <a:defRPr sz="1200" b="0" i="0">
+                <a:solidFill>
+                  <a:srgbClr val="EAF2FF"/>
+                </a:solidFill>
+              </a:defRPr>
+            </a:pPr>
+            <a:r>
+              <a:rPr sz="1200" b="0" i="0">
+                <a:solidFill>
+                  <a:srgbClr val="EAF2FF"/>
+                </a:solidFill>
+              </a:rPr>
+              <a:t>  }]</a:t>
+            </a:r>
+          </a:p>
+          <a:p xmlns:a="http://schemas.openxmlformats.org/drawingml/2006/main">
+            <a:pPr algn="l">
+              <a:defRPr sz="1200" b="0" i="0">
+                <a:solidFill>
+                  <a:srgbClr val="EAF2FF"/>
+                </a:solidFill>
+              </a:defRPr>
+            </a:pPr>
+            <a:r>
+              <a:rPr sz="1200" b="0" i="0">
+                <a:solidFill>
+                  <a:srgbClr val="EAF2FF"/>
+                </a:solidFill>
+              </a:rPr>
+              <a:t>}</a:t>
+            </a:r>
+          </a:p>
+        </p:txBody>
+      </p:sp>
+      <p:sp>
+        <p:nvSpPr>
+          <p:cNvPr id="21" name="">
+            <a:extLst xmlns:a="http://schemas.openxmlformats.org/drawingml/2006/main">
+              <a:ext uri="{FF2B5EF4-FFF2-40B4-BE49-F238E27FC236}">
+                <a16:creationId xmlns:a16="http://schemas.microsoft.com/office/drawing/2014/main" id="{FD3A2FC1-18AB-4C31-ACCB-CC879BA9DFA1}"/>
+              </a:ext>
+            </a:extLst>
+          </p:cNvPr>
+          <p:cNvSpPr>
+            <a:spLocks xmlns:a="http://schemas.openxmlformats.org/drawingml/2006/main" noGrp="1"/>
+          </p:cNvSpPr>
+          <p:nvPr/>
+        </p:nvSpPr>
+        <p:spPr>
+          <a:xfrm xmlns:a="http://schemas.openxmlformats.org/drawingml/2006/main">
+            <a:off x="685800" y="5391150"/>
+            <a:ext cx="10477500" cy="514350"/>
+          </a:xfrm>
+          <a:prstGeom xmlns:a="http://schemas.openxmlformats.org/drawingml/2006/main" prst="roundRect">
+            <a:avLst>
+              <a:gd name="adj" fmla="val 14815"/>
+            </a:avLst>
+          </a:prstGeom>
+          <a:solidFill xmlns:a="http://schemas.openxmlformats.org/drawingml/2006/main">
+            <a:srgbClr val="0E1C2B"/>
+          </a:solidFill>
+          <a:ln xmlns:a="http://schemas.openxmlformats.org/drawingml/2006/main" w="9525">
+            <a:solidFill>
+              <a:srgbClr val="274158"/>
+            </a:solidFill>
+            <a:prstDash val="solid"/>
+          </a:ln>
+        </p:spPr>
+      </p:sp>
+      <p:sp>
+        <p:nvSpPr>
+          <p:cNvPr id="22" name="">
+            <a:extLst xmlns:a="http://schemas.openxmlformats.org/drawingml/2006/main">
+              <a:ext uri="{FF2B5EF4-FFF2-40B4-BE49-F238E27FC236}">
+                <a16:creationId xmlns:a16="http://schemas.microsoft.com/office/drawing/2014/main" id="{735E3891-4D7A-4A82-8A98-3940750282DB}"/>
+              </a:ext>
+            </a:extLst>
+          </p:cNvPr>
+          <p:cNvSpPr>
+            <a:spLocks xmlns:a="http://schemas.openxmlformats.org/drawingml/2006/main" noGrp="1"/>
+          </p:cNvSpPr>
+          <p:nvPr/>
+        </p:nvSpPr>
+        <p:spPr>
+          <a:xfrm xmlns:a="http://schemas.openxmlformats.org/drawingml/2006/main">
+            <a:off x="914400" y="5524500"/>
+            <a:ext cx="10020300" cy="266700"/>
           </a:xfrm>
           <a:prstGeom xmlns:a="http://schemas.openxmlformats.org/drawingml/2006/main" prst="rect">
             <a:avLst/>
@@ -23553,269 +23055,19 @@
           <a:lstStyle xmlns:a="http://schemas.openxmlformats.org/drawingml/2006/main"/>
           <a:p xmlns:a="http://schemas.openxmlformats.org/drawingml/2006/main">
             <a:pPr algn="ctr">
-              <a:defRPr sz="1800" b="0" i="0">
-                <a:solidFill>
-                  <a:srgbClr val="78F0B2"/>
-                </a:solidFill>
-              </a:defRPr>
-            </a:pPr>
-            <a:r>
-              <a:rPr sz="1800" b="0" i="0">
-                <a:solidFill>
-                  <a:srgbClr val="78F0B2"/>
-                </a:solidFill>
-              </a:rPr>
-              <a:t>↓</a:t>
-            </a:r>
-          </a:p>
-        </p:txBody>
-      </p:sp>
-      <p:sp>
-        <p:nvSpPr>
-          <p:cNvPr id="17" name="">
-            <a:extLst xmlns:a="http://schemas.openxmlformats.org/drawingml/2006/main">
-              <a:ext uri="{FF2B5EF4-FFF2-40B4-BE49-F238E27FC236}">
-                <a16:creationId xmlns:a16="http://schemas.microsoft.com/office/drawing/2014/main" id="{AE05F9AF-7244-402B-8551-C8F64BD7FAD9}"/>
-              </a:ext>
-            </a:extLst>
-          </p:cNvPr>
-          <p:cNvSpPr>
-            <a:spLocks xmlns:a="http://schemas.openxmlformats.org/drawingml/2006/main" noGrp="1"/>
-          </p:cNvSpPr>
-          <p:nvPr/>
-        </p:nvSpPr>
-        <p:spPr>
-          <a:xfrm xmlns:a="http://schemas.openxmlformats.org/drawingml/2006/main">
-            <a:off x="8286750" y="3638550"/>
-            <a:ext cx="2095500" cy="266700"/>
-          </a:xfrm>
-          <a:prstGeom xmlns:a="http://schemas.openxmlformats.org/drawingml/2006/main" prst="rect">
-            <a:avLst/>
-          </a:prstGeom>
-          <a:noFill xmlns:a="http://schemas.openxmlformats.org/drawingml/2006/main"/>
-          <a:ln xmlns:a="http://schemas.openxmlformats.org/drawingml/2006/main" w="0">
-            <a:noFill/>
-            <a:prstDash val="solid"/>
-          </a:ln>
-        </p:spPr>
-        <p:txBody>
-          <a:bodyPr xmlns:a="http://schemas.openxmlformats.org/drawingml/2006/main" anchor="t"/>
-          <a:lstStyle xmlns:a="http://schemas.openxmlformats.org/drawingml/2006/main"/>
-          <a:p xmlns:a="http://schemas.openxmlformats.org/drawingml/2006/main">
-            <a:pPr algn="l">
-              <a:defRPr sz="1425" b="1" i="0">
+              <a:defRPr sz="1500" b="1" i="0">
                 <a:solidFill>
                   <a:srgbClr val="EAF2FF"/>
                 </a:solidFill>
               </a:defRPr>
             </a:pPr>
             <a:r>
-              <a:rPr sz="1425" b="1" i="0">
+              <a:rPr sz="1500" b="1" i="0">
                 <a:solidFill>
                   <a:srgbClr val="EAF2FF"/>
                 </a:solidFill>
               </a:rPr>
-              <a:t>tool arguments</a:t>
-            </a:r>
-          </a:p>
-        </p:txBody>
-      </p:sp>
-      <p:sp>
-        <p:nvSpPr>
-          <p:cNvPr id="18" name="">
-            <a:extLst xmlns:a="http://schemas.openxmlformats.org/drawingml/2006/main">
-              <a:ext uri="{FF2B5EF4-FFF2-40B4-BE49-F238E27FC236}">
-                <a16:creationId xmlns:a16="http://schemas.microsoft.com/office/drawing/2014/main" id="{8EBDBD54-51C1-4924-B443-AFA83C24D8A4}"/>
-              </a:ext>
-            </a:extLst>
-          </p:cNvPr>
-          <p:cNvSpPr>
-            <a:spLocks xmlns:a="http://schemas.openxmlformats.org/drawingml/2006/main" noGrp="1"/>
-          </p:cNvSpPr>
-          <p:nvPr/>
-        </p:nvSpPr>
-        <p:spPr>
-          <a:xfrm xmlns:a="http://schemas.openxmlformats.org/drawingml/2006/main">
-            <a:off x="9010650" y="3905250"/>
-            <a:ext cx="476250" cy="285750"/>
-          </a:xfrm>
-          <a:prstGeom xmlns:a="http://schemas.openxmlformats.org/drawingml/2006/main" prst="rect">
-            <a:avLst/>
-          </a:prstGeom>
-          <a:noFill xmlns:a="http://schemas.openxmlformats.org/drawingml/2006/main"/>
-          <a:ln xmlns:a="http://schemas.openxmlformats.org/drawingml/2006/main" w="0">
-            <a:noFill/>
-            <a:prstDash val="solid"/>
-          </a:ln>
-        </p:spPr>
-        <p:txBody>
-          <a:bodyPr xmlns:a="http://schemas.openxmlformats.org/drawingml/2006/main" anchor="t"/>
-          <a:lstStyle xmlns:a="http://schemas.openxmlformats.org/drawingml/2006/main"/>
-          <a:p xmlns:a="http://schemas.openxmlformats.org/drawingml/2006/main">
-            <a:pPr algn="ctr">
-              <a:defRPr sz="1800" b="0" i="0">
-                <a:solidFill>
-                  <a:srgbClr val="78F0B2"/>
-                </a:solidFill>
-              </a:defRPr>
-            </a:pPr>
-            <a:r>
-              <a:rPr sz="1800" b="0" i="0">
-                <a:solidFill>
-                  <a:srgbClr val="78F0B2"/>
-                </a:solidFill>
-              </a:rPr>
-              <a:t>↓</a:t>
-            </a:r>
-          </a:p>
-        </p:txBody>
-      </p:sp>
-      <p:sp>
-        <p:nvSpPr>
-          <p:cNvPr id="19" name="">
-            <a:extLst xmlns:a="http://schemas.openxmlformats.org/drawingml/2006/main">
-              <a:ext uri="{FF2B5EF4-FFF2-40B4-BE49-F238E27FC236}">
-                <a16:creationId xmlns:a16="http://schemas.microsoft.com/office/drawing/2014/main" id="{E02E7FD2-20D3-4D74-90D0-653DE5C73431}"/>
-              </a:ext>
-            </a:extLst>
-          </p:cNvPr>
-          <p:cNvSpPr>
-            <a:spLocks xmlns:a="http://schemas.openxmlformats.org/drawingml/2006/main" noGrp="1"/>
-          </p:cNvSpPr>
-          <p:nvPr/>
-        </p:nvSpPr>
-        <p:spPr>
-          <a:xfrm xmlns:a="http://schemas.openxmlformats.org/drawingml/2006/main">
-            <a:off x="8286750" y="4248150"/>
-            <a:ext cx="2095500" cy="266700"/>
-          </a:xfrm>
-          <a:prstGeom xmlns:a="http://schemas.openxmlformats.org/drawingml/2006/main" prst="rect">
-            <a:avLst/>
-          </a:prstGeom>
-          <a:noFill xmlns:a="http://schemas.openxmlformats.org/drawingml/2006/main"/>
-          <a:ln xmlns:a="http://schemas.openxmlformats.org/drawingml/2006/main" w="0">
-            <a:noFill/>
-            <a:prstDash val="solid"/>
-          </a:ln>
-        </p:spPr>
-        <p:txBody>
-          <a:bodyPr xmlns:a="http://schemas.openxmlformats.org/drawingml/2006/main" anchor="t"/>
-          <a:lstStyle xmlns:a="http://schemas.openxmlformats.org/drawingml/2006/main"/>
-          <a:p xmlns:a="http://schemas.openxmlformats.org/drawingml/2006/main">
-            <a:pPr algn="l">
-              <a:defRPr sz="1425" b="1" i="0">
-                <a:solidFill>
-                  <a:srgbClr val="EAF2FF"/>
-                </a:solidFill>
-              </a:defRPr>
-            </a:pPr>
-            <a:r>
-              <a:rPr sz="1425" b="1" i="0">
-                <a:solidFill>
-                  <a:srgbClr val="EAF2FF"/>
-                </a:solidFill>
-              </a:rPr>
-              <a:t>tool result</a:t>
-            </a:r>
-          </a:p>
-        </p:txBody>
-      </p:sp>
-      <p:sp>
-        <p:nvSpPr>
-          <p:cNvPr id="20" name="">
-            <a:extLst xmlns:a="http://schemas.openxmlformats.org/drawingml/2006/main">
-              <a:ext uri="{FF2B5EF4-FFF2-40B4-BE49-F238E27FC236}">
-                <a16:creationId xmlns:a16="http://schemas.microsoft.com/office/drawing/2014/main" id="{A89321EF-8A48-463E-8357-161389BAC331}"/>
-              </a:ext>
-            </a:extLst>
-          </p:cNvPr>
-          <p:cNvSpPr>
-            <a:spLocks xmlns:a="http://schemas.openxmlformats.org/drawingml/2006/main" noGrp="1"/>
-          </p:cNvSpPr>
-          <p:nvPr/>
-        </p:nvSpPr>
-        <p:spPr>
-          <a:xfrm xmlns:a="http://schemas.openxmlformats.org/drawingml/2006/main">
-            <a:off x="9010650" y="4514850"/>
-            <a:ext cx="476250" cy="285750"/>
-          </a:xfrm>
-          <a:prstGeom xmlns:a="http://schemas.openxmlformats.org/drawingml/2006/main" prst="rect">
-            <a:avLst/>
-          </a:prstGeom>
-          <a:noFill xmlns:a="http://schemas.openxmlformats.org/drawingml/2006/main"/>
-          <a:ln xmlns:a="http://schemas.openxmlformats.org/drawingml/2006/main" w="0">
-            <a:noFill/>
-            <a:prstDash val="solid"/>
-          </a:ln>
-        </p:spPr>
-        <p:txBody>
-          <a:bodyPr xmlns:a="http://schemas.openxmlformats.org/drawingml/2006/main" anchor="t"/>
-          <a:lstStyle xmlns:a="http://schemas.openxmlformats.org/drawingml/2006/main"/>
-          <a:p xmlns:a="http://schemas.openxmlformats.org/drawingml/2006/main">
-            <a:pPr algn="ctr">
-              <a:defRPr sz="1800" b="0" i="0">
-                <a:solidFill>
-                  <a:srgbClr val="78F0B2"/>
-                </a:solidFill>
-              </a:defRPr>
-            </a:pPr>
-            <a:r>
-              <a:rPr sz="1800" b="0" i="0">
-                <a:solidFill>
-                  <a:srgbClr val="78F0B2"/>
-                </a:solidFill>
-              </a:rPr>
-              <a:t>↓</a:t>
-            </a:r>
-          </a:p>
-        </p:txBody>
-      </p:sp>
-      <p:sp>
-        <p:nvSpPr>
-          <p:cNvPr id="21" name="">
-            <a:extLst xmlns:a="http://schemas.openxmlformats.org/drawingml/2006/main">
-              <a:ext uri="{FF2B5EF4-FFF2-40B4-BE49-F238E27FC236}">
-                <a16:creationId xmlns:a16="http://schemas.microsoft.com/office/drawing/2014/main" id="{33B41723-51BD-44F6-B51F-2BA721D00085}"/>
-              </a:ext>
-            </a:extLst>
-          </p:cNvPr>
-          <p:cNvSpPr>
-            <a:spLocks xmlns:a="http://schemas.openxmlformats.org/drawingml/2006/main" noGrp="1"/>
-          </p:cNvSpPr>
-          <p:nvPr/>
-        </p:nvSpPr>
-        <p:spPr>
-          <a:xfrm xmlns:a="http://schemas.openxmlformats.org/drawingml/2006/main">
-            <a:off x="8286750" y="4857750"/>
-            <a:ext cx="2095500" cy="266700"/>
-          </a:xfrm>
-          <a:prstGeom xmlns:a="http://schemas.openxmlformats.org/drawingml/2006/main" prst="rect">
-            <a:avLst/>
-          </a:prstGeom>
-          <a:noFill xmlns:a="http://schemas.openxmlformats.org/drawingml/2006/main"/>
-          <a:ln xmlns:a="http://schemas.openxmlformats.org/drawingml/2006/main" w="0">
-            <a:noFill/>
-            <a:prstDash val="solid"/>
-          </a:ln>
-        </p:spPr>
-        <p:txBody>
-          <a:bodyPr xmlns:a="http://schemas.openxmlformats.org/drawingml/2006/main" anchor="t"/>
-          <a:lstStyle xmlns:a="http://schemas.openxmlformats.org/drawingml/2006/main"/>
-          <a:p xmlns:a="http://schemas.openxmlformats.org/drawingml/2006/main">
-            <a:pPr algn="l">
-              <a:defRPr sz="1425" b="1" i="0">
-                <a:solidFill>
-                  <a:srgbClr val="38D9FF"/>
-                </a:solidFill>
-              </a:defRPr>
-            </a:pPr>
-            <a:r>
-              <a:rPr sz="1425" b="1" i="0">
-                <a:solidFill>
-                  <a:srgbClr val="38D9FF"/>
-                </a:solidFill>
-              </a:rPr>
-              <a:t>spoken answer</a:t>
+              <a:t>Agent(..., tools=[find_rooms])</a:t>
             </a:r>
           </a:p>
         </p:txBody>
@@ -23823,7 +23075,7 @@
     </p:spTree>
     <p:extLst>
       <p:ext uri="{BB962C8B-B14F-4D97-AF65-F5344CB8AC3E}">
-        <p14:creationId xmlns:p14="http://schemas.microsoft.com/office/powerpoint/2010/main" val="507602823"/>
+        <p14:creationId xmlns:p14="http://schemas.microsoft.com/office/powerpoint/2010/main" val="1781587272"/>
       </p:ext>
     </p:extLst>
   </p:cSld>
@@ -23854,7 +23106,7 @@
           <p:cNvPr id="34" name="">
             <a:extLst xmlns:a="http://schemas.openxmlformats.org/drawingml/2006/main">
               <a:ext uri="{FF2B5EF4-FFF2-40B4-BE49-F238E27FC236}">
-                <a16:creationId xmlns:a16="http://schemas.microsoft.com/office/drawing/2014/main" id="{1137DE8F-700E-4F85-949D-584B7C220ECB}"/>
+                <a16:creationId xmlns:a16="http://schemas.microsoft.com/office/drawing/2014/main" id="{21EBD85C-9C55-4371-B997-C122E13A97F4}"/>
               </a:ext>
             </a:extLst>
           </p:cNvPr>
@@ -23887,7 +23139,7 @@
           <p:cNvPr id="2" name="">
             <a:extLst xmlns:a="http://schemas.openxmlformats.org/drawingml/2006/main">
               <a:ext uri="{FF2B5EF4-FFF2-40B4-BE49-F238E27FC236}">
-                <a16:creationId xmlns:a16="http://schemas.microsoft.com/office/drawing/2014/main" id="{9D69CA57-4FDA-47CB-9A7A-0AA456E372DE}"/>
+                <a16:creationId xmlns:a16="http://schemas.microsoft.com/office/drawing/2014/main" id="{157E0938-1320-4B2E-BEB9-C6ABEC3E9DAE}"/>
               </a:ext>
             </a:extLst>
           </p:cNvPr>
@@ -23937,7 +23189,7 @@
           <p:cNvPr id="3" name="">
             <a:extLst xmlns:a="http://schemas.openxmlformats.org/drawingml/2006/main">
               <a:ext uri="{FF2B5EF4-FFF2-40B4-BE49-F238E27FC236}">
-                <a16:creationId xmlns:a16="http://schemas.microsoft.com/office/drawing/2014/main" id="{FA29F965-2D6B-4117-8410-230CF7ECE5F9}"/>
+                <a16:creationId xmlns:a16="http://schemas.microsoft.com/office/drawing/2014/main" id="{8A19F4EE-8571-4C22-8F67-D4D3DAA2D650}"/>
               </a:ext>
             </a:extLst>
           </p:cNvPr>
@@ -23987,7 +23239,7 @@
           <p:cNvPr id="4" name="">
             <a:extLst xmlns:a="http://schemas.openxmlformats.org/drawingml/2006/main">
               <a:ext uri="{FF2B5EF4-FFF2-40B4-BE49-F238E27FC236}">
-                <a16:creationId xmlns:a16="http://schemas.microsoft.com/office/drawing/2014/main" id="{E29EB43D-A8EE-4FC4-8489-E018A1AB1B32}"/>
+                <a16:creationId xmlns:a16="http://schemas.microsoft.com/office/drawing/2014/main" id="{E3C31B12-69D2-4617-8F3A-7443978111E4}"/>
               </a:ext>
             </a:extLst>
           </p:cNvPr>
@@ -24037,7 +23289,7 @@
           <p:cNvPr id="5" name="">
             <a:extLst xmlns:a="http://schemas.openxmlformats.org/drawingml/2006/main">
               <a:ext uri="{FF2B5EF4-FFF2-40B4-BE49-F238E27FC236}">
-                <a16:creationId xmlns:a16="http://schemas.microsoft.com/office/drawing/2014/main" id="{792BA144-244E-41AE-87B0-0E1DCED16BE5}"/>
+                <a16:creationId xmlns:a16="http://schemas.microsoft.com/office/drawing/2014/main" id="{1B1E08FF-0719-4A30-94DF-C3AC17F1CB16}"/>
               </a:ext>
             </a:extLst>
           </p:cNvPr>
@@ -24068,7 +23320,7 @@
           <p:cNvPr id="6" name="">
             <a:extLst xmlns:a="http://schemas.openxmlformats.org/drawingml/2006/main">
               <a:ext uri="{FF2B5EF4-FFF2-40B4-BE49-F238E27FC236}">
-                <a16:creationId xmlns:a16="http://schemas.microsoft.com/office/drawing/2014/main" id="{A912B45F-F2C5-48A3-9242-5BA2C6FD7A76}"/>
+                <a16:creationId xmlns:a16="http://schemas.microsoft.com/office/drawing/2014/main" id="{FB9A99CA-B543-41F7-B764-559E3F91A0DF}"/>
               </a:ext>
             </a:extLst>
           </p:cNvPr>
@@ -24118,7 +23370,7 @@
           <p:cNvPr id="7" name="">
             <a:extLst xmlns:a="http://schemas.openxmlformats.org/drawingml/2006/main">
               <a:ext uri="{FF2B5EF4-FFF2-40B4-BE49-F238E27FC236}">
-                <a16:creationId xmlns:a16="http://schemas.microsoft.com/office/drawing/2014/main" id="{43EFE812-F681-49A2-9CDC-3A9A42BBB3D7}"/>
+                <a16:creationId xmlns:a16="http://schemas.microsoft.com/office/drawing/2014/main" id="{06C00240-9227-4712-9B3A-3EF7EF0955C8}"/>
               </a:ext>
             </a:extLst>
           </p:cNvPr>
@@ -24168,7 +23420,7 @@
           <p:cNvPr id="8" name="">
             <a:extLst xmlns:a="http://schemas.openxmlformats.org/drawingml/2006/main">
               <a:ext uri="{FF2B5EF4-FFF2-40B4-BE49-F238E27FC236}">
-                <a16:creationId xmlns:a16="http://schemas.microsoft.com/office/drawing/2014/main" id="{C6BCF5EE-5F5B-4971-8AAA-3E4E99631EA7}"/>
+                <a16:creationId xmlns:a16="http://schemas.microsoft.com/office/drawing/2014/main" id="{6CAA936D-2D5A-40A0-ABE7-7DD70788E194}"/>
               </a:ext>
             </a:extLst>
           </p:cNvPr>
@@ -24203,7 +23455,7 @@
           <p:cNvPr id="9" name="">
             <a:extLst xmlns:a="http://schemas.openxmlformats.org/drawingml/2006/main">
               <a:ext uri="{FF2B5EF4-FFF2-40B4-BE49-F238E27FC236}">
-                <a16:creationId xmlns:a16="http://schemas.microsoft.com/office/drawing/2014/main" id="{CC2C437A-A3C0-4A93-8696-8822D2A42371}"/>
+                <a16:creationId xmlns:a16="http://schemas.microsoft.com/office/drawing/2014/main" id="{FEB7A1D8-6DA5-4D61-A85C-366666E5C77E}"/>
               </a:ext>
             </a:extLst>
           </p:cNvPr>
@@ -24253,7 +23505,7 @@
           <p:cNvPr id="10" name="">
             <a:extLst xmlns:a="http://schemas.openxmlformats.org/drawingml/2006/main">
               <a:ext uri="{FF2B5EF4-FFF2-40B4-BE49-F238E27FC236}">
-                <a16:creationId xmlns:a16="http://schemas.microsoft.com/office/drawing/2014/main" id="{898D7233-316F-4B55-9E9A-3A6B9CFA6F51}"/>
+                <a16:creationId xmlns:a16="http://schemas.microsoft.com/office/drawing/2014/main" id="{5F1E8E79-DBD1-4366-BCD0-8E86744AED90}"/>
               </a:ext>
             </a:extLst>
           </p:cNvPr>
@@ -24354,7 +23606,7 @@
           <p:cNvPr id="11" name="">
             <a:extLst xmlns:a="http://schemas.openxmlformats.org/drawingml/2006/main">
               <a:ext uri="{FF2B5EF4-FFF2-40B4-BE49-F238E27FC236}">
-                <a16:creationId xmlns:a16="http://schemas.microsoft.com/office/drawing/2014/main" id="{B649B783-77A1-4F65-B801-94F9464B1238}"/>
+                <a16:creationId xmlns:a16="http://schemas.microsoft.com/office/drawing/2014/main" id="{88587914-F02B-4D6D-B192-422A21EB09C5}"/>
               </a:ext>
             </a:extLst>
           </p:cNvPr>
@@ -24385,7 +23637,7 @@
           <p:cNvPr id="12" name="">
             <a:extLst xmlns:a="http://schemas.openxmlformats.org/drawingml/2006/main">
               <a:ext uri="{FF2B5EF4-FFF2-40B4-BE49-F238E27FC236}">
-                <a16:creationId xmlns:a16="http://schemas.microsoft.com/office/drawing/2014/main" id="{55B1D8D9-3848-43E7-AB14-D11128EC5876}"/>
+                <a16:creationId xmlns:a16="http://schemas.microsoft.com/office/drawing/2014/main" id="{ECDD72BE-A138-4706-8A74-6EEC9AED9E19}"/>
               </a:ext>
             </a:extLst>
           </p:cNvPr>
@@ -24435,7 +23687,7 @@
           <p:cNvPr id="13" name="">
             <a:extLst xmlns:a="http://schemas.openxmlformats.org/drawingml/2006/main">
               <a:ext uri="{FF2B5EF4-FFF2-40B4-BE49-F238E27FC236}">
-                <a16:creationId xmlns:a16="http://schemas.microsoft.com/office/drawing/2014/main" id="{D1F69C7F-D62C-4F93-8613-622154EFDD65}"/>
+                <a16:creationId xmlns:a16="http://schemas.microsoft.com/office/drawing/2014/main" id="{4705C007-3CCD-4EC4-97CF-8734A956E939}"/>
               </a:ext>
             </a:extLst>
           </p:cNvPr>
@@ -24468,7 +23720,7 @@
           <p:cNvPr id="14" name="">
             <a:extLst xmlns:a="http://schemas.openxmlformats.org/drawingml/2006/main">
               <a:ext uri="{FF2B5EF4-FFF2-40B4-BE49-F238E27FC236}">
-                <a16:creationId xmlns:a16="http://schemas.microsoft.com/office/drawing/2014/main" id="{6B806564-2A14-40C9-A04A-2F51CFA389CE}"/>
+                <a16:creationId xmlns:a16="http://schemas.microsoft.com/office/drawing/2014/main" id="{C14B3919-03B3-47F5-95CC-C4D22CD752B8}"/>
               </a:ext>
             </a:extLst>
           </p:cNvPr>
@@ -24501,7 +23753,7 @@
           <p:cNvPr id="15" name="">
             <a:extLst xmlns:a="http://schemas.openxmlformats.org/drawingml/2006/main">
               <a:ext uri="{FF2B5EF4-FFF2-40B4-BE49-F238E27FC236}">
-                <a16:creationId xmlns:a16="http://schemas.microsoft.com/office/drawing/2014/main" id="{3AF6C3B7-9ADB-47F6-9F0B-4045D53B6D24}"/>
+                <a16:creationId xmlns:a16="http://schemas.microsoft.com/office/drawing/2014/main" id="{A6D1870B-3F40-43D6-B889-F62D5D4A1BD3}"/>
               </a:ext>
             </a:extLst>
           </p:cNvPr>
@@ -24534,7 +23786,7 @@
           <p:cNvPr id="16" name="">
             <a:extLst xmlns:a="http://schemas.openxmlformats.org/drawingml/2006/main">
               <a:ext uri="{FF2B5EF4-FFF2-40B4-BE49-F238E27FC236}">
-                <a16:creationId xmlns:a16="http://schemas.microsoft.com/office/drawing/2014/main" id="{A68F45E7-3F14-46C7-810D-8EF1493943A0}"/>
+                <a16:creationId xmlns:a16="http://schemas.microsoft.com/office/drawing/2014/main" id="{1393EDE9-E113-42CE-A7DA-60C097586D73}"/>
               </a:ext>
             </a:extLst>
           </p:cNvPr>
@@ -24567,7 +23819,7 @@
           <p:cNvPr id="17" name="">
             <a:extLst xmlns:a="http://schemas.openxmlformats.org/drawingml/2006/main">
               <a:ext uri="{FF2B5EF4-FFF2-40B4-BE49-F238E27FC236}">
-                <a16:creationId xmlns:a16="http://schemas.microsoft.com/office/drawing/2014/main" id="{93601487-0538-42FC-AF9A-1B4F2C3E82B0}"/>
+                <a16:creationId xmlns:a16="http://schemas.microsoft.com/office/drawing/2014/main" id="{C3C56CB9-5957-4A14-9A17-9FB9C30FBA02}"/>
               </a:ext>
             </a:extLst>
           </p:cNvPr>
@@ -24600,7 +23852,7 @@
           <p:cNvPr id="18" name="">
             <a:extLst xmlns:a="http://schemas.openxmlformats.org/drawingml/2006/main">
               <a:ext uri="{FF2B5EF4-FFF2-40B4-BE49-F238E27FC236}">
-                <a16:creationId xmlns:a16="http://schemas.microsoft.com/office/drawing/2014/main" id="{80E6A376-37D0-427B-899E-74C3C80B0334}"/>
+                <a16:creationId xmlns:a16="http://schemas.microsoft.com/office/drawing/2014/main" id="{47D46953-6F30-4B3E-83FF-A9C285EE2C29}"/>
               </a:ext>
             </a:extLst>
           </p:cNvPr>
@@ -24633,7 +23885,7 @@
           <p:cNvPr id="19" name="">
             <a:extLst xmlns:a="http://schemas.openxmlformats.org/drawingml/2006/main">
               <a:ext uri="{FF2B5EF4-FFF2-40B4-BE49-F238E27FC236}">
-                <a16:creationId xmlns:a16="http://schemas.microsoft.com/office/drawing/2014/main" id="{2FAF8B6E-8B7F-4412-893B-22D15A4940CC}"/>
+                <a16:creationId xmlns:a16="http://schemas.microsoft.com/office/drawing/2014/main" id="{1BC38BB8-14A9-4767-970A-703AF597C958}"/>
               </a:ext>
             </a:extLst>
           </p:cNvPr>
@@ -24666,7 +23918,7 @@
           <p:cNvPr id="20" name="">
             <a:extLst xmlns:a="http://schemas.openxmlformats.org/drawingml/2006/main">
               <a:ext uri="{FF2B5EF4-FFF2-40B4-BE49-F238E27FC236}">
-                <a16:creationId xmlns:a16="http://schemas.microsoft.com/office/drawing/2014/main" id="{956EEF40-CF9F-4D77-AD1B-36166F9B25EE}"/>
+                <a16:creationId xmlns:a16="http://schemas.microsoft.com/office/drawing/2014/main" id="{03E97ACF-C1DE-4C2E-B397-6B7F5745BA92}"/>
               </a:ext>
             </a:extLst>
           </p:cNvPr>
@@ -24699,7 +23951,7 @@
           <p:cNvPr id="21" name="">
             <a:extLst xmlns:a="http://schemas.openxmlformats.org/drawingml/2006/main">
               <a:ext uri="{FF2B5EF4-FFF2-40B4-BE49-F238E27FC236}">
-                <a16:creationId xmlns:a16="http://schemas.microsoft.com/office/drawing/2014/main" id="{A0B3AAB5-9FEF-4E8D-A071-01A6E0620916}"/>
+                <a16:creationId xmlns:a16="http://schemas.microsoft.com/office/drawing/2014/main" id="{29CDDB59-EC83-4AB6-A160-7CAA9C7BE8A5}"/>
               </a:ext>
             </a:extLst>
           </p:cNvPr>
@@ -24732,7 +23984,7 @@
           <p:cNvPr id="22" name="">
             <a:extLst xmlns:a="http://schemas.openxmlformats.org/drawingml/2006/main">
               <a:ext uri="{FF2B5EF4-FFF2-40B4-BE49-F238E27FC236}">
-                <a16:creationId xmlns:a16="http://schemas.microsoft.com/office/drawing/2014/main" id="{6E809C49-4C98-4B49-8188-001EF626B332}"/>
+                <a16:creationId xmlns:a16="http://schemas.microsoft.com/office/drawing/2014/main" id="{8FF352FB-EBB4-4B3E-A302-05DC515B6304}"/>
               </a:ext>
             </a:extLst>
           </p:cNvPr>
@@ -24765,7 +24017,7 @@
           <p:cNvPr id="23" name="">
             <a:extLst xmlns:a="http://schemas.openxmlformats.org/drawingml/2006/main">
               <a:ext uri="{FF2B5EF4-FFF2-40B4-BE49-F238E27FC236}">
-                <a16:creationId xmlns:a16="http://schemas.microsoft.com/office/drawing/2014/main" id="{70027A6B-805D-4D46-82B5-34B523B04640}"/>
+                <a16:creationId xmlns:a16="http://schemas.microsoft.com/office/drawing/2014/main" id="{3C6DE4D0-BC30-4CA6-82B0-CB565D12EA84}"/>
               </a:ext>
             </a:extLst>
           </p:cNvPr>
@@ -24798,7 +24050,7 @@
           <p:cNvPr id="24" name="">
             <a:extLst xmlns:a="http://schemas.openxmlformats.org/drawingml/2006/main">
               <a:ext uri="{FF2B5EF4-FFF2-40B4-BE49-F238E27FC236}">
-                <a16:creationId xmlns:a16="http://schemas.microsoft.com/office/drawing/2014/main" id="{6F0496EE-64AD-4A35-999B-B20450B13CA7}"/>
+                <a16:creationId xmlns:a16="http://schemas.microsoft.com/office/drawing/2014/main" id="{E2C9DA5E-FABF-454D-A945-90BB57F57CE3}"/>
               </a:ext>
             </a:extLst>
           </p:cNvPr>
@@ -24831,7 +24083,7 @@
           <p:cNvPr id="25" name="">
             <a:extLst xmlns:a="http://schemas.openxmlformats.org/drawingml/2006/main">
               <a:ext uri="{FF2B5EF4-FFF2-40B4-BE49-F238E27FC236}">
-                <a16:creationId xmlns:a16="http://schemas.microsoft.com/office/drawing/2014/main" id="{D6C235F2-8DE5-4D3D-8097-0BFE559A2E0B}"/>
+                <a16:creationId xmlns:a16="http://schemas.microsoft.com/office/drawing/2014/main" id="{6C18033D-6FBD-4DDB-8F34-F3310E788C38}"/>
               </a:ext>
             </a:extLst>
           </p:cNvPr>
@@ -24864,7 +24116,7 @@
           <p:cNvPr id="26" name="">
             <a:extLst xmlns:a="http://schemas.openxmlformats.org/drawingml/2006/main">
               <a:ext uri="{FF2B5EF4-FFF2-40B4-BE49-F238E27FC236}">
-                <a16:creationId xmlns:a16="http://schemas.microsoft.com/office/drawing/2014/main" id="{8D140E3A-BFF9-4D50-9BF1-F67A1EA6C692}"/>
+                <a16:creationId xmlns:a16="http://schemas.microsoft.com/office/drawing/2014/main" id="{FE4B6C5F-C323-43F6-A21B-E1BBE22316B0}"/>
               </a:ext>
             </a:extLst>
           </p:cNvPr>
@@ -24897,7 +24149,7 @@
           <p:cNvPr id="27" name="">
             <a:extLst xmlns:a="http://schemas.openxmlformats.org/drawingml/2006/main">
               <a:ext uri="{FF2B5EF4-FFF2-40B4-BE49-F238E27FC236}">
-                <a16:creationId xmlns:a16="http://schemas.microsoft.com/office/drawing/2014/main" id="{7C140B0F-B6D9-42A9-AEC4-7BCA4A021D0E}"/>
+                <a16:creationId xmlns:a16="http://schemas.microsoft.com/office/drawing/2014/main" id="{54CF096A-9DDE-45B9-9381-20EED4BB4570}"/>
               </a:ext>
             </a:extLst>
           </p:cNvPr>
@@ -24930,7 +24182,7 @@
           <p:cNvPr id="28" name="">
             <a:extLst xmlns:a="http://schemas.openxmlformats.org/drawingml/2006/main">
               <a:ext uri="{FF2B5EF4-FFF2-40B4-BE49-F238E27FC236}">
-                <a16:creationId xmlns:a16="http://schemas.microsoft.com/office/drawing/2014/main" id="{DD941752-175A-4FE7-8FC0-D56AA32CF03B}"/>
+                <a16:creationId xmlns:a16="http://schemas.microsoft.com/office/drawing/2014/main" id="{94EABA1C-CEB4-44A8-A473-A47B6183075A}"/>
               </a:ext>
             </a:extLst>
           </p:cNvPr>
@@ -24963,7 +24215,7 @@
           <p:cNvPr id="29" name="">
             <a:extLst xmlns:a="http://schemas.openxmlformats.org/drawingml/2006/main">
               <a:ext uri="{FF2B5EF4-FFF2-40B4-BE49-F238E27FC236}">
-                <a16:creationId xmlns:a16="http://schemas.microsoft.com/office/drawing/2014/main" id="{73696FCC-CEBD-4065-B164-AF1E90B7D280}"/>
+                <a16:creationId xmlns:a16="http://schemas.microsoft.com/office/drawing/2014/main" id="{FE495DFD-364E-453C-B43E-13A712EFA9C4}"/>
               </a:ext>
             </a:extLst>
           </p:cNvPr>
@@ -24996,7 +24248,7 @@
           <p:cNvPr id="30" name="">
             <a:extLst xmlns:a="http://schemas.openxmlformats.org/drawingml/2006/main">
               <a:ext uri="{FF2B5EF4-FFF2-40B4-BE49-F238E27FC236}">
-                <a16:creationId xmlns:a16="http://schemas.microsoft.com/office/drawing/2014/main" id="{E96CA1C7-841B-42AD-B3A9-1AB569F36724}"/>
+                <a16:creationId xmlns:a16="http://schemas.microsoft.com/office/drawing/2014/main" id="{1636466A-5162-46C0-9619-06821ECBA8D7}"/>
               </a:ext>
             </a:extLst>
           </p:cNvPr>
@@ -25029,7 +24281,7 @@
           <p:cNvPr id="31" name="">
             <a:extLst xmlns:a="http://schemas.openxmlformats.org/drawingml/2006/main">
               <a:ext uri="{FF2B5EF4-FFF2-40B4-BE49-F238E27FC236}">
-                <a16:creationId xmlns:a16="http://schemas.microsoft.com/office/drawing/2014/main" id="{ACD97D03-11BD-4C37-BA22-66BB032946C8}"/>
+                <a16:creationId xmlns:a16="http://schemas.microsoft.com/office/drawing/2014/main" id="{ED26F1FF-AE31-4BC7-9E0F-E7E0C38D6AEC}"/>
               </a:ext>
             </a:extLst>
           </p:cNvPr>
@@ -25062,7 +24314,7 @@
           <p:cNvPr id="32" name="">
             <a:extLst xmlns:a="http://schemas.openxmlformats.org/drawingml/2006/main">
               <a:ext uri="{FF2B5EF4-FFF2-40B4-BE49-F238E27FC236}">
-                <a16:creationId xmlns:a16="http://schemas.microsoft.com/office/drawing/2014/main" id="{28692D69-13B7-49BC-BC53-9B3EEC0475A2}"/>
+                <a16:creationId xmlns:a16="http://schemas.microsoft.com/office/drawing/2014/main" id="{F2C6D321-75D8-4962-A95D-3BE46D532B63}"/>
               </a:ext>
             </a:extLst>
           </p:cNvPr>
@@ -25095,7 +24347,7 @@
           <p:cNvPr id="33" name="">
             <a:extLst xmlns:a="http://schemas.openxmlformats.org/drawingml/2006/main">
               <a:ext uri="{FF2B5EF4-FFF2-40B4-BE49-F238E27FC236}">
-                <a16:creationId xmlns:a16="http://schemas.microsoft.com/office/drawing/2014/main" id="{D37C4F37-66A8-499A-96BC-35CD67A18D0D}"/>
+                <a16:creationId xmlns:a16="http://schemas.microsoft.com/office/drawing/2014/main" id="{2D3B9801-1B7D-4A3E-8B6B-2C37C6147270}"/>
               </a:ext>
             </a:extLst>
           </p:cNvPr>
@@ -25143,7 +24395,7 @@
     </p:spTree>
     <p:extLst>
       <p:ext uri="{BB962C8B-B14F-4D97-AF65-F5344CB8AC3E}">
-        <p14:creationId xmlns:p14="http://schemas.microsoft.com/office/powerpoint/2010/main" val="851368648"/>
+        <p14:creationId xmlns:p14="http://schemas.microsoft.com/office/powerpoint/2010/main" val="321301158"/>
       </p:ext>
     </p:extLst>
   </p:cSld>

--- a/slides/google-adk-voice-agents-workshop.pptx
+++ b/slides/google-adk-voice-agents-workshop.pptx
@@ -2,30 +2,30 @@
 <file path=ppt/presentation.xml><?xml version="1.0" encoding="utf-8"?>
 <p:presentation xmlns:p="http://schemas.openxmlformats.org/presentationml/2006/main">
   <p:sldMasterIdLst>
-    <p:sldMasterId xmlns:r="http://schemas.openxmlformats.org/officeDocument/2006/relationships" id="2147483648" r:id="R1017e72c49204966"/>
+    <p:sldMasterId xmlns:r="http://schemas.openxmlformats.org/officeDocument/2006/relationships" id="2147483648" r:id="Re3526cd7d3924f35"/>
   </p:sldMasterIdLst>
   <p:notesMasterIdLst>
-    <p:notesMasterId xmlns:r="http://schemas.openxmlformats.org/officeDocument/2006/relationships" r:id="R7cf466b5b8b0475f"/>
+    <p:notesMasterId xmlns:r="http://schemas.openxmlformats.org/officeDocument/2006/relationships" r:id="R6efdc9e72e5d4f59"/>
   </p:notesMasterIdLst>
   <p:sldIdLst>
-    <p:sldId xmlns:r="http://schemas.openxmlformats.org/officeDocument/2006/relationships" id="256" r:id="Rd442c6b29265406f"/>
-    <p:sldId xmlns:r="http://schemas.openxmlformats.org/officeDocument/2006/relationships" id="257" r:id="R461cedf980e24851"/>
-    <p:sldId xmlns:r="http://schemas.openxmlformats.org/officeDocument/2006/relationships" id="258" r:id="R425cc770f3104047"/>
-    <p:sldId xmlns:r="http://schemas.openxmlformats.org/officeDocument/2006/relationships" id="259" r:id="R24526822a7e540c4"/>
-    <p:sldId xmlns:r="http://schemas.openxmlformats.org/officeDocument/2006/relationships" id="260" r:id="R2815af4ede33465c"/>
-    <p:sldId xmlns:r="http://schemas.openxmlformats.org/officeDocument/2006/relationships" id="261" r:id="R5b5a27c7d179423b"/>
-    <p:sldId xmlns:r="http://schemas.openxmlformats.org/officeDocument/2006/relationships" id="262" r:id="Rb411ae1b95e444f4"/>
-    <p:sldId xmlns:r="http://schemas.openxmlformats.org/officeDocument/2006/relationships" id="263" r:id="Rc7a32e188af841a2"/>
-    <p:sldId xmlns:r="http://schemas.openxmlformats.org/officeDocument/2006/relationships" id="264" r:id="R39e35f9f88c34af2"/>
-    <p:sldId xmlns:r="http://schemas.openxmlformats.org/officeDocument/2006/relationships" id="265" r:id="R9446f0e8184544b5"/>
-    <p:sldId xmlns:r="http://schemas.openxmlformats.org/officeDocument/2006/relationships" id="266" r:id="Rb942b818c2564df6"/>
-    <p:sldId xmlns:r="http://schemas.openxmlformats.org/officeDocument/2006/relationships" id="267" r:id="Rf43d385e803c4b44"/>
-    <p:sldId xmlns:r="http://schemas.openxmlformats.org/officeDocument/2006/relationships" id="268" r:id="R4521e5b7791a434f"/>
-    <p:sldId xmlns:r="http://schemas.openxmlformats.org/officeDocument/2006/relationships" id="269" r:id="R9011d237b6b040e8"/>
-    <p:sldId xmlns:r="http://schemas.openxmlformats.org/officeDocument/2006/relationships" id="270" r:id="R34d9ec4d795a4ac4"/>
-    <p:sldId xmlns:r="http://schemas.openxmlformats.org/officeDocument/2006/relationships" id="271" r:id="Rdca7338f82374254"/>
-    <p:sldId xmlns:r="http://schemas.openxmlformats.org/officeDocument/2006/relationships" id="272" r:id="R7294596394534156"/>
-    <p:sldId xmlns:r="http://schemas.openxmlformats.org/officeDocument/2006/relationships" id="273" r:id="Rfa5e50b1098348b0"/>
+    <p:sldId xmlns:r="http://schemas.openxmlformats.org/officeDocument/2006/relationships" id="256" r:id="Rea8394cd56c64ec1"/>
+    <p:sldId xmlns:r="http://schemas.openxmlformats.org/officeDocument/2006/relationships" id="257" r:id="R2369b88d480f44fd"/>
+    <p:sldId xmlns:r="http://schemas.openxmlformats.org/officeDocument/2006/relationships" id="258" r:id="R9e01f23fd64b4f3e"/>
+    <p:sldId xmlns:r="http://schemas.openxmlformats.org/officeDocument/2006/relationships" id="259" r:id="R0fb6e4a4bebc47cb"/>
+    <p:sldId xmlns:r="http://schemas.openxmlformats.org/officeDocument/2006/relationships" id="260" r:id="Rbdd152db2c0d4202"/>
+    <p:sldId xmlns:r="http://schemas.openxmlformats.org/officeDocument/2006/relationships" id="261" r:id="R308297f5f1b843e9"/>
+    <p:sldId xmlns:r="http://schemas.openxmlformats.org/officeDocument/2006/relationships" id="262" r:id="R129ab4eac43e442d"/>
+    <p:sldId xmlns:r="http://schemas.openxmlformats.org/officeDocument/2006/relationships" id="263" r:id="R97d70354e00f4eb5"/>
+    <p:sldId xmlns:r="http://schemas.openxmlformats.org/officeDocument/2006/relationships" id="264" r:id="R3f074fa3a18c4a7e"/>
+    <p:sldId xmlns:r="http://schemas.openxmlformats.org/officeDocument/2006/relationships" id="265" r:id="Reea555c1f00b4b53"/>
+    <p:sldId xmlns:r="http://schemas.openxmlformats.org/officeDocument/2006/relationships" id="266" r:id="R10bb91c9d6b140b4"/>
+    <p:sldId xmlns:r="http://schemas.openxmlformats.org/officeDocument/2006/relationships" id="267" r:id="Rb47e5f1810d24e1a"/>
+    <p:sldId xmlns:r="http://schemas.openxmlformats.org/officeDocument/2006/relationships" id="268" r:id="R6e9c29037c624bd2"/>
+    <p:sldId xmlns:r="http://schemas.openxmlformats.org/officeDocument/2006/relationships" id="269" r:id="Rdf82a794a4b34cae"/>
+    <p:sldId xmlns:r="http://schemas.openxmlformats.org/officeDocument/2006/relationships" id="270" r:id="R1b76e8f528e24504"/>
+    <p:sldId xmlns:r="http://schemas.openxmlformats.org/officeDocument/2006/relationships" id="271" r:id="R6a3c8dd17df54ad8"/>
+    <p:sldId xmlns:r="http://schemas.openxmlformats.org/officeDocument/2006/relationships" id="272" r:id="R779f149dbaa34d48"/>
+    <p:sldId xmlns:r="http://schemas.openxmlformats.org/officeDocument/2006/relationships" id="273" r:id="Rf7860e716ee94217"/>
   </p:sldIdLst>
   <p:sldSz cx="12192000" cy="6858000"/>
   <p:notesSz cx="6858000" cy="9144000"/>
@@ -1892,7 +1892,7 @@
   </p:cSld>
   <p:clrMap bg1="lt1" tx1="dk1" bg2="lt2" tx2="dk2" accent1="accent1" accent2="accent2" accent3="accent3" accent4="accent4" accent5="accent5" accent6="accent6" hlink="hlink" folHlink="folHlink"/>
   <p:sldLayoutIdLst>
-    <p:sldLayoutId xmlns:r="http://schemas.openxmlformats.org/officeDocument/2006/relationships" id="2147483649" r:id="R31c07fb4ea5b406f"/>
+    <p:sldLayoutId xmlns:r="http://schemas.openxmlformats.org/officeDocument/2006/relationships" id="2147483649" r:id="Rbe9578ce34eb4828"/>
   </p:sldLayoutIdLst>
   <p:txStyles>
     <p:titleStyle>
@@ -2443,7 +2443,7 @@
           <p:cNvPr id="26" name="">
             <a:extLst xmlns:a="http://schemas.openxmlformats.org/drawingml/2006/main">
               <a:ext uri="{FF2B5EF4-FFF2-40B4-BE49-F238E27FC236}">
-                <a16:creationId xmlns:a16="http://schemas.microsoft.com/office/drawing/2014/main" id="{9F609DE5-F869-42E7-809D-EC2E24E064EB}"/>
+                <a16:creationId xmlns:a16="http://schemas.microsoft.com/office/drawing/2014/main" id="{28DDCA53-BE89-4F97-9DE0-61364DE0B29D}"/>
               </a:ext>
             </a:extLst>
           </p:cNvPr>
@@ -2474,7 +2474,7 @@
           <p:cNvPr id="2" name="">
             <a:extLst xmlns:a="http://schemas.openxmlformats.org/drawingml/2006/main">
               <a:ext uri="{FF2B5EF4-FFF2-40B4-BE49-F238E27FC236}">
-                <a16:creationId xmlns:a16="http://schemas.microsoft.com/office/drawing/2014/main" id="{BC27507E-D187-4808-AAC8-F2A6DDE0C810}"/>
+                <a16:creationId xmlns:a16="http://schemas.microsoft.com/office/drawing/2014/main" id="{5B7220A8-D5D1-4611-AC01-D3FCC9D2D419}"/>
               </a:ext>
             </a:extLst>
           </p:cNvPr>
@@ -2514,7 +2514,7 @@
                   <a:srgbClr val="159A64"/>
                 </a:solidFill>
               </a:rPr>
-              <a:t>GUIDED HANDS-ON WORKSHOP</a:t>
+              <a:t>Guided hands-on workshop</a:t>
             </a:r>
           </a:p>
         </p:txBody>
@@ -2524,7 +2524,7 @@
           <p:cNvPr id="3" name="">
             <a:extLst xmlns:a="http://schemas.openxmlformats.org/drawingml/2006/main">
               <a:ext uri="{FF2B5EF4-FFF2-40B4-BE49-F238E27FC236}">
-                <a16:creationId xmlns:a16="http://schemas.microsoft.com/office/drawing/2014/main" id="{DCC6A905-77AF-4AB2-8C5E-03ECCB3CD0ED}"/>
+                <a16:creationId xmlns:a16="http://schemas.microsoft.com/office/drawing/2014/main" id="{393AD088-A00E-40BF-A08B-BFEFC2DEA03D}"/>
               </a:ext>
             </a:extLst>
           </p:cNvPr>
@@ -2591,7 +2591,7 @@
           <p:cNvPr id="4" name="">
             <a:extLst xmlns:a="http://schemas.openxmlformats.org/drawingml/2006/main">
               <a:ext uri="{FF2B5EF4-FFF2-40B4-BE49-F238E27FC236}">
-                <a16:creationId xmlns:a16="http://schemas.microsoft.com/office/drawing/2014/main" id="{4576AAD1-F6F5-4F46-98DF-5E36CB1652E6}"/>
+                <a16:creationId xmlns:a16="http://schemas.microsoft.com/office/drawing/2014/main" id="{2FE9BB43-A731-462D-8BAE-A49A634B62A5}"/>
               </a:ext>
             </a:extLst>
           </p:cNvPr>
@@ -2641,7 +2641,7 @@
           <p:cNvPr id="5" name="">
             <a:extLst xmlns:a="http://schemas.openxmlformats.org/drawingml/2006/main">
               <a:ext uri="{FF2B5EF4-FFF2-40B4-BE49-F238E27FC236}">
-                <a16:creationId xmlns:a16="http://schemas.microsoft.com/office/drawing/2014/main" id="{D16EAA98-100E-488E-AADD-DE5A9DC2737C}"/>
+                <a16:creationId xmlns:a16="http://schemas.microsoft.com/office/drawing/2014/main" id="{42E61B14-2BE7-47FA-B15D-5DAD4BD9D3B0}"/>
               </a:ext>
             </a:extLst>
           </p:cNvPr>
@@ -2691,7 +2691,7 @@
           <p:cNvPr id="6" name="">
             <a:extLst xmlns:a="http://schemas.openxmlformats.org/drawingml/2006/main">
               <a:ext uri="{FF2B5EF4-FFF2-40B4-BE49-F238E27FC236}">
-                <a16:creationId xmlns:a16="http://schemas.microsoft.com/office/drawing/2014/main" id="{52400D16-18ED-4224-ACD9-40D3C88C83D7}"/>
+                <a16:creationId xmlns:a16="http://schemas.microsoft.com/office/drawing/2014/main" id="{D6D26F33-0A2A-4032-9C08-BD6C0CEB772F}"/>
               </a:ext>
             </a:extLst>
           </p:cNvPr>
@@ -2726,7 +2726,7 @@
           <p:cNvPr id="7" name="">
             <a:extLst xmlns:a="http://schemas.openxmlformats.org/drawingml/2006/main">
               <a:ext uri="{FF2B5EF4-FFF2-40B4-BE49-F238E27FC236}">
-                <a16:creationId xmlns:a16="http://schemas.microsoft.com/office/drawing/2014/main" id="{694990CC-A603-4A44-918F-7BC050ECA8F4}"/>
+                <a16:creationId xmlns:a16="http://schemas.microsoft.com/office/drawing/2014/main" id="{5CD95AC9-DE47-400E-9D27-6E0DFAF2332D}"/>
               </a:ext>
             </a:extLst>
           </p:cNvPr>
@@ -2759,7 +2759,7 @@
           <p:cNvPr id="8" name="">
             <a:extLst xmlns:a="http://schemas.openxmlformats.org/drawingml/2006/main">
               <a:ext uri="{FF2B5EF4-FFF2-40B4-BE49-F238E27FC236}">
-                <a16:creationId xmlns:a16="http://schemas.microsoft.com/office/drawing/2014/main" id="{5C1B54AE-A2C3-4434-87F6-2DE34C8978FF}"/>
+                <a16:creationId xmlns:a16="http://schemas.microsoft.com/office/drawing/2014/main" id="{B39AAC9B-7B13-442E-8510-6B6E0F9467A0}"/>
               </a:ext>
             </a:extLst>
           </p:cNvPr>
@@ -2792,7 +2792,7 @@
           <p:cNvPr id="9" name="">
             <a:extLst xmlns:a="http://schemas.openxmlformats.org/drawingml/2006/main">
               <a:ext uri="{FF2B5EF4-FFF2-40B4-BE49-F238E27FC236}">
-                <a16:creationId xmlns:a16="http://schemas.microsoft.com/office/drawing/2014/main" id="{E644D6BA-7459-4ACB-A19F-724EA3BD5982}"/>
+                <a16:creationId xmlns:a16="http://schemas.microsoft.com/office/drawing/2014/main" id="{279F7C15-F1A8-4B82-865D-702B04A89E4C}"/>
               </a:ext>
             </a:extLst>
           </p:cNvPr>
@@ -2825,7 +2825,7 @@
           <p:cNvPr id="10" name="">
             <a:extLst xmlns:a="http://schemas.openxmlformats.org/drawingml/2006/main">
               <a:ext uri="{FF2B5EF4-FFF2-40B4-BE49-F238E27FC236}">
-                <a16:creationId xmlns:a16="http://schemas.microsoft.com/office/drawing/2014/main" id="{8C7C025D-C8E3-4DB1-A28F-7504A9932901}"/>
+                <a16:creationId xmlns:a16="http://schemas.microsoft.com/office/drawing/2014/main" id="{DEEFF98F-7DB8-456D-BE1A-A5533D7A062D}"/>
               </a:ext>
             </a:extLst>
           </p:cNvPr>
@@ -2858,7 +2858,7 @@
           <p:cNvPr id="11" name="">
             <a:extLst xmlns:a="http://schemas.openxmlformats.org/drawingml/2006/main">
               <a:ext uri="{FF2B5EF4-FFF2-40B4-BE49-F238E27FC236}">
-                <a16:creationId xmlns:a16="http://schemas.microsoft.com/office/drawing/2014/main" id="{905450F5-1668-40CA-9879-7296975DA6B6}"/>
+                <a16:creationId xmlns:a16="http://schemas.microsoft.com/office/drawing/2014/main" id="{50F41BE7-522B-44B8-AE59-E4FE1944157A}"/>
               </a:ext>
             </a:extLst>
           </p:cNvPr>
@@ -2891,7 +2891,7 @@
           <p:cNvPr id="12" name="">
             <a:extLst xmlns:a="http://schemas.openxmlformats.org/drawingml/2006/main">
               <a:ext uri="{FF2B5EF4-FFF2-40B4-BE49-F238E27FC236}">
-                <a16:creationId xmlns:a16="http://schemas.microsoft.com/office/drawing/2014/main" id="{48B20647-7009-4E33-948C-F70BE511D376}"/>
+                <a16:creationId xmlns:a16="http://schemas.microsoft.com/office/drawing/2014/main" id="{7803418B-01E9-44F4-97ED-1DE47FA04041}"/>
               </a:ext>
             </a:extLst>
           </p:cNvPr>
@@ -2924,7 +2924,7 @@
           <p:cNvPr id="13" name="">
             <a:extLst xmlns:a="http://schemas.openxmlformats.org/drawingml/2006/main">
               <a:ext uri="{FF2B5EF4-FFF2-40B4-BE49-F238E27FC236}">
-                <a16:creationId xmlns:a16="http://schemas.microsoft.com/office/drawing/2014/main" id="{06A273D4-EDC7-4803-9D58-560C9B3FAFF6}"/>
+                <a16:creationId xmlns:a16="http://schemas.microsoft.com/office/drawing/2014/main" id="{78592E05-05B0-498A-B7DD-09EDF3E25EEF}"/>
               </a:ext>
             </a:extLst>
           </p:cNvPr>
@@ -2957,7 +2957,7 @@
           <p:cNvPr id="14" name="">
             <a:extLst xmlns:a="http://schemas.openxmlformats.org/drawingml/2006/main">
               <a:ext uri="{FF2B5EF4-FFF2-40B4-BE49-F238E27FC236}">
-                <a16:creationId xmlns:a16="http://schemas.microsoft.com/office/drawing/2014/main" id="{49DBC3AB-F42E-44B4-BB36-8E210D44A7A7}"/>
+                <a16:creationId xmlns:a16="http://schemas.microsoft.com/office/drawing/2014/main" id="{9A1E5E00-20A8-435D-BEAC-E20964EADD3A}"/>
               </a:ext>
             </a:extLst>
           </p:cNvPr>
@@ -2990,7 +2990,7 @@
           <p:cNvPr id="15" name="">
             <a:extLst xmlns:a="http://schemas.openxmlformats.org/drawingml/2006/main">
               <a:ext uri="{FF2B5EF4-FFF2-40B4-BE49-F238E27FC236}">
-                <a16:creationId xmlns:a16="http://schemas.microsoft.com/office/drawing/2014/main" id="{60535504-40BE-4007-9453-93A3A383D628}"/>
+                <a16:creationId xmlns:a16="http://schemas.microsoft.com/office/drawing/2014/main" id="{0380E8EB-E963-472F-A8D8-2B3238130BE9}"/>
               </a:ext>
             </a:extLst>
           </p:cNvPr>
@@ -3023,7 +3023,7 @@
           <p:cNvPr id="16" name="">
             <a:extLst xmlns:a="http://schemas.openxmlformats.org/drawingml/2006/main">
               <a:ext uri="{FF2B5EF4-FFF2-40B4-BE49-F238E27FC236}">
-                <a16:creationId xmlns:a16="http://schemas.microsoft.com/office/drawing/2014/main" id="{F45751CC-B801-4B44-8C2A-7A823DE6C08E}"/>
+                <a16:creationId xmlns:a16="http://schemas.microsoft.com/office/drawing/2014/main" id="{559A63F0-00AD-45DF-BB75-374496D91DB1}"/>
               </a:ext>
             </a:extLst>
           </p:cNvPr>
@@ -3056,7 +3056,7 @@
           <p:cNvPr id="17" name="">
             <a:extLst xmlns:a="http://schemas.openxmlformats.org/drawingml/2006/main">
               <a:ext uri="{FF2B5EF4-FFF2-40B4-BE49-F238E27FC236}">
-                <a16:creationId xmlns:a16="http://schemas.microsoft.com/office/drawing/2014/main" id="{D93CBF40-C729-4F61-AC9A-51A46571F815}"/>
+                <a16:creationId xmlns:a16="http://schemas.microsoft.com/office/drawing/2014/main" id="{0D59AFC2-F48F-4147-AD7D-877DFFE56F25}"/>
               </a:ext>
             </a:extLst>
           </p:cNvPr>
@@ -3089,7 +3089,7 @@
           <p:cNvPr id="18" name="">
             <a:extLst xmlns:a="http://schemas.openxmlformats.org/drawingml/2006/main">
               <a:ext uri="{FF2B5EF4-FFF2-40B4-BE49-F238E27FC236}">
-                <a16:creationId xmlns:a16="http://schemas.microsoft.com/office/drawing/2014/main" id="{00BEC271-5DE8-4522-A2F2-1BF24B8BAFD0}"/>
+                <a16:creationId xmlns:a16="http://schemas.microsoft.com/office/drawing/2014/main" id="{EA8664E9-9CAE-4D7D-86C0-5441C51AD03F}"/>
               </a:ext>
             </a:extLst>
           </p:cNvPr>
@@ -3122,7 +3122,7 @@
           <p:cNvPr id="19" name="">
             <a:extLst xmlns:a="http://schemas.openxmlformats.org/drawingml/2006/main">
               <a:ext uri="{FF2B5EF4-FFF2-40B4-BE49-F238E27FC236}">
-                <a16:creationId xmlns:a16="http://schemas.microsoft.com/office/drawing/2014/main" id="{396D7A4A-3C08-48E9-B2F7-4ED1CA05F4E5}"/>
+                <a16:creationId xmlns:a16="http://schemas.microsoft.com/office/drawing/2014/main" id="{0E11234A-45C8-45B9-A004-0C887ED2E549}"/>
               </a:ext>
             </a:extLst>
           </p:cNvPr>
@@ -3155,7 +3155,7 @@
           <p:cNvPr id="20" name="">
             <a:extLst xmlns:a="http://schemas.openxmlformats.org/drawingml/2006/main">
               <a:ext uri="{FF2B5EF4-FFF2-40B4-BE49-F238E27FC236}">
-                <a16:creationId xmlns:a16="http://schemas.microsoft.com/office/drawing/2014/main" id="{A88CDA0B-3334-46AC-BF73-68CA56EE585D}"/>
+                <a16:creationId xmlns:a16="http://schemas.microsoft.com/office/drawing/2014/main" id="{BFA243E7-F754-4EDF-97D6-24B0BE49D4F8}"/>
               </a:ext>
             </a:extLst>
           </p:cNvPr>
@@ -3188,7 +3188,7 @@
           <p:cNvPr id="21" name="">
             <a:extLst xmlns:a="http://schemas.openxmlformats.org/drawingml/2006/main">
               <a:ext uri="{FF2B5EF4-FFF2-40B4-BE49-F238E27FC236}">
-                <a16:creationId xmlns:a16="http://schemas.microsoft.com/office/drawing/2014/main" id="{01AB112A-F906-4593-B8C1-1845C669FBDC}"/>
+                <a16:creationId xmlns:a16="http://schemas.microsoft.com/office/drawing/2014/main" id="{1E8AC2CE-5FBD-44FC-A99A-02B4D7772CB8}"/>
               </a:ext>
             </a:extLst>
           </p:cNvPr>
@@ -3221,7 +3221,7 @@
           <p:cNvPr id="22" name="">
             <a:extLst xmlns:a="http://schemas.openxmlformats.org/drawingml/2006/main">
               <a:ext uri="{FF2B5EF4-FFF2-40B4-BE49-F238E27FC236}">
-                <a16:creationId xmlns:a16="http://schemas.microsoft.com/office/drawing/2014/main" id="{CFD5D21C-F601-403E-B7F6-7318D2F94CF0}"/>
+                <a16:creationId xmlns:a16="http://schemas.microsoft.com/office/drawing/2014/main" id="{BFE36E15-C01F-4E1E-B8FD-FFDACA523334}"/>
               </a:ext>
             </a:extLst>
           </p:cNvPr>
@@ -3254,7 +3254,7 @@
           <p:cNvPr id="23" name="">
             <a:extLst xmlns:a="http://schemas.openxmlformats.org/drawingml/2006/main">
               <a:ext uri="{FF2B5EF4-FFF2-40B4-BE49-F238E27FC236}">
-                <a16:creationId xmlns:a16="http://schemas.microsoft.com/office/drawing/2014/main" id="{CF26F6F3-0CD3-4AAC-9F82-DA58EA1DC4DD}"/>
+                <a16:creationId xmlns:a16="http://schemas.microsoft.com/office/drawing/2014/main" id="{A759179A-B039-4513-ADDD-B7CF8B452F78}"/>
               </a:ext>
             </a:extLst>
           </p:cNvPr>
@@ -3285,7 +3285,7 @@
           <p:cNvPr id="24" name="">
             <a:extLst xmlns:a="http://schemas.openxmlformats.org/drawingml/2006/main">
               <a:ext uri="{FF2B5EF4-FFF2-40B4-BE49-F238E27FC236}">
-                <a16:creationId xmlns:a16="http://schemas.microsoft.com/office/drawing/2014/main" id="{1EB8F37E-B8D1-461C-B8B1-846CD1C7EB55}"/>
+                <a16:creationId xmlns:a16="http://schemas.microsoft.com/office/drawing/2014/main" id="{4BA4C4A7-1241-451D-8EF3-6273A1488E9E}"/>
               </a:ext>
             </a:extLst>
           </p:cNvPr>
@@ -3335,7 +3335,7 @@
           <p:cNvPr id="25" name="">
             <a:extLst xmlns:a="http://schemas.openxmlformats.org/drawingml/2006/main">
               <a:ext uri="{FF2B5EF4-FFF2-40B4-BE49-F238E27FC236}">
-                <a16:creationId xmlns:a16="http://schemas.microsoft.com/office/drawing/2014/main" id="{A474B122-927F-4C23-A14F-F6E349FC327A}"/>
+                <a16:creationId xmlns:a16="http://schemas.microsoft.com/office/drawing/2014/main" id="{969A03DA-65BC-442D-8806-BD8120B1F556}"/>
               </a:ext>
             </a:extLst>
           </p:cNvPr>
@@ -3383,7 +3383,7 @@
     </p:spTree>
     <p:extLst>
       <p:ext uri="{BB962C8B-B14F-4D97-AF65-F5344CB8AC3E}">
-        <p14:creationId xmlns:p14="http://schemas.microsoft.com/office/powerpoint/2010/main" val="1968019002"/>
+        <p14:creationId xmlns:p14="http://schemas.microsoft.com/office/powerpoint/2010/main" val="2058062955"/>
       </p:ext>
     </p:extLst>
   </p:cSld>
@@ -3414,7 +3414,7 @@
           <p:cNvPr id="25" name="">
             <a:extLst xmlns:a="http://schemas.openxmlformats.org/drawingml/2006/main">
               <a:ext uri="{FF2B5EF4-FFF2-40B4-BE49-F238E27FC236}">
-                <a16:creationId xmlns:a16="http://schemas.microsoft.com/office/drawing/2014/main" id="{C520A0F2-BF51-4870-B99A-8AFF827BB4A1}"/>
+                <a16:creationId xmlns:a16="http://schemas.microsoft.com/office/drawing/2014/main" id="{4DF89478-BBC8-4970-90E3-C92A4F90908E}"/>
               </a:ext>
             </a:extLst>
           </p:cNvPr>
@@ -3447,7 +3447,7 @@
           <p:cNvPr id="2" name="">
             <a:extLst xmlns:a="http://schemas.openxmlformats.org/drawingml/2006/main">
               <a:ext uri="{FF2B5EF4-FFF2-40B4-BE49-F238E27FC236}">
-                <a16:creationId xmlns:a16="http://schemas.microsoft.com/office/drawing/2014/main" id="{BACDB514-2827-4BFD-A325-11EB23AD2C6A}"/>
+                <a16:creationId xmlns:a16="http://schemas.microsoft.com/office/drawing/2014/main" id="{64265E5D-CCA4-46A6-B906-7F6C457CE1A6}"/>
               </a:ext>
             </a:extLst>
           </p:cNvPr>
@@ -3459,7 +3459,7 @@
         <p:spPr>
           <a:xfrm xmlns:a="http://schemas.openxmlformats.org/drawingml/2006/main">
             <a:off x="895350" y="504825"/>
-            <a:ext cx="2000250" cy="285750"/>
+            <a:ext cx="4000500" cy="285750"/>
           </a:xfrm>
           <a:prstGeom xmlns:a="http://schemas.openxmlformats.org/drawingml/2006/main" prst="rect">
             <a:avLst/>
@@ -3487,7 +3487,7 @@
                   <a:srgbClr val="48B985"/>
                 </a:solidFill>
               </a:rPr>
-              <a:t>YOU DO</a:t>
+              <a:t>Test the conversation</a:t>
             </a:r>
           </a:p>
         </p:txBody>
@@ -3497,7 +3497,7 @@
           <p:cNvPr id="3" name="">
             <a:extLst xmlns:a="http://schemas.openxmlformats.org/drawingml/2006/main">
               <a:ext uri="{FF2B5EF4-FFF2-40B4-BE49-F238E27FC236}">
-                <a16:creationId xmlns:a16="http://schemas.microsoft.com/office/drawing/2014/main" id="{F57ED901-36EB-4771-B76D-74697BB2E33E}"/>
+                <a16:creationId xmlns:a16="http://schemas.microsoft.com/office/drawing/2014/main" id="{94673838-A9E0-496D-8BA5-39DB9DF64470}"/>
               </a:ext>
             </a:extLst>
           </p:cNvPr>
@@ -3547,7 +3547,7 @@
           <p:cNvPr id="4" name="">
             <a:extLst xmlns:a="http://schemas.openxmlformats.org/drawingml/2006/main">
               <a:ext uri="{FF2B5EF4-FFF2-40B4-BE49-F238E27FC236}">
-                <a16:creationId xmlns:a16="http://schemas.microsoft.com/office/drawing/2014/main" id="{3B1CBC58-9850-4F0D-AC04-A30D6C83C1D2}"/>
+                <a16:creationId xmlns:a16="http://schemas.microsoft.com/office/drawing/2014/main" id="{BA32B613-1026-4B93-8A54-AC983B9C4E25}"/>
               </a:ext>
             </a:extLst>
           </p:cNvPr>
@@ -3597,7 +3597,7 @@
           <p:cNvPr id="5" name="">
             <a:extLst xmlns:a="http://schemas.openxmlformats.org/drawingml/2006/main">
               <a:ext uri="{FF2B5EF4-FFF2-40B4-BE49-F238E27FC236}">
-                <a16:creationId xmlns:a16="http://schemas.microsoft.com/office/drawing/2014/main" id="{CCA9E873-9C40-4C03-AD95-6F6CCB92763A}"/>
+                <a16:creationId xmlns:a16="http://schemas.microsoft.com/office/drawing/2014/main" id="{3D6AFC22-A213-49B6-88D0-B99384AEA353}"/>
               </a:ext>
             </a:extLst>
           </p:cNvPr>
@@ -3628,7 +3628,7 @@
           <p:cNvPr id="6" name="">
             <a:extLst xmlns:a="http://schemas.openxmlformats.org/drawingml/2006/main">
               <a:ext uri="{FF2B5EF4-FFF2-40B4-BE49-F238E27FC236}">
-                <a16:creationId xmlns:a16="http://schemas.microsoft.com/office/drawing/2014/main" id="{CAE45A8E-01B7-4CA5-A121-A8D9339EEE8A}"/>
+                <a16:creationId xmlns:a16="http://schemas.microsoft.com/office/drawing/2014/main" id="{DC268E19-B800-41A8-9F59-6BF88C6964E7}"/>
               </a:ext>
             </a:extLst>
           </p:cNvPr>
@@ -3678,7 +3678,7 @@
           <p:cNvPr id="7" name="">
             <a:extLst xmlns:a="http://schemas.openxmlformats.org/drawingml/2006/main">
               <a:ext uri="{FF2B5EF4-FFF2-40B4-BE49-F238E27FC236}">
-                <a16:creationId xmlns:a16="http://schemas.microsoft.com/office/drawing/2014/main" id="{106D0859-25D5-4D95-BE62-09308716AFF0}"/>
+                <a16:creationId xmlns:a16="http://schemas.microsoft.com/office/drawing/2014/main" id="{CEEC6444-D05A-4F8B-86FA-31E07046C8CD}"/>
               </a:ext>
             </a:extLst>
           </p:cNvPr>
@@ -3728,7 +3728,7 @@
           <p:cNvPr id="8" name="">
             <a:extLst xmlns:a="http://schemas.openxmlformats.org/drawingml/2006/main">
               <a:ext uri="{FF2B5EF4-FFF2-40B4-BE49-F238E27FC236}">
-                <a16:creationId xmlns:a16="http://schemas.microsoft.com/office/drawing/2014/main" id="{DAFCF7BD-FE72-4A6A-A557-CA88B242E3D1}"/>
+                <a16:creationId xmlns:a16="http://schemas.microsoft.com/office/drawing/2014/main" id="{604C76B1-9DA8-4772-BBCE-AA1DC5F51609}"/>
               </a:ext>
             </a:extLst>
           </p:cNvPr>
@@ -3778,7 +3778,7 @@
           <p:cNvPr id="9" name="">
             <a:extLst xmlns:a="http://schemas.openxmlformats.org/drawingml/2006/main">
               <a:ext uri="{FF2B5EF4-FFF2-40B4-BE49-F238E27FC236}">
-                <a16:creationId xmlns:a16="http://schemas.microsoft.com/office/drawing/2014/main" id="{0546DFA0-F045-4807-9347-AFBEADC86A96}"/>
+                <a16:creationId xmlns:a16="http://schemas.microsoft.com/office/drawing/2014/main" id="{F38B7F32-3D82-47E1-9F3C-8FFB9E492FAF}"/>
               </a:ext>
             </a:extLst>
           </p:cNvPr>
@@ -3828,7 +3828,7 @@
           <p:cNvPr id="10" name="">
             <a:extLst xmlns:a="http://schemas.openxmlformats.org/drawingml/2006/main">
               <a:ext uri="{FF2B5EF4-FFF2-40B4-BE49-F238E27FC236}">
-                <a16:creationId xmlns:a16="http://schemas.microsoft.com/office/drawing/2014/main" id="{6475CA65-30D2-43ED-A4AE-4DAE2C8037D8}"/>
+                <a16:creationId xmlns:a16="http://schemas.microsoft.com/office/drawing/2014/main" id="{0978C51A-97DD-4A07-B46F-AFB1AA7766E5}"/>
               </a:ext>
             </a:extLst>
           </p:cNvPr>
@@ -3878,7 +3878,7 @@
           <p:cNvPr id="11" name="">
             <a:extLst xmlns:a="http://schemas.openxmlformats.org/drawingml/2006/main">
               <a:ext uri="{FF2B5EF4-FFF2-40B4-BE49-F238E27FC236}">
-                <a16:creationId xmlns:a16="http://schemas.microsoft.com/office/drawing/2014/main" id="{B6B5E6FE-E09A-48B9-9719-B3F5CDA9BE0B}"/>
+                <a16:creationId xmlns:a16="http://schemas.microsoft.com/office/drawing/2014/main" id="{06C0BDBA-E8E3-4B87-B18F-2F895910C59E}"/>
               </a:ext>
             </a:extLst>
           </p:cNvPr>
@@ -3909,7 +3909,7 @@
           <p:cNvPr id="12" name="">
             <a:extLst xmlns:a="http://schemas.openxmlformats.org/drawingml/2006/main">
               <a:ext uri="{FF2B5EF4-FFF2-40B4-BE49-F238E27FC236}">
-                <a16:creationId xmlns:a16="http://schemas.microsoft.com/office/drawing/2014/main" id="{17A75426-051E-40D9-8229-73C2022DC5CD}"/>
+                <a16:creationId xmlns:a16="http://schemas.microsoft.com/office/drawing/2014/main" id="{0C46BE7D-EC3A-45E2-9E98-DCE4DFCDDF9A}"/>
               </a:ext>
             </a:extLst>
           </p:cNvPr>
@@ -3959,7 +3959,7 @@
           <p:cNvPr id="13" name="">
             <a:extLst xmlns:a="http://schemas.openxmlformats.org/drawingml/2006/main">
               <a:ext uri="{FF2B5EF4-FFF2-40B4-BE49-F238E27FC236}">
-                <a16:creationId xmlns:a16="http://schemas.microsoft.com/office/drawing/2014/main" id="{33021E2F-411F-46F2-B9A9-B97B5BAE7DE4}"/>
+                <a16:creationId xmlns:a16="http://schemas.microsoft.com/office/drawing/2014/main" id="{11C53B05-14AC-4B26-B385-5DD2BEC72BD6}"/>
               </a:ext>
             </a:extLst>
           </p:cNvPr>
@@ -4009,7 +4009,7 @@
           <p:cNvPr id="14" name="">
             <a:extLst xmlns:a="http://schemas.openxmlformats.org/drawingml/2006/main">
               <a:ext uri="{FF2B5EF4-FFF2-40B4-BE49-F238E27FC236}">
-                <a16:creationId xmlns:a16="http://schemas.microsoft.com/office/drawing/2014/main" id="{9BA87A66-1446-40FB-BD2D-9F6CCB1E4428}"/>
+                <a16:creationId xmlns:a16="http://schemas.microsoft.com/office/drawing/2014/main" id="{8A3CA018-C9FE-4011-8A1E-4427589EE3AF}"/>
               </a:ext>
             </a:extLst>
           </p:cNvPr>
@@ -4059,7 +4059,7 @@
           <p:cNvPr id="15" name="">
             <a:extLst xmlns:a="http://schemas.openxmlformats.org/drawingml/2006/main">
               <a:ext uri="{FF2B5EF4-FFF2-40B4-BE49-F238E27FC236}">
-                <a16:creationId xmlns:a16="http://schemas.microsoft.com/office/drawing/2014/main" id="{E06B5B32-00B2-4EB1-B409-B7D60640C901}"/>
+                <a16:creationId xmlns:a16="http://schemas.microsoft.com/office/drawing/2014/main" id="{73EF9FC3-A774-4243-B841-7EEAC0F77B04}"/>
               </a:ext>
             </a:extLst>
           </p:cNvPr>
@@ -4090,7 +4090,7 @@
           <p:cNvPr id="16" name="">
             <a:extLst xmlns:a="http://schemas.openxmlformats.org/drawingml/2006/main">
               <a:ext uri="{FF2B5EF4-FFF2-40B4-BE49-F238E27FC236}">
-                <a16:creationId xmlns:a16="http://schemas.microsoft.com/office/drawing/2014/main" id="{0A15CABC-8782-4E8A-A19A-5EB0E75BE00C}"/>
+                <a16:creationId xmlns:a16="http://schemas.microsoft.com/office/drawing/2014/main" id="{E16A8CD4-A49C-4A36-9E18-C97D3A7940F7}"/>
               </a:ext>
             </a:extLst>
           </p:cNvPr>
@@ -4140,7 +4140,7 @@
           <p:cNvPr id="17" name="">
             <a:extLst xmlns:a="http://schemas.openxmlformats.org/drawingml/2006/main">
               <a:ext uri="{FF2B5EF4-FFF2-40B4-BE49-F238E27FC236}">
-                <a16:creationId xmlns:a16="http://schemas.microsoft.com/office/drawing/2014/main" id="{F54F9320-3EBF-4D83-8F62-3DA68207549D}"/>
+                <a16:creationId xmlns:a16="http://schemas.microsoft.com/office/drawing/2014/main" id="{C0C1C685-83B9-471C-A9EB-ECAD0E007752}"/>
               </a:ext>
             </a:extLst>
           </p:cNvPr>
@@ -4190,7 +4190,7 @@
           <p:cNvPr id="18" name="">
             <a:extLst xmlns:a="http://schemas.openxmlformats.org/drawingml/2006/main">
               <a:ext uri="{FF2B5EF4-FFF2-40B4-BE49-F238E27FC236}">
-                <a16:creationId xmlns:a16="http://schemas.microsoft.com/office/drawing/2014/main" id="{3ED27939-A66F-452D-88CC-C1EF98F75CB1}"/>
+                <a16:creationId xmlns:a16="http://schemas.microsoft.com/office/drawing/2014/main" id="{E0BAF8E0-7324-4F22-82F3-B391D3077B5A}"/>
               </a:ext>
             </a:extLst>
           </p:cNvPr>
@@ -4240,7 +4240,7 @@
           <p:cNvPr id="19" name="">
             <a:extLst xmlns:a="http://schemas.openxmlformats.org/drawingml/2006/main">
               <a:ext uri="{FF2B5EF4-FFF2-40B4-BE49-F238E27FC236}">
-                <a16:creationId xmlns:a16="http://schemas.microsoft.com/office/drawing/2014/main" id="{A6268558-D6DB-4E09-9AEA-9E87052C0E79}"/>
+                <a16:creationId xmlns:a16="http://schemas.microsoft.com/office/drawing/2014/main" id="{AD0D0E34-178B-41C3-9DAB-EAE520632C67}"/>
               </a:ext>
             </a:extLst>
           </p:cNvPr>
@@ -4271,7 +4271,7 @@
           <p:cNvPr id="20" name="">
             <a:extLst xmlns:a="http://schemas.openxmlformats.org/drawingml/2006/main">
               <a:ext uri="{FF2B5EF4-FFF2-40B4-BE49-F238E27FC236}">
-                <a16:creationId xmlns:a16="http://schemas.microsoft.com/office/drawing/2014/main" id="{DB3794FC-D666-45A1-B316-579BAD132E50}"/>
+                <a16:creationId xmlns:a16="http://schemas.microsoft.com/office/drawing/2014/main" id="{CD90E9A2-AAF0-4993-A347-8D3E25AC2CCA}"/>
               </a:ext>
             </a:extLst>
           </p:cNvPr>
@@ -4321,7 +4321,7 @@
           <p:cNvPr id="21" name="">
             <a:extLst xmlns:a="http://schemas.openxmlformats.org/drawingml/2006/main">
               <a:ext uri="{FF2B5EF4-FFF2-40B4-BE49-F238E27FC236}">
-                <a16:creationId xmlns:a16="http://schemas.microsoft.com/office/drawing/2014/main" id="{6A219C78-193B-4565-91B9-F17CAB98C1C7}"/>
+                <a16:creationId xmlns:a16="http://schemas.microsoft.com/office/drawing/2014/main" id="{5B2F4BA9-83D1-40DC-80E4-014CA5735912}"/>
               </a:ext>
             </a:extLst>
           </p:cNvPr>
@@ -4371,7 +4371,7 @@
           <p:cNvPr id="22" name="">
             <a:extLst xmlns:a="http://schemas.openxmlformats.org/drawingml/2006/main">
               <a:ext uri="{FF2B5EF4-FFF2-40B4-BE49-F238E27FC236}">
-                <a16:creationId xmlns:a16="http://schemas.microsoft.com/office/drawing/2014/main" id="{6F77B911-112E-49F6-A5C7-81009B7D9940}"/>
+                <a16:creationId xmlns:a16="http://schemas.microsoft.com/office/drawing/2014/main" id="{40E61AAC-0574-4B61-9A12-3B9E62BA3782}"/>
               </a:ext>
             </a:extLst>
           </p:cNvPr>
@@ -4421,7 +4421,7 @@
           <p:cNvPr id="23" name="">
             <a:extLst xmlns:a="http://schemas.openxmlformats.org/drawingml/2006/main">
               <a:ext uri="{FF2B5EF4-FFF2-40B4-BE49-F238E27FC236}">
-                <a16:creationId xmlns:a16="http://schemas.microsoft.com/office/drawing/2014/main" id="{EAD7ABD0-9371-4442-99F2-9B22EDC5CDAB}"/>
+                <a16:creationId xmlns:a16="http://schemas.microsoft.com/office/drawing/2014/main" id="{04476CA4-EEF9-4B85-B47B-87847D53C0BF}"/>
               </a:ext>
             </a:extLst>
           </p:cNvPr>
@@ -4452,7 +4452,7 @@
           <p:cNvPr id="24" name="">
             <a:extLst xmlns:a="http://schemas.openxmlformats.org/drawingml/2006/main">
               <a:ext uri="{FF2B5EF4-FFF2-40B4-BE49-F238E27FC236}">
-                <a16:creationId xmlns:a16="http://schemas.microsoft.com/office/drawing/2014/main" id="{53D2FA3B-5435-4C35-8DEC-254FAAFC9856}"/>
+                <a16:creationId xmlns:a16="http://schemas.microsoft.com/office/drawing/2014/main" id="{AF3C924E-FC25-4AB7-BC7F-4D296AAF0A74}"/>
               </a:ext>
             </a:extLst>
           </p:cNvPr>
@@ -4500,7 +4500,7 @@
     </p:spTree>
     <p:extLst>
       <p:ext uri="{BB962C8B-B14F-4D97-AF65-F5344CB8AC3E}">
-        <p14:creationId xmlns:p14="http://schemas.microsoft.com/office/powerpoint/2010/main" val="2015717292"/>
+        <p14:creationId xmlns:p14="http://schemas.microsoft.com/office/powerpoint/2010/main" val="1697140949"/>
       </p:ext>
     </p:extLst>
   </p:cSld>
@@ -4531,7 +4531,7 @@
           <p:cNvPr id="50" name="">
             <a:extLst xmlns:a="http://schemas.openxmlformats.org/drawingml/2006/main">
               <a:ext uri="{FF2B5EF4-FFF2-40B4-BE49-F238E27FC236}">
-                <a16:creationId xmlns:a16="http://schemas.microsoft.com/office/drawing/2014/main" id="{679712C0-1903-4E0A-9418-0A79A31FB9D8}"/>
+                <a16:creationId xmlns:a16="http://schemas.microsoft.com/office/drawing/2014/main" id="{BB627550-978A-4249-A8EC-019F4BB618BA}"/>
               </a:ext>
             </a:extLst>
           </p:cNvPr>
@@ -4564,7 +4564,7 @@
           <p:cNvPr id="2" name="">
             <a:extLst xmlns:a="http://schemas.openxmlformats.org/drawingml/2006/main">
               <a:ext uri="{FF2B5EF4-FFF2-40B4-BE49-F238E27FC236}">
-                <a16:creationId xmlns:a16="http://schemas.microsoft.com/office/drawing/2014/main" id="{AB054D41-B997-40CA-A99C-696FE09C9F18}"/>
+                <a16:creationId xmlns:a16="http://schemas.microsoft.com/office/drawing/2014/main" id="{6EEB53CF-AA81-49F1-A817-9710FABEEBF5}"/>
               </a:ext>
             </a:extLst>
           </p:cNvPr>
@@ -4576,7 +4576,7 @@
         <p:spPr>
           <a:xfrm xmlns:a="http://schemas.openxmlformats.org/drawingml/2006/main">
             <a:off x="895350" y="504825"/>
-            <a:ext cx="2000250" cy="285750"/>
+            <a:ext cx="4000500" cy="285750"/>
           </a:xfrm>
           <a:prstGeom xmlns:a="http://schemas.openxmlformats.org/drawingml/2006/main" prst="rect">
             <a:avLst/>
@@ -4604,7 +4604,7 @@
                   <a:srgbClr val="159A64"/>
                 </a:solidFill>
               </a:rPr>
-              <a:t>I SHOW</a:t>
+              <a:t>See what happens underneath</a:t>
             </a:r>
           </a:p>
         </p:txBody>
@@ -4614,7 +4614,7 @@
           <p:cNvPr id="3" name="">
             <a:extLst xmlns:a="http://schemas.openxmlformats.org/drawingml/2006/main">
               <a:ext uri="{FF2B5EF4-FFF2-40B4-BE49-F238E27FC236}">
-                <a16:creationId xmlns:a16="http://schemas.microsoft.com/office/drawing/2014/main" id="{36BABE1C-F3A2-42AD-B438-F56445890FF9}"/>
+                <a16:creationId xmlns:a16="http://schemas.microsoft.com/office/drawing/2014/main" id="{28F72B51-4A33-4641-9815-2DAF1282ADDE}"/>
               </a:ext>
             </a:extLst>
           </p:cNvPr>
@@ -4664,7 +4664,7 @@
           <p:cNvPr id="4" name="">
             <a:extLst xmlns:a="http://schemas.openxmlformats.org/drawingml/2006/main">
               <a:ext uri="{FF2B5EF4-FFF2-40B4-BE49-F238E27FC236}">
-                <a16:creationId xmlns:a16="http://schemas.microsoft.com/office/drawing/2014/main" id="{C2CE31EA-4491-49E9-9081-8271FEF2FBD0}"/>
+                <a16:creationId xmlns:a16="http://schemas.microsoft.com/office/drawing/2014/main" id="{2EFA4614-4288-4252-9E68-3A5E2A06D1EC}"/>
               </a:ext>
             </a:extLst>
           </p:cNvPr>
@@ -4714,7 +4714,7 @@
           <p:cNvPr id="5" name="">
             <a:extLst xmlns:a="http://schemas.openxmlformats.org/drawingml/2006/main">
               <a:ext uri="{FF2B5EF4-FFF2-40B4-BE49-F238E27FC236}">
-                <a16:creationId xmlns:a16="http://schemas.microsoft.com/office/drawing/2014/main" id="{C9C4A478-02C6-4EA6-8D63-FDFFD63C20B1}"/>
+                <a16:creationId xmlns:a16="http://schemas.microsoft.com/office/drawing/2014/main" id="{DFC3C47D-0489-4D1E-A2AA-8F50D2F85F65}"/>
               </a:ext>
             </a:extLst>
           </p:cNvPr>
@@ -4745,7 +4745,7 @@
           <p:cNvPr id="6" name="">
             <a:extLst xmlns:a="http://schemas.openxmlformats.org/drawingml/2006/main">
               <a:ext uri="{FF2B5EF4-FFF2-40B4-BE49-F238E27FC236}">
-                <a16:creationId xmlns:a16="http://schemas.microsoft.com/office/drawing/2014/main" id="{80ABAB94-3CC1-44B5-9F48-BE4442A356EC}"/>
+                <a16:creationId xmlns:a16="http://schemas.microsoft.com/office/drawing/2014/main" id="{BDABC384-5EE5-4660-94D0-A92E4A8BCE31}"/>
               </a:ext>
             </a:extLst>
           </p:cNvPr>
@@ -4795,7 +4795,7 @@
           <p:cNvPr id="7" name="">
             <a:extLst xmlns:a="http://schemas.openxmlformats.org/drawingml/2006/main">
               <a:ext uri="{FF2B5EF4-FFF2-40B4-BE49-F238E27FC236}">
-                <a16:creationId xmlns:a16="http://schemas.microsoft.com/office/drawing/2014/main" id="{6AED9BFD-2A15-43F6-B608-B9CC42C3730D}"/>
+                <a16:creationId xmlns:a16="http://schemas.microsoft.com/office/drawing/2014/main" id="{E039EF98-995C-4AEF-9E75-F223134653CD}"/>
               </a:ext>
             </a:extLst>
           </p:cNvPr>
@@ -4845,7 +4845,7 @@
           <p:cNvPr id="8" name="">
             <a:extLst xmlns:a="http://schemas.openxmlformats.org/drawingml/2006/main">
               <a:ext uri="{FF2B5EF4-FFF2-40B4-BE49-F238E27FC236}">
-                <a16:creationId xmlns:a16="http://schemas.microsoft.com/office/drawing/2014/main" id="{8DC55A10-CF34-42A5-A3F6-C8A13FCE0446}"/>
+                <a16:creationId xmlns:a16="http://schemas.microsoft.com/office/drawing/2014/main" id="{BB351C01-2CDD-4D0F-AE89-ABFB1D8BFE2D}"/>
               </a:ext>
             </a:extLst>
           </p:cNvPr>
@@ -4895,7 +4895,7 @@
           <p:cNvPr id="9" name="">
             <a:extLst xmlns:a="http://schemas.openxmlformats.org/drawingml/2006/main">
               <a:ext uri="{FF2B5EF4-FFF2-40B4-BE49-F238E27FC236}">
-                <a16:creationId xmlns:a16="http://schemas.microsoft.com/office/drawing/2014/main" id="{914C88E1-5B8D-4AEB-831A-B1CBF09EF8CB}"/>
+                <a16:creationId xmlns:a16="http://schemas.microsoft.com/office/drawing/2014/main" id="{7E23528B-1F94-4C46-AD41-1FA828B45BFA}"/>
               </a:ext>
             </a:extLst>
           </p:cNvPr>
@@ -4928,7 +4928,7 @@
           <p:cNvPr id="10" name="">
             <a:extLst xmlns:a="http://schemas.openxmlformats.org/drawingml/2006/main">
               <a:ext uri="{FF2B5EF4-FFF2-40B4-BE49-F238E27FC236}">
-                <a16:creationId xmlns:a16="http://schemas.microsoft.com/office/drawing/2014/main" id="{B9E7FF85-1282-4D65-9468-8E0044631BC1}"/>
+                <a16:creationId xmlns:a16="http://schemas.microsoft.com/office/drawing/2014/main" id="{B953491C-3AA6-4551-89AC-4EE455D1002D}"/>
               </a:ext>
             </a:extLst>
           </p:cNvPr>
@@ -4961,7 +4961,7 @@
           <p:cNvPr id="11" name="">
             <a:extLst xmlns:a="http://schemas.openxmlformats.org/drawingml/2006/main">
               <a:ext uri="{FF2B5EF4-FFF2-40B4-BE49-F238E27FC236}">
-                <a16:creationId xmlns:a16="http://schemas.microsoft.com/office/drawing/2014/main" id="{3EE96734-FE10-487B-BA0F-519231E5ECE2}"/>
+                <a16:creationId xmlns:a16="http://schemas.microsoft.com/office/drawing/2014/main" id="{559DEF66-B8BF-4639-9F9E-C59EC2EBE813}"/>
               </a:ext>
             </a:extLst>
           </p:cNvPr>
@@ -4994,7 +4994,7 @@
           <p:cNvPr id="12" name="">
             <a:extLst xmlns:a="http://schemas.openxmlformats.org/drawingml/2006/main">
               <a:ext uri="{FF2B5EF4-FFF2-40B4-BE49-F238E27FC236}">
-                <a16:creationId xmlns:a16="http://schemas.microsoft.com/office/drawing/2014/main" id="{F879607C-35FD-4A67-BE62-C53132947847}"/>
+                <a16:creationId xmlns:a16="http://schemas.microsoft.com/office/drawing/2014/main" id="{7E5B700E-1C11-4155-AAFB-89E54D11547B}"/>
               </a:ext>
             </a:extLst>
           </p:cNvPr>
@@ -5027,7 +5027,7 @@
           <p:cNvPr id="13" name="">
             <a:extLst xmlns:a="http://schemas.openxmlformats.org/drawingml/2006/main">
               <a:ext uri="{FF2B5EF4-FFF2-40B4-BE49-F238E27FC236}">
-                <a16:creationId xmlns:a16="http://schemas.microsoft.com/office/drawing/2014/main" id="{57A5FCBC-A998-4129-AE22-2F02346B6FB4}"/>
+                <a16:creationId xmlns:a16="http://schemas.microsoft.com/office/drawing/2014/main" id="{B7245AEB-D621-4873-A59B-A888E8626D27}"/>
               </a:ext>
             </a:extLst>
           </p:cNvPr>
@@ -5060,7 +5060,7 @@
           <p:cNvPr id="14" name="">
             <a:extLst xmlns:a="http://schemas.openxmlformats.org/drawingml/2006/main">
               <a:ext uri="{FF2B5EF4-FFF2-40B4-BE49-F238E27FC236}">
-                <a16:creationId xmlns:a16="http://schemas.microsoft.com/office/drawing/2014/main" id="{BDE2182E-3849-4081-95D5-4DB301E7CFF5}"/>
+                <a16:creationId xmlns:a16="http://schemas.microsoft.com/office/drawing/2014/main" id="{04C13778-F496-4BFB-8145-4CBF21FD87F2}"/>
               </a:ext>
             </a:extLst>
           </p:cNvPr>
@@ -5093,7 +5093,7 @@
           <p:cNvPr id="15" name="">
             <a:extLst xmlns:a="http://schemas.openxmlformats.org/drawingml/2006/main">
               <a:ext uri="{FF2B5EF4-FFF2-40B4-BE49-F238E27FC236}">
-                <a16:creationId xmlns:a16="http://schemas.microsoft.com/office/drawing/2014/main" id="{72774B80-4437-42E8-A718-8A95D2B72F0B}"/>
+                <a16:creationId xmlns:a16="http://schemas.microsoft.com/office/drawing/2014/main" id="{61424067-8359-446F-BC76-4DF1E4568EC4}"/>
               </a:ext>
             </a:extLst>
           </p:cNvPr>
@@ -5126,7 +5126,7 @@
           <p:cNvPr id="16" name="">
             <a:extLst xmlns:a="http://schemas.openxmlformats.org/drawingml/2006/main">
               <a:ext uri="{FF2B5EF4-FFF2-40B4-BE49-F238E27FC236}">
-                <a16:creationId xmlns:a16="http://schemas.microsoft.com/office/drawing/2014/main" id="{CC6927AE-A8A4-440C-A5C6-17BBA8887917}"/>
+                <a16:creationId xmlns:a16="http://schemas.microsoft.com/office/drawing/2014/main" id="{4E411DC3-B0E0-46E1-A841-235A40DBEE00}"/>
               </a:ext>
             </a:extLst>
           </p:cNvPr>
@@ -5159,7 +5159,7 @@
           <p:cNvPr id="17" name="">
             <a:extLst xmlns:a="http://schemas.openxmlformats.org/drawingml/2006/main">
               <a:ext uri="{FF2B5EF4-FFF2-40B4-BE49-F238E27FC236}">
-                <a16:creationId xmlns:a16="http://schemas.microsoft.com/office/drawing/2014/main" id="{6BC5811C-82CD-4155-AD77-98BB1B48B3F2}"/>
+                <a16:creationId xmlns:a16="http://schemas.microsoft.com/office/drawing/2014/main" id="{4476E4C6-2142-4DC6-B349-7B802748FD99}"/>
               </a:ext>
             </a:extLst>
           </p:cNvPr>
@@ -5192,7 +5192,7 @@
           <p:cNvPr id="18" name="">
             <a:extLst xmlns:a="http://schemas.openxmlformats.org/drawingml/2006/main">
               <a:ext uri="{FF2B5EF4-FFF2-40B4-BE49-F238E27FC236}">
-                <a16:creationId xmlns:a16="http://schemas.microsoft.com/office/drawing/2014/main" id="{2901F871-B2A1-4947-B255-731563C87A4C}"/>
+                <a16:creationId xmlns:a16="http://schemas.microsoft.com/office/drawing/2014/main" id="{3D9C561E-684D-445B-9E02-EAE739249D32}"/>
               </a:ext>
             </a:extLst>
           </p:cNvPr>
@@ -5225,7 +5225,7 @@
           <p:cNvPr id="19" name="">
             <a:extLst xmlns:a="http://schemas.openxmlformats.org/drawingml/2006/main">
               <a:ext uri="{FF2B5EF4-FFF2-40B4-BE49-F238E27FC236}">
-                <a16:creationId xmlns:a16="http://schemas.microsoft.com/office/drawing/2014/main" id="{FD0DBD54-910E-4EA9-95BB-B27C9C64E0F6}"/>
+                <a16:creationId xmlns:a16="http://schemas.microsoft.com/office/drawing/2014/main" id="{90C99C7F-54B9-4CA1-A299-EC6D297FD722}"/>
               </a:ext>
             </a:extLst>
           </p:cNvPr>
@@ -5258,7 +5258,7 @@
           <p:cNvPr id="20" name="">
             <a:extLst xmlns:a="http://schemas.openxmlformats.org/drawingml/2006/main">
               <a:ext uri="{FF2B5EF4-FFF2-40B4-BE49-F238E27FC236}">
-                <a16:creationId xmlns:a16="http://schemas.microsoft.com/office/drawing/2014/main" id="{89ED1BEC-5BED-4EEB-8CDC-FAD16503E4EE}"/>
+                <a16:creationId xmlns:a16="http://schemas.microsoft.com/office/drawing/2014/main" id="{BDA0F705-F12D-459A-9626-E062920DF552}"/>
               </a:ext>
             </a:extLst>
           </p:cNvPr>
@@ -5291,7 +5291,7 @@
           <p:cNvPr id="21" name="">
             <a:extLst xmlns:a="http://schemas.openxmlformats.org/drawingml/2006/main">
               <a:ext uri="{FF2B5EF4-FFF2-40B4-BE49-F238E27FC236}">
-                <a16:creationId xmlns:a16="http://schemas.microsoft.com/office/drawing/2014/main" id="{B9F633F0-5E6E-4F4A-9011-44BFF1E5A341}"/>
+                <a16:creationId xmlns:a16="http://schemas.microsoft.com/office/drawing/2014/main" id="{C42E1503-6047-4A6E-BD74-A6EF3C597BBD}"/>
               </a:ext>
             </a:extLst>
           </p:cNvPr>
@@ -5324,7 +5324,7 @@
           <p:cNvPr id="22" name="">
             <a:extLst xmlns:a="http://schemas.openxmlformats.org/drawingml/2006/main">
               <a:ext uri="{FF2B5EF4-FFF2-40B4-BE49-F238E27FC236}">
-                <a16:creationId xmlns:a16="http://schemas.microsoft.com/office/drawing/2014/main" id="{E65714E7-839D-48F0-844A-37CA1C263AD5}"/>
+                <a16:creationId xmlns:a16="http://schemas.microsoft.com/office/drawing/2014/main" id="{ED905372-EAD9-49C7-B31A-3816FFA4AFCD}"/>
               </a:ext>
             </a:extLst>
           </p:cNvPr>
@@ -5374,7 +5374,7 @@
           <p:cNvPr id="23" name="">
             <a:extLst xmlns:a="http://schemas.openxmlformats.org/drawingml/2006/main">
               <a:ext uri="{FF2B5EF4-FFF2-40B4-BE49-F238E27FC236}">
-                <a16:creationId xmlns:a16="http://schemas.microsoft.com/office/drawing/2014/main" id="{8969FB23-5415-43F3-8CD3-43542B328B9D}"/>
+                <a16:creationId xmlns:a16="http://schemas.microsoft.com/office/drawing/2014/main" id="{25C8D300-4AE7-489F-BA5B-E33389F72C14}"/>
               </a:ext>
             </a:extLst>
           </p:cNvPr>
@@ -5407,7 +5407,7 @@
           <p:cNvPr id="24" name="">
             <a:extLst xmlns:a="http://schemas.openxmlformats.org/drawingml/2006/main">
               <a:ext uri="{FF2B5EF4-FFF2-40B4-BE49-F238E27FC236}">
-                <a16:creationId xmlns:a16="http://schemas.microsoft.com/office/drawing/2014/main" id="{C3AA2685-8468-45CD-AC0F-C6C4E32D5E45}"/>
+                <a16:creationId xmlns:a16="http://schemas.microsoft.com/office/drawing/2014/main" id="{17A0E9B7-2F6F-4318-8609-A803425AFA20}"/>
               </a:ext>
             </a:extLst>
           </p:cNvPr>
@@ -5440,7 +5440,7 @@
           <p:cNvPr id="25" name="">
             <a:extLst xmlns:a="http://schemas.openxmlformats.org/drawingml/2006/main">
               <a:ext uri="{FF2B5EF4-FFF2-40B4-BE49-F238E27FC236}">
-                <a16:creationId xmlns:a16="http://schemas.microsoft.com/office/drawing/2014/main" id="{B575121E-1B4B-4537-AC00-482159B40108}"/>
+                <a16:creationId xmlns:a16="http://schemas.microsoft.com/office/drawing/2014/main" id="{A1E49C0D-2C38-46A4-8B3A-5F5B9D9962EB}"/>
               </a:ext>
             </a:extLst>
           </p:cNvPr>
@@ -5473,7 +5473,7 @@
           <p:cNvPr id="26" name="">
             <a:extLst xmlns:a="http://schemas.openxmlformats.org/drawingml/2006/main">
               <a:ext uri="{FF2B5EF4-FFF2-40B4-BE49-F238E27FC236}">
-                <a16:creationId xmlns:a16="http://schemas.microsoft.com/office/drawing/2014/main" id="{FCF87FD4-B513-4DD2-93DB-6506519E7075}"/>
+                <a16:creationId xmlns:a16="http://schemas.microsoft.com/office/drawing/2014/main" id="{B482BD01-4DCE-4C7F-99C6-091F86820C8E}"/>
               </a:ext>
             </a:extLst>
           </p:cNvPr>
@@ -5506,7 +5506,7 @@
           <p:cNvPr id="27" name="">
             <a:extLst xmlns:a="http://schemas.openxmlformats.org/drawingml/2006/main">
               <a:ext uri="{FF2B5EF4-FFF2-40B4-BE49-F238E27FC236}">
-                <a16:creationId xmlns:a16="http://schemas.microsoft.com/office/drawing/2014/main" id="{42389904-517F-420E-BBEE-0D699D297FF7}"/>
+                <a16:creationId xmlns:a16="http://schemas.microsoft.com/office/drawing/2014/main" id="{6B030172-4246-4065-A8A7-4C7069547177}"/>
               </a:ext>
             </a:extLst>
           </p:cNvPr>
@@ -5539,7 +5539,7 @@
           <p:cNvPr id="28" name="">
             <a:extLst xmlns:a="http://schemas.openxmlformats.org/drawingml/2006/main">
               <a:ext uri="{FF2B5EF4-FFF2-40B4-BE49-F238E27FC236}">
-                <a16:creationId xmlns:a16="http://schemas.microsoft.com/office/drawing/2014/main" id="{A312E926-9F8B-4E8C-907F-BB7EFBDC0A47}"/>
+                <a16:creationId xmlns:a16="http://schemas.microsoft.com/office/drawing/2014/main" id="{EA56DDA0-0CCA-43D9-9F05-E4C6FA89E31A}"/>
               </a:ext>
             </a:extLst>
           </p:cNvPr>
@@ -5572,7 +5572,7 @@
           <p:cNvPr id="29" name="">
             <a:extLst xmlns:a="http://schemas.openxmlformats.org/drawingml/2006/main">
               <a:ext uri="{FF2B5EF4-FFF2-40B4-BE49-F238E27FC236}">
-                <a16:creationId xmlns:a16="http://schemas.microsoft.com/office/drawing/2014/main" id="{4D039C4C-63B4-418E-88D4-C56A661A9D98}"/>
+                <a16:creationId xmlns:a16="http://schemas.microsoft.com/office/drawing/2014/main" id="{5CCAB3AD-FF90-47B5-AE2D-BB70D8F2A735}"/>
               </a:ext>
             </a:extLst>
           </p:cNvPr>
@@ -5605,7 +5605,7 @@
           <p:cNvPr id="30" name="">
             <a:extLst xmlns:a="http://schemas.openxmlformats.org/drawingml/2006/main">
               <a:ext uri="{FF2B5EF4-FFF2-40B4-BE49-F238E27FC236}">
-                <a16:creationId xmlns:a16="http://schemas.microsoft.com/office/drawing/2014/main" id="{7E336BB6-3647-469F-AE44-41EF94BA131F}"/>
+                <a16:creationId xmlns:a16="http://schemas.microsoft.com/office/drawing/2014/main" id="{FA586DFE-7B09-4670-97FA-925C206A6FBE}"/>
               </a:ext>
             </a:extLst>
           </p:cNvPr>
@@ -5638,7 +5638,7 @@
           <p:cNvPr id="31" name="">
             <a:extLst xmlns:a="http://schemas.openxmlformats.org/drawingml/2006/main">
               <a:ext uri="{FF2B5EF4-FFF2-40B4-BE49-F238E27FC236}">
-                <a16:creationId xmlns:a16="http://schemas.microsoft.com/office/drawing/2014/main" id="{67BC69E0-2F74-40D1-870E-FE717056A1C9}"/>
+                <a16:creationId xmlns:a16="http://schemas.microsoft.com/office/drawing/2014/main" id="{BFCCEE0C-5ACF-409D-B35F-C327898D5815}"/>
               </a:ext>
             </a:extLst>
           </p:cNvPr>
@@ -5671,7 +5671,7 @@
           <p:cNvPr id="32" name="">
             <a:extLst xmlns:a="http://schemas.openxmlformats.org/drawingml/2006/main">
               <a:ext uri="{FF2B5EF4-FFF2-40B4-BE49-F238E27FC236}">
-                <a16:creationId xmlns:a16="http://schemas.microsoft.com/office/drawing/2014/main" id="{2ED6D020-B5F1-49AE-94E9-FC790A2943D5}"/>
+                <a16:creationId xmlns:a16="http://schemas.microsoft.com/office/drawing/2014/main" id="{7271BDC3-29FB-42E3-B168-B2A5D7789A91}"/>
               </a:ext>
             </a:extLst>
           </p:cNvPr>
@@ -5704,7 +5704,7 @@
           <p:cNvPr id="33" name="">
             <a:extLst xmlns:a="http://schemas.openxmlformats.org/drawingml/2006/main">
               <a:ext uri="{FF2B5EF4-FFF2-40B4-BE49-F238E27FC236}">
-                <a16:creationId xmlns:a16="http://schemas.microsoft.com/office/drawing/2014/main" id="{BCE804F1-37D1-406B-A909-9D8BF63FF062}"/>
+                <a16:creationId xmlns:a16="http://schemas.microsoft.com/office/drawing/2014/main" id="{8F8028FB-C2AA-44B3-BB04-D66EA42EE561}"/>
               </a:ext>
             </a:extLst>
           </p:cNvPr>
@@ -5737,7 +5737,7 @@
           <p:cNvPr id="34" name="">
             <a:extLst xmlns:a="http://schemas.openxmlformats.org/drawingml/2006/main">
               <a:ext uri="{FF2B5EF4-FFF2-40B4-BE49-F238E27FC236}">
-                <a16:creationId xmlns:a16="http://schemas.microsoft.com/office/drawing/2014/main" id="{BF668756-A8AF-446D-8DC8-4E0BA2659037}"/>
+                <a16:creationId xmlns:a16="http://schemas.microsoft.com/office/drawing/2014/main" id="{A5F10101-8E36-4DFD-A6A4-81580EF081B4}"/>
               </a:ext>
             </a:extLst>
           </p:cNvPr>
@@ -5770,7 +5770,7 @@
           <p:cNvPr id="35" name="">
             <a:extLst xmlns:a="http://schemas.openxmlformats.org/drawingml/2006/main">
               <a:ext uri="{FF2B5EF4-FFF2-40B4-BE49-F238E27FC236}">
-                <a16:creationId xmlns:a16="http://schemas.microsoft.com/office/drawing/2014/main" id="{53876F2A-CB4E-4DBC-A759-335FF8E971A7}"/>
+                <a16:creationId xmlns:a16="http://schemas.microsoft.com/office/drawing/2014/main" id="{2E98BDE9-D00B-41BA-BC6E-4AA148D0D226}"/>
               </a:ext>
             </a:extLst>
           </p:cNvPr>
@@ -5803,7 +5803,7 @@
           <p:cNvPr id="36" name="">
             <a:extLst xmlns:a="http://schemas.openxmlformats.org/drawingml/2006/main">
               <a:ext uri="{FF2B5EF4-FFF2-40B4-BE49-F238E27FC236}">
-                <a16:creationId xmlns:a16="http://schemas.microsoft.com/office/drawing/2014/main" id="{752CEF5C-A4BF-4957-A95D-3AC689211C27}"/>
+                <a16:creationId xmlns:a16="http://schemas.microsoft.com/office/drawing/2014/main" id="{38235E6F-3DFE-4855-8326-B2323EDAFABC}"/>
               </a:ext>
             </a:extLst>
           </p:cNvPr>
@@ -5836,7 +5836,7 @@
           <p:cNvPr id="37" name="">
             <a:extLst xmlns:a="http://schemas.openxmlformats.org/drawingml/2006/main">
               <a:ext uri="{FF2B5EF4-FFF2-40B4-BE49-F238E27FC236}">
-                <a16:creationId xmlns:a16="http://schemas.microsoft.com/office/drawing/2014/main" id="{E0244506-6846-4579-AE69-FEBC18EEE3D3}"/>
+                <a16:creationId xmlns:a16="http://schemas.microsoft.com/office/drawing/2014/main" id="{A778D47A-5A14-4FA4-BE3B-5B81DB03944C}"/>
               </a:ext>
             </a:extLst>
           </p:cNvPr>
@@ -5869,7 +5869,7 @@
           <p:cNvPr id="38" name="">
             <a:extLst xmlns:a="http://schemas.openxmlformats.org/drawingml/2006/main">
               <a:ext uri="{FF2B5EF4-FFF2-40B4-BE49-F238E27FC236}">
-                <a16:creationId xmlns:a16="http://schemas.microsoft.com/office/drawing/2014/main" id="{81A4FC7E-60E8-4E8D-B71B-651C5E660693}"/>
+                <a16:creationId xmlns:a16="http://schemas.microsoft.com/office/drawing/2014/main" id="{762C3F57-B729-485A-BA90-FC4C8B40502B}"/>
               </a:ext>
             </a:extLst>
           </p:cNvPr>
@@ -5902,7 +5902,7 @@
           <p:cNvPr id="39" name="">
             <a:extLst xmlns:a="http://schemas.openxmlformats.org/drawingml/2006/main">
               <a:ext uri="{FF2B5EF4-FFF2-40B4-BE49-F238E27FC236}">
-                <a16:creationId xmlns:a16="http://schemas.microsoft.com/office/drawing/2014/main" id="{16E80EB6-D869-4A46-A444-D138DE1EDC0D}"/>
+                <a16:creationId xmlns:a16="http://schemas.microsoft.com/office/drawing/2014/main" id="{09FE1F6A-BF69-480D-A11F-8A5A559DA3BF}"/>
               </a:ext>
             </a:extLst>
           </p:cNvPr>
@@ -5935,7 +5935,7 @@
           <p:cNvPr id="40" name="">
             <a:extLst xmlns:a="http://schemas.openxmlformats.org/drawingml/2006/main">
               <a:ext uri="{FF2B5EF4-FFF2-40B4-BE49-F238E27FC236}">
-                <a16:creationId xmlns:a16="http://schemas.microsoft.com/office/drawing/2014/main" id="{2752A8A8-A367-4462-996F-0303410D39C2}"/>
+                <a16:creationId xmlns:a16="http://schemas.microsoft.com/office/drawing/2014/main" id="{2C42B6CC-BEC5-48E4-A3CA-FF6D74466231}"/>
               </a:ext>
             </a:extLst>
           </p:cNvPr>
@@ -5968,7 +5968,7 @@
           <p:cNvPr id="41" name="">
             <a:extLst xmlns:a="http://schemas.openxmlformats.org/drawingml/2006/main">
               <a:ext uri="{FF2B5EF4-FFF2-40B4-BE49-F238E27FC236}">
-                <a16:creationId xmlns:a16="http://schemas.microsoft.com/office/drawing/2014/main" id="{77481677-8C2E-4703-96B2-7F979D6B9910}"/>
+                <a16:creationId xmlns:a16="http://schemas.microsoft.com/office/drawing/2014/main" id="{9FA9AE71-7AB2-494B-AE6B-F708D147F259}"/>
               </a:ext>
             </a:extLst>
           </p:cNvPr>
@@ -6001,7 +6001,7 @@
           <p:cNvPr id="42" name="">
             <a:extLst xmlns:a="http://schemas.openxmlformats.org/drawingml/2006/main">
               <a:ext uri="{FF2B5EF4-FFF2-40B4-BE49-F238E27FC236}">
-                <a16:creationId xmlns:a16="http://schemas.microsoft.com/office/drawing/2014/main" id="{41D03704-7DAB-4AD5-A327-64942BB40084}"/>
+                <a16:creationId xmlns:a16="http://schemas.microsoft.com/office/drawing/2014/main" id="{5495AB58-CCCE-4394-9ED5-AB4636828B6B}"/>
               </a:ext>
             </a:extLst>
           </p:cNvPr>
@@ -6051,7 +6051,7 @@
           <p:cNvPr id="43" name="">
             <a:extLst xmlns:a="http://schemas.openxmlformats.org/drawingml/2006/main">
               <a:ext uri="{FF2B5EF4-FFF2-40B4-BE49-F238E27FC236}">
-                <a16:creationId xmlns:a16="http://schemas.microsoft.com/office/drawing/2014/main" id="{08C14F7C-6E0F-4341-AD50-A635D9D53A7F}"/>
+                <a16:creationId xmlns:a16="http://schemas.microsoft.com/office/drawing/2014/main" id="{01B7B825-052D-4CA8-B276-06E7477A1BAD}"/>
               </a:ext>
             </a:extLst>
           </p:cNvPr>
@@ -6101,7 +6101,7 @@
           <p:cNvPr id="44" name="">
             <a:extLst xmlns:a="http://schemas.openxmlformats.org/drawingml/2006/main">
               <a:ext uri="{FF2B5EF4-FFF2-40B4-BE49-F238E27FC236}">
-                <a16:creationId xmlns:a16="http://schemas.microsoft.com/office/drawing/2014/main" id="{B8BFC468-3B19-45DA-93F4-5B4288BD310C}"/>
+                <a16:creationId xmlns:a16="http://schemas.microsoft.com/office/drawing/2014/main" id="{218976CF-B981-4378-A4A3-2C767446BA0B}"/>
               </a:ext>
             </a:extLst>
           </p:cNvPr>
@@ -6151,7 +6151,7 @@
           <p:cNvPr id="45" name="">
             <a:extLst xmlns:a="http://schemas.openxmlformats.org/drawingml/2006/main">
               <a:ext uri="{FF2B5EF4-FFF2-40B4-BE49-F238E27FC236}">
-                <a16:creationId xmlns:a16="http://schemas.microsoft.com/office/drawing/2014/main" id="{F2B304E9-9980-4459-9CE6-F91E43B37F2D}"/>
+                <a16:creationId xmlns:a16="http://schemas.microsoft.com/office/drawing/2014/main" id="{0E9264B1-BDB9-4D89-9FDB-8AD35B3392ED}"/>
               </a:ext>
             </a:extLst>
           </p:cNvPr>
@@ -6201,7 +6201,7 @@
           <p:cNvPr id="46" name="">
             <a:extLst xmlns:a="http://schemas.openxmlformats.org/drawingml/2006/main">
               <a:ext uri="{FF2B5EF4-FFF2-40B4-BE49-F238E27FC236}">
-                <a16:creationId xmlns:a16="http://schemas.microsoft.com/office/drawing/2014/main" id="{D348C11E-A2E8-40E8-B273-C568B0BF7A67}"/>
+                <a16:creationId xmlns:a16="http://schemas.microsoft.com/office/drawing/2014/main" id="{6C440B26-A0E8-4D58-AC3C-46BA55200EE2}"/>
               </a:ext>
             </a:extLst>
           </p:cNvPr>
@@ -6251,7 +6251,7 @@
           <p:cNvPr id="47" name="">
             <a:extLst xmlns:a="http://schemas.openxmlformats.org/drawingml/2006/main">
               <a:ext uri="{FF2B5EF4-FFF2-40B4-BE49-F238E27FC236}">
-                <a16:creationId xmlns:a16="http://schemas.microsoft.com/office/drawing/2014/main" id="{7B37F567-8DCE-49F2-95A9-05512746A706}"/>
+                <a16:creationId xmlns:a16="http://schemas.microsoft.com/office/drawing/2014/main" id="{DAFED10F-2CC4-4F52-BE80-FA40B149B7E4}"/>
               </a:ext>
             </a:extLst>
           </p:cNvPr>
@@ -6301,7 +6301,7 @@
           <p:cNvPr id="48" name="">
             <a:extLst xmlns:a="http://schemas.openxmlformats.org/drawingml/2006/main">
               <a:ext uri="{FF2B5EF4-FFF2-40B4-BE49-F238E27FC236}">
-                <a16:creationId xmlns:a16="http://schemas.microsoft.com/office/drawing/2014/main" id="{17223665-C0C7-47F0-B3A5-9430B45ABA26}"/>
+                <a16:creationId xmlns:a16="http://schemas.microsoft.com/office/drawing/2014/main" id="{1112D681-1D9D-460A-90ED-342AA074991C}"/>
               </a:ext>
             </a:extLst>
           </p:cNvPr>
@@ -6351,7 +6351,7 @@
           <p:cNvPr id="49" name="">
             <a:extLst xmlns:a="http://schemas.openxmlformats.org/drawingml/2006/main">
               <a:ext uri="{FF2B5EF4-FFF2-40B4-BE49-F238E27FC236}">
-                <a16:creationId xmlns:a16="http://schemas.microsoft.com/office/drawing/2014/main" id="{29D8002C-0881-40F7-A56E-CF32600FCF86}"/>
+                <a16:creationId xmlns:a16="http://schemas.microsoft.com/office/drawing/2014/main" id="{5A1C7668-1F56-41AF-B882-15023C00CC92}"/>
               </a:ext>
             </a:extLst>
           </p:cNvPr>
@@ -6399,7 +6399,7 @@
     </p:spTree>
     <p:extLst>
       <p:ext uri="{BB962C8B-B14F-4D97-AF65-F5344CB8AC3E}">
-        <p14:creationId xmlns:p14="http://schemas.microsoft.com/office/powerpoint/2010/main" val="1685693319"/>
+        <p14:creationId xmlns:p14="http://schemas.microsoft.com/office/powerpoint/2010/main" val="1737735369"/>
       </p:ext>
     </p:extLst>
   </p:cSld>
@@ -6430,7 +6430,7 @@
           <p:cNvPr id="27" name="">
             <a:extLst xmlns:a="http://schemas.openxmlformats.org/drawingml/2006/main">
               <a:ext uri="{FF2B5EF4-FFF2-40B4-BE49-F238E27FC236}">
-                <a16:creationId xmlns:a16="http://schemas.microsoft.com/office/drawing/2014/main" id="{B04816D2-8968-4080-9D0B-31D7F7F1AD12}"/>
+                <a16:creationId xmlns:a16="http://schemas.microsoft.com/office/drawing/2014/main" id="{93A71EC0-7CBC-4E56-80A9-3C6E10032B7D}"/>
               </a:ext>
             </a:extLst>
           </p:cNvPr>
@@ -6463,7 +6463,7 @@
           <p:cNvPr id="2" name="">
             <a:extLst xmlns:a="http://schemas.openxmlformats.org/drawingml/2006/main">
               <a:ext uri="{FF2B5EF4-FFF2-40B4-BE49-F238E27FC236}">
-                <a16:creationId xmlns:a16="http://schemas.microsoft.com/office/drawing/2014/main" id="{262439A3-6EBB-4471-A2BF-5720CE698624}"/>
+                <a16:creationId xmlns:a16="http://schemas.microsoft.com/office/drawing/2014/main" id="{79574632-F051-4D22-B18A-37B784784D30}"/>
               </a:ext>
             </a:extLst>
           </p:cNvPr>
@@ -6475,7 +6475,7 @@
         <p:spPr>
           <a:xfrm xmlns:a="http://schemas.openxmlformats.org/drawingml/2006/main">
             <a:off x="895350" y="504825"/>
-            <a:ext cx="2000250" cy="285750"/>
+            <a:ext cx="4000500" cy="285750"/>
           </a:xfrm>
           <a:prstGeom xmlns:a="http://schemas.openxmlformats.org/drawingml/2006/main" prst="rect">
             <a:avLst/>
@@ -6503,7 +6503,7 @@
                   <a:srgbClr val="159A64"/>
                 </a:solidFill>
               </a:rPr>
-              <a:t>I SHOW</a:t>
+              <a:t>Follow the live data flow</a:t>
             </a:r>
           </a:p>
         </p:txBody>
@@ -6513,7 +6513,7 @@
           <p:cNvPr id="3" name="">
             <a:extLst xmlns:a="http://schemas.openxmlformats.org/drawingml/2006/main">
               <a:ext uri="{FF2B5EF4-FFF2-40B4-BE49-F238E27FC236}">
-                <a16:creationId xmlns:a16="http://schemas.microsoft.com/office/drawing/2014/main" id="{54C7B7A1-B5C3-4B66-AA6D-77EF8317E229}"/>
+                <a16:creationId xmlns:a16="http://schemas.microsoft.com/office/drawing/2014/main" id="{636F28E8-C66F-46C6-80C2-8DFE4D3FE48B}"/>
               </a:ext>
             </a:extLst>
           </p:cNvPr>
@@ -6563,7 +6563,7 @@
           <p:cNvPr id="4" name="">
             <a:extLst xmlns:a="http://schemas.openxmlformats.org/drawingml/2006/main">
               <a:ext uri="{FF2B5EF4-FFF2-40B4-BE49-F238E27FC236}">
-                <a16:creationId xmlns:a16="http://schemas.microsoft.com/office/drawing/2014/main" id="{219912F5-A0BB-487C-BDC2-55CAA44E7A2E}"/>
+                <a16:creationId xmlns:a16="http://schemas.microsoft.com/office/drawing/2014/main" id="{A4792CE2-091A-43AA-97EA-7E82834651E8}"/>
               </a:ext>
             </a:extLst>
           </p:cNvPr>
@@ -6613,7 +6613,7 @@
           <p:cNvPr id="5" name="">
             <a:extLst xmlns:a="http://schemas.openxmlformats.org/drawingml/2006/main">
               <a:ext uri="{FF2B5EF4-FFF2-40B4-BE49-F238E27FC236}">
-                <a16:creationId xmlns:a16="http://schemas.microsoft.com/office/drawing/2014/main" id="{3F75FB7E-AA8A-44C9-9B08-1F54691F05E4}"/>
+                <a16:creationId xmlns:a16="http://schemas.microsoft.com/office/drawing/2014/main" id="{F679A4F9-2EB3-48C3-ABFA-68980262004B}"/>
               </a:ext>
             </a:extLst>
           </p:cNvPr>
@@ -6644,7 +6644,7 @@
           <p:cNvPr id="6" name="">
             <a:extLst xmlns:a="http://schemas.openxmlformats.org/drawingml/2006/main">
               <a:ext uri="{FF2B5EF4-FFF2-40B4-BE49-F238E27FC236}">
-                <a16:creationId xmlns:a16="http://schemas.microsoft.com/office/drawing/2014/main" id="{1724D211-B8FD-4BF3-A2DC-6A36094EE805}"/>
+                <a16:creationId xmlns:a16="http://schemas.microsoft.com/office/drawing/2014/main" id="{0F756207-97D2-4A0E-AEE3-96B44318E01A}"/>
               </a:ext>
             </a:extLst>
           </p:cNvPr>
@@ -6694,7 +6694,7 @@
           <p:cNvPr id="7" name="">
             <a:extLst xmlns:a="http://schemas.openxmlformats.org/drawingml/2006/main">
               <a:ext uri="{FF2B5EF4-FFF2-40B4-BE49-F238E27FC236}">
-                <a16:creationId xmlns:a16="http://schemas.microsoft.com/office/drawing/2014/main" id="{2DB7D308-FB44-479D-BD9F-A9D87594D99F}"/>
+                <a16:creationId xmlns:a16="http://schemas.microsoft.com/office/drawing/2014/main" id="{A8639CA8-83FE-4C72-A4F6-1E0CC1929BA6}"/>
               </a:ext>
             </a:extLst>
           </p:cNvPr>
@@ -6744,7 +6744,7 @@
           <p:cNvPr id="8" name="">
             <a:extLst xmlns:a="http://schemas.openxmlformats.org/drawingml/2006/main">
               <a:ext uri="{FF2B5EF4-FFF2-40B4-BE49-F238E27FC236}">
-                <a16:creationId xmlns:a16="http://schemas.microsoft.com/office/drawing/2014/main" id="{D6C38899-1743-462B-AF3C-C2E8F1D1DE73}"/>
+                <a16:creationId xmlns:a16="http://schemas.microsoft.com/office/drawing/2014/main" id="{ECDBC703-8F40-4721-8DB0-49E4E0EE7A39}"/>
               </a:ext>
             </a:extLst>
           </p:cNvPr>
@@ -6777,7 +6777,7 @@
           <p:cNvPr id="9" name="">
             <a:extLst xmlns:a="http://schemas.openxmlformats.org/drawingml/2006/main">
               <a:ext uri="{FF2B5EF4-FFF2-40B4-BE49-F238E27FC236}">
-                <a16:creationId xmlns:a16="http://schemas.microsoft.com/office/drawing/2014/main" id="{C6C5921F-50B9-443B-AFA6-4AD39AA44AE4}"/>
+                <a16:creationId xmlns:a16="http://schemas.microsoft.com/office/drawing/2014/main" id="{7B26A039-F09D-4C6A-90A3-E14C85095E1B}"/>
               </a:ext>
             </a:extLst>
           </p:cNvPr>
@@ -6827,7 +6827,7 @@
           <p:cNvPr id="10" name="">
             <a:extLst xmlns:a="http://schemas.openxmlformats.org/drawingml/2006/main">
               <a:ext uri="{FF2B5EF4-FFF2-40B4-BE49-F238E27FC236}">
-                <a16:creationId xmlns:a16="http://schemas.microsoft.com/office/drawing/2014/main" id="{D02644F5-8A5B-4C6E-90FE-2AA1C2574471}"/>
+                <a16:creationId xmlns:a16="http://schemas.microsoft.com/office/drawing/2014/main" id="{FFC10E9E-E86E-4ABA-A21B-F6BA10A6673C}"/>
               </a:ext>
             </a:extLst>
           </p:cNvPr>
@@ -6860,7 +6860,7 @@
           <p:cNvPr id="11" name="">
             <a:extLst xmlns:a="http://schemas.openxmlformats.org/drawingml/2006/main">
               <a:ext uri="{FF2B5EF4-FFF2-40B4-BE49-F238E27FC236}">
-                <a16:creationId xmlns:a16="http://schemas.microsoft.com/office/drawing/2014/main" id="{D31F6FEE-7938-4A47-9A8D-7B7E873BE0BD}"/>
+                <a16:creationId xmlns:a16="http://schemas.microsoft.com/office/drawing/2014/main" id="{B01A2016-A7B2-43FC-BD24-DC375B20867A}"/>
               </a:ext>
             </a:extLst>
           </p:cNvPr>
@@ -6910,7 +6910,7 @@
           <p:cNvPr id="12" name="">
             <a:extLst xmlns:a="http://schemas.openxmlformats.org/drawingml/2006/main">
               <a:ext uri="{FF2B5EF4-FFF2-40B4-BE49-F238E27FC236}">
-                <a16:creationId xmlns:a16="http://schemas.microsoft.com/office/drawing/2014/main" id="{F3B25321-6BF6-46EB-847B-2A8B690E27F4}"/>
+                <a16:creationId xmlns:a16="http://schemas.microsoft.com/office/drawing/2014/main" id="{F9DDD78F-6A3A-441B-8BFE-FA3A8A6510AC}"/>
               </a:ext>
             </a:extLst>
           </p:cNvPr>
@@ -6945,7 +6945,7 @@
           <p:cNvPr id="13" name="">
             <a:extLst xmlns:a="http://schemas.openxmlformats.org/drawingml/2006/main">
               <a:ext uri="{FF2B5EF4-FFF2-40B4-BE49-F238E27FC236}">
-                <a16:creationId xmlns:a16="http://schemas.microsoft.com/office/drawing/2014/main" id="{679A31DE-16DD-4AD6-BAB5-B708B8AD7435}"/>
+                <a16:creationId xmlns:a16="http://schemas.microsoft.com/office/drawing/2014/main" id="{94EB9E20-916A-4B41-9EFA-60471A0D84AF}"/>
               </a:ext>
             </a:extLst>
           </p:cNvPr>
@@ -6995,7 +6995,7 @@
           <p:cNvPr id="14" name="">
             <a:extLst xmlns:a="http://schemas.openxmlformats.org/drawingml/2006/main">
               <a:ext uri="{FF2B5EF4-FFF2-40B4-BE49-F238E27FC236}">
-                <a16:creationId xmlns:a16="http://schemas.microsoft.com/office/drawing/2014/main" id="{E379651E-FED2-40AA-A512-C61981F9BB60}"/>
+                <a16:creationId xmlns:a16="http://schemas.microsoft.com/office/drawing/2014/main" id="{87FDAC4D-26C1-444B-8929-ED2B002A7F13}"/>
               </a:ext>
             </a:extLst>
           </p:cNvPr>
@@ -7045,7 +7045,7 @@
           <p:cNvPr id="15" name="">
             <a:extLst xmlns:a="http://schemas.openxmlformats.org/drawingml/2006/main">
               <a:ext uri="{FF2B5EF4-FFF2-40B4-BE49-F238E27FC236}">
-                <a16:creationId xmlns:a16="http://schemas.microsoft.com/office/drawing/2014/main" id="{4CBA54AB-6DD3-4F9D-9BA2-A8954B02BB8E}"/>
+                <a16:creationId xmlns:a16="http://schemas.microsoft.com/office/drawing/2014/main" id="{D824C198-ABB9-47BE-A7B9-2F71787B4E5D}"/>
               </a:ext>
             </a:extLst>
           </p:cNvPr>
@@ -7080,7 +7080,7 @@
           <p:cNvPr id="16" name="">
             <a:extLst xmlns:a="http://schemas.openxmlformats.org/drawingml/2006/main">
               <a:ext uri="{FF2B5EF4-FFF2-40B4-BE49-F238E27FC236}">
-                <a16:creationId xmlns:a16="http://schemas.microsoft.com/office/drawing/2014/main" id="{3C9A047D-5D90-4E3A-B83C-279E16F932FE}"/>
+                <a16:creationId xmlns:a16="http://schemas.microsoft.com/office/drawing/2014/main" id="{9E0CBDDD-0CA0-44E2-BA3D-0C35798C5A00}"/>
               </a:ext>
             </a:extLst>
           </p:cNvPr>
@@ -7130,7 +7130,7 @@
           <p:cNvPr id="17" name="">
             <a:extLst xmlns:a="http://schemas.openxmlformats.org/drawingml/2006/main">
               <a:ext uri="{FF2B5EF4-FFF2-40B4-BE49-F238E27FC236}">
-                <a16:creationId xmlns:a16="http://schemas.microsoft.com/office/drawing/2014/main" id="{1F6258B1-ECA3-49A9-917E-311715A35E0B}"/>
+                <a16:creationId xmlns:a16="http://schemas.microsoft.com/office/drawing/2014/main" id="{6A16B452-68FF-496D-919B-086C41C4B341}"/>
               </a:ext>
             </a:extLst>
           </p:cNvPr>
@@ -7180,7 +7180,7 @@
           <p:cNvPr id="18" name="">
             <a:extLst xmlns:a="http://schemas.openxmlformats.org/drawingml/2006/main">
               <a:ext uri="{FF2B5EF4-FFF2-40B4-BE49-F238E27FC236}">
-                <a16:creationId xmlns:a16="http://schemas.microsoft.com/office/drawing/2014/main" id="{38A4B14A-F7EC-46D5-8ECB-EE42FDF41D5D}"/>
+                <a16:creationId xmlns:a16="http://schemas.microsoft.com/office/drawing/2014/main" id="{61D72EFD-40FA-4807-9DAB-B4AA800BCA7E}"/>
               </a:ext>
             </a:extLst>
           </p:cNvPr>
@@ -7215,7 +7215,7 @@
           <p:cNvPr id="19" name="">
             <a:extLst xmlns:a="http://schemas.openxmlformats.org/drawingml/2006/main">
               <a:ext uri="{FF2B5EF4-FFF2-40B4-BE49-F238E27FC236}">
-                <a16:creationId xmlns:a16="http://schemas.microsoft.com/office/drawing/2014/main" id="{9E4B59E8-7505-4B4D-A3A7-30464EE4B2DC}"/>
+                <a16:creationId xmlns:a16="http://schemas.microsoft.com/office/drawing/2014/main" id="{B193032D-8112-4186-BA55-B9042E6FC67A}"/>
               </a:ext>
             </a:extLst>
           </p:cNvPr>
@@ -7265,7 +7265,7 @@
           <p:cNvPr id="20" name="">
             <a:extLst xmlns:a="http://schemas.openxmlformats.org/drawingml/2006/main">
               <a:ext uri="{FF2B5EF4-FFF2-40B4-BE49-F238E27FC236}">
-                <a16:creationId xmlns:a16="http://schemas.microsoft.com/office/drawing/2014/main" id="{E22DF3CC-851D-49D7-A772-41F027EC91D5}"/>
+                <a16:creationId xmlns:a16="http://schemas.microsoft.com/office/drawing/2014/main" id="{175B820B-9C8D-4FF4-9BD6-3D3E8B942D92}"/>
               </a:ext>
             </a:extLst>
           </p:cNvPr>
@@ -7315,7 +7315,7 @@
           <p:cNvPr id="21" name="">
             <a:extLst xmlns:a="http://schemas.openxmlformats.org/drawingml/2006/main">
               <a:ext uri="{FF2B5EF4-FFF2-40B4-BE49-F238E27FC236}">
-                <a16:creationId xmlns:a16="http://schemas.microsoft.com/office/drawing/2014/main" id="{A609C8E2-5E92-46F0-B2B1-83681D30BAA9}"/>
+                <a16:creationId xmlns:a16="http://schemas.microsoft.com/office/drawing/2014/main" id="{C59BE843-291D-4882-B569-604D30DD483C}"/>
               </a:ext>
             </a:extLst>
           </p:cNvPr>
@@ -7350,7 +7350,7 @@
           <p:cNvPr id="22" name="">
             <a:extLst xmlns:a="http://schemas.openxmlformats.org/drawingml/2006/main">
               <a:ext uri="{FF2B5EF4-FFF2-40B4-BE49-F238E27FC236}">
-                <a16:creationId xmlns:a16="http://schemas.microsoft.com/office/drawing/2014/main" id="{B9C5FB0A-1AB2-4CE9-8BF0-87F710DD59BB}"/>
+                <a16:creationId xmlns:a16="http://schemas.microsoft.com/office/drawing/2014/main" id="{23F1229D-534C-4C57-8E35-6EC938D723E2}"/>
               </a:ext>
             </a:extLst>
           </p:cNvPr>
@@ -7400,7 +7400,7 @@
           <p:cNvPr id="23" name="">
             <a:extLst xmlns:a="http://schemas.openxmlformats.org/drawingml/2006/main">
               <a:ext uri="{FF2B5EF4-FFF2-40B4-BE49-F238E27FC236}">
-                <a16:creationId xmlns:a16="http://schemas.microsoft.com/office/drawing/2014/main" id="{0877FAC6-2682-4EC6-9060-1BCE023C4B5A}"/>
+                <a16:creationId xmlns:a16="http://schemas.microsoft.com/office/drawing/2014/main" id="{EFE9A1C3-C59D-4C3E-8A87-53BC5BB62198}"/>
               </a:ext>
             </a:extLst>
           </p:cNvPr>
@@ -7450,7 +7450,7 @@
           <p:cNvPr id="24" name="">
             <a:extLst xmlns:a="http://schemas.openxmlformats.org/drawingml/2006/main">
               <a:ext uri="{FF2B5EF4-FFF2-40B4-BE49-F238E27FC236}">
-                <a16:creationId xmlns:a16="http://schemas.microsoft.com/office/drawing/2014/main" id="{F6B0F424-EA95-4876-BB99-FCEDD7E1C485}"/>
+                <a16:creationId xmlns:a16="http://schemas.microsoft.com/office/drawing/2014/main" id="{9E2E27D1-AC1D-4A5A-AFA4-E74B4A824B5A}"/>
               </a:ext>
             </a:extLst>
           </p:cNvPr>
@@ -7500,7 +7500,7 @@
           <p:cNvPr id="25" name="">
             <a:extLst xmlns:a="http://schemas.openxmlformats.org/drawingml/2006/main">
               <a:ext uri="{FF2B5EF4-FFF2-40B4-BE49-F238E27FC236}">
-                <a16:creationId xmlns:a16="http://schemas.microsoft.com/office/drawing/2014/main" id="{E8BAB563-96C2-44C5-949C-4963652CD8FB}"/>
+                <a16:creationId xmlns:a16="http://schemas.microsoft.com/office/drawing/2014/main" id="{B7077B48-03BD-401B-B33B-0122FD69B317}"/>
               </a:ext>
             </a:extLst>
           </p:cNvPr>
@@ -7550,7 +7550,7 @@
           <p:cNvPr id="26" name="">
             <a:extLst xmlns:a="http://schemas.openxmlformats.org/drawingml/2006/main">
               <a:ext uri="{FF2B5EF4-FFF2-40B4-BE49-F238E27FC236}">
-                <a16:creationId xmlns:a16="http://schemas.microsoft.com/office/drawing/2014/main" id="{3567E43B-32FA-4E4B-B609-7042E8FFDDD3}"/>
+                <a16:creationId xmlns:a16="http://schemas.microsoft.com/office/drawing/2014/main" id="{E12CF243-9B46-452C-AA86-4F223714D636}"/>
               </a:ext>
             </a:extLst>
           </p:cNvPr>
@@ -7598,7 +7598,7 @@
     </p:spTree>
     <p:extLst>
       <p:ext uri="{BB962C8B-B14F-4D97-AF65-F5344CB8AC3E}">
-        <p14:creationId xmlns:p14="http://schemas.microsoft.com/office/powerpoint/2010/main" val="657667190"/>
+        <p14:creationId xmlns:p14="http://schemas.microsoft.com/office/powerpoint/2010/main" val="1572309949"/>
       </p:ext>
     </p:extLst>
   </p:cSld>
@@ -7629,7 +7629,7 @@
           <p:cNvPr id="27" name="">
             <a:extLst xmlns:a="http://schemas.openxmlformats.org/drawingml/2006/main">
               <a:ext uri="{FF2B5EF4-FFF2-40B4-BE49-F238E27FC236}">
-                <a16:creationId xmlns:a16="http://schemas.microsoft.com/office/drawing/2014/main" id="{94C3C55F-4382-41DA-95B2-386065C38EE5}"/>
+                <a16:creationId xmlns:a16="http://schemas.microsoft.com/office/drawing/2014/main" id="{6A0B9B3C-B3E4-41BD-8B10-C30C1B6BBF84}"/>
               </a:ext>
             </a:extLst>
           </p:cNvPr>
@@ -7662,7 +7662,7 @@
           <p:cNvPr id="2" name="">
             <a:extLst xmlns:a="http://schemas.openxmlformats.org/drawingml/2006/main">
               <a:ext uri="{FF2B5EF4-FFF2-40B4-BE49-F238E27FC236}">
-                <a16:creationId xmlns:a16="http://schemas.microsoft.com/office/drawing/2014/main" id="{31E5FDAD-CED8-433B-A383-A48CF55D7316}"/>
+                <a16:creationId xmlns:a16="http://schemas.microsoft.com/office/drawing/2014/main" id="{0672BBD1-87CD-4963-BAC1-77C83CCA71D6}"/>
               </a:ext>
             </a:extLst>
           </p:cNvPr>
@@ -7674,7 +7674,7 @@
         <p:spPr>
           <a:xfrm xmlns:a="http://schemas.openxmlformats.org/drawingml/2006/main">
             <a:off x="895350" y="504825"/>
-            <a:ext cx="2000250" cy="285750"/>
+            <a:ext cx="4000500" cy="285750"/>
           </a:xfrm>
           <a:prstGeom xmlns:a="http://schemas.openxmlformats.org/drawingml/2006/main" prst="rect">
             <a:avLst/>
@@ -7702,7 +7702,7 @@
                   <a:srgbClr val="159A64"/>
                 </a:solidFill>
               </a:rPr>
-              <a:t>I SHOW</a:t>
+              <a:t>Read the event stream</a:t>
             </a:r>
           </a:p>
         </p:txBody>
@@ -7712,7 +7712,7 @@
           <p:cNvPr id="3" name="">
             <a:extLst xmlns:a="http://schemas.openxmlformats.org/drawingml/2006/main">
               <a:ext uri="{FF2B5EF4-FFF2-40B4-BE49-F238E27FC236}">
-                <a16:creationId xmlns:a16="http://schemas.microsoft.com/office/drawing/2014/main" id="{8B6F6C2A-AF3B-43B8-B1D4-00E36825A3F4}"/>
+                <a16:creationId xmlns:a16="http://schemas.microsoft.com/office/drawing/2014/main" id="{1B569C4B-7161-47BA-AE02-E28E6B71EEE7}"/>
               </a:ext>
             </a:extLst>
           </p:cNvPr>
@@ -7762,7 +7762,7 @@
           <p:cNvPr id="4" name="">
             <a:extLst xmlns:a="http://schemas.openxmlformats.org/drawingml/2006/main">
               <a:ext uri="{FF2B5EF4-FFF2-40B4-BE49-F238E27FC236}">
-                <a16:creationId xmlns:a16="http://schemas.microsoft.com/office/drawing/2014/main" id="{C759F3A6-317D-447A-A3E8-9A5A32F9B42C}"/>
+                <a16:creationId xmlns:a16="http://schemas.microsoft.com/office/drawing/2014/main" id="{A71713EC-CE8A-40B6-B0BC-DA20ECCB8073}"/>
               </a:ext>
             </a:extLst>
           </p:cNvPr>
@@ -7812,7 +7812,7 @@
           <p:cNvPr id="5" name="">
             <a:extLst xmlns:a="http://schemas.openxmlformats.org/drawingml/2006/main">
               <a:ext uri="{FF2B5EF4-FFF2-40B4-BE49-F238E27FC236}">
-                <a16:creationId xmlns:a16="http://schemas.microsoft.com/office/drawing/2014/main" id="{38CA208D-6BAC-4877-97F6-CCE19BF96E7E}"/>
+                <a16:creationId xmlns:a16="http://schemas.microsoft.com/office/drawing/2014/main" id="{F7746DC3-B8F3-420A-91FC-8354771D0E0E}"/>
               </a:ext>
             </a:extLst>
           </p:cNvPr>
@@ -7843,7 +7843,7 @@
           <p:cNvPr id="6" name="">
             <a:extLst xmlns:a="http://schemas.openxmlformats.org/drawingml/2006/main">
               <a:ext uri="{FF2B5EF4-FFF2-40B4-BE49-F238E27FC236}">
-                <a16:creationId xmlns:a16="http://schemas.microsoft.com/office/drawing/2014/main" id="{2C6C85F8-B291-4131-B717-D3F4FC3DFF2C}"/>
+                <a16:creationId xmlns:a16="http://schemas.microsoft.com/office/drawing/2014/main" id="{F181D442-3E57-4B23-961F-8D11D52CC02A}"/>
               </a:ext>
             </a:extLst>
           </p:cNvPr>
@@ -7893,7 +7893,7 @@
           <p:cNvPr id="7" name="">
             <a:extLst xmlns:a="http://schemas.openxmlformats.org/drawingml/2006/main">
               <a:ext uri="{FF2B5EF4-FFF2-40B4-BE49-F238E27FC236}">
-                <a16:creationId xmlns:a16="http://schemas.microsoft.com/office/drawing/2014/main" id="{6045E846-63F3-4E72-8205-6B1F26CDBC11}"/>
+                <a16:creationId xmlns:a16="http://schemas.microsoft.com/office/drawing/2014/main" id="{00AAC932-9F33-4431-AA3C-E491EC1EF937}"/>
               </a:ext>
             </a:extLst>
           </p:cNvPr>
@@ -7943,7 +7943,7 @@
           <p:cNvPr id="8" name="">
             <a:extLst xmlns:a="http://schemas.openxmlformats.org/drawingml/2006/main">
               <a:ext uri="{FF2B5EF4-FFF2-40B4-BE49-F238E27FC236}">
-                <a16:creationId xmlns:a16="http://schemas.microsoft.com/office/drawing/2014/main" id="{235F3CD1-C8BD-4C94-B667-9C962589F557}"/>
+                <a16:creationId xmlns:a16="http://schemas.microsoft.com/office/drawing/2014/main" id="{FF5958AC-CE4C-431E-9AFB-2BF00AAC99AC}"/>
               </a:ext>
             </a:extLst>
           </p:cNvPr>
@@ -7978,7 +7978,7 @@
           <p:cNvPr id="9" name="">
             <a:extLst xmlns:a="http://schemas.openxmlformats.org/drawingml/2006/main">
               <a:ext uri="{FF2B5EF4-FFF2-40B4-BE49-F238E27FC236}">
-                <a16:creationId xmlns:a16="http://schemas.microsoft.com/office/drawing/2014/main" id="{35D6DC10-F19B-4864-BEC1-E84E57C136DA}"/>
+                <a16:creationId xmlns:a16="http://schemas.microsoft.com/office/drawing/2014/main" id="{FE955CCE-B8BD-4BA4-B2EA-B0CDC660D2FA}"/>
               </a:ext>
             </a:extLst>
           </p:cNvPr>
@@ -8011,7 +8011,7 @@
           <p:cNvPr id="10" name="">
             <a:extLst xmlns:a="http://schemas.openxmlformats.org/drawingml/2006/main">
               <a:ext uri="{FF2B5EF4-FFF2-40B4-BE49-F238E27FC236}">
-                <a16:creationId xmlns:a16="http://schemas.microsoft.com/office/drawing/2014/main" id="{8C36DD1B-C3C9-4876-97E6-7C3A5AB086C5}"/>
+                <a16:creationId xmlns:a16="http://schemas.microsoft.com/office/drawing/2014/main" id="{49CC8B04-3E68-46E6-B8BB-F916AC6AE497}"/>
               </a:ext>
             </a:extLst>
           </p:cNvPr>
@@ -8042,7 +8042,7 @@
           <p:cNvPr id="11" name="">
             <a:extLst xmlns:a="http://schemas.openxmlformats.org/drawingml/2006/main">
               <a:ext uri="{FF2B5EF4-FFF2-40B4-BE49-F238E27FC236}">
-                <a16:creationId xmlns:a16="http://schemas.microsoft.com/office/drawing/2014/main" id="{8B918A0E-42FC-4ABD-8041-1A5E9B90A3E6}"/>
+                <a16:creationId xmlns:a16="http://schemas.microsoft.com/office/drawing/2014/main" id="{EEEDABFF-F804-47F3-AD9B-BADAC794EC90}"/>
               </a:ext>
             </a:extLst>
           </p:cNvPr>
@@ -8073,7 +8073,7 @@
           <p:cNvPr id="12" name="">
             <a:extLst xmlns:a="http://schemas.openxmlformats.org/drawingml/2006/main">
               <a:ext uri="{FF2B5EF4-FFF2-40B4-BE49-F238E27FC236}">
-                <a16:creationId xmlns:a16="http://schemas.microsoft.com/office/drawing/2014/main" id="{C3086347-1EE5-48C5-A1D6-2198C1E62964}"/>
+                <a16:creationId xmlns:a16="http://schemas.microsoft.com/office/drawing/2014/main" id="{6E26D5D2-5E52-47EF-B6B2-A876E0C47572}"/>
               </a:ext>
             </a:extLst>
           </p:cNvPr>
@@ -8104,7 +8104,7 @@
           <p:cNvPr id="13" name="">
             <a:extLst xmlns:a="http://schemas.openxmlformats.org/drawingml/2006/main">
               <a:ext uri="{FF2B5EF4-FFF2-40B4-BE49-F238E27FC236}">
-                <a16:creationId xmlns:a16="http://schemas.microsoft.com/office/drawing/2014/main" id="{1C72D806-6349-4727-9321-7FE9E9EF85A2}"/>
+                <a16:creationId xmlns:a16="http://schemas.microsoft.com/office/drawing/2014/main" id="{9617D8C3-7136-49F1-A5B5-ED3662540D97}"/>
               </a:ext>
             </a:extLst>
           </p:cNvPr>
@@ -8256,7 +8256,7 @@
           <p:cNvPr id="14" name="">
             <a:extLst xmlns:a="http://schemas.openxmlformats.org/drawingml/2006/main">
               <a:ext uri="{FF2B5EF4-FFF2-40B4-BE49-F238E27FC236}">
-                <a16:creationId xmlns:a16="http://schemas.microsoft.com/office/drawing/2014/main" id="{8E429802-CDFF-4F5F-ACA0-6DD89729634B}"/>
+                <a16:creationId xmlns:a16="http://schemas.microsoft.com/office/drawing/2014/main" id="{1C87D7A6-AB3D-4A2E-AABD-2B892B1B92D0}"/>
               </a:ext>
             </a:extLst>
           </p:cNvPr>
@@ -8306,7 +8306,7 @@
           <p:cNvPr id="15" name="">
             <a:extLst xmlns:a="http://schemas.openxmlformats.org/drawingml/2006/main">
               <a:ext uri="{FF2B5EF4-FFF2-40B4-BE49-F238E27FC236}">
-                <a16:creationId xmlns:a16="http://schemas.microsoft.com/office/drawing/2014/main" id="{42A67F2B-BC42-4391-8F6E-70B44DFB49B1}"/>
+                <a16:creationId xmlns:a16="http://schemas.microsoft.com/office/drawing/2014/main" id="{9B8C7AFB-2421-4502-B927-2886A847AA6A}"/>
               </a:ext>
             </a:extLst>
           </p:cNvPr>
@@ -8356,7 +8356,7 @@
           <p:cNvPr id="16" name="">
             <a:extLst xmlns:a="http://schemas.openxmlformats.org/drawingml/2006/main">
               <a:ext uri="{FF2B5EF4-FFF2-40B4-BE49-F238E27FC236}">
-                <a16:creationId xmlns:a16="http://schemas.microsoft.com/office/drawing/2014/main" id="{020D614E-22BA-4299-98D9-4B9650FEC0B3}"/>
+                <a16:creationId xmlns:a16="http://schemas.microsoft.com/office/drawing/2014/main" id="{2419F6A9-F72A-4791-9701-E335F449416E}"/>
               </a:ext>
             </a:extLst>
           </p:cNvPr>
@@ -8387,7 +8387,7 @@
           <p:cNvPr id="17" name="">
             <a:extLst xmlns:a="http://schemas.openxmlformats.org/drawingml/2006/main">
               <a:ext uri="{FF2B5EF4-FFF2-40B4-BE49-F238E27FC236}">
-                <a16:creationId xmlns:a16="http://schemas.microsoft.com/office/drawing/2014/main" id="{E0EB1F30-4B76-495E-B719-C355C82F8DE3}"/>
+                <a16:creationId xmlns:a16="http://schemas.microsoft.com/office/drawing/2014/main" id="{4DC97F60-68DF-4F7E-AE29-3363496DE713}"/>
               </a:ext>
             </a:extLst>
           </p:cNvPr>
@@ -8437,7 +8437,7 @@
           <p:cNvPr id="18" name="">
             <a:extLst xmlns:a="http://schemas.openxmlformats.org/drawingml/2006/main">
               <a:ext uri="{FF2B5EF4-FFF2-40B4-BE49-F238E27FC236}">
-                <a16:creationId xmlns:a16="http://schemas.microsoft.com/office/drawing/2014/main" id="{8D419FA1-9580-4DDA-AD24-673AB79608DC}"/>
+                <a16:creationId xmlns:a16="http://schemas.microsoft.com/office/drawing/2014/main" id="{DF82AFE5-889B-4EAC-8181-F227627BE8FB}"/>
               </a:ext>
             </a:extLst>
           </p:cNvPr>
@@ -8487,7 +8487,7 @@
           <p:cNvPr id="19" name="">
             <a:extLst xmlns:a="http://schemas.openxmlformats.org/drawingml/2006/main">
               <a:ext uri="{FF2B5EF4-FFF2-40B4-BE49-F238E27FC236}">
-                <a16:creationId xmlns:a16="http://schemas.microsoft.com/office/drawing/2014/main" id="{87D16DD0-C902-41F2-BB0C-978FA1B3A571}"/>
+                <a16:creationId xmlns:a16="http://schemas.microsoft.com/office/drawing/2014/main" id="{5C6B35BC-C9F5-4C20-BFAD-0FB3CBAB9E75}"/>
               </a:ext>
             </a:extLst>
           </p:cNvPr>
@@ -8518,7 +8518,7 @@
           <p:cNvPr id="20" name="">
             <a:extLst xmlns:a="http://schemas.openxmlformats.org/drawingml/2006/main">
               <a:ext uri="{FF2B5EF4-FFF2-40B4-BE49-F238E27FC236}">
-                <a16:creationId xmlns:a16="http://schemas.microsoft.com/office/drawing/2014/main" id="{285DBEC0-6DBE-4006-B87E-F64253EB36A9}"/>
+                <a16:creationId xmlns:a16="http://schemas.microsoft.com/office/drawing/2014/main" id="{D48837C9-0A6A-49F6-8459-3E2B3DCFFF85}"/>
               </a:ext>
             </a:extLst>
           </p:cNvPr>
@@ -8568,7 +8568,7 @@
           <p:cNvPr id="21" name="">
             <a:extLst xmlns:a="http://schemas.openxmlformats.org/drawingml/2006/main">
               <a:ext uri="{FF2B5EF4-FFF2-40B4-BE49-F238E27FC236}">
-                <a16:creationId xmlns:a16="http://schemas.microsoft.com/office/drawing/2014/main" id="{CF28DC37-1CB7-436B-85A2-691366BA7B5B}"/>
+                <a16:creationId xmlns:a16="http://schemas.microsoft.com/office/drawing/2014/main" id="{F74419D4-CC47-4E19-9B1F-3628357979FD}"/>
               </a:ext>
             </a:extLst>
           </p:cNvPr>
@@ -8618,7 +8618,7 @@
           <p:cNvPr id="22" name="">
             <a:extLst xmlns:a="http://schemas.openxmlformats.org/drawingml/2006/main">
               <a:ext uri="{FF2B5EF4-FFF2-40B4-BE49-F238E27FC236}">
-                <a16:creationId xmlns:a16="http://schemas.microsoft.com/office/drawing/2014/main" id="{7B125630-8472-40BF-920B-3D1C396DB607}"/>
+                <a16:creationId xmlns:a16="http://schemas.microsoft.com/office/drawing/2014/main" id="{68FC1FB8-6C45-4D6B-8457-10E274618734}"/>
               </a:ext>
             </a:extLst>
           </p:cNvPr>
@@ -8649,7 +8649,7 @@
           <p:cNvPr id="23" name="">
             <a:extLst xmlns:a="http://schemas.openxmlformats.org/drawingml/2006/main">
               <a:ext uri="{FF2B5EF4-FFF2-40B4-BE49-F238E27FC236}">
-                <a16:creationId xmlns:a16="http://schemas.microsoft.com/office/drawing/2014/main" id="{9DF2D331-EFD1-4CCA-BCA9-A866C537E57F}"/>
+                <a16:creationId xmlns:a16="http://schemas.microsoft.com/office/drawing/2014/main" id="{FF35A5C0-D7A3-4F80-A06D-CF5401BB9BAA}"/>
               </a:ext>
             </a:extLst>
           </p:cNvPr>
@@ -8699,7 +8699,7 @@
           <p:cNvPr id="24" name="">
             <a:extLst xmlns:a="http://schemas.openxmlformats.org/drawingml/2006/main">
               <a:ext uri="{FF2B5EF4-FFF2-40B4-BE49-F238E27FC236}">
-                <a16:creationId xmlns:a16="http://schemas.microsoft.com/office/drawing/2014/main" id="{2B97A671-F2EC-47FA-9030-AB8A79A0EECA}"/>
+                <a16:creationId xmlns:a16="http://schemas.microsoft.com/office/drawing/2014/main" id="{6A8D15E4-1E4C-444B-9452-10B27D96DBC1}"/>
               </a:ext>
             </a:extLst>
           </p:cNvPr>
@@ -8749,7 +8749,7 @@
           <p:cNvPr id="25" name="">
             <a:extLst xmlns:a="http://schemas.openxmlformats.org/drawingml/2006/main">
               <a:ext uri="{FF2B5EF4-FFF2-40B4-BE49-F238E27FC236}">
-                <a16:creationId xmlns:a16="http://schemas.microsoft.com/office/drawing/2014/main" id="{B03A2146-8D32-4E3E-B784-6E9B82C3E115}"/>
+                <a16:creationId xmlns:a16="http://schemas.microsoft.com/office/drawing/2014/main" id="{1B63638C-8B74-406A-A032-B5BBC6638CB6}"/>
               </a:ext>
             </a:extLst>
           </p:cNvPr>
@@ -8780,7 +8780,7 @@
           <p:cNvPr id="26" name="">
             <a:extLst xmlns:a="http://schemas.openxmlformats.org/drawingml/2006/main">
               <a:ext uri="{FF2B5EF4-FFF2-40B4-BE49-F238E27FC236}">
-                <a16:creationId xmlns:a16="http://schemas.microsoft.com/office/drawing/2014/main" id="{68E3F0C6-1193-4C51-A480-43BC0E8E9BA9}"/>
+                <a16:creationId xmlns:a16="http://schemas.microsoft.com/office/drawing/2014/main" id="{3D3AE650-5B0F-49EC-863E-7FEE5A5580AB}"/>
               </a:ext>
             </a:extLst>
           </p:cNvPr>
@@ -8828,7 +8828,7 @@
     </p:spTree>
     <p:extLst>
       <p:ext uri="{BB962C8B-B14F-4D97-AF65-F5344CB8AC3E}">
-        <p14:creationId xmlns:p14="http://schemas.microsoft.com/office/powerpoint/2010/main" val="1229636883"/>
+        <p14:creationId xmlns:p14="http://schemas.microsoft.com/office/powerpoint/2010/main" val="1088288245"/>
       </p:ext>
     </p:extLst>
   </p:cSld>
@@ -8859,7 +8859,7 @@
           <p:cNvPr id="27" name="">
             <a:extLst xmlns:a="http://schemas.openxmlformats.org/drawingml/2006/main">
               <a:ext uri="{FF2B5EF4-FFF2-40B4-BE49-F238E27FC236}">
-                <a16:creationId xmlns:a16="http://schemas.microsoft.com/office/drawing/2014/main" id="{049EFF70-3680-4E4D-A72C-CCC5B2B281C9}"/>
+                <a16:creationId xmlns:a16="http://schemas.microsoft.com/office/drawing/2014/main" id="{662D7AFD-A5C2-41A0-965A-DCEEBAB9672E}"/>
               </a:ext>
             </a:extLst>
           </p:cNvPr>
@@ -8892,7 +8892,7 @@
           <p:cNvPr id="2" name="">
             <a:extLst xmlns:a="http://schemas.openxmlformats.org/drawingml/2006/main">
               <a:ext uri="{FF2B5EF4-FFF2-40B4-BE49-F238E27FC236}">
-                <a16:creationId xmlns:a16="http://schemas.microsoft.com/office/drawing/2014/main" id="{A5BC9F81-F589-467B-B620-512CDC1091D2}"/>
+                <a16:creationId xmlns:a16="http://schemas.microsoft.com/office/drawing/2014/main" id="{FCC5F101-67B2-448F-AA3E-9153204A344C}"/>
               </a:ext>
             </a:extLst>
           </p:cNvPr>
@@ -8904,7 +8904,7 @@
         <p:spPr>
           <a:xfrm xmlns:a="http://schemas.openxmlformats.org/drawingml/2006/main">
             <a:off x="895350" y="504825"/>
-            <a:ext cx="2000250" cy="285750"/>
+            <a:ext cx="4000500" cy="285750"/>
           </a:xfrm>
           <a:prstGeom xmlns:a="http://schemas.openxmlformats.org/drawingml/2006/main" prst="rect">
             <a:avLst/>
@@ -8932,7 +8932,7 @@
                   <a:srgbClr val="159A64"/>
                 </a:solidFill>
               </a:rPr>
-              <a:t>I SHOW</a:t>
+              <a:t>Watch the recovery demo</a:t>
             </a:r>
           </a:p>
         </p:txBody>
@@ -8942,7 +8942,7 @@
           <p:cNvPr id="3" name="">
             <a:extLst xmlns:a="http://schemas.openxmlformats.org/drawingml/2006/main">
               <a:ext uri="{FF2B5EF4-FFF2-40B4-BE49-F238E27FC236}">
-                <a16:creationId xmlns:a16="http://schemas.microsoft.com/office/drawing/2014/main" id="{C14019E5-10A0-46F7-BD79-51C98E9887BC}"/>
+                <a16:creationId xmlns:a16="http://schemas.microsoft.com/office/drawing/2014/main" id="{10D6F129-CA34-468E-95D6-FEFD57CB5D1E}"/>
               </a:ext>
             </a:extLst>
           </p:cNvPr>
@@ -8992,7 +8992,7 @@
           <p:cNvPr id="4" name="">
             <a:extLst xmlns:a="http://schemas.openxmlformats.org/drawingml/2006/main">
               <a:ext uri="{FF2B5EF4-FFF2-40B4-BE49-F238E27FC236}">
-                <a16:creationId xmlns:a16="http://schemas.microsoft.com/office/drawing/2014/main" id="{D090398C-E01D-43F6-8D54-EEE5D12A2148}"/>
+                <a16:creationId xmlns:a16="http://schemas.microsoft.com/office/drawing/2014/main" id="{CFE07925-4984-443A-8952-6918C174D118}"/>
               </a:ext>
             </a:extLst>
           </p:cNvPr>
@@ -9042,7 +9042,7 @@
           <p:cNvPr id="5" name="">
             <a:extLst xmlns:a="http://schemas.openxmlformats.org/drawingml/2006/main">
               <a:ext uri="{FF2B5EF4-FFF2-40B4-BE49-F238E27FC236}">
-                <a16:creationId xmlns:a16="http://schemas.microsoft.com/office/drawing/2014/main" id="{052BAECA-1F42-4071-94B9-51E2ABB1453B}"/>
+                <a16:creationId xmlns:a16="http://schemas.microsoft.com/office/drawing/2014/main" id="{83F84C31-F77B-48DC-AE50-E47A2F0E6343}"/>
               </a:ext>
             </a:extLst>
           </p:cNvPr>
@@ -9073,7 +9073,7 @@
           <p:cNvPr id="6" name="">
             <a:extLst xmlns:a="http://schemas.openxmlformats.org/drawingml/2006/main">
               <a:ext uri="{FF2B5EF4-FFF2-40B4-BE49-F238E27FC236}">
-                <a16:creationId xmlns:a16="http://schemas.microsoft.com/office/drawing/2014/main" id="{C3740903-096E-481F-83C3-DF564FFBBEA4}"/>
+                <a16:creationId xmlns:a16="http://schemas.microsoft.com/office/drawing/2014/main" id="{5B64F5E5-E2AB-46D3-9B9E-BDB675DCCF7E}"/>
               </a:ext>
             </a:extLst>
           </p:cNvPr>
@@ -9123,7 +9123,7 @@
           <p:cNvPr id="7" name="">
             <a:extLst xmlns:a="http://schemas.openxmlformats.org/drawingml/2006/main">
               <a:ext uri="{FF2B5EF4-FFF2-40B4-BE49-F238E27FC236}">
-                <a16:creationId xmlns:a16="http://schemas.microsoft.com/office/drawing/2014/main" id="{56AC7D88-D853-4D14-ABE1-E77206DFCC40}"/>
+                <a16:creationId xmlns:a16="http://schemas.microsoft.com/office/drawing/2014/main" id="{1D1BB6B6-9D04-477D-8336-9BED9ADD9FE0}"/>
               </a:ext>
             </a:extLst>
           </p:cNvPr>
@@ -9173,7 +9173,7 @@
           <p:cNvPr id="8" name="">
             <a:extLst xmlns:a="http://schemas.openxmlformats.org/drawingml/2006/main">
               <a:ext uri="{FF2B5EF4-FFF2-40B4-BE49-F238E27FC236}">
-                <a16:creationId xmlns:a16="http://schemas.microsoft.com/office/drawing/2014/main" id="{050FBC99-9E45-4D06-BC2E-B295BB6B255C}"/>
+                <a16:creationId xmlns:a16="http://schemas.microsoft.com/office/drawing/2014/main" id="{86988538-C914-48BE-BC32-F563DC38ADFC}"/>
               </a:ext>
             </a:extLst>
           </p:cNvPr>
@@ -9204,7 +9204,7 @@
           <p:cNvPr id="9" name="">
             <a:extLst xmlns:a="http://schemas.openxmlformats.org/drawingml/2006/main">
               <a:ext uri="{FF2B5EF4-FFF2-40B4-BE49-F238E27FC236}">
-                <a16:creationId xmlns:a16="http://schemas.microsoft.com/office/drawing/2014/main" id="{E6F5C393-F247-45EE-AD9F-09372DC361C1}"/>
+                <a16:creationId xmlns:a16="http://schemas.microsoft.com/office/drawing/2014/main" id="{0AD0ED56-07B6-47AF-8965-21FE5B7568C1}"/>
               </a:ext>
             </a:extLst>
           </p:cNvPr>
@@ -9235,7 +9235,7 @@
           <p:cNvPr id="10" name="">
             <a:extLst xmlns:a="http://schemas.openxmlformats.org/drawingml/2006/main">
               <a:ext uri="{FF2B5EF4-FFF2-40B4-BE49-F238E27FC236}">
-                <a16:creationId xmlns:a16="http://schemas.microsoft.com/office/drawing/2014/main" id="{93063F19-1361-4C0E-9329-DA3A5C6CA1F4}"/>
+                <a16:creationId xmlns:a16="http://schemas.microsoft.com/office/drawing/2014/main" id="{E52AAD77-7983-410E-809F-83181F038D87}"/>
               </a:ext>
             </a:extLst>
           </p:cNvPr>
@@ -9285,7 +9285,7 @@
           <p:cNvPr id="11" name="">
             <a:extLst xmlns:a="http://schemas.openxmlformats.org/drawingml/2006/main">
               <a:ext uri="{FF2B5EF4-FFF2-40B4-BE49-F238E27FC236}">
-                <a16:creationId xmlns:a16="http://schemas.microsoft.com/office/drawing/2014/main" id="{7CE68CE5-3E1E-4A13-BCD6-1E4F86491BBA}"/>
+                <a16:creationId xmlns:a16="http://schemas.microsoft.com/office/drawing/2014/main" id="{66A43420-FE07-475A-AEF1-1B665A0CC9CD}"/>
               </a:ext>
             </a:extLst>
           </p:cNvPr>
@@ -9335,7 +9335,7 @@
           <p:cNvPr id="12" name="">
             <a:extLst xmlns:a="http://schemas.openxmlformats.org/drawingml/2006/main">
               <a:ext uri="{FF2B5EF4-FFF2-40B4-BE49-F238E27FC236}">
-                <a16:creationId xmlns:a16="http://schemas.microsoft.com/office/drawing/2014/main" id="{6C9A29C8-D679-469F-AE0B-6872B48BEEDE}"/>
+                <a16:creationId xmlns:a16="http://schemas.microsoft.com/office/drawing/2014/main" id="{0AC2691C-14C5-4954-BCDF-98F48D1FC090}"/>
               </a:ext>
             </a:extLst>
           </p:cNvPr>
@@ -9366,7 +9366,7 @@
           <p:cNvPr id="13" name="">
             <a:extLst xmlns:a="http://schemas.openxmlformats.org/drawingml/2006/main">
               <a:ext uri="{FF2B5EF4-FFF2-40B4-BE49-F238E27FC236}">
-                <a16:creationId xmlns:a16="http://schemas.microsoft.com/office/drawing/2014/main" id="{0A027C37-A30C-486C-B112-778EF2D1E723}"/>
+                <a16:creationId xmlns:a16="http://schemas.microsoft.com/office/drawing/2014/main" id="{EDDC8E21-0688-4625-AD69-6BA9B295D77C}"/>
               </a:ext>
             </a:extLst>
           </p:cNvPr>
@@ -9416,7 +9416,7 @@
           <p:cNvPr id="14" name="">
             <a:extLst xmlns:a="http://schemas.openxmlformats.org/drawingml/2006/main">
               <a:ext uri="{FF2B5EF4-FFF2-40B4-BE49-F238E27FC236}">
-                <a16:creationId xmlns:a16="http://schemas.microsoft.com/office/drawing/2014/main" id="{22702CF1-76E3-4F4A-9312-F406773FB1A4}"/>
+                <a16:creationId xmlns:a16="http://schemas.microsoft.com/office/drawing/2014/main" id="{FFF7803B-FEEE-4CF5-980A-84552E1E1CEB}"/>
               </a:ext>
             </a:extLst>
           </p:cNvPr>
@@ -9466,7 +9466,7 @@
           <p:cNvPr id="15" name="">
             <a:extLst xmlns:a="http://schemas.openxmlformats.org/drawingml/2006/main">
               <a:ext uri="{FF2B5EF4-FFF2-40B4-BE49-F238E27FC236}">
-                <a16:creationId xmlns:a16="http://schemas.microsoft.com/office/drawing/2014/main" id="{028ACF89-A01D-470A-B814-2CC083537ED5}"/>
+                <a16:creationId xmlns:a16="http://schemas.microsoft.com/office/drawing/2014/main" id="{5C420FCB-DDC5-4483-8D39-A9F4E758632D}"/>
               </a:ext>
             </a:extLst>
           </p:cNvPr>
@@ -9497,7 +9497,7 @@
           <p:cNvPr id="16" name="">
             <a:extLst xmlns:a="http://schemas.openxmlformats.org/drawingml/2006/main">
               <a:ext uri="{FF2B5EF4-FFF2-40B4-BE49-F238E27FC236}">
-                <a16:creationId xmlns:a16="http://schemas.microsoft.com/office/drawing/2014/main" id="{0B0B8165-0C91-4229-979D-13FA769BCCBE}"/>
+                <a16:creationId xmlns:a16="http://schemas.microsoft.com/office/drawing/2014/main" id="{F69057C9-DAC1-4806-B3A1-A705DFEDDA69}"/>
               </a:ext>
             </a:extLst>
           </p:cNvPr>
@@ -9547,7 +9547,7 @@
           <p:cNvPr id="17" name="">
             <a:extLst xmlns:a="http://schemas.openxmlformats.org/drawingml/2006/main">
               <a:ext uri="{FF2B5EF4-FFF2-40B4-BE49-F238E27FC236}">
-                <a16:creationId xmlns:a16="http://schemas.microsoft.com/office/drawing/2014/main" id="{DFE33385-24C9-4D8B-B5D5-6DBF29FDECEC}"/>
+                <a16:creationId xmlns:a16="http://schemas.microsoft.com/office/drawing/2014/main" id="{FB830ABE-D79D-42C3-8E05-E952B745A772}"/>
               </a:ext>
             </a:extLst>
           </p:cNvPr>
@@ -9597,7 +9597,7 @@
           <p:cNvPr id="18" name="">
             <a:extLst xmlns:a="http://schemas.openxmlformats.org/drawingml/2006/main">
               <a:ext uri="{FF2B5EF4-FFF2-40B4-BE49-F238E27FC236}">
-                <a16:creationId xmlns:a16="http://schemas.microsoft.com/office/drawing/2014/main" id="{72BD5C7F-2E42-4188-BC22-FED41C90B34B}"/>
+                <a16:creationId xmlns:a16="http://schemas.microsoft.com/office/drawing/2014/main" id="{A40AE34B-F97A-4A28-A491-6B3AA9D18B6D}"/>
               </a:ext>
             </a:extLst>
           </p:cNvPr>
@@ -9628,7 +9628,7 @@
           <p:cNvPr id="19" name="">
             <a:extLst xmlns:a="http://schemas.openxmlformats.org/drawingml/2006/main">
               <a:ext uri="{FF2B5EF4-FFF2-40B4-BE49-F238E27FC236}">
-                <a16:creationId xmlns:a16="http://schemas.microsoft.com/office/drawing/2014/main" id="{58BB408C-34F7-4009-99AE-B6A63AA19988}"/>
+                <a16:creationId xmlns:a16="http://schemas.microsoft.com/office/drawing/2014/main" id="{C9BD8BF0-E535-4E3D-9CF2-1A5EDDA675BB}"/>
               </a:ext>
             </a:extLst>
           </p:cNvPr>
@@ -9678,7 +9678,7 @@
           <p:cNvPr id="20" name="">
             <a:extLst xmlns:a="http://schemas.openxmlformats.org/drawingml/2006/main">
               <a:ext uri="{FF2B5EF4-FFF2-40B4-BE49-F238E27FC236}">
-                <a16:creationId xmlns:a16="http://schemas.microsoft.com/office/drawing/2014/main" id="{4F9F3894-A461-44D1-B14B-BA07A77C44C5}"/>
+                <a16:creationId xmlns:a16="http://schemas.microsoft.com/office/drawing/2014/main" id="{5B1DCAF5-4E08-480D-9CF0-191819EEBA3A}"/>
               </a:ext>
             </a:extLst>
           </p:cNvPr>
@@ -9728,7 +9728,7 @@
           <p:cNvPr id="21" name="">
             <a:extLst xmlns:a="http://schemas.openxmlformats.org/drawingml/2006/main">
               <a:ext uri="{FF2B5EF4-FFF2-40B4-BE49-F238E27FC236}">
-                <a16:creationId xmlns:a16="http://schemas.microsoft.com/office/drawing/2014/main" id="{A349500E-A3B9-4EF7-8DD1-2D96889E616C}"/>
+                <a16:creationId xmlns:a16="http://schemas.microsoft.com/office/drawing/2014/main" id="{43D743CF-0043-446B-9554-02AF1976C9DB}"/>
               </a:ext>
             </a:extLst>
           </p:cNvPr>
@@ -9761,7 +9761,7 @@
           <p:cNvPr id="22" name="">
             <a:extLst xmlns:a="http://schemas.openxmlformats.org/drawingml/2006/main">
               <a:ext uri="{FF2B5EF4-FFF2-40B4-BE49-F238E27FC236}">
-                <a16:creationId xmlns:a16="http://schemas.microsoft.com/office/drawing/2014/main" id="{EC9C3EE2-48E6-4BA9-9F52-B88B466E4848}"/>
+                <a16:creationId xmlns:a16="http://schemas.microsoft.com/office/drawing/2014/main" id="{CA7B6090-BBDB-4CA5-ABBB-48653468A8A3}"/>
               </a:ext>
             </a:extLst>
           </p:cNvPr>
@@ -9811,7 +9811,7 @@
           <p:cNvPr id="23" name="">
             <a:extLst xmlns:a="http://schemas.openxmlformats.org/drawingml/2006/main">
               <a:ext uri="{FF2B5EF4-FFF2-40B4-BE49-F238E27FC236}">
-                <a16:creationId xmlns:a16="http://schemas.microsoft.com/office/drawing/2014/main" id="{DE8BBAF1-B3CF-47BA-8623-134CFB91142E}"/>
+                <a16:creationId xmlns:a16="http://schemas.microsoft.com/office/drawing/2014/main" id="{7A07E38A-4E94-45D9-B4C0-E600D2DEC2C1}"/>
               </a:ext>
             </a:extLst>
           </p:cNvPr>
@@ -9846,7 +9846,7 @@
           <p:cNvPr id="24" name="">
             <a:extLst xmlns:a="http://schemas.openxmlformats.org/drawingml/2006/main">
               <a:ext uri="{FF2B5EF4-FFF2-40B4-BE49-F238E27FC236}">
-                <a16:creationId xmlns:a16="http://schemas.microsoft.com/office/drawing/2014/main" id="{E3514B50-3A9C-40F8-A47F-A94FF83EA9F6}"/>
+                <a16:creationId xmlns:a16="http://schemas.microsoft.com/office/drawing/2014/main" id="{7F5AE021-29F4-40B7-BD1C-4C6947AFD422}"/>
               </a:ext>
             </a:extLst>
           </p:cNvPr>
@@ -9896,7 +9896,7 @@
           <p:cNvPr id="25" name="">
             <a:extLst xmlns:a="http://schemas.openxmlformats.org/drawingml/2006/main">
               <a:ext uri="{FF2B5EF4-FFF2-40B4-BE49-F238E27FC236}">
-                <a16:creationId xmlns:a16="http://schemas.microsoft.com/office/drawing/2014/main" id="{FFAB3214-C8B1-4E55-8BDA-08C28BC1DBF8}"/>
+                <a16:creationId xmlns:a16="http://schemas.microsoft.com/office/drawing/2014/main" id="{91FB5168-2405-4BA4-8441-88138C2E5E93}"/>
               </a:ext>
             </a:extLst>
           </p:cNvPr>
@@ -9946,7 +9946,7 @@
           <p:cNvPr id="26" name="">
             <a:extLst xmlns:a="http://schemas.openxmlformats.org/drawingml/2006/main">
               <a:ext uri="{FF2B5EF4-FFF2-40B4-BE49-F238E27FC236}">
-                <a16:creationId xmlns:a16="http://schemas.microsoft.com/office/drawing/2014/main" id="{E2FB7151-04C7-4729-934D-356C2307E4CF}"/>
+                <a16:creationId xmlns:a16="http://schemas.microsoft.com/office/drawing/2014/main" id="{B99415D0-D60C-4222-94AA-88DF29DEDC26}"/>
               </a:ext>
             </a:extLst>
           </p:cNvPr>
@@ -9994,7 +9994,7 @@
     </p:spTree>
     <p:extLst>
       <p:ext uri="{BB962C8B-B14F-4D97-AF65-F5344CB8AC3E}">
-        <p14:creationId xmlns:p14="http://schemas.microsoft.com/office/powerpoint/2010/main" val="89243862"/>
+        <p14:creationId xmlns:p14="http://schemas.microsoft.com/office/powerpoint/2010/main" val="1500761223"/>
       </p:ext>
     </p:extLst>
   </p:cSld>
@@ -10025,7 +10025,7 @@
           <p:cNvPr id="26" name="">
             <a:extLst xmlns:a="http://schemas.openxmlformats.org/drawingml/2006/main">
               <a:ext uri="{FF2B5EF4-FFF2-40B4-BE49-F238E27FC236}">
-                <a16:creationId xmlns:a16="http://schemas.microsoft.com/office/drawing/2014/main" id="{95F82106-4E2F-4E03-B251-FEA5111CCC9C}"/>
+                <a16:creationId xmlns:a16="http://schemas.microsoft.com/office/drawing/2014/main" id="{46FDA634-8289-4E8B-AA8E-825CB7C165B3}"/>
               </a:ext>
             </a:extLst>
           </p:cNvPr>
@@ -10058,7 +10058,7 @@
           <p:cNvPr id="2" name="">
             <a:extLst xmlns:a="http://schemas.openxmlformats.org/drawingml/2006/main">
               <a:ext uri="{FF2B5EF4-FFF2-40B4-BE49-F238E27FC236}">
-                <a16:creationId xmlns:a16="http://schemas.microsoft.com/office/drawing/2014/main" id="{8E1DCFAD-4BC3-46F1-80CD-88E99CD6B7A9}"/>
+                <a16:creationId xmlns:a16="http://schemas.microsoft.com/office/drawing/2014/main" id="{7601462E-B536-456A-BAEA-00E7F7574F98}"/>
               </a:ext>
             </a:extLst>
           </p:cNvPr>
@@ -10070,7 +10070,7 @@
         <p:spPr>
           <a:xfrm xmlns:a="http://schemas.openxmlformats.org/drawingml/2006/main">
             <a:off x="895350" y="504825"/>
-            <a:ext cx="2000250" cy="285750"/>
+            <a:ext cx="4000500" cy="285750"/>
           </a:xfrm>
           <a:prstGeom xmlns:a="http://schemas.openxmlformats.org/drawingml/2006/main" prst="rect">
             <a:avLst/>
@@ -10098,7 +10098,7 @@
                   <a:srgbClr val="7FA847"/>
                 </a:solidFill>
               </a:rPr>
-              <a:t>TOGETHER</a:t>
+              <a:t>Shape the recovery</a:t>
             </a:r>
           </a:p>
         </p:txBody>
@@ -10108,7 +10108,7 @@
           <p:cNvPr id="3" name="">
             <a:extLst xmlns:a="http://schemas.openxmlformats.org/drawingml/2006/main">
               <a:ext uri="{FF2B5EF4-FFF2-40B4-BE49-F238E27FC236}">
-                <a16:creationId xmlns:a16="http://schemas.microsoft.com/office/drawing/2014/main" id="{AA429682-5EAC-4246-B3A5-3DB0D5C9C2F9}"/>
+                <a16:creationId xmlns:a16="http://schemas.microsoft.com/office/drawing/2014/main" id="{05320A57-CF04-4613-A590-6B3D602A7224}"/>
               </a:ext>
             </a:extLst>
           </p:cNvPr>
@@ -10158,7 +10158,7 @@
           <p:cNvPr id="4" name="">
             <a:extLst xmlns:a="http://schemas.openxmlformats.org/drawingml/2006/main">
               <a:ext uri="{FF2B5EF4-FFF2-40B4-BE49-F238E27FC236}">
-                <a16:creationId xmlns:a16="http://schemas.microsoft.com/office/drawing/2014/main" id="{44A08147-B8EC-4B0C-A022-12C7C658B1D1}"/>
+                <a16:creationId xmlns:a16="http://schemas.microsoft.com/office/drawing/2014/main" id="{0E84F64B-6B59-4B1C-AFDF-74E0144578A8}"/>
               </a:ext>
             </a:extLst>
           </p:cNvPr>
@@ -10208,7 +10208,7 @@
           <p:cNvPr id="5" name="">
             <a:extLst xmlns:a="http://schemas.openxmlformats.org/drawingml/2006/main">
               <a:ext uri="{FF2B5EF4-FFF2-40B4-BE49-F238E27FC236}">
-                <a16:creationId xmlns:a16="http://schemas.microsoft.com/office/drawing/2014/main" id="{7A9F847F-CD09-46BB-AAC0-D2D3173C5B9D}"/>
+                <a16:creationId xmlns:a16="http://schemas.microsoft.com/office/drawing/2014/main" id="{6968345F-A029-4F48-B9E5-5FCC31E0631D}"/>
               </a:ext>
             </a:extLst>
           </p:cNvPr>
@@ -10239,7 +10239,7 @@
           <p:cNvPr id="6" name="">
             <a:extLst xmlns:a="http://schemas.openxmlformats.org/drawingml/2006/main">
               <a:ext uri="{FF2B5EF4-FFF2-40B4-BE49-F238E27FC236}">
-                <a16:creationId xmlns:a16="http://schemas.microsoft.com/office/drawing/2014/main" id="{17DBB1E2-64FD-4549-A465-C181CD7D63D2}"/>
+                <a16:creationId xmlns:a16="http://schemas.microsoft.com/office/drawing/2014/main" id="{732340E1-1338-4605-9F60-49FAA55A0761}"/>
               </a:ext>
             </a:extLst>
           </p:cNvPr>
@@ -10289,7 +10289,7 @@
           <p:cNvPr id="7" name="">
             <a:extLst xmlns:a="http://schemas.openxmlformats.org/drawingml/2006/main">
               <a:ext uri="{FF2B5EF4-FFF2-40B4-BE49-F238E27FC236}">
-                <a16:creationId xmlns:a16="http://schemas.microsoft.com/office/drawing/2014/main" id="{65B745E4-99D1-490A-B1CF-1D0B488BA0F3}"/>
+                <a16:creationId xmlns:a16="http://schemas.microsoft.com/office/drawing/2014/main" id="{4CA14424-716F-4D27-9714-534D22EE212B}"/>
               </a:ext>
             </a:extLst>
           </p:cNvPr>
@@ -10339,7 +10339,7 @@
           <p:cNvPr id="8" name="">
             <a:extLst xmlns:a="http://schemas.openxmlformats.org/drawingml/2006/main">
               <a:ext uri="{FF2B5EF4-FFF2-40B4-BE49-F238E27FC236}">
-                <a16:creationId xmlns:a16="http://schemas.microsoft.com/office/drawing/2014/main" id="{748CE28C-7EFB-4287-902C-8D4512A6112E}"/>
+                <a16:creationId xmlns:a16="http://schemas.microsoft.com/office/drawing/2014/main" id="{444AC29C-8044-4DA8-820F-6D641B9B5AE0}"/>
               </a:ext>
             </a:extLst>
           </p:cNvPr>
@@ -10389,7 +10389,7 @@
           <p:cNvPr id="9" name="">
             <a:extLst xmlns:a="http://schemas.openxmlformats.org/drawingml/2006/main">
               <a:ext uri="{FF2B5EF4-FFF2-40B4-BE49-F238E27FC236}">
-                <a16:creationId xmlns:a16="http://schemas.microsoft.com/office/drawing/2014/main" id="{FE26B14F-2955-4CA9-ADB7-806BC43C4BED}"/>
+                <a16:creationId xmlns:a16="http://schemas.microsoft.com/office/drawing/2014/main" id="{BB4148E9-667C-4D29-A2C9-E63B3FFA8094}"/>
               </a:ext>
             </a:extLst>
           </p:cNvPr>
@@ -10439,7 +10439,7 @@
           <p:cNvPr id="10" name="">
             <a:extLst xmlns:a="http://schemas.openxmlformats.org/drawingml/2006/main">
               <a:ext uri="{FF2B5EF4-FFF2-40B4-BE49-F238E27FC236}">
-                <a16:creationId xmlns:a16="http://schemas.microsoft.com/office/drawing/2014/main" id="{8574D614-87B0-4E82-A0F9-027B286ECB86}"/>
+                <a16:creationId xmlns:a16="http://schemas.microsoft.com/office/drawing/2014/main" id="{6A596520-B350-4A63-A89B-64DA42F74989}"/>
               </a:ext>
             </a:extLst>
           </p:cNvPr>
@@ -10470,7 +10470,7 @@
           <p:cNvPr id="11" name="">
             <a:extLst xmlns:a="http://schemas.openxmlformats.org/drawingml/2006/main">
               <a:ext uri="{FF2B5EF4-FFF2-40B4-BE49-F238E27FC236}">
-                <a16:creationId xmlns:a16="http://schemas.microsoft.com/office/drawing/2014/main" id="{52D6A49A-11E0-428F-B1A9-918E088FE593}"/>
+                <a16:creationId xmlns:a16="http://schemas.microsoft.com/office/drawing/2014/main" id="{E725D435-987B-4B8C-A06A-2EC89C6996E6}"/>
               </a:ext>
             </a:extLst>
           </p:cNvPr>
@@ -10520,7 +10520,7 @@
           <p:cNvPr id="12" name="">
             <a:extLst xmlns:a="http://schemas.openxmlformats.org/drawingml/2006/main">
               <a:ext uri="{FF2B5EF4-FFF2-40B4-BE49-F238E27FC236}">
-                <a16:creationId xmlns:a16="http://schemas.microsoft.com/office/drawing/2014/main" id="{6587271E-0670-49C1-814B-C4E7652700A5}"/>
+                <a16:creationId xmlns:a16="http://schemas.microsoft.com/office/drawing/2014/main" id="{28343943-B325-441C-A7DD-1720B81C2106}"/>
               </a:ext>
             </a:extLst>
           </p:cNvPr>
@@ -10570,7 +10570,7 @@
           <p:cNvPr id="13" name="">
             <a:extLst xmlns:a="http://schemas.openxmlformats.org/drawingml/2006/main">
               <a:ext uri="{FF2B5EF4-FFF2-40B4-BE49-F238E27FC236}">
-                <a16:creationId xmlns:a16="http://schemas.microsoft.com/office/drawing/2014/main" id="{59E10FFF-739B-46C8-B023-FE6E750D52D9}"/>
+                <a16:creationId xmlns:a16="http://schemas.microsoft.com/office/drawing/2014/main" id="{2252AF6A-8F12-4DCA-A58D-69758C302088}"/>
               </a:ext>
             </a:extLst>
           </p:cNvPr>
@@ -10620,7 +10620,7 @@
           <p:cNvPr id="14" name="">
             <a:extLst xmlns:a="http://schemas.openxmlformats.org/drawingml/2006/main">
               <a:ext uri="{FF2B5EF4-FFF2-40B4-BE49-F238E27FC236}">
-                <a16:creationId xmlns:a16="http://schemas.microsoft.com/office/drawing/2014/main" id="{4551E2B3-BDA6-4756-870A-6744F6244ECA}"/>
+                <a16:creationId xmlns:a16="http://schemas.microsoft.com/office/drawing/2014/main" id="{DC03AB84-6C9E-49D8-AD8E-CC333F196F5F}"/>
               </a:ext>
             </a:extLst>
           </p:cNvPr>
@@ -10651,7 +10651,7 @@
           <p:cNvPr id="15" name="">
             <a:extLst xmlns:a="http://schemas.openxmlformats.org/drawingml/2006/main">
               <a:ext uri="{FF2B5EF4-FFF2-40B4-BE49-F238E27FC236}">
-                <a16:creationId xmlns:a16="http://schemas.microsoft.com/office/drawing/2014/main" id="{47F427E5-0E5F-4579-8DFC-5498146A4B1D}"/>
+                <a16:creationId xmlns:a16="http://schemas.microsoft.com/office/drawing/2014/main" id="{565DA557-D2C2-47CE-84C1-0AC38EE381BF}"/>
               </a:ext>
             </a:extLst>
           </p:cNvPr>
@@ -10701,7 +10701,7 @@
           <p:cNvPr id="16" name="">
             <a:extLst xmlns:a="http://schemas.openxmlformats.org/drawingml/2006/main">
               <a:ext uri="{FF2B5EF4-FFF2-40B4-BE49-F238E27FC236}">
-                <a16:creationId xmlns:a16="http://schemas.microsoft.com/office/drawing/2014/main" id="{9702E77D-0320-4C05-AD58-EE016A6114D7}"/>
+                <a16:creationId xmlns:a16="http://schemas.microsoft.com/office/drawing/2014/main" id="{EB59CDF4-6101-436E-B270-0B42AC576B77}"/>
               </a:ext>
             </a:extLst>
           </p:cNvPr>
@@ -10751,7 +10751,7 @@
           <p:cNvPr id="17" name="">
             <a:extLst xmlns:a="http://schemas.openxmlformats.org/drawingml/2006/main">
               <a:ext uri="{FF2B5EF4-FFF2-40B4-BE49-F238E27FC236}">
-                <a16:creationId xmlns:a16="http://schemas.microsoft.com/office/drawing/2014/main" id="{827CB4C6-9164-42DE-B116-566C5E3D3296}"/>
+                <a16:creationId xmlns:a16="http://schemas.microsoft.com/office/drawing/2014/main" id="{787B2305-BEC6-478B-99A8-83F5611993B2}"/>
               </a:ext>
             </a:extLst>
           </p:cNvPr>
@@ -10801,7 +10801,7 @@
           <p:cNvPr id="18" name="">
             <a:extLst xmlns:a="http://schemas.openxmlformats.org/drawingml/2006/main">
               <a:ext uri="{FF2B5EF4-FFF2-40B4-BE49-F238E27FC236}">
-                <a16:creationId xmlns:a16="http://schemas.microsoft.com/office/drawing/2014/main" id="{D322E74A-4C06-4F30-A0CE-28EFA1025DC6}"/>
+                <a16:creationId xmlns:a16="http://schemas.microsoft.com/office/drawing/2014/main" id="{DBEF7424-438B-4A64-A13B-21E504631427}"/>
               </a:ext>
             </a:extLst>
           </p:cNvPr>
@@ -10832,7 +10832,7 @@
           <p:cNvPr id="19" name="">
             <a:extLst xmlns:a="http://schemas.openxmlformats.org/drawingml/2006/main">
               <a:ext uri="{FF2B5EF4-FFF2-40B4-BE49-F238E27FC236}">
-                <a16:creationId xmlns:a16="http://schemas.microsoft.com/office/drawing/2014/main" id="{365DCAC6-83E5-48CE-A6AE-CFA5447F034A}"/>
+                <a16:creationId xmlns:a16="http://schemas.microsoft.com/office/drawing/2014/main" id="{2F0F01C8-A694-4818-B42C-15CF237BA12B}"/>
               </a:ext>
             </a:extLst>
           </p:cNvPr>
@@ -10882,7 +10882,7 @@
           <p:cNvPr id="20" name="">
             <a:extLst xmlns:a="http://schemas.openxmlformats.org/drawingml/2006/main">
               <a:ext uri="{FF2B5EF4-FFF2-40B4-BE49-F238E27FC236}">
-                <a16:creationId xmlns:a16="http://schemas.microsoft.com/office/drawing/2014/main" id="{9BC05B7C-749E-497E-A923-A60E55BF5F63}"/>
+                <a16:creationId xmlns:a16="http://schemas.microsoft.com/office/drawing/2014/main" id="{04248547-033B-45D5-AF29-2B285F61CE55}"/>
               </a:ext>
             </a:extLst>
           </p:cNvPr>
@@ -10932,7 +10932,7 @@
           <p:cNvPr id="21" name="">
             <a:extLst xmlns:a="http://schemas.openxmlformats.org/drawingml/2006/main">
               <a:ext uri="{FF2B5EF4-FFF2-40B4-BE49-F238E27FC236}">
-                <a16:creationId xmlns:a16="http://schemas.microsoft.com/office/drawing/2014/main" id="{422CD45D-D8E8-4F2B-8FED-196D8F66D93E}"/>
+                <a16:creationId xmlns:a16="http://schemas.microsoft.com/office/drawing/2014/main" id="{79FF120B-948B-445E-AA33-00FC93055D78}"/>
               </a:ext>
             </a:extLst>
           </p:cNvPr>
@@ -10982,7 +10982,7 @@
           <p:cNvPr id="22" name="">
             <a:extLst xmlns:a="http://schemas.openxmlformats.org/drawingml/2006/main">
               <a:ext uri="{FF2B5EF4-FFF2-40B4-BE49-F238E27FC236}">
-                <a16:creationId xmlns:a16="http://schemas.microsoft.com/office/drawing/2014/main" id="{E3CD3D2C-ED1B-46C8-AF5B-505921925C13}"/>
+                <a16:creationId xmlns:a16="http://schemas.microsoft.com/office/drawing/2014/main" id="{1772B3AE-FD14-4569-A4F3-F2BAC3582DB5}"/>
               </a:ext>
             </a:extLst>
           </p:cNvPr>
@@ -11013,7 +11013,7 @@
           <p:cNvPr id="23" name="">
             <a:extLst xmlns:a="http://schemas.openxmlformats.org/drawingml/2006/main">
               <a:ext uri="{FF2B5EF4-FFF2-40B4-BE49-F238E27FC236}">
-                <a16:creationId xmlns:a16="http://schemas.microsoft.com/office/drawing/2014/main" id="{F8531299-F0B5-4247-A0BB-B97067F2B0AF}"/>
+                <a16:creationId xmlns:a16="http://schemas.microsoft.com/office/drawing/2014/main" id="{B70A083D-3D86-432B-9319-0E1947AB4951}"/>
               </a:ext>
             </a:extLst>
           </p:cNvPr>
@@ -11063,7 +11063,7 @@
           <p:cNvPr id="24" name="">
             <a:extLst xmlns:a="http://schemas.openxmlformats.org/drawingml/2006/main">
               <a:ext uri="{FF2B5EF4-FFF2-40B4-BE49-F238E27FC236}">
-                <a16:creationId xmlns:a16="http://schemas.microsoft.com/office/drawing/2014/main" id="{5CC19509-555B-4B78-A44F-EAE7376E1E00}"/>
+                <a16:creationId xmlns:a16="http://schemas.microsoft.com/office/drawing/2014/main" id="{CC68DD5B-DF38-4CC3-A2E9-DD6273DE3F61}"/>
               </a:ext>
             </a:extLst>
           </p:cNvPr>
@@ -11098,7 +11098,7 @@
           <p:cNvPr id="25" name="">
             <a:extLst xmlns:a="http://schemas.openxmlformats.org/drawingml/2006/main">
               <a:ext uri="{FF2B5EF4-FFF2-40B4-BE49-F238E27FC236}">
-                <a16:creationId xmlns:a16="http://schemas.microsoft.com/office/drawing/2014/main" id="{F070AD13-64C8-4DF1-AB1F-1C83405E5CF7}"/>
+                <a16:creationId xmlns:a16="http://schemas.microsoft.com/office/drawing/2014/main" id="{623EA45A-53AE-4E29-AC2D-0800FF9BF962}"/>
               </a:ext>
             </a:extLst>
           </p:cNvPr>
@@ -11146,7 +11146,7 @@
     </p:spTree>
     <p:extLst>
       <p:ext uri="{BB962C8B-B14F-4D97-AF65-F5344CB8AC3E}">
-        <p14:creationId xmlns:p14="http://schemas.microsoft.com/office/powerpoint/2010/main" val="491257250"/>
+        <p14:creationId xmlns:p14="http://schemas.microsoft.com/office/powerpoint/2010/main" val="1857585389"/>
       </p:ext>
     </p:extLst>
   </p:cSld>
@@ -11177,7 +11177,7 @@
           <p:cNvPr id="24" name="">
             <a:extLst xmlns:a="http://schemas.openxmlformats.org/drawingml/2006/main">
               <a:ext uri="{FF2B5EF4-FFF2-40B4-BE49-F238E27FC236}">
-                <a16:creationId xmlns:a16="http://schemas.microsoft.com/office/drawing/2014/main" id="{67739EC3-DBD7-4BEB-8D09-C2FCB6FF4FA8}"/>
+                <a16:creationId xmlns:a16="http://schemas.microsoft.com/office/drawing/2014/main" id="{82DA187A-C425-43D2-9406-9C46B094A49D}"/>
               </a:ext>
             </a:extLst>
           </p:cNvPr>
@@ -11210,7 +11210,7 @@
           <p:cNvPr id="2" name="">
             <a:extLst xmlns:a="http://schemas.openxmlformats.org/drawingml/2006/main">
               <a:ext uri="{FF2B5EF4-FFF2-40B4-BE49-F238E27FC236}">
-                <a16:creationId xmlns:a16="http://schemas.microsoft.com/office/drawing/2014/main" id="{2F7BE40A-871F-4957-A970-CCD8573DEF1A}"/>
+                <a16:creationId xmlns:a16="http://schemas.microsoft.com/office/drawing/2014/main" id="{124BED4E-9452-430A-B409-F5A2B718C4B6}"/>
               </a:ext>
             </a:extLst>
           </p:cNvPr>
@@ -11222,7 +11222,7 @@
         <p:spPr>
           <a:xfrm xmlns:a="http://schemas.openxmlformats.org/drawingml/2006/main">
             <a:off x="895350" y="504825"/>
-            <a:ext cx="2000250" cy="285750"/>
+            <a:ext cx="4000500" cy="285750"/>
           </a:xfrm>
           <a:prstGeom xmlns:a="http://schemas.openxmlformats.org/drawingml/2006/main" prst="rect">
             <a:avLst/>
@@ -11250,7 +11250,7 @@
                   <a:srgbClr val="159A64"/>
                 </a:solidFill>
               </a:rPr>
-              <a:t>I SHOW</a:t>
+              <a:t>Before production</a:t>
             </a:r>
           </a:p>
         </p:txBody>
@@ -11260,7 +11260,7 @@
           <p:cNvPr id="3" name="">
             <a:extLst xmlns:a="http://schemas.openxmlformats.org/drawingml/2006/main">
               <a:ext uri="{FF2B5EF4-FFF2-40B4-BE49-F238E27FC236}">
-                <a16:creationId xmlns:a16="http://schemas.microsoft.com/office/drawing/2014/main" id="{B4D656F9-9DC5-4FB4-9674-38A2D79B9443}"/>
+                <a16:creationId xmlns:a16="http://schemas.microsoft.com/office/drawing/2014/main" id="{5AAFFEB3-41DB-49A6-A2A4-AEFCB94B1604}"/>
               </a:ext>
             </a:extLst>
           </p:cNvPr>
@@ -11310,7 +11310,7 @@
           <p:cNvPr id="4" name="">
             <a:extLst xmlns:a="http://schemas.openxmlformats.org/drawingml/2006/main">
               <a:ext uri="{FF2B5EF4-FFF2-40B4-BE49-F238E27FC236}">
-                <a16:creationId xmlns:a16="http://schemas.microsoft.com/office/drawing/2014/main" id="{BE4E3B50-8B8C-445C-BCD3-BDCE3B35348E}"/>
+                <a16:creationId xmlns:a16="http://schemas.microsoft.com/office/drawing/2014/main" id="{73A600B0-2D7D-4D68-85D2-42C5A32A5886}"/>
               </a:ext>
             </a:extLst>
           </p:cNvPr>
@@ -11360,7 +11360,7 @@
           <p:cNvPr id="5" name="">
             <a:extLst xmlns:a="http://schemas.openxmlformats.org/drawingml/2006/main">
               <a:ext uri="{FF2B5EF4-FFF2-40B4-BE49-F238E27FC236}">
-                <a16:creationId xmlns:a16="http://schemas.microsoft.com/office/drawing/2014/main" id="{0A1483BF-2C80-41A9-838A-760EE2D435B3}"/>
+                <a16:creationId xmlns:a16="http://schemas.microsoft.com/office/drawing/2014/main" id="{F7B54FDF-8F25-4882-9D4D-0EA5F0FC7E38}"/>
               </a:ext>
             </a:extLst>
           </p:cNvPr>
@@ -11391,7 +11391,7 @@
           <p:cNvPr id="6" name="">
             <a:extLst xmlns:a="http://schemas.openxmlformats.org/drawingml/2006/main">
               <a:ext uri="{FF2B5EF4-FFF2-40B4-BE49-F238E27FC236}">
-                <a16:creationId xmlns:a16="http://schemas.microsoft.com/office/drawing/2014/main" id="{7A2F24C6-3411-48B1-B404-3233A9B86026}"/>
+                <a16:creationId xmlns:a16="http://schemas.microsoft.com/office/drawing/2014/main" id="{22706296-4161-4690-8DA9-07278068A237}"/>
               </a:ext>
             </a:extLst>
           </p:cNvPr>
@@ -11441,7 +11441,7 @@
           <p:cNvPr id="7" name="">
             <a:extLst xmlns:a="http://schemas.openxmlformats.org/drawingml/2006/main">
               <a:ext uri="{FF2B5EF4-FFF2-40B4-BE49-F238E27FC236}">
-                <a16:creationId xmlns:a16="http://schemas.microsoft.com/office/drawing/2014/main" id="{46C2A29D-6B84-4E74-8058-72B872F17B17}"/>
+                <a16:creationId xmlns:a16="http://schemas.microsoft.com/office/drawing/2014/main" id="{647E773C-F13F-4F37-B8C6-80476F4CB4CE}"/>
               </a:ext>
             </a:extLst>
           </p:cNvPr>
@@ -11491,7 +11491,7 @@
           <p:cNvPr id="8" name="">
             <a:extLst xmlns:a="http://schemas.openxmlformats.org/drawingml/2006/main">
               <a:ext uri="{FF2B5EF4-FFF2-40B4-BE49-F238E27FC236}">
-                <a16:creationId xmlns:a16="http://schemas.microsoft.com/office/drawing/2014/main" id="{E3BB9BE3-C315-4C10-B57E-9005145584CD}"/>
+                <a16:creationId xmlns:a16="http://schemas.microsoft.com/office/drawing/2014/main" id="{3A10ED6D-C13B-4378-8976-0CC99821D07D}"/>
               </a:ext>
             </a:extLst>
           </p:cNvPr>
@@ -11541,7 +11541,7 @@
           <p:cNvPr id="9" name="">
             <a:extLst xmlns:a="http://schemas.openxmlformats.org/drawingml/2006/main">
               <a:ext uri="{FF2B5EF4-FFF2-40B4-BE49-F238E27FC236}">
-                <a16:creationId xmlns:a16="http://schemas.microsoft.com/office/drawing/2014/main" id="{047AD762-7580-4CCD-B133-2C35CC3A9EDE}"/>
+                <a16:creationId xmlns:a16="http://schemas.microsoft.com/office/drawing/2014/main" id="{3F1D9A8D-01E8-4D65-BC5F-39665074DDD2}"/>
               </a:ext>
             </a:extLst>
           </p:cNvPr>
@@ -11572,7 +11572,7 @@
           <p:cNvPr id="10" name="">
             <a:extLst xmlns:a="http://schemas.openxmlformats.org/drawingml/2006/main">
               <a:ext uri="{FF2B5EF4-FFF2-40B4-BE49-F238E27FC236}">
-                <a16:creationId xmlns:a16="http://schemas.microsoft.com/office/drawing/2014/main" id="{C550754F-C6CD-48C7-8CED-4FE60A119B44}"/>
+                <a16:creationId xmlns:a16="http://schemas.microsoft.com/office/drawing/2014/main" id="{60BF2324-0D0F-4D63-879B-0BA19F4D196D}"/>
               </a:ext>
             </a:extLst>
           </p:cNvPr>
@@ -11622,7 +11622,7 @@
           <p:cNvPr id="11" name="">
             <a:extLst xmlns:a="http://schemas.openxmlformats.org/drawingml/2006/main">
               <a:ext uri="{FF2B5EF4-FFF2-40B4-BE49-F238E27FC236}">
-                <a16:creationId xmlns:a16="http://schemas.microsoft.com/office/drawing/2014/main" id="{DD829D88-BDFC-453E-9387-03856649B8CA}"/>
+                <a16:creationId xmlns:a16="http://schemas.microsoft.com/office/drawing/2014/main" id="{6845F1C0-01F9-4FFE-9C77-592C23C3C143}"/>
               </a:ext>
             </a:extLst>
           </p:cNvPr>
@@ -11672,7 +11672,7 @@
           <p:cNvPr id="12" name="">
             <a:extLst xmlns:a="http://schemas.openxmlformats.org/drawingml/2006/main">
               <a:ext uri="{FF2B5EF4-FFF2-40B4-BE49-F238E27FC236}">
-                <a16:creationId xmlns:a16="http://schemas.microsoft.com/office/drawing/2014/main" id="{F9467795-E6E2-4F7C-AA95-76D1857DBFF9}"/>
+                <a16:creationId xmlns:a16="http://schemas.microsoft.com/office/drawing/2014/main" id="{51A102A4-7A87-4D3E-B99E-AFB47464719D}"/>
               </a:ext>
             </a:extLst>
           </p:cNvPr>
@@ -11703,7 +11703,7 @@
           <p:cNvPr id="13" name="">
             <a:extLst xmlns:a="http://schemas.openxmlformats.org/drawingml/2006/main">
               <a:ext uri="{FF2B5EF4-FFF2-40B4-BE49-F238E27FC236}">
-                <a16:creationId xmlns:a16="http://schemas.microsoft.com/office/drawing/2014/main" id="{2ECE05A9-6AFF-4113-A9AA-4539684E8842}"/>
+                <a16:creationId xmlns:a16="http://schemas.microsoft.com/office/drawing/2014/main" id="{F5416173-9501-490D-8112-C618B27D1DDF}"/>
               </a:ext>
             </a:extLst>
           </p:cNvPr>
@@ -11753,7 +11753,7 @@
           <p:cNvPr id="14" name="">
             <a:extLst xmlns:a="http://schemas.openxmlformats.org/drawingml/2006/main">
               <a:ext uri="{FF2B5EF4-FFF2-40B4-BE49-F238E27FC236}">
-                <a16:creationId xmlns:a16="http://schemas.microsoft.com/office/drawing/2014/main" id="{DAEDF158-085C-43D2-AD85-14D9E7DF4252}"/>
+                <a16:creationId xmlns:a16="http://schemas.microsoft.com/office/drawing/2014/main" id="{F292DD99-FD69-4585-BA5E-2A2AC47D1FF7}"/>
               </a:ext>
             </a:extLst>
           </p:cNvPr>
@@ -11803,7 +11803,7 @@
           <p:cNvPr id="15" name="">
             <a:extLst xmlns:a="http://schemas.openxmlformats.org/drawingml/2006/main">
               <a:ext uri="{FF2B5EF4-FFF2-40B4-BE49-F238E27FC236}">
-                <a16:creationId xmlns:a16="http://schemas.microsoft.com/office/drawing/2014/main" id="{ADB12C9E-47D2-449D-A42C-AD11FE9D6130}"/>
+                <a16:creationId xmlns:a16="http://schemas.microsoft.com/office/drawing/2014/main" id="{1B6B00AC-C347-4F77-AB32-5FB8494C230A}"/>
               </a:ext>
             </a:extLst>
           </p:cNvPr>
@@ -11834,7 +11834,7 @@
           <p:cNvPr id="16" name="">
             <a:extLst xmlns:a="http://schemas.openxmlformats.org/drawingml/2006/main">
               <a:ext uri="{FF2B5EF4-FFF2-40B4-BE49-F238E27FC236}">
-                <a16:creationId xmlns:a16="http://schemas.microsoft.com/office/drawing/2014/main" id="{2165B1FD-F769-429E-85F8-07C66852CACF}"/>
+                <a16:creationId xmlns:a16="http://schemas.microsoft.com/office/drawing/2014/main" id="{8D7D0531-24A5-48F4-B47F-154B2A94BC49}"/>
               </a:ext>
             </a:extLst>
           </p:cNvPr>
@@ -11884,7 +11884,7 @@
           <p:cNvPr id="17" name="">
             <a:extLst xmlns:a="http://schemas.openxmlformats.org/drawingml/2006/main">
               <a:ext uri="{FF2B5EF4-FFF2-40B4-BE49-F238E27FC236}">
-                <a16:creationId xmlns:a16="http://schemas.microsoft.com/office/drawing/2014/main" id="{10FCBDAB-3B9C-429C-AB83-5FBEEEB9745D}"/>
+                <a16:creationId xmlns:a16="http://schemas.microsoft.com/office/drawing/2014/main" id="{A8555A2A-D833-4302-834B-8FAEABB5BCBB}"/>
               </a:ext>
             </a:extLst>
           </p:cNvPr>
@@ -11934,7 +11934,7 @@
           <p:cNvPr id="18" name="">
             <a:extLst xmlns:a="http://schemas.openxmlformats.org/drawingml/2006/main">
               <a:ext uri="{FF2B5EF4-FFF2-40B4-BE49-F238E27FC236}">
-                <a16:creationId xmlns:a16="http://schemas.microsoft.com/office/drawing/2014/main" id="{6C36D970-7972-4D5C-A9F1-E5E611327F86}"/>
+                <a16:creationId xmlns:a16="http://schemas.microsoft.com/office/drawing/2014/main" id="{F0914DD8-ABEB-4A22-B995-D30CAE57499B}"/>
               </a:ext>
             </a:extLst>
           </p:cNvPr>
@@ -11965,7 +11965,7 @@
           <p:cNvPr id="19" name="">
             <a:extLst xmlns:a="http://schemas.openxmlformats.org/drawingml/2006/main">
               <a:ext uri="{FF2B5EF4-FFF2-40B4-BE49-F238E27FC236}">
-                <a16:creationId xmlns:a16="http://schemas.microsoft.com/office/drawing/2014/main" id="{43BFD7F4-D624-4885-AA7E-7E682AE41071}"/>
+                <a16:creationId xmlns:a16="http://schemas.microsoft.com/office/drawing/2014/main" id="{2F546308-22BD-4758-B010-10591E2E53F6}"/>
               </a:ext>
             </a:extLst>
           </p:cNvPr>
@@ -12015,7 +12015,7 @@
           <p:cNvPr id="20" name="">
             <a:extLst xmlns:a="http://schemas.openxmlformats.org/drawingml/2006/main">
               <a:ext uri="{FF2B5EF4-FFF2-40B4-BE49-F238E27FC236}">
-                <a16:creationId xmlns:a16="http://schemas.microsoft.com/office/drawing/2014/main" id="{1DCB10B4-EBDD-45E3-A10A-32F2B15E0F00}"/>
+                <a16:creationId xmlns:a16="http://schemas.microsoft.com/office/drawing/2014/main" id="{41F51B99-B39E-42CD-BF2F-059783F15C64}"/>
               </a:ext>
             </a:extLst>
           </p:cNvPr>
@@ -12065,7 +12065,7 @@
           <p:cNvPr id="21" name="">
             <a:extLst xmlns:a="http://schemas.openxmlformats.org/drawingml/2006/main">
               <a:ext uri="{FF2B5EF4-FFF2-40B4-BE49-F238E27FC236}">
-                <a16:creationId xmlns:a16="http://schemas.microsoft.com/office/drawing/2014/main" id="{49B5AF3C-9029-444C-A9A3-ECCE5BB6C06A}"/>
+                <a16:creationId xmlns:a16="http://schemas.microsoft.com/office/drawing/2014/main" id="{85F5A1A1-93F0-44E7-A4E2-34005901A415}"/>
               </a:ext>
             </a:extLst>
           </p:cNvPr>
@@ -12096,7 +12096,7 @@
           <p:cNvPr id="22" name="">
             <a:extLst xmlns:a="http://schemas.openxmlformats.org/drawingml/2006/main">
               <a:ext uri="{FF2B5EF4-FFF2-40B4-BE49-F238E27FC236}">
-                <a16:creationId xmlns:a16="http://schemas.microsoft.com/office/drawing/2014/main" id="{B45F2121-EE32-484F-B48D-D73FA286AB33}"/>
+                <a16:creationId xmlns:a16="http://schemas.microsoft.com/office/drawing/2014/main" id="{46AF6077-1ACB-4128-81EB-5DCC8D01BCB3}"/>
               </a:ext>
             </a:extLst>
           </p:cNvPr>
@@ -12146,7 +12146,7 @@
           <p:cNvPr id="23" name="">
             <a:extLst xmlns:a="http://schemas.openxmlformats.org/drawingml/2006/main">
               <a:ext uri="{FF2B5EF4-FFF2-40B4-BE49-F238E27FC236}">
-                <a16:creationId xmlns:a16="http://schemas.microsoft.com/office/drawing/2014/main" id="{330C4CDF-7F25-4078-968C-72094F212809}"/>
+                <a16:creationId xmlns:a16="http://schemas.microsoft.com/office/drawing/2014/main" id="{AEE14A73-0391-4D27-996B-BD8E22DAEC32}"/>
               </a:ext>
             </a:extLst>
           </p:cNvPr>
@@ -12194,7 +12194,7 @@
     </p:spTree>
     <p:extLst>
       <p:ext uri="{BB962C8B-B14F-4D97-AF65-F5344CB8AC3E}">
-        <p14:creationId xmlns:p14="http://schemas.microsoft.com/office/powerpoint/2010/main" val="1350044723"/>
+        <p14:creationId xmlns:p14="http://schemas.microsoft.com/office/powerpoint/2010/main" val="359645729"/>
       </p:ext>
     </p:extLst>
   </p:cSld>
@@ -12225,7 +12225,7 @@
           <p:cNvPr id="28" name="">
             <a:extLst xmlns:a="http://schemas.openxmlformats.org/drawingml/2006/main">
               <a:ext uri="{FF2B5EF4-FFF2-40B4-BE49-F238E27FC236}">
-                <a16:creationId xmlns:a16="http://schemas.microsoft.com/office/drawing/2014/main" id="{F97ED25B-104F-431C-9315-995148B0A970}"/>
+                <a16:creationId xmlns:a16="http://schemas.microsoft.com/office/drawing/2014/main" id="{66DD41AC-F0A5-4BC3-BEE1-00E71921AF32}"/>
               </a:ext>
             </a:extLst>
           </p:cNvPr>
@@ -12258,7 +12258,7 @@
           <p:cNvPr id="2" name="">
             <a:extLst xmlns:a="http://schemas.openxmlformats.org/drawingml/2006/main">
               <a:ext uri="{FF2B5EF4-FFF2-40B4-BE49-F238E27FC236}">
-                <a16:creationId xmlns:a16="http://schemas.microsoft.com/office/drawing/2014/main" id="{4212C4E9-6E80-4643-9F60-B705E57F5527}"/>
+                <a16:creationId xmlns:a16="http://schemas.microsoft.com/office/drawing/2014/main" id="{FB590C59-0AEE-4824-8DBE-F2ACE15666EB}"/>
               </a:ext>
             </a:extLst>
           </p:cNvPr>
@@ -12270,7 +12270,7 @@
         <p:spPr>
           <a:xfrm xmlns:a="http://schemas.openxmlformats.org/drawingml/2006/main">
             <a:off x="895350" y="504825"/>
-            <a:ext cx="2000250" cy="285750"/>
+            <a:ext cx="4000500" cy="285750"/>
           </a:xfrm>
           <a:prstGeom xmlns:a="http://schemas.openxmlformats.org/drawingml/2006/main" prst="rect">
             <a:avLst/>
@@ -12298,7 +12298,7 @@
                   <a:srgbClr val="48B985"/>
                 </a:solidFill>
               </a:rPr>
-              <a:t>YOU DO</a:t>
+              <a:t>Choose your challenge</a:t>
             </a:r>
           </a:p>
         </p:txBody>
@@ -12308,7 +12308,7 @@
           <p:cNvPr id="3" name="">
             <a:extLst xmlns:a="http://schemas.openxmlformats.org/drawingml/2006/main">
               <a:ext uri="{FF2B5EF4-FFF2-40B4-BE49-F238E27FC236}">
-                <a16:creationId xmlns:a16="http://schemas.microsoft.com/office/drawing/2014/main" id="{7A9F4111-771E-474C-8F96-343AE8CF2B48}"/>
+                <a16:creationId xmlns:a16="http://schemas.microsoft.com/office/drawing/2014/main" id="{AE0A07A0-CDDB-449F-8221-B925C3C1F958}"/>
               </a:ext>
             </a:extLst>
           </p:cNvPr>
@@ -12358,7 +12358,7 @@
           <p:cNvPr id="4" name="">
             <a:extLst xmlns:a="http://schemas.openxmlformats.org/drawingml/2006/main">
               <a:ext uri="{FF2B5EF4-FFF2-40B4-BE49-F238E27FC236}">
-                <a16:creationId xmlns:a16="http://schemas.microsoft.com/office/drawing/2014/main" id="{C91107DD-6B5F-456E-AC9B-08C81DD8257C}"/>
+                <a16:creationId xmlns:a16="http://schemas.microsoft.com/office/drawing/2014/main" id="{3849C590-F089-41A3-B353-F84AEB57B111}"/>
               </a:ext>
             </a:extLst>
           </p:cNvPr>
@@ -12408,7 +12408,7 @@
           <p:cNvPr id="5" name="">
             <a:extLst xmlns:a="http://schemas.openxmlformats.org/drawingml/2006/main">
               <a:ext uri="{FF2B5EF4-FFF2-40B4-BE49-F238E27FC236}">
-                <a16:creationId xmlns:a16="http://schemas.microsoft.com/office/drawing/2014/main" id="{3C7E0B41-9915-494F-8553-0DCE786B7247}"/>
+                <a16:creationId xmlns:a16="http://schemas.microsoft.com/office/drawing/2014/main" id="{6C73595A-7837-4124-AB18-97CDF05F4A85}"/>
               </a:ext>
             </a:extLst>
           </p:cNvPr>
@@ -12439,7 +12439,7 @@
           <p:cNvPr id="6" name="">
             <a:extLst xmlns:a="http://schemas.openxmlformats.org/drawingml/2006/main">
               <a:ext uri="{FF2B5EF4-FFF2-40B4-BE49-F238E27FC236}">
-                <a16:creationId xmlns:a16="http://schemas.microsoft.com/office/drawing/2014/main" id="{74BDBB19-6C40-4BB5-8F9D-971699E83073}"/>
+                <a16:creationId xmlns:a16="http://schemas.microsoft.com/office/drawing/2014/main" id="{A732E4B9-52A2-4490-B437-3131F2381AA4}"/>
               </a:ext>
             </a:extLst>
           </p:cNvPr>
@@ -12489,7 +12489,7 @@
           <p:cNvPr id="7" name="">
             <a:extLst xmlns:a="http://schemas.openxmlformats.org/drawingml/2006/main">
               <a:ext uri="{FF2B5EF4-FFF2-40B4-BE49-F238E27FC236}">
-                <a16:creationId xmlns:a16="http://schemas.microsoft.com/office/drawing/2014/main" id="{DB406F07-106A-402A-88E6-FC7F6F9F4DB4}"/>
+                <a16:creationId xmlns:a16="http://schemas.microsoft.com/office/drawing/2014/main" id="{4C1F1102-653A-41FC-A936-23A975DAD491}"/>
               </a:ext>
             </a:extLst>
           </p:cNvPr>
@@ -12539,7 +12539,7 @@
           <p:cNvPr id="8" name="">
             <a:extLst xmlns:a="http://schemas.openxmlformats.org/drawingml/2006/main">
               <a:ext uri="{FF2B5EF4-FFF2-40B4-BE49-F238E27FC236}">
-                <a16:creationId xmlns:a16="http://schemas.microsoft.com/office/drawing/2014/main" id="{7C12B17A-0793-45F1-B9C5-ADA49E9A92ED}"/>
+                <a16:creationId xmlns:a16="http://schemas.microsoft.com/office/drawing/2014/main" id="{498DD573-63A1-450A-9EF9-EA44E79D2485}"/>
               </a:ext>
             </a:extLst>
           </p:cNvPr>
@@ -12570,7 +12570,7 @@
           <p:cNvPr id="9" name="">
             <a:extLst xmlns:a="http://schemas.openxmlformats.org/drawingml/2006/main">
               <a:ext uri="{FF2B5EF4-FFF2-40B4-BE49-F238E27FC236}">
-                <a16:creationId xmlns:a16="http://schemas.microsoft.com/office/drawing/2014/main" id="{C1331727-75E3-4111-8C1B-7E95A11A9F7D}"/>
+                <a16:creationId xmlns:a16="http://schemas.microsoft.com/office/drawing/2014/main" id="{341CBAF7-AD84-40BE-AD69-836B1BA33B62}"/>
               </a:ext>
             </a:extLst>
           </p:cNvPr>
@@ -12620,7 +12620,7 @@
           <p:cNvPr id="10" name="">
             <a:extLst xmlns:a="http://schemas.openxmlformats.org/drawingml/2006/main">
               <a:ext uri="{FF2B5EF4-FFF2-40B4-BE49-F238E27FC236}">
-                <a16:creationId xmlns:a16="http://schemas.microsoft.com/office/drawing/2014/main" id="{F0213F66-80A3-4302-BDD4-FE8CC6FCA87C}"/>
+                <a16:creationId xmlns:a16="http://schemas.microsoft.com/office/drawing/2014/main" id="{36C1D709-ED43-407D-84D4-E9DCF3435BED}"/>
               </a:ext>
             </a:extLst>
           </p:cNvPr>
@@ -12670,7 +12670,7 @@
           <p:cNvPr id="11" name="">
             <a:extLst xmlns:a="http://schemas.openxmlformats.org/drawingml/2006/main">
               <a:ext uri="{FF2B5EF4-FFF2-40B4-BE49-F238E27FC236}">
-                <a16:creationId xmlns:a16="http://schemas.microsoft.com/office/drawing/2014/main" id="{6806504A-1346-46B3-B963-12B4870A8E39}"/>
+                <a16:creationId xmlns:a16="http://schemas.microsoft.com/office/drawing/2014/main" id="{84552DCB-EFB4-46F7-B83E-1983F2FE82B0}"/>
               </a:ext>
             </a:extLst>
           </p:cNvPr>
@@ -12720,7 +12720,7 @@
           <p:cNvPr id="12" name="">
             <a:extLst xmlns:a="http://schemas.openxmlformats.org/drawingml/2006/main">
               <a:ext uri="{FF2B5EF4-FFF2-40B4-BE49-F238E27FC236}">
-                <a16:creationId xmlns:a16="http://schemas.microsoft.com/office/drawing/2014/main" id="{EDDD90F8-B1C6-4F70-82B9-662E04841E4E}"/>
+                <a16:creationId xmlns:a16="http://schemas.microsoft.com/office/drawing/2014/main" id="{00E8A215-A100-4B14-9B3F-40069F4F5162}"/>
               </a:ext>
             </a:extLst>
           </p:cNvPr>
@@ -12751,7 +12751,7 @@
           <p:cNvPr id="13" name="">
             <a:extLst xmlns:a="http://schemas.openxmlformats.org/drawingml/2006/main">
               <a:ext uri="{FF2B5EF4-FFF2-40B4-BE49-F238E27FC236}">
-                <a16:creationId xmlns:a16="http://schemas.microsoft.com/office/drawing/2014/main" id="{4A215A71-D0BB-410F-AB75-D05E04908AE3}"/>
+                <a16:creationId xmlns:a16="http://schemas.microsoft.com/office/drawing/2014/main" id="{D09B357F-5748-43F6-A396-1CA51025466D}"/>
               </a:ext>
             </a:extLst>
           </p:cNvPr>
@@ -12782,7 +12782,7 @@
           <p:cNvPr id="14" name="">
             <a:extLst xmlns:a="http://schemas.openxmlformats.org/drawingml/2006/main">
               <a:ext uri="{FF2B5EF4-FFF2-40B4-BE49-F238E27FC236}">
-                <a16:creationId xmlns:a16="http://schemas.microsoft.com/office/drawing/2014/main" id="{F0EA639A-94E2-45E4-A79A-F505B2134DE1}"/>
+                <a16:creationId xmlns:a16="http://schemas.microsoft.com/office/drawing/2014/main" id="{BD295DEA-634C-464F-BC3C-8D3B486E1E93}"/>
               </a:ext>
             </a:extLst>
           </p:cNvPr>
@@ -12832,7 +12832,7 @@
           <p:cNvPr id="15" name="">
             <a:extLst xmlns:a="http://schemas.openxmlformats.org/drawingml/2006/main">
               <a:ext uri="{FF2B5EF4-FFF2-40B4-BE49-F238E27FC236}">
-                <a16:creationId xmlns:a16="http://schemas.microsoft.com/office/drawing/2014/main" id="{B76FB109-AEB4-4725-B554-B8B4B553FDF9}"/>
+                <a16:creationId xmlns:a16="http://schemas.microsoft.com/office/drawing/2014/main" id="{EA82E086-74D3-48B8-94EB-FD699295CA0C}"/>
               </a:ext>
             </a:extLst>
           </p:cNvPr>
@@ -12882,7 +12882,7 @@
           <p:cNvPr id="16" name="">
             <a:extLst xmlns:a="http://schemas.openxmlformats.org/drawingml/2006/main">
               <a:ext uri="{FF2B5EF4-FFF2-40B4-BE49-F238E27FC236}">
-                <a16:creationId xmlns:a16="http://schemas.microsoft.com/office/drawing/2014/main" id="{2311C16D-E569-4D43-80BD-6848F663EEDB}"/>
+                <a16:creationId xmlns:a16="http://schemas.microsoft.com/office/drawing/2014/main" id="{33FAB85C-9C54-4AF6-B7DE-4776A393C3D4}"/>
               </a:ext>
             </a:extLst>
           </p:cNvPr>
@@ -12932,7 +12932,7 @@
           <p:cNvPr id="17" name="">
             <a:extLst xmlns:a="http://schemas.openxmlformats.org/drawingml/2006/main">
               <a:ext uri="{FF2B5EF4-FFF2-40B4-BE49-F238E27FC236}">
-                <a16:creationId xmlns:a16="http://schemas.microsoft.com/office/drawing/2014/main" id="{4C1C8920-35FC-48D1-97D3-2E5D3B52E7B2}"/>
+                <a16:creationId xmlns:a16="http://schemas.microsoft.com/office/drawing/2014/main" id="{CB9159C4-EFBC-4B36-9A6E-E085A3B5AA3E}"/>
               </a:ext>
             </a:extLst>
           </p:cNvPr>
@@ -12963,7 +12963,7 @@
           <p:cNvPr id="18" name="">
             <a:extLst xmlns:a="http://schemas.openxmlformats.org/drawingml/2006/main">
               <a:ext uri="{FF2B5EF4-FFF2-40B4-BE49-F238E27FC236}">
-                <a16:creationId xmlns:a16="http://schemas.microsoft.com/office/drawing/2014/main" id="{7330386D-37BA-49BB-9C21-DFA65A2E8636}"/>
+                <a16:creationId xmlns:a16="http://schemas.microsoft.com/office/drawing/2014/main" id="{3BB78A7B-0D6D-4D15-B944-F3A61E1D0696}"/>
               </a:ext>
             </a:extLst>
           </p:cNvPr>
@@ -12994,7 +12994,7 @@
           <p:cNvPr id="19" name="">
             <a:extLst xmlns:a="http://schemas.openxmlformats.org/drawingml/2006/main">
               <a:ext uri="{FF2B5EF4-FFF2-40B4-BE49-F238E27FC236}">
-                <a16:creationId xmlns:a16="http://schemas.microsoft.com/office/drawing/2014/main" id="{50A9C8EB-02A0-4A7A-A0BA-F2E000E8720A}"/>
+                <a16:creationId xmlns:a16="http://schemas.microsoft.com/office/drawing/2014/main" id="{2D344159-9DE2-45FA-9A71-8F0256B9CF5E}"/>
               </a:ext>
             </a:extLst>
           </p:cNvPr>
@@ -13044,7 +13044,7 @@
           <p:cNvPr id="20" name="">
             <a:extLst xmlns:a="http://schemas.openxmlformats.org/drawingml/2006/main">
               <a:ext uri="{FF2B5EF4-FFF2-40B4-BE49-F238E27FC236}">
-                <a16:creationId xmlns:a16="http://schemas.microsoft.com/office/drawing/2014/main" id="{CB26A4D4-DEDA-4338-9DF5-93BD6042A646}"/>
+                <a16:creationId xmlns:a16="http://schemas.microsoft.com/office/drawing/2014/main" id="{B4E03B82-C2B1-465F-81DA-0CB9C0AD7CB6}"/>
               </a:ext>
             </a:extLst>
           </p:cNvPr>
@@ -13094,7 +13094,7 @@
           <p:cNvPr id="21" name="">
             <a:extLst xmlns:a="http://schemas.openxmlformats.org/drawingml/2006/main">
               <a:ext uri="{FF2B5EF4-FFF2-40B4-BE49-F238E27FC236}">
-                <a16:creationId xmlns:a16="http://schemas.microsoft.com/office/drawing/2014/main" id="{4FB6F178-C0B9-4137-95EC-58E7A751A07A}"/>
+                <a16:creationId xmlns:a16="http://schemas.microsoft.com/office/drawing/2014/main" id="{D39EC992-99D6-48C5-9D8F-7A64D0ADFADE}"/>
               </a:ext>
             </a:extLst>
           </p:cNvPr>
@@ -13144,7 +13144,7 @@
           <p:cNvPr id="22" name="">
             <a:extLst xmlns:a="http://schemas.openxmlformats.org/drawingml/2006/main">
               <a:ext uri="{FF2B5EF4-FFF2-40B4-BE49-F238E27FC236}">
-                <a16:creationId xmlns:a16="http://schemas.microsoft.com/office/drawing/2014/main" id="{50255454-6F80-4737-A85E-B0FC0C4D5893}"/>
+                <a16:creationId xmlns:a16="http://schemas.microsoft.com/office/drawing/2014/main" id="{C4583855-49CC-4CB7-A2C5-8A85DAE37818}"/>
               </a:ext>
             </a:extLst>
           </p:cNvPr>
@@ -13175,7 +13175,7 @@
           <p:cNvPr id="23" name="">
             <a:extLst xmlns:a="http://schemas.openxmlformats.org/drawingml/2006/main">
               <a:ext uri="{FF2B5EF4-FFF2-40B4-BE49-F238E27FC236}">
-                <a16:creationId xmlns:a16="http://schemas.microsoft.com/office/drawing/2014/main" id="{B73B8E2D-CB84-4045-94B1-55A2563FC375}"/>
+                <a16:creationId xmlns:a16="http://schemas.microsoft.com/office/drawing/2014/main" id="{4C8DE644-80D9-4F6A-AC9B-BD1B6020EC28}"/>
               </a:ext>
             </a:extLst>
           </p:cNvPr>
@@ -13225,7 +13225,7 @@
           <p:cNvPr id="24" name="">
             <a:extLst xmlns:a="http://schemas.openxmlformats.org/drawingml/2006/main">
               <a:ext uri="{FF2B5EF4-FFF2-40B4-BE49-F238E27FC236}">
-                <a16:creationId xmlns:a16="http://schemas.microsoft.com/office/drawing/2014/main" id="{123232A8-6B85-4D64-9E37-CFD9801EA62A}"/>
+                <a16:creationId xmlns:a16="http://schemas.microsoft.com/office/drawing/2014/main" id="{11FA8D27-9A53-40BB-B7C8-EA6F91A92D74}"/>
               </a:ext>
             </a:extLst>
           </p:cNvPr>
@@ -13275,7 +13275,7 @@
           <p:cNvPr id="25" name="">
             <a:extLst xmlns:a="http://schemas.openxmlformats.org/drawingml/2006/main">
               <a:ext uri="{FF2B5EF4-FFF2-40B4-BE49-F238E27FC236}">
-                <a16:creationId xmlns:a16="http://schemas.microsoft.com/office/drawing/2014/main" id="{6606FE56-AE60-4245-B32F-A5B5D01E2748}"/>
+                <a16:creationId xmlns:a16="http://schemas.microsoft.com/office/drawing/2014/main" id="{32A1CA09-7D2D-4DE6-A806-364CA05F261A}"/>
               </a:ext>
             </a:extLst>
           </p:cNvPr>
@@ -13310,7 +13310,7 @@
           <p:cNvPr id="26" name="">
             <a:extLst xmlns:a="http://schemas.openxmlformats.org/drawingml/2006/main">
               <a:ext uri="{FF2B5EF4-FFF2-40B4-BE49-F238E27FC236}">
-                <a16:creationId xmlns:a16="http://schemas.microsoft.com/office/drawing/2014/main" id="{7D9244B4-6E66-4293-AF10-7C5BE28F6D03}"/>
+                <a16:creationId xmlns:a16="http://schemas.microsoft.com/office/drawing/2014/main" id="{7E4C218E-135D-4237-BF3F-6F1F94FCE5B5}"/>
               </a:ext>
             </a:extLst>
           </p:cNvPr>
@@ -13360,7 +13360,7 @@
           <p:cNvPr id="27" name="">
             <a:extLst xmlns:a="http://schemas.openxmlformats.org/drawingml/2006/main">
               <a:ext uri="{FF2B5EF4-FFF2-40B4-BE49-F238E27FC236}">
-                <a16:creationId xmlns:a16="http://schemas.microsoft.com/office/drawing/2014/main" id="{EF486EA9-D192-41F0-982A-55BAB6C230D6}"/>
+                <a16:creationId xmlns:a16="http://schemas.microsoft.com/office/drawing/2014/main" id="{BA669251-3BAA-4C4E-AE54-E92C4034B6E2}"/>
               </a:ext>
             </a:extLst>
           </p:cNvPr>
@@ -13408,7 +13408,7 @@
     </p:spTree>
     <p:extLst>
       <p:ext uri="{BB962C8B-B14F-4D97-AF65-F5344CB8AC3E}">
-        <p14:creationId xmlns:p14="http://schemas.microsoft.com/office/powerpoint/2010/main" val="2090102337"/>
+        <p14:creationId xmlns:p14="http://schemas.microsoft.com/office/powerpoint/2010/main" val="498246605"/>
       </p:ext>
     </p:extLst>
   </p:cSld>
@@ -13439,7 +13439,7 @@
           <p:cNvPr id="46" name="">
             <a:extLst xmlns:a="http://schemas.openxmlformats.org/drawingml/2006/main">
               <a:ext uri="{FF2B5EF4-FFF2-40B4-BE49-F238E27FC236}">
-                <a16:creationId xmlns:a16="http://schemas.microsoft.com/office/drawing/2014/main" id="{D9364340-F95C-4B35-9ADC-8D49B687C586}"/>
+                <a16:creationId xmlns:a16="http://schemas.microsoft.com/office/drawing/2014/main" id="{DAD9A697-D667-48D0-96DC-0573D3C583E6}"/>
               </a:ext>
             </a:extLst>
           </p:cNvPr>
@@ -13472,7 +13472,7 @@
           <p:cNvPr id="2" name="">
             <a:extLst xmlns:a="http://schemas.openxmlformats.org/drawingml/2006/main">
               <a:ext uri="{FF2B5EF4-FFF2-40B4-BE49-F238E27FC236}">
-                <a16:creationId xmlns:a16="http://schemas.microsoft.com/office/drawing/2014/main" id="{468F2417-1311-46B6-A5A2-4857537569A6}"/>
+                <a16:creationId xmlns:a16="http://schemas.microsoft.com/office/drawing/2014/main" id="{213C627C-B3F9-456D-9CB3-F60D343E5BFB}"/>
               </a:ext>
             </a:extLst>
           </p:cNvPr>
@@ -13484,7 +13484,7 @@
         <p:spPr>
           <a:xfrm xmlns:a="http://schemas.openxmlformats.org/drawingml/2006/main">
             <a:off x="895350" y="504825"/>
-            <a:ext cx="2000250" cy="285750"/>
+            <a:ext cx="4000500" cy="285750"/>
           </a:xfrm>
           <a:prstGeom xmlns:a="http://schemas.openxmlformats.org/drawingml/2006/main" prst="rect">
             <a:avLst/>
@@ -13512,7 +13512,7 @@
                   <a:srgbClr val="159A64"/>
                 </a:solidFill>
               </a:rPr>
-              <a:t>WRAP-UP</a:t>
+              <a:t>What to take with you</a:t>
             </a:r>
           </a:p>
         </p:txBody>
@@ -13522,7 +13522,7 @@
           <p:cNvPr id="3" name="">
             <a:extLst xmlns:a="http://schemas.openxmlformats.org/drawingml/2006/main">
               <a:ext uri="{FF2B5EF4-FFF2-40B4-BE49-F238E27FC236}">
-                <a16:creationId xmlns:a16="http://schemas.microsoft.com/office/drawing/2014/main" id="{F48F146D-E718-4C0B-9FC9-03209251A667}"/>
+                <a16:creationId xmlns:a16="http://schemas.microsoft.com/office/drawing/2014/main" id="{F60B6C3E-DA0C-4DCA-AC7C-11F5DDAF1BD5}"/>
               </a:ext>
             </a:extLst>
           </p:cNvPr>
@@ -13572,7 +13572,7 @@
           <p:cNvPr id="4" name="">
             <a:extLst xmlns:a="http://schemas.openxmlformats.org/drawingml/2006/main">
               <a:ext uri="{FF2B5EF4-FFF2-40B4-BE49-F238E27FC236}">
-                <a16:creationId xmlns:a16="http://schemas.microsoft.com/office/drawing/2014/main" id="{54B34825-650E-4168-92DA-8BF56997C341}"/>
+                <a16:creationId xmlns:a16="http://schemas.microsoft.com/office/drawing/2014/main" id="{81B9A8AD-D0F2-4100-88D3-E5CAFE9D2D94}"/>
               </a:ext>
             </a:extLst>
           </p:cNvPr>
@@ -13622,7 +13622,7 @@
           <p:cNvPr id="5" name="">
             <a:extLst xmlns:a="http://schemas.openxmlformats.org/drawingml/2006/main">
               <a:ext uri="{FF2B5EF4-FFF2-40B4-BE49-F238E27FC236}">
-                <a16:creationId xmlns:a16="http://schemas.microsoft.com/office/drawing/2014/main" id="{477630B8-01C0-446A-8409-DF52E80AA61C}"/>
+                <a16:creationId xmlns:a16="http://schemas.microsoft.com/office/drawing/2014/main" id="{B2803DD0-2389-4236-BCA8-A412A0E04C0B}"/>
               </a:ext>
             </a:extLst>
           </p:cNvPr>
@@ -13653,7 +13653,7 @@
           <p:cNvPr id="6" name="">
             <a:extLst xmlns:a="http://schemas.openxmlformats.org/drawingml/2006/main">
               <a:ext uri="{FF2B5EF4-FFF2-40B4-BE49-F238E27FC236}">
-                <a16:creationId xmlns:a16="http://schemas.microsoft.com/office/drawing/2014/main" id="{73317976-9BCA-4AAD-AD20-C05929573793}"/>
+                <a16:creationId xmlns:a16="http://schemas.microsoft.com/office/drawing/2014/main" id="{F2939B21-747E-44BB-A542-84417B69F1EE}"/>
               </a:ext>
             </a:extLst>
           </p:cNvPr>
@@ -13703,7 +13703,7 @@
           <p:cNvPr id="7" name="">
             <a:extLst xmlns:a="http://schemas.openxmlformats.org/drawingml/2006/main">
               <a:ext uri="{FF2B5EF4-FFF2-40B4-BE49-F238E27FC236}">
-                <a16:creationId xmlns:a16="http://schemas.microsoft.com/office/drawing/2014/main" id="{3492B13B-25E4-4B98-AD5E-F7DC58FF5741}"/>
+                <a16:creationId xmlns:a16="http://schemas.microsoft.com/office/drawing/2014/main" id="{29BC5D8A-D749-43EC-87C6-8DDBA608F50D}"/>
               </a:ext>
             </a:extLst>
           </p:cNvPr>
@@ -13753,7 +13753,7 @@
           <p:cNvPr id="8" name="">
             <a:extLst xmlns:a="http://schemas.openxmlformats.org/drawingml/2006/main">
               <a:ext uri="{FF2B5EF4-FFF2-40B4-BE49-F238E27FC236}">
-                <a16:creationId xmlns:a16="http://schemas.microsoft.com/office/drawing/2014/main" id="{8B3D373E-ABBC-4380-8725-5CFB47592447}"/>
+                <a16:creationId xmlns:a16="http://schemas.microsoft.com/office/drawing/2014/main" id="{DC9096DF-EA84-40EB-AF00-63A1EA554CD2}"/>
               </a:ext>
             </a:extLst>
           </p:cNvPr>
@@ -13803,7 +13803,7 @@
           <p:cNvPr id="9" name="">
             <a:extLst xmlns:a="http://schemas.openxmlformats.org/drawingml/2006/main">
               <a:ext uri="{FF2B5EF4-FFF2-40B4-BE49-F238E27FC236}">
-                <a16:creationId xmlns:a16="http://schemas.microsoft.com/office/drawing/2014/main" id="{E63D0F8E-DAAD-4934-8588-8B4E5ED1FC8C}"/>
+                <a16:creationId xmlns:a16="http://schemas.microsoft.com/office/drawing/2014/main" id="{EC8ADF37-7865-40D7-B51D-8882817D52A0}"/>
               </a:ext>
             </a:extLst>
           </p:cNvPr>
@@ -13853,7 +13853,7 @@
           <p:cNvPr id="10" name="">
             <a:extLst xmlns:a="http://schemas.openxmlformats.org/drawingml/2006/main">
               <a:ext uri="{FF2B5EF4-FFF2-40B4-BE49-F238E27FC236}">
-                <a16:creationId xmlns:a16="http://schemas.microsoft.com/office/drawing/2014/main" id="{424BB56C-CE75-4135-A61E-36569A40100B}"/>
+                <a16:creationId xmlns:a16="http://schemas.microsoft.com/office/drawing/2014/main" id="{77954C3F-7C86-4381-AEC9-B62F4E4D4CF7}"/>
               </a:ext>
             </a:extLst>
           </p:cNvPr>
@@ -13903,7 +13903,7 @@
           <p:cNvPr id="11" name="">
             <a:extLst xmlns:a="http://schemas.openxmlformats.org/drawingml/2006/main">
               <a:ext uri="{FF2B5EF4-FFF2-40B4-BE49-F238E27FC236}">
-                <a16:creationId xmlns:a16="http://schemas.microsoft.com/office/drawing/2014/main" id="{8E3A5CA4-871A-4D0E-9857-3E99B09342B8}"/>
+                <a16:creationId xmlns:a16="http://schemas.microsoft.com/office/drawing/2014/main" id="{D8EBB82A-80EA-45B2-85D2-0E2EEB8E34CE}"/>
               </a:ext>
             </a:extLst>
           </p:cNvPr>
@@ -13953,7 +13953,7 @@
           <p:cNvPr id="12" name="">
             <a:extLst xmlns:a="http://schemas.openxmlformats.org/drawingml/2006/main">
               <a:ext uri="{FF2B5EF4-FFF2-40B4-BE49-F238E27FC236}">
-                <a16:creationId xmlns:a16="http://schemas.microsoft.com/office/drawing/2014/main" id="{F5A259B4-21BB-47F6-A3FE-795EBBDA4493}"/>
+                <a16:creationId xmlns:a16="http://schemas.microsoft.com/office/drawing/2014/main" id="{98D81328-AA9B-4F3D-8C29-34AF56451A26}"/>
               </a:ext>
             </a:extLst>
           </p:cNvPr>
@@ -14003,7 +14003,7 @@
           <p:cNvPr id="13" name="">
             <a:extLst xmlns:a="http://schemas.openxmlformats.org/drawingml/2006/main">
               <a:ext uri="{FF2B5EF4-FFF2-40B4-BE49-F238E27FC236}">
-                <a16:creationId xmlns:a16="http://schemas.microsoft.com/office/drawing/2014/main" id="{1B055A3E-6940-4968-833F-1CDEFA842CB8}"/>
+                <a16:creationId xmlns:a16="http://schemas.microsoft.com/office/drawing/2014/main" id="{2BE2A009-26FC-44BB-879E-61D03F2C0D0E}"/>
               </a:ext>
             </a:extLst>
           </p:cNvPr>
@@ -14053,7 +14053,7 @@
           <p:cNvPr id="14" name="">
             <a:extLst xmlns:a="http://schemas.openxmlformats.org/drawingml/2006/main">
               <a:ext uri="{FF2B5EF4-FFF2-40B4-BE49-F238E27FC236}">
-                <a16:creationId xmlns:a16="http://schemas.microsoft.com/office/drawing/2014/main" id="{99EFFCFA-9978-48C2-AB97-3CD87DED786E}"/>
+                <a16:creationId xmlns:a16="http://schemas.microsoft.com/office/drawing/2014/main" id="{4DF1E87C-93B7-4672-9125-C5568DFC5DB5}"/>
               </a:ext>
             </a:extLst>
           </p:cNvPr>
@@ -14084,7 +14084,7 @@
           <p:cNvPr id="15" name="">
             <a:extLst xmlns:a="http://schemas.openxmlformats.org/drawingml/2006/main">
               <a:ext uri="{FF2B5EF4-FFF2-40B4-BE49-F238E27FC236}">
-                <a16:creationId xmlns:a16="http://schemas.microsoft.com/office/drawing/2014/main" id="{017EBF7C-5753-4CD3-8AED-1BB67ACAD0B1}"/>
+                <a16:creationId xmlns:a16="http://schemas.microsoft.com/office/drawing/2014/main" id="{3A36638B-F7BF-4CC2-AC99-A5438795951F}"/>
               </a:ext>
             </a:extLst>
           </p:cNvPr>
@@ -14117,7 +14117,7 @@
           <p:cNvPr id="16" name="">
             <a:extLst xmlns:a="http://schemas.openxmlformats.org/drawingml/2006/main">
               <a:ext uri="{FF2B5EF4-FFF2-40B4-BE49-F238E27FC236}">
-                <a16:creationId xmlns:a16="http://schemas.microsoft.com/office/drawing/2014/main" id="{DBA5FEEE-B649-475F-B971-08F8245B4FBD}"/>
+                <a16:creationId xmlns:a16="http://schemas.microsoft.com/office/drawing/2014/main" id="{EC3AEBEA-06A1-4F75-B53D-580FEF072EBD}"/>
               </a:ext>
             </a:extLst>
           </p:cNvPr>
@@ -14150,7 +14150,7 @@
           <p:cNvPr id="17" name="">
             <a:extLst xmlns:a="http://schemas.openxmlformats.org/drawingml/2006/main">
               <a:ext uri="{FF2B5EF4-FFF2-40B4-BE49-F238E27FC236}">
-                <a16:creationId xmlns:a16="http://schemas.microsoft.com/office/drawing/2014/main" id="{077F65BA-F8FE-4693-A364-DD299050D254}"/>
+                <a16:creationId xmlns:a16="http://schemas.microsoft.com/office/drawing/2014/main" id="{5806A063-9EBE-40F0-9932-CDF54603E600}"/>
               </a:ext>
             </a:extLst>
           </p:cNvPr>
@@ -14183,7 +14183,7 @@
           <p:cNvPr id="18" name="">
             <a:extLst xmlns:a="http://schemas.openxmlformats.org/drawingml/2006/main">
               <a:ext uri="{FF2B5EF4-FFF2-40B4-BE49-F238E27FC236}">
-                <a16:creationId xmlns:a16="http://schemas.microsoft.com/office/drawing/2014/main" id="{CA7E400E-D824-4CD4-9A9E-1B76A2B8E054}"/>
+                <a16:creationId xmlns:a16="http://schemas.microsoft.com/office/drawing/2014/main" id="{5E671716-F062-4EC7-8E6B-F4E20F5C6CCC}"/>
               </a:ext>
             </a:extLst>
           </p:cNvPr>
@@ -14216,7 +14216,7 @@
           <p:cNvPr id="19" name="">
             <a:extLst xmlns:a="http://schemas.openxmlformats.org/drawingml/2006/main">
               <a:ext uri="{FF2B5EF4-FFF2-40B4-BE49-F238E27FC236}">
-                <a16:creationId xmlns:a16="http://schemas.microsoft.com/office/drawing/2014/main" id="{C7730665-9C25-48EA-B4B9-73B2B45BBAE8}"/>
+                <a16:creationId xmlns:a16="http://schemas.microsoft.com/office/drawing/2014/main" id="{454EEA12-2A75-4270-9383-241AC58D5137}"/>
               </a:ext>
             </a:extLst>
           </p:cNvPr>
@@ -14249,7 +14249,7 @@
           <p:cNvPr id="20" name="">
             <a:extLst xmlns:a="http://schemas.openxmlformats.org/drawingml/2006/main">
               <a:ext uri="{FF2B5EF4-FFF2-40B4-BE49-F238E27FC236}">
-                <a16:creationId xmlns:a16="http://schemas.microsoft.com/office/drawing/2014/main" id="{769B5F97-22F3-40F2-B1E0-B93860E9ACF8}"/>
+                <a16:creationId xmlns:a16="http://schemas.microsoft.com/office/drawing/2014/main" id="{115ACD9C-96CE-43EA-A18F-2F2BD8871A13}"/>
               </a:ext>
             </a:extLst>
           </p:cNvPr>
@@ -14282,7 +14282,7 @@
           <p:cNvPr id="21" name="">
             <a:extLst xmlns:a="http://schemas.openxmlformats.org/drawingml/2006/main">
               <a:ext uri="{FF2B5EF4-FFF2-40B4-BE49-F238E27FC236}">
-                <a16:creationId xmlns:a16="http://schemas.microsoft.com/office/drawing/2014/main" id="{E053BEE9-D9F5-47DC-9152-1D9F088060B2}"/>
+                <a16:creationId xmlns:a16="http://schemas.microsoft.com/office/drawing/2014/main" id="{91EF6B1B-B308-4A00-92EF-8CAA1F149D70}"/>
               </a:ext>
             </a:extLst>
           </p:cNvPr>
@@ -14315,7 +14315,7 @@
           <p:cNvPr id="22" name="">
             <a:extLst xmlns:a="http://schemas.openxmlformats.org/drawingml/2006/main">
               <a:ext uri="{FF2B5EF4-FFF2-40B4-BE49-F238E27FC236}">
-                <a16:creationId xmlns:a16="http://schemas.microsoft.com/office/drawing/2014/main" id="{09D7FC66-8529-4928-8CFB-E350D1C691C5}"/>
+                <a16:creationId xmlns:a16="http://schemas.microsoft.com/office/drawing/2014/main" id="{E9D0EA1B-B701-455A-A069-C5FD4461640D}"/>
               </a:ext>
             </a:extLst>
           </p:cNvPr>
@@ -14348,7 +14348,7 @@
           <p:cNvPr id="23" name="">
             <a:extLst xmlns:a="http://schemas.openxmlformats.org/drawingml/2006/main">
               <a:ext uri="{FF2B5EF4-FFF2-40B4-BE49-F238E27FC236}">
-                <a16:creationId xmlns:a16="http://schemas.microsoft.com/office/drawing/2014/main" id="{81C8073D-9082-4C96-9D6D-8C112984D57B}"/>
+                <a16:creationId xmlns:a16="http://schemas.microsoft.com/office/drawing/2014/main" id="{A0A74F51-2D07-464E-870C-3C585B8DC458}"/>
               </a:ext>
             </a:extLst>
           </p:cNvPr>
@@ -14381,7 +14381,7 @@
           <p:cNvPr id="24" name="">
             <a:extLst xmlns:a="http://schemas.openxmlformats.org/drawingml/2006/main">
               <a:ext uri="{FF2B5EF4-FFF2-40B4-BE49-F238E27FC236}">
-                <a16:creationId xmlns:a16="http://schemas.microsoft.com/office/drawing/2014/main" id="{2E4DDDBD-A82C-420B-9542-2F9C07D44474}"/>
+                <a16:creationId xmlns:a16="http://schemas.microsoft.com/office/drawing/2014/main" id="{8494A66E-7763-4637-A3A2-4608C32D5027}"/>
               </a:ext>
             </a:extLst>
           </p:cNvPr>
@@ -14414,7 +14414,7 @@
           <p:cNvPr id="25" name="">
             <a:extLst xmlns:a="http://schemas.openxmlformats.org/drawingml/2006/main">
               <a:ext uri="{FF2B5EF4-FFF2-40B4-BE49-F238E27FC236}">
-                <a16:creationId xmlns:a16="http://schemas.microsoft.com/office/drawing/2014/main" id="{3A63C1CB-80E0-4544-A078-F468B86ECE70}"/>
+                <a16:creationId xmlns:a16="http://schemas.microsoft.com/office/drawing/2014/main" id="{AE3977B7-278E-4C6C-AFA5-D6869820A7C2}"/>
               </a:ext>
             </a:extLst>
           </p:cNvPr>
@@ -14447,7 +14447,7 @@
           <p:cNvPr id="26" name="">
             <a:extLst xmlns:a="http://schemas.openxmlformats.org/drawingml/2006/main">
               <a:ext uri="{FF2B5EF4-FFF2-40B4-BE49-F238E27FC236}">
-                <a16:creationId xmlns:a16="http://schemas.microsoft.com/office/drawing/2014/main" id="{4EE33844-00B5-4863-97ED-C224ABB73FFF}"/>
+                <a16:creationId xmlns:a16="http://schemas.microsoft.com/office/drawing/2014/main" id="{0B68F2C0-E823-49E0-958B-D7A99F249126}"/>
               </a:ext>
             </a:extLst>
           </p:cNvPr>
@@ -14480,7 +14480,7 @@
           <p:cNvPr id="27" name="">
             <a:extLst xmlns:a="http://schemas.openxmlformats.org/drawingml/2006/main">
               <a:ext uri="{FF2B5EF4-FFF2-40B4-BE49-F238E27FC236}">
-                <a16:creationId xmlns:a16="http://schemas.microsoft.com/office/drawing/2014/main" id="{F9B0924A-957B-4732-8A02-B185E89C2F2B}"/>
+                <a16:creationId xmlns:a16="http://schemas.microsoft.com/office/drawing/2014/main" id="{E507CF22-6006-456C-8F2D-59ABF9FE53F4}"/>
               </a:ext>
             </a:extLst>
           </p:cNvPr>
@@ -14513,7 +14513,7 @@
           <p:cNvPr id="28" name="">
             <a:extLst xmlns:a="http://schemas.openxmlformats.org/drawingml/2006/main">
               <a:ext uri="{FF2B5EF4-FFF2-40B4-BE49-F238E27FC236}">
-                <a16:creationId xmlns:a16="http://schemas.microsoft.com/office/drawing/2014/main" id="{01E2B56B-506B-4A15-81B2-F42277E41AF0}"/>
+                <a16:creationId xmlns:a16="http://schemas.microsoft.com/office/drawing/2014/main" id="{379E1FEF-F0BB-43E9-BBF3-AFB379156EED}"/>
               </a:ext>
             </a:extLst>
           </p:cNvPr>
@@ -14546,7 +14546,7 @@
           <p:cNvPr id="29" name="">
             <a:extLst xmlns:a="http://schemas.openxmlformats.org/drawingml/2006/main">
               <a:ext uri="{FF2B5EF4-FFF2-40B4-BE49-F238E27FC236}">
-                <a16:creationId xmlns:a16="http://schemas.microsoft.com/office/drawing/2014/main" id="{196F1318-9FD6-476F-9B3B-64CE91F85F63}"/>
+                <a16:creationId xmlns:a16="http://schemas.microsoft.com/office/drawing/2014/main" id="{D0E3331C-F71A-40E8-8F54-13FCC5CE89AE}"/>
               </a:ext>
             </a:extLst>
           </p:cNvPr>
@@ -14579,7 +14579,7 @@
           <p:cNvPr id="30" name="">
             <a:extLst xmlns:a="http://schemas.openxmlformats.org/drawingml/2006/main">
               <a:ext uri="{FF2B5EF4-FFF2-40B4-BE49-F238E27FC236}">
-                <a16:creationId xmlns:a16="http://schemas.microsoft.com/office/drawing/2014/main" id="{94B0E4C0-9867-4F3B-9EA6-2A6EB5004B7B}"/>
+                <a16:creationId xmlns:a16="http://schemas.microsoft.com/office/drawing/2014/main" id="{E8DEFA87-DC26-49EC-8BF2-ACF424F3B45B}"/>
               </a:ext>
             </a:extLst>
           </p:cNvPr>
@@ -14612,7 +14612,7 @@
           <p:cNvPr id="31" name="">
             <a:extLst xmlns:a="http://schemas.openxmlformats.org/drawingml/2006/main">
               <a:ext uri="{FF2B5EF4-FFF2-40B4-BE49-F238E27FC236}">
-                <a16:creationId xmlns:a16="http://schemas.microsoft.com/office/drawing/2014/main" id="{5C510565-E703-4D75-95AF-719F9C9652B2}"/>
+                <a16:creationId xmlns:a16="http://schemas.microsoft.com/office/drawing/2014/main" id="{E28CFD13-777B-458F-AF57-D113B2E06CB6}"/>
               </a:ext>
             </a:extLst>
           </p:cNvPr>
@@ -14645,7 +14645,7 @@
           <p:cNvPr id="32" name="">
             <a:extLst xmlns:a="http://schemas.openxmlformats.org/drawingml/2006/main">
               <a:ext uri="{FF2B5EF4-FFF2-40B4-BE49-F238E27FC236}">
-                <a16:creationId xmlns:a16="http://schemas.microsoft.com/office/drawing/2014/main" id="{9CAFFA46-FEBF-4D07-93CC-22516582EEEC}"/>
+                <a16:creationId xmlns:a16="http://schemas.microsoft.com/office/drawing/2014/main" id="{43D17FE2-8209-45EB-8380-06B1B925AD6F}"/>
               </a:ext>
             </a:extLst>
           </p:cNvPr>
@@ -14678,7 +14678,7 @@
           <p:cNvPr id="33" name="">
             <a:extLst xmlns:a="http://schemas.openxmlformats.org/drawingml/2006/main">
               <a:ext uri="{FF2B5EF4-FFF2-40B4-BE49-F238E27FC236}">
-                <a16:creationId xmlns:a16="http://schemas.microsoft.com/office/drawing/2014/main" id="{3BA628A3-8843-4E99-A750-2672E093CD20}"/>
+                <a16:creationId xmlns:a16="http://schemas.microsoft.com/office/drawing/2014/main" id="{F935389F-1967-4FCA-AD85-4FFC9B0A0B12}"/>
               </a:ext>
             </a:extLst>
           </p:cNvPr>
@@ -14711,7 +14711,7 @@
           <p:cNvPr id="34" name="">
             <a:extLst xmlns:a="http://schemas.openxmlformats.org/drawingml/2006/main">
               <a:ext uri="{FF2B5EF4-FFF2-40B4-BE49-F238E27FC236}">
-                <a16:creationId xmlns:a16="http://schemas.microsoft.com/office/drawing/2014/main" id="{1E6C36CD-234D-44E5-B656-06CE75139549}"/>
+                <a16:creationId xmlns:a16="http://schemas.microsoft.com/office/drawing/2014/main" id="{B03E554C-E9E9-4C23-801C-69E936D1D4C5}"/>
               </a:ext>
             </a:extLst>
           </p:cNvPr>
@@ -14744,7 +14744,7 @@
           <p:cNvPr id="35" name="">
             <a:extLst xmlns:a="http://schemas.openxmlformats.org/drawingml/2006/main">
               <a:ext uri="{FF2B5EF4-FFF2-40B4-BE49-F238E27FC236}">
-                <a16:creationId xmlns:a16="http://schemas.microsoft.com/office/drawing/2014/main" id="{CC39AE7B-1D40-40D2-9D7E-96B9B4012514}"/>
+                <a16:creationId xmlns:a16="http://schemas.microsoft.com/office/drawing/2014/main" id="{A1F1E26F-1650-4AAB-B361-C1D4BA4A8C58}"/>
               </a:ext>
             </a:extLst>
           </p:cNvPr>
@@ -14777,7 +14777,7 @@
           <p:cNvPr id="36" name="">
             <a:extLst xmlns:a="http://schemas.openxmlformats.org/drawingml/2006/main">
               <a:ext uri="{FF2B5EF4-FFF2-40B4-BE49-F238E27FC236}">
-                <a16:creationId xmlns:a16="http://schemas.microsoft.com/office/drawing/2014/main" id="{021CAAFE-EE76-4600-9C36-BD665C6D1B1C}"/>
+                <a16:creationId xmlns:a16="http://schemas.microsoft.com/office/drawing/2014/main" id="{936D11A0-1AB1-41F2-AA98-A26D556383B8}"/>
               </a:ext>
             </a:extLst>
           </p:cNvPr>
@@ -14810,7 +14810,7 @@
           <p:cNvPr id="37" name="">
             <a:extLst xmlns:a="http://schemas.openxmlformats.org/drawingml/2006/main">
               <a:ext uri="{FF2B5EF4-FFF2-40B4-BE49-F238E27FC236}">
-                <a16:creationId xmlns:a16="http://schemas.microsoft.com/office/drawing/2014/main" id="{A3C13C53-9D08-431A-ADF8-DAD865A03ECA}"/>
+                <a16:creationId xmlns:a16="http://schemas.microsoft.com/office/drawing/2014/main" id="{49A32767-C393-49E6-9304-F92844C5E000}"/>
               </a:ext>
             </a:extLst>
           </p:cNvPr>
@@ -14843,7 +14843,7 @@
           <p:cNvPr id="38" name="">
             <a:extLst xmlns:a="http://schemas.openxmlformats.org/drawingml/2006/main">
               <a:ext uri="{FF2B5EF4-FFF2-40B4-BE49-F238E27FC236}">
-                <a16:creationId xmlns:a16="http://schemas.microsoft.com/office/drawing/2014/main" id="{9D98E0E6-4B93-4197-9315-9263FDF6CE23}"/>
+                <a16:creationId xmlns:a16="http://schemas.microsoft.com/office/drawing/2014/main" id="{DC69AB97-6118-4D76-A369-7CAC0BA4CE93}"/>
               </a:ext>
             </a:extLst>
           </p:cNvPr>
@@ -14876,7 +14876,7 @@
           <p:cNvPr id="39" name="">
             <a:extLst xmlns:a="http://schemas.openxmlformats.org/drawingml/2006/main">
               <a:ext uri="{FF2B5EF4-FFF2-40B4-BE49-F238E27FC236}">
-                <a16:creationId xmlns:a16="http://schemas.microsoft.com/office/drawing/2014/main" id="{952949D9-405D-4F3C-B54B-E8B6B9C1BE90}"/>
+                <a16:creationId xmlns:a16="http://schemas.microsoft.com/office/drawing/2014/main" id="{860DC3C9-AA55-4911-AB74-89A23A78231C}"/>
               </a:ext>
             </a:extLst>
           </p:cNvPr>
@@ -14909,7 +14909,7 @@
           <p:cNvPr id="40" name="">
             <a:extLst xmlns:a="http://schemas.openxmlformats.org/drawingml/2006/main">
               <a:ext uri="{FF2B5EF4-FFF2-40B4-BE49-F238E27FC236}">
-                <a16:creationId xmlns:a16="http://schemas.microsoft.com/office/drawing/2014/main" id="{6ED9B3E2-E5F8-4409-93E6-B3B53895D699}"/>
+                <a16:creationId xmlns:a16="http://schemas.microsoft.com/office/drawing/2014/main" id="{449E53A1-E9A6-434B-A54C-DAD11915284D}"/>
               </a:ext>
             </a:extLst>
           </p:cNvPr>
@@ -14942,7 +14942,7 @@
           <p:cNvPr id="41" name="">
             <a:extLst xmlns:a="http://schemas.openxmlformats.org/drawingml/2006/main">
               <a:ext uri="{FF2B5EF4-FFF2-40B4-BE49-F238E27FC236}">
-                <a16:creationId xmlns:a16="http://schemas.microsoft.com/office/drawing/2014/main" id="{0EC6BF72-AAB9-4896-94BA-D9808FFB39AE}"/>
+                <a16:creationId xmlns:a16="http://schemas.microsoft.com/office/drawing/2014/main" id="{4D127D22-8213-4858-8D60-B77193AFAB28}"/>
               </a:ext>
             </a:extLst>
           </p:cNvPr>
@@ -14975,7 +14975,7 @@
           <p:cNvPr id="42" name="">
             <a:extLst xmlns:a="http://schemas.openxmlformats.org/drawingml/2006/main">
               <a:ext uri="{FF2B5EF4-FFF2-40B4-BE49-F238E27FC236}">
-                <a16:creationId xmlns:a16="http://schemas.microsoft.com/office/drawing/2014/main" id="{40B864D7-0E95-495F-92C3-1D6F4DA2695D}"/>
+                <a16:creationId xmlns:a16="http://schemas.microsoft.com/office/drawing/2014/main" id="{9FAE6D66-4650-47F8-9726-34EB2E10794B}"/>
               </a:ext>
             </a:extLst>
           </p:cNvPr>
@@ -15008,7 +15008,7 @@
           <p:cNvPr id="43" name="">
             <a:extLst xmlns:a="http://schemas.openxmlformats.org/drawingml/2006/main">
               <a:ext uri="{FF2B5EF4-FFF2-40B4-BE49-F238E27FC236}">
-                <a16:creationId xmlns:a16="http://schemas.microsoft.com/office/drawing/2014/main" id="{E1F5C13F-827D-4EE0-A453-56B68D8A7049}"/>
+                <a16:creationId xmlns:a16="http://schemas.microsoft.com/office/drawing/2014/main" id="{846B55D6-766B-4F68-B3A7-24E7E270BD34}"/>
               </a:ext>
             </a:extLst>
           </p:cNvPr>
@@ -15041,7 +15041,7 @@
           <p:cNvPr id="44" name="">
             <a:extLst xmlns:a="http://schemas.openxmlformats.org/drawingml/2006/main">
               <a:ext uri="{FF2B5EF4-FFF2-40B4-BE49-F238E27FC236}">
-                <a16:creationId xmlns:a16="http://schemas.microsoft.com/office/drawing/2014/main" id="{112FCE1E-CC3C-455B-90F6-4FBB9215D5B7}"/>
+                <a16:creationId xmlns:a16="http://schemas.microsoft.com/office/drawing/2014/main" id="{F159B9E6-DCAD-43F1-98F6-2316297A9CDA}"/>
               </a:ext>
             </a:extLst>
           </p:cNvPr>
@@ -15074,7 +15074,7 @@
           <p:cNvPr id="45" name="">
             <a:extLst xmlns:a="http://schemas.openxmlformats.org/drawingml/2006/main">
               <a:ext uri="{FF2B5EF4-FFF2-40B4-BE49-F238E27FC236}">
-                <a16:creationId xmlns:a16="http://schemas.microsoft.com/office/drawing/2014/main" id="{D2CBB8EE-5467-4EC6-A77B-9B15369C75C8}"/>
+                <a16:creationId xmlns:a16="http://schemas.microsoft.com/office/drawing/2014/main" id="{0630909D-FACC-4101-AA0C-D18CF8DC2599}"/>
               </a:ext>
             </a:extLst>
           </p:cNvPr>
@@ -15122,7 +15122,7 @@
     </p:spTree>
     <p:extLst>
       <p:ext uri="{BB962C8B-B14F-4D97-AF65-F5344CB8AC3E}">
-        <p14:creationId xmlns:p14="http://schemas.microsoft.com/office/powerpoint/2010/main" val="287996539"/>
+        <p14:creationId xmlns:p14="http://schemas.microsoft.com/office/powerpoint/2010/main" val="416449567"/>
       </p:ext>
     </p:extLst>
   </p:cSld>
@@ -15153,7 +15153,7 @@
           <p:cNvPr id="31" name="">
             <a:extLst xmlns:a="http://schemas.openxmlformats.org/drawingml/2006/main">
               <a:ext uri="{FF2B5EF4-FFF2-40B4-BE49-F238E27FC236}">
-                <a16:creationId xmlns:a16="http://schemas.microsoft.com/office/drawing/2014/main" id="{2AE41260-A569-4859-AA98-76C50A307D1D}"/>
+                <a16:creationId xmlns:a16="http://schemas.microsoft.com/office/drawing/2014/main" id="{E57192D3-DA7C-42AA-BC92-7DCE1DB2C421}"/>
               </a:ext>
             </a:extLst>
           </p:cNvPr>
@@ -15186,7 +15186,7 @@
           <p:cNvPr id="2" name="">
             <a:extLst xmlns:a="http://schemas.openxmlformats.org/drawingml/2006/main">
               <a:ext uri="{FF2B5EF4-FFF2-40B4-BE49-F238E27FC236}">
-                <a16:creationId xmlns:a16="http://schemas.microsoft.com/office/drawing/2014/main" id="{BD0469A0-7283-4CEA-BBFD-EEA801AB1C26}"/>
+                <a16:creationId xmlns:a16="http://schemas.microsoft.com/office/drawing/2014/main" id="{73BE5907-4276-4720-B745-6759C049F52B}"/>
               </a:ext>
             </a:extLst>
           </p:cNvPr>
@@ -15198,7 +15198,7 @@
         <p:spPr>
           <a:xfrm xmlns:a="http://schemas.openxmlformats.org/drawingml/2006/main">
             <a:off x="895350" y="504825"/>
-            <a:ext cx="2000250" cy="285750"/>
+            <a:ext cx="4000500" cy="285750"/>
           </a:xfrm>
           <a:prstGeom xmlns:a="http://schemas.openxmlformats.org/drawingml/2006/main" prst="rect">
             <a:avLst/>
@@ -15226,7 +15226,7 @@
                   <a:srgbClr val="159A64"/>
                 </a:solidFill>
               </a:rPr>
-              <a:t>I SHOW</a:t>
+              <a:t>Start with a demo</a:t>
             </a:r>
           </a:p>
         </p:txBody>
@@ -15236,7 +15236,7 @@
           <p:cNvPr id="3" name="">
             <a:extLst xmlns:a="http://schemas.openxmlformats.org/drawingml/2006/main">
               <a:ext uri="{FF2B5EF4-FFF2-40B4-BE49-F238E27FC236}">
-                <a16:creationId xmlns:a16="http://schemas.microsoft.com/office/drawing/2014/main" id="{B20EBA36-67BC-4238-890F-6CAB3A78B43D}"/>
+                <a16:creationId xmlns:a16="http://schemas.microsoft.com/office/drawing/2014/main" id="{848EECCA-208D-4244-A970-7A7A72094826}"/>
               </a:ext>
             </a:extLst>
           </p:cNvPr>
@@ -15286,7 +15286,7 @@
           <p:cNvPr id="4" name="">
             <a:extLst xmlns:a="http://schemas.openxmlformats.org/drawingml/2006/main">
               <a:ext uri="{FF2B5EF4-FFF2-40B4-BE49-F238E27FC236}">
-                <a16:creationId xmlns:a16="http://schemas.microsoft.com/office/drawing/2014/main" id="{A4B135DC-2F1D-4F29-AAEA-A7DC1881F112}"/>
+                <a16:creationId xmlns:a16="http://schemas.microsoft.com/office/drawing/2014/main" id="{10F46F74-9794-443C-B128-0CD35FD16676}"/>
               </a:ext>
             </a:extLst>
           </p:cNvPr>
@@ -15336,7 +15336,7 @@
           <p:cNvPr id="5" name="">
             <a:extLst xmlns:a="http://schemas.openxmlformats.org/drawingml/2006/main">
               <a:ext uri="{FF2B5EF4-FFF2-40B4-BE49-F238E27FC236}">
-                <a16:creationId xmlns:a16="http://schemas.microsoft.com/office/drawing/2014/main" id="{8835E5EF-BD0A-44DF-BB44-162318F299C8}"/>
+                <a16:creationId xmlns:a16="http://schemas.microsoft.com/office/drawing/2014/main" id="{A636C29B-96D4-439B-98CC-FDD2DEDFAA70}"/>
               </a:ext>
             </a:extLst>
           </p:cNvPr>
@@ -15367,7 +15367,7 @@
           <p:cNvPr id="6" name="">
             <a:extLst xmlns:a="http://schemas.openxmlformats.org/drawingml/2006/main">
               <a:ext uri="{FF2B5EF4-FFF2-40B4-BE49-F238E27FC236}">
-                <a16:creationId xmlns:a16="http://schemas.microsoft.com/office/drawing/2014/main" id="{8EF4E27B-3821-492B-A1F5-F228674D37DC}"/>
+                <a16:creationId xmlns:a16="http://schemas.microsoft.com/office/drawing/2014/main" id="{EC383487-0543-4CDA-B903-D5A9AB6B37D4}"/>
               </a:ext>
             </a:extLst>
           </p:cNvPr>
@@ -15417,7 +15417,7 @@
           <p:cNvPr id="7" name="">
             <a:extLst xmlns:a="http://schemas.openxmlformats.org/drawingml/2006/main">
               <a:ext uri="{FF2B5EF4-FFF2-40B4-BE49-F238E27FC236}">
-                <a16:creationId xmlns:a16="http://schemas.microsoft.com/office/drawing/2014/main" id="{E60C46BB-A3D2-40A5-9100-E816D3C60EFB}"/>
+                <a16:creationId xmlns:a16="http://schemas.microsoft.com/office/drawing/2014/main" id="{BFE2977B-9FFC-4DAC-ABEA-E2B49F6AE56C}"/>
               </a:ext>
             </a:extLst>
           </p:cNvPr>
@@ -15467,7 +15467,7 @@
           <p:cNvPr id="8" name="">
             <a:extLst xmlns:a="http://schemas.openxmlformats.org/drawingml/2006/main">
               <a:ext uri="{FF2B5EF4-FFF2-40B4-BE49-F238E27FC236}">
-                <a16:creationId xmlns:a16="http://schemas.microsoft.com/office/drawing/2014/main" id="{DCD20199-7AE7-40A0-81D4-0AF22A19E05D}"/>
+                <a16:creationId xmlns:a16="http://schemas.microsoft.com/office/drawing/2014/main" id="{C6BE3C37-D78D-466C-BE0B-070D671D9EFB}"/>
               </a:ext>
             </a:extLst>
           </p:cNvPr>
@@ -15517,7 +15517,7 @@
           <p:cNvPr id="9" name="">
             <a:extLst xmlns:a="http://schemas.openxmlformats.org/drawingml/2006/main">
               <a:ext uri="{FF2B5EF4-FFF2-40B4-BE49-F238E27FC236}">
-                <a16:creationId xmlns:a16="http://schemas.microsoft.com/office/drawing/2014/main" id="{13987C0E-0554-4AD9-803F-8ABAFCEF7F5E}"/>
+                <a16:creationId xmlns:a16="http://schemas.microsoft.com/office/drawing/2014/main" id="{CC3FC697-FFA0-4D8B-872B-94A808BCBE3E}"/>
               </a:ext>
             </a:extLst>
           </p:cNvPr>
@@ -15567,7 +15567,7 @@
           <p:cNvPr id="10" name="">
             <a:extLst xmlns:a="http://schemas.openxmlformats.org/drawingml/2006/main">
               <a:ext uri="{FF2B5EF4-FFF2-40B4-BE49-F238E27FC236}">
-                <a16:creationId xmlns:a16="http://schemas.microsoft.com/office/drawing/2014/main" id="{A40A73BC-539B-4B9F-869D-6C98400852EB}"/>
+                <a16:creationId xmlns:a16="http://schemas.microsoft.com/office/drawing/2014/main" id="{B7D1DC04-9369-4660-808E-9EA9FCD02822}"/>
               </a:ext>
             </a:extLst>
           </p:cNvPr>
@@ -15617,7 +15617,7 @@
           <p:cNvPr id="11" name="">
             <a:extLst xmlns:a="http://schemas.openxmlformats.org/drawingml/2006/main">
               <a:ext uri="{FF2B5EF4-FFF2-40B4-BE49-F238E27FC236}">
-                <a16:creationId xmlns:a16="http://schemas.microsoft.com/office/drawing/2014/main" id="{E11179EC-6BD7-4F3D-BB27-4D0DA9527227}"/>
+                <a16:creationId xmlns:a16="http://schemas.microsoft.com/office/drawing/2014/main" id="{8579A2BD-5331-4AF7-8FB0-D5D000F739B3}"/>
               </a:ext>
             </a:extLst>
           </p:cNvPr>
@@ -15652,7 +15652,7 @@
           <p:cNvPr id="12" name="">
             <a:extLst xmlns:a="http://schemas.openxmlformats.org/drawingml/2006/main">
               <a:ext uri="{FF2B5EF4-FFF2-40B4-BE49-F238E27FC236}">
-                <a16:creationId xmlns:a16="http://schemas.microsoft.com/office/drawing/2014/main" id="{BB0B7383-4DA9-49D2-ABB9-22D700642842}"/>
+                <a16:creationId xmlns:a16="http://schemas.microsoft.com/office/drawing/2014/main" id="{51FB539D-69CD-43CE-A322-CE8ECCE0821A}"/>
               </a:ext>
             </a:extLst>
           </p:cNvPr>
@@ -15685,7 +15685,7 @@
           <p:cNvPr id="13" name="">
             <a:extLst xmlns:a="http://schemas.openxmlformats.org/drawingml/2006/main">
               <a:ext uri="{FF2B5EF4-FFF2-40B4-BE49-F238E27FC236}">
-                <a16:creationId xmlns:a16="http://schemas.microsoft.com/office/drawing/2014/main" id="{80B2B531-D38F-44F4-A522-E5ABB203C2C8}"/>
+                <a16:creationId xmlns:a16="http://schemas.microsoft.com/office/drawing/2014/main" id="{9FC17673-C810-45CB-B996-BA3619064609}"/>
               </a:ext>
             </a:extLst>
           </p:cNvPr>
@@ -15718,7 +15718,7 @@
           <p:cNvPr id="14" name="">
             <a:extLst xmlns:a="http://schemas.openxmlformats.org/drawingml/2006/main">
               <a:ext uri="{FF2B5EF4-FFF2-40B4-BE49-F238E27FC236}">
-                <a16:creationId xmlns:a16="http://schemas.microsoft.com/office/drawing/2014/main" id="{DA1D4583-854E-4390-B512-36C3D50CCDB1}"/>
+                <a16:creationId xmlns:a16="http://schemas.microsoft.com/office/drawing/2014/main" id="{A3B55AE5-E62C-44EF-A608-643F1F6391FA}"/>
               </a:ext>
             </a:extLst>
           </p:cNvPr>
@@ -15751,7 +15751,7 @@
           <p:cNvPr id="15" name="">
             <a:extLst xmlns:a="http://schemas.openxmlformats.org/drawingml/2006/main">
               <a:ext uri="{FF2B5EF4-FFF2-40B4-BE49-F238E27FC236}">
-                <a16:creationId xmlns:a16="http://schemas.microsoft.com/office/drawing/2014/main" id="{509D6162-A55C-4CD6-894A-F87B27E95505}"/>
+                <a16:creationId xmlns:a16="http://schemas.microsoft.com/office/drawing/2014/main" id="{D464D294-FD23-474B-9829-1FEE63FBD189}"/>
               </a:ext>
             </a:extLst>
           </p:cNvPr>
@@ -15784,7 +15784,7 @@
           <p:cNvPr id="16" name="">
             <a:extLst xmlns:a="http://schemas.openxmlformats.org/drawingml/2006/main">
               <a:ext uri="{FF2B5EF4-FFF2-40B4-BE49-F238E27FC236}">
-                <a16:creationId xmlns:a16="http://schemas.microsoft.com/office/drawing/2014/main" id="{3F854FD1-DB1D-45D6-AF1D-54E1F6FB95D2}"/>
+                <a16:creationId xmlns:a16="http://schemas.microsoft.com/office/drawing/2014/main" id="{D47B87A0-25EA-47A8-AC69-14084369FE55}"/>
               </a:ext>
             </a:extLst>
           </p:cNvPr>
@@ -15817,7 +15817,7 @@
           <p:cNvPr id="17" name="">
             <a:extLst xmlns:a="http://schemas.openxmlformats.org/drawingml/2006/main">
               <a:ext uri="{FF2B5EF4-FFF2-40B4-BE49-F238E27FC236}">
-                <a16:creationId xmlns:a16="http://schemas.microsoft.com/office/drawing/2014/main" id="{F5D2EAF9-9565-4086-855C-D9C73FD54A3C}"/>
+                <a16:creationId xmlns:a16="http://schemas.microsoft.com/office/drawing/2014/main" id="{D0072184-8965-4022-96B5-AD679C8AF689}"/>
               </a:ext>
             </a:extLst>
           </p:cNvPr>
@@ -15850,7 +15850,7 @@
           <p:cNvPr id="18" name="">
             <a:extLst xmlns:a="http://schemas.openxmlformats.org/drawingml/2006/main">
               <a:ext uri="{FF2B5EF4-FFF2-40B4-BE49-F238E27FC236}">
-                <a16:creationId xmlns:a16="http://schemas.microsoft.com/office/drawing/2014/main" id="{6A36019B-27BB-41A3-8A7A-07184037F395}"/>
+                <a16:creationId xmlns:a16="http://schemas.microsoft.com/office/drawing/2014/main" id="{45CEAFFD-164F-4517-ABBA-A8A771FB0DBD}"/>
               </a:ext>
             </a:extLst>
           </p:cNvPr>
@@ -15883,7 +15883,7 @@
           <p:cNvPr id="19" name="">
             <a:extLst xmlns:a="http://schemas.openxmlformats.org/drawingml/2006/main">
               <a:ext uri="{FF2B5EF4-FFF2-40B4-BE49-F238E27FC236}">
-                <a16:creationId xmlns:a16="http://schemas.microsoft.com/office/drawing/2014/main" id="{11C01D03-D9FD-4AB2-BCDB-EAFF5DC6344B}"/>
+                <a16:creationId xmlns:a16="http://schemas.microsoft.com/office/drawing/2014/main" id="{4324F81C-599D-4D12-AC2A-BFE6B9BEC58A}"/>
               </a:ext>
             </a:extLst>
           </p:cNvPr>
@@ -15916,7 +15916,7 @@
           <p:cNvPr id="20" name="">
             <a:extLst xmlns:a="http://schemas.openxmlformats.org/drawingml/2006/main">
               <a:ext uri="{FF2B5EF4-FFF2-40B4-BE49-F238E27FC236}">
-                <a16:creationId xmlns:a16="http://schemas.microsoft.com/office/drawing/2014/main" id="{963A2AE5-53C1-4FF1-8122-94C444D0B09B}"/>
+                <a16:creationId xmlns:a16="http://schemas.microsoft.com/office/drawing/2014/main" id="{54B77467-3480-4675-90F8-B1680466C773}"/>
               </a:ext>
             </a:extLst>
           </p:cNvPr>
@@ -15949,7 +15949,7 @@
           <p:cNvPr id="21" name="">
             <a:extLst xmlns:a="http://schemas.openxmlformats.org/drawingml/2006/main">
               <a:ext uri="{FF2B5EF4-FFF2-40B4-BE49-F238E27FC236}">
-                <a16:creationId xmlns:a16="http://schemas.microsoft.com/office/drawing/2014/main" id="{53C6B4E1-C411-4158-929D-DB0FDF1FAD4D}"/>
+                <a16:creationId xmlns:a16="http://schemas.microsoft.com/office/drawing/2014/main" id="{3353965D-9B9C-476F-A121-F3D44BA048E0}"/>
               </a:ext>
             </a:extLst>
           </p:cNvPr>
@@ -15982,7 +15982,7 @@
           <p:cNvPr id="22" name="">
             <a:extLst xmlns:a="http://schemas.openxmlformats.org/drawingml/2006/main">
               <a:ext uri="{FF2B5EF4-FFF2-40B4-BE49-F238E27FC236}">
-                <a16:creationId xmlns:a16="http://schemas.microsoft.com/office/drawing/2014/main" id="{FC3ED4BD-183E-4020-90FD-DFF8443D4FA2}"/>
+                <a16:creationId xmlns:a16="http://schemas.microsoft.com/office/drawing/2014/main" id="{D38134B6-4899-4729-B439-D8D4E0C3EB9C}"/>
               </a:ext>
             </a:extLst>
           </p:cNvPr>
@@ -16015,7 +16015,7 @@
           <p:cNvPr id="23" name="">
             <a:extLst xmlns:a="http://schemas.openxmlformats.org/drawingml/2006/main">
               <a:ext uri="{FF2B5EF4-FFF2-40B4-BE49-F238E27FC236}">
-                <a16:creationId xmlns:a16="http://schemas.microsoft.com/office/drawing/2014/main" id="{28405171-D7AA-41F0-970E-DD7FEDEFD797}"/>
+                <a16:creationId xmlns:a16="http://schemas.microsoft.com/office/drawing/2014/main" id="{F0FB38EE-FAB7-4893-9C97-B307F8CEDCB4}"/>
               </a:ext>
             </a:extLst>
           </p:cNvPr>
@@ -16048,7 +16048,7 @@
           <p:cNvPr id="24" name="">
             <a:extLst xmlns:a="http://schemas.openxmlformats.org/drawingml/2006/main">
               <a:ext uri="{FF2B5EF4-FFF2-40B4-BE49-F238E27FC236}">
-                <a16:creationId xmlns:a16="http://schemas.microsoft.com/office/drawing/2014/main" id="{D97AE0BF-E3DF-4BC0-8407-515A94D0D1AA}"/>
+                <a16:creationId xmlns:a16="http://schemas.microsoft.com/office/drawing/2014/main" id="{C5FBD24D-A117-44FB-8A8B-02B6626D4516}"/>
               </a:ext>
             </a:extLst>
           </p:cNvPr>
@@ -16081,7 +16081,7 @@
           <p:cNvPr id="25" name="">
             <a:extLst xmlns:a="http://schemas.openxmlformats.org/drawingml/2006/main">
               <a:ext uri="{FF2B5EF4-FFF2-40B4-BE49-F238E27FC236}">
-                <a16:creationId xmlns:a16="http://schemas.microsoft.com/office/drawing/2014/main" id="{2B6C4407-8A3F-4CC7-89DF-3C11D5778EC2}"/>
+                <a16:creationId xmlns:a16="http://schemas.microsoft.com/office/drawing/2014/main" id="{C33C0DE1-C75A-46A0-8A0A-7511DAFF5DBB}"/>
               </a:ext>
             </a:extLst>
           </p:cNvPr>
@@ -16114,7 +16114,7 @@
           <p:cNvPr id="26" name="">
             <a:extLst xmlns:a="http://schemas.openxmlformats.org/drawingml/2006/main">
               <a:ext uri="{FF2B5EF4-FFF2-40B4-BE49-F238E27FC236}">
-                <a16:creationId xmlns:a16="http://schemas.microsoft.com/office/drawing/2014/main" id="{9DD50692-8043-4355-A29B-E572E4D60043}"/>
+                <a16:creationId xmlns:a16="http://schemas.microsoft.com/office/drawing/2014/main" id="{8E9C5DBD-FCC9-4616-80FB-B3227DC15F65}"/>
               </a:ext>
             </a:extLst>
           </p:cNvPr>
@@ -16147,7 +16147,7 @@
           <p:cNvPr id="27" name="">
             <a:extLst xmlns:a="http://schemas.openxmlformats.org/drawingml/2006/main">
               <a:ext uri="{FF2B5EF4-FFF2-40B4-BE49-F238E27FC236}">
-                <a16:creationId xmlns:a16="http://schemas.microsoft.com/office/drawing/2014/main" id="{C6376102-F33D-4803-974B-B0D15549AD9F}"/>
+                <a16:creationId xmlns:a16="http://schemas.microsoft.com/office/drawing/2014/main" id="{8ABC9CC5-C9E9-4DAE-B00C-97C135046A04}"/>
               </a:ext>
             </a:extLst>
           </p:cNvPr>
@@ -16180,7 +16180,7 @@
           <p:cNvPr id="28" name="">
             <a:extLst xmlns:a="http://schemas.openxmlformats.org/drawingml/2006/main">
               <a:ext uri="{FF2B5EF4-FFF2-40B4-BE49-F238E27FC236}">
-                <a16:creationId xmlns:a16="http://schemas.microsoft.com/office/drawing/2014/main" id="{9D49DEF4-C1C0-4FA9-92AA-07081A8312C5}"/>
+                <a16:creationId xmlns:a16="http://schemas.microsoft.com/office/drawing/2014/main" id="{484571C0-8B34-4894-A16F-85FEFAE52497}"/>
               </a:ext>
             </a:extLst>
           </p:cNvPr>
@@ -16230,7 +16230,7 @@
           <p:cNvPr id="29" name="">
             <a:extLst xmlns:a="http://schemas.openxmlformats.org/drawingml/2006/main">
               <a:ext uri="{FF2B5EF4-FFF2-40B4-BE49-F238E27FC236}">
-                <a16:creationId xmlns:a16="http://schemas.microsoft.com/office/drawing/2014/main" id="{421020D0-9C39-4C0F-B50C-2B7F74935772}"/>
+                <a16:creationId xmlns:a16="http://schemas.microsoft.com/office/drawing/2014/main" id="{36901380-79CF-452E-9514-FE7B392044FD}"/>
               </a:ext>
             </a:extLst>
           </p:cNvPr>
@@ -16280,7 +16280,7 @@
           <p:cNvPr id="30" name="">
             <a:extLst xmlns:a="http://schemas.openxmlformats.org/drawingml/2006/main">
               <a:ext uri="{FF2B5EF4-FFF2-40B4-BE49-F238E27FC236}">
-                <a16:creationId xmlns:a16="http://schemas.microsoft.com/office/drawing/2014/main" id="{0D2B7324-FF09-459B-B28A-D9C8F5FEAB5A}"/>
+                <a16:creationId xmlns:a16="http://schemas.microsoft.com/office/drawing/2014/main" id="{A80B8C47-8B0D-4CA1-A24E-522BC17507BE}"/>
               </a:ext>
             </a:extLst>
           </p:cNvPr>
@@ -16328,7 +16328,7 @@
     </p:spTree>
     <p:extLst>
       <p:ext uri="{BB962C8B-B14F-4D97-AF65-F5344CB8AC3E}">
-        <p14:creationId xmlns:p14="http://schemas.microsoft.com/office/powerpoint/2010/main" val="2075798232"/>
+        <p14:creationId xmlns:p14="http://schemas.microsoft.com/office/powerpoint/2010/main" val="616049652"/>
       </p:ext>
     </p:extLst>
   </p:cSld>
@@ -16359,7 +16359,7 @@
           <p:cNvPr id="26" name="">
             <a:extLst xmlns:a="http://schemas.openxmlformats.org/drawingml/2006/main">
               <a:ext uri="{FF2B5EF4-FFF2-40B4-BE49-F238E27FC236}">
-                <a16:creationId xmlns:a16="http://schemas.microsoft.com/office/drawing/2014/main" id="{B8508565-86BE-4F09-BFA8-C7EA454C928A}"/>
+                <a16:creationId xmlns:a16="http://schemas.microsoft.com/office/drawing/2014/main" id="{6B55EABE-C564-4A67-A170-35655DE633BF}"/>
               </a:ext>
             </a:extLst>
           </p:cNvPr>
@@ -16392,7 +16392,7 @@
           <p:cNvPr id="2" name="">
             <a:extLst xmlns:a="http://schemas.openxmlformats.org/drawingml/2006/main">
               <a:ext uri="{FF2B5EF4-FFF2-40B4-BE49-F238E27FC236}">
-                <a16:creationId xmlns:a16="http://schemas.microsoft.com/office/drawing/2014/main" id="{C3699A0C-C1D4-4F83-9AEE-732635679896}"/>
+                <a16:creationId xmlns:a16="http://schemas.microsoft.com/office/drawing/2014/main" id="{A386CB4C-D00F-4B1E-A921-FC91A91A8F6D}"/>
               </a:ext>
             </a:extLst>
           </p:cNvPr>
@@ -16404,7 +16404,7 @@
         <p:spPr>
           <a:xfrm xmlns:a="http://schemas.openxmlformats.org/drawingml/2006/main">
             <a:off x="895350" y="504825"/>
-            <a:ext cx="2000250" cy="285750"/>
+            <a:ext cx="4000500" cy="285750"/>
           </a:xfrm>
           <a:prstGeom xmlns:a="http://schemas.openxmlformats.org/drawingml/2006/main" prst="rect">
             <a:avLst/>
@@ -16432,7 +16432,7 @@
                   <a:srgbClr val="7FA847"/>
                 </a:solidFill>
               </a:rPr>
-              <a:t>TOGETHER</a:t>
+              <a:t>What you’ll build</a:t>
             </a:r>
           </a:p>
         </p:txBody>
@@ -16442,7 +16442,7 @@
           <p:cNvPr id="3" name="">
             <a:extLst xmlns:a="http://schemas.openxmlformats.org/drawingml/2006/main">
               <a:ext uri="{FF2B5EF4-FFF2-40B4-BE49-F238E27FC236}">
-                <a16:creationId xmlns:a16="http://schemas.microsoft.com/office/drawing/2014/main" id="{E03EAF27-73BB-4A61-B17B-E977EE1A6DB1}"/>
+                <a16:creationId xmlns:a16="http://schemas.microsoft.com/office/drawing/2014/main" id="{1B7DF47C-DFAD-4550-9B84-C18DFE4F84C5}"/>
               </a:ext>
             </a:extLst>
           </p:cNvPr>
@@ -16492,7 +16492,7 @@
           <p:cNvPr id="4" name="">
             <a:extLst xmlns:a="http://schemas.openxmlformats.org/drawingml/2006/main">
               <a:ext uri="{FF2B5EF4-FFF2-40B4-BE49-F238E27FC236}">
-                <a16:creationId xmlns:a16="http://schemas.microsoft.com/office/drawing/2014/main" id="{1798B398-8809-4005-BC01-BEDE39D7C8F0}"/>
+                <a16:creationId xmlns:a16="http://schemas.microsoft.com/office/drawing/2014/main" id="{C67AA606-104C-4719-BF07-3DB5D091AE7F}"/>
               </a:ext>
             </a:extLst>
           </p:cNvPr>
@@ -16542,7 +16542,7 @@
           <p:cNvPr id="5" name="">
             <a:extLst xmlns:a="http://schemas.openxmlformats.org/drawingml/2006/main">
               <a:ext uri="{FF2B5EF4-FFF2-40B4-BE49-F238E27FC236}">
-                <a16:creationId xmlns:a16="http://schemas.microsoft.com/office/drawing/2014/main" id="{C265DF08-B5C2-4356-BB69-F582888712BC}"/>
+                <a16:creationId xmlns:a16="http://schemas.microsoft.com/office/drawing/2014/main" id="{940E9E68-4696-4A6F-AEFD-7E72AC21E101}"/>
               </a:ext>
             </a:extLst>
           </p:cNvPr>
@@ -16573,7 +16573,7 @@
           <p:cNvPr id="6" name="">
             <a:extLst xmlns:a="http://schemas.openxmlformats.org/drawingml/2006/main">
               <a:ext uri="{FF2B5EF4-FFF2-40B4-BE49-F238E27FC236}">
-                <a16:creationId xmlns:a16="http://schemas.microsoft.com/office/drawing/2014/main" id="{75B98F85-9081-42FE-AF3F-63C627436450}"/>
+                <a16:creationId xmlns:a16="http://schemas.microsoft.com/office/drawing/2014/main" id="{3AB9E348-15FC-41F1-B849-F9FB1FC0D637}"/>
               </a:ext>
             </a:extLst>
           </p:cNvPr>
@@ -16623,7 +16623,7 @@
           <p:cNvPr id="7" name="">
             <a:extLst xmlns:a="http://schemas.openxmlformats.org/drawingml/2006/main">
               <a:ext uri="{FF2B5EF4-FFF2-40B4-BE49-F238E27FC236}">
-                <a16:creationId xmlns:a16="http://schemas.microsoft.com/office/drawing/2014/main" id="{83C59A37-6702-4B40-8FCD-B927F99DE793}"/>
+                <a16:creationId xmlns:a16="http://schemas.microsoft.com/office/drawing/2014/main" id="{3AEEE8CE-821A-4E7B-9674-99C4278CCBFD}"/>
               </a:ext>
             </a:extLst>
           </p:cNvPr>
@@ -16673,7 +16673,7 @@
           <p:cNvPr id="8" name="">
             <a:extLst xmlns:a="http://schemas.openxmlformats.org/drawingml/2006/main">
               <a:ext uri="{FF2B5EF4-FFF2-40B4-BE49-F238E27FC236}">
-                <a16:creationId xmlns:a16="http://schemas.microsoft.com/office/drawing/2014/main" id="{095550FA-6F5A-484F-90E0-2A8C1EE95D3F}"/>
+                <a16:creationId xmlns:a16="http://schemas.microsoft.com/office/drawing/2014/main" id="{91471C13-62F9-468D-841D-AD33A3A3FB07}"/>
               </a:ext>
             </a:extLst>
           </p:cNvPr>
@@ -16704,7 +16704,7 @@
           <p:cNvPr id="9" name="">
             <a:extLst xmlns:a="http://schemas.openxmlformats.org/drawingml/2006/main">
               <a:ext uri="{FF2B5EF4-FFF2-40B4-BE49-F238E27FC236}">
-                <a16:creationId xmlns:a16="http://schemas.microsoft.com/office/drawing/2014/main" id="{CA097574-F46E-49C7-A0DF-991D06DFC582}"/>
+                <a16:creationId xmlns:a16="http://schemas.microsoft.com/office/drawing/2014/main" id="{00415DF3-BE29-4FE2-9212-C6B43C7E5B28}"/>
               </a:ext>
             </a:extLst>
           </p:cNvPr>
@@ -16737,7 +16737,7 @@
           <p:cNvPr id="10" name="">
             <a:extLst xmlns:a="http://schemas.openxmlformats.org/drawingml/2006/main">
               <a:ext uri="{FF2B5EF4-FFF2-40B4-BE49-F238E27FC236}">
-                <a16:creationId xmlns:a16="http://schemas.microsoft.com/office/drawing/2014/main" id="{9D6AC814-1028-4530-825B-2B3713818627}"/>
+                <a16:creationId xmlns:a16="http://schemas.microsoft.com/office/drawing/2014/main" id="{4C2453D8-F219-4732-B7B5-AD81F8BC2315}"/>
               </a:ext>
             </a:extLst>
           </p:cNvPr>
@@ -16787,7 +16787,7 @@
           <p:cNvPr id="11" name="">
             <a:extLst xmlns:a="http://schemas.openxmlformats.org/drawingml/2006/main">
               <a:ext uri="{FF2B5EF4-FFF2-40B4-BE49-F238E27FC236}">
-                <a16:creationId xmlns:a16="http://schemas.microsoft.com/office/drawing/2014/main" id="{94619ADD-A7C7-4594-A6F2-1412DE59FCAC}"/>
+                <a16:creationId xmlns:a16="http://schemas.microsoft.com/office/drawing/2014/main" id="{735490BD-D123-4292-AFCC-3E0D13AF0D07}"/>
               </a:ext>
             </a:extLst>
           </p:cNvPr>
@@ -16825,7 +16825,7 @@
           <p:cNvPr id="12" name="">
             <a:extLst xmlns:a="http://schemas.openxmlformats.org/drawingml/2006/main">
               <a:ext uri="{FF2B5EF4-FFF2-40B4-BE49-F238E27FC236}">
-                <a16:creationId xmlns:a16="http://schemas.microsoft.com/office/drawing/2014/main" id="{97EF4CBB-216E-4390-94F7-F540556BA278}"/>
+                <a16:creationId xmlns:a16="http://schemas.microsoft.com/office/drawing/2014/main" id="{0F7C932F-9023-44F2-B53C-6427C507E6A5}"/>
               </a:ext>
             </a:extLst>
           </p:cNvPr>
@@ -16858,7 +16858,7 @@
           <p:cNvPr id="13" name="">
             <a:extLst xmlns:a="http://schemas.openxmlformats.org/drawingml/2006/main">
               <a:ext uri="{FF2B5EF4-FFF2-40B4-BE49-F238E27FC236}">
-                <a16:creationId xmlns:a16="http://schemas.microsoft.com/office/drawing/2014/main" id="{5E9A19BC-22C5-49BB-A71B-5572F790427C}"/>
+                <a16:creationId xmlns:a16="http://schemas.microsoft.com/office/drawing/2014/main" id="{70C4BAA6-4F12-45BA-ADC7-7E5061FB8EDA}"/>
               </a:ext>
             </a:extLst>
           </p:cNvPr>
@@ -16908,7 +16908,7 @@
           <p:cNvPr id="14" name="">
             <a:extLst xmlns:a="http://schemas.openxmlformats.org/drawingml/2006/main">
               <a:ext uri="{FF2B5EF4-FFF2-40B4-BE49-F238E27FC236}">
-                <a16:creationId xmlns:a16="http://schemas.microsoft.com/office/drawing/2014/main" id="{7FF887EC-CF6F-429C-B956-E4CA45BD926A}"/>
+                <a16:creationId xmlns:a16="http://schemas.microsoft.com/office/drawing/2014/main" id="{B6BE5E6C-5BDF-4A72-A8F4-4C9DB2415A72}"/>
               </a:ext>
             </a:extLst>
           </p:cNvPr>
@@ -16946,7 +16946,7 @@
           <p:cNvPr id="15" name="">
             <a:extLst xmlns:a="http://schemas.openxmlformats.org/drawingml/2006/main">
               <a:ext uri="{FF2B5EF4-FFF2-40B4-BE49-F238E27FC236}">
-                <a16:creationId xmlns:a16="http://schemas.microsoft.com/office/drawing/2014/main" id="{DD2C1AD0-E3BC-45B8-B423-BD5F24395C65}"/>
+                <a16:creationId xmlns:a16="http://schemas.microsoft.com/office/drawing/2014/main" id="{4F21378E-8554-4DFF-9F38-C4554E31DA0A}"/>
               </a:ext>
             </a:extLst>
           </p:cNvPr>
@@ -16979,7 +16979,7 @@
           <p:cNvPr id="16" name="">
             <a:extLst xmlns:a="http://schemas.openxmlformats.org/drawingml/2006/main">
               <a:ext uri="{FF2B5EF4-FFF2-40B4-BE49-F238E27FC236}">
-                <a16:creationId xmlns:a16="http://schemas.microsoft.com/office/drawing/2014/main" id="{DFB1C0FA-09DC-48E7-B795-D4472E6FCE00}"/>
+                <a16:creationId xmlns:a16="http://schemas.microsoft.com/office/drawing/2014/main" id="{4221A319-DD53-4172-8325-A387F4DBD81D}"/>
               </a:ext>
             </a:extLst>
           </p:cNvPr>
@@ -17029,7 +17029,7 @@
           <p:cNvPr id="17" name="">
             <a:extLst xmlns:a="http://schemas.openxmlformats.org/drawingml/2006/main">
               <a:ext uri="{FF2B5EF4-FFF2-40B4-BE49-F238E27FC236}">
-                <a16:creationId xmlns:a16="http://schemas.microsoft.com/office/drawing/2014/main" id="{47A95879-D0D4-4B17-801B-0DF949C7033A}"/>
+                <a16:creationId xmlns:a16="http://schemas.microsoft.com/office/drawing/2014/main" id="{542B1C8E-8CD1-4385-8FBD-1E7817B447D7}"/>
               </a:ext>
             </a:extLst>
           </p:cNvPr>
@@ -17067,7 +17067,7 @@
           <p:cNvPr id="18" name="">
             <a:extLst xmlns:a="http://schemas.openxmlformats.org/drawingml/2006/main">
               <a:ext uri="{FF2B5EF4-FFF2-40B4-BE49-F238E27FC236}">
-                <a16:creationId xmlns:a16="http://schemas.microsoft.com/office/drawing/2014/main" id="{D54FAA4D-570D-40E2-B788-83401B0EFD4F}"/>
+                <a16:creationId xmlns:a16="http://schemas.microsoft.com/office/drawing/2014/main" id="{C59E88CE-B45B-4CE9-AFB3-2A02F46FC08B}"/>
               </a:ext>
             </a:extLst>
           </p:cNvPr>
@@ -17100,7 +17100,7 @@
           <p:cNvPr id="19" name="">
             <a:extLst xmlns:a="http://schemas.openxmlformats.org/drawingml/2006/main">
               <a:ext uri="{FF2B5EF4-FFF2-40B4-BE49-F238E27FC236}">
-                <a16:creationId xmlns:a16="http://schemas.microsoft.com/office/drawing/2014/main" id="{3E1164C9-6DF0-4624-8FB9-F59ED37C95AF}"/>
+                <a16:creationId xmlns:a16="http://schemas.microsoft.com/office/drawing/2014/main" id="{3F50DB0E-068D-4C20-AEE4-4FDD55878F25}"/>
               </a:ext>
             </a:extLst>
           </p:cNvPr>
@@ -17150,7 +17150,7 @@
           <p:cNvPr id="20" name="">
             <a:extLst xmlns:a="http://schemas.openxmlformats.org/drawingml/2006/main">
               <a:ext uri="{FF2B5EF4-FFF2-40B4-BE49-F238E27FC236}">
-                <a16:creationId xmlns:a16="http://schemas.microsoft.com/office/drawing/2014/main" id="{3C07D8A8-FB94-4A0B-918F-50CBFFDDEBB0}"/>
+                <a16:creationId xmlns:a16="http://schemas.microsoft.com/office/drawing/2014/main" id="{9AFD27CD-B2EA-45B3-9A10-2F02EDF5B9B3}"/>
               </a:ext>
             </a:extLst>
           </p:cNvPr>
@@ -17188,7 +17188,7 @@
           <p:cNvPr id="21" name="">
             <a:extLst xmlns:a="http://schemas.openxmlformats.org/drawingml/2006/main">
               <a:ext uri="{FF2B5EF4-FFF2-40B4-BE49-F238E27FC236}">
-                <a16:creationId xmlns:a16="http://schemas.microsoft.com/office/drawing/2014/main" id="{02792540-8BA4-4E8B-832A-27D9446392BF}"/>
+                <a16:creationId xmlns:a16="http://schemas.microsoft.com/office/drawing/2014/main" id="{E9E8AD32-9155-4069-B324-730310B0085E}"/>
               </a:ext>
             </a:extLst>
           </p:cNvPr>
@@ -17238,7 +17238,7 @@
           <p:cNvPr id="22" name="">
             <a:extLst xmlns:a="http://schemas.openxmlformats.org/drawingml/2006/main">
               <a:ext uri="{FF2B5EF4-FFF2-40B4-BE49-F238E27FC236}">
-                <a16:creationId xmlns:a16="http://schemas.microsoft.com/office/drawing/2014/main" id="{27724999-AC4A-42A3-8B08-7724E99A64BB}"/>
+                <a16:creationId xmlns:a16="http://schemas.microsoft.com/office/drawing/2014/main" id="{8B72F585-326F-42CF-9D85-B999B8972AF5}"/>
               </a:ext>
             </a:extLst>
           </p:cNvPr>
@@ -17288,7 +17288,7 @@
           <p:cNvPr id="23" name="">
             <a:extLst xmlns:a="http://schemas.openxmlformats.org/drawingml/2006/main">
               <a:ext uri="{FF2B5EF4-FFF2-40B4-BE49-F238E27FC236}">
-                <a16:creationId xmlns:a16="http://schemas.microsoft.com/office/drawing/2014/main" id="{BED6EBB3-E64D-4255-96D3-AFFFA00B791C}"/>
+                <a16:creationId xmlns:a16="http://schemas.microsoft.com/office/drawing/2014/main" id="{952CC8A8-5B93-4B54-AF42-9D5DCF68EC0D}"/>
               </a:ext>
             </a:extLst>
           </p:cNvPr>
@@ -17338,7 +17338,7 @@
           <p:cNvPr id="24" name="">
             <a:extLst xmlns:a="http://schemas.openxmlformats.org/drawingml/2006/main">
               <a:ext uri="{FF2B5EF4-FFF2-40B4-BE49-F238E27FC236}">
-                <a16:creationId xmlns:a16="http://schemas.microsoft.com/office/drawing/2014/main" id="{19DC32CC-49A6-45B0-9A1E-DD9B37B2DB78}"/>
+                <a16:creationId xmlns:a16="http://schemas.microsoft.com/office/drawing/2014/main" id="{C8EEB682-2519-4FB5-8B77-5519EBF9F137}"/>
               </a:ext>
             </a:extLst>
           </p:cNvPr>
@@ -17388,7 +17388,7 @@
           <p:cNvPr id="25" name="">
             <a:extLst xmlns:a="http://schemas.openxmlformats.org/drawingml/2006/main">
               <a:ext uri="{FF2B5EF4-FFF2-40B4-BE49-F238E27FC236}">
-                <a16:creationId xmlns:a16="http://schemas.microsoft.com/office/drawing/2014/main" id="{EFF31D8D-F9AF-4F07-84CE-97AEC70B12AA}"/>
+                <a16:creationId xmlns:a16="http://schemas.microsoft.com/office/drawing/2014/main" id="{3ACE31F8-FF5A-4387-9130-C446DD721C44}"/>
               </a:ext>
             </a:extLst>
           </p:cNvPr>
@@ -17436,7 +17436,7 @@
     </p:spTree>
     <p:extLst>
       <p:ext uri="{BB962C8B-B14F-4D97-AF65-F5344CB8AC3E}">
-        <p14:creationId xmlns:p14="http://schemas.microsoft.com/office/powerpoint/2010/main" val="904470389"/>
+        <p14:creationId xmlns:p14="http://schemas.microsoft.com/office/powerpoint/2010/main" val="1317279520"/>
       </p:ext>
     </p:extLst>
   </p:cSld>
@@ -17467,7 +17467,7 @@
           <p:cNvPr id="22" name="">
             <a:extLst xmlns:a="http://schemas.openxmlformats.org/drawingml/2006/main">
               <a:ext uri="{FF2B5EF4-FFF2-40B4-BE49-F238E27FC236}">
-                <a16:creationId xmlns:a16="http://schemas.microsoft.com/office/drawing/2014/main" id="{5AE2ECE9-8ADC-4E6A-9E8D-253548B274BC}"/>
+                <a16:creationId xmlns:a16="http://schemas.microsoft.com/office/drawing/2014/main" id="{35544A03-E8E5-4057-8756-8949742F353E}"/>
               </a:ext>
             </a:extLst>
           </p:cNvPr>
@@ -17500,7 +17500,7 @@
           <p:cNvPr id="2" name="">
             <a:extLst xmlns:a="http://schemas.openxmlformats.org/drawingml/2006/main">
               <a:ext uri="{FF2B5EF4-FFF2-40B4-BE49-F238E27FC236}">
-                <a16:creationId xmlns:a16="http://schemas.microsoft.com/office/drawing/2014/main" id="{78CE36E1-0A76-404A-A989-D75B5B1489E5}"/>
+                <a16:creationId xmlns:a16="http://schemas.microsoft.com/office/drawing/2014/main" id="{A6FB429B-D04B-4903-BFF7-D4640A1E9D03}"/>
               </a:ext>
             </a:extLst>
           </p:cNvPr>
@@ -17512,7 +17512,7 @@
         <p:spPr>
           <a:xfrm xmlns:a="http://schemas.openxmlformats.org/drawingml/2006/main">
             <a:off x="895350" y="504825"/>
-            <a:ext cx="2000250" cy="285750"/>
+            <a:ext cx="4000500" cy="285750"/>
           </a:xfrm>
           <a:prstGeom xmlns:a="http://schemas.openxmlformats.org/drawingml/2006/main" prst="rect">
             <a:avLst/>
@@ -17540,7 +17540,7 @@
                   <a:srgbClr val="48B985"/>
                 </a:solidFill>
               </a:rPr>
-              <a:t>YOU DO</a:t>
+              <a:t>Set up your workspace</a:t>
             </a:r>
           </a:p>
         </p:txBody>
@@ -17550,7 +17550,7 @@
           <p:cNvPr id="3" name="">
             <a:extLst xmlns:a="http://schemas.openxmlformats.org/drawingml/2006/main">
               <a:ext uri="{FF2B5EF4-FFF2-40B4-BE49-F238E27FC236}">
-                <a16:creationId xmlns:a16="http://schemas.microsoft.com/office/drawing/2014/main" id="{938E4CA6-55AD-438F-9231-6AA7502315F7}"/>
+                <a16:creationId xmlns:a16="http://schemas.microsoft.com/office/drawing/2014/main" id="{85AFE062-A467-47D1-88CC-CB3BBF702CB5}"/>
               </a:ext>
             </a:extLst>
           </p:cNvPr>
@@ -17600,7 +17600,7 @@
           <p:cNvPr id="4" name="">
             <a:extLst xmlns:a="http://schemas.openxmlformats.org/drawingml/2006/main">
               <a:ext uri="{FF2B5EF4-FFF2-40B4-BE49-F238E27FC236}">
-                <a16:creationId xmlns:a16="http://schemas.microsoft.com/office/drawing/2014/main" id="{877C6404-A7B9-4567-83A3-51464B4ADEC2}"/>
+                <a16:creationId xmlns:a16="http://schemas.microsoft.com/office/drawing/2014/main" id="{EDCFEC78-AF70-4091-9D2C-C09F8492C42E}"/>
               </a:ext>
             </a:extLst>
           </p:cNvPr>
@@ -17650,7 +17650,7 @@
           <p:cNvPr id="5" name="">
             <a:extLst xmlns:a="http://schemas.openxmlformats.org/drawingml/2006/main">
               <a:ext uri="{FF2B5EF4-FFF2-40B4-BE49-F238E27FC236}">
-                <a16:creationId xmlns:a16="http://schemas.microsoft.com/office/drawing/2014/main" id="{631780A9-F4EC-4A30-9D81-A72AC927EA17}"/>
+                <a16:creationId xmlns:a16="http://schemas.microsoft.com/office/drawing/2014/main" id="{A0DF7181-353B-4CC3-8FB6-040166DA3BD4}"/>
               </a:ext>
             </a:extLst>
           </p:cNvPr>
@@ -17681,7 +17681,7 @@
           <p:cNvPr id="6" name="">
             <a:extLst xmlns:a="http://schemas.openxmlformats.org/drawingml/2006/main">
               <a:ext uri="{FF2B5EF4-FFF2-40B4-BE49-F238E27FC236}">
-                <a16:creationId xmlns:a16="http://schemas.microsoft.com/office/drawing/2014/main" id="{3DD5A579-E055-4225-B906-4FB52FB589D3}"/>
+                <a16:creationId xmlns:a16="http://schemas.microsoft.com/office/drawing/2014/main" id="{19B6A7AD-6927-4D66-8C9B-2FF94949D759}"/>
               </a:ext>
             </a:extLst>
           </p:cNvPr>
@@ -17731,7 +17731,7 @@
           <p:cNvPr id="7" name="">
             <a:extLst xmlns:a="http://schemas.openxmlformats.org/drawingml/2006/main">
               <a:ext uri="{FF2B5EF4-FFF2-40B4-BE49-F238E27FC236}">
-                <a16:creationId xmlns:a16="http://schemas.microsoft.com/office/drawing/2014/main" id="{5020BCA3-A013-4259-A5D7-78F811C4A343}"/>
+                <a16:creationId xmlns:a16="http://schemas.microsoft.com/office/drawing/2014/main" id="{C9A91B42-2BDF-4808-8B06-E2AEB086C86B}"/>
               </a:ext>
             </a:extLst>
           </p:cNvPr>
@@ -17781,7 +17781,7 @@
           <p:cNvPr id="8" name="">
             <a:extLst xmlns:a="http://schemas.openxmlformats.org/drawingml/2006/main">
               <a:ext uri="{FF2B5EF4-FFF2-40B4-BE49-F238E27FC236}">
-                <a16:creationId xmlns:a16="http://schemas.microsoft.com/office/drawing/2014/main" id="{04BEA541-EE83-41A6-87B5-A8374517FFC9}"/>
+                <a16:creationId xmlns:a16="http://schemas.microsoft.com/office/drawing/2014/main" id="{B348004E-7BCF-4F13-BCFF-0CE7F8EA6BD5}"/>
               </a:ext>
             </a:extLst>
           </p:cNvPr>
@@ -17816,7 +17816,7 @@
           <p:cNvPr id="9" name="">
             <a:extLst xmlns:a="http://schemas.openxmlformats.org/drawingml/2006/main">
               <a:ext uri="{FF2B5EF4-FFF2-40B4-BE49-F238E27FC236}">
-                <a16:creationId xmlns:a16="http://schemas.microsoft.com/office/drawing/2014/main" id="{6AF9B1A1-D9CF-4D52-8F28-CCEC26754090}"/>
+                <a16:creationId xmlns:a16="http://schemas.microsoft.com/office/drawing/2014/main" id="{5F9258DC-4BFB-420E-B86C-F7188499DE18}"/>
               </a:ext>
             </a:extLst>
           </p:cNvPr>
@@ -17849,7 +17849,7 @@
           <p:cNvPr id="10" name="">
             <a:extLst xmlns:a="http://schemas.openxmlformats.org/drawingml/2006/main">
               <a:ext uri="{FF2B5EF4-FFF2-40B4-BE49-F238E27FC236}">
-                <a16:creationId xmlns:a16="http://schemas.microsoft.com/office/drawing/2014/main" id="{70B63271-AC9B-41A9-B225-F5AE99A47BF2}"/>
+                <a16:creationId xmlns:a16="http://schemas.microsoft.com/office/drawing/2014/main" id="{9B079670-4B9D-4CF9-A96F-455966B154A2}"/>
               </a:ext>
             </a:extLst>
           </p:cNvPr>
@@ -17880,7 +17880,7 @@
           <p:cNvPr id="11" name="">
             <a:extLst xmlns:a="http://schemas.openxmlformats.org/drawingml/2006/main">
               <a:ext uri="{FF2B5EF4-FFF2-40B4-BE49-F238E27FC236}">
-                <a16:creationId xmlns:a16="http://schemas.microsoft.com/office/drawing/2014/main" id="{2A8A1517-4EF8-4B6F-A0F5-A4B395638CD4}"/>
+                <a16:creationId xmlns:a16="http://schemas.microsoft.com/office/drawing/2014/main" id="{D57622EC-85C2-4F30-A2CA-1BEEA80C1791}"/>
               </a:ext>
             </a:extLst>
           </p:cNvPr>
@@ -17911,7 +17911,7 @@
           <p:cNvPr id="12" name="">
             <a:extLst xmlns:a="http://schemas.openxmlformats.org/drawingml/2006/main">
               <a:ext uri="{FF2B5EF4-FFF2-40B4-BE49-F238E27FC236}">
-                <a16:creationId xmlns:a16="http://schemas.microsoft.com/office/drawing/2014/main" id="{3892809F-CE5C-41A5-97EA-4A8E74197BE3}"/>
+                <a16:creationId xmlns:a16="http://schemas.microsoft.com/office/drawing/2014/main" id="{C92FC8A8-BA67-4FC8-BA99-15CEA175AF85}"/>
               </a:ext>
             </a:extLst>
           </p:cNvPr>
@@ -17942,7 +17942,7 @@
           <p:cNvPr id="13" name="">
             <a:extLst xmlns:a="http://schemas.openxmlformats.org/drawingml/2006/main">
               <a:ext uri="{FF2B5EF4-FFF2-40B4-BE49-F238E27FC236}">
-                <a16:creationId xmlns:a16="http://schemas.microsoft.com/office/drawing/2014/main" id="{675C82C1-D8D1-4AB8-B019-90E14D4D27F5}"/>
+                <a16:creationId xmlns:a16="http://schemas.microsoft.com/office/drawing/2014/main" id="{A71F5998-4B70-4C7F-825A-793A76BB8498}"/>
               </a:ext>
             </a:extLst>
           </p:cNvPr>
@@ -18053,7 +18053,7 @@
           <p:cNvPr id="14" name="">
             <a:extLst xmlns:a="http://schemas.openxmlformats.org/drawingml/2006/main">
               <a:ext uri="{FF2B5EF4-FFF2-40B4-BE49-F238E27FC236}">
-                <a16:creationId xmlns:a16="http://schemas.microsoft.com/office/drawing/2014/main" id="{CF931786-F1B8-4341-B998-0A7E41D312F4}"/>
+                <a16:creationId xmlns:a16="http://schemas.microsoft.com/office/drawing/2014/main" id="{4654FA81-5D5A-4892-BA75-7ED60020D2D5}"/>
               </a:ext>
             </a:extLst>
           </p:cNvPr>
@@ -18103,7 +18103,7 @@
           <p:cNvPr id="15" name="">
             <a:extLst xmlns:a="http://schemas.openxmlformats.org/drawingml/2006/main">
               <a:ext uri="{FF2B5EF4-FFF2-40B4-BE49-F238E27FC236}">
-                <a16:creationId xmlns:a16="http://schemas.microsoft.com/office/drawing/2014/main" id="{D0B35D64-9DE3-4083-A1F8-832CDB380BC8}"/>
+                <a16:creationId xmlns:a16="http://schemas.microsoft.com/office/drawing/2014/main" id="{07823F33-1905-4B44-9161-DD7033C18472}"/>
               </a:ext>
             </a:extLst>
           </p:cNvPr>
@@ -18153,7 +18153,7 @@
           <p:cNvPr id="16" name="">
             <a:extLst xmlns:a="http://schemas.openxmlformats.org/drawingml/2006/main">
               <a:ext uri="{FF2B5EF4-FFF2-40B4-BE49-F238E27FC236}">
-                <a16:creationId xmlns:a16="http://schemas.microsoft.com/office/drawing/2014/main" id="{A7329349-C0F1-46EA-AF8E-177CD163C7B3}"/>
+                <a16:creationId xmlns:a16="http://schemas.microsoft.com/office/drawing/2014/main" id="{F1C59E4E-5728-4C01-8292-59FA1EB79FDE}"/>
               </a:ext>
             </a:extLst>
           </p:cNvPr>
@@ -18203,7 +18203,7 @@
           <p:cNvPr id="17" name="">
             <a:extLst xmlns:a="http://schemas.openxmlformats.org/drawingml/2006/main">
               <a:ext uri="{FF2B5EF4-FFF2-40B4-BE49-F238E27FC236}">
-                <a16:creationId xmlns:a16="http://schemas.microsoft.com/office/drawing/2014/main" id="{22BD6618-B69D-4E15-9459-55E8781311BB}"/>
+                <a16:creationId xmlns:a16="http://schemas.microsoft.com/office/drawing/2014/main" id="{E0727A96-3662-478E-AC1F-BAB6BA7DA1B5}"/>
               </a:ext>
             </a:extLst>
           </p:cNvPr>
@@ -18253,7 +18253,7 @@
           <p:cNvPr id="18" name="">
             <a:extLst xmlns:a="http://schemas.openxmlformats.org/drawingml/2006/main">
               <a:ext uri="{FF2B5EF4-FFF2-40B4-BE49-F238E27FC236}">
-                <a16:creationId xmlns:a16="http://schemas.microsoft.com/office/drawing/2014/main" id="{9D7847EE-9E73-4718-A4B7-C3B1B113C790}"/>
+                <a16:creationId xmlns:a16="http://schemas.microsoft.com/office/drawing/2014/main" id="{6DEDB6A2-133A-46FC-BC5A-DAB85D3C2DFB}"/>
               </a:ext>
             </a:extLst>
           </p:cNvPr>
@@ -18303,7 +18303,7 @@
           <p:cNvPr id="19" name="">
             <a:extLst xmlns:a="http://schemas.openxmlformats.org/drawingml/2006/main">
               <a:ext uri="{FF2B5EF4-FFF2-40B4-BE49-F238E27FC236}">
-                <a16:creationId xmlns:a16="http://schemas.microsoft.com/office/drawing/2014/main" id="{F1D615BF-0F45-453F-B996-9C0AE1E713AD}"/>
+                <a16:creationId xmlns:a16="http://schemas.microsoft.com/office/drawing/2014/main" id="{2DC5FF09-6139-46EE-AD0D-E666561F8266}"/>
               </a:ext>
             </a:extLst>
           </p:cNvPr>
@@ -18353,7 +18353,7 @@
           <p:cNvPr id="20" name="">
             <a:extLst xmlns:a="http://schemas.openxmlformats.org/drawingml/2006/main">
               <a:ext uri="{FF2B5EF4-FFF2-40B4-BE49-F238E27FC236}">
-                <a16:creationId xmlns:a16="http://schemas.microsoft.com/office/drawing/2014/main" id="{2A880F0C-A38E-4C18-B1B8-EFCD284A81E0}"/>
+                <a16:creationId xmlns:a16="http://schemas.microsoft.com/office/drawing/2014/main" id="{83A22BA3-7960-4F51-8E0C-D3BE1B7ABFF1}"/>
               </a:ext>
             </a:extLst>
           </p:cNvPr>
@@ -18388,7 +18388,7 @@
           <p:cNvPr id="21" name="">
             <a:extLst xmlns:a="http://schemas.openxmlformats.org/drawingml/2006/main">
               <a:ext uri="{FF2B5EF4-FFF2-40B4-BE49-F238E27FC236}">
-                <a16:creationId xmlns:a16="http://schemas.microsoft.com/office/drawing/2014/main" id="{8B97F64E-9C3C-4F68-A9DA-9C882267DA24}"/>
+                <a16:creationId xmlns:a16="http://schemas.microsoft.com/office/drawing/2014/main" id="{B4D6463F-5AB9-4897-8168-6CDBBB07D3E7}"/>
               </a:ext>
             </a:extLst>
           </p:cNvPr>
@@ -18436,7 +18436,7 @@
     </p:spTree>
     <p:extLst>
       <p:ext uri="{BB962C8B-B14F-4D97-AF65-F5344CB8AC3E}">
-        <p14:creationId xmlns:p14="http://schemas.microsoft.com/office/powerpoint/2010/main" val="1239072270"/>
+        <p14:creationId xmlns:p14="http://schemas.microsoft.com/office/powerpoint/2010/main" val="551141013"/>
       </p:ext>
     </p:extLst>
   </p:cSld>
@@ -18467,7 +18467,7 @@
           <p:cNvPr id="34" name="">
             <a:extLst xmlns:a="http://schemas.openxmlformats.org/drawingml/2006/main">
               <a:ext uri="{FF2B5EF4-FFF2-40B4-BE49-F238E27FC236}">
-                <a16:creationId xmlns:a16="http://schemas.microsoft.com/office/drawing/2014/main" id="{6D2DC259-F6DC-40A3-964B-4D53A65D56F3}"/>
+                <a16:creationId xmlns:a16="http://schemas.microsoft.com/office/drawing/2014/main" id="{D4CA7D11-7EA1-4C5E-926F-CF99153C5FE4}"/>
               </a:ext>
             </a:extLst>
           </p:cNvPr>
@@ -18500,7 +18500,7 @@
           <p:cNvPr id="2" name="">
             <a:extLst xmlns:a="http://schemas.openxmlformats.org/drawingml/2006/main">
               <a:ext uri="{FF2B5EF4-FFF2-40B4-BE49-F238E27FC236}">
-                <a16:creationId xmlns:a16="http://schemas.microsoft.com/office/drawing/2014/main" id="{FAC6E863-BD20-42E1-AB9C-0AB363D89C6E}"/>
+                <a16:creationId xmlns:a16="http://schemas.microsoft.com/office/drawing/2014/main" id="{5B65BCCA-8C10-4B0F-977C-1F6BC439A90E}"/>
               </a:ext>
             </a:extLst>
           </p:cNvPr>
@@ -18512,7 +18512,7 @@
         <p:spPr>
           <a:xfrm xmlns:a="http://schemas.openxmlformats.org/drawingml/2006/main">
             <a:off x="895350" y="504825"/>
-            <a:ext cx="2000250" cy="285750"/>
+            <a:ext cx="4000500" cy="285750"/>
           </a:xfrm>
           <a:prstGeom xmlns:a="http://schemas.openxmlformats.org/drawingml/2006/main" prst="rect">
             <a:avLst/>
@@ -18540,7 +18540,7 @@
                   <a:srgbClr val="7FA847"/>
                 </a:solidFill>
               </a:rPr>
-              <a:t>TOGETHER</a:t>
+              <a:t>How the workshop flows</a:t>
             </a:r>
           </a:p>
         </p:txBody>
@@ -18550,7 +18550,7 @@
           <p:cNvPr id="3" name="">
             <a:extLst xmlns:a="http://schemas.openxmlformats.org/drawingml/2006/main">
               <a:ext uri="{FF2B5EF4-FFF2-40B4-BE49-F238E27FC236}">
-                <a16:creationId xmlns:a16="http://schemas.microsoft.com/office/drawing/2014/main" id="{422EDE22-C2DE-4E8F-9717-B389CCCAA725}"/>
+                <a16:creationId xmlns:a16="http://schemas.microsoft.com/office/drawing/2014/main" id="{9CDAA6DF-5596-49E7-ACA4-22583246B45D}"/>
               </a:ext>
             </a:extLst>
           </p:cNvPr>
@@ -18600,7 +18600,7 @@
           <p:cNvPr id="4" name="">
             <a:extLst xmlns:a="http://schemas.openxmlformats.org/drawingml/2006/main">
               <a:ext uri="{FF2B5EF4-FFF2-40B4-BE49-F238E27FC236}">
-                <a16:creationId xmlns:a16="http://schemas.microsoft.com/office/drawing/2014/main" id="{2A7D0787-2386-41F3-B4ED-93728DF7E67B}"/>
+                <a16:creationId xmlns:a16="http://schemas.microsoft.com/office/drawing/2014/main" id="{64A63941-A01C-4D80-BB09-0B8DC6878303}"/>
               </a:ext>
             </a:extLst>
           </p:cNvPr>
@@ -18650,7 +18650,7 @@
           <p:cNvPr id="5" name="">
             <a:extLst xmlns:a="http://schemas.openxmlformats.org/drawingml/2006/main">
               <a:ext uri="{FF2B5EF4-FFF2-40B4-BE49-F238E27FC236}">
-                <a16:creationId xmlns:a16="http://schemas.microsoft.com/office/drawing/2014/main" id="{FCAB8D25-D605-4B2B-A171-A2950AF52210}"/>
+                <a16:creationId xmlns:a16="http://schemas.microsoft.com/office/drawing/2014/main" id="{7A96B14C-5069-4162-B65C-67B46607B4C3}"/>
               </a:ext>
             </a:extLst>
           </p:cNvPr>
@@ -18681,7 +18681,7 @@
           <p:cNvPr id="6" name="">
             <a:extLst xmlns:a="http://schemas.openxmlformats.org/drawingml/2006/main">
               <a:ext uri="{FF2B5EF4-FFF2-40B4-BE49-F238E27FC236}">
-                <a16:creationId xmlns:a16="http://schemas.microsoft.com/office/drawing/2014/main" id="{35E5039F-EB22-41C9-A513-CD25447165A5}"/>
+                <a16:creationId xmlns:a16="http://schemas.microsoft.com/office/drawing/2014/main" id="{BA9150F7-17F1-4384-98DE-D764C2CE8A87}"/>
               </a:ext>
             </a:extLst>
           </p:cNvPr>
@@ -18731,7 +18731,7 @@
           <p:cNvPr id="7" name="">
             <a:extLst xmlns:a="http://schemas.openxmlformats.org/drawingml/2006/main">
               <a:ext uri="{FF2B5EF4-FFF2-40B4-BE49-F238E27FC236}">
-                <a16:creationId xmlns:a16="http://schemas.microsoft.com/office/drawing/2014/main" id="{030A14DA-901B-4B25-85F5-36B525B64CCD}"/>
+                <a16:creationId xmlns:a16="http://schemas.microsoft.com/office/drawing/2014/main" id="{23FC3002-C1B1-4024-9CCE-0C4F52BF1C91}"/>
               </a:ext>
             </a:extLst>
           </p:cNvPr>
@@ -18781,7 +18781,7 @@
           <p:cNvPr id="8" name="">
             <a:extLst xmlns:a="http://schemas.openxmlformats.org/drawingml/2006/main">
               <a:ext uri="{FF2B5EF4-FFF2-40B4-BE49-F238E27FC236}">
-                <a16:creationId xmlns:a16="http://schemas.microsoft.com/office/drawing/2014/main" id="{66CB0716-226B-49A5-A096-F84E84C4231B}"/>
+                <a16:creationId xmlns:a16="http://schemas.microsoft.com/office/drawing/2014/main" id="{5E70D1B5-FFFA-4CE9-B1E9-10E175537C45}"/>
               </a:ext>
             </a:extLst>
           </p:cNvPr>
@@ -18812,7 +18812,7 @@
           <p:cNvPr id="9" name="">
             <a:extLst xmlns:a="http://schemas.openxmlformats.org/drawingml/2006/main">
               <a:ext uri="{FF2B5EF4-FFF2-40B4-BE49-F238E27FC236}">
-                <a16:creationId xmlns:a16="http://schemas.microsoft.com/office/drawing/2014/main" id="{2DCDED1C-A14E-4B17-8220-E3EAE7E82C9F}"/>
+                <a16:creationId xmlns:a16="http://schemas.microsoft.com/office/drawing/2014/main" id="{BACDC6A2-ECE5-46A0-B409-79FE33A47D56}"/>
               </a:ext>
             </a:extLst>
           </p:cNvPr>
@@ -18843,7 +18843,7 @@
           <p:cNvPr id="10" name="">
             <a:extLst xmlns:a="http://schemas.openxmlformats.org/drawingml/2006/main">
               <a:ext uri="{FF2B5EF4-FFF2-40B4-BE49-F238E27FC236}">
-                <a16:creationId xmlns:a16="http://schemas.microsoft.com/office/drawing/2014/main" id="{9533A753-E0E2-4612-95FC-E883BD819703}"/>
+                <a16:creationId xmlns:a16="http://schemas.microsoft.com/office/drawing/2014/main" id="{058E49EA-D78C-461E-8430-9A8AF1993517}"/>
               </a:ext>
             </a:extLst>
           </p:cNvPr>
@@ -18893,7 +18893,7 @@
           <p:cNvPr id="11" name="">
             <a:extLst xmlns:a="http://schemas.openxmlformats.org/drawingml/2006/main">
               <a:ext uri="{FF2B5EF4-FFF2-40B4-BE49-F238E27FC236}">
-                <a16:creationId xmlns:a16="http://schemas.microsoft.com/office/drawing/2014/main" id="{F9BBCACB-E05A-4E2D-AE9A-DACCD2F72C5E}"/>
+                <a16:creationId xmlns:a16="http://schemas.microsoft.com/office/drawing/2014/main" id="{C7FCE5B1-3743-4D7E-B5DC-BB1F64A11505}"/>
               </a:ext>
             </a:extLst>
           </p:cNvPr>
@@ -18943,7 +18943,7 @@
           <p:cNvPr id="12" name="">
             <a:extLst xmlns:a="http://schemas.openxmlformats.org/drawingml/2006/main">
               <a:ext uri="{FF2B5EF4-FFF2-40B4-BE49-F238E27FC236}">
-                <a16:creationId xmlns:a16="http://schemas.microsoft.com/office/drawing/2014/main" id="{EFAA1C2D-5075-45CD-BF70-385EDCA0E26B}"/>
+                <a16:creationId xmlns:a16="http://schemas.microsoft.com/office/drawing/2014/main" id="{3C1ED2EB-6111-4A66-9DF5-84D2572BF090}"/>
               </a:ext>
             </a:extLst>
           </p:cNvPr>
@@ -18993,7 +18993,7 @@
           <p:cNvPr id="13" name="">
             <a:extLst xmlns:a="http://schemas.openxmlformats.org/drawingml/2006/main">
               <a:ext uri="{FF2B5EF4-FFF2-40B4-BE49-F238E27FC236}">
-                <a16:creationId xmlns:a16="http://schemas.microsoft.com/office/drawing/2014/main" id="{1CF2DAB4-C671-4FFA-A4E1-EBC93F192BDA}"/>
+                <a16:creationId xmlns:a16="http://schemas.microsoft.com/office/drawing/2014/main" id="{23143456-C8A2-4BAB-BCD4-637E6E3AF2BD}"/>
               </a:ext>
             </a:extLst>
           </p:cNvPr>
@@ -19024,7 +19024,7 @@
           <p:cNvPr id="14" name="">
             <a:extLst xmlns:a="http://schemas.openxmlformats.org/drawingml/2006/main">
               <a:ext uri="{FF2B5EF4-FFF2-40B4-BE49-F238E27FC236}">
-                <a16:creationId xmlns:a16="http://schemas.microsoft.com/office/drawing/2014/main" id="{B59F1527-BA24-4E05-BE02-C0E0F127BC0A}"/>
+                <a16:creationId xmlns:a16="http://schemas.microsoft.com/office/drawing/2014/main" id="{2C9E63CD-5FAE-4D46-B764-A99A4307035C}"/>
               </a:ext>
             </a:extLst>
           </p:cNvPr>
@@ -19074,7 +19074,7 @@
           <p:cNvPr id="15" name="">
             <a:extLst xmlns:a="http://schemas.openxmlformats.org/drawingml/2006/main">
               <a:ext uri="{FF2B5EF4-FFF2-40B4-BE49-F238E27FC236}">
-                <a16:creationId xmlns:a16="http://schemas.microsoft.com/office/drawing/2014/main" id="{FF227837-69FC-4087-A73E-40BC4236D6D1}"/>
+                <a16:creationId xmlns:a16="http://schemas.microsoft.com/office/drawing/2014/main" id="{21F3B634-E144-4A9C-8E6F-C85D9E79FA5B}"/>
               </a:ext>
             </a:extLst>
           </p:cNvPr>
@@ -19124,7 +19124,7 @@
           <p:cNvPr id="16" name="">
             <a:extLst xmlns:a="http://schemas.openxmlformats.org/drawingml/2006/main">
               <a:ext uri="{FF2B5EF4-FFF2-40B4-BE49-F238E27FC236}">
-                <a16:creationId xmlns:a16="http://schemas.microsoft.com/office/drawing/2014/main" id="{3714AB3D-FA49-4331-891B-F508CE74787A}"/>
+                <a16:creationId xmlns:a16="http://schemas.microsoft.com/office/drawing/2014/main" id="{0DB55F5F-AE9B-4D3E-85F8-4386D7DAA65D}"/>
               </a:ext>
             </a:extLst>
           </p:cNvPr>
@@ -19174,7 +19174,7 @@
           <p:cNvPr id="17" name="">
             <a:extLst xmlns:a="http://schemas.openxmlformats.org/drawingml/2006/main">
               <a:ext uri="{FF2B5EF4-FFF2-40B4-BE49-F238E27FC236}">
-                <a16:creationId xmlns:a16="http://schemas.microsoft.com/office/drawing/2014/main" id="{6128194A-51BE-4305-87C1-4661B965FD0D}"/>
+                <a16:creationId xmlns:a16="http://schemas.microsoft.com/office/drawing/2014/main" id="{E7A10B5C-21DE-46D0-8243-65790AE3B8A1}"/>
               </a:ext>
             </a:extLst>
           </p:cNvPr>
@@ -19205,7 +19205,7 @@
           <p:cNvPr id="18" name="">
             <a:extLst xmlns:a="http://schemas.openxmlformats.org/drawingml/2006/main">
               <a:ext uri="{FF2B5EF4-FFF2-40B4-BE49-F238E27FC236}">
-                <a16:creationId xmlns:a16="http://schemas.microsoft.com/office/drawing/2014/main" id="{24D5DCBD-549C-4529-B6A0-133414CB8829}"/>
+                <a16:creationId xmlns:a16="http://schemas.microsoft.com/office/drawing/2014/main" id="{1A0C7D61-48F6-4CFB-A2B3-137B40F77FA6}"/>
               </a:ext>
             </a:extLst>
           </p:cNvPr>
@@ -19255,7 +19255,7 @@
           <p:cNvPr id="19" name="">
             <a:extLst xmlns:a="http://schemas.openxmlformats.org/drawingml/2006/main">
               <a:ext uri="{FF2B5EF4-FFF2-40B4-BE49-F238E27FC236}">
-                <a16:creationId xmlns:a16="http://schemas.microsoft.com/office/drawing/2014/main" id="{DD7D0406-0538-4BCC-94EE-98822F3A9119}"/>
+                <a16:creationId xmlns:a16="http://schemas.microsoft.com/office/drawing/2014/main" id="{5EE3B691-1DFA-44D5-8ED7-67153C1ABFCB}"/>
               </a:ext>
             </a:extLst>
           </p:cNvPr>
@@ -19305,7 +19305,7 @@
           <p:cNvPr id="20" name="">
             <a:extLst xmlns:a="http://schemas.openxmlformats.org/drawingml/2006/main">
               <a:ext uri="{FF2B5EF4-FFF2-40B4-BE49-F238E27FC236}">
-                <a16:creationId xmlns:a16="http://schemas.microsoft.com/office/drawing/2014/main" id="{1106A6D5-893A-4C58-8BAB-F468095C1164}"/>
+                <a16:creationId xmlns:a16="http://schemas.microsoft.com/office/drawing/2014/main" id="{47E38318-9423-47D6-B13E-CE8D8503CC23}"/>
               </a:ext>
             </a:extLst>
           </p:cNvPr>
@@ -19355,7 +19355,7 @@
           <p:cNvPr id="21" name="">
             <a:extLst xmlns:a="http://schemas.openxmlformats.org/drawingml/2006/main">
               <a:ext uri="{FF2B5EF4-FFF2-40B4-BE49-F238E27FC236}">
-                <a16:creationId xmlns:a16="http://schemas.microsoft.com/office/drawing/2014/main" id="{FFA75E4D-CBB6-4EAB-A8DB-B82A5CBA0516}"/>
+                <a16:creationId xmlns:a16="http://schemas.microsoft.com/office/drawing/2014/main" id="{1F04FF32-18F9-4C0C-A092-719619C67D5D}"/>
               </a:ext>
             </a:extLst>
           </p:cNvPr>
@@ -19386,7 +19386,7 @@
           <p:cNvPr id="22" name="">
             <a:extLst xmlns:a="http://schemas.openxmlformats.org/drawingml/2006/main">
               <a:ext uri="{FF2B5EF4-FFF2-40B4-BE49-F238E27FC236}">
-                <a16:creationId xmlns:a16="http://schemas.microsoft.com/office/drawing/2014/main" id="{FB865BAA-0C1E-4AA9-8720-23C2621F53EF}"/>
+                <a16:creationId xmlns:a16="http://schemas.microsoft.com/office/drawing/2014/main" id="{8D1373D5-680B-4C51-8177-0075EAF04AD7}"/>
               </a:ext>
             </a:extLst>
           </p:cNvPr>
@@ -19436,7 +19436,7 @@
           <p:cNvPr id="23" name="">
             <a:extLst xmlns:a="http://schemas.openxmlformats.org/drawingml/2006/main">
               <a:ext uri="{FF2B5EF4-FFF2-40B4-BE49-F238E27FC236}">
-                <a16:creationId xmlns:a16="http://schemas.microsoft.com/office/drawing/2014/main" id="{109F005A-2BFC-4B7F-B335-0466341ACE6D}"/>
+                <a16:creationId xmlns:a16="http://schemas.microsoft.com/office/drawing/2014/main" id="{CF8AEE22-6180-4782-AA92-69BF9DEBD433}"/>
               </a:ext>
             </a:extLst>
           </p:cNvPr>
@@ -19486,7 +19486,7 @@
           <p:cNvPr id="24" name="">
             <a:extLst xmlns:a="http://schemas.openxmlformats.org/drawingml/2006/main">
               <a:ext uri="{FF2B5EF4-FFF2-40B4-BE49-F238E27FC236}">
-                <a16:creationId xmlns:a16="http://schemas.microsoft.com/office/drawing/2014/main" id="{423E66B3-1AB2-40DC-BF56-A97DB943FCA7}"/>
+                <a16:creationId xmlns:a16="http://schemas.microsoft.com/office/drawing/2014/main" id="{90C76D21-830B-46BD-BF1D-353C43D68A2E}"/>
               </a:ext>
             </a:extLst>
           </p:cNvPr>
@@ -19536,7 +19536,7 @@
           <p:cNvPr id="25" name="">
             <a:extLst xmlns:a="http://schemas.openxmlformats.org/drawingml/2006/main">
               <a:ext uri="{FF2B5EF4-FFF2-40B4-BE49-F238E27FC236}">
-                <a16:creationId xmlns:a16="http://schemas.microsoft.com/office/drawing/2014/main" id="{EED57972-852A-49BA-9941-4EF31BC6A84D}"/>
+                <a16:creationId xmlns:a16="http://schemas.microsoft.com/office/drawing/2014/main" id="{FFF9D97E-13A7-4436-B70D-2250CF7BF490}"/>
               </a:ext>
             </a:extLst>
           </p:cNvPr>
@@ -19567,7 +19567,7 @@
           <p:cNvPr id="26" name="">
             <a:extLst xmlns:a="http://schemas.openxmlformats.org/drawingml/2006/main">
               <a:ext uri="{FF2B5EF4-FFF2-40B4-BE49-F238E27FC236}">
-                <a16:creationId xmlns:a16="http://schemas.microsoft.com/office/drawing/2014/main" id="{35E16527-C951-40A3-A1FE-4D6AB5391C4F}"/>
+                <a16:creationId xmlns:a16="http://schemas.microsoft.com/office/drawing/2014/main" id="{94A307DC-8764-41CC-9378-8ED552856B76}"/>
               </a:ext>
             </a:extLst>
           </p:cNvPr>
@@ -19617,7 +19617,7 @@
           <p:cNvPr id="27" name="">
             <a:extLst xmlns:a="http://schemas.openxmlformats.org/drawingml/2006/main">
               <a:ext uri="{FF2B5EF4-FFF2-40B4-BE49-F238E27FC236}">
-                <a16:creationId xmlns:a16="http://schemas.microsoft.com/office/drawing/2014/main" id="{E5670BC2-6634-42F0-B700-1A65BAD83E78}"/>
+                <a16:creationId xmlns:a16="http://schemas.microsoft.com/office/drawing/2014/main" id="{A91A9DA3-D594-4CBF-9731-383046D250D1}"/>
               </a:ext>
             </a:extLst>
           </p:cNvPr>
@@ -19667,7 +19667,7 @@
           <p:cNvPr id="28" name="">
             <a:extLst xmlns:a="http://schemas.openxmlformats.org/drawingml/2006/main">
               <a:ext uri="{FF2B5EF4-FFF2-40B4-BE49-F238E27FC236}">
-                <a16:creationId xmlns:a16="http://schemas.microsoft.com/office/drawing/2014/main" id="{D339A1DF-2190-4F6F-A1DF-145D492CEAE7}"/>
+                <a16:creationId xmlns:a16="http://schemas.microsoft.com/office/drawing/2014/main" id="{E1B5ABB6-13CD-4AC0-AF5D-AA8F9D7C3CD3}"/>
               </a:ext>
             </a:extLst>
           </p:cNvPr>
@@ -19717,7 +19717,7 @@
           <p:cNvPr id="29" name="">
             <a:extLst xmlns:a="http://schemas.openxmlformats.org/drawingml/2006/main">
               <a:ext uri="{FF2B5EF4-FFF2-40B4-BE49-F238E27FC236}">
-                <a16:creationId xmlns:a16="http://schemas.microsoft.com/office/drawing/2014/main" id="{8F874969-363E-422D-872E-CE9E46B0222D}"/>
+                <a16:creationId xmlns:a16="http://schemas.microsoft.com/office/drawing/2014/main" id="{65BF1BAD-818F-49BB-A5BC-FD2D1517E835}"/>
               </a:ext>
             </a:extLst>
           </p:cNvPr>
@@ -19748,7 +19748,7 @@
           <p:cNvPr id="30" name="">
             <a:extLst xmlns:a="http://schemas.openxmlformats.org/drawingml/2006/main">
               <a:ext uri="{FF2B5EF4-FFF2-40B4-BE49-F238E27FC236}">
-                <a16:creationId xmlns:a16="http://schemas.microsoft.com/office/drawing/2014/main" id="{01B0B8DE-E0FC-47A0-A58F-7A6DBAC0538D}"/>
+                <a16:creationId xmlns:a16="http://schemas.microsoft.com/office/drawing/2014/main" id="{3F6B48C8-1271-47CF-90EB-517EE920969C}"/>
               </a:ext>
             </a:extLst>
           </p:cNvPr>
@@ -19798,7 +19798,7 @@
           <p:cNvPr id="31" name="">
             <a:extLst xmlns:a="http://schemas.openxmlformats.org/drawingml/2006/main">
               <a:ext uri="{FF2B5EF4-FFF2-40B4-BE49-F238E27FC236}">
-                <a16:creationId xmlns:a16="http://schemas.microsoft.com/office/drawing/2014/main" id="{21A50CCB-43BA-4905-9187-4ECE9BD07D64}"/>
+                <a16:creationId xmlns:a16="http://schemas.microsoft.com/office/drawing/2014/main" id="{3E8C612C-770C-467D-8AAA-BACBBB03FC32}"/>
               </a:ext>
             </a:extLst>
           </p:cNvPr>
@@ -19848,7 +19848,7 @@
           <p:cNvPr id="32" name="">
             <a:extLst xmlns:a="http://schemas.openxmlformats.org/drawingml/2006/main">
               <a:ext uri="{FF2B5EF4-FFF2-40B4-BE49-F238E27FC236}">
-                <a16:creationId xmlns:a16="http://schemas.microsoft.com/office/drawing/2014/main" id="{63A01380-0176-45AD-90A1-4C0DB34659A5}"/>
+                <a16:creationId xmlns:a16="http://schemas.microsoft.com/office/drawing/2014/main" id="{0BAFF7B9-1EDC-4BE9-B602-6FEE33A9243A}"/>
               </a:ext>
             </a:extLst>
           </p:cNvPr>
@@ -19898,7 +19898,7 @@
           <p:cNvPr id="33" name="">
             <a:extLst xmlns:a="http://schemas.openxmlformats.org/drawingml/2006/main">
               <a:ext uri="{FF2B5EF4-FFF2-40B4-BE49-F238E27FC236}">
-                <a16:creationId xmlns:a16="http://schemas.microsoft.com/office/drawing/2014/main" id="{AF05471B-B40D-4BE8-9493-79035CEC0060}"/>
+                <a16:creationId xmlns:a16="http://schemas.microsoft.com/office/drawing/2014/main" id="{F1971BA3-47E2-49A9-BB07-AC1B476A77F2}"/>
               </a:ext>
             </a:extLst>
           </p:cNvPr>
@@ -19946,7 +19946,7 @@
     </p:spTree>
     <p:extLst>
       <p:ext uri="{BB962C8B-B14F-4D97-AF65-F5344CB8AC3E}">
-        <p14:creationId xmlns:p14="http://schemas.microsoft.com/office/powerpoint/2010/main" val="1303510114"/>
+        <p14:creationId xmlns:p14="http://schemas.microsoft.com/office/powerpoint/2010/main" val="2010121522"/>
       </p:ext>
     </p:extLst>
   </p:cSld>
@@ -19977,7 +19977,7 @@
           <p:cNvPr id="23" name="">
             <a:extLst xmlns:a="http://schemas.openxmlformats.org/drawingml/2006/main">
               <a:ext uri="{FF2B5EF4-FFF2-40B4-BE49-F238E27FC236}">
-                <a16:creationId xmlns:a16="http://schemas.microsoft.com/office/drawing/2014/main" id="{56AA01E4-0725-433B-9BC5-5E4A7A51BA02}"/>
+                <a16:creationId xmlns:a16="http://schemas.microsoft.com/office/drawing/2014/main" id="{9F30CBBD-E69A-42DF-AA5A-315717791E64}"/>
               </a:ext>
             </a:extLst>
           </p:cNvPr>
@@ -20010,7 +20010,7 @@
           <p:cNvPr id="2" name="">
             <a:extLst xmlns:a="http://schemas.openxmlformats.org/drawingml/2006/main">
               <a:ext uri="{FF2B5EF4-FFF2-40B4-BE49-F238E27FC236}">
-                <a16:creationId xmlns:a16="http://schemas.microsoft.com/office/drawing/2014/main" id="{FA2C5A51-CBF2-470F-87B5-32A1F1DAD7E7}"/>
+                <a16:creationId xmlns:a16="http://schemas.microsoft.com/office/drawing/2014/main" id="{7CED0DAC-A1B5-41BF-B7FC-49D7CB8D77F1}"/>
               </a:ext>
             </a:extLst>
           </p:cNvPr>
@@ -20022,7 +20022,7 @@
         <p:spPr>
           <a:xfrm xmlns:a="http://schemas.openxmlformats.org/drawingml/2006/main">
             <a:off x="895350" y="504825"/>
-            <a:ext cx="2000250" cy="285750"/>
+            <a:ext cx="4000500" cy="285750"/>
           </a:xfrm>
           <a:prstGeom xmlns:a="http://schemas.openxmlformats.org/drawingml/2006/main" prst="rect">
             <a:avLst/>
@@ -20050,7 +20050,7 @@
                   <a:srgbClr val="7FA847"/>
                 </a:solidFill>
               </a:rPr>
-              <a:t>I SHOW → YOU DO</a:t>
+              <a:t>Build along</a:t>
             </a:r>
           </a:p>
         </p:txBody>
@@ -20060,7 +20060,7 @@
           <p:cNvPr id="3" name="">
             <a:extLst xmlns:a="http://schemas.openxmlformats.org/drawingml/2006/main">
               <a:ext uri="{FF2B5EF4-FFF2-40B4-BE49-F238E27FC236}">
-                <a16:creationId xmlns:a16="http://schemas.microsoft.com/office/drawing/2014/main" id="{3DBDB3D0-8833-4483-94CB-372A2B1BD52B}"/>
+                <a16:creationId xmlns:a16="http://schemas.microsoft.com/office/drawing/2014/main" id="{88F61157-34B8-4793-8960-E5E4B42F225C}"/>
               </a:ext>
             </a:extLst>
           </p:cNvPr>
@@ -20110,7 +20110,7 @@
           <p:cNvPr id="4" name="">
             <a:extLst xmlns:a="http://schemas.openxmlformats.org/drawingml/2006/main">
               <a:ext uri="{FF2B5EF4-FFF2-40B4-BE49-F238E27FC236}">
-                <a16:creationId xmlns:a16="http://schemas.microsoft.com/office/drawing/2014/main" id="{DDCE99A1-86C2-4AEF-9BC6-7C37C13DD15A}"/>
+                <a16:creationId xmlns:a16="http://schemas.microsoft.com/office/drawing/2014/main" id="{DD5130CA-419F-4E6B-AC19-17F2F441E317}"/>
               </a:ext>
             </a:extLst>
           </p:cNvPr>
@@ -20160,7 +20160,7 @@
           <p:cNvPr id="5" name="">
             <a:extLst xmlns:a="http://schemas.openxmlformats.org/drawingml/2006/main">
               <a:ext uri="{FF2B5EF4-FFF2-40B4-BE49-F238E27FC236}">
-                <a16:creationId xmlns:a16="http://schemas.microsoft.com/office/drawing/2014/main" id="{C9BFE8A0-6925-4259-A5C3-17A414A34591}"/>
+                <a16:creationId xmlns:a16="http://schemas.microsoft.com/office/drawing/2014/main" id="{D524AEE2-AEFD-4444-A3F0-3BEE20CBB753}"/>
               </a:ext>
             </a:extLst>
           </p:cNvPr>
@@ -20191,7 +20191,7 @@
           <p:cNvPr id="6" name="">
             <a:extLst xmlns:a="http://schemas.openxmlformats.org/drawingml/2006/main">
               <a:ext uri="{FF2B5EF4-FFF2-40B4-BE49-F238E27FC236}">
-                <a16:creationId xmlns:a16="http://schemas.microsoft.com/office/drawing/2014/main" id="{2C309605-7A34-426D-9411-E9632C9A2D93}"/>
+                <a16:creationId xmlns:a16="http://schemas.microsoft.com/office/drawing/2014/main" id="{464985FF-9F5B-4453-A382-031774D33080}"/>
               </a:ext>
             </a:extLst>
           </p:cNvPr>
@@ -20241,7 +20241,7 @@
           <p:cNvPr id="7" name="">
             <a:extLst xmlns:a="http://schemas.openxmlformats.org/drawingml/2006/main">
               <a:ext uri="{FF2B5EF4-FFF2-40B4-BE49-F238E27FC236}">
-                <a16:creationId xmlns:a16="http://schemas.microsoft.com/office/drawing/2014/main" id="{87BA98C2-6377-4976-AE3B-048F63E1EEFC}"/>
+                <a16:creationId xmlns:a16="http://schemas.microsoft.com/office/drawing/2014/main" id="{D21D70A2-15D1-4666-AD3E-F49D1ED46399}"/>
               </a:ext>
             </a:extLst>
           </p:cNvPr>
@@ -20291,7 +20291,7 @@
           <p:cNvPr id="8" name="">
             <a:extLst xmlns:a="http://schemas.openxmlformats.org/drawingml/2006/main">
               <a:ext uri="{FF2B5EF4-FFF2-40B4-BE49-F238E27FC236}">
-                <a16:creationId xmlns:a16="http://schemas.microsoft.com/office/drawing/2014/main" id="{368E0C39-81E5-44A5-B5E9-E973F90E219A}"/>
+                <a16:creationId xmlns:a16="http://schemas.microsoft.com/office/drawing/2014/main" id="{6228BDC0-315D-4685-8E3E-059F7576DDE6}"/>
               </a:ext>
             </a:extLst>
           </p:cNvPr>
@@ -20326,7 +20326,7 @@
           <p:cNvPr id="9" name="">
             <a:extLst xmlns:a="http://schemas.openxmlformats.org/drawingml/2006/main">
               <a:ext uri="{FF2B5EF4-FFF2-40B4-BE49-F238E27FC236}">
-                <a16:creationId xmlns:a16="http://schemas.microsoft.com/office/drawing/2014/main" id="{EA3701C5-3827-4B4F-9399-90E7B527349F}"/>
+                <a16:creationId xmlns:a16="http://schemas.microsoft.com/office/drawing/2014/main" id="{FAD03E21-42FB-40A3-AF75-CDC4734D9E12}"/>
               </a:ext>
             </a:extLst>
           </p:cNvPr>
@@ -20359,7 +20359,7 @@
           <p:cNvPr id="10" name="">
             <a:extLst xmlns:a="http://schemas.openxmlformats.org/drawingml/2006/main">
               <a:ext uri="{FF2B5EF4-FFF2-40B4-BE49-F238E27FC236}">
-                <a16:creationId xmlns:a16="http://schemas.microsoft.com/office/drawing/2014/main" id="{00D98A5A-3797-4EE5-A14B-08C0913EE5BD}"/>
+                <a16:creationId xmlns:a16="http://schemas.microsoft.com/office/drawing/2014/main" id="{58AD25DD-CF1C-4EAB-A746-F83D6A955105}"/>
               </a:ext>
             </a:extLst>
           </p:cNvPr>
@@ -20390,7 +20390,7 @@
           <p:cNvPr id="11" name="">
             <a:extLst xmlns:a="http://schemas.openxmlformats.org/drawingml/2006/main">
               <a:ext uri="{FF2B5EF4-FFF2-40B4-BE49-F238E27FC236}">
-                <a16:creationId xmlns:a16="http://schemas.microsoft.com/office/drawing/2014/main" id="{8D1877B6-6500-4C0F-9110-252F466A5F59}"/>
+                <a16:creationId xmlns:a16="http://schemas.microsoft.com/office/drawing/2014/main" id="{4AFB9054-E74A-4315-B082-41D1D8193F42}"/>
               </a:ext>
             </a:extLst>
           </p:cNvPr>
@@ -20421,7 +20421,7 @@
           <p:cNvPr id="12" name="">
             <a:extLst xmlns:a="http://schemas.openxmlformats.org/drawingml/2006/main">
               <a:ext uri="{FF2B5EF4-FFF2-40B4-BE49-F238E27FC236}">
-                <a16:creationId xmlns:a16="http://schemas.microsoft.com/office/drawing/2014/main" id="{BEC11DE5-64F7-417C-820E-060A32196000}"/>
+                <a16:creationId xmlns:a16="http://schemas.microsoft.com/office/drawing/2014/main" id="{E49606A6-D6CC-495A-8C68-6AB9336E41F4}"/>
               </a:ext>
             </a:extLst>
           </p:cNvPr>
@@ -20452,7 +20452,7 @@
           <p:cNvPr id="13" name="">
             <a:extLst xmlns:a="http://schemas.openxmlformats.org/drawingml/2006/main">
               <a:ext uri="{FF2B5EF4-FFF2-40B4-BE49-F238E27FC236}">
-                <a16:creationId xmlns:a16="http://schemas.microsoft.com/office/drawing/2014/main" id="{0ACCA431-13AE-4914-880D-6D1DDF8A3F2F}"/>
+                <a16:creationId xmlns:a16="http://schemas.microsoft.com/office/drawing/2014/main" id="{3E1276AB-EA3C-412B-9E48-CA43CFD705EC}"/>
               </a:ext>
             </a:extLst>
           </p:cNvPr>
@@ -20609,7 +20609,7 @@
           <p:cNvPr id="14" name="">
             <a:extLst xmlns:a="http://schemas.openxmlformats.org/drawingml/2006/main">
               <a:ext uri="{FF2B5EF4-FFF2-40B4-BE49-F238E27FC236}">
-                <a16:creationId xmlns:a16="http://schemas.microsoft.com/office/drawing/2014/main" id="{D900AFF6-43D5-4C84-845C-2BE2A966AB95}"/>
+                <a16:creationId xmlns:a16="http://schemas.microsoft.com/office/drawing/2014/main" id="{6A160DEF-D9BA-4E8B-9C34-4EB81F5EE263}"/>
               </a:ext>
             </a:extLst>
           </p:cNvPr>
@@ -20659,7 +20659,7 @@
           <p:cNvPr id="15" name="">
             <a:extLst xmlns:a="http://schemas.openxmlformats.org/drawingml/2006/main">
               <a:ext uri="{FF2B5EF4-FFF2-40B4-BE49-F238E27FC236}">
-                <a16:creationId xmlns:a16="http://schemas.microsoft.com/office/drawing/2014/main" id="{988110CB-807F-4173-9E9F-B057D9FF3DF4}"/>
+                <a16:creationId xmlns:a16="http://schemas.microsoft.com/office/drawing/2014/main" id="{F815E13D-628D-4E71-8D75-1E53E1949350}"/>
               </a:ext>
             </a:extLst>
           </p:cNvPr>
@@ -20709,7 +20709,7 @@
           <p:cNvPr id="16" name="">
             <a:extLst xmlns:a="http://schemas.openxmlformats.org/drawingml/2006/main">
               <a:ext uri="{FF2B5EF4-FFF2-40B4-BE49-F238E27FC236}">
-                <a16:creationId xmlns:a16="http://schemas.microsoft.com/office/drawing/2014/main" id="{5062714C-F81F-4724-8B90-4624C472E010}"/>
+                <a16:creationId xmlns:a16="http://schemas.microsoft.com/office/drawing/2014/main" id="{293DEC1E-9205-41F9-9C4D-EB5978BE2A2A}"/>
               </a:ext>
             </a:extLst>
           </p:cNvPr>
@@ -20759,7 +20759,7 @@
           <p:cNvPr id="17" name="">
             <a:extLst xmlns:a="http://schemas.openxmlformats.org/drawingml/2006/main">
               <a:ext uri="{FF2B5EF4-FFF2-40B4-BE49-F238E27FC236}">
-                <a16:creationId xmlns:a16="http://schemas.microsoft.com/office/drawing/2014/main" id="{792BD9CB-E2B0-4EFD-838E-91F5AEE86C5D}"/>
+                <a16:creationId xmlns:a16="http://schemas.microsoft.com/office/drawing/2014/main" id="{8632B624-F226-4F35-A513-33DE460C32C2}"/>
               </a:ext>
             </a:extLst>
           </p:cNvPr>
@@ -20809,7 +20809,7 @@
           <p:cNvPr id="18" name="">
             <a:extLst xmlns:a="http://schemas.openxmlformats.org/drawingml/2006/main">
               <a:ext uri="{FF2B5EF4-FFF2-40B4-BE49-F238E27FC236}">
-                <a16:creationId xmlns:a16="http://schemas.microsoft.com/office/drawing/2014/main" id="{C24863DF-CED4-441D-BFFC-764E4A76238A}"/>
+                <a16:creationId xmlns:a16="http://schemas.microsoft.com/office/drawing/2014/main" id="{43D97D09-5874-469A-A079-314E092F2D8C}"/>
               </a:ext>
             </a:extLst>
           </p:cNvPr>
@@ -20859,7 +20859,7 @@
           <p:cNvPr id="19" name="">
             <a:extLst xmlns:a="http://schemas.openxmlformats.org/drawingml/2006/main">
               <a:ext uri="{FF2B5EF4-FFF2-40B4-BE49-F238E27FC236}">
-                <a16:creationId xmlns:a16="http://schemas.microsoft.com/office/drawing/2014/main" id="{1D4EEFC4-E6F8-4A81-82AC-65C235B3CF7F}"/>
+                <a16:creationId xmlns:a16="http://schemas.microsoft.com/office/drawing/2014/main" id="{4719952C-2C4E-49BE-BE11-D0295CAB1D4E}"/>
               </a:ext>
             </a:extLst>
           </p:cNvPr>
@@ -20909,7 +20909,7 @@
           <p:cNvPr id="20" name="">
             <a:extLst xmlns:a="http://schemas.openxmlformats.org/drawingml/2006/main">
               <a:ext uri="{FF2B5EF4-FFF2-40B4-BE49-F238E27FC236}">
-                <a16:creationId xmlns:a16="http://schemas.microsoft.com/office/drawing/2014/main" id="{E47ADDCE-8F2E-4098-8A1D-82A1A65A9E22}"/>
+                <a16:creationId xmlns:a16="http://schemas.microsoft.com/office/drawing/2014/main" id="{D4BB9C4E-D86B-408E-AFEB-CD37EC29A468}"/>
               </a:ext>
             </a:extLst>
           </p:cNvPr>
@@ -20959,7 +20959,7 @@
           <p:cNvPr id="21" name="">
             <a:extLst xmlns:a="http://schemas.openxmlformats.org/drawingml/2006/main">
               <a:ext uri="{FF2B5EF4-FFF2-40B4-BE49-F238E27FC236}">
-                <a16:creationId xmlns:a16="http://schemas.microsoft.com/office/drawing/2014/main" id="{4ADE472E-54CB-447F-990A-B5F5ABD3248D}"/>
+                <a16:creationId xmlns:a16="http://schemas.microsoft.com/office/drawing/2014/main" id="{C14EE8B4-249B-4B76-97DB-785EB437BC05}"/>
               </a:ext>
             </a:extLst>
           </p:cNvPr>
@@ -20994,7 +20994,7 @@
           <p:cNvPr id="22" name="">
             <a:extLst xmlns:a="http://schemas.openxmlformats.org/drawingml/2006/main">
               <a:ext uri="{FF2B5EF4-FFF2-40B4-BE49-F238E27FC236}">
-                <a16:creationId xmlns:a16="http://schemas.microsoft.com/office/drawing/2014/main" id="{E06A938B-D7B5-4FE9-A892-97DA5DD73FC1}"/>
+                <a16:creationId xmlns:a16="http://schemas.microsoft.com/office/drawing/2014/main" id="{738E6557-BF9D-42C8-B26B-012201225113}"/>
               </a:ext>
             </a:extLst>
           </p:cNvPr>
@@ -21042,7 +21042,7 @@
     </p:spTree>
     <p:extLst>
       <p:ext uri="{BB962C8B-B14F-4D97-AF65-F5344CB8AC3E}">
-        <p14:creationId xmlns:p14="http://schemas.microsoft.com/office/powerpoint/2010/main" val="1993392868"/>
+        <p14:creationId xmlns:p14="http://schemas.microsoft.com/office/powerpoint/2010/main" val="283988879"/>
       </p:ext>
     </p:extLst>
   </p:cSld>
@@ -21073,7 +21073,7 @@
           <p:cNvPr id="19" name="">
             <a:extLst xmlns:a="http://schemas.openxmlformats.org/drawingml/2006/main">
               <a:ext uri="{FF2B5EF4-FFF2-40B4-BE49-F238E27FC236}">
-                <a16:creationId xmlns:a16="http://schemas.microsoft.com/office/drawing/2014/main" id="{69312EA9-117F-48F9-B694-C081F19E366D}"/>
+                <a16:creationId xmlns:a16="http://schemas.microsoft.com/office/drawing/2014/main" id="{5F27BD47-2CF7-43D3-ADC0-9DB8FDFC05B3}"/>
               </a:ext>
             </a:extLst>
           </p:cNvPr>
@@ -21106,7 +21106,7 @@
           <p:cNvPr id="2" name="">
             <a:extLst xmlns:a="http://schemas.openxmlformats.org/drawingml/2006/main">
               <a:ext uri="{FF2B5EF4-FFF2-40B4-BE49-F238E27FC236}">
-                <a16:creationId xmlns:a16="http://schemas.microsoft.com/office/drawing/2014/main" id="{A5B74DAF-5B33-4ADA-ADEB-02FE86732849}"/>
+                <a16:creationId xmlns:a16="http://schemas.microsoft.com/office/drawing/2014/main" id="{1315C8C5-1E7F-4F4D-83E8-696FD1193883}"/>
               </a:ext>
             </a:extLst>
           </p:cNvPr>
@@ -21118,7 +21118,7 @@
         <p:spPr>
           <a:xfrm xmlns:a="http://schemas.openxmlformats.org/drawingml/2006/main">
             <a:off x="895350" y="504825"/>
-            <a:ext cx="2000250" cy="285750"/>
+            <a:ext cx="4000500" cy="285750"/>
           </a:xfrm>
           <a:prstGeom xmlns:a="http://schemas.openxmlformats.org/drawingml/2006/main" prst="rect">
             <a:avLst/>
@@ -21146,7 +21146,7 @@
                   <a:srgbClr val="48B985"/>
                 </a:solidFill>
               </a:rPr>
-              <a:t>YOU DO</a:t>
+              <a:t>Try it yourself</a:t>
             </a:r>
           </a:p>
         </p:txBody>
@@ -21156,7 +21156,7 @@
           <p:cNvPr id="3" name="">
             <a:extLst xmlns:a="http://schemas.openxmlformats.org/drawingml/2006/main">
               <a:ext uri="{FF2B5EF4-FFF2-40B4-BE49-F238E27FC236}">
-                <a16:creationId xmlns:a16="http://schemas.microsoft.com/office/drawing/2014/main" id="{F1347768-A790-464C-A73A-CA8F87C38510}"/>
+                <a16:creationId xmlns:a16="http://schemas.microsoft.com/office/drawing/2014/main" id="{B7CB9BC7-A479-43E7-BED2-5AB898576863}"/>
               </a:ext>
             </a:extLst>
           </p:cNvPr>
@@ -21206,7 +21206,7 @@
           <p:cNvPr id="4" name="">
             <a:extLst xmlns:a="http://schemas.openxmlformats.org/drawingml/2006/main">
               <a:ext uri="{FF2B5EF4-FFF2-40B4-BE49-F238E27FC236}">
-                <a16:creationId xmlns:a16="http://schemas.microsoft.com/office/drawing/2014/main" id="{3FAC162E-45F2-4709-BE2D-F5ABEABD5162}"/>
+                <a16:creationId xmlns:a16="http://schemas.microsoft.com/office/drawing/2014/main" id="{456ECDF4-34C3-47BD-8A4C-EF286F65CFA2}"/>
               </a:ext>
             </a:extLst>
           </p:cNvPr>
@@ -21256,7 +21256,7 @@
           <p:cNvPr id="5" name="">
             <a:extLst xmlns:a="http://schemas.openxmlformats.org/drawingml/2006/main">
               <a:ext uri="{FF2B5EF4-FFF2-40B4-BE49-F238E27FC236}">
-                <a16:creationId xmlns:a16="http://schemas.microsoft.com/office/drawing/2014/main" id="{1C6C1F97-4BF6-40ED-B766-104E039E11C4}"/>
+                <a16:creationId xmlns:a16="http://schemas.microsoft.com/office/drawing/2014/main" id="{C9AE1432-D999-4BB7-8EF5-52EC9A8CFF8D}"/>
               </a:ext>
             </a:extLst>
           </p:cNvPr>
@@ -21287,7 +21287,7 @@
           <p:cNvPr id="6" name="">
             <a:extLst xmlns:a="http://schemas.openxmlformats.org/drawingml/2006/main">
               <a:ext uri="{FF2B5EF4-FFF2-40B4-BE49-F238E27FC236}">
-                <a16:creationId xmlns:a16="http://schemas.microsoft.com/office/drawing/2014/main" id="{4F394237-2A3C-4216-8DDA-A6935D6B1AC6}"/>
+                <a16:creationId xmlns:a16="http://schemas.microsoft.com/office/drawing/2014/main" id="{11632AAE-B6D2-4481-822B-C85891697560}"/>
               </a:ext>
             </a:extLst>
           </p:cNvPr>
@@ -21337,7 +21337,7 @@
           <p:cNvPr id="7" name="">
             <a:extLst xmlns:a="http://schemas.openxmlformats.org/drawingml/2006/main">
               <a:ext uri="{FF2B5EF4-FFF2-40B4-BE49-F238E27FC236}">
-                <a16:creationId xmlns:a16="http://schemas.microsoft.com/office/drawing/2014/main" id="{3B758C2D-561A-4EF9-A264-935711668801}"/>
+                <a16:creationId xmlns:a16="http://schemas.microsoft.com/office/drawing/2014/main" id="{17A2C90F-9492-4836-8EB3-1B35A31214BC}"/>
               </a:ext>
             </a:extLst>
           </p:cNvPr>
@@ -21387,7 +21387,7 @@
           <p:cNvPr id="8" name="">
             <a:extLst xmlns:a="http://schemas.openxmlformats.org/drawingml/2006/main">
               <a:ext uri="{FF2B5EF4-FFF2-40B4-BE49-F238E27FC236}">
-                <a16:creationId xmlns:a16="http://schemas.microsoft.com/office/drawing/2014/main" id="{9BBBE739-5C41-43E0-8A52-C468633E169D}"/>
+                <a16:creationId xmlns:a16="http://schemas.microsoft.com/office/drawing/2014/main" id="{D703A52B-5FC1-4B96-88D3-D0714467FE9B}"/>
               </a:ext>
             </a:extLst>
           </p:cNvPr>
@@ -21437,7 +21437,7 @@
           <p:cNvPr id="9" name="">
             <a:extLst xmlns:a="http://schemas.openxmlformats.org/drawingml/2006/main">
               <a:ext uri="{FF2B5EF4-FFF2-40B4-BE49-F238E27FC236}">
-                <a16:creationId xmlns:a16="http://schemas.microsoft.com/office/drawing/2014/main" id="{15F5E2DB-8611-4308-A90D-B70E04A7BAE1}"/>
+                <a16:creationId xmlns:a16="http://schemas.microsoft.com/office/drawing/2014/main" id="{68140C1B-A826-480C-80F0-F8BAE8DB46DD}"/>
               </a:ext>
             </a:extLst>
           </p:cNvPr>
@@ -21487,7 +21487,7 @@
           <p:cNvPr id="10" name="">
             <a:extLst xmlns:a="http://schemas.openxmlformats.org/drawingml/2006/main">
               <a:ext uri="{FF2B5EF4-FFF2-40B4-BE49-F238E27FC236}">
-                <a16:creationId xmlns:a16="http://schemas.microsoft.com/office/drawing/2014/main" id="{C4B8DB2F-6D1C-4F1D-A05D-CFA9CB9A0B49}"/>
+                <a16:creationId xmlns:a16="http://schemas.microsoft.com/office/drawing/2014/main" id="{02D2B411-1A09-4012-9CC5-FACB1B516375}"/>
               </a:ext>
             </a:extLst>
           </p:cNvPr>
@@ -21537,7 +21537,7 @@
           <p:cNvPr id="11" name="">
             <a:extLst xmlns:a="http://schemas.openxmlformats.org/drawingml/2006/main">
               <a:ext uri="{FF2B5EF4-FFF2-40B4-BE49-F238E27FC236}">
-                <a16:creationId xmlns:a16="http://schemas.microsoft.com/office/drawing/2014/main" id="{DE3106E2-C515-47E6-A627-4C30BA602BD6}"/>
+                <a16:creationId xmlns:a16="http://schemas.microsoft.com/office/drawing/2014/main" id="{F64B7297-ACB5-4B28-ABC0-1A58E426FE87}"/>
               </a:ext>
             </a:extLst>
           </p:cNvPr>
@@ -21587,7 +21587,7 @@
           <p:cNvPr id="12" name="">
             <a:extLst xmlns:a="http://schemas.openxmlformats.org/drawingml/2006/main">
               <a:ext uri="{FF2B5EF4-FFF2-40B4-BE49-F238E27FC236}">
-                <a16:creationId xmlns:a16="http://schemas.microsoft.com/office/drawing/2014/main" id="{029042F0-7B3E-46E1-B0E9-FF2821D60EF5}"/>
+                <a16:creationId xmlns:a16="http://schemas.microsoft.com/office/drawing/2014/main" id="{56A3F148-36A0-4C26-A97B-74DADB45B2DA}"/>
               </a:ext>
             </a:extLst>
           </p:cNvPr>
@@ -21622,7 +21622,7 @@
           <p:cNvPr id="13" name="">
             <a:extLst xmlns:a="http://schemas.openxmlformats.org/drawingml/2006/main">
               <a:ext uri="{FF2B5EF4-FFF2-40B4-BE49-F238E27FC236}">
-                <a16:creationId xmlns:a16="http://schemas.microsoft.com/office/drawing/2014/main" id="{695CC6E5-9C6E-48A3-B817-D53F76EB66F2}"/>
+                <a16:creationId xmlns:a16="http://schemas.microsoft.com/office/drawing/2014/main" id="{1D9CC029-D9E1-478A-B796-B429DE05BA63}"/>
               </a:ext>
             </a:extLst>
           </p:cNvPr>
@@ -21672,7 +21672,7 @@
           <p:cNvPr id="14" name="">
             <a:extLst xmlns:a="http://schemas.openxmlformats.org/drawingml/2006/main">
               <a:ext uri="{FF2B5EF4-FFF2-40B4-BE49-F238E27FC236}">
-                <a16:creationId xmlns:a16="http://schemas.microsoft.com/office/drawing/2014/main" id="{EA642110-4EAC-4FD0-9432-FF18F980F6D1}"/>
+                <a16:creationId xmlns:a16="http://schemas.microsoft.com/office/drawing/2014/main" id="{AB1BEC29-F760-41D1-910E-67F863A2180F}"/>
               </a:ext>
             </a:extLst>
           </p:cNvPr>
@@ -21722,7 +21722,7 @@
           <p:cNvPr id="15" name="">
             <a:extLst xmlns:a="http://schemas.openxmlformats.org/drawingml/2006/main">
               <a:ext uri="{FF2B5EF4-FFF2-40B4-BE49-F238E27FC236}">
-                <a16:creationId xmlns:a16="http://schemas.microsoft.com/office/drawing/2014/main" id="{52270B37-22D9-497C-A60C-63DE157E0B94}"/>
+                <a16:creationId xmlns:a16="http://schemas.microsoft.com/office/drawing/2014/main" id="{F2263230-F489-49CE-947A-722140FCA234}"/>
               </a:ext>
             </a:extLst>
           </p:cNvPr>
@@ -21772,7 +21772,7 @@
           <p:cNvPr id="16" name="">
             <a:extLst xmlns:a="http://schemas.openxmlformats.org/drawingml/2006/main">
               <a:ext uri="{FF2B5EF4-FFF2-40B4-BE49-F238E27FC236}">
-                <a16:creationId xmlns:a16="http://schemas.microsoft.com/office/drawing/2014/main" id="{47DD4B1B-0536-48CA-AFD8-4E02CB1E3CFA}"/>
+                <a16:creationId xmlns:a16="http://schemas.microsoft.com/office/drawing/2014/main" id="{8496C6DE-2F27-4D32-930F-22CB4DB2F804}"/>
               </a:ext>
             </a:extLst>
           </p:cNvPr>
@@ -21822,7 +21822,7 @@
           <p:cNvPr id="17" name="">
             <a:extLst xmlns:a="http://schemas.openxmlformats.org/drawingml/2006/main">
               <a:ext uri="{FF2B5EF4-FFF2-40B4-BE49-F238E27FC236}">
-                <a16:creationId xmlns:a16="http://schemas.microsoft.com/office/drawing/2014/main" id="{06F1B863-5829-40F4-8F21-BE324BD92035}"/>
+                <a16:creationId xmlns:a16="http://schemas.microsoft.com/office/drawing/2014/main" id="{5DD7BEB5-567F-4F0D-A8FC-0E33265140D9}"/>
               </a:ext>
             </a:extLst>
           </p:cNvPr>
@@ -21872,7 +21872,7 @@
           <p:cNvPr id="18" name="">
             <a:extLst xmlns:a="http://schemas.openxmlformats.org/drawingml/2006/main">
               <a:ext uri="{FF2B5EF4-FFF2-40B4-BE49-F238E27FC236}">
-                <a16:creationId xmlns:a16="http://schemas.microsoft.com/office/drawing/2014/main" id="{DFD6B61B-7407-43EF-AA1A-D46175EDF7D6}"/>
+                <a16:creationId xmlns:a16="http://schemas.microsoft.com/office/drawing/2014/main" id="{AADD7583-AFD1-45E9-AA88-A136CEB75337}"/>
               </a:ext>
             </a:extLst>
           </p:cNvPr>
@@ -21920,7 +21920,7 @@
     </p:spTree>
     <p:extLst>
       <p:ext uri="{BB962C8B-B14F-4D97-AF65-F5344CB8AC3E}">
-        <p14:creationId xmlns:p14="http://schemas.microsoft.com/office/powerpoint/2010/main" val="894316571"/>
+        <p14:creationId xmlns:p14="http://schemas.microsoft.com/office/powerpoint/2010/main" val="252935888"/>
       </p:ext>
     </p:extLst>
   </p:cSld>
@@ -21951,7 +21951,7 @@
           <p:cNvPr id="23" name="">
             <a:extLst xmlns:a="http://schemas.openxmlformats.org/drawingml/2006/main">
               <a:ext uri="{FF2B5EF4-FFF2-40B4-BE49-F238E27FC236}">
-                <a16:creationId xmlns:a16="http://schemas.microsoft.com/office/drawing/2014/main" id="{29347000-71D6-4441-BBDD-E4BACA255A8A}"/>
+                <a16:creationId xmlns:a16="http://schemas.microsoft.com/office/drawing/2014/main" id="{14CDA0A2-09BF-404E-AF17-09659D38D22C}"/>
               </a:ext>
             </a:extLst>
           </p:cNvPr>
@@ -21984,7 +21984,7 @@
           <p:cNvPr id="2" name="">
             <a:extLst xmlns:a="http://schemas.openxmlformats.org/drawingml/2006/main">
               <a:ext uri="{FF2B5EF4-FFF2-40B4-BE49-F238E27FC236}">
-                <a16:creationId xmlns:a16="http://schemas.microsoft.com/office/drawing/2014/main" id="{7F5F5487-107F-44B6-B4F8-FC66D82F0F68}"/>
+                <a16:creationId xmlns:a16="http://schemas.microsoft.com/office/drawing/2014/main" id="{B12704BE-6F2D-4206-AD69-F02CF07470D9}"/>
               </a:ext>
             </a:extLst>
           </p:cNvPr>
@@ -21996,7 +21996,7 @@
         <p:spPr>
           <a:xfrm xmlns:a="http://schemas.openxmlformats.org/drawingml/2006/main">
             <a:off x="895350" y="504825"/>
-            <a:ext cx="2000250" cy="285750"/>
+            <a:ext cx="4000500" cy="285750"/>
           </a:xfrm>
           <a:prstGeom xmlns:a="http://schemas.openxmlformats.org/drawingml/2006/main" prst="rect">
             <a:avLst/>
@@ -22024,7 +22024,7 @@
                   <a:srgbClr val="7FA847"/>
                 </a:solidFill>
               </a:rPr>
-              <a:t>I SHOW → YOU DO</a:t>
+              <a:t>Build along</a:t>
             </a:r>
           </a:p>
         </p:txBody>
@@ -22034,7 +22034,7 @@
           <p:cNvPr id="3" name="">
             <a:extLst xmlns:a="http://schemas.openxmlformats.org/drawingml/2006/main">
               <a:ext uri="{FF2B5EF4-FFF2-40B4-BE49-F238E27FC236}">
-                <a16:creationId xmlns:a16="http://schemas.microsoft.com/office/drawing/2014/main" id="{6D69FA25-8BB7-40D4-9E01-C7354AC334BF}"/>
+                <a16:creationId xmlns:a16="http://schemas.microsoft.com/office/drawing/2014/main" id="{FB8645F1-03D1-492C-B85E-2AF439B9829B}"/>
               </a:ext>
             </a:extLst>
           </p:cNvPr>
@@ -22084,7 +22084,7 @@
           <p:cNvPr id="4" name="">
             <a:extLst xmlns:a="http://schemas.openxmlformats.org/drawingml/2006/main">
               <a:ext uri="{FF2B5EF4-FFF2-40B4-BE49-F238E27FC236}">
-                <a16:creationId xmlns:a16="http://schemas.microsoft.com/office/drawing/2014/main" id="{0E743BD7-59B4-49E1-B81B-842781474BBF}"/>
+                <a16:creationId xmlns:a16="http://schemas.microsoft.com/office/drawing/2014/main" id="{DEB336DB-ED20-42CB-BCCB-39F6DD75A64B}"/>
               </a:ext>
             </a:extLst>
           </p:cNvPr>
@@ -22134,7 +22134,7 @@
           <p:cNvPr id="5" name="">
             <a:extLst xmlns:a="http://schemas.openxmlformats.org/drawingml/2006/main">
               <a:ext uri="{FF2B5EF4-FFF2-40B4-BE49-F238E27FC236}">
-                <a16:creationId xmlns:a16="http://schemas.microsoft.com/office/drawing/2014/main" id="{16B122B5-AE05-4E89-9CBD-0A2EF1453F2C}"/>
+                <a16:creationId xmlns:a16="http://schemas.microsoft.com/office/drawing/2014/main" id="{92389AB6-D6DE-4AC7-928A-00680A89F6BB}"/>
               </a:ext>
             </a:extLst>
           </p:cNvPr>
@@ -22165,7 +22165,7 @@
           <p:cNvPr id="6" name="">
             <a:extLst xmlns:a="http://schemas.openxmlformats.org/drawingml/2006/main">
               <a:ext uri="{FF2B5EF4-FFF2-40B4-BE49-F238E27FC236}">
-                <a16:creationId xmlns:a16="http://schemas.microsoft.com/office/drawing/2014/main" id="{C7437630-2DF3-43AD-A521-6E4A5FBD2459}"/>
+                <a16:creationId xmlns:a16="http://schemas.microsoft.com/office/drawing/2014/main" id="{F4E31746-C1D4-4E26-843A-7DDFC468C030}"/>
               </a:ext>
             </a:extLst>
           </p:cNvPr>
@@ -22215,7 +22215,7 @@
           <p:cNvPr id="7" name="">
             <a:extLst xmlns:a="http://schemas.openxmlformats.org/drawingml/2006/main">
               <a:ext uri="{FF2B5EF4-FFF2-40B4-BE49-F238E27FC236}">
-                <a16:creationId xmlns:a16="http://schemas.microsoft.com/office/drawing/2014/main" id="{B3CBE1AF-2A7B-4787-8D9D-6FF9C59916E1}"/>
+                <a16:creationId xmlns:a16="http://schemas.microsoft.com/office/drawing/2014/main" id="{BD8F2B3D-59AE-4539-B20B-8350D9E09FA5}"/>
               </a:ext>
             </a:extLst>
           </p:cNvPr>
@@ -22265,7 +22265,7 @@
           <p:cNvPr id="8" name="">
             <a:extLst xmlns:a="http://schemas.openxmlformats.org/drawingml/2006/main">
               <a:ext uri="{FF2B5EF4-FFF2-40B4-BE49-F238E27FC236}">
-                <a16:creationId xmlns:a16="http://schemas.microsoft.com/office/drawing/2014/main" id="{C6A91E01-9419-4995-B570-89A687255B07}"/>
+                <a16:creationId xmlns:a16="http://schemas.microsoft.com/office/drawing/2014/main" id="{2EB2AE47-4360-45C9-9014-3014FA2F5A74}"/>
               </a:ext>
             </a:extLst>
           </p:cNvPr>
@@ -22300,7 +22300,7 @@
           <p:cNvPr id="9" name="">
             <a:extLst xmlns:a="http://schemas.openxmlformats.org/drawingml/2006/main">
               <a:ext uri="{FF2B5EF4-FFF2-40B4-BE49-F238E27FC236}">
-                <a16:creationId xmlns:a16="http://schemas.microsoft.com/office/drawing/2014/main" id="{890FAA91-A087-4EE5-8681-FFE418592F9E}"/>
+                <a16:creationId xmlns:a16="http://schemas.microsoft.com/office/drawing/2014/main" id="{7D438C99-86F7-490A-8FD8-04AAA5C1661B}"/>
               </a:ext>
             </a:extLst>
           </p:cNvPr>
@@ -22333,7 +22333,7 @@
           <p:cNvPr id="10" name="">
             <a:extLst xmlns:a="http://schemas.openxmlformats.org/drawingml/2006/main">
               <a:ext uri="{FF2B5EF4-FFF2-40B4-BE49-F238E27FC236}">
-                <a16:creationId xmlns:a16="http://schemas.microsoft.com/office/drawing/2014/main" id="{04D169CA-F671-4AB1-9268-859FB743EB27}"/>
+                <a16:creationId xmlns:a16="http://schemas.microsoft.com/office/drawing/2014/main" id="{CEEC4AA5-4F2E-4BA2-AA99-5FF09425F4B8}"/>
               </a:ext>
             </a:extLst>
           </p:cNvPr>
@@ -22364,7 +22364,7 @@
           <p:cNvPr id="11" name="">
             <a:extLst xmlns:a="http://schemas.openxmlformats.org/drawingml/2006/main">
               <a:ext uri="{FF2B5EF4-FFF2-40B4-BE49-F238E27FC236}">
-                <a16:creationId xmlns:a16="http://schemas.microsoft.com/office/drawing/2014/main" id="{D8EE5A70-7E02-48FD-9B1A-790AC32239F9}"/>
+                <a16:creationId xmlns:a16="http://schemas.microsoft.com/office/drawing/2014/main" id="{9DC632BC-7BA8-4308-A239-172B73065A81}"/>
               </a:ext>
             </a:extLst>
           </p:cNvPr>
@@ -22395,7 +22395,7 @@
           <p:cNvPr id="12" name="">
             <a:extLst xmlns:a="http://schemas.openxmlformats.org/drawingml/2006/main">
               <a:ext uri="{FF2B5EF4-FFF2-40B4-BE49-F238E27FC236}">
-                <a16:creationId xmlns:a16="http://schemas.microsoft.com/office/drawing/2014/main" id="{DD136222-2A0A-486B-8858-2C8D34E71846}"/>
+                <a16:creationId xmlns:a16="http://schemas.microsoft.com/office/drawing/2014/main" id="{6B6DDF89-BC6D-4242-A639-7505D9088CEF}"/>
               </a:ext>
             </a:extLst>
           </p:cNvPr>
@@ -22426,7 +22426,7 @@
           <p:cNvPr id="13" name="">
             <a:extLst xmlns:a="http://schemas.openxmlformats.org/drawingml/2006/main">
               <a:ext uri="{FF2B5EF4-FFF2-40B4-BE49-F238E27FC236}">
-                <a16:creationId xmlns:a16="http://schemas.microsoft.com/office/drawing/2014/main" id="{312D722E-F3F9-47D1-BB07-2C8F46455499}"/>
+                <a16:creationId xmlns:a16="http://schemas.microsoft.com/office/drawing/2014/main" id="{D1529A97-00CE-401A-9EC0-BEA5FC40949E}"/>
               </a:ext>
             </a:extLst>
           </p:cNvPr>
@@ -22612,7 +22612,7 @@
           <p:cNvPr id="14" name="">
             <a:extLst xmlns:a="http://schemas.openxmlformats.org/drawingml/2006/main">
               <a:ext uri="{FF2B5EF4-FFF2-40B4-BE49-F238E27FC236}">
-                <a16:creationId xmlns:a16="http://schemas.microsoft.com/office/drawing/2014/main" id="{3814EDD2-581F-4EB9-B5D8-162EF6FD757D}"/>
+                <a16:creationId xmlns:a16="http://schemas.microsoft.com/office/drawing/2014/main" id="{BE0C6E0A-E00F-48A8-8CEF-040EC6CC9853}"/>
               </a:ext>
             </a:extLst>
           </p:cNvPr>
@@ -22662,7 +22662,7 @@
           <p:cNvPr id="15" name="">
             <a:extLst xmlns:a="http://schemas.openxmlformats.org/drawingml/2006/main">
               <a:ext uri="{FF2B5EF4-FFF2-40B4-BE49-F238E27FC236}">
-                <a16:creationId xmlns:a16="http://schemas.microsoft.com/office/drawing/2014/main" id="{D5A6E652-4EE0-4D5B-AA41-823F1C8BC399}"/>
+                <a16:creationId xmlns:a16="http://schemas.microsoft.com/office/drawing/2014/main" id="{14DB1286-0DB5-4147-9805-8D2DDF6CD3A2}"/>
               </a:ext>
             </a:extLst>
           </p:cNvPr>
@@ -22697,7 +22697,7 @@
           <p:cNvPr id="16" name="">
             <a:extLst xmlns:a="http://schemas.openxmlformats.org/drawingml/2006/main">
               <a:ext uri="{FF2B5EF4-FFF2-40B4-BE49-F238E27FC236}">
-                <a16:creationId xmlns:a16="http://schemas.microsoft.com/office/drawing/2014/main" id="{3D57A9E1-5ADB-4DEC-ADEC-F51713A69293}"/>
+                <a16:creationId xmlns:a16="http://schemas.microsoft.com/office/drawing/2014/main" id="{427F8665-1D8E-47CD-BFDD-33AC29083A9F}"/>
               </a:ext>
             </a:extLst>
           </p:cNvPr>
@@ -22730,7 +22730,7 @@
           <p:cNvPr id="17" name="">
             <a:extLst xmlns:a="http://schemas.openxmlformats.org/drawingml/2006/main">
               <a:ext uri="{FF2B5EF4-FFF2-40B4-BE49-F238E27FC236}">
-                <a16:creationId xmlns:a16="http://schemas.microsoft.com/office/drawing/2014/main" id="{7219D352-9876-47B6-9C5E-AE13D0801498}"/>
+                <a16:creationId xmlns:a16="http://schemas.microsoft.com/office/drawing/2014/main" id="{80702D98-FEAC-401A-8E09-A599B11CB735}"/>
               </a:ext>
             </a:extLst>
           </p:cNvPr>
@@ -22761,7 +22761,7 @@
           <p:cNvPr id="18" name="">
             <a:extLst xmlns:a="http://schemas.openxmlformats.org/drawingml/2006/main">
               <a:ext uri="{FF2B5EF4-FFF2-40B4-BE49-F238E27FC236}">
-                <a16:creationId xmlns:a16="http://schemas.microsoft.com/office/drawing/2014/main" id="{10F82ABF-74DC-4B4D-96CB-3982149F5EEF}"/>
+                <a16:creationId xmlns:a16="http://schemas.microsoft.com/office/drawing/2014/main" id="{659F0208-C829-49BB-8A50-93FA480CC44B}"/>
               </a:ext>
             </a:extLst>
           </p:cNvPr>
@@ -22792,7 +22792,7 @@
           <p:cNvPr id="19" name="">
             <a:extLst xmlns:a="http://schemas.openxmlformats.org/drawingml/2006/main">
               <a:ext uri="{FF2B5EF4-FFF2-40B4-BE49-F238E27FC236}">
-                <a16:creationId xmlns:a16="http://schemas.microsoft.com/office/drawing/2014/main" id="{1CC4A96C-954F-4A8A-9AB8-30BDC1683C9E}"/>
+                <a16:creationId xmlns:a16="http://schemas.microsoft.com/office/drawing/2014/main" id="{D407E751-0501-486C-A097-7CB3DFCD3E16}"/>
               </a:ext>
             </a:extLst>
           </p:cNvPr>
@@ -22823,7 +22823,7 @@
           <p:cNvPr id="20" name="">
             <a:extLst xmlns:a="http://schemas.openxmlformats.org/drawingml/2006/main">
               <a:ext uri="{FF2B5EF4-FFF2-40B4-BE49-F238E27FC236}">
-                <a16:creationId xmlns:a16="http://schemas.microsoft.com/office/drawing/2014/main" id="{BE8C635B-4203-49D4-8084-18CDAC23C34F}"/>
+                <a16:creationId xmlns:a16="http://schemas.microsoft.com/office/drawing/2014/main" id="{DD43D013-B9D6-441D-9B3E-60B3067662B6}"/>
               </a:ext>
             </a:extLst>
           </p:cNvPr>
@@ -22992,7 +22992,7 @@
           <p:cNvPr id="21" name="">
             <a:extLst xmlns:a="http://schemas.openxmlformats.org/drawingml/2006/main">
               <a:ext uri="{FF2B5EF4-FFF2-40B4-BE49-F238E27FC236}">
-                <a16:creationId xmlns:a16="http://schemas.microsoft.com/office/drawing/2014/main" id="{8EE1423C-F4C4-4092-9C4D-1E06D1070B5C}"/>
+                <a16:creationId xmlns:a16="http://schemas.microsoft.com/office/drawing/2014/main" id="{0C591759-59F6-42CF-8F62-9B0DD5A34E5E}"/>
               </a:ext>
             </a:extLst>
           </p:cNvPr>
@@ -23027,7 +23027,7 @@
           <p:cNvPr id="22" name="">
             <a:extLst xmlns:a="http://schemas.openxmlformats.org/drawingml/2006/main">
               <a:ext uri="{FF2B5EF4-FFF2-40B4-BE49-F238E27FC236}">
-                <a16:creationId xmlns:a16="http://schemas.microsoft.com/office/drawing/2014/main" id="{1B18E5C9-4B3A-4EDB-8664-D9CA2A795714}"/>
+                <a16:creationId xmlns:a16="http://schemas.microsoft.com/office/drawing/2014/main" id="{3B5E4230-84B0-4AA2-8228-60304135C69D}"/>
               </a:ext>
             </a:extLst>
           </p:cNvPr>
@@ -23075,7 +23075,7 @@
     </p:spTree>
     <p:extLst>
       <p:ext uri="{BB962C8B-B14F-4D97-AF65-F5344CB8AC3E}">
-        <p14:creationId xmlns:p14="http://schemas.microsoft.com/office/powerpoint/2010/main" val="1910942308"/>
+        <p14:creationId xmlns:p14="http://schemas.microsoft.com/office/powerpoint/2010/main" val="1749908974"/>
       </p:ext>
     </p:extLst>
   </p:cSld>
@@ -23106,7 +23106,7 @@
           <p:cNvPr id="34" name="">
             <a:extLst xmlns:a="http://schemas.openxmlformats.org/drawingml/2006/main">
               <a:ext uri="{FF2B5EF4-FFF2-40B4-BE49-F238E27FC236}">
-                <a16:creationId xmlns:a16="http://schemas.microsoft.com/office/drawing/2014/main" id="{94DF4923-FB8B-4321-B37C-32247B3383B9}"/>
+                <a16:creationId xmlns:a16="http://schemas.microsoft.com/office/drawing/2014/main" id="{058CD69C-DD55-4574-951F-8FAB86F368A9}"/>
               </a:ext>
             </a:extLst>
           </p:cNvPr>
@@ -23139,7 +23139,7 @@
           <p:cNvPr id="2" name="">
             <a:extLst xmlns:a="http://schemas.openxmlformats.org/drawingml/2006/main">
               <a:ext uri="{FF2B5EF4-FFF2-40B4-BE49-F238E27FC236}">
-                <a16:creationId xmlns:a16="http://schemas.microsoft.com/office/drawing/2014/main" id="{F4A6E27A-5E01-42F8-B65B-3CF649C9EEBE}"/>
+                <a16:creationId xmlns:a16="http://schemas.microsoft.com/office/drawing/2014/main" id="{EFF5E0E3-42DD-4DBF-A53D-12595E278BDE}"/>
               </a:ext>
             </a:extLst>
           </p:cNvPr>
@@ -23151,7 +23151,7 @@
         <p:spPr>
           <a:xfrm xmlns:a="http://schemas.openxmlformats.org/drawingml/2006/main">
             <a:off x="895350" y="504825"/>
-            <a:ext cx="2000250" cy="285750"/>
+            <a:ext cx="4000500" cy="285750"/>
           </a:xfrm>
           <a:prstGeom xmlns:a="http://schemas.openxmlformats.org/drawingml/2006/main" prst="rect">
             <a:avLst/>
@@ -23179,7 +23179,7 @@
                   <a:srgbClr val="48B985"/>
                 </a:solidFill>
               </a:rPr>
-              <a:t>YOU DO</a:t>
+              <a:t>Talk to your agent</a:t>
             </a:r>
           </a:p>
         </p:txBody>
@@ -23189,7 +23189,7 @@
           <p:cNvPr id="3" name="">
             <a:extLst xmlns:a="http://schemas.openxmlformats.org/drawingml/2006/main">
               <a:ext uri="{FF2B5EF4-FFF2-40B4-BE49-F238E27FC236}">
-                <a16:creationId xmlns:a16="http://schemas.microsoft.com/office/drawing/2014/main" id="{2B858765-A20D-4ED6-A6F6-CAC8AB2D8BC6}"/>
+                <a16:creationId xmlns:a16="http://schemas.microsoft.com/office/drawing/2014/main" id="{434757FF-6B2A-4E78-8889-2712A79484AD}"/>
               </a:ext>
             </a:extLst>
           </p:cNvPr>
@@ -23239,7 +23239,7 @@
           <p:cNvPr id="4" name="">
             <a:extLst xmlns:a="http://schemas.openxmlformats.org/drawingml/2006/main">
               <a:ext uri="{FF2B5EF4-FFF2-40B4-BE49-F238E27FC236}">
-                <a16:creationId xmlns:a16="http://schemas.microsoft.com/office/drawing/2014/main" id="{E70E6B46-373E-47E1-8CA8-D1554F06271D}"/>
+                <a16:creationId xmlns:a16="http://schemas.microsoft.com/office/drawing/2014/main" id="{220A56F7-F602-4759-98C9-9D4F2B078CED}"/>
               </a:ext>
             </a:extLst>
           </p:cNvPr>
@@ -23289,7 +23289,7 @@
           <p:cNvPr id="5" name="">
             <a:extLst xmlns:a="http://schemas.openxmlformats.org/drawingml/2006/main">
               <a:ext uri="{FF2B5EF4-FFF2-40B4-BE49-F238E27FC236}">
-                <a16:creationId xmlns:a16="http://schemas.microsoft.com/office/drawing/2014/main" id="{96AB50DE-33B1-4523-BA82-6299A507DA3C}"/>
+                <a16:creationId xmlns:a16="http://schemas.microsoft.com/office/drawing/2014/main" id="{27EC1B61-009C-4723-AC1D-FD0041D133D3}"/>
               </a:ext>
             </a:extLst>
           </p:cNvPr>
@@ -23320,7 +23320,7 @@
           <p:cNvPr id="6" name="">
             <a:extLst xmlns:a="http://schemas.openxmlformats.org/drawingml/2006/main">
               <a:ext uri="{FF2B5EF4-FFF2-40B4-BE49-F238E27FC236}">
-                <a16:creationId xmlns:a16="http://schemas.microsoft.com/office/drawing/2014/main" id="{0D2E6938-1D7A-488D-B71B-15EB2741EF87}"/>
+                <a16:creationId xmlns:a16="http://schemas.microsoft.com/office/drawing/2014/main" id="{90D7E267-B843-4F1D-B3F5-F8FAEBCAE649}"/>
               </a:ext>
             </a:extLst>
           </p:cNvPr>
@@ -23370,7 +23370,7 @@
           <p:cNvPr id="7" name="">
             <a:extLst xmlns:a="http://schemas.openxmlformats.org/drawingml/2006/main">
               <a:ext uri="{FF2B5EF4-FFF2-40B4-BE49-F238E27FC236}">
-                <a16:creationId xmlns:a16="http://schemas.microsoft.com/office/drawing/2014/main" id="{D6B970FC-6D8D-4379-B220-E092BDE55E1A}"/>
+                <a16:creationId xmlns:a16="http://schemas.microsoft.com/office/drawing/2014/main" id="{3D580F25-8625-4817-BDBF-F383FB03A761}"/>
               </a:ext>
             </a:extLst>
           </p:cNvPr>
@@ -23420,7 +23420,7 @@
           <p:cNvPr id="8" name="">
             <a:extLst xmlns:a="http://schemas.openxmlformats.org/drawingml/2006/main">
               <a:ext uri="{FF2B5EF4-FFF2-40B4-BE49-F238E27FC236}">
-                <a16:creationId xmlns:a16="http://schemas.microsoft.com/office/drawing/2014/main" id="{6B56B113-046C-48B7-8B12-78719A939631}"/>
+                <a16:creationId xmlns:a16="http://schemas.microsoft.com/office/drawing/2014/main" id="{E9259DEB-62F2-4567-8D93-27FAFBB26F47}"/>
               </a:ext>
             </a:extLst>
           </p:cNvPr>
@@ -23455,7 +23455,7 @@
           <p:cNvPr id="9" name="">
             <a:extLst xmlns:a="http://schemas.openxmlformats.org/drawingml/2006/main">
               <a:ext uri="{FF2B5EF4-FFF2-40B4-BE49-F238E27FC236}">
-                <a16:creationId xmlns:a16="http://schemas.microsoft.com/office/drawing/2014/main" id="{AD1A59EA-6D72-491D-B114-95EAB9B42F87}"/>
+                <a16:creationId xmlns:a16="http://schemas.microsoft.com/office/drawing/2014/main" id="{B14DAE79-F793-4A40-8E0F-FA201DD4FA11}"/>
               </a:ext>
             </a:extLst>
           </p:cNvPr>
@@ -23505,7 +23505,7 @@
           <p:cNvPr id="10" name="">
             <a:extLst xmlns:a="http://schemas.openxmlformats.org/drawingml/2006/main">
               <a:ext uri="{FF2B5EF4-FFF2-40B4-BE49-F238E27FC236}">
-                <a16:creationId xmlns:a16="http://schemas.microsoft.com/office/drawing/2014/main" id="{07E06B4A-FB97-403F-A1ED-2F1F63416B97}"/>
+                <a16:creationId xmlns:a16="http://schemas.microsoft.com/office/drawing/2014/main" id="{A92D61FA-B6B8-4402-A615-3156CFF7E47D}"/>
               </a:ext>
             </a:extLst>
           </p:cNvPr>
@@ -23606,7 +23606,7 @@
           <p:cNvPr id="11" name="">
             <a:extLst xmlns:a="http://schemas.openxmlformats.org/drawingml/2006/main">
               <a:ext uri="{FF2B5EF4-FFF2-40B4-BE49-F238E27FC236}">
-                <a16:creationId xmlns:a16="http://schemas.microsoft.com/office/drawing/2014/main" id="{2EE9B24F-BA97-49D4-BE79-AE25095DD5DD}"/>
+                <a16:creationId xmlns:a16="http://schemas.microsoft.com/office/drawing/2014/main" id="{EC4231B5-AD01-4AA2-8669-A989FA931BE2}"/>
               </a:ext>
             </a:extLst>
           </p:cNvPr>
@@ -23637,7 +23637,7 @@
           <p:cNvPr id="12" name="">
             <a:extLst xmlns:a="http://schemas.openxmlformats.org/drawingml/2006/main">
               <a:ext uri="{FF2B5EF4-FFF2-40B4-BE49-F238E27FC236}">
-                <a16:creationId xmlns:a16="http://schemas.microsoft.com/office/drawing/2014/main" id="{FD7FCA5B-9A0C-445E-A147-E4E7BFEFB65E}"/>
+                <a16:creationId xmlns:a16="http://schemas.microsoft.com/office/drawing/2014/main" id="{47F1B82E-E80B-4082-BE0A-EC425722DC8B}"/>
               </a:ext>
             </a:extLst>
           </p:cNvPr>
@@ -23687,7 +23687,7 @@
           <p:cNvPr id="13" name="">
             <a:extLst xmlns:a="http://schemas.openxmlformats.org/drawingml/2006/main">
               <a:ext uri="{FF2B5EF4-FFF2-40B4-BE49-F238E27FC236}">
-                <a16:creationId xmlns:a16="http://schemas.microsoft.com/office/drawing/2014/main" id="{1BCC68AE-8479-4F02-8D7E-8D96F2460F7D}"/>
+                <a16:creationId xmlns:a16="http://schemas.microsoft.com/office/drawing/2014/main" id="{371FFDEB-DE77-4DC1-BB3F-B185BD95117C}"/>
               </a:ext>
             </a:extLst>
           </p:cNvPr>
@@ -23720,7 +23720,7 @@
           <p:cNvPr id="14" name="">
             <a:extLst xmlns:a="http://schemas.openxmlformats.org/drawingml/2006/main">
               <a:ext uri="{FF2B5EF4-FFF2-40B4-BE49-F238E27FC236}">
-                <a16:creationId xmlns:a16="http://schemas.microsoft.com/office/drawing/2014/main" id="{CEAF39B7-5D43-42D8-A237-B947985B0A52}"/>
+                <a16:creationId xmlns:a16="http://schemas.microsoft.com/office/drawing/2014/main" id="{F3A00BEF-9C3F-41CC-802D-76C5434C968B}"/>
               </a:ext>
             </a:extLst>
           </p:cNvPr>
@@ -23753,7 +23753,7 @@
           <p:cNvPr id="15" name="">
             <a:extLst xmlns:a="http://schemas.openxmlformats.org/drawingml/2006/main">
               <a:ext uri="{FF2B5EF4-FFF2-40B4-BE49-F238E27FC236}">
-                <a16:creationId xmlns:a16="http://schemas.microsoft.com/office/drawing/2014/main" id="{00FDFA9E-7F86-4176-BADE-6CA5C1ECA5D5}"/>
+                <a16:creationId xmlns:a16="http://schemas.microsoft.com/office/drawing/2014/main" id="{3817E763-E508-40E3-96EF-117FB21A1101}"/>
               </a:ext>
             </a:extLst>
           </p:cNvPr>
@@ -23786,7 +23786,7 @@
           <p:cNvPr id="16" name="">
             <a:extLst xmlns:a="http://schemas.openxmlformats.org/drawingml/2006/main">
               <a:ext uri="{FF2B5EF4-FFF2-40B4-BE49-F238E27FC236}">
-                <a16:creationId xmlns:a16="http://schemas.microsoft.com/office/drawing/2014/main" id="{C02277AF-CF3E-4C97-AD31-569E52A35423}"/>
+                <a16:creationId xmlns:a16="http://schemas.microsoft.com/office/drawing/2014/main" id="{1FB8E17F-C00F-41D4-9D70-694097C26193}"/>
               </a:ext>
             </a:extLst>
           </p:cNvPr>
@@ -23819,7 +23819,7 @@
           <p:cNvPr id="17" name="">
             <a:extLst xmlns:a="http://schemas.openxmlformats.org/drawingml/2006/main">
               <a:ext uri="{FF2B5EF4-FFF2-40B4-BE49-F238E27FC236}">
-                <a16:creationId xmlns:a16="http://schemas.microsoft.com/office/drawing/2014/main" id="{150C2C4F-CED4-4D06-9181-8726A5DA9B62}"/>
+                <a16:creationId xmlns:a16="http://schemas.microsoft.com/office/drawing/2014/main" id="{E4678B3F-D3FB-493A-8DD3-901B815E63F7}"/>
               </a:ext>
             </a:extLst>
           </p:cNvPr>
@@ -23852,7 +23852,7 @@
           <p:cNvPr id="18" name="">
             <a:extLst xmlns:a="http://schemas.openxmlformats.org/drawingml/2006/main">
               <a:ext uri="{FF2B5EF4-FFF2-40B4-BE49-F238E27FC236}">
-                <a16:creationId xmlns:a16="http://schemas.microsoft.com/office/drawing/2014/main" id="{6AAC876E-7F76-43AA-B6B1-DD65CB683BAC}"/>
+                <a16:creationId xmlns:a16="http://schemas.microsoft.com/office/drawing/2014/main" id="{7DB3F350-3078-409F-AB6C-67B23BF7FC07}"/>
               </a:ext>
             </a:extLst>
           </p:cNvPr>
@@ -23885,7 +23885,7 @@
           <p:cNvPr id="19" name="">
             <a:extLst xmlns:a="http://schemas.openxmlformats.org/drawingml/2006/main">
               <a:ext uri="{FF2B5EF4-FFF2-40B4-BE49-F238E27FC236}">
-                <a16:creationId xmlns:a16="http://schemas.microsoft.com/office/drawing/2014/main" id="{79864C88-9064-41E1-92D8-8FC5E833A17D}"/>
+                <a16:creationId xmlns:a16="http://schemas.microsoft.com/office/drawing/2014/main" id="{BD82C054-94C3-4C41-B926-40DCBC05DC64}"/>
               </a:ext>
             </a:extLst>
           </p:cNvPr>
@@ -23918,7 +23918,7 @@
           <p:cNvPr id="20" name="">
             <a:extLst xmlns:a="http://schemas.openxmlformats.org/drawingml/2006/main">
               <a:ext uri="{FF2B5EF4-FFF2-40B4-BE49-F238E27FC236}">
-                <a16:creationId xmlns:a16="http://schemas.microsoft.com/office/drawing/2014/main" id="{80A74895-F790-4FFA-B3EE-2419D26A6194}"/>
+                <a16:creationId xmlns:a16="http://schemas.microsoft.com/office/drawing/2014/main" id="{E658C385-5224-400E-B43F-45DA0FACA2D7}"/>
               </a:ext>
             </a:extLst>
           </p:cNvPr>
@@ -23951,7 +23951,7 @@
           <p:cNvPr id="21" name="">
             <a:extLst xmlns:a="http://schemas.openxmlformats.org/drawingml/2006/main">
               <a:ext uri="{FF2B5EF4-FFF2-40B4-BE49-F238E27FC236}">
-                <a16:creationId xmlns:a16="http://schemas.microsoft.com/office/drawing/2014/main" id="{81F9C939-AC3B-420F-9E61-6E3B94579F87}"/>
+                <a16:creationId xmlns:a16="http://schemas.microsoft.com/office/drawing/2014/main" id="{E920D101-5D84-4D77-ABC2-2F8ABDE69C1A}"/>
               </a:ext>
             </a:extLst>
           </p:cNvPr>
@@ -23984,7 +23984,7 @@
           <p:cNvPr id="22" name="">
             <a:extLst xmlns:a="http://schemas.openxmlformats.org/drawingml/2006/main">
               <a:ext uri="{FF2B5EF4-FFF2-40B4-BE49-F238E27FC236}">
-                <a16:creationId xmlns:a16="http://schemas.microsoft.com/office/drawing/2014/main" id="{B5A19C60-A236-493D-91E8-17C915B23020}"/>
+                <a16:creationId xmlns:a16="http://schemas.microsoft.com/office/drawing/2014/main" id="{32B986B9-A0BF-4086-9E2E-9DBBC8D5EAFA}"/>
               </a:ext>
             </a:extLst>
           </p:cNvPr>
@@ -24017,7 +24017,7 @@
           <p:cNvPr id="23" name="">
             <a:extLst xmlns:a="http://schemas.openxmlformats.org/drawingml/2006/main">
               <a:ext uri="{FF2B5EF4-FFF2-40B4-BE49-F238E27FC236}">
-                <a16:creationId xmlns:a16="http://schemas.microsoft.com/office/drawing/2014/main" id="{2391AD89-A405-45B0-9B67-F30B99D15D7D}"/>
+                <a16:creationId xmlns:a16="http://schemas.microsoft.com/office/drawing/2014/main" id="{811D015A-BFA9-478F-868A-D1AF43AAF08B}"/>
               </a:ext>
             </a:extLst>
           </p:cNvPr>
@@ -24050,7 +24050,7 @@
           <p:cNvPr id="24" name="">
             <a:extLst xmlns:a="http://schemas.openxmlformats.org/drawingml/2006/main">
               <a:ext uri="{FF2B5EF4-FFF2-40B4-BE49-F238E27FC236}">
-                <a16:creationId xmlns:a16="http://schemas.microsoft.com/office/drawing/2014/main" id="{A937B136-1379-4962-B7CE-1D067A407691}"/>
+                <a16:creationId xmlns:a16="http://schemas.microsoft.com/office/drawing/2014/main" id="{3F481A84-E4BC-45AB-A3AC-124F723BC587}"/>
               </a:ext>
             </a:extLst>
           </p:cNvPr>
@@ -24083,7 +24083,7 @@
           <p:cNvPr id="25" name="">
             <a:extLst xmlns:a="http://schemas.openxmlformats.org/drawingml/2006/main">
               <a:ext uri="{FF2B5EF4-FFF2-40B4-BE49-F238E27FC236}">
-                <a16:creationId xmlns:a16="http://schemas.microsoft.com/office/drawing/2014/main" id="{9A1EBEA0-9C8B-4599-9A5D-A80E2BFCD327}"/>
+                <a16:creationId xmlns:a16="http://schemas.microsoft.com/office/drawing/2014/main" id="{B6CCF517-79C1-4D0C-A254-B46CC5F715E4}"/>
               </a:ext>
             </a:extLst>
           </p:cNvPr>
@@ -24116,7 +24116,7 @@
           <p:cNvPr id="26" name="">
             <a:extLst xmlns:a="http://schemas.openxmlformats.org/drawingml/2006/main">
               <a:ext uri="{FF2B5EF4-FFF2-40B4-BE49-F238E27FC236}">
-                <a16:creationId xmlns:a16="http://schemas.microsoft.com/office/drawing/2014/main" id="{C8B5FB65-5A3F-49B6-9EE7-39633CF96E92}"/>
+                <a16:creationId xmlns:a16="http://schemas.microsoft.com/office/drawing/2014/main" id="{00AC31CF-27CE-4194-A968-78357836012A}"/>
               </a:ext>
             </a:extLst>
           </p:cNvPr>
@@ -24149,7 +24149,7 @@
           <p:cNvPr id="27" name="">
             <a:extLst xmlns:a="http://schemas.openxmlformats.org/drawingml/2006/main">
               <a:ext uri="{FF2B5EF4-FFF2-40B4-BE49-F238E27FC236}">
-                <a16:creationId xmlns:a16="http://schemas.microsoft.com/office/drawing/2014/main" id="{D82631C3-60A7-4B10-A2AD-CF9C68C82BE9}"/>
+                <a16:creationId xmlns:a16="http://schemas.microsoft.com/office/drawing/2014/main" id="{6F4320E6-2F2A-44E4-AC70-76AF7DAD2834}"/>
               </a:ext>
             </a:extLst>
           </p:cNvPr>
@@ -24182,7 +24182,7 @@
           <p:cNvPr id="28" name="">
             <a:extLst xmlns:a="http://schemas.openxmlformats.org/drawingml/2006/main">
               <a:ext uri="{FF2B5EF4-FFF2-40B4-BE49-F238E27FC236}">
-                <a16:creationId xmlns:a16="http://schemas.microsoft.com/office/drawing/2014/main" id="{A406831C-7CA2-4088-83A1-C5B963FEB9C0}"/>
+                <a16:creationId xmlns:a16="http://schemas.microsoft.com/office/drawing/2014/main" id="{3739EAC7-ACD6-4746-84EA-97ADB2086660}"/>
               </a:ext>
             </a:extLst>
           </p:cNvPr>
@@ -24215,7 +24215,7 @@
           <p:cNvPr id="29" name="">
             <a:extLst xmlns:a="http://schemas.openxmlformats.org/drawingml/2006/main">
               <a:ext uri="{FF2B5EF4-FFF2-40B4-BE49-F238E27FC236}">
-                <a16:creationId xmlns:a16="http://schemas.microsoft.com/office/drawing/2014/main" id="{4BDA414E-3DD7-4E48-A5A0-85E9BDF6C607}"/>
+                <a16:creationId xmlns:a16="http://schemas.microsoft.com/office/drawing/2014/main" id="{537D9C47-6CEF-4997-8B3E-70E79A101E04}"/>
               </a:ext>
             </a:extLst>
           </p:cNvPr>
@@ -24248,7 +24248,7 @@
           <p:cNvPr id="30" name="">
             <a:extLst xmlns:a="http://schemas.openxmlformats.org/drawingml/2006/main">
               <a:ext uri="{FF2B5EF4-FFF2-40B4-BE49-F238E27FC236}">
-                <a16:creationId xmlns:a16="http://schemas.microsoft.com/office/drawing/2014/main" id="{C7ADB8D1-D3A5-4D48-A789-B00AE5A8505F}"/>
+                <a16:creationId xmlns:a16="http://schemas.microsoft.com/office/drawing/2014/main" id="{11EF028C-3D1A-45E1-BECE-DCB6FAB8D0D0}"/>
               </a:ext>
             </a:extLst>
           </p:cNvPr>
@@ -24281,7 +24281,7 @@
           <p:cNvPr id="31" name="">
             <a:extLst xmlns:a="http://schemas.openxmlformats.org/drawingml/2006/main">
               <a:ext uri="{FF2B5EF4-FFF2-40B4-BE49-F238E27FC236}">
-                <a16:creationId xmlns:a16="http://schemas.microsoft.com/office/drawing/2014/main" id="{35C033F5-3C34-4C76-82E2-0DD217F576AF}"/>
+                <a16:creationId xmlns:a16="http://schemas.microsoft.com/office/drawing/2014/main" id="{AC3AA33F-39B0-4445-B14E-6D3597E83FDA}"/>
               </a:ext>
             </a:extLst>
           </p:cNvPr>
@@ -24314,7 +24314,7 @@
           <p:cNvPr id="32" name="">
             <a:extLst xmlns:a="http://schemas.openxmlformats.org/drawingml/2006/main">
               <a:ext uri="{FF2B5EF4-FFF2-40B4-BE49-F238E27FC236}">
-                <a16:creationId xmlns:a16="http://schemas.microsoft.com/office/drawing/2014/main" id="{884AB9F7-5EF5-420D-8CC7-D4E30D44ADA8}"/>
+                <a16:creationId xmlns:a16="http://schemas.microsoft.com/office/drawing/2014/main" id="{BB3E03F0-6654-4188-9CFD-6FAD45FAD59B}"/>
               </a:ext>
             </a:extLst>
           </p:cNvPr>
@@ -24347,7 +24347,7 @@
           <p:cNvPr id="33" name="">
             <a:extLst xmlns:a="http://schemas.openxmlformats.org/drawingml/2006/main">
               <a:ext uri="{FF2B5EF4-FFF2-40B4-BE49-F238E27FC236}">
-                <a16:creationId xmlns:a16="http://schemas.microsoft.com/office/drawing/2014/main" id="{C088C059-9CA8-4114-B6D8-695EE468C28F}"/>
+                <a16:creationId xmlns:a16="http://schemas.microsoft.com/office/drawing/2014/main" id="{2D873A27-22F7-4066-9C36-8EB55F3B209D}"/>
               </a:ext>
             </a:extLst>
           </p:cNvPr>
@@ -24395,7 +24395,7 @@
     </p:spTree>
     <p:extLst>
       <p:ext uri="{BB962C8B-B14F-4D97-AF65-F5344CB8AC3E}">
-        <p14:creationId xmlns:p14="http://schemas.microsoft.com/office/powerpoint/2010/main" val="1606093621"/>
+        <p14:creationId xmlns:p14="http://schemas.microsoft.com/office/powerpoint/2010/main" val="1737627904"/>
       </p:ext>
     </p:extLst>
   </p:cSld>

--- a/slides/google-adk-voice-agents-workshop.pptx
+++ b/slides/google-adk-voice-agents-workshop.pptx
@@ -2,30 +2,30 @@
 <file path=ppt/presentation.xml><?xml version="1.0" encoding="utf-8"?>
 <p:presentation xmlns:p="http://schemas.openxmlformats.org/presentationml/2006/main">
   <p:sldMasterIdLst>
-    <p:sldMasterId xmlns:r="http://schemas.openxmlformats.org/officeDocument/2006/relationships" id="2147483648" r:id="Re3526cd7d3924f35"/>
+    <p:sldMasterId xmlns:r="http://schemas.openxmlformats.org/officeDocument/2006/relationships" id="2147483648" r:id="R56ca2458ce794941"/>
   </p:sldMasterIdLst>
   <p:notesMasterIdLst>
-    <p:notesMasterId xmlns:r="http://schemas.openxmlformats.org/officeDocument/2006/relationships" r:id="R6efdc9e72e5d4f59"/>
+    <p:notesMasterId xmlns:r="http://schemas.openxmlformats.org/officeDocument/2006/relationships" r:id="Rd772345d9f2446c1"/>
   </p:notesMasterIdLst>
   <p:sldIdLst>
-    <p:sldId xmlns:r="http://schemas.openxmlformats.org/officeDocument/2006/relationships" id="256" r:id="Rea8394cd56c64ec1"/>
-    <p:sldId xmlns:r="http://schemas.openxmlformats.org/officeDocument/2006/relationships" id="257" r:id="R2369b88d480f44fd"/>
-    <p:sldId xmlns:r="http://schemas.openxmlformats.org/officeDocument/2006/relationships" id="258" r:id="R9e01f23fd64b4f3e"/>
-    <p:sldId xmlns:r="http://schemas.openxmlformats.org/officeDocument/2006/relationships" id="259" r:id="R0fb6e4a4bebc47cb"/>
-    <p:sldId xmlns:r="http://schemas.openxmlformats.org/officeDocument/2006/relationships" id="260" r:id="Rbdd152db2c0d4202"/>
-    <p:sldId xmlns:r="http://schemas.openxmlformats.org/officeDocument/2006/relationships" id="261" r:id="R308297f5f1b843e9"/>
-    <p:sldId xmlns:r="http://schemas.openxmlformats.org/officeDocument/2006/relationships" id="262" r:id="R129ab4eac43e442d"/>
-    <p:sldId xmlns:r="http://schemas.openxmlformats.org/officeDocument/2006/relationships" id="263" r:id="R97d70354e00f4eb5"/>
-    <p:sldId xmlns:r="http://schemas.openxmlformats.org/officeDocument/2006/relationships" id="264" r:id="R3f074fa3a18c4a7e"/>
-    <p:sldId xmlns:r="http://schemas.openxmlformats.org/officeDocument/2006/relationships" id="265" r:id="Reea555c1f00b4b53"/>
-    <p:sldId xmlns:r="http://schemas.openxmlformats.org/officeDocument/2006/relationships" id="266" r:id="R10bb91c9d6b140b4"/>
-    <p:sldId xmlns:r="http://schemas.openxmlformats.org/officeDocument/2006/relationships" id="267" r:id="Rb47e5f1810d24e1a"/>
-    <p:sldId xmlns:r="http://schemas.openxmlformats.org/officeDocument/2006/relationships" id="268" r:id="R6e9c29037c624bd2"/>
-    <p:sldId xmlns:r="http://schemas.openxmlformats.org/officeDocument/2006/relationships" id="269" r:id="Rdf82a794a4b34cae"/>
-    <p:sldId xmlns:r="http://schemas.openxmlformats.org/officeDocument/2006/relationships" id="270" r:id="R1b76e8f528e24504"/>
-    <p:sldId xmlns:r="http://schemas.openxmlformats.org/officeDocument/2006/relationships" id="271" r:id="R6a3c8dd17df54ad8"/>
-    <p:sldId xmlns:r="http://schemas.openxmlformats.org/officeDocument/2006/relationships" id="272" r:id="R779f149dbaa34d48"/>
-    <p:sldId xmlns:r="http://schemas.openxmlformats.org/officeDocument/2006/relationships" id="273" r:id="Rf7860e716ee94217"/>
+    <p:sldId xmlns:r="http://schemas.openxmlformats.org/officeDocument/2006/relationships" id="256" r:id="R6463ea99a05c4e4c"/>
+    <p:sldId xmlns:r="http://schemas.openxmlformats.org/officeDocument/2006/relationships" id="257" r:id="R0964bc063c904b43"/>
+    <p:sldId xmlns:r="http://schemas.openxmlformats.org/officeDocument/2006/relationships" id="258" r:id="Ref1f2d2bb9bc4725"/>
+    <p:sldId xmlns:r="http://schemas.openxmlformats.org/officeDocument/2006/relationships" id="259" r:id="R03d1c9713f8a48ff"/>
+    <p:sldId xmlns:r="http://schemas.openxmlformats.org/officeDocument/2006/relationships" id="260" r:id="R82466c59ed0d47ca"/>
+    <p:sldId xmlns:r="http://schemas.openxmlformats.org/officeDocument/2006/relationships" id="261" r:id="Rb9306da1a28043ad"/>
+    <p:sldId xmlns:r="http://schemas.openxmlformats.org/officeDocument/2006/relationships" id="262" r:id="Rf08433a980c3456c"/>
+    <p:sldId xmlns:r="http://schemas.openxmlformats.org/officeDocument/2006/relationships" id="263" r:id="Rba28c1e09ad44056"/>
+    <p:sldId xmlns:r="http://schemas.openxmlformats.org/officeDocument/2006/relationships" id="264" r:id="R19e850bedfe440cd"/>
+    <p:sldId xmlns:r="http://schemas.openxmlformats.org/officeDocument/2006/relationships" id="265" r:id="R2540675fffbe4a79"/>
+    <p:sldId xmlns:r="http://schemas.openxmlformats.org/officeDocument/2006/relationships" id="266" r:id="R43ab2b4fea9e4073"/>
+    <p:sldId xmlns:r="http://schemas.openxmlformats.org/officeDocument/2006/relationships" id="267" r:id="R06cdcaf8f1504320"/>
+    <p:sldId xmlns:r="http://schemas.openxmlformats.org/officeDocument/2006/relationships" id="268" r:id="Rdc6ab13349e44b14"/>
+    <p:sldId xmlns:r="http://schemas.openxmlformats.org/officeDocument/2006/relationships" id="269" r:id="R61cef4086e1a4c43"/>
+    <p:sldId xmlns:r="http://schemas.openxmlformats.org/officeDocument/2006/relationships" id="270" r:id="R244e9631a10146f7"/>
+    <p:sldId xmlns:r="http://schemas.openxmlformats.org/officeDocument/2006/relationships" id="271" r:id="Racc6f83b4f6c410b"/>
+    <p:sldId xmlns:r="http://schemas.openxmlformats.org/officeDocument/2006/relationships" id="272" r:id="R229eb3109ba34c01"/>
+    <p:sldId xmlns:r="http://schemas.openxmlformats.org/officeDocument/2006/relationships" id="273" r:id="R24b2d98e6c8741ac"/>
   </p:sldIdLst>
   <p:sldSz cx="12192000" cy="6858000"/>
   <p:notesSz cx="6858000" cy="9144000"/>
@@ -1417,6 +1417,15 @@
               <a:t>Prerequisites in the repo README: modern Chromium browser, headphones, working mic, prepared Python environment, workshop credential path, and checkpoint folders.</a:t>
             </a:r>
           </a:p>
+          <a:p xmlns:a="http://schemas.openxmlformats.org/drawingml/2006/main">
+            <a:r>
+              <a:t>
+[Sources]
+- https://github.com/aswincsekar/adk-voice-workshop (repository link and QR target; accessed 2026-08-21)
+- https://api.qrserver.com/v1/create-qr-code/ (QR raster generator; accessed 2026-08-21)
+[/Sources]</a:t>
+            </a:r>
+          </a:p>
         </p:txBody>
       </p:sp>
       <p:sp>
@@ -1892,7 +1901,7 @@
   </p:cSld>
   <p:clrMap bg1="lt1" tx1="dk1" bg2="lt2" tx2="dk2" accent1="accent1" accent2="accent2" accent3="accent3" accent4="accent4" accent5="accent5" accent6="accent6" hlink="hlink" folHlink="folHlink"/>
   <p:sldLayoutIdLst>
-    <p:sldLayoutId xmlns:r="http://schemas.openxmlformats.org/officeDocument/2006/relationships" id="2147483649" r:id="Rbe9578ce34eb4828"/>
+    <p:sldLayoutId xmlns:r="http://schemas.openxmlformats.org/officeDocument/2006/relationships" id="2147483649" r:id="Re9a47de645ab429c"/>
   </p:sldLayoutIdLst>
   <p:txStyles>
     <p:titleStyle>
@@ -2502,6 +2511,7 @@
           <a:lstStyle xmlns:a="http://schemas.openxmlformats.org/drawingml/2006/main"/>
           <a:p xmlns:a="http://schemas.openxmlformats.org/drawingml/2006/main">
             <a:pPr algn="l">
+              <a:buNone/>
               <a:defRPr sz="1200" b="1" i="0">
                 <a:solidFill>
                   <a:srgbClr val="159A64"/>
@@ -2552,6 +2562,7 @@
           <a:lstStyle xmlns:a="http://schemas.openxmlformats.org/drawingml/2006/main"/>
           <a:p xmlns:a="http://schemas.openxmlformats.org/drawingml/2006/main">
             <a:pPr algn="l">
+              <a:buNone/>
               <a:defRPr sz="4350" b="1" i="0">
                 <a:solidFill>
                   <a:srgbClr val="163C2C"/>
@@ -2569,6 +2580,7 @@
           </a:p>
           <a:p xmlns:a="http://schemas.openxmlformats.org/drawingml/2006/main">
             <a:pPr algn="l">
+              <a:buNone/>
               <a:defRPr sz="4350" b="1" i="0">
                 <a:solidFill>
                   <a:srgbClr val="163C2C"/>
@@ -2619,6 +2631,7 @@
           <a:lstStyle xmlns:a="http://schemas.openxmlformats.org/drawingml/2006/main"/>
           <a:p xmlns:a="http://schemas.openxmlformats.org/drawingml/2006/main">
             <a:pPr algn="l">
+              <a:buNone/>
               <a:defRPr sz="1950" b="1" i="0">
                 <a:solidFill>
                   <a:srgbClr val="48B985"/>
@@ -2669,6 +2682,7 @@
           <a:lstStyle xmlns:a="http://schemas.openxmlformats.org/drawingml/2006/main"/>
           <a:p xmlns:a="http://schemas.openxmlformats.org/drawingml/2006/main">
             <a:pPr algn="l">
+              <a:buNone/>
               <a:defRPr sz="1350" b="0" i="0">
                 <a:solidFill>
                   <a:srgbClr val="61786E"/>
@@ -3313,6 +3327,7 @@
           <a:lstStyle xmlns:a="http://schemas.openxmlformats.org/drawingml/2006/main"/>
           <a:p xmlns:a="http://schemas.openxmlformats.org/drawingml/2006/main">
             <a:pPr algn="ctr">
+              <a:buNone/>
               <a:defRPr sz="1800" b="1" i="0">
                 <a:solidFill>
                   <a:srgbClr val="F7FBF8"/>
@@ -3363,6 +3378,7 @@
           <a:lstStyle xmlns:a="http://schemas.openxmlformats.org/drawingml/2006/main"/>
           <a:p xmlns:a="http://schemas.openxmlformats.org/drawingml/2006/main">
             <a:pPr algn="ctr">
+              <a:buNone/>
               <a:defRPr sz="1350" b="0" i="0">
                 <a:solidFill>
                   <a:srgbClr val="61786E"/>
@@ -3475,6 +3491,7 @@
           <a:lstStyle xmlns:a="http://schemas.openxmlformats.org/drawingml/2006/main"/>
           <a:p xmlns:a="http://schemas.openxmlformats.org/drawingml/2006/main">
             <a:pPr algn="l">
+              <a:buNone/>
               <a:defRPr sz="1125" b="1" i="0">
                 <a:solidFill>
                   <a:srgbClr val="48B985"/>
@@ -3525,6 +3542,7 @@
           <a:lstStyle xmlns:a="http://schemas.openxmlformats.org/drawingml/2006/main"/>
           <a:p xmlns:a="http://schemas.openxmlformats.org/drawingml/2006/main">
             <a:pPr algn="l">
+              <a:buNone/>
               <a:defRPr sz="3150" b="1" i="0">
                 <a:solidFill>
                   <a:srgbClr val="163C2C"/>
@@ -3575,6 +3593,7 @@
           <a:lstStyle xmlns:a="http://schemas.openxmlformats.org/drawingml/2006/main"/>
           <a:p xmlns:a="http://schemas.openxmlformats.org/drawingml/2006/main">
             <a:pPr algn="l">
+              <a:buNone/>
               <a:defRPr sz="1500" b="0" i="0">
                 <a:solidFill>
                   <a:srgbClr val="61786E"/>
@@ -3656,6 +3675,7 @@
           <a:lstStyle xmlns:a="http://schemas.openxmlformats.org/drawingml/2006/main"/>
           <a:p xmlns:a="http://schemas.openxmlformats.org/drawingml/2006/main">
             <a:pPr algn="l">
+              <a:buNone/>
               <a:defRPr sz="900" b="1" i="0">
                 <a:solidFill>
                   <a:srgbClr val="7F9389"/>
@@ -3706,6 +3726,7 @@
           <a:lstStyle xmlns:a="http://schemas.openxmlformats.org/drawingml/2006/main"/>
           <a:p xmlns:a="http://schemas.openxmlformats.org/drawingml/2006/main">
             <a:pPr algn="r">
+              <a:buNone/>
               <a:defRPr sz="900" b="1" i="0">
                 <a:solidFill>
                   <a:srgbClr val="7F9389"/>
@@ -3756,6 +3777,7 @@
           <a:lstStyle xmlns:a="http://schemas.openxmlformats.org/drawingml/2006/main"/>
           <a:p xmlns:a="http://schemas.openxmlformats.org/drawingml/2006/main">
             <a:pPr algn="l">
+              <a:buNone/>
               <a:defRPr sz="1350" b="1" i="0">
                 <a:solidFill>
                   <a:srgbClr val="159A64"/>
@@ -3806,6 +3828,7 @@
           <a:lstStyle xmlns:a="http://schemas.openxmlformats.org/drawingml/2006/main"/>
           <a:p xmlns:a="http://schemas.openxmlformats.org/drawingml/2006/main">
             <a:pPr algn="l">
+              <a:buNone/>
               <a:defRPr sz="1800" b="1" i="0">
                 <a:solidFill>
                   <a:srgbClr val="163C2C"/>
@@ -3856,6 +3879,7 @@
           <a:lstStyle xmlns:a="http://schemas.openxmlformats.org/drawingml/2006/main"/>
           <a:p xmlns:a="http://schemas.openxmlformats.org/drawingml/2006/main">
             <a:pPr algn="l">
+              <a:buNone/>
               <a:defRPr sz="1650" b="0" i="0">
                 <a:solidFill>
                   <a:srgbClr val="61786E"/>
@@ -3937,6 +3961,7 @@
           <a:lstStyle xmlns:a="http://schemas.openxmlformats.org/drawingml/2006/main"/>
           <a:p xmlns:a="http://schemas.openxmlformats.org/drawingml/2006/main">
             <a:pPr algn="l">
+              <a:buNone/>
               <a:defRPr sz="1350" b="1" i="0">
                 <a:solidFill>
                   <a:srgbClr val="D05B65"/>
@@ -3987,6 +4012,7 @@
           <a:lstStyle xmlns:a="http://schemas.openxmlformats.org/drawingml/2006/main"/>
           <a:p xmlns:a="http://schemas.openxmlformats.org/drawingml/2006/main">
             <a:pPr algn="l">
+              <a:buNone/>
               <a:defRPr sz="1800" b="1" i="0">
                 <a:solidFill>
                   <a:srgbClr val="163C2C"/>
@@ -4037,6 +4063,7 @@
           <a:lstStyle xmlns:a="http://schemas.openxmlformats.org/drawingml/2006/main"/>
           <a:p xmlns:a="http://schemas.openxmlformats.org/drawingml/2006/main">
             <a:pPr algn="l">
+              <a:buNone/>
               <a:defRPr sz="1650" b="0" i="0">
                 <a:solidFill>
                   <a:srgbClr val="61786E"/>
@@ -4118,6 +4145,7 @@
           <a:lstStyle xmlns:a="http://schemas.openxmlformats.org/drawingml/2006/main"/>
           <a:p xmlns:a="http://schemas.openxmlformats.org/drawingml/2006/main">
             <a:pPr algn="l">
+              <a:buNone/>
               <a:defRPr sz="1350" b="1" i="0">
                 <a:solidFill>
                   <a:srgbClr val="7FA847"/>
@@ -4168,6 +4196,7 @@
           <a:lstStyle xmlns:a="http://schemas.openxmlformats.org/drawingml/2006/main"/>
           <a:p xmlns:a="http://schemas.openxmlformats.org/drawingml/2006/main">
             <a:pPr algn="l">
+              <a:buNone/>
               <a:defRPr sz="1800" b="1" i="0">
                 <a:solidFill>
                   <a:srgbClr val="163C2C"/>
@@ -4218,6 +4247,7 @@
           <a:lstStyle xmlns:a="http://schemas.openxmlformats.org/drawingml/2006/main"/>
           <a:p xmlns:a="http://schemas.openxmlformats.org/drawingml/2006/main">
             <a:pPr algn="l">
+              <a:buNone/>
               <a:defRPr sz="1650" b="0" i="0">
                 <a:solidFill>
                   <a:srgbClr val="61786E"/>
@@ -4299,6 +4329,7 @@
           <a:lstStyle xmlns:a="http://schemas.openxmlformats.org/drawingml/2006/main"/>
           <a:p xmlns:a="http://schemas.openxmlformats.org/drawingml/2006/main">
             <a:pPr algn="l">
+              <a:buNone/>
               <a:defRPr sz="1350" b="1" i="0">
                 <a:solidFill>
                   <a:srgbClr val="48B985"/>
@@ -4349,6 +4380,7 @@
           <a:lstStyle xmlns:a="http://schemas.openxmlformats.org/drawingml/2006/main"/>
           <a:p xmlns:a="http://schemas.openxmlformats.org/drawingml/2006/main">
             <a:pPr algn="l">
+              <a:buNone/>
               <a:defRPr sz="1800" b="1" i="0">
                 <a:solidFill>
                   <a:srgbClr val="163C2C"/>
@@ -4399,6 +4431,7 @@
           <a:lstStyle xmlns:a="http://schemas.openxmlformats.org/drawingml/2006/main"/>
           <a:p xmlns:a="http://schemas.openxmlformats.org/drawingml/2006/main">
             <a:pPr algn="l">
+              <a:buNone/>
               <a:defRPr sz="1650" b="0" i="0">
                 <a:solidFill>
                   <a:srgbClr val="61786E"/>
@@ -4480,6 +4513,7 @@
           <a:lstStyle xmlns:a="http://schemas.openxmlformats.org/drawingml/2006/main"/>
           <a:p xmlns:a="http://schemas.openxmlformats.org/drawingml/2006/main">
             <a:pPr algn="ctr">
+              <a:buNone/>
               <a:defRPr sz="1875" b="1" i="0">
                 <a:solidFill>
                   <a:srgbClr val="48B985"/>
@@ -4592,6 +4626,7 @@
           <a:lstStyle xmlns:a="http://schemas.openxmlformats.org/drawingml/2006/main"/>
           <a:p xmlns:a="http://schemas.openxmlformats.org/drawingml/2006/main">
             <a:pPr algn="l">
+              <a:buNone/>
               <a:defRPr sz="1125" b="1" i="0">
                 <a:solidFill>
                   <a:srgbClr val="159A64"/>
@@ -4642,6 +4677,7 @@
           <a:lstStyle xmlns:a="http://schemas.openxmlformats.org/drawingml/2006/main"/>
           <a:p xmlns:a="http://schemas.openxmlformats.org/drawingml/2006/main">
             <a:pPr algn="l">
+              <a:buNone/>
               <a:defRPr sz="3150" b="1" i="0">
                 <a:solidFill>
                   <a:srgbClr val="163C2C"/>
@@ -4692,6 +4728,7 @@
           <a:lstStyle xmlns:a="http://schemas.openxmlformats.org/drawingml/2006/main"/>
           <a:p xmlns:a="http://schemas.openxmlformats.org/drawingml/2006/main">
             <a:pPr algn="l">
+              <a:buNone/>
               <a:defRPr sz="1500" b="0" i="0">
                 <a:solidFill>
                   <a:srgbClr val="61786E"/>
@@ -4773,6 +4810,7 @@
           <a:lstStyle xmlns:a="http://schemas.openxmlformats.org/drawingml/2006/main"/>
           <a:p xmlns:a="http://schemas.openxmlformats.org/drawingml/2006/main">
             <a:pPr algn="l">
+              <a:buNone/>
               <a:defRPr sz="900" b="1" i="0">
                 <a:solidFill>
                   <a:srgbClr val="7F9389"/>
@@ -4823,6 +4861,7 @@
           <a:lstStyle xmlns:a="http://schemas.openxmlformats.org/drawingml/2006/main"/>
           <a:p xmlns:a="http://schemas.openxmlformats.org/drawingml/2006/main">
             <a:pPr algn="r">
+              <a:buNone/>
               <a:defRPr sz="900" b="1" i="0">
                 <a:solidFill>
                   <a:srgbClr val="7F9389"/>
@@ -4873,6 +4912,7 @@
           <a:lstStyle xmlns:a="http://schemas.openxmlformats.org/drawingml/2006/main"/>
           <a:p xmlns:a="http://schemas.openxmlformats.org/drawingml/2006/main">
             <a:pPr algn="l">
+              <a:buNone/>
               <a:defRPr sz="1350" b="1" i="0">
                 <a:solidFill>
                   <a:srgbClr val="48B985"/>
@@ -5352,6 +5392,7 @@
           <a:lstStyle xmlns:a="http://schemas.openxmlformats.org/drawingml/2006/main"/>
           <a:p xmlns:a="http://schemas.openxmlformats.org/drawingml/2006/main">
             <a:pPr algn="l">
+              <a:buNone/>
               <a:defRPr sz="1350" b="1" i="0">
                 <a:solidFill>
                   <a:srgbClr val="159A64"/>
@@ -6029,6 +6070,7 @@
           <a:lstStyle xmlns:a="http://schemas.openxmlformats.org/drawingml/2006/main"/>
           <a:p xmlns:a="http://schemas.openxmlformats.org/drawingml/2006/main">
             <a:pPr algn="ctr">
+              <a:buNone/>
               <a:defRPr sz="1275" b="1" i="0">
                 <a:solidFill>
                   <a:srgbClr val="D05B65"/>
@@ -6079,6 +6121,7 @@
           <a:lstStyle xmlns:a="http://schemas.openxmlformats.org/drawingml/2006/main"/>
           <a:p xmlns:a="http://schemas.openxmlformats.org/drawingml/2006/main">
             <a:pPr algn="l">
+              <a:buNone/>
               <a:defRPr sz="1500" b="1" i="0">
                 <a:solidFill>
                   <a:srgbClr val="7FA847"/>
@@ -6129,6 +6172,7 @@
           <a:lstStyle xmlns:a="http://schemas.openxmlformats.org/drawingml/2006/main"/>
           <a:p xmlns:a="http://schemas.openxmlformats.org/drawingml/2006/main">
             <a:pPr algn="l">
+              <a:buNone/>
               <a:defRPr sz="1500" b="0" i="0">
                 <a:solidFill>
                   <a:srgbClr val="163C2C"/>
@@ -6179,6 +6223,7 @@
           <a:lstStyle xmlns:a="http://schemas.openxmlformats.org/drawingml/2006/main"/>
           <a:p xmlns:a="http://schemas.openxmlformats.org/drawingml/2006/main">
             <a:pPr algn="l">
+              <a:buNone/>
               <a:defRPr sz="1500" b="1" i="0">
                 <a:solidFill>
                   <a:srgbClr val="D05B65"/>
@@ -6229,6 +6274,7 @@
           <a:lstStyle xmlns:a="http://schemas.openxmlformats.org/drawingml/2006/main"/>
           <a:p xmlns:a="http://schemas.openxmlformats.org/drawingml/2006/main">
             <a:pPr algn="l">
+              <a:buNone/>
               <a:defRPr sz="1500" b="0" i="0">
                 <a:solidFill>
                   <a:srgbClr val="163C2C"/>
@@ -6279,6 +6325,7 @@
           <a:lstStyle xmlns:a="http://schemas.openxmlformats.org/drawingml/2006/main"/>
           <a:p xmlns:a="http://schemas.openxmlformats.org/drawingml/2006/main">
             <a:pPr algn="l">
+              <a:buNone/>
               <a:defRPr sz="1500" b="1" i="0">
                 <a:solidFill>
                   <a:srgbClr val="48B985"/>
@@ -6329,6 +6376,7 @@
           <a:lstStyle xmlns:a="http://schemas.openxmlformats.org/drawingml/2006/main"/>
           <a:p xmlns:a="http://schemas.openxmlformats.org/drawingml/2006/main">
             <a:pPr algn="l">
+              <a:buNone/>
               <a:defRPr sz="1500" b="0" i="0">
                 <a:solidFill>
                   <a:srgbClr val="163C2C"/>
@@ -6379,6 +6427,7 @@
           <a:lstStyle xmlns:a="http://schemas.openxmlformats.org/drawingml/2006/main"/>
           <a:p xmlns:a="http://schemas.openxmlformats.org/drawingml/2006/main">
             <a:pPr algn="ctr">
+              <a:buNone/>
               <a:defRPr sz="1725" b="1" i="0">
                 <a:solidFill>
                   <a:srgbClr val="48B985"/>
@@ -6491,6 +6540,7 @@
           <a:lstStyle xmlns:a="http://schemas.openxmlformats.org/drawingml/2006/main"/>
           <a:p xmlns:a="http://schemas.openxmlformats.org/drawingml/2006/main">
             <a:pPr algn="l">
+              <a:buNone/>
               <a:defRPr sz="1125" b="1" i="0">
                 <a:solidFill>
                   <a:srgbClr val="159A64"/>
@@ -6541,6 +6591,7 @@
           <a:lstStyle xmlns:a="http://schemas.openxmlformats.org/drawingml/2006/main"/>
           <a:p xmlns:a="http://schemas.openxmlformats.org/drawingml/2006/main">
             <a:pPr algn="l">
+              <a:buNone/>
               <a:defRPr sz="3150" b="1" i="0">
                 <a:solidFill>
                   <a:srgbClr val="163C2C"/>
@@ -6591,6 +6642,7 @@
           <a:lstStyle xmlns:a="http://schemas.openxmlformats.org/drawingml/2006/main"/>
           <a:p xmlns:a="http://schemas.openxmlformats.org/drawingml/2006/main">
             <a:pPr algn="l">
+              <a:buNone/>
               <a:defRPr sz="1500" b="0" i="0">
                 <a:solidFill>
                   <a:srgbClr val="61786E"/>
@@ -6672,6 +6724,7 @@
           <a:lstStyle xmlns:a="http://schemas.openxmlformats.org/drawingml/2006/main"/>
           <a:p xmlns:a="http://schemas.openxmlformats.org/drawingml/2006/main">
             <a:pPr algn="l">
+              <a:buNone/>
               <a:defRPr sz="900" b="1" i="0">
                 <a:solidFill>
                   <a:srgbClr val="7F9389"/>
@@ -6722,6 +6775,7 @@
           <a:lstStyle xmlns:a="http://schemas.openxmlformats.org/drawingml/2006/main"/>
           <a:p xmlns:a="http://schemas.openxmlformats.org/drawingml/2006/main">
             <a:pPr algn="r">
+              <a:buNone/>
               <a:defRPr sz="900" b="1" i="0">
                 <a:solidFill>
                   <a:srgbClr val="7F9389"/>
@@ -6805,6 +6859,7 @@
           <a:lstStyle xmlns:a="http://schemas.openxmlformats.org/drawingml/2006/main"/>
           <a:p xmlns:a="http://schemas.openxmlformats.org/drawingml/2006/main">
             <a:pPr algn="ctr">
+              <a:buNone/>
               <a:defRPr sz="1350" b="1" i="0">
                 <a:solidFill>
                   <a:srgbClr val="48B985"/>
@@ -6888,6 +6943,7 @@
           <a:lstStyle xmlns:a="http://schemas.openxmlformats.org/drawingml/2006/main"/>
           <a:p xmlns:a="http://schemas.openxmlformats.org/drawingml/2006/main">
             <a:pPr algn="ctr">
+              <a:buNone/>
               <a:defRPr sz="1350" b="1" i="0">
                 <a:solidFill>
                   <a:srgbClr val="159A64"/>
@@ -6973,6 +7029,7 @@
           <a:lstStyle xmlns:a="http://schemas.openxmlformats.org/drawingml/2006/main"/>
           <a:p xmlns:a="http://schemas.openxmlformats.org/drawingml/2006/main">
             <a:pPr algn="ctr">
+              <a:buNone/>
               <a:defRPr sz="1575" b="1" i="0">
                 <a:solidFill>
                   <a:srgbClr val="163C2C"/>
@@ -7023,6 +7080,7 @@
           <a:lstStyle xmlns:a="http://schemas.openxmlformats.org/drawingml/2006/main"/>
           <a:p xmlns:a="http://schemas.openxmlformats.org/drawingml/2006/main">
             <a:pPr algn="ctr">
+              <a:buNone/>
               <a:defRPr sz="1350" b="0" i="0">
                 <a:solidFill>
                   <a:srgbClr val="61786E"/>
@@ -7108,6 +7166,7 @@
           <a:lstStyle xmlns:a="http://schemas.openxmlformats.org/drawingml/2006/main"/>
           <a:p xmlns:a="http://schemas.openxmlformats.org/drawingml/2006/main">
             <a:pPr algn="ctr">
+              <a:buNone/>
               <a:defRPr sz="1575" b="1" i="0">
                 <a:solidFill>
                   <a:srgbClr val="163C2C"/>
@@ -7158,6 +7217,7 @@
           <a:lstStyle xmlns:a="http://schemas.openxmlformats.org/drawingml/2006/main"/>
           <a:p xmlns:a="http://schemas.openxmlformats.org/drawingml/2006/main">
             <a:pPr algn="ctr">
+              <a:buNone/>
               <a:defRPr sz="1350" b="0" i="0">
                 <a:solidFill>
                   <a:srgbClr val="61786E"/>
@@ -7243,6 +7303,7 @@
           <a:lstStyle xmlns:a="http://schemas.openxmlformats.org/drawingml/2006/main"/>
           <a:p xmlns:a="http://schemas.openxmlformats.org/drawingml/2006/main">
             <a:pPr algn="ctr">
+              <a:buNone/>
               <a:defRPr sz="1575" b="1" i="0">
                 <a:solidFill>
                   <a:srgbClr val="48B985"/>
@@ -7293,6 +7354,7 @@
           <a:lstStyle xmlns:a="http://schemas.openxmlformats.org/drawingml/2006/main"/>
           <a:p xmlns:a="http://schemas.openxmlformats.org/drawingml/2006/main">
             <a:pPr algn="ctr">
+              <a:buNone/>
               <a:defRPr sz="1350" b="0" i="0">
                 <a:solidFill>
                   <a:srgbClr val="61786E"/>
@@ -7378,6 +7440,7 @@
           <a:lstStyle xmlns:a="http://schemas.openxmlformats.org/drawingml/2006/main"/>
           <a:p xmlns:a="http://schemas.openxmlformats.org/drawingml/2006/main">
             <a:pPr algn="ctr">
+              <a:buNone/>
               <a:defRPr sz="1575" b="1" i="0">
                 <a:solidFill>
                   <a:srgbClr val="159A64"/>
@@ -7428,6 +7491,7 @@
           <a:lstStyle xmlns:a="http://schemas.openxmlformats.org/drawingml/2006/main"/>
           <a:p xmlns:a="http://schemas.openxmlformats.org/drawingml/2006/main">
             <a:pPr algn="ctr">
+              <a:buNone/>
               <a:defRPr sz="1350" b="0" i="0">
                 <a:solidFill>
                   <a:srgbClr val="61786E"/>
@@ -7478,6 +7542,7 @@
           <a:lstStyle xmlns:a="http://schemas.openxmlformats.org/drawingml/2006/main"/>
           <a:p xmlns:a="http://schemas.openxmlformats.org/drawingml/2006/main">
             <a:pPr algn="ctr">
+              <a:buNone/>
               <a:defRPr sz="1350" b="1" i="0">
                 <a:solidFill>
                   <a:srgbClr val="48B985"/>
@@ -7528,6 +7593,7 @@
           <a:lstStyle xmlns:a="http://schemas.openxmlformats.org/drawingml/2006/main"/>
           <a:p xmlns:a="http://schemas.openxmlformats.org/drawingml/2006/main">
             <a:pPr algn="ctr">
+              <a:buNone/>
               <a:defRPr sz="1650" b="1" i="0">
                 <a:solidFill>
                   <a:srgbClr val="61786E"/>
@@ -7578,6 +7644,7 @@
           <a:lstStyle xmlns:a="http://schemas.openxmlformats.org/drawingml/2006/main"/>
           <a:p xmlns:a="http://schemas.openxmlformats.org/drawingml/2006/main">
             <a:pPr algn="ctr">
+              <a:buNone/>
               <a:defRPr sz="1350" b="1" i="0">
                 <a:solidFill>
                   <a:srgbClr val="159A64"/>
@@ -7690,6 +7757,7 @@
           <a:lstStyle xmlns:a="http://schemas.openxmlformats.org/drawingml/2006/main"/>
           <a:p xmlns:a="http://schemas.openxmlformats.org/drawingml/2006/main">
             <a:pPr algn="l">
+              <a:buNone/>
               <a:defRPr sz="1125" b="1" i="0">
                 <a:solidFill>
                   <a:srgbClr val="159A64"/>
@@ -7740,6 +7808,7 @@
           <a:lstStyle xmlns:a="http://schemas.openxmlformats.org/drawingml/2006/main"/>
           <a:p xmlns:a="http://schemas.openxmlformats.org/drawingml/2006/main">
             <a:pPr algn="l">
+              <a:buNone/>
               <a:defRPr sz="3150" b="1" i="0">
                 <a:solidFill>
                   <a:srgbClr val="163C2C"/>
@@ -7790,6 +7859,7 @@
           <a:lstStyle xmlns:a="http://schemas.openxmlformats.org/drawingml/2006/main"/>
           <a:p xmlns:a="http://schemas.openxmlformats.org/drawingml/2006/main">
             <a:pPr algn="l">
+              <a:buNone/>
               <a:defRPr sz="1500" b="0" i="0">
                 <a:solidFill>
                   <a:srgbClr val="61786E"/>
@@ -7871,6 +7941,7 @@
           <a:lstStyle xmlns:a="http://schemas.openxmlformats.org/drawingml/2006/main"/>
           <a:p xmlns:a="http://schemas.openxmlformats.org/drawingml/2006/main">
             <a:pPr algn="l">
+              <a:buNone/>
               <a:defRPr sz="900" b="1" i="0">
                 <a:solidFill>
                   <a:srgbClr val="7F9389"/>
@@ -7921,6 +7992,7 @@
           <a:lstStyle xmlns:a="http://schemas.openxmlformats.org/drawingml/2006/main"/>
           <a:p xmlns:a="http://schemas.openxmlformats.org/drawingml/2006/main">
             <a:pPr algn="r">
+              <a:buNone/>
               <a:defRPr sz="900" b="1" i="0">
                 <a:solidFill>
                   <a:srgbClr val="7F9389"/>
@@ -8132,6 +8204,7 @@
           <a:lstStyle xmlns:a="http://schemas.openxmlformats.org/drawingml/2006/main"/>
           <a:p xmlns:a="http://schemas.openxmlformats.org/drawingml/2006/main">
             <a:pPr algn="l">
+              <a:buNone/>
               <a:defRPr sz="1200" b="0" i="0">
                 <a:solidFill>
                   <a:srgbClr val="F7FBF8"/>
@@ -8149,6 +8222,7 @@
           </a:p>
           <a:p xmlns:a="http://schemas.openxmlformats.org/drawingml/2006/main">
             <a:pPr algn="l">
+              <a:buNone/>
               <a:defRPr sz="1200" b="0" i="0">
                 <a:solidFill>
                   <a:srgbClr val="F7FBF8"/>
@@ -8166,6 +8240,7 @@
           </a:p>
           <a:p xmlns:a="http://schemas.openxmlformats.org/drawingml/2006/main">
             <a:pPr algn="l">
+              <a:buNone/>
               <a:defRPr sz="1200" b="0" i="0">
                 <a:solidFill>
                   <a:srgbClr val="F7FBF8"/>
@@ -8183,6 +8258,7 @@
           </a:p>
           <a:p xmlns:a="http://schemas.openxmlformats.org/drawingml/2006/main">
             <a:pPr algn="l">
+              <a:buNone/>
               <a:defRPr sz="1200" b="0" i="0">
                 <a:solidFill>
                   <a:srgbClr val="F7FBF8"/>
@@ -8200,6 +8276,7 @@
           </a:p>
           <a:p xmlns:a="http://schemas.openxmlformats.org/drawingml/2006/main">
             <a:pPr algn="l">
+              <a:buNone/>
               <a:defRPr sz="1200" b="0" i="0">
                 <a:solidFill>
                   <a:srgbClr val="F7FBF8"/>
@@ -8217,6 +8294,7 @@
           </a:p>
           <a:p xmlns:a="http://schemas.openxmlformats.org/drawingml/2006/main">
             <a:pPr algn="l">
+              <a:buNone/>
               <a:defRPr sz="1200" b="0" i="0">
                 <a:solidFill>
                   <a:srgbClr val="F7FBF8"/>
@@ -8234,6 +8312,7 @@
           </a:p>
           <a:p xmlns:a="http://schemas.openxmlformats.org/drawingml/2006/main">
             <a:pPr algn="l">
+              <a:buNone/>
               <a:defRPr sz="1200" b="0" i="0">
                 <a:solidFill>
                   <a:srgbClr val="F7FBF8"/>
@@ -8284,6 +8363,7 @@
           <a:lstStyle xmlns:a="http://schemas.openxmlformats.org/drawingml/2006/main"/>
           <a:p xmlns:a="http://schemas.openxmlformats.org/drawingml/2006/main">
             <a:pPr algn="l">
+              <a:buNone/>
               <a:defRPr sz="1275" b="1" i="0">
                 <a:solidFill>
                   <a:srgbClr val="159A64"/>
@@ -8334,6 +8414,7 @@
           <a:lstStyle xmlns:a="http://schemas.openxmlformats.org/drawingml/2006/main"/>
           <a:p xmlns:a="http://schemas.openxmlformats.org/drawingml/2006/main">
             <a:pPr algn="l">
+              <a:buNone/>
               <a:defRPr sz="1500" b="0" i="0">
                 <a:solidFill>
                   <a:srgbClr val="163C2C"/>
@@ -8415,6 +8496,7 @@
           <a:lstStyle xmlns:a="http://schemas.openxmlformats.org/drawingml/2006/main"/>
           <a:p xmlns:a="http://schemas.openxmlformats.org/drawingml/2006/main">
             <a:pPr algn="l">
+              <a:buNone/>
               <a:defRPr sz="1275" b="1" i="0">
                 <a:solidFill>
                   <a:srgbClr val="48B985"/>
@@ -8465,6 +8547,7 @@
           <a:lstStyle xmlns:a="http://schemas.openxmlformats.org/drawingml/2006/main"/>
           <a:p xmlns:a="http://schemas.openxmlformats.org/drawingml/2006/main">
             <a:pPr algn="l">
+              <a:buNone/>
               <a:defRPr sz="1500" b="0" i="0">
                 <a:solidFill>
                   <a:srgbClr val="163C2C"/>
@@ -8546,6 +8629,7 @@
           <a:lstStyle xmlns:a="http://schemas.openxmlformats.org/drawingml/2006/main"/>
           <a:p xmlns:a="http://schemas.openxmlformats.org/drawingml/2006/main">
             <a:pPr algn="l">
+              <a:buNone/>
               <a:defRPr sz="1275" b="1" i="0">
                 <a:solidFill>
                   <a:srgbClr val="7FA847"/>
@@ -8596,6 +8680,7 @@
           <a:lstStyle xmlns:a="http://schemas.openxmlformats.org/drawingml/2006/main"/>
           <a:p xmlns:a="http://schemas.openxmlformats.org/drawingml/2006/main">
             <a:pPr algn="l">
+              <a:buNone/>
               <a:defRPr sz="1500" b="0" i="0">
                 <a:solidFill>
                   <a:srgbClr val="163C2C"/>
@@ -8677,6 +8762,7 @@
           <a:lstStyle xmlns:a="http://schemas.openxmlformats.org/drawingml/2006/main"/>
           <a:p xmlns:a="http://schemas.openxmlformats.org/drawingml/2006/main">
             <a:pPr algn="l">
+              <a:buNone/>
               <a:defRPr sz="1275" b="1" i="0">
                 <a:solidFill>
                   <a:srgbClr val="D05B65"/>
@@ -8727,6 +8813,7 @@
           <a:lstStyle xmlns:a="http://schemas.openxmlformats.org/drawingml/2006/main"/>
           <a:p xmlns:a="http://schemas.openxmlformats.org/drawingml/2006/main">
             <a:pPr algn="l">
+              <a:buNone/>
               <a:defRPr sz="1500" b="0" i="0">
                 <a:solidFill>
                   <a:srgbClr val="163C2C"/>
@@ -8808,6 +8895,7 @@
           <a:lstStyle xmlns:a="http://schemas.openxmlformats.org/drawingml/2006/main"/>
           <a:p xmlns:a="http://schemas.openxmlformats.org/drawingml/2006/main">
             <a:pPr algn="l">
+              <a:buNone/>
               <a:defRPr sz="1575" b="1" i="0">
                 <a:solidFill>
                   <a:srgbClr val="48B985"/>
@@ -8920,6 +9008,7 @@
           <a:lstStyle xmlns:a="http://schemas.openxmlformats.org/drawingml/2006/main"/>
           <a:p xmlns:a="http://schemas.openxmlformats.org/drawingml/2006/main">
             <a:pPr algn="l">
+              <a:buNone/>
               <a:defRPr sz="1125" b="1" i="0">
                 <a:solidFill>
                   <a:srgbClr val="159A64"/>
@@ -8970,6 +9059,7 @@
           <a:lstStyle xmlns:a="http://schemas.openxmlformats.org/drawingml/2006/main"/>
           <a:p xmlns:a="http://schemas.openxmlformats.org/drawingml/2006/main">
             <a:pPr algn="l">
+              <a:buNone/>
               <a:defRPr sz="3150" b="1" i="0">
                 <a:solidFill>
                   <a:srgbClr val="163C2C"/>
@@ -9020,6 +9110,7 @@
           <a:lstStyle xmlns:a="http://schemas.openxmlformats.org/drawingml/2006/main"/>
           <a:p xmlns:a="http://schemas.openxmlformats.org/drawingml/2006/main">
             <a:pPr algn="l">
+              <a:buNone/>
               <a:defRPr sz="1500" b="0" i="0">
                 <a:solidFill>
                   <a:srgbClr val="61786E"/>
@@ -9101,6 +9192,7 @@
           <a:lstStyle xmlns:a="http://schemas.openxmlformats.org/drawingml/2006/main"/>
           <a:p xmlns:a="http://schemas.openxmlformats.org/drawingml/2006/main">
             <a:pPr algn="l">
+              <a:buNone/>
               <a:defRPr sz="900" b="1" i="0">
                 <a:solidFill>
                   <a:srgbClr val="7F9389"/>
@@ -9151,6 +9243,7 @@
           <a:lstStyle xmlns:a="http://schemas.openxmlformats.org/drawingml/2006/main"/>
           <a:p xmlns:a="http://schemas.openxmlformats.org/drawingml/2006/main">
             <a:pPr algn="r">
+              <a:buNone/>
               <a:defRPr sz="900" b="1" i="0">
                 <a:solidFill>
                   <a:srgbClr val="7F9389"/>
@@ -9263,6 +9356,7 @@
           <a:lstStyle xmlns:a="http://schemas.openxmlformats.org/drawingml/2006/main"/>
           <a:p xmlns:a="http://schemas.openxmlformats.org/drawingml/2006/main">
             <a:pPr algn="ctr">
+              <a:buNone/>
               <a:defRPr sz="1350" b="1" i="0">
                 <a:solidFill>
                   <a:srgbClr val="159A64"/>
@@ -9313,6 +9407,7 @@
           <a:lstStyle xmlns:a="http://schemas.openxmlformats.org/drawingml/2006/main"/>
           <a:p xmlns:a="http://schemas.openxmlformats.org/drawingml/2006/main">
             <a:pPr algn="ctr">
+              <a:buNone/>
               <a:defRPr sz="1200" b="1" i="0">
                 <a:solidFill>
                   <a:srgbClr val="163C2C"/>
@@ -9394,6 +9489,7 @@
           <a:lstStyle xmlns:a="http://schemas.openxmlformats.org/drawingml/2006/main"/>
           <a:p xmlns:a="http://schemas.openxmlformats.org/drawingml/2006/main">
             <a:pPr algn="ctr">
+              <a:buNone/>
               <a:defRPr sz="1350" b="1" i="0">
                 <a:solidFill>
                   <a:srgbClr val="7FA847"/>
@@ -9444,6 +9540,7 @@
           <a:lstStyle xmlns:a="http://schemas.openxmlformats.org/drawingml/2006/main"/>
           <a:p xmlns:a="http://schemas.openxmlformats.org/drawingml/2006/main">
             <a:pPr algn="ctr">
+              <a:buNone/>
               <a:defRPr sz="1200" b="1" i="0">
                 <a:solidFill>
                   <a:srgbClr val="163C2C"/>
@@ -9525,6 +9622,7 @@
           <a:lstStyle xmlns:a="http://schemas.openxmlformats.org/drawingml/2006/main"/>
           <a:p xmlns:a="http://schemas.openxmlformats.org/drawingml/2006/main">
             <a:pPr algn="ctr">
+              <a:buNone/>
               <a:defRPr sz="1350" b="1" i="0">
                 <a:solidFill>
                   <a:srgbClr val="48B985"/>
@@ -9575,6 +9673,7 @@
           <a:lstStyle xmlns:a="http://schemas.openxmlformats.org/drawingml/2006/main"/>
           <a:p xmlns:a="http://schemas.openxmlformats.org/drawingml/2006/main">
             <a:pPr algn="ctr">
+              <a:buNone/>
               <a:defRPr sz="1200" b="1" i="0">
                 <a:solidFill>
                   <a:srgbClr val="163C2C"/>
@@ -9656,6 +9755,7 @@
           <a:lstStyle xmlns:a="http://schemas.openxmlformats.org/drawingml/2006/main"/>
           <a:p xmlns:a="http://schemas.openxmlformats.org/drawingml/2006/main">
             <a:pPr algn="ctr">
+              <a:buNone/>
               <a:defRPr sz="1350" b="1" i="0">
                 <a:solidFill>
                   <a:srgbClr val="159A64"/>
@@ -9706,6 +9806,7 @@
           <a:lstStyle xmlns:a="http://schemas.openxmlformats.org/drawingml/2006/main"/>
           <a:p xmlns:a="http://schemas.openxmlformats.org/drawingml/2006/main">
             <a:pPr algn="ctr">
+              <a:buNone/>
               <a:defRPr sz="1200" b="1" i="0">
                 <a:solidFill>
                   <a:srgbClr val="163C2C"/>
@@ -9789,6 +9890,7 @@
           <a:lstStyle xmlns:a="http://schemas.openxmlformats.org/drawingml/2006/main"/>
           <a:p xmlns:a="http://schemas.openxmlformats.org/drawingml/2006/main">
             <a:pPr algn="ctr">
+              <a:buNone/>
               <a:defRPr sz="1650" b="1" i="0">
                 <a:solidFill>
                   <a:srgbClr val="F7FBF8"/>
@@ -9874,6 +9976,7 @@
           <a:lstStyle xmlns:a="http://schemas.openxmlformats.org/drawingml/2006/main"/>
           <a:p xmlns:a="http://schemas.openxmlformats.org/drawingml/2006/main">
             <a:pPr algn="ctr">
+              <a:buNone/>
               <a:defRPr sz="1425" b="1" i="0">
                 <a:solidFill>
                   <a:srgbClr val="48B985"/>
@@ -9924,6 +10027,7 @@
           <a:lstStyle xmlns:a="http://schemas.openxmlformats.org/drawingml/2006/main"/>
           <a:p xmlns:a="http://schemas.openxmlformats.org/drawingml/2006/main">
             <a:pPr algn="ctr">
+              <a:buNone/>
               <a:defRPr sz="1275" b="0" i="0">
                 <a:solidFill>
                   <a:srgbClr val="163C2C"/>
@@ -9974,6 +10078,7 @@
           <a:lstStyle xmlns:a="http://schemas.openxmlformats.org/drawingml/2006/main"/>
           <a:p xmlns:a="http://schemas.openxmlformats.org/drawingml/2006/main">
             <a:pPr algn="ctr">
+              <a:buNone/>
               <a:defRPr sz="1425" b="1" i="0">
                 <a:solidFill>
                   <a:srgbClr val="61786E"/>
@@ -10086,6 +10191,7 @@
           <a:lstStyle xmlns:a="http://schemas.openxmlformats.org/drawingml/2006/main"/>
           <a:p xmlns:a="http://schemas.openxmlformats.org/drawingml/2006/main">
             <a:pPr algn="l">
+              <a:buNone/>
               <a:defRPr sz="1125" b="1" i="0">
                 <a:solidFill>
                   <a:srgbClr val="7FA847"/>
@@ -10136,6 +10242,7 @@
           <a:lstStyle xmlns:a="http://schemas.openxmlformats.org/drawingml/2006/main"/>
           <a:p xmlns:a="http://schemas.openxmlformats.org/drawingml/2006/main">
             <a:pPr algn="l">
+              <a:buNone/>
               <a:defRPr sz="3150" b="1" i="0">
                 <a:solidFill>
                   <a:srgbClr val="163C2C"/>
@@ -10186,6 +10293,7 @@
           <a:lstStyle xmlns:a="http://schemas.openxmlformats.org/drawingml/2006/main"/>
           <a:p xmlns:a="http://schemas.openxmlformats.org/drawingml/2006/main">
             <a:pPr algn="l">
+              <a:buNone/>
               <a:defRPr sz="1500" b="0" i="0">
                 <a:solidFill>
                   <a:srgbClr val="61786E"/>
@@ -10267,6 +10375,7 @@
           <a:lstStyle xmlns:a="http://schemas.openxmlformats.org/drawingml/2006/main"/>
           <a:p xmlns:a="http://schemas.openxmlformats.org/drawingml/2006/main">
             <a:pPr algn="l">
+              <a:buNone/>
               <a:defRPr sz="900" b="1" i="0">
                 <a:solidFill>
                   <a:srgbClr val="7F9389"/>
@@ -10317,6 +10426,7 @@
           <a:lstStyle xmlns:a="http://schemas.openxmlformats.org/drawingml/2006/main"/>
           <a:p xmlns:a="http://schemas.openxmlformats.org/drawingml/2006/main">
             <a:pPr algn="r">
+              <a:buNone/>
               <a:defRPr sz="900" b="1" i="0">
                 <a:solidFill>
                   <a:srgbClr val="7F9389"/>
@@ -10367,6 +10477,7 @@
           <a:lstStyle xmlns:a="http://schemas.openxmlformats.org/drawingml/2006/main"/>
           <a:p xmlns:a="http://schemas.openxmlformats.org/drawingml/2006/main">
             <a:pPr algn="l">
+              <a:buNone/>
               <a:defRPr sz="1275" b="1" i="0">
                 <a:solidFill>
                   <a:srgbClr val="159A64"/>
@@ -10417,6 +10528,7 @@
           <a:lstStyle xmlns:a="http://schemas.openxmlformats.org/drawingml/2006/main"/>
           <a:p xmlns:a="http://schemas.openxmlformats.org/drawingml/2006/main">
             <a:pPr algn="l">
+              <a:buNone/>
               <a:defRPr sz="1725" b="1" i="0">
                 <a:solidFill>
                   <a:srgbClr val="163C2C"/>
@@ -10498,6 +10610,7 @@
           <a:lstStyle xmlns:a="http://schemas.openxmlformats.org/drawingml/2006/main"/>
           <a:p xmlns:a="http://schemas.openxmlformats.org/drawingml/2006/main">
             <a:pPr algn="l">
+              <a:buNone/>
               <a:defRPr sz="1500" b="0" i="0">
                 <a:solidFill>
                   <a:srgbClr val="61786E"/>
@@ -10548,6 +10661,7 @@
           <a:lstStyle xmlns:a="http://schemas.openxmlformats.org/drawingml/2006/main"/>
           <a:p xmlns:a="http://schemas.openxmlformats.org/drawingml/2006/main">
             <a:pPr algn="l">
+              <a:buNone/>
               <a:defRPr sz="1275" b="1" i="0">
                 <a:solidFill>
                   <a:srgbClr val="7FA847"/>
@@ -10598,6 +10712,7 @@
           <a:lstStyle xmlns:a="http://schemas.openxmlformats.org/drawingml/2006/main"/>
           <a:p xmlns:a="http://schemas.openxmlformats.org/drawingml/2006/main">
             <a:pPr algn="l">
+              <a:buNone/>
               <a:defRPr sz="1725" b="1" i="0">
                 <a:solidFill>
                   <a:srgbClr val="163C2C"/>
@@ -10679,6 +10794,7 @@
           <a:lstStyle xmlns:a="http://schemas.openxmlformats.org/drawingml/2006/main"/>
           <a:p xmlns:a="http://schemas.openxmlformats.org/drawingml/2006/main">
             <a:pPr algn="l">
+              <a:buNone/>
               <a:defRPr sz="1500" b="0" i="0">
                 <a:solidFill>
                   <a:srgbClr val="61786E"/>
@@ -10729,6 +10845,7 @@
           <a:lstStyle xmlns:a="http://schemas.openxmlformats.org/drawingml/2006/main"/>
           <a:p xmlns:a="http://schemas.openxmlformats.org/drawingml/2006/main">
             <a:pPr algn="l">
+              <a:buNone/>
               <a:defRPr sz="1275" b="1" i="0">
                 <a:solidFill>
                   <a:srgbClr val="48B985"/>
@@ -10779,6 +10896,7 @@
           <a:lstStyle xmlns:a="http://schemas.openxmlformats.org/drawingml/2006/main"/>
           <a:p xmlns:a="http://schemas.openxmlformats.org/drawingml/2006/main">
             <a:pPr algn="l">
+              <a:buNone/>
               <a:defRPr sz="1725" b="1" i="0">
                 <a:solidFill>
                   <a:srgbClr val="163C2C"/>
@@ -10860,6 +10978,7 @@
           <a:lstStyle xmlns:a="http://schemas.openxmlformats.org/drawingml/2006/main"/>
           <a:p xmlns:a="http://schemas.openxmlformats.org/drawingml/2006/main">
             <a:pPr algn="l">
+              <a:buNone/>
               <a:defRPr sz="1500" b="0" i="0">
                 <a:solidFill>
                   <a:srgbClr val="61786E"/>
@@ -10910,6 +11029,7 @@
           <a:lstStyle xmlns:a="http://schemas.openxmlformats.org/drawingml/2006/main"/>
           <a:p xmlns:a="http://schemas.openxmlformats.org/drawingml/2006/main">
             <a:pPr algn="l">
+              <a:buNone/>
               <a:defRPr sz="1275" b="1" i="0">
                 <a:solidFill>
                   <a:srgbClr val="6FAF8D"/>
@@ -10960,6 +11080,7 @@
           <a:lstStyle xmlns:a="http://schemas.openxmlformats.org/drawingml/2006/main"/>
           <a:p xmlns:a="http://schemas.openxmlformats.org/drawingml/2006/main">
             <a:pPr algn="l">
+              <a:buNone/>
               <a:defRPr sz="1725" b="1" i="0">
                 <a:solidFill>
                   <a:srgbClr val="163C2C"/>
@@ -11041,6 +11162,7 @@
           <a:lstStyle xmlns:a="http://schemas.openxmlformats.org/drawingml/2006/main"/>
           <a:p xmlns:a="http://schemas.openxmlformats.org/drawingml/2006/main">
             <a:pPr algn="l">
+              <a:buNone/>
               <a:defRPr sz="1500" b="0" i="0">
                 <a:solidFill>
                   <a:srgbClr val="61786E"/>
@@ -11126,6 +11248,7 @@
           <a:lstStyle xmlns:a="http://schemas.openxmlformats.org/drawingml/2006/main"/>
           <a:p xmlns:a="http://schemas.openxmlformats.org/drawingml/2006/main">
             <a:pPr algn="ctr">
+              <a:buNone/>
               <a:defRPr sz="1575" b="1" i="0">
                 <a:solidFill>
                   <a:srgbClr val="48B985"/>
@@ -11238,6 +11361,7 @@
           <a:lstStyle xmlns:a="http://schemas.openxmlformats.org/drawingml/2006/main"/>
           <a:p xmlns:a="http://schemas.openxmlformats.org/drawingml/2006/main">
             <a:pPr algn="l">
+              <a:buNone/>
               <a:defRPr sz="1125" b="1" i="0">
                 <a:solidFill>
                   <a:srgbClr val="159A64"/>
@@ -11288,6 +11412,7 @@
           <a:lstStyle xmlns:a="http://schemas.openxmlformats.org/drawingml/2006/main"/>
           <a:p xmlns:a="http://schemas.openxmlformats.org/drawingml/2006/main">
             <a:pPr algn="l">
+              <a:buNone/>
               <a:defRPr sz="3150" b="1" i="0">
                 <a:solidFill>
                   <a:srgbClr val="163C2C"/>
@@ -11338,6 +11463,7 @@
           <a:lstStyle xmlns:a="http://schemas.openxmlformats.org/drawingml/2006/main"/>
           <a:p xmlns:a="http://schemas.openxmlformats.org/drawingml/2006/main">
             <a:pPr algn="l">
+              <a:buNone/>
               <a:defRPr sz="1500" b="0" i="0">
                 <a:solidFill>
                   <a:srgbClr val="61786E"/>
@@ -11419,6 +11545,7 @@
           <a:lstStyle xmlns:a="http://schemas.openxmlformats.org/drawingml/2006/main"/>
           <a:p xmlns:a="http://schemas.openxmlformats.org/drawingml/2006/main">
             <a:pPr algn="l">
+              <a:buNone/>
               <a:defRPr sz="900" b="1" i="0">
                 <a:solidFill>
                   <a:srgbClr val="7F9389"/>
@@ -11469,6 +11596,7 @@
           <a:lstStyle xmlns:a="http://schemas.openxmlformats.org/drawingml/2006/main"/>
           <a:p xmlns:a="http://schemas.openxmlformats.org/drawingml/2006/main">
             <a:pPr algn="r">
+              <a:buNone/>
               <a:defRPr sz="900" b="1" i="0">
                 <a:solidFill>
                   <a:srgbClr val="7F9389"/>
@@ -11519,6 +11647,7 @@
           <a:lstStyle xmlns:a="http://schemas.openxmlformats.org/drawingml/2006/main"/>
           <a:p xmlns:a="http://schemas.openxmlformats.org/drawingml/2006/main">
             <a:pPr algn="l">
+              <a:buNone/>
               <a:defRPr sz="1275" b="1" i="0">
                 <a:solidFill>
                   <a:srgbClr val="159A64"/>
@@ -11600,6 +11729,7 @@
           <a:lstStyle xmlns:a="http://schemas.openxmlformats.org/drawingml/2006/main"/>
           <a:p xmlns:a="http://schemas.openxmlformats.org/drawingml/2006/main">
             <a:pPr algn="l">
+              <a:buNone/>
               <a:defRPr sz="1650" b="0" i="0">
                 <a:solidFill>
                   <a:srgbClr val="163C2C"/>
@@ -11650,6 +11780,7 @@
           <a:lstStyle xmlns:a="http://schemas.openxmlformats.org/drawingml/2006/main"/>
           <a:p xmlns:a="http://schemas.openxmlformats.org/drawingml/2006/main">
             <a:pPr algn="l">
+              <a:buNone/>
               <a:defRPr sz="1275" b="1" i="0">
                 <a:solidFill>
                   <a:srgbClr val="6FAF8D"/>
@@ -11731,6 +11862,7 @@
           <a:lstStyle xmlns:a="http://schemas.openxmlformats.org/drawingml/2006/main"/>
           <a:p xmlns:a="http://schemas.openxmlformats.org/drawingml/2006/main">
             <a:pPr algn="l">
+              <a:buNone/>
               <a:defRPr sz="1650" b="0" i="0">
                 <a:solidFill>
                   <a:srgbClr val="163C2C"/>
@@ -11781,6 +11913,7 @@
           <a:lstStyle xmlns:a="http://schemas.openxmlformats.org/drawingml/2006/main"/>
           <a:p xmlns:a="http://schemas.openxmlformats.org/drawingml/2006/main">
             <a:pPr algn="l">
+              <a:buNone/>
               <a:defRPr sz="1275" b="1" i="0">
                 <a:solidFill>
                   <a:srgbClr val="D05B65"/>
@@ -11862,6 +11995,7 @@
           <a:lstStyle xmlns:a="http://schemas.openxmlformats.org/drawingml/2006/main"/>
           <a:p xmlns:a="http://schemas.openxmlformats.org/drawingml/2006/main">
             <a:pPr algn="l">
+              <a:buNone/>
               <a:defRPr sz="1650" b="0" i="0">
                 <a:solidFill>
                   <a:srgbClr val="163C2C"/>
@@ -11912,6 +12046,7 @@
           <a:lstStyle xmlns:a="http://schemas.openxmlformats.org/drawingml/2006/main"/>
           <a:p xmlns:a="http://schemas.openxmlformats.org/drawingml/2006/main">
             <a:pPr algn="l">
+              <a:buNone/>
               <a:defRPr sz="1275" b="1" i="0">
                 <a:solidFill>
                   <a:srgbClr val="48B985"/>
@@ -11993,6 +12128,7 @@
           <a:lstStyle xmlns:a="http://schemas.openxmlformats.org/drawingml/2006/main"/>
           <a:p xmlns:a="http://schemas.openxmlformats.org/drawingml/2006/main">
             <a:pPr algn="l">
+              <a:buNone/>
               <a:defRPr sz="1650" b="0" i="0">
                 <a:solidFill>
                   <a:srgbClr val="163C2C"/>
@@ -12043,6 +12179,7 @@
           <a:lstStyle xmlns:a="http://schemas.openxmlformats.org/drawingml/2006/main"/>
           <a:p xmlns:a="http://schemas.openxmlformats.org/drawingml/2006/main">
             <a:pPr algn="l">
+              <a:buNone/>
               <a:defRPr sz="1275" b="1" i="0">
                 <a:solidFill>
                   <a:srgbClr val="7FA847"/>
@@ -12124,6 +12261,7 @@
           <a:lstStyle xmlns:a="http://schemas.openxmlformats.org/drawingml/2006/main"/>
           <a:p xmlns:a="http://schemas.openxmlformats.org/drawingml/2006/main">
             <a:pPr algn="l">
+              <a:buNone/>
               <a:defRPr sz="1650" b="0" i="0">
                 <a:solidFill>
                   <a:srgbClr val="163C2C"/>
@@ -12174,6 +12312,7 @@
           <a:lstStyle xmlns:a="http://schemas.openxmlformats.org/drawingml/2006/main"/>
           <a:p xmlns:a="http://schemas.openxmlformats.org/drawingml/2006/main">
             <a:pPr algn="ctr">
+              <a:buNone/>
               <a:defRPr sz="1875" b="1" i="0">
                 <a:solidFill>
                   <a:srgbClr val="48B985"/>
@@ -12286,6 +12425,7 @@
           <a:lstStyle xmlns:a="http://schemas.openxmlformats.org/drawingml/2006/main"/>
           <a:p xmlns:a="http://schemas.openxmlformats.org/drawingml/2006/main">
             <a:pPr algn="l">
+              <a:buNone/>
               <a:defRPr sz="1125" b="1" i="0">
                 <a:solidFill>
                   <a:srgbClr val="48B985"/>
@@ -12336,6 +12476,7 @@
           <a:lstStyle xmlns:a="http://schemas.openxmlformats.org/drawingml/2006/main"/>
           <a:p xmlns:a="http://schemas.openxmlformats.org/drawingml/2006/main">
             <a:pPr algn="l">
+              <a:buNone/>
               <a:defRPr sz="3150" b="1" i="0">
                 <a:solidFill>
                   <a:srgbClr val="163C2C"/>
@@ -12386,6 +12527,7 @@
           <a:lstStyle xmlns:a="http://schemas.openxmlformats.org/drawingml/2006/main"/>
           <a:p xmlns:a="http://schemas.openxmlformats.org/drawingml/2006/main">
             <a:pPr algn="l">
+              <a:buNone/>
               <a:defRPr sz="1500" b="0" i="0">
                 <a:solidFill>
                   <a:srgbClr val="61786E"/>
@@ -12467,6 +12609,7 @@
           <a:lstStyle xmlns:a="http://schemas.openxmlformats.org/drawingml/2006/main"/>
           <a:p xmlns:a="http://schemas.openxmlformats.org/drawingml/2006/main">
             <a:pPr algn="l">
+              <a:buNone/>
               <a:defRPr sz="900" b="1" i="0">
                 <a:solidFill>
                   <a:srgbClr val="7F9389"/>
@@ -12517,6 +12660,7 @@
           <a:lstStyle xmlns:a="http://schemas.openxmlformats.org/drawingml/2006/main"/>
           <a:p xmlns:a="http://schemas.openxmlformats.org/drawingml/2006/main">
             <a:pPr algn="r">
+              <a:buNone/>
               <a:defRPr sz="900" b="1" i="0">
                 <a:solidFill>
                   <a:srgbClr val="7F9389"/>
@@ -12598,6 +12742,7 @@
           <a:lstStyle xmlns:a="http://schemas.openxmlformats.org/drawingml/2006/main"/>
           <a:p xmlns:a="http://schemas.openxmlformats.org/drawingml/2006/main">
             <a:pPr algn="ctr">
+              <a:buNone/>
               <a:defRPr sz="1500" b="1" i="0">
                 <a:solidFill>
                   <a:srgbClr val="F7FBF8"/>
@@ -12648,6 +12793,7 @@
           <a:lstStyle xmlns:a="http://schemas.openxmlformats.org/drawingml/2006/main"/>
           <a:p xmlns:a="http://schemas.openxmlformats.org/drawingml/2006/main">
             <a:pPr algn="l">
+              <a:buNone/>
               <a:defRPr sz="1575" b="1" i="0">
                 <a:solidFill>
                   <a:srgbClr val="163C2C"/>
@@ -12698,6 +12844,7 @@
           <a:lstStyle xmlns:a="http://schemas.openxmlformats.org/drawingml/2006/main"/>
           <a:p xmlns:a="http://schemas.openxmlformats.org/drawingml/2006/main">
             <a:pPr algn="l">
+              <a:buNone/>
               <a:defRPr sz="1425" b="0" i="0">
                 <a:solidFill>
                   <a:srgbClr val="61786E"/>
@@ -12810,6 +12957,7 @@
           <a:lstStyle xmlns:a="http://schemas.openxmlformats.org/drawingml/2006/main"/>
           <a:p xmlns:a="http://schemas.openxmlformats.org/drawingml/2006/main">
             <a:pPr algn="ctr">
+              <a:buNone/>
               <a:defRPr sz="1500" b="1" i="0">
                 <a:solidFill>
                   <a:srgbClr val="F7FBF8"/>
@@ -12860,6 +13008,7 @@
           <a:lstStyle xmlns:a="http://schemas.openxmlformats.org/drawingml/2006/main"/>
           <a:p xmlns:a="http://schemas.openxmlformats.org/drawingml/2006/main">
             <a:pPr algn="l">
+              <a:buNone/>
               <a:defRPr sz="1575" b="1" i="0">
                 <a:solidFill>
                   <a:srgbClr val="163C2C"/>
@@ -12910,6 +13059,7 @@
           <a:lstStyle xmlns:a="http://schemas.openxmlformats.org/drawingml/2006/main"/>
           <a:p xmlns:a="http://schemas.openxmlformats.org/drawingml/2006/main">
             <a:pPr algn="l">
+              <a:buNone/>
               <a:defRPr sz="1425" b="0" i="0">
                 <a:solidFill>
                   <a:srgbClr val="61786E"/>
@@ -13022,6 +13172,7 @@
           <a:lstStyle xmlns:a="http://schemas.openxmlformats.org/drawingml/2006/main"/>
           <a:p xmlns:a="http://schemas.openxmlformats.org/drawingml/2006/main">
             <a:pPr algn="ctr">
+              <a:buNone/>
               <a:defRPr sz="1500" b="1" i="0">
                 <a:solidFill>
                   <a:srgbClr val="F7FBF8"/>
@@ -13072,6 +13223,7 @@
           <a:lstStyle xmlns:a="http://schemas.openxmlformats.org/drawingml/2006/main"/>
           <a:p xmlns:a="http://schemas.openxmlformats.org/drawingml/2006/main">
             <a:pPr algn="l">
+              <a:buNone/>
               <a:defRPr sz="1575" b="1" i="0">
                 <a:solidFill>
                   <a:srgbClr val="163C2C"/>
@@ -13122,6 +13274,7 @@
           <a:lstStyle xmlns:a="http://schemas.openxmlformats.org/drawingml/2006/main"/>
           <a:p xmlns:a="http://schemas.openxmlformats.org/drawingml/2006/main">
             <a:pPr algn="l">
+              <a:buNone/>
               <a:defRPr sz="1425" b="0" i="0">
                 <a:solidFill>
                   <a:srgbClr val="61786E"/>
@@ -13203,6 +13356,7 @@
           <a:lstStyle xmlns:a="http://schemas.openxmlformats.org/drawingml/2006/main"/>
           <a:p xmlns:a="http://schemas.openxmlformats.org/drawingml/2006/main">
             <a:pPr algn="l">
+              <a:buNone/>
               <a:defRPr sz="1200" b="1" i="0">
                 <a:solidFill>
                   <a:srgbClr val="D05B65"/>
@@ -13253,6 +13407,7 @@
           <a:lstStyle xmlns:a="http://schemas.openxmlformats.org/drawingml/2006/main"/>
           <a:p xmlns:a="http://schemas.openxmlformats.org/drawingml/2006/main">
             <a:pPr algn="l">
+              <a:buNone/>
               <a:defRPr sz="2175" b="1" i="0">
                 <a:solidFill>
                   <a:srgbClr val="163C2C"/>
@@ -13338,6 +13493,7 @@
           <a:lstStyle xmlns:a="http://schemas.openxmlformats.org/drawingml/2006/main"/>
           <a:p xmlns:a="http://schemas.openxmlformats.org/drawingml/2006/main">
             <a:pPr algn="ctr">
+              <a:buNone/>
               <a:defRPr sz="2100" b="1" i="0">
                 <a:solidFill>
                   <a:srgbClr val="48B985"/>
@@ -13388,6 +13544,7 @@
           <a:lstStyle xmlns:a="http://schemas.openxmlformats.org/drawingml/2006/main"/>
           <a:p xmlns:a="http://schemas.openxmlformats.org/drawingml/2006/main">
             <a:pPr algn="ctr">
+              <a:buNone/>
               <a:defRPr sz="1350" b="0" i="0">
                 <a:solidFill>
                   <a:srgbClr val="61786E"/>
@@ -13500,6 +13657,7 @@
           <a:lstStyle xmlns:a="http://schemas.openxmlformats.org/drawingml/2006/main"/>
           <a:p xmlns:a="http://schemas.openxmlformats.org/drawingml/2006/main">
             <a:pPr algn="l">
+              <a:buNone/>
               <a:defRPr sz="1125" b="1" i="0">
                 <a:solidFill>
                   <a:srgbClr val="159A64"/>
@@ -13550,6 +13708,7 @@
           <a:lstStyle xmlns:a="http://schemas.openxmlformats.org/drawingml/2006/main"/>
           <a:p xmlns:a="http://schemas.openxmlformats.org/drawingml/2006/main">
             <a:pPr algn="l">
+              <a:buNone/>
               <a:defRPr sz="3150" b="1" i="0">
                 <a:solidFill>
                   <a:srgbClr val="163C2C"/>
@@ -13600,6 +13759,7 @@
           <a:lstStyle xmlns:a="http://schemas.openxmlformats.org/drawingml/2006/main"/>
           <a:p xmlns:a="http://schemas.openxmlformats.org/drawingml/2006/main">
             <a:pPr algn="l">
+              <a:buNone/>
               <a:defRPr sz="1500" b="0" i="0">
                 <a:solidFill>
                   <a:srgbClr val="61786E"/>
@@ -13681,6 +13841,7 @@
           <a:lstStyle xmlns:a="http://schemas.openxmlformats.org/drawingml/2006/main"/>
           <a:p xmlns:a="http://schemas.openxmlformats.org/drawingml/2006/main">
             <a:pPr algn="l">
+              <a:buNone/>
               <a:defRPr sz="900" b="1" i="0">
                 <a:solidFill>
                   <a:srgbClr val="7F9389"/>
@@ -13731,6 +13892,7 @@
           <a:lstStyle xmlns:a="http://schemas.openxmlformats.org/drawingml/2006/main"/>
           <a:p xmlns:a="http://schemas.openxmlformats.org/drawingml/2006/main">
             <a:pPr algn="r">
+              <a:buNone/>
               <a:defRPr sz="900" b="1" i="0">
                 <a:solidFill>
                   <a:srgbClr val="7F9389"/>
@@ -13781,6 +13943,7 @@
           <a:lstStyle xmlns:a="http://schemas.openxmlformats.org/drawingml/2006/main"/>
           <a:p xmlns:a="http://schemas.openxmlformats.org/drawingml/2006/main">
             <a:pPr algn="l">
+              <a:buNone/>
               <a:defRPr sz="1425" b="1" i="0">
                 <a:solidFill>
                   <a:srgbClr val="159A64"/>
@@ -13831,6 +13994,7 @@
           <a:lstStyle xmlns:a="http://schemas.openxmlformats.org/drawingml/2006/main"/>
           <a:p xmlns:a="http://schemas.openxmlformats.org/drawingml/2006/main">
             <a:pPr algn="l">
+              <a:buNone/>
               <a:defRPr sz="1875" b="1" i="0">
                 <a:solidFill>
                   <a:srgbClr val="163C2C"/>
@@ -13881,6 +14045,7 @@
           <a:lstStyle xmlns:a="http://schemas.openxmlformats.org/drawingml/2006/main"/>
           <a:p xmlns:a="http://schemas.openxmlformats.org/drawingml/2006/main">
             <a:pPr algn="l">
+              <a:buNone/>
               <a:defRPr sz="1425" b="1" i="0">
                 <a:solidFill>
                   <a:srgbClr val="48B985"/>
@@ -13931,6 +14096,7 @@
           <a:lstStyle xmlns:a="http://schemas.openxmlformats.org/drawingml/2006/main"/>
           <a:p xmlns:a="http://schemas.openxmlformats.org/drawingml/2006/main">
             <a:pPr algn="l">
+              <a:buNone/>
               <a:defRPr sz="1875" b="1" i="0">
                 <a:solidFill>
                   <a:srgbClr val="163C2C"/>
@@ -13981,6 +14147,7 @@
           <a:lstStyle xmlns:a="http://schemas.openxmlformats.org/drawingml/2006/main"/>
           <a:p xmlns:a="http://schemas.openxmlformats.org/drawingml/2006/main">
             <a:pPr algn="l">
+              <a:buNone/>
               <a:defRPr sz="1425" b="1" i="0">
                 <a:solidFill>
                   <a:srgbClr val="7FA847"/>
@@ -14031,6 +14198,7 @@
           <a:lstStyle xmlns:a="http://schemas.openxmlformats.org/drawingml/2006/main"/>
           <a:p xmlns:a="http://schemas.openxmlformats.org/drawingml/2006/main">
             <a:pPr algn="l">
+              <a:buNone/>
               <a:defRPr sz="1875" b="1" i="0">
                 <a:solidFill>
                   <a:srgbClr val="163C2C"/>
@@ -15102,6 +15270,7 @@
           <a:lstStyle xmlns:a="http://schemas.openxmlformats.org/drawingml/2006/main"/>
           <a:p xmlns:a="http://schemas.openxmlformats.org/drawingml/2006/main">
             <a:pPr algn="ctr">
+              <a:buNone/>
               <a:defRPr sz="2100" b="1" i="0">
                 <a:solidFill>
                   <a:srgbClr val="48B985"/>
@@ -15214,6 +15383,7 @@
           <a:lstStyle xmlns:a="http://schemas.openxmlformats.org/drawingml/2006/main"/>
           <a:p xmlns:a="http://schemas.openxmlformats.org/drawingml/2006/main">
             <a:pPr algn="l">
+              <a:buNone/>
               <a:defRPr sz="1125" b="1" i="0">
                 <a:solidFill>
                   <a:srgbClr val="159A64"/>
@@ -15264,6 +15434,7 @@
           <a:lstStyle xmlns:a="http://schemas.openxmlformats.org/drawingml/2006/main"/>
           <a:p xmlns:a="http://schemas.openxmlformats.org/drawingml/2006/main">
             <a:pPr algn="l">
+              <a:buNone/>
               <a:defRPr sz="3150" b="1" i="0">
                 <a:solidFill>
                   <a:srgbClr val="163C2C"/>
@@ -15314,6 +15485,7 @@
           <a:lstStyle xmlns:a="http://schemas.openxmlformats.org/drawingml/2006/main"/>
           <a:p xmlns:a="http://schemas.openxmlformats.org/drawingml/2006/main">
             <a:pPr algn="l">
+              <a:buNone/>
               <a:defRPr sz="1500" b="0" i="0">
                 <a:solidFill>
                   <a:srgbClr val="61786E"/>
@@ -15395,6 +15567,7 @@
           <a:lstStyle xmlns:a="http://schemas.openxmlformats.org/drawingml/2006/main"/>
           <a:p xmlns:a="http://schemas.openxmlformats.org/drawingml/2006/main">
             <a:pPr algn="l">
+              <a:buNone/>
               <a:defRPr sz="900" b="1" i="0">
                 <a:solidFill>
                   <a:srgbClr val="7F9389"/>
@@ -15445,6 +15618,7 @@
           <a:lstStyle xmlns:a="http://schemas.openxmlformats.org/drawingml/2006/main"/>
           <a:p xmlns:a="http://schemas.openxmlformats.org/drawingml/2006/main">
             <a:pPr algn="r">
+              <a:buNone/>
               <a:defRPr sz="900" b="1" i="0">
                 <a:solidFill>
                   <a:srgbClr val="7F9389"/>
@@ -15495,6 +15669,7 @@
           <a:lstStyle xmlns:a="http://schemas.openxmlformats.org/drawingml/2006/main"/>
           <a:p xmlns:a="http://schemas.openxmlformats.org/drawingml/2006/main">
             <a:pPr algn="l">
+              <a:buNone/>
               <a:defRPr sz="2550" b="1" i="0">
                 <a:solidFill>
                   <a:srgbClr val="163C2C"/>
@@ -15545,6 +15720,7 @@
           <a:lstStyle xmlns:a="http://schemas.openxmlformats.org/drawingml/2006/main"/>
           <a:p xmlns:a="http://schemas.openxmlformats.org/drawingml/2006/main">
             <a:pPr algn="l">
+              <a:buNone/>
               <a:defRPr sz="1575" b="0" i="0">
                 <a:solidFill>
                   <a:srgbClr val="61786E"/>
@@ -15595,6 +15771,7 @@
           <a:lstStyle xmlns:a="http://schemas.openxmlformats.org/drawingml/2006/main"/>
           <a:p xmlns:a="http://schemas.openxmlformats.org/drawingml/2006/main">
             <a:pPr algn="l">
+              <a:buNone/>
               <a:defRPr sz="2550" b="1" i="0">
                 <a:solidFill>
                   <a:srgbClr val="48B985"/>
@@ -16208,6 +16385,7 @@
           <a:lstStyle xmlns:a="http://schemas.openxmlformats.org/drawingml/2006/main"/>
           <a:p xmlns:a="http://schemas.openxmlformats.org/drawingml/2006/main">
             <a:pPr algn="ctr">
+              <a:buNone/>
               <a:defRPr sz="1350" b="1" i="0">
                 <a:solidFill>
                   <a:srgbClr val="D05B65"/>
@@ -16258,6 +16436,7 @@
           <a:lstStyle xmlns:a="http://schemas.openxmlformats.org/drawingml/2006/main"/>
           <a:p xmlns:a="http://schemas.openxmlformats.org/drawingml/2006/main">
             <a:pPr algn="l">
+              <a:buNone/>
               <a:defRPr sz="1200" b="1" i="0">
                 <a:solidFill>
                   <a:srgbClr val="159A64"/>
@@ -16308,6 +16487,7 @@
           <a:lstStyle xmlns:a="http://schemas.openxmlformats.org/drawingml/2006/main"/>
           <a:p xmlns:a="http://schemas.openxmlformats.org/drawingml/2006/main">
             <a:pPr algn="l">
+              <a:buNone/>
               <a:defRPr sz="1575" b="0" i="0">
                 <a:solidFill>
                   <a:srgbClr val="163C2C"/>
@@ -16420,6 +16600,7 @@
           <a:lstStyle xmlns:a="http://schemas.openxmlformats.org/drawingml/2006/main"/>
           <a:p xmlns:a="http://schemas.openxmlformats.org/drawingml/2006/main">
             <a:pPr algn="l">
+              <a:buNone/>
               <a:defRPr sz="1125" b="1" i="0">
                 <a:solidFill>
                   <a:srgbClr val="7FA847"/>
@@ -16470,6 +16651,7 @@
           <a:lstStyle xmlns:a="http://schemas.openxmlformats.org/drawingml/2006/main"/>
           <a:p xmlns:a="http://schemas.openxmlformats.org/drawingml/2006/main">
             <a:pPr algn="l">
+              <a:buNone/>
               <a:defRPr sz="3150" b="1" i="0">
                 <a:solidFill>
                   <a:srgbClr val="163C2C"/>
@@ -16520,6 +16702,7 @@
           <a:lstStyle xmlns:a="http://schemas.openxmlformats.org/drawingml/2006/main"/>
           <a:p xmlns:a="http://schemas.openxmlformats.org/drawingml/2006/main">
             <a:pPr algn="l">
+              <a:buNone/>
               <a:defRPr sz="1500" b="0" i="0">
                 <a:solidFill>
                   <a:srgbClr val="61786E"/>
@@ -16601,6 +16784,7 @@
           <a:lstStyle xmlns:a="http://schemas.openxmlformats.org/drawingml/2006/main"/>
           <a:p xmlns:a="http://schemas.openxmlformats.org/drawingml/2006/main">
             <a:pPr algn="l">
+              <a:buNone/>
               <a:defRPr sz="900" b="1" i="0">
                 <a:solidFill>
                   <a:srgbClr val="7F9389"/>
@@ -16651,6 +16835,7 @@
           <a:lstStyle xmlns:a="http://schemas.openxmlformats.org/drawingml/2006/main"/>
           <a:p xmlns:a="http://schemas.openxmlformats.org/drawingml/2006/main">
             <a:pPr algn="r">
+              <a:buNone/>
               <a:defRPr sz="900" b="1" i="0">
                 <a:solidFill>
                   <a:srgbClr val="7F9389"/>
@@ -16765,6 +16950,7 @@
           <a:lstStyle xmlns:a="http://schemas.openxmlformats.org/drawingml/2006/main"/>
           <a:p xmlns:a="http://schemas.openxmlformats.org/drawingml/2006/main">
             <a:pPr algn="ctr">
+              <a:buNone/>
               <a:defRPr sz="1350" b="1" i="0">
                 <a:solidFill>
                   <a:srgbClr val="F7FBF8"/>
@@ -16886,6 +17072,7 @@
           <a:lstStyle xmlns:a="http://schemas.openxmlformats.org/drawingml/2006/main"/>
           <a:p xmlns:a="http://schemas.openxmlformats.org/drawingml/2006/main">
             <a:pPr algn="ctr">
+              <a:buNone/>
               <a:defRPr sz="1350" b="1" i="0">
                 <a:solidFill>
                   <a:srgbClr val="F7FBF8"/>
@@ -17007,6 +17194,7 @@
           <a:lstStyle xmlns:a="http://schemas.openxmlformats.org/drawingml/2006/main"/>
           <a:p xmlns:a="http://schemas.openxmlformats.org/drawingml/2006/main">
             <a:pPr algn="ctr">
+              <a:buNone/>
               <a:defRPr sz="1350" b="1" i="0">
                 <a:solidFill>
                   <a:srgbClr val="F7FBF8"/>
@@ -17128,6 +17316,7 @@
           <a:lstStyle xmlns:a="http://schemas.openxmlformats.org/drawingml/2006/main"/>
           <a:p xmlns:a="http://schemas.openxmlformats.org/drawingml/2006/main">
             <a:pPr algn="ctr">
+              <a:buNone/>
               <a:defRPr sz="1350" b="1" i="0">
                 <a:solidFill>
                   <a:srgbClr val="F7FBF8"/>
@@ -17216,6 +17405,7 @@
           <a:lstStyle xmlns:a="http://schemas.openxmlformats.org/drawingml/2006/main"/>
           <a:p xmlns:a="http://schemas.openxmlformats.org/drawingml/2006/main">
             <a:pPr algn="ctr">
+              <a:buNone/>
               <a:defRPr sz="1575" b="1" i="0">
                 <a:solidFill>
                   <a:srgbClr val="163C2C"/>
@@ -17266,6 +17456,7 @@
           <a:lstStyle xmlns:a="http://schemas.openxmlformats.org/drawingml/2006/main"/>
           <a:p xmlns:a="http://schemas.openxmlformats.org/drawingml/2006/main">
             <a:pPr algn="ctr">
+              <a:buNone/>
               <a:defRPr sz="1575" b="1" i="0">
                 <a:solidFill>
                   <a:srgbClr val="163C2C"/>
@@ -17316,6 +17507,7 @@
           <a:lstStyle xmlns:a="http://schemas.openxmlformats.org/drawingml/2006/main"/>
           <a:p xmlns:a="http://schemas.openxmlformats.org/drawingml/2006/main">
             <a:pPr algn="ctr">
+              <a:buNone/>
               <a:defRPr sz="1575" b="1" i="0">
                 <a:solidFill>
                   <a:srgbClr val="163C2C"/>
@@ -17366,6 +17558,7 @@
           <a:lstStyle xmlns:a="http://schemas.openxmlformats.org/drawingml/2006/main"/>
           <a:p xmlns:a="http://schemas.openxmlformats.org/drawingml/2006/main">
             <a:pPr algn="ctr">
+              <a:buNone/>
               <a:defRPr sz="1575" b="1" i="0">
                 <a:solidFill>
                   <a:srgbClr val="163C2C"/>
@@ -17416,6 +17609,7 @@
           <a:lstStyle xmlns:a="http://schemas.openxmlformats.org/drawingml/2006/main"/>
           <a:p xmlns:a="http://schemas.openxmlformats.org/drawingml/2006/main">
             <a:pPr algn="ctr">
+              <a:buNone/>
               <a:defRPr sz="2100" b="1" i="0">
                 <a:solidFill>
                   <a:srgbClr val="48B985"/>
@@ -17528,6 +17722,7 @@
           <a:lstStyle xmlns:a="http://schemas.openxmlformats.org/drawingml/2006/main"/>
           <a:p xmlns:a="http://schemas.openxmlformats.org/drawingml/2006/main">
             <a:pPr algn="l">
+              <a:buNone/>
               <a:defRPr sz="1125" b="1" i="0">
                 <a:solidFill>
                   <a:srgbClr val="48B985"/>
@@ -17578,6 +17773,7 @@
           <a:lstStyle xmlns:a="http://schemas.openxmlformats.org/drawingml/2006/main"/>
           <a:p xmlns:a="http://schemas.openxmlformats.org/drawingml/2006/main">
             <a:pPr algn="l">
+              <a:buNone/>
               <a:defRPr sz="3150" b="1" i="0">
                 <a:solidFill>
                   <a:srgbClr val="163C2C"/>
@@ -17628,6 +17824,7 @@
           <a:lstStyle xmlns:a="http://schemas.openxmlformats.org/drawingml/2006/main"/>
           <a:p xmlns:a="http://schemas.openxmlformats.org/drawingml/2006/main">
             <a:pPr algn="l">
+              <a:buNone/>
               <a:defRPr sz="1500" b="0" i="0">
                 <a:solidFill>
                   <a:srgbClr val="61786E"/>
@@ -17709,6 +17906,7 @@
           <a:lstStyle xmlns:a="http://schemas.openxmlformats.org/drawingml/2006/main"/>
           <a:p xmlns:a="http://schemas.openxmlformats.org/drawingml/2006/main">
             <a:pPr algn="l">
+              <a:buNone/>
               <a:defRPr sz="900" b="1" i="0">
                 <a:solidFill>
                   <a:srgbClr val="7F9389"/>
@@ -17759,6 +17957,7 @@
           <a:lstStyle xmlns:a="http://schemas.openxmlformats.org/drawingml/2006/main"/>
           <a:p xmlns:a="http://schemas.openxmlformats.org/drawingml/2006/main">
             <a:pPr algn="r">
+              <a:buNone/>
               <a:defRPr sz="900" b="1" i="0">
                 <a:solidFill>
                   <a:srgbClr val="7F9389"/>
@@ -17970,6 +18169,7 @@
           <a:lstStyle xmlns:a="http://schemas.openxmlformats.org/drawingml/2006/main"/>
           <a:p xmlns:a="http://schemas.openxmlformats.org/drawingml/2006/main">
             <a:pPr algn="l">
+              <a:buNone/>
               <a:defRPr sz="1200" b="0" i="0">
                 <a:solidFill>
                   <a:srgbClr val="F7FBF8"/>
@@ -17992,6 +18192,7 @@
           </a:p>
           <a:p xmlns:a="http://schemas.openxmlformats.org/drawingml/2006/main">
             <a:pPr algn="l">
+              <a:buNone/>
               <a:defRPr sz="1200" b="0" i="0">
                 <a:solidFill>
                   <a:srgbClr val="F7FBF8"/>
@@ -18014,6 +18215,7 @@
           </a:p>
           <a:p xmlns:a="http://schemas.openxmlformats.org/drawingml/2006/main">
             <a:pPr algn="l">
+              <a:buNone/>
               <a:defRPr sz="1200" b="0" i="0">
                 <a:solidFill>
                   <a:srgbClr val="F7FBF8"/>
@@ -18031,6 +18233,7 @@
           </a:p>
           <a:p xmlns:a="http://schemas.openxmlformats.org/drawingml/2006/main">
             <a:pPr algn="l">
+              <a:buNone/>
               <a:defRPr sz="1200" b="0" i="0">
                 <a:solidFill>
                   <a:srgbClr val="F7FBF8"/>
@@ -18081,6 +18284,7 @@
           <a:lstStyle xmlns:a="http://schemas.openxmlformats.org/drawingml/2006/main"/>
           <a:p xmlns:a="http://schemas.openxmlformats.org/drawingml/2006/main">
             <a:pPr algn="l">
+              <a:buNone/>
               <a:defRPr sz="2250" b="1" i="0">
                 <a:solidFill>
                   <a:srgbClr val="159A64"/>
@@ -18115,7 +18319,7 @@
         <p:spPr>
           <a:xfrm xmlns:a="http://schemas.openxmlformats.org/drawingml/2006/main">
             <a:off x="4667250" y="2305050"/>
-            <a:ext cx="5334000" cy="323850"/>
+            <a:ext cx="3714750" cy="323850"/>
           </a:xfrm>
           <a:prstGeom xmlns:a="http://schemas.openxmlformats.org/drawingml/2006/main" prst="rect">
             <a:avLst/>
@@ -18131,6 +18335,7 @@
           <a:lstStyle xmlns:a="http://schemas.openxmlformats.org/drawingml/2006/main"/>
           <a:p xmlns:a="http://schemas.openxmlformats.org/drawingml/2006/main">
             <a:pPr algn="l">
+              <a:buNone/>
               <a:defRPr sz="1800" b="1" i="0">
                 <a:solidFill>
                   <a:srgbClr val="163C2C"/>
@@ -18143,7 +18348,7 @@
                   <a:srgbClr val="163C2C"/>
                 </a:solidFill>
               </a:rPr>
-              <a:t>Open the workshop repo</a:t>
+              <a:t>Open the workshop repository</a:t>
             </a:r>
           </a:p>
         </p:txBody>
@@ -18181,6 +18386,7 @@
           <a:lstStyle xmlns:a="http://schemas.openxmlformats.org/drawingml/2006/main"/>
           <a:p xmlns:a="http://schemas.openxmlformats.org/drawingml/2006/main">
             <a:pPr algn="l">
+              <a:buNone/>
               <a:defRPr sz="2250" b="1" i="0">
                 <a:solidFill>
                   <a:srgbClr val="159A64"/>
@@ -18215,7 +18421,7 @@
         <p:spPr>
           <a:xfrm xmlns:a="http://schemas.openxmlformats.org/drawingml/2006/main">
             <a:off x="4667250" y="3124200"/>
-            <a:ext cx="6191250" cy="323850"/>
+            <a:ext cx="3714750" cy="323850"/>
           </a:xfrm>
           <a:prstGeom xmlns:a="http://schemas.openxmlformats.org/drawingml/2006/main" prst="rect">
             <a:avLst/>
@@ -18231,6 +18437,7 @@
           <a:lstStyle xmlns:a="http://schemas.openxmlformats.org/drawingml/2006/main"/>
           <a:p xmlns:a="http://schemas.openxmlformats.org/drawingml/2006/main">
             <a:pPr algn="l">
+              <a:buNone/>
               <a:defRPr sz="1800" b="1" i="0">
                 <a:solidFill>
                   <a:srgbClr val="163C2C"/>
@@ -18243,7 +18450,7 @@
                   <a:srgbClr val="163C2C"/>
                 </a:solidFill>
               </a:rPr>
-              <a:t>Use the prepared environment + API key</a:t>
+              <a:t>Add your AI Studio API key</a:t>
             </a:r>
           </a:p>
         </p:txBody>
@@ -18281,6 +18488,7 @@
           <a:lstStyle xmlns:a="http://schemas.openxmlformats.org/drawingml/2006/main"/>
           <a:p xmlns:a="http://schemas.openxmlformats.org/drawingml/2006/main">
             <a:pPr algn="l">
+              <a:buNone/>
               <a:defRPr sz="2250" b="1" i="0">
                 <a:solidFill>
                   <a:srgbClr val="159A64"/>
@@ -18315,7 +18523,7 @@
         <p:spPr>
           <a:xfrm xmlns:a="http://schemas.openxmlformats.org/drawingml/2006/main">
             <a:off x="4667250" y="3943350"/>
-            <a:ext cx="6191250" cy="323850"/>
+            <a:ext cx="3714750" cy="323850"/>
           </a:xfrm>
           <a:prstGeom xmlns:a="http://schemas.openxmlformats.org/drawingml/2006/main" prst="rect">
             <a:avLst/>
@@ -18331,6 +18539,7 @@
           <a:lstStyle xmlns:a="http://schemas.openxmlformats.org/drawingml/2006/main"/>
           <a:p xmlns:a="http://schemas.openxmlformats.org/drawingml/2006/main">
             <a:pPr algn="l">
+              <a:buNone/>
               <a:defRPr sz="1800" b="1" i="0">
                 <a:solidFill>
                   <a:srgbClr val="163C2C"/>
@@ -18416,6 +18625,7 @@
           <a:lstStyle xmlns:a="http://schemas.openxmlformats.org/drawingml/2006/main"/>
           <a:p xmlns:a="http://schemas.openxmlformats.org/drawingml/2006/main">
             <a:pPr algn="l">
+              <a:buNone/>
               <a:defRPr sz="1500" b="1" i="0">
                 <a:solidFill>
                   <a:srgbClr val="48B985"/>
@@ -18429,6 +18639,96 @@
                 </a:solidFill>
               </a:rPr>
               <a:t>Stuck? Jump to the next checkpoint folder and keep moving.</a:t>
+            </a:r>
+          </a:p>
+        </p:txBody>
+      </p:sp>
+      <p:pic>
+        <p:nvPicPr>
+          <p:cNvPr id="46" name=""/>
+          <p:cNvPicPr>
+            <a:picLocks xmlns:a="http://schemas.openxmlformats.org/drawingml/2006/main" noChangeAspect="1"/>
+          </p:cNvPicPr>
+          <p:nvPr/>
+        </p:nvPicPr>
+        <p:blipFill>
+          <a:blip xmlns:r="http://schemas.openxmlformats.org/officeDocument/2006/relationships" xmlns:a="http://schemas.openxmlformats.org/drawingml/2006/main" r:embed="Ra3fde7d295294840"/>
+          <a:stretch xmlns:a="http://schemas.openxmlformats.org/drawingml/2006/main"/>
+        </p:blipFill>
+        <p:spPr>
+          <a:xfrm xmlns:a="http://schemas.openxmlformats.org/drawingml/2006/main">
+            <a:off x="9067800" y="2209800"/>
+            <a:ext cx="1600200" cy="1600200"/>
+          </a:xfrm>
+          <a:prstGeom xmlns:a="http://schemas.openxmlformats.org/drawingml/2006/main" prst="rect">
+            <a:avLst/>
+          </a:prstGeom>
+        </p:spPr>
+      </p:pic>
+      <p:sp>
+        <p:nvSpPr>
+          <p:cNvPr id="24" name="workshop-repository-link">
+            <a:extLst xmlns:a="http://schemas.openxmlformats.org/drawingml/2006/main">
+              <a:ext uri="{FF2B5EF4-FFF2-40B4-BE49-F238E27FC236}">
+                <a16:creationId xmlns:a16="http://schemas.microsoft.com/office/drawing/2014/main" id="{9287FA24-3A39-4CD5-8357-28D46DE861D1}"/>
+              </a:ext>
+            </a:extLst>
+          </p:cNvPr>
+          <p:cNvSpPr>
+            <a:spLocks xmlns:a="http://schemas.openxmlformats.org/drawingml/2006/main" noGrp="1"/>
+          </p:cNvSpPr>
+          <p:nvPr/>
+        </p:nvSpPr>
+        <p:spPr>
+          <a:xfrm xmlns:a="http://schemas.openxmlformats.org/drawingml/2006/main">
+            <a:off x="8382000" y="3943350"/>
+            <a:ext cx="2895600" cy="533400"/>
+          </a:xfrm>
+          <a:prstGeom xmlns:a="http://schemas.openxmlformats.org/drawingml/2006/main" prst="rect">
+            <a:avLst/>
+          </a:prstGeom>
+          <a:noFill xmlns:a="http://schemas.openxmlformats.org/drawingml/2006/main"/>
+          <a:ln xmlns:a="http://schemas.openxmlformats.org/drawingml/2006/main" w="0">
+            <a:noFill/>
+            <a:prstDash val="solid"/>
+          </a:ln>
+        </p:spPr>
+        <p:txBody>
+          <a:bodyPr xmlns:a="http://schemas.openxmlformats.org/drawingml/2006/main" anchor="ctr"/>
+          <a:lstStyle xmlns:a="http://schemas.openxmlformats.org/drawingml/2006/main"/>
+          <a:p xmlns:a="http://schemas.openxmlformats.org/drawingml/2006/main">
+            <a:pPr algn="ctr">
+              <a:defRPr sz="900" b="1">
+                <a:solidFill>
+                  <a:srgbClr val="159A64"/>
+                </a:solidFill>
+              </a:defRPr>
+            </a:pPr>
+            <a:r>
+              <a:rPr sz="900" b="1">
+                <a:solidFill>
+                  <a:srgbClr val="159A64"/>
+                </a:solidFill>
+              </a:rPr>
+              <a:t>SCAN TO OPEN</a:t>
+            </a:r>
+          </a:p>
+          <a:p xmlns:a="http://schemas.openxmlformats.org/drawingml/2006/main">
+            <a:pPr algn="ctr">
+              <a:defRPr sz="900" b="1">
+                <a:solidFill>
+                  <a:srgbClr val="159A64"/>
+                </a:solidFill>
+              </a:defRPr>
+            </a:pPr>
+            <a:r>
+              <a:rPr sz="900" b="1">
+                <a:solidFill>
+                  <a:srgbClr val="159A64"/>
+                </a:solidFill>
+                <a:hlinkClick xmlns:r="http://schemas.openxmlformats.org/officeDocument/2006/relationships" r:id="R2bc4222718734fab"/>
+              </a:rPr>
+              <a:t>github.com/aswincsekar/adk-voice-workshop</a:t>
             </a:r>
           </a:p>
         </p:txBody>
@@ -18528,6 +18828,7 @@
           <a:lstStyle xmlns:a="http://schemas.openxmlformats.org/drawingml/2006/main"/>
           <a:p xmlns:a="http://schemas.openxmlformats.org/drawingml/2006/main">
             <a:pPr algn="l">
+              <a:buNone/>
               <a:defRPr sz="1125" b="1" i="0">
                 <a:solidFill>
                   <a:srgbClr val="7FA847"/>
@@ -18578,6 +18879,7 @@
           <a:lstStyle xmlns:a="http://schemas.openxmlformats.org/drawingml/2006/main"/>
           <a:p xmlns:a="http://schemas.openxmlformats.org/drawingml/2006/main">
             <a:pPr algn="l">
+              <a:buNone/>
               <a:defRPr sz="3150" b="1" i="0">
                 <a:solidFill>
                   <a:srgbClr val="163C2C"/>
@@ -18628,6 +18930,7 @@
           <a:lstStyle xmlns:a="http://schemas.openxmlformats.org/drawingml/2006/main"/>
           <a:p xmlns:a="http://schemas.openxmlformats.org/drawingml/2006/main">
             <a:pPr algn="l">
+              <a:buNone/>
               <a:defRPr sz="1500" b="0" i="0">
                 <a:solidFill>
                   <a:srgbClr val="61786E"/>
@@ -18709,6 +19012,7 @@
           <a:lstStyle xmlns:a="http://schemas.openxmlformats.org/drawingml/2006/main"/>
           <a:p xmlns:a="http://schemas.openxmlformats.org/drawingml/2006/main">
             <a:pPr algn="l">
+              <a:buNone/>
               <a:defRPr sz="900" b="1" i="0">
                 <a:solidFill>
                   <a:srgbClr val="7F9389"/>
@@ -18759,6 +19063,7 @@
           <a:lstStyle xmlns:a="http://schemas.openxmlformats.org/drawingml/2006/main"/>
           <a:p xmlns:a="http://schemas.openxmlformats.org/drawingml/2006/main">
             <a:pPr algn="r">
+              <a:buNone/>
               <a:defRPr sz="900" b="1" i="0">
                 <a:solidFill>
                   <a:srgbClr val="7F9389"/>
@@ -18871,6 +19176,7 @@
           <a:lstStyle xmlns:a="http://schemas.openxmlformats.org/drawingml/2006/main"/>
           <a:p xmlns:a="http://schemas.openxmlformats.org/drawingml/2006/main">
             <a:pPr algn="ctr">
+              <a:buNone/>
               <a:defRPr sz="1200" b="1" i="0">
                 <a:solidFill>
                   <a:srgbClr val="F7FBF8"/>
@@ -18921,6 +19227,7 @@
           <a:lstStyle xmlns:a="http://schemas.openxmlformats.org/drawingml/2006/main"/>
           <a:p xmlns:a="http://schemas.openxmlformats.org/drawingml/2006/main">
             <a:pPr algn="ctr">
+              <a:buNone/>
               <a:defRPr sz="1275" b="1" i="0">
                 <a:solidFill>
                   <a:srgbClr val="163C2C"/>
@@ -18971,6 +19278,7 @@
           <a:lstStyle xmlns:a="http://schemas.openxmlformats.org/drawingml/2006/main"/>
           <a:p xmlns:a="http://schemas.openxmlformats.org/drawingml/2006/main">
             <a:pPr algn="ctr">
+              <a:buNone/>
               <a:defRPr sz="1125" b="0" i="0">
                 <a:solidFill>
                   <a:srgbClr val="61786E"/>
@@ -19052,6 +19360,7 @@
           <a:lstStyle xmlns:a="http://schemas.openxmlformats.org/drawingml/2006/main"/>
           <a:p xmlns:a="http://schemas.openxmlformats.org/drawingml/2006/main">
             <a:pPr algn="ctr">
+              <a:buNone/>
               <a:defRPr sz="1200" b="1" i="0">
                 <a:solidFill>
                   <a:srgbClr val="F7FBF8"/>
@@ -19102,6 +19411,7 @@
           <a:lstStyle xmlns:a="http://schemas.openxmlformats.org/drawingml/2006/main"/>
           <a:p xmlns:a="http://schemas.openxmlformats.org/drawingml/2006/main">
             <a:pPr algn="ctr">
+              <a:buNone/>
               <a:defRPr sz="1275" b="1" i="0">
                 <a:solidFill>
                   <a:srgbClr val="163C2C"/>
@@ -19152,6 +19462,7 @@
           <a:lstStyle xmlns:a="http://schemas.openxmlformats.org/drawingml/2006/main"/>
           <a:p xmlns:a="http://schemas.openxmlformats.org/drawingml/2006/main">
             <a:pPr algn="ctr">
+              <a:buNone/>
               <a:defRPr sz="1125" b="0" i="0">
                 <a:solidFill>
                   <a:srgbClr val="61786E"/>
@@ -19233,6 +19544,7 @@
           <a:lstStyle xmlns:a="http://schemas.openxmlformats.org/drawingml/2006/main"/>
           <a:p xmlns:a="http://schemas.openxmlformats.org/drawingml/2006/main">
             <a:pPr algn="ctr">
+              <a:buNone/>
               <a:defRPr sz="1200" b="1" i="0">
                 <a:solidFill>
                   <a:srgbClr val="F7FBF8"/>
@@ -19283,6 +19595,7 @@
           <a:lstStyle xmlns:a="http://schemas.openxmlformats.org/drawingml/2006/main"/>
           <a:p xmlns:a="http://schemas.openxmlformats.org/drawingml/2006/main">
             <a:pPr algn="ctr">
+              <a:buNone/>
               <a:defRPr sz="1275" b="1" i="0">
                 <a:solidFill>
                   <a:srgbClr val="163C2C"/>
@@ -19333,6 +19646,7 @@
           <a:lstStyle xmlns:a="http://schemas.openxmlformats.org/drawingml/2006/main"/>
           <a:p xmlns:a="http://schemas.openxmlformats.org/drawingml/2006/main">
             <a:pPr algn="ctr">
+              <a:buNone/>
               <a:defRPr sz="1125" b="0" i="0">
                 <a:solidFill>
                   <a:srgbClr val="61786E"/>
@@ -19414,6 +19728,7 @@
           <a:lstStyle xmlns:a="http://schemas.openxmlformats.org/drawingml/2006/main"/>
           <a:p xmlns:a="http://schemas.openxmlformats.org/drawingml/2006/main">
             <a:pPr algn="ctr">
+              <a:buNone/>
               <a:defRPr sz="1200" b="1" i="0">
                 <a:solidFill>
                   <a:srgbClr val="F7FBF8"/>
@@ -19464,6 +19779,7 @@
           <a:lstStyle xmlns:a="http://schemas.openxmlformats.org/drawingml/2006/main"/>
           <a:p xmlns:a="http://schemas.openxmlformats.org/drawingml/2006/main">
             <a:pPr algn="ctr">
+              <a:buNone/>
               <a:defRPr sz="1275" b="1" i="0">
                 <a:solidFill>
                   <a:srgbClr val="163C2C"/>
@@ -19514,6 +19830,7 @@
           <a:lstStyle xmlns:a="http://schemas.openxmlformats.org/drawingml/2006/main"/>
           <a:p xmlns:a="http://schemas.openxmlformats.org/drawingml/2006/main">
             <a:pPr algn="ctr">
+              <a:buNone/>
               <a:defRPr sz="1125" b="0" i="0">
                 <a:solidFill>
                   <a:srgbClr val="61786E"/>
@@ -19595,6 +19912,7 @@
           <a:lstStyle xmlns:a="http://schemas.openxmlformats.org/drawingml/2006/main"/>
           <a:p xmlns:a="http://schemas.openxmlformats.org/drawingml/2006/main">
             <a:pPr algn="ctr">
+              <a:buNone/>
               <a:defRPr sz="1200" b="1" i="0">
                 <a:solidFill>
                   <a:srgbClr val="F7FBF8"/>
@@ -19645,6 +19963,7 @@
           <a:lstStyle xmlns:a="http://schemas.openxmlformats.org/drawingml/2006/main"/>
           <a:p xmlns:a="http://schemas.openxmlformats.org/drawingml/2006/main">
             <a:pPr algn="ctr">
+              <a:buNone/>
               <a:defRPr sz="1275" b="1" i="0">
                 <a:solidFill>
                   <a:srgbClr val="163C2C"/>
@@ -19695,6 +20014,7 @@
           <a:lstStyle xmlns:a="http://schemas.openxmlformats.org/drawingml/2006/main"/>
           <a:p xmlns:a="http://schemas.openxmlformats.org/drawingml/2006/main">
             <a:pPr algn="ctr">
+              <a:buNone/>
               <a:defRPr sz="1125" b="0" i="0">
                 <a:solidFill>
                   <a:srgbClr val="61786E"/>
@@ -19776,6 +20096,7 @@
           <a:lstStyle xmlns:a="http://schemas.openxmlformats.org/drawingml/2006/main"/>
           <a:p xmlns:a="http://schemas.openxmlformats.org/drawingml/2006/main">
             <a:pPr algn="ctr">
+              <a:buNone/>
               <a:defRPr sz="1200" b="1" i="0">
                 <a:solidFill>
                   <a:srgbClr val="F7FBF8"/>
@@ -19826,6 +20147,7 @@
           <a:lstStyle xmlns:a="http://schemas.openxmlformats.org/drawingml/2006/main"/>
           <a:p xmlns:a="http://schemas.openxmlformats.org/drawingml/2006/main">
             <a:pPr algn="ctr">
+              <a:buNone/>
               <a:defRPr sz="1275" b="1" i="0">
                 <a:solidFill>
                   <a:srgbClr val="163C2C"/>
@@ -19876,6 +20198,7 @@
           <a:lstStyle xmlns:a="http://schemas.openxmlformats.org/drawingml/2006/main"/>
           <a:p xmlns:a="http://schemas.openxmlformats.org/drawingml/2006/main">
             <a:pPr algn="ctr">
+              <a:buNone/>
               <a:defRPr sz="1125" b="0" i="0">
                 <a:solidFill>
                   <a:srgbClr val="61786E"/>
@@ -19926,6 +20249,7 @@
           <a:lstStyle xmlns:a="http://schemas.openxmlformats.org/drawingml/2006/main"/>
           <a:p xmlns:a="http://schemas.openxmlformats.org/drawingml/2006/main">
             <a:pPr algn="ctr">
+              <a:buNone/>
               <a:defRPr sz="1800" b="1" i="0">
                 <a:solidFill>
                   <a:srgbClr val="48B985"/>
@@ -20038,6 +20362,7 @@
           <a:lstStyle xmlns:a="http://schemas.openxmlformats.org/drawingml/2006/main"/>
           <a:p xmlns:a="http://schemas.openxmlformats.org/drawingml/2006/main">
             <a:pPr algn="l">
+              <a:buNone/>
               <a:defRPr sz="1125" b="1" i="0">
                 <a:solidFill>
                   <a:srgbClr val="7FA847"/>
@@ -20088,6 +20413,7 @@
           <a:lstStyle xmlns:a="http://schemas.openxmlformats.org/drawingml/2006/main"/>
           <a:p xmlns:a="http://schemas.openxmlformats.org/drawingml/2006/main">
             <a:pPr algn="l">
+              <a:buNone/>
               <a:defRPr sz="3150" b="1" i="0">
                 <a:solidFill>
                   <a:srgbClr val="163C2C"/>
@@ -20138,6 +20464,7 @@
           <a:lstStyle xmlns:a="http://schemas.openxmlformats.org/drawingml/2006/main"/>
           <a:p xmlns:a="http://schemas.openxmlformats.org/drawingml/2006/main">
             <a:pPr algn="l">
+              <a:buNone/>
               <a:defRPr sz="1500" b="0" i="0">
                 <a:solidFill>
                   <a:srgbClr val="61786E"/>
@@ -20219,6 +20546,7 @@
           <a:lstStyle xmlns:a="http://schemas.openxmlformats.org/drawingml/2006/main"/>
           <a:p xmlns:a="http://schemas.openxmlformats.org/drawingml/2006/main">
             <a:pPr algn="l">
+              <a:buNone/>
               <a:defRPr sz="900" b="1" i="0">
                 <a:solidFill>
                   <a:srgbClr val="7F9389"/>
@@ -20269,6 +20597,7 @@
           <a:lstStyle xmlns:a="http://schemas.openxmlformats.org/drawingml/2006/main"/>
           <a:p xmlns:a="http://schemas.openxmlformats.org/drawingml/2006/main">
             <a:pPr algn="r">
+              <a:buNone/>
               <a:defRPr sz="900" b="1" i="0">
                 <a:solidFill>
                   <a:srgbClr val="7F9389"/>
@@ -20480,6 +20809,7 @@
           <a:lstStyle xmlns:a="http://schemas.openxmlformats.org/drawingml/2006/main"/>
           <a:p xmlns:a="http://schemas.openxmlformats.org/drawingml/2006/main">
             <a:pPr algn="l">
+              <a:buNone/>
               <a:defRPr sz="1200" b="0" i="0">
                 <a:solidFill>
                   <a:srgbClr val="F7FBF8"/>
@@ -20497,6 +20827,7 @@
           </a:p>
           <a:p xmlns:a="http://schemas.openxmlformats.org/drawingml/2006/main">
             <a:pPr algn="l">
+              <a:buNone/>
               <a:defRPr sz="1200" b="0" i="0">
                 <a:solidFill>
                   <a:srgbClr val="F7FBF8"/>
@@ -20519,6 +20850,7 @@
           </a:p>
           <a:p xmlns:a="http://schemas.openxmlformats.org/drawingml/2006/main">
             <a:pPr algn="l">
+              <a:buNone/>
               <a:defRPr sz="1200" b="0" i="0">
                 <a:solidFill>
                   <a:srgbClr val="F7FBF8"/>
@@ -20536,6 +20868,7 @@
           </a:p>
           <a:p xmlns:a="http://schemas.openxmlformats.org/drawingml/2006/main">
             <a:pPr algn="l">
+              <a:buNone/>
               <a:defRPr sz="1200" b="0" i="0">
                 <a:solidFill>
                   <a:srgbClr val="F7FBF8"/>
@@ -20553,6 +20886,7 @@
           </a:p>
           <a:p xmlns:a="http://schemas.openxmlformats.org/drawingml/2006/main">
             <a:pPr algn="l">
+              <a:buNone/>
               <a:defRPr sz="1200" b="0" i="0">
                 <a:solidFill>
                   <a:srgbClr val="F7FBF8"/>
@@ -20570,6 +20904,7 @@
           </a:p>
           <a:p xmlns:a="http://schemas.openxmlformats.org/drawingml/2006/main">
             <a:pPr algn="l">
+              <a:buNone/>
               <a:defRPr sz="1200" b="0" i="0">
                 <a:solidFill>
                   <a:srgbClr val="F7FBF8"/>
@@ -20587,6 +20922,7 @@
           </a:p>
           <a:p xmlns:a="http://schemas.openxmlformats.org/drawingml/2006/main">
             <a:pPr algn="l">
+              <a:buNone/>
               <a:defRPr sz="1200" b="0" i="0">
                 <a:solidFill>
                   <a:srgbClr val="F7FBF8"/>
@@ -20637,6 +20973,7 @@
           <a:lstStyle xmlns:a="http://schemas.openxmlformats.org/drawingml/2006/main"/>
           <a:p xmlns:a="http://schemas.openxmlformats.org/drawingml/2006/main">
             <a:pPr algn="l">
+              <a:buNone/>
               <a:defRPr sz="1800" b="1" i="0">
                 <a:solidFill>
                   <a:srgbClr val="159A64"/>
@@ -20687,6 +21024,7 @@
           <a:lstStyle xmlns:a="http://schemas.openxmlformats.org/drawingml/2006/main"/>
           <a:p xmlns:a="http://schemas.openxmlformats.org/drawingml/2006/main">
             <a:pPr algn="l">
+              <a:buNone/>
               <a:defRPr sz="1350" b="0" i="0">
                 <a:solidFill>
                   <a:srgbClr val="61786E"/>
@@ -20737,6 +21075,7 @@
           <a:lstStyle xmlns:a="http://schemas.openxmlformats.org/drawingml/2006/main"/>
           <a:p xmlns:a="http://schemas.openxmlformats.org/drawingml/2006/main">
             <a:pPr algn="l">
+              <a:buNone/>
               <a:defRPr sz="1500" b="0" i="0">
                 <a:solidFill>
                   <a:srgbClr val="163C2C"/>
@@ -20787,6 +21126,7 @@
           <a:lstStyle xmlns:a="http://schemas.openxmlformats.org/drawingml/2006/main"/>
           <a:p xmlns:a="http://schemas.openxmlformats.org/drawingml/2006/main">
             <a:pPr algn="l">
+              <a:buNone/>
               <a:defRPr sz="1350" b="0" i="0">
                 <a:solidFill>
                   <a:srgbClr val="61786E"/>
@@ -20837,6 +21177,7 @@
           <a:lstStyle xmlns:a="http://schemas.openxmlformats.org/drawingml/2006/main"/>
           <a:p xmlns:a="http://schemas.openxmlformats.org/drawingml/2006/main">
             <a:pPr algn="l">
+              <a:buNone/>
               <a:defRPr sz="1500" b="0" i="0">
                 <a:solidFill>
                   <a:srgbClr val="163C2C"/>
@@ -20887,6 +21228,7 @@
           <a:lstStyle xmlns:a="http://schemas.openxmlformats.org/drawingml/2006/main"/>
           <a:p xmlns:a="http://schemas.openxmlformats.org/drawingml/2006/main">
             <a:pPr algn="l">
+              <a:buNone/>
               <a:defRPr sz="1275" b="0" i="0">
                 <a:solidFill>
                   <a:srgbClr val="61786E"/>
@@ -20937,6 +21279,7 @@
           <a:lstStyle xmlns:a="http://schemas.openxmlformats.org/drawingml/2006/main"/>
           <a:p xmlns:a="http://schemas.openxmlformats.org/drawingml/2006/main">
             <a:pPr algn="l">
+              <a:buNone/>
               <a:defRPr sz="1425" b="0" i="0">
                 <a:solidFill>
                   <a:srgbClr val="163C2C"/>
@@ -21022,6 +21365,7 @@
           <a:lstStyle xmlns:a="http://schemas.openxmlformats.org/drawingml/2006/main"/>
           <a:p xmlns:a="http://schemas.openxmlformats.org/drawingml/2006/main">
             <a:pPr algn="l">
+              <a:buNone/>
               <a:defRPr sz="1275" b="1" i="0">
                 <a:solidFill>
                   <a:srgbClr val="48B985"/>
@@ -21134,6 +21478,7 @@
           <a:lstStyle xmlns:a="http://schemas.openxmlformats.org/drawingml/2006/main"/>
           <a:p xmlns:a="http://schemas.openxmlformats.org/drawingml/2006/main">
             <a:pPr algn="l">
+              <a:buNone/>
               <a:defRPr sz="1125" b="1" i="0">
                 <a:solidFill>
                   <a:srgbClr val="48B985"/>
@@ -21184,6 +21529,7 @@
           <a:lstStyle xmlns:a="http://schemas.openxmlformats.org/drawingml/2006/main"/>
           <a:p xmlns:a="http://schemas.openxmlformats.org/drawingml/2006/main">
             <a:pPr algn="l">
+              <a:buNone/>
               <a:defRPr sz="3150" b="1" i="0">
                 <a:solidFill>
                   <a:srgbClr val="163C2C"/>
@@ -21234,6 +21580,7 @@
           <a:lstStyle xmlns:a="http://schemas.openxmlformats.org/drawingml/2006/main"/>
           <a:p xmlns:a="http://schemas.openxmlformats.org/drawingml/2006/main">
             <a:pPr algn="l">
+              <a:buNone/>
               <a:defRPr sz="1500" b="0" i="0">
                 <a:solidFill>
                   <a:srgbClr val="61786E"/>
@@ -21315,6 +21662,7 @@
           <a:lstStyle xmlns:a="http://schemas.openxmlformats.org/drawingml/2006/main"/>
           <a:p xmlns:a="http://schemas.openxmlformats.org/drawingml/2006/main">
             <a:pPr algn="l">
+              <a:buNone/>
               <a:defRPr sz="900" b="1" i="0">
                 <a:solidFill>
                   <a:srgbClr val="7F9389"/>
@@ -21365,6 +21713,7 @@
           <a:lstStyle xmlns:a="http://schemas.openxmlformats.org/drawingml/2006/main"/>
           <a:p xmlns:a="http://schemas.openxmlformats.org/drawingml/2006/main">
             <a:pPr algn="r">
+              <a:buNone/>
               <a:defRPr sz="900" b="1" i="0">
                 <a:solidFill>
                   <a:srgbClr val="7F9389"/>
@@ -21415,6 +21764,7 @@
           <a:lstStyle xmlns:a="http://schemas.openxmlformats.org/drawingml/2006/main"/>
           <a:p xmlns:a="http://schemas.openxmlformats.org/drawingml/2006/main">
             <a:pPr algn="l">
+              <a:buNone/>
               <a:defRPr sz="1200" b="1" i="0">
                 <a:solidFill>
                   <a:srgbClr val="48B985"/>
@@ -21465,6 +21815,7 @@
           <a:lstStyle xmlns:a="http://schemas.openxmlformats.org/drawingml/2006/main"/>
           <a:p xmlns:a="http://schemas.openxmlformats.org/drawingml/2006/main">
             <a:pPr algn="l">
+              <a:buNone/>
               <a:defRPr sz="2250" b="1" i="0">
                 <a:solidFill>
                   <a:srgbClr val="163C2C"/>
@@ -21515,6 +21866,7 @@
           <a:lstStyle xmlns:a="http://schemas.openxmlformats.org/drawingml/2006/main"/>
           <a:p xmlns:a="http://schemas.openxmlformats.org/drawingml/2006/main">
             <a:pPr algn="l">
+              <a:buNone/>
               <a:defRPr sz="1200" b="1" i="0">
                 <a:solidFill>
                   <a:srgbClr val="159A64"/>
@@ -21565,6 +21917,7 @@
           <a:lstStyle xmlns:a="http://schemas.openxmlformats.org/drawingml/2006/main"/>
           <a:p xmlns:a="http://schemas.openxmlformats.org/drawingml/2006/main">
             <a:pPr algn="l">
+              <a:buNone/>
               <a:defRPr sz="2025" b="0" i="1">
                 <a:solidFill>
                   <a:srgbClr val="159A64"/>
@@ -21650,6 +22003,7 @@
           <a:lstStyle xmlns:a="http://schemas.openxmlformats.org/drawingml/2006/main"/>
           <a:p xmlns:a="http://schemas.openxmlformats.org/drawingml/2006/main">
             <a:pPr algn="l">
+              <a:buNone/>
               <a:defRPr sz="1200" b="1" i="0">
                 <a:solidFill>
                   <a:srgbClr val="7FA847"/>
@@ -21700,6 +22054,7 @@
           <a:lstStyle xmlns:a="http://schemas.openxmlformats.org/drawingml/2006/main"/>
           <a:p xmlns:a="http://schemas.openxmlformats.org/drawingml/2006/main">
             <a:pPr algn="l">
+              <a:buNone/>
               <a:defRPr sz="2100" b="1" i="0">
                 <a:solidFill>
                   <a:srgbClr val="48B985"/>
@@ -21750,6 +22105,7 @@
           <a:lstStyle xmlns:a="http://schemas.openxmlformats.org/drawingml/2006/main"/>
           <a:p xmlns:a="http://schemas.openxmlformats.org/drawingml/2006/main">
             <a:pPr algn="l">
+              <a:buNone/>
               <a:defRPr sz="1500" b="0" i="0">
                 <a:solidFill>
                   <a:srgbClr val="163C2C"/>
@@ -21800,6 +22156,7 @@
           <a:lstStyle xmlns:a="http://schemas.openxmlformats.org/drawingml/2006/main"/>
           <a:p xmlns:a="http://schemas.openxmlformats.org/drawingml/2006/main">
             <a:pPr algn="l">
+              <a:buNone/>
               <a:defRPr sz="2100" b="1" i="0">
                 <a:solidFill>
                   <a:srgbClr val="48B985"/>
@@ -21850,6 +22207,7 @@
           <a:lstStyle xmlns:a="http://schemas.openxmlformats.org/drawingml/2006/main"/>
           <a:p xmlns:a="http://schemas.openxmlformats.org/drawingml/2006/main">
             <a:pPr algn="l">
+              <a:buNone/>
               <a:defRPr sz="1500" b="0" i="0">
                 <a:solidFill>
                   <a:srgbClr val="163C2C"/>
@@ -21900,6 +22258,7 @@
           <a:lstStyle xmlns:a="http://schemas.openxmlformats.org/drawingml/2006/main"/>
           <a:p xmlns:a="http://schemas.openxmlformats.org/drawingml/2006/main">
             <a:pPr algn="l">
+              <a:buNone/>
               <a:defRPr sz="1500" b="1" i="0">
                 <a:solidFill>
                   <a:srgbClr val="61786E"/>
@@ -22012,6 +22371,7 @@
           <a:lstStyle xmlns:a="http://schemas.openxmlformats.org/drawingml/2006/main"/>
           <a:p xmlns:a="http://schemas.openxmlformats.org/drawingml/2006/main">
             <a:pPr algn="l">
+              <a:buNone/>
               <a:defRPr sz="1125" b="1" i="0">
                 <a:solidFill>
                   <a:srgbClr val="7FA847"/>
@@ -22062,6 +22422,7 @@
           <a:lstStyle xmlns:a="http://schemas.openxmlformats.org/drawingml/2006/main"/>
           <a:p xmlns:a="http://schemas.openxmlformats.org/drawingml/2006/main">
             <a:pPr algn="l">
+              <a:buNone/>
               <a:defRPr sz="3150" b="1" i="0">
                 <a:solidFill>
                   <a:srgbClr val="163C2C"/>
@@ -22112,6 +22473,7 @@
           <a:lstStyle xmlns:a="http://schemas.openxmlformats.org/drawingml/2006/main"/>
           <a:p xmlns:a="http://schemas.openxmlformats.org/drawingml/2006/main">
             <a:pPr algn="l">
+              <a:buNone/>
               <a:defRPr sz="1500" b="0" i="0">
                 <a:solidFill>
                   <a:srgbClr val="61786E"/>
@@ -22193,6 +22555,7 @@
           <a:lstStyle xmlns:a="http://schemas.openxmlformats.org/drawingml/2006/main"/>
           <a:p xmlns:a="http://schemas.openxmlformats.org/drawingml/2006/main">
             <a:pPr algn="l">
+              <a:buNone/>
               <a:defRPr sz="900" b="1" i="0">
                 <a:solidFill>
                   <a:srgbClr val="7F9389"/>
@@ -22243,6 +22606,7 @@
           <a:lstStyle xmlns:a="http://schemas.openxmlformats.org/drawingml/2006/main"/>
           <a:p xmlns:a="http://schemas.openxmlformats.org/drawingml/2006/main">
             <a:pPr algn="r">
+              <a:buNone/>
               <a:defRPr sz="900" b="1" i="0">
                 <a:solidFill>
                   <a:srgbClr val="7F9389"/>
@@ -22454,6 +22818,7 @@
           <a:lstStyle xmlns:a="http://schemas.openxmlformats.org/drawingml/2006/main"/>
           <a:p xmlns:a="http://schemas.openxmlformats.org/drawingml/2006/main">
             <a:pPr algn="l">
+              <a:buNone/>
               <a:defRPr sz="1200" b="0" i="0">
                 <a:solidFill>
                   <a:srgbClr val="F7FBF8"/>
@@ -22471,6 +22836,7 @@
           </a:p>
           <a:p xmlns:a="http://schemas.openxmlformats.org/drawingml/2006/main">
             <a:pPr algn="l">
+              <a:buNone/>
               <a:defRPr sz="1200" b="0" i="0">
                 <a:solidFill>
                   <a:srgbClr val="F7FBF8"/>
@@ -22488,6 +22854,7 @@
           </a:p>
           <a:p xmlns:a="http://schemas.openxmlformats.org/drawingml/2006/main">
             <a:pPr algn="l">
+              <a:buNone/>
               <a:defRPr sz="1200" b="0" i="0">
                 <a:solidFill>
                   <a:srgbClr val="F7FBF8"/>
@@ -22505,6 +22872,7 @@
           </a:p>
           <a:p xmlns:a="http://schemas.openxmlformats.org/drawingml/2006/main">
             <a:pPr algn="l">
+              <a:buNone/>
               <a:defRPr sz="1200" b="0" i="0">
                 <a:solidFill>
                   <a:srgbClr val="F7FBF8"/>
@@ -22522,6 +22890,7 @@
           </a:p>
           <a:p xmlns:a="http://schemas.openxmlformats.org/drawingml/2006/main">
             <a:pPr algn="l">
+              <a:buNone/>
               <a:defRPr sz="1200" b="0" i="0">
                 <a:solidFill>
                   <a:srgbClr val="F7FBF8"/>
@@ -22539,6 +22908,7 @@
           </a:p>
           <a:p xmlns:a="http://schemas.openxmlformats.org/drawingml/2006/main">
             <a:pPr algn="l">
+              <a:buNone/>
               <a:defRPr sz="1200" b="0" i="0">
                 <a:solidFill>
                   <a:srgbClr val="F7FBF8"/>
@@ -22556,6 +22926,7 @@
           </a:p>
           <a:p xmlns:a="http://schemas.openxmlformats.org/drawingml/2006/main">
             <a:pPr algn="l">
+              <a:buNone/>
               <a:defRPr sz="1200" b="0" i="0">
                 <a:solidFill>
                   <a:srgbClr val="F7FBF8"/>
@@ -22573,6 +22944,7 @@
           </a:p>
           <a:p xmlns:a="http://schemas.openxmlformats.org/drawingml/2006/main">
             <a:pPr algn="l">
+              <a:buNone/>
               <a:defRPr sz="1200" b="0" i="0">
                 <a:solidFill>
                   <a:srgbClr val="F7FBF8"/>
@@ -22590,6 +22962,7 @@
           </a:p>
           <a:p xmlns:a="http://schemas.openxmlformats.org/drawingml/2006/main">
             <a:pPr algn="l">
+              <a:buNone/>
               <a:defRPr sz="1200" b="0" i="0">
                 <a:solidFill>
                   <a:srgbClr val="F7FBF8"/>
@@ -22640,6 +23013,7 @@
           <a:lstStyle xmlns:a="http://schemas.openxmlformats.org/drawingml/2006/main"/>
           <a:p xmlns:a="http://schemas.openxmlformats.org/drawingml/2006/main">
             <a:pPr algn="l">
+              <a:buNone/>
               <a:defRPr sz="1200" b="1" i="0">
                 <a:solidFill>
                   <a:srgbClr val="48B985"/>
@@ -22851,6 +23225,7 @@
           <a:lstStyle xmlns:a="http://schemas.openxmlformats.org/drawingml/2006/main"/>
           <a:p xmlns:a="http://schemas.openxmlformats.org/drawingml/2006/main">
             <a:pPr algn="l">
+              <a:buNone/>
               <a:defRPr sz="1200" b="0" i="0">
                 <a:solidFill>
                   <a:srgbClr val="F7FBF8"/>
@@ -22868,6 +23243,7 @@
           </a:p>
           <a:p xmlns:a="http://schemas.openxmlformats.org/drawingml/2006/main">
             <a:pPr algn="l">
+              <a:buNone/>
               <a:defRPr sz="1200" b="0" i="0">
                 <a:solidFill>
                   <a:srgbClr val="F7FBF8"/>
@@ -22885,6 +23261,7 @@
           </a:p>
           <a:p xmlns:a="http://schemas.openxmlformats.org/drawingml/2006/main">
             <a:pPr algn="l">
+              <a:buNone/>
               <a:defRPr sz="1200" b="0" i="0">
                 <a:solidFill>
                   <a:srgbClr val="F7FBF8"/>
@@ -22902,6 +23279,7 @@
           </a:p>
           <a:p xmlns:a="http://schemas.openxmlformats.org/drawingml/2006/main">
             <a:pPr algn="l">
+              <a:buNone/>
               <a:defRPr sz="1200" b="0" i="0">
                 <a:solidFill>
                   <a:srgbClr val="F7FBF8"/>
@@ -22919,6 +23297,7 @@
           </a:p>
           <a:p xmlns:a="http://schemas.openxmlformats.org/drawingml/2006/main">
             <a:pPr algn="l">
+              <a:buNone/>
               <a:defRPr sz="1200" b="0" i="0">
                 <a:solidFill>
                   <a:srgbClr val="F7FBF8"/>
@@ -22936,6 +23315,7 @@
           </a:p>
           <a:p xmlns:a="http://schemas.openxmlformats.org/drawingml/2006/main">
             <a:pPr algn="l">
+              <a:buNone/>
               <a:defRPr sz="1200" b="0" i="0">
                 <a:solidFill>
                   <a:srgbClr val="F7FBF8"/>
@@ -22953,6 +23333,7 @@
           </a:p>
           <a:p xmlns:a="http://schemas.openxmlformats.org/drawingml/2006/main">
             <a:pPr algn="l">
+              <a:buNone/>
               <a:defRPr sz="1200" b="0" i="0">
                 <a:solidFill>
                   <a:srgbClr val="F7FBF8"/>
@@ -22970,6 +23351,7 @@
           </a:p>
           <a:p xmlns:a="http://schemas.openxmlformats.org/drawingml/2006/main">
             <a:pPr algn="l">
+              <a:buNone/>
               <a:defRPr sz="1200" b="0" i="0">
                 <a:solidFill>
                   <a:srgbClr val="F7FBF8"/>
@@ -23055,6 +23437,7 @@
           <a:lstStyle xmlns:a="http://schemas.openxmlformats.org/drawingml/2006/main"/>
           <a:p xmlns:a="http://schemas.openxmlformats.org/drawingml/2006/main">
             <a:pPr algn="ctr">
+              <a:buNone/>
               <a:defRPr sz="1500" b="1" i="0">
                 <a:solidFill>
                   <a:srgbClr val="163C2C"/>
@@ -23167,6 +23550,7 @@
           <a:lstStyle xmlns:a="http://schemas.openxmlformats.org/drawingml/2006/main"/>
           <a:p xmlns:a="http://schemas.openxmlformats.org/drawingml/2006/main">
             <a:pPr algn="l">
+              <a:buNone/>
               <a:defRPr sz="1125" b="1" i="0">
                 <a:solidFill>
                   <a:srgbClr val="48B985"/>
@@ -23217,6 +23601,7 @@
           <a:lstStyle xmlns:a="http://schemas.openxmlformats.org/drawingml/2006/main"/>
           <a:p xmlns:a="http://schemas.openxmlformats.org/drawingml/2006/main">
             <a:pPr algn="l">
+              <a:buNone/>
               <a:defRPr sz="3150" b="1" i="0">
                 <a:solidFill>
                   <a:srgbClr val="163C2C"/>
@@ -23267,6 +23652,7 @@
           <a:lstStyle xmlns:a="http://schemas.openxmlformats.org/drawingml/2006/main"/>
           <a:p xmlns:a="http://schemas.openxmlformats.org/drawingml/2006/main">
             <a:pPr algn="l">
+              <a:buNone/>
               <a:defRPr sz="1500" b="0" i="0">
                 <a:solidFill>
                   <a:srgbClr val="61786E"/>
@@ -23348,6 +23734,7 @@
           <a:lstStyle xmlns:a="http://schemas.openxmlformats.org/drawingml/2006/main"/>
           <a:p xmlns:a="http://schemas.openxmlformats.org/drawingml/2006/main">
             <a:pPr algn="l">
+              <a:buNone/>
               <a:defRPr sz="900" b="1" i="0">
                 <a:solidFill>
                   <a:srgbClr val="7F9389"/>
@@ -23398,6 +23785,7 @@
           <a:lstStyle xmlns:a="http://schemas.openxmlformats.org/drawingml/2006/main"/>
           <a:p xmlns:a="http://schemas.openxmlformats.org/drawingml/2006/main">
             <a:pPr algn="r">
+              <a:buNone/>
               <a:defRPr sz="900" b="1" i="0">
                 <a:solidFill>
                   <a:srgbClr val="7F9389"/>
@@ -23483,6 +23871,7 @@
           <a:lstStyle xmlns:a="http://schemas.openxmlformats.org/drawingml/2006/main"/>
           <a:p xmlns:a="http://schemas.openxmlformats.org/drawingml/2006/main">
             <a:pPr algn="l">
+              <a:buNone/>
               <a:defRPr sz="1200" b="1" i="0">
                 <a:solidFill>
                   <a:srgbClr val="6FAF8D"/>
@@ -23533,6 +23922,7 @@
           <a:lstStyle xmlns:a="http://schemas.openxmlformats.org/drawingml/2006/main"/>
           <a:p xmlns:a="http://schemas.openxmlformats.org/drawingml/2006/main">
             <a:pPr algn="l">
+              <a:buNone/>
               <a:defRPr sz="1725" b="0" i="0">
                 <a:solidFill>
                   <a:srgbClr val="163C2C"/>
@@ -23550,6 +23940,7 @@
           </a:p>
           <a:p xmlns:a="http://schemas.openxmlformats.org/drawingml/2006/main">
             <a:pPr algn="l">
+              <a:buNone/>
               <a:defRPr sz="1725" b="0" i="0">
                 <a:solidFill>
                   <a:srgbClr val="163C2C"/>
@@ -23567,6 +23958,7 @@
           </a:p>
           <a:p xmlns:a="http://schemas.openxmlformats.org/drawingml/2006/main">
             <a:pPr algn="l">
+              <a:buNone/>
               <a:defRPr sz="1725" b="0" i="0">
                 <a:solidFill>
                   <a:srgbClr val="163C2C"/>
@@ -23584,6 +23976,7 @@
           </a:p>
           <a:p xmlns:a="http://schemas.openxmlformats.org/drawingml/2006/main">
             <a:pPr algn="l">
+              <a:buNone/>
               <a:defRPr sz="1725" b="0" i="0">
                 <a:solidFill>
                   <a:srgbClr val="163C2C"/>
@@ -23665,6 +24058,7 @@
           <a:lstStyle xmlns:a="http://schemas.openxmlformats.org/drawingml/2006/main"/>
           <a:p xmlns:a="http://schemas.openxmlformats.org/drawingml/2006/main">
             <a:pPr algn="ctr">
+              <a:buNone/>
               <a:defRPr sz="2250" b="1" i="0">
                 <a:solidFill>
                   <a:srgbClr val="F7FBF8"/>
@@ -24375,6 +24769,7 @@
           <a:lstStyle xmlns:a="http://schemas.openxmlformats.org/drawingml/2006/main"/>
           <a:p xmlns:a="http://schemas.openxmlformats.org/drawingml/2006/main">
             <a:pPr algn="ctr">
+              <a:buNone/>
               <a:defRPr sz="1800" b="1" i="0">
                 <a:solidFill>
                   <a:srgbClr val="163C2C"/>

--- a/slides/google-adk-voice-agents-workshop.pptx
+++ b/slides/google-adk-voice-agents-workshop.pptx
@@ -2,30 +2,31 @@
 <file path=ppt/presentation.xml><?xml version="1.0" encoding="utf-8"?>
 <p:presentation xmlns:p="http://schemas.openxmlformats.org/presentationml/2006/main">
   <p:sldMasterIdLst>
-    <p:sldMasterId xmlns:r="http://schemas.openxmlformats.org/officeDocument/2006/relationships" id="2147483648" r:id="R56ca2458ce794941"/>
+    <p:sldMasterId xmlns:r="http://schemas.openxmlformats.org/officeDocument/2006/relationships" id="2147483648" r:id="Re3317b137f004d1b"/>
   </p:sldMasterIdLst>
   <p:notesMasterIdLst>
-    <p:notesMasterId xmlns:r="http://schemas.openxmlformats.org/officeDocument/2006/relationships" r:id="Rd772345d9f2446c1"/>
+    <p:notesMasterId xmlns:r="http://schemas.openxmlformats.org/officeDocument/2006/relationships" r:id="Rcdfba4fe100b4263"/>
   </p:notesMasterIdLst>
   <p:sldIdLst>
-    <p:sldId xmlns:r="http://schemas.openxmlformats.org/officeDocument/2006/relationships" id="256" r:id="R6463ea99a05c4e4c"/>
-    <p:sldId xmlns:r="http://schemas.openxmlformats.org/officeDocument/2006/relationships" id="257" r:id="R0964bc063c904b43"/>
-    <p:sldId xmlns:r="http://schemas.openxmlformats.org/officeDocument/2006/relationships" id="258" r:id="Ref1f2d2bb9bc4725"/>
-    <p:sldId xmlns:r="http://schemas.openxmlformats.org/officeDocument/2006/relationships" id="259" r:id="R03d1c9713f8a48ff"/>
-    <p:sldId xmlns:r="http://schemas.openxmlformats.org/officeDocument/2006/relationships" id="260" r:id="R82466c59ed0d47ca"/>
-    <p:sldId xmlns:r="http://schemas.openxmlformats.org/officeDocument/2006/relationships" id="261" r:id="Rb9306da1a28043ad"/>
-    <p:sldId xmlns:r="http://schemas.openxmlformats.org/officeDocument/2006/relationships" id="262" r:id="Rf08433a980c3456c"/>
-    <p:sldId xmlns:r="http://schemas.openxmlformats.org/officeDocument/2006/relationships" id="263" r:id="Rba28c1e09ad44056"/>
-    <p:sldId xmlns:r="http://schemas.openxmlformats.org/officeDocument/2006/relationships" id="264" r:id="R19e850bedfe440cd"/>
-    <p:sldId xmlns:r="http://schemas.openxmlformats.org/officeDocument/2006/relationships" id="265" r:id="R2540675fffbe4a79"/>
-    <p:sldId xmlns:r="http://schemas.openxmlformats.org/officeDocument/2006/relationships" id="266" r:id="R43ab2b4fea9e4073"/>
-    <p:sldId xmlns:r="http://schemas.openxmlformats.org/officeDocument/2006/relationships" id="267" r:id="R06cdcaf8f1504320"/>
-    <p:sldId xmlns:r="http://schemas.openxmlformats.org/officeDocument/2006/relationships" id="268" r:id="Rdc6ab13349e44b14"/>
-    <p:sldId xmlns:r="http://schemas.openxmlformats.org/officeDocument/2006/relationships" id="269" r:id="R61cef4086e1a4c43"/>
-    <p:sldId xmlns:r="http://schemas.openxmlformats.org/officeDocument/2006/relationships" id="270" r:id="R244e9631a10146f7"/>
-    <p:sldId xmlns:r="http://schemas.openxmlformats.org/officeDocument/2006/relationships" id="271" r:id="Racc6f83b4f6c410b"/>
-    <p:sldId xmlns:r="http://schemas.openxmlformats.org/officeDocument/2006/relationships" id="272" r:id="R229eb3109ba34c01"/>
-    <p:sldId xmlns:r="http://schemas.openxmlformats.org/officeDocument/2006/relationships" id="273" r:id="R24b2d98e6c8741ac"/>
+    <p:sldId xmlns:r="http://schemas.openxmlformats.org/officeDocument/2006/relationships" id="256" r:id="Rf93c48c872414bcb"/>
+    <p:sldId xmlns:r="http://schemas.openxmlformats.org/officeDocument/2006/relationships" id="257" r:id="R0fe7fa54c1cb40f2"/>
+    <p:sldId xmlns:r="http://schemas.openxmlformats.org/officeDocument/2006/relationships" id="258" r:id="R15bfbf3e47a347f8"/>
+    <p:sldId xmlns:r="http://schemas.openxmlformats.org/officeDocument/2006/relationships" id="259" r:id="R95a7f76df4f94c4c"/>
+    <p:sldId xmlns:r="http://schemas.openxmlformats.org/officeDocument/2006/relationships" id="260" r:id="R5cbe641889e04701"/>
+    <p:sldId xmlns:r="http://schemas.openxmlformats.org/officeDocument/2006/relationships" id="261" r:id="Rd1837a57626447cf"/>
+    <p:sldId xmlns:r="http://schemas.openxmlformats.org/officeDocument/2006/relationships" id="262" r:id="R994af2c31ece4590"/>
+    <p:sldId xmlns:r="http://schemas.openxmlformats.org/officeDocument/2006/relationships" id="263" r:id="Reca15ecc0ed4444b"/>
+    <p:sldId xmlns:r="http://schemas.openxmlformats.org/officeDocument/2006/relationships" id="264" r:id="Rdc95ef556803427d"/>
+    <p:sldId xmlns:r="http://schemas.openxmlformats.org/officeDocument/2006/relationships" id="265" r:id="R932e07984f154a4d"/>
+    <p:sldId xmlns:r="http://schemas.openxmlformats.org/officeDocument/2006/relationships" id="266" r:id="R58230d2845c2439a"/>
+    <p:sldId xmlns:r="http://schemas.openxmlformats.org/officeDocument/2006/relationships" id="267" r:id="R79a76e3d7bb34091"/>
+    <p:sldId xmlns:r="http://schemas.openxmlformats.org/officeDocument/2006/relationships" id="268" r:id="R107fda83ee344dd6"/>
+    <p:sldId xmlns:r="http://schemas.openxmlformats.org/officeDocument/2006/relationships" id="269" r:id="R4ef39167f93e4c76"/>
+    <p:sldId xmlns:r="http://schemas.openxmlformats.org/officeDocument/2006/relationships" id="270" r:id="R5b712cd9ccad48c6"/>
+    <p:sldId xmlns:r="http://schemas.openxmlformats.org/officeDocument/2006/relationships" id="271" r:id="Ra896699b89104525"/>
+    <p:sldId xmlns:r="http://schemas.openxmlformats.org/officeDocument/2006/relationships" id="272" r:id="Rb3f0ae2a453e48ba"/>
+    <p:sldId xmlns:r="http://schemas.openxmlformats.org/officeDocument/2006/relationships" id="273" r:id="R34eea5c30fac4efc"/>
+    <p:sldId xmlns:r="http://schemas.openxmlformats.org/officeDocument/2006/relationships" id="274" r:id="Rf47eea8bbcd74933"/>
   </p:sldIdLst>
   <p:sldSz cx="12192000" cy="6858000"/>
   <p:notesSz cx="6858000" cy="9144000"/>
@@ -1124,7 +1125,27 @@
           <a:lstStyle xmlns:a="http://schemas.openxmlformats.org/drawingml/2006/main"/>
           <a:p xmlns:a="http://schemas.openxmlformats.org/drawingml/2006/main">
             <a:r>
-              <a:t>Start a 6-minute timer. Invite two fast demos: 30 seconds each. If the slot is 45 minutes, reduce to 3 minutes and ask participants to choose option A only. Target: 7–8 minutes.</a:t>
+              <a:t>Run checkpoint 06 and use the microphone. The room search is read-only and should proceed without approval. Creating the simulated booking request is consequential and should open ADK Web’s confirmation dialog. Reject it once, repeat the request, and approve it. Emphasize that validation happens in Python and that success creates only a simulated request—not a real booking. ADK currently marks tool confirmation experimental, so real deployments should validate it carefully or use a durable approval workflow. Remaining production work includes authentication, authorization, durable storage, idempotency, calendar integration, retries, circuit breakers, session resumption, rate limits, WebSocket controls, observability, transcript privacy, secret management, accessibility, and conversation evals.</a:t>
+            </a:r>
+          </a:p>
+          <a:p xmlns:a="http://schemas.openxmlformats.org/drawingml/2006/main">
+            <a:r>
+              <a:t/>
+            </a:r>
+          </a:p>
+          <a:p xmlns:a="http://schemas.openxmlformats.org/drawingml/2006/main">
+            <a:r>
+              <a:t>[Sources]</a:t>
+            </a:r>
+          </a:p>
+          <a:p xmlns:a="http://schemas.openxmlformats.org/drawingml/2006/main">
+            <a:r>
+              <a:t>- https://adk.dev/tools-custom/confirmation/</a:t>
+            </a:r>
+          </a:p>
+          <a:p xmlns:a="http://schemas.openxmlformats.org/drawingml/2006/main">
+            <a:r>
+              <a:t>[/Sources]</a:t>
             </a:r>
           </a:p>
         </p:txBody>
@@ -1155,6 +1176,76 @@
 </file>
 
 <file path=ppt/notesSlides/notesSlide18.xml><?xml version="1.0" encoding="utf-8"?>
+<p:notes xmlns:p="http://schemas.openxmlformats.org/presentationml/2006/main">
+  <p:cSld>
+    <p:spTree>
+      <p:nvGrpSpPr>
+        <p:cNvPr id="1" name=""/>
+        <p:cNvGrpSpPr/>
+        <p:nvPr/>
+      </p:nvGrpSpPr>
+      <p:grpSpPr>
+        <a:xfrm xmlns:a="http://schemas.openxmlformats.org/drawingml/2006/main"/>
+      </p:grpSpPr>
+      <p:sp>
+        <p:nvSpPr>
+          <p:cNvPr id="2" name="Slide Image Placeholder 1"/>
+          <p:cNvSpPr>
+            <a:spLocks xmlns:a="http://schemas.openxmlformats.org/drawingml/2006/main" noGrp="1"/>
+          </p:cNvSpPr>
+          <p:nvPr>
+            <p:ph type="sldImg" idx="0"/>
+          </p:nvPr>
+        </p:nvSpPr>
+        <p:spPr/>
+      </p:sp>
+      <p:sp>
+        <p:nvSpPr>
+          <p:cNvPr id="3" name="Notes Placeholder 2"/>
+          <p:cNvSpPr>
+            <a:spLocks xmlns:a="http://schemas.openxmlformats.org/drawingml/2006/main" noGrp="1"/>
+          </p:cNvSpPr>
+          <p:nvPr>
+            <p:ph type="body" idx="1"/>
+          </p:nvPr>
+        </p:nvSpPr>
+        <p:spPr/>
+        <p:txBody>
+          <a:bodyPr xmlns:a="http://schemas.openxmlformats.org/drawingml/2006/main"/>
+          <a:lstStyle xmlns:a="http://schemas.openxmlformats.org/drawingml/2006/main"/>
+          <a:p xmlns:a="http://schemas.openxmlformats.org/drawingml/2006/main">
+            <a:r>
+              <a:t>Start a 6-minute timer. Invite two fast demos: 30 seconds each. If the slot is 45 minutes, reduce to 3 minutes and ask participants to choose option A only. Target: 7–8 minutes.</a:t>
+            </a:r>
+          </a:p>
+        </p:txBody>
+      </p:sp>
+      <p:sp>
+        <p:nvSpPr>
+          <p:cNvPr id="4" name="Slide Number Placeholder 3"/>
+          <p:cNvSpPr>
+            <a:spLocks xmlns:a="http://schemas.openxmlformats.org/drawingml/2006/main" noGrp="1"/>
+          </p:cNvSpPr>
+          <p:nvPr>
+            <p:ph type="sldNum" idx="5"/>
+          </p:nvPr>
+        </p:nvSpPr>
+        <p:spPr/>
+        <p:txBody>
+          <a:bodyPr xmlns:a="http://schemas.openxmlformats.org/drawingml/2006/main"/>
+          <a:lstStyle xmlns:a="http://schemas.openxmlformats.org/drawingml/2006/main"/>
+          <a:p xmlns:a="http://schemas.openxmlformats.org/drawingml/2006/main"/>
+        </p:txBody>
+      </p:sp>
+    </p:spTree>
+  </p:cSld>
+  <p:clrMapOvr>
+    <a:masterClrMapping xmlns:a="http://schemas.openxmlformats.org/drawingml/2006/main"/>
+  </p:clrMapOvr>
+</p:notes>
+</file>
+
+<file path=ppt/notesSlides/notesSlide19.xml><?xml version="1.0" encoding="utf-8"?>
 <p:notes xmlns:p="http://schemas.openxmlformats.org/presentationml/2006/main">
   <p:cSld>
     <p:spTree>
@@ -1901,7 +1992,7 @@
   </p:cSld>
   <p:clrMap bg1="lt1" tx1="dk1" bg2="lt2" tx2="dk2" accent1="accent1" accent2="accent2" accent3="accent3" accent4="accent4" accent5="accent5" accent6="accent6" hlink="hlink" folHlink="folHlink"/>
   <p:sldLayoutIdLst>
-    <p:sldLayoutId xmlns:r="http://schemas.openxmlformats.org/officeDocument/2006/relationships" id="2147483649" r:id="Re9a47de645ab429c"/>
+    <p:sldLayoutId xmlns:r="http://schemas.openxmlformats.org/officeDocument/2006/relationships" id="2147483649" r:id="Ra7554aa91faa42a8"/>
   </p:sldLayoutIdLst>
   <p:txStyles>
     <p:titleStyle>
@@ -12361,10 +12452,10 @@
       </p:grpSpPr>
       <p:sp>
         <p:nvSpPr>
-          <p:cNvPr id="28" name="">
-            <a:extLst xmlns:a="http://schemas.openxmlformats.org/drawingml/2006/main">
-              <a:ext uri="{FF2B5EF4-FFF2-40B4-BE49-F238E27FC236}">
-                <a16:creationId xmlns:a16="http://schemas.microsoft.com/office/drawing/2014/main" id="{66DD41AC-F0A5-4BC3-BEE1-00E71921AF32}"/>
+          <p:cNvPr id="19" name="">
+            <a:extLst xmlns:a="http://schemas.openxmlformats.org/drawingml/2006/main">
+              <a:ext uri="{FF2B5EF4-FFF2-40B4-BE49-F238E27FC236}">
+                <a16:creationId xmlns:a16="http://schemas.microsoft.com/office/drawing/2014/main" id="{5F27BD47-2CF7-43D3-ADC0-9DB8FDFC05B3}"/>
               </a:ext>
             </a:extLst>
           </p:cNvPr>
@@ -12397,7 +12488,7 @@
           <p:cNvPr id="2" name="">
             <a:extLst xmlns:a="http://schemas.openxmlformats.org/drawingml/2006/main">
               <a:ext uri="{FF2B5EF4-FFF2-40B4-BE49-F238E27FC236}">
-                <a16:creationId xmlns:a16="http://schemas.microsoft.com/office/drawing/2014/main" id="{FB590C59-0AEE-4824-8DBE-F2ACE15666EB}"/>
+                <a16:creationId xmlns:a16="http://schemas.microsoft.com/office/drawing/2014/main" id="{1315C8C5-1E7F-4F4D-83E8-696FD1193883}"/>
               </a:ext>
             </a:extLst>
           </p:cNvPr>
@@ -12438,7 +12529,7 @@
                   <a:srgbClr val="48B985"/>
                 </a:solidFill>
               </a:rPr>
-              <a:t>Choose your challenge</a:t>
+              <a:t>Checkpoint 06 · Production</a:t>
             </a:r>
           </a:p>
         </p:txBody>
@@ -12448,7 +12539,7 @@
           <p:cNvPr id="3" name="">
             <a:extLst xmlns:a="http://schemas.openxmlformats.org/drawingml/2006/main">
               <a:ext uri="{FF2B5EF4-FFF2-40B4-BE49-F238E27FC236}">
-                <a16:creationId xmlns:a16="http://schemas.microsoft.com/office/drawing/2014/main" id="{AE0A07A0-CDDB-449F-8221-B925C3C1F958}"/>
+                <a16:creationId xmlns:a16="http://schemas.microsoft.com/office/drawing/2014/main" id="{B7CB9BC7-A479-43E7-BED2-5AB898576863}"/>
               </a:ext>
             </a:extLst>
           </p:cNvPr>
@@ -12489,7 +12580,7 @@
                   <a:srgbClr val="163C2C"/>
                 </a:solidFill>
               </a:rPr>
-              <a:t>Mini challenge: make the agent production-friendlier</a:t>
+              <a:t>Put approval around the write</a:t>
             </a:r>
           </a:p>
         </p:txBody>
@@ -12499,7 +12590,7 @@
           <p:cNvPr id="4" name="">
             <a:extLst xmlns:a="http://schemas.openxmlformats.org/drawingml/2006/main">
               <a:ext uri="{FF2B5EF4-FFF2-40B4-BE49-F238E27FC236}">
-                <a16:creationId xmlns:a16="http://schemas.microsoft.com/office/drawing/2014/main" id="{3849C590-F089-41A3-B353-F84AEB57B111}"/>
+                <a16:creationId xmlns:a16="http://schemas.microsoft.com/office/drawing/2014/main" id="{456ECDF4-34C3-47BD-8A4C-EF286F65CFA2}"/>
               </a:ext>
             </a:extLst>
           </p:cNvPr>
@@ -12540,7 +12631,7 @@
                   <a:srgbClr val="61786E"/>
                 </a:solidFill>
               </a:rPr>
-              <a:t>Choose one improvement. Prove it with one adversarial test.</a:t>
+              <a:t>Search freely. Validate in Python. Confirm before the simulated write.</a:t>
             </a:r>
           </a:p>
         </p:txBody>
@@ -12550,7 +12641,7 @@
           <p:cNvPr id="5" name="">
             <a:extLst xmlns:a="http://schemas.openxmlformats.org/drawingml/2006/main">
               <a:ext uri="{FF2B5EF4-FFF2-40B4-BE49-F238E27FC236}">
-                <a16:creationId xmlns:a16="http://schemas.microsoft.com/office/drawing/2014/main" id="{6C73595A-7837-4124-AB18-97CDF05F4A85}"/>
+                <a16:creationId xmlns:a16="http://schemas.microsoft.com/office/drawing/2014/main" id="{C9AE1432-D999-4BB7-8EF5-52EC9A8CFF8D}"/>
               </a:ext>
             </a:extLst>
           </p:cNvPr>
@@ -12581,7 +12672,7 @@
           <p:cNvPr id="6" name="">
             <a:extLst xmlns:a="http://schemas.openxmlformats.org/drawingml/2006/main">
               <a:ext uri="{FF2B5EF4-FFF2-40B4-BE49-F238E27FC236}">
-                <a16:creationId xmlns:a16="http://schemas.microsoft.com/office/drawing/2014/main" id="{A732E4B9-52A2-4490-B437-3131F2381AA4}"/>
+                <a16:creationId xmlns:a16="http://schemas.microsoft.com/office/drawing/2014/main" id="{11632AAE-B6D2-4481-822B-C85891697560}"/>
               </a:ext>
             </a:extLst>
           </p:cNvPr>
@@ -12632,7 +12723,7 @@
           <p:cNvPr id="7" name="">
             <a:extLst xmlns:a="http://schemas.openxmlformats.org/drawingml/2006/main">
               <a:ext uri="{FF2B5EF4-FFF2-40B4-BE49-F238E27FC236}">
-                <a16:creationId xmlns:a16="http://schemas.microsoft.com/office/drawing/2014/main" id="{4C1F1102-653A-41FC-A936-23A975DAD491}"/>
+                <a16:creationId xmlns:a16="http://schemas.microsoft.com/office/drawing/2014/main" id="{17A2C90F-9492-4836-8EB3-1B35A31214BC}"/>
               </a:ext>
             </a:extLst>
           </p:cNvPr>
@@ -12683,79 +12774,100 @@
           <p:cNvPr id="8" name="">
             <a:extLst xmlns:a="http://schemas.openxmlformats.org/drawingml/2006/main">
               <a:ext uri="{FF2B5EF4-FFF2-40B4-BE49-F238E27FC236}">
-                <a16:creationId xmlns:a16="http://schemas.microsoft.com/office/drawing/2014/main" id="{498DD573-63A1-450A-9EF9-EA44E79D2485}"/>
-              </a:ext>
-            </a:extLst>
-          </p:cNvPr>
-          <p:cNvSpPr>
-            <a:spLocks xmlns:a="http://schemas.openxmlformats.org/drawingml/2006/main" noGrp="1"/>
-          </p:cNvSpPr>
-          <p:nvPr/>
-        </p:nvSpPr>
-        <p:spPr>
-          <a:xfrm xmlns:a="http://schemas.openxmlformats.org/drawingml/2006/main">
-            <a:off x="781050" y="2266950"/>
-            <a:ext cx="552450" cy="552450"/>
-          </a:xfrm>
-          <a:prstGeom xmlns:a="http://schemas.openxmlformats.org/drawingml/2006/main" prst="ellipse">
-            <a:avLst/>
-          </a:prstGeom>
-          <a:solidFill xmlns:a="http://schemas.openxmlformats.org/drawingml/2006/main">
-            <a:srgbClr val="48B985"/>
-          </a:solidFill>
-          <a:ln xmlns:a="http://schemas.openxmlformats.org/drawingml/2006/main" w="0">
-            <a:noFill/>
-            <a:prstDash val="solid"/>
-          </a:ln>
-        </p:spPr>
+                <a16:creationId xmlns:a16="http://schemas.microsoft.com/office/drawing/2014/main" id="{D703A52B-5FC1-4B96-88D3-D0714467FE9B}"/>
+              </a:ext>
+            </a:extLst>
+          </p:cNvPr>
+          <p:cNvSpPr>
+            <a:spLocks xmlns:a="http://schemas.openxmlformats.org/drawingml/2006/main" noGrp="1"/>
+          </p:cNvSpPr>
+          <p:nvPr/>
+        </p:nvSpPr>
+        <p:spPr>
+          <a:xfrm xmlns:a="http://schemas.openxmlformats.org/drawingml/2006/main">
+            <a:off x="800100" y="2324100"/>
+            <a:ext cx="1143000" cy="285750"/>
+          </a:xfrm>
+          <a:prstGeom xmlns:a="http://schemas.openxmlformats.org/drawingml/2006/main" prst="rect">
+            <a:avLst/>
+          </a:prstGeom>
+          <a:noFill xmlns:a="http://schemas.openxmlformats.org/drawingml/2006/main"/>
+          <a:ln xmlns:a="http://schemas.openxmlformats.org/drawingml/2006/main" w="0">
+            <a:noFill/>
+            <a:prstDash val="solid"/>
+          </a:ln>
+        </p:spPr>
+        <p:txBody>
+          <a:bodyPr xmlns:a="http://schemas.openxmlformats.org/drawingml/2006/main" anchor="t"/>
+          <a:lstStyle xmlns:a="http://schemas.openxmlformats.org/drawingml/2006/main"/>
+          <a:p xmlns:a="http://schemas.openxmlformats.org/drawingml/2006/main">
+            <a:pPr algn="l">
+              <a:buNone/>
+              <a:defRPr sz="1200" b="1" i="0">
+                <a:solidFill>
+                  <a:srgbClr val="48B985"/>
+                </a:solidFill>
+              </a:defRPr>
+            </a:pPr>
+            <a:r>
+              <a:rPr sz="1200" b="1" i="0">
+                <a:solidFill>
+                  <a:srgbClr val="48B985"/>
+                </a:solidFill>
+              </a:rPr>
+              <a:t>RUN</a:t>
+            </a:r>
+          </a:p>
+        </p:txBody>
       </p:sp>
       <p:sp>
         <p:nvSpPr>
           <p:cNvPr id="9" name="">
             <a:extLst xmlns:a="http://schemas.openxmlformats.org/drawingml/2006/main">
               <a:ext uri="{FF2B5EF4-FFF2-40B4-BE49-F238E27FC236}">
-                <a16:creationId xmlns:a16="http://schemas.microsoft.com/office/drawing/2014/main" id="{341CBAF7-AD84-40BE-AD69-836B1BA33B62}"/>
-              </a:ext>
-            </a:extLst>
-          </p:cNvPr>
-          <p:cNvSpPr>
-            <a:spLocks xmlns:a="http://schemas.openxmlformats.org/drawingml/2006/main" noGrp="1"/>
-          </p:cNvSpPr>
-          <p:nvPr/>
-        </p:nvSpPr>
-        <p:spPr>
-          <a:xfrm xmlns:a="http://schemas.openxmlformats.org/drawingml/2006/main">
-            <a:off x="781050" y="2409825"/>
-            <a:ext cx="552450" cy="247650"/>
-          </a:xfrm>
-          <a:prstGeom xmlns:a="http://schemas.openxmlformats.org/drawingml/2006/main" prst="rect">
-            <a:avLst/>
-          </a:prstGeom>
-          <a:noFill xmlns:a="http://schemas.openxmlformats.org/drawingml/2006/main"/>
-          <a:ln xmlns:a="http://schemas.openxmlformats.org/drawingml/2006/main" w="0">
-            <a:noFill/>
-            <a:prstDash val="solid"/>
-          </a:ln>
-        </p:spPr>
-        <p:txBody>
-          <a:bodyPr xmlns:a="http://schemas.openxmlformats.org/drawingml/2006/main" anchor="t"/>
-          <a:lstStyle xmlns:a="http://schemas.openxmlformats.org/drawingml/2006/main"/>
-          <a:p xmlns:a="http://schemas.openxmlformats.org/drawingml/2006/main">
-            <a:pPr algn="ctr">
-              <a:buNone/>
-              <a:defRPr sz="1500" b="1" i="0">
-                <a:solidFill>
-                  <a:srgbClr val="F7FBF8"/>
-                </a:solidFill>
-              </a:defRPr>
-            </a:pPr>
-            <a:r>
-              <a:rPr sz="1500" b="1" i="0">
-                <a:solidFill>
-                  <a:srgbClr val="F7FBF8"/>
-                </a:solidFill>
-              </a:rPr>
-              <a:t>A</a:t>
+                <a16:creationId xmlns:a16="http://schemas.microsoft.com/office/drawing/2014/main" id="{68140C1B-A826-480C-80F0-F8BAE8DB46DD}"/>
+              </a:ext>
+            </a:extLst>
+          </p:cNvPr>
+          <p:cNvSpPr>
+            <a:spLocks xmlns:a="http://schemas.openxmlformats.org/drawingml/2006/main" noGrp="1"/>
+          </p:cNvSpPr>
+          <p:nvPr/>
+        </p:nvSpPr>
+        <p:spPr>
+          <a:xfrm xmlns:a="http://schemas.openxmlformats.org/drawingml/2006/main">
+            <a:off x="800100" y="2705100"/>
+            <a:ext cx="6667500" cy="514350"/>
+          </a:xfrm>
+          <a:prstGeom xmlns:a="http://schemas.openxmlformats.org/drawingml/2006/main" prst="rect">
+            <a:avLst/>
+          </a:prstGeom>
+          <a:noFill xmlns:a="http://schemas.openxmlformats.org/drawingml/2006/main"/>
+          <a:ln xmlns:a="http://schemas.openxmlformats.org/drawingml/2006/main" w="0">
+            <a:noFill/>
+            <a:prstDash val="solid"/>
+          </a:ln>
+        </p:spPr>
+        <p:txBody>
+          <a:bodyPr xmlns:a="http://schemas.openxmlformats.org/drawingml/2006/main" anchor="t"/>
+          <a:lstStyle xmlns:a="http://schemas.openxmlformats.org/drawingml/2006/main"/>
+          <a:p xmlns:a="http://schemas.openxmlformats.org/drawingml/2006/main">
+            <a:pPr algn="l">
+              <a:buNone/>
+              <a:defRPr sz="2250" b="1" i="0">
+                <a:solidFill>
+                  <a:srgbClr val="163C2C"/>
+                </a:solidFill>
+              </a:defRPr>
+            </a:pPr>
+            <a:r>
+              <a:rPr sz="2250" b="1" i="0">
+                <a:solidFill>
+                  <a:srgbClr val="163C2C"/>
+                </a:solidFill>
+              </a:rPr>
+              <a:t>cd checkpoints/06_production
+uv run adk web</a:t>
             </a:r>
           </a:p>
         </p:txBody>
@@ -12765,19 +12877,19 @@
           <p:cNvPr id="10" name="">
             <a:extLst xmlns:a="http://schemas.openxmlformats.org/drawingml/2006/main">
               <a:ext uri="{FF2B5EF4-FFF2-40B4-BE49-F238E27FC236}">
-                <a16:creationId xmlns:a16="http://schemas.microsoft.com/office/drawing/2014/main" id="{36C1D709-ED43-407D-84D4-E9DCF3435BED}"/>
-              </a:ext>
-            </a:extLst>
-          </p:cNvPr>
-          <p:cNvSpPr>
-            <a:spLocks xmlns:a="http://schemas.openxmlformats.org/drawingml/2006/main" noGrp="1"/>
-          </p:cNvSpPr>
-          <p:nvPr/>
-        </p:nvSpPr>
-        <p:spPr>
-          <a:xfrm xmlns:a="http://schemas.openxmlformats.org/drawingml/2006/main">
-            <a:off x="1524000" y="2305050"/>
-            <a:ext cx="2095500" cy="285750"/>
+                <a16:creationId xmlns:a16="http://schemas.microsoft.com/office/drawing/2014/main" id="{02D2B411-1A09-4012-9CC5-FACB1B516375}"/>
+              </a:ext>
+            </a:extLst>
+          </p:cNvPr>
+          <p:cNvSpPr>
+            <a:spLocks xmlns:a="http://schemas.openxmlformats.org/drawingml/2006/main" noGrp="1"/>
+          </p:cNvSpPr>
+          <p:nvPr/>
+        </p:nvSpPr>
+        <p:spPr>
+          <a:xfrm xmlns:a="http://schemas.openxmlformats.org/drawingml/2006/main">
+            <a:off x="800100" y="3733800"/>
+            <a:ext cx="1143000" cy="285750"/>
           </a:xfrm>
           <a:prstGeom xmlns:a="http://schemas.openxmlformats.org/drawingml/2006/main" prst="rect">
             <a:avLst/>
@@ -12794,19 +12906,19 @@
           <a:p xmlns:a="http://schemas.openxmlformats.org/drawingml/2006/main">
             <a:pPr algn="l">
               <a:buNone/>
-              <a:defRPr sz="1575" b="1" i="0">
-                <a:solidFill>
-                  <a:srgbClr val="163C2C"/>
-                </a:solidFill>
-              </a:defRPr>
-            </a:pPr>
-            <a:r>
-              <a:rPr sz="1575" b="1" i="0">
-                <a:solidFill>
-                  <a:srgbClr val="163C2C"/>
-                </a:solidFill>
-              </a:rPr>
-              <a:t>CONFIRM</a:t>
+              <a:defRPr sz="1200" b="1" i="0">
+                <a:solidFill>
+                  <a:srgbClr val="159A64"/>
+                </a:solidFill>
+              </a:defRPr>
+            </a:pPr>
+            <a:r>
+              <a:rPr sz="1200" b="1" i="0">
+                <a:solidFill>
+                  <a:srgbClr val="159A64"/>
+                </a:solidFill>
+              </a:rPr>
+              <a:t>SAY</a:t>
             </a:r>
           </a:p>
         </p:txBody>
@@ -12816,19 +12928,19 @@
           <p:cNvPr id="11" name="">
             <a:extLst xmlns:a="http://schemas.openxmlformats.org/drawingml/2006/main">
               <a:ext uri="{FF2B5EF4-FFF2-40B4-BE49-F238E27FC236}">
-                <a16:creationId xmlns:a16="http://schemas.microsoft.com/office/drawing/2014/main" id="{84552DCB-EFB4-46F7-B83E-1983F2FE82B0}"/>
-              </a:ext>
-            </a:extLst>
-          </p:cNvPr>
-          <p:cNvSpPr>
-            <a:spLocks xmlns:a="http://schemas.openxmlformats.org/drawingml/2006/main" noGrp="1"/>
-          </p:cNvSpPr>
-          <p:nvPr/>
-        </p:nvSpPr>
-        <p:spPr>
-          <a:xfrm xmlns:a="http://schemas.openxmlformats.org/drawingml/2006/main">
-            <a:off x="1524000" y="2686050"/>
-            <a:ext cx="2324100" cy="533400"/>
+                <a16:creationId xmlns:a16="http://schemas.microsoft.com/office/drawing/2014/main" id="{F64B7297-ACB5-4B28-ABC0-1A58E426FE87}"/>
+              </a:ext>
+            </a:extLst>
+          </p:cNvPr>
+          <p:cNvSpPr>
+            <a:spLocks xmlns:a="http://schemas.openxmlformats.org/drawingml/2006/main" noGrp="1"/>
+          </p:cNvSpPr>
+          <p:nvPr/>
+        </p:nvSpPr>
+        <p:spPr>
+          <a:xfrm xmlns:a="http://schemas.openxmlformats.org/drawingml/2006/main">
+            <a:off x="800100" y="4114800"/>
+            <a:ext cx="6191250" cy="704850"/>
           </a:xfrm>
           <a:prstGeom xmlns:a="http://schemas.openxmlformats.org/drawingml/2006/main" prst="rect">
             <a:avLst/>
@@ -12845,19 +12957,20 @@
           <a:p xmlns:a="http://schemas.openxmlformats.org/drawingml/2006/main">
             <a:pPr algn="l">
               <a:buNone/>
-              <a:defRPr sz="1425" b="0" i="0">
-                <a:solidFill>
-                  <a:srgbClr val="61786E"/>
-                </a:solidFill>
-              </a:defRPr>
-            </a:pPr>
-            <a:r>
-              <a:rPr sz="1425" b="0" i="0">
-                <a:solidFill>
-                  <a:srgbClr val="61786E"/>
-                </a:solidFill>
-              </a:rPr>
-              <a:t>Ask before booking</a:t>
+              <a:defRPr sz="2025" b="0" i="1">
+                <a:solidFill>
+                  <a:srgbClr val="159A64"/>
+                </a:solidFill>
+              </a:defRPr>
+            </a:pPr>
+            <a:r>
+              <a:rPr sz="2025" b="0" i="1">
+                <a:solidFill>
+                  <a:srgbClr val="159A64"/>
+                </a:solidFill>
+              </a:rPr>
+              <a:t>“Find a room after four for six people,
+then create a 30-minute booking request.”</a:t>
             </a:r>
           </a:p>
         </p:txBody>
@@ -12867,586 +12980,23 @@
           <p:cNvPr id="12" name="">
             <a:extLst xmlns:a="http://schemas.openxmlformats.org/drawingml/2006/main">
               <a:ext uri="{FF2B5EF4-FFF2-40B4-BE49-F238E27FC236}">
-                <a16:creationId xmlns:a16="http://schemas.microsoft.com/office/drawing/2014/main" id="{00E8A215-A100-4B14-9B3F-40069F4F5162}"/>
-              </a:ext>
-            </a:extLst>
-          </p:cNvPr>
-          <p:cNvSpPr>
-            <a:spLocks xmlns:a="http://schemas.openxmlformats.org/drawingml/2006/main" noGrp="1"/>
-          </p:cNvSpPr>
-          <p:nvPr/>
-        </p:nvSpPr>
-        <p:spPr>
-          <a:xfrm xmlns:a="http://schemas.openxmlformats.org/drawingml/2006/main">
-            <a:off x="1524000" y="3333750"/>
-            <a:ext cx="2362200" cy="28575"/>
-          </a:xfrm>
-          <a:prstGeom xmlns:a="http://schemas.openxmlformats.org/drawingml/2006/main" prst="rect">
-            <a:avLst/>
-          </a:prstGeom>
-          <a:solidFill xmlns:a="http://schemas.openxmlformats.org/drawingml/2006/main">
-            <a:srgbClr val="48B985"/>
-          </a:solidFill>
-          <a:ln xmlns:a="http://schemas.openxmlformats.org/drawingml/2006/main" w="0">
-            <a:noFill/>
-            <a:prstDash val="solid"/>
-          </a:ln>
-        </p:spPr>
-      </p:sp>
-      <p:sp>
-        <p:nvSpPr>
-          <p:cNvPr id="13" name="">
-            <a:extLst xmlns:a="http://schemas.openxmlformats.org/drawingml/2006/main">
-              <a:ext uri="{FF2B5EF4-FFF2-40B4-BE49-F238E27FC236}">
-                <a16:creationId xmlns:a16="http://schemas.microsoft.com/office/drawing/2014/main" id="{D09B357F-5748-43F6-A396-1CA51025466D}"/>
-              </a:ext>
-            </a:extLst>
-          </p:cNvPr>
-          <p:cNvSpPr>
-            <a:spLocks xmlns:a="http://schemas.openxmlformats.org/drawingml/2006/main" noGrp="1"/>
-          </p:cNvSpPr>
-          <p:nvPr/>
-        </p:nvSpPr>
-        <p:spPr>
-          <a:xfrm xmlns:a="http://schemas.openxmlformats.org/drawingml/2006/main">
-            <a:off x="4381500" y="2266950"/>
-            <a:ext cx="552450" cy="552450"/>
-          </a:xfrm>
-          <a:prstGeom xmlns:a="http://schemas.openxmlformats.org/drawingml/2006/main" prst="ellipse">
-            <a:avLst/>
-          </a:prstGeom>
-          <a:solidFill xmlns:a="http://schemas.openxmlformats.org/drawingml/2006/main">
-            <a:srgbClr val="7FA847"/>
-          </a:solidFill>
-          <a:ln xmlns:a="http://schemas.openxmlformats.org/drawingml/2006/main" w="0">
-            <a:noFill/>
-            <a:prstDash val="solid"/>
-          </a:ln>
-        </p:spPr>
-      </p:sp>
-      <p:sp>
-        <p:nvSpPr>
-          <p:cNvPr id="14" name="">
-            <a:extLst xmlns:a="http://schemas.openxmlformats.org/drawingml/2006/main">
-              <a:ext uri="{FF2B5EF4-FFF2-40B4-BE49-F238E27FC236}">
-                <a16:creationId xmlns:a16="http://schemas.microsoft.com/office/drawing/2014/main" id="{BD295DEA-634C-464F-BC3C-8D3B486E1E93}"/>
-              </a:ext>
-            </a:extLst>
-          </p:cNvPr>
-          <p:cNvSpPr>
-            <a:spLocks xmlns:a="http://schemas.openxmlformats.org/drawingml/2006/main" noGrp="1"/>
-          </p:cNvSpPr>
-          <p:nvPr/>
-        </p:nvSpPr>
-        <p:spPr>
-          <a:xfrm xmlns:a="http://schemas.openxmlformats.org/drawingml/2006/main">
-            <a:off x="4381500" y="2409825"/>
-            <a:ext cx="552450" cy="247650"/>
-          </a:xfrm>
-          <a:prstGeom xmlns:a="http://schemas.openxmlformats.org/drawingml/2006/main" prst="rect">
-            <a:avLst/>
-          </a:prstGeom>
-          <a:noFill xmlns:a="http://schemas.openxmlformats.org/drawingml/2006/main"/>
-          <a:ln xmlns:a="http://schemas.openxmlformats.org/drawingml/2006/main" w="0">
-            <a:noFill/>
-            <a:prstDash val="solid"/>
-          </a:ln>
-        </p:spPr>
-        <p:txBody>
-          <a:bodyPr xmlns:a="http://schemas.openxmlformats.org/drawingml/2006/main" anchor="t"/>
-          <a:lstStyle xmlns:a="http://schemas.openxmlformats.org/drawingml/2006/main"/>
-          <a:p xmlns:a="http://schemas.openxmlformats.org/drawingml/2006/main">
-            <a:pPr algn="ctr">
-              <a:buNone/>
-              <a:defRPr sz="1500" b="1" i="0">
-                <a:solidFill>
-                  <a:srgbClr val="F7FBF8"/>
-                </a:solidFill>
-              </a:defRPr>
-            </a:pPr>
-            <a:r>
-              <a:rPr sz="1500" b="1" i="0">
-                <a:solidFill>
-                  <a:srgbClr val="F7FBF8"/>
-                </a:solidFill>
-              </a:rPr>
-              <a:t>B</a:t>
-            </a:r>
-          </a:p>
-        </p:txBody>
-      </p:sp>
-      <p:sp>
-        <p:nvSpPr>
-          <p:cNvPr id="15" name="">
-            <a:extLst xmlns:a="http://schemas.openxmlformats.org/drawingml/2006/main">
-              <a:ext uri="{FF2B5EF4-FFF2-40B4-BE49-F238E27FC236}">
-                <a16:creationId xmlns:a16="http://schemas.microsoft.com/office/drawing/2014/main" id="{EA82E086-74D3-48B8-94EB-FD699295CA0C}"/>
-              </a:ext>
-            </a:extLst>
-          </p:cNvPr>
-          <p:cNvSpPr>
-            <a:spLocks xmlns:a="http://schemas.openxmlformats.org/drawingml/2006/main" noGrp="1"/>
-          </p:cNvSpPr>
-          <p:nvPr/>
-        </p:nvSpPr>
-        <p:spPr>
-          <a:xfrm xmlns:a="http://schemas.openxmlformats.org/drawingml/2006/main">
-            <a:off x="5124450" y="2305050"/>
-            <a:ext cx="2095500" cy="285750"/>
-          </a:xfrm>
-          <a:prstGeom xmlns:a="http://schemas.openxmlformats.org/drawingml/2006/main" prst="rect">
-            <a:avLst/>
-          </a:prstGeom>
-          <a:noFill xmlns:a="http://schemas.openxmlformats.org/drawingml/2006/main"/>
-          <a:ln xmlns:a="http://schemas.openxmlformats.org/drawingml/2006/main" w="0">
-            <a:noFill/>
-            <a:prstDash val="solid"/>
-          </a:ln>
-        </p:spPr>
-        <p:txBody>
-          <a:bodyPr xmlns:a="http://schemas.openxmlformats.org/drawingml/2006/main" anchor="t"/>
-          <a:lstStyle xmlns:a="http://schemas.openxmlformats.org/drawingml/2006/main"/>
-          <a:p xmlns:a="http://schemas.openxmlformats.org/drawingml/2006/main">
-            <a:pPr algn="l">
-              <a:buNone/>
-              <a:defRPr sz="1575" b="1" i="0">
-                <a:solidFill>
-                  <a:srgbClr val="163C2C"/>
-                </a:solidFill>
-              </a:defRPr>
-            </a:pPr>
-            <a:r>
-              <a:rPr sz="1575" b="1" i="0">
-                <a:solidFill>
-                  <a:srgbClr val="163C2C"/>
-                </a:solidFill>
-              </a:rPr>
-              <a:t>RECOVER</a:t>
-            </a:r>
-          </a:p>
-        </p:txBody>
-      </p:sp>
-      <p:sp>
-        <p:nvSpPr>
-          <p:cNvPr id="16" name="">
-            <a:extLst xmlns:a="http://schemas.openxmlformats.org/drawingml/2006/main">
-              <a:ext uri="{FF2B5EF4-FFF2-40B4-BE49-F238E27FC236}">
-                <a16:creationId xmlns:a16="http://schemas.microsoft.com/office/drawing/2014/main" id="{33FAB85C-9C54-4AF6-B7DE-4776A393C3D4}"/>
-              </a:ext>
-            </a:extLst>
-          </p:cNvPr>
-          <p:cNvSpPr>
-            <a:spLocks xmlns:a="http://schemas.openxmlformats.org/drawingml/2006/main" noGrp="1"/>
-          </p:cNvSpPr>
-          <p:nvPr/>
-        </p:nvSpPr>
-        <p:spPr>
-          <a:xfrm xmlns:a="http://schemas.openxmlformats.org/drawingml/2006/main">
-            <a:off x="5124450" y="2686050"/>
-            <a:ext cx="2324100" cy="533400"/>
-          </a:xfrm>
-          <a:prstGeom xmlns:a="http://schemas.openxmlformats.org/drawingml/2006/main" prst="rect">
-            <a:avLst/>
-          </a:prstGeom>
-          <a:noFill xmlns:a="http://schemas.openxmlformats.org/drawingml/2006/main"/>
-          <a:ln xmlns:a="http://schemas.openxmlformats.org/drawingml/2006/main" w="0">
-            <a:noFill/>
-            <a:prstDash val="solid"/>
-          </a:ln>
-        </p:spPr>
-        <p:txBody>
-          <a:bodyPr xmlns:a="http://schemas.openxmlformats.org/drawingml/2006/main" anchor="t"/>
-          <a:lstStyle xmlns:a="http://schemas.openxmlformats.org/drawingml/2006/main"/>
-          <a:p xmlns:a="http://schemas.openxmlformats.org/drawingml/2006/main">
-            <a:pPr algn="l">
-              <a:buNone/>
-              <a:defRPr sz="1425" b="0" i="0">
-                <a:solidFill>
-                  <a:srgbClr val="61786E"/>
-                </a:solidFill>
-              </a:defRPr>
-            </a:pPr>
-            <a:r>
-              <a:rPr sz="1425" b="0" i="0">
-                <a:solidFill>
-                  <a:srgbClr val="61786E"/>
-                </a:solidFill>
-              </a:rPr>
-              <a:t>Handle tool timeout</a:t>
-            </a:r>
-          </a:p>
-        </p:txBody>
-      </p:sp>
-      <p:sp>
-        <p:nvSpPr>
-          <p:cNvPr id="17" name="">
-            <a:extLst xmlns:a="http://schemas.openxmlformats.org/drawingml/2006/main">
-              <a:ext uri="{FF2B5EF4-FFF2-40B4-BE49-F238E27FC236}">
-                <a16:creationId xmlns:a16="http://schemas.microsoft.com/office/drawing/2014/main" id="{CB9159C4-EFBC-4B36-9A6E-E085A3B5AA3E}"/>
-              </a:ext>
-            </a:extLst>
-          </p:cNvPr>
-          <p:cNvSpPr>
-            <a:spLocks xmlns:a="http://schemas.openxmlformats.org/drawingml/2006/main" noGrp="1"/>
-          </p:cNvSpPr>
-          <p:nvPr/>
-        </p:nvSpPr>
-        <p:spPr>
-          <a:xfrm xmlns:a="http://schemas.openxmlformats.org/drawingml/2006/main">
-            <a:off x="5124450" y="3333750"/>
-            <a:ext cx="2362200" cy="28575"/>
-          </a:xfrm>
-          <a:prstGeom xmlns:a="http://schemas.openxmlformats.org/drawingml/2006/main" prst="rect">
-            <a:avLst/>
-          </a:prstGeom>
-          <a:solidFill xmlns:a="http://schemas.openxmlformats.org/drawingml/2006/main">
-            <a:srgbClr val="7FA847"/>
-          </a:solidFill>
-          <a:ln xmlns:a="http://schemas.openxmlformats.org/drawingml/2006/main" w="0">
-            <a:noFill/>
-            <a:prstDash val="solid"/>
-          </a:ln>
-        </p:spPr>
-      </p:sp>
-      <p:sp>
-        <p:nvSpPr>
-          <p:cNvPr id="18" name="">
-            <a:extLst xmlns:a="http://schemas.openxmlformats.org/drawingml/2006/main">
-              <a:ext uri="{FF2B5EF4-FFF2-40B4-BE49-F238E27FC236}">
-                <a16:creationId xmlns:a16="http://schemas.microsoft.com/office/drawing/2014/main" id="{3BB78A7B-0D6D-4D15-B944-F3A61E1D0696}"/>
-              </a:ext>
-            </a:extLst>
-          </p:cNvPr>
-          <p:cNvSpPr>
-            <a:spLocks xmlns:a="http://schemas.openxmlformats.org/drawingml/2006/main" noGrp="1"/>
-          </p:cNvSpPr>
-          <p:nvPr/>
-        </p:nvSpPr>
-        <p:spPr>
-          <a:xfrm xmlns:a="http://schemas.openxmlformats.org/drawingml/2006/main">
-            <a:off x="7981950" y="2266950"/>
-            <a:ext cx="552450" cy="552450"/>
-          </a:xfrm>
-          <a:prstGeom xmlns:a="http://schemas.openxmlformats.org/drawingml/2006/main" prst="ellipse">
-            <a:avLst/>
-          </a:prstGeom>
-          <a:solidFill xmlns:a="http://schemas.openxmlformats.org/drawingml/2006/main">
-            <a:srgbClr val="159A64"/>
-          </a:solidFill>
-          <a:ln xmlns:a="http://schemas.openxmlformats.org/drawingml/2006/main" w="0">
-            <a:noFill/>
-            <a:prstDash val="solid"/>
-          </a:ln>
-        </p:spPr>
-      </p:sp>
-      <p:sp>
-        <p:nvSpPr>
-          <p:cNvPr id="19" name="">
-            <a:extLst xmlns:a="http://schemas.openxmlformats.org/drawingml/2006/main">
-              <a:ext uri="{FF2B5EF4-FFF2-40B4-BE49-F238E27FC236}">
-                <a16:creationId xmlns:a16="http://schemas.microsoft.com/office/drawing/2014/main" id="{2D344159-9DE2-45FA-9A71-8F0256B9CF5E}"/>
-              </a:ext>
-            </a:extLst>
-          </p:cNvPr>
-          <p:cNvSpPr>
-            <a:spLocks xmlns:a="http://schemas.openxmlformats.org/drawingml/2006/main" noGrp="1"/>
-          </p:cNvSpPr>
-          <p:nvPr/>
-        </p:nvSpPr>
-        <p:spPr>
-          <a:xfrm xmlns:a="http://schemas.openxmlformats.org/drawingml/2006/main">
-            <a:off x="7981950" y="2409825"/>
-            <a:ext cx="552450" cy="247650"/>
-          </a:xfrm>
-          <a:prstGeom xmlns:a="http://schemas.openxmlformats.org/drawingml/2006/main" prst="rect">
-            <a:avLst/>
-          </a:prstGeom>
-          <a:noFill xmlns:a="http://schemas.openxmlformats.org/drawingml/2006/main"/>
-          <a:ln xmlns:a="http://schemas.openxmlformats.org/drawingml/2006/main" w="0">
-            <a:noFill/>
-            <a:prstDash val="solid"/>
-          </a:ln>
-        </p:spPr>
-        <p:txBody>
-          <a:bodyPr xmlns:a="http://schemas.openxmlformats.org/drawingml/2006/main" anchor="t"/>
-          <a:lstStyle xmlns:a="http://schemas.openxmlformats.org/drawingml/2006/main"/>
-          <a:p xmlns:a="http://schemas.openxmlformats.org/drawingml/2006/main">
-            <a:pPr algn="ctr">
-              <a:buNone/>
-              <a:defRPr sz="1500" b="1" i="0">
-                <a:solidFill>
-                  <a:srgbClr val="F7FBF8"/>
-                </a:solidFill>
-              </a:defRPr>
-            </a:pPr>
-            <a:r>
-              <a:rPr sz="1500" b="1" i="0">
-                <a:solidFill>
-                  <a:srgbClr val="F7FBF8"/>
-                </a:solidFill>
-              </a:rPr>
-              <a:t>C</a:t>
-            </a:r>
-          </a:p>
-        </p:txBody>
-      </p:sp>
-      <p:sp>
-        <p:nvSpPr>
-          <p:cNvPr id="20" name="">
-            <a:extLst xmlns:a="http://schemas.openxmlformats.org/drawingml/2006/main">
-              <a:ext uri="{FF2B5EF4-FFF2-40B4-BE49-F238E27FC236}">
-                <a16:creationId xmlns:a16="http://schemas.microsoft.com/office/drawing/2014/main" id="{B4E03B82-C2B1-465F-81DA-0CB9C0AD7CB6}"/>
-              </a:ext>
-            </a:extLst>
-          </p:cNvPr>
-          <p:cNvSpPr>
-            <a:spLocks xmlns:a="http://schemas.openxmlformats.org/drawingml/2006/main" noGrp="1"/>
-          </p:cNvSpPr>
-          <p:nvPr/>
-        </p:nvSpPr>
-        <p:spPr>
-          <a:xfrm xmlns:a="http://schemas.openxmlformats.org/drawingml/2006/main">
-            <a:off x="8724900" y="2305050"/>
-            <a:ext cx="2095500" cy="285750"/>
-          </a:xfrm>
-          <a:prstGeom xmlns:a="http://schemas.openxmlformats.org/drawingml/2006/main" prst="rect">
-            <a:avLst/>
-          </a:prstGeom>
-          <a:noFill xmlns:a="http://schemas.openxmlformats.org/drawingml/2006/main"/>
-          <a:ln xmlns:a="http://schemas.openxmlformats.org/drawingml/2006/main" w="0">
-            <a:noFill/>
-            <a:prstDash val="solid"/>
-          </a:ln>
-        </p:spPr>
-        <p:txBody>
-          <a:bodyPr xmlns:a="http://schemas.openxmlformats.org/drawingml/2006/main" anchor="t"/>
-          <a:lstStyle xmlns:a="http://schemas.openxmlformats.org/drawingml/2006/main"/>
-          <a:p xmlns:a="http://schemas.openxmlformats.org/drawingml/2006/main">
-            <a:pPr algn="l">
-              <a:buNone/>
-              <a:defRPr sz="1575" b="1" i="0">
-                <a:solidFill>
-                  <a:srgbClr val="163C2C"/>
-                </a:solidFill>
-              </a:defRPr>
-            </a:pPr>
-            <a:r>
-              <a:rPr sz="1575" b="1" i="0">
-                <a:solidFill>
-                  <a:srgbClr val="163C2C"/>
-                </a:solidFill>
-              </a:rPr>
-              <a:t>OBSERVE</a:t>
-            </a:r>
-          </a:p>
-        </p:txBody>
-      </p:sp>
-      <p:sp>
-        <p:nvSpPr>
-          <p:cNvPr id="21" name="">
-            <a:extLst xmlns:a="http://schemas.openxmlformats.org/drawingml/2006/main">
-              <a:ext uri="{FF2B5EF4-FFF2-40B4-BE49-F238E27FC236}">
-                <a16:creationId xmlns:a16="http://schemas.microsoft.com/office/drawing/2014/main" id="{D39EC992-99D6-48C5-9D8F-7A64D0ADFADE}"/>
-              </a:ext>
-            </a:extLst>
-          </p:cNvPr>
-          <p:cNvSpPr>
-            <a:spLocks xmlns:a="http://schemas.openxmlformats.org/drawingml/2006/main" noGrp="1"/>
-          </p:cNvSpPr>
-          <p:nvPr/>
-        </p:nvSpPr>
-        <p:spPr>
-          <a:xfrm xmlns:a="http://schemas.openxmlformats.org/drawingml/2006/main">
-            <a:off x="8724900" y="2686050"/>
-            <a:ext cx="2324100" cy="533400"/>
-          </a:xfrm>
-          <a:prstGeom xmlns:a="http://schemas.openxmlformats.org/drawingml/2006/main" prst="rect">
-            <a:avLst/>
-          </a:prstGeom>
-          <a:noFill xmlns:a="http://schemas.openxmlformats.org/drawingml/2006/main"/>
-          <a:ln xmlns:a="http://schemas.openxmlformats.org/drawingml/2006/main" w="0">
-            <a:noFill/>
-            <a:prstDash val="solid"/>
-          </a:ln>
-        </p:spPr>
-        <p:txBody>
-          <a:bodyPr xmlns:a="http://schemas.openxmlformats.org/drawingml/2006/main" anchor="t"/>
-          <a:lstStyle xmlns:a="http://schemas.openxmlformats.org/drawingml/2006/main"/>
-          <a:p xmlns:a="http://schemas.openxmlformats.org/drawingml/2006/main">
-            <a:pPr algn="l">
-              <a:buNone/>
-              <a:defRPr sz="1425" b="0" i="0">
-                <a:solidFill>
-                  <a:srgbClr val="61786E"/>
-                </a:solidFill>
-              </a:defRPr>
-            </a:pPr>
-            <a:r>
-              <a:rPr sz="1425" b="0" i="0">
-                <a:solidFill>
-                  <a:srgbClr val="61786E"/>
-                </a:solidFill>
-              </a:rPr>
-              <a:t>Log final transcript</a:t>
-            </a:r>
-          </a:p>
-        </p:txBody>
-      </p:sp>
-      <p:sp>
-        <p:nvSpPr>
-          <p:cNvPr id="22" name="">
-            <a:extLst xmlns:a="http://schemas.openxmlformats.org/drawingml/2006/main">
-              <a:ext uri="{FF2B5EF4-FFF2-40B4-BE49-F238E27FC236}">
-                <a16:creationId xmlns:a16="http://schemas.microsoft.com/office/drawing/2014/main" id="{C4583855-49CC-4CB7-A2C5-8A85DAE37818}"/>
-              </a:ext>
-            </a:extLst>
-          </p:cNvPr>
-          <p:cNvSpPr>
-            <a:spLocks xmlns:a="http://schemas.openxmlformats.org/drawingml/2006/main" noGrp="1"/>
-          </p:cNvSpPr>
-          <p:nvPr/>
-        </p:nvSpPr>
-        <p:spPr>
-          <a:xfrm xmlns:a="http://schemas.openxmlformats.org/drawingml/2006/main">
-            <a:off x="8724900" y="3333750"/>
-            <a:ext cx="2362200" cy="28575"/>
-          </a:xfrm>
-          <a:prstGeom xmlns:a="http://schemas.openxmlformats.org/drawingml/2006/main" prst="rect">
-            <a:avLst/>
-          </a:prstGeom>
-          <a:solidFill xmlns:a="http://schemas.openxmlformats.org/drawingml/2006/main">
-            <a:srgbClr val="159A64"/>
-          </a:solidFill>
-          <a:ln xmlns:a="http://schemas.openxmlformats.org/drawingml/2006/main" w="0">
-            <a:noFill/>
-            <a:prstDash val="solid"/>
-          </a:ln>
-        </p:spPr>
-      </p:sp>
-      <p:sp>
-        <p:nvSpPr>
-          <p:cNvPr id="23" name="">
-            <a:extLst xmlns:a="http://schemas.openxmlformats.org/drawingml/2006/main">
-              <a:ext uri="{FF2B5EF4-FFF2-40B4-BE49-F238E27FC236}">
-                <a16:creationId xmlns:a16="http://schemas.microsoft.com/office/drawing/2014/main" id="{4C8DE644-80D9-4F6A-AC9B-BD1B6020EC28}"/>
-              </a:ext>
-            </a:extLst>
-          </p:cNvPr>
-          <p:cNvSpPr>
-            <a:spLocks xmlns:a="http://schemas.openxmlformats.org/drawingml/2006/main" noGrp="1"/>
-          </p:cNvSpPr>
-          <p:nvPr/>
-        </p:nvSpPr>
-        <p:spPr>
-          <a:xfrm xmlns:a="http://schemas.openxmlformats.org/drawingml/2006/main">
-            <a:off x="800100" y="4095750"/>
-            <a:ext cx="1524000" cy="266700"/>
-          </a:xfrm>
-          <a:prstGeom xmlns:a="http://schemas.openxmlformats.org/drawingml/2006/main" prst="rect">
-            <a:avLst/>
-          </a:prstGeom>
-          <a:noFill xmlns:a="http://schemas.openxmlformats.org/drawingml/2006/main"/>
-          <a:ln xmlns:a="http://schemas.openxmlformats.org/drawingml/2006/main" w="0">
-            <a:noFill/>
-            <a:prstDash val="solid"/>
-          </a:ln>
-        </p:spPr>
-        <p:txBody>
-          <a:bodyPr xmlns:a="http://schemas.openxmlformats.org/drawingml/2006/main" anchor="t"/>
-          <a:lstStyle xmlns:a="http://schemas.openxmlformats.org/drawingml/2006/main"/>
-          <a:p xmlns:a="http://schemas.openxmlformats.org/drawingml/2006/main">
-            <a:pPr algn="l">
-              <a:buNone/>
-              <a:defRPr sz="1200" b="1" i="0">
-                <a:solidFill>
-                  <a:srgbClr val="D05B65"/>
-                </a:solidFill>
-              </a:defRPr>
-            </a:pPr>
-            <a:r>
-              <a:rPr sz="1200" b="1" i="0">
-                <a:solidFill>
-                  <a:srgbClr val="D05B65"/>
-                </a:solidFill>
-              </a:rPr>
-              <a:t>TEST IT</a:t>
-            </a:r>
-          </a:p>
-        </p:txBody>
-      </p:sp>
-      <p:sp>
-        <p:nvSpPr>
-          <p:cNvPr id="24" name="">
-            <a:extLst xmlns:a="http://schemas.openxmlformats.org/drawingml/2006/main">
-              <a:ext uri="{FF2B5EF4-FFF2-40B4-BE49-F238E27FC236}">
-                <a16:creationId xmlns:a16="http://schemas.microsoft.com/office/drawing/2014/main" id="{11FA8D27-9A53-40BB-B7C8-EA6F91A92D74}"/>
-              </a:ext>
-            </a:extLst>
-          </p:cNvPr>
-          <p:cNvSpPr>
-            <a:spLocks xmlns:a="http://schemas.openxmlformats.org/drawingml/2006/main" noGrp="1"/>
-          </p:cNvSpPr>
-          <p:nvPr/>
-        </p:nvSpPr>
-        <p:spPr>
-          <a:xfrm xmlns:a="http://schemas.openxmlformats.org/drawingml/2006/main">
-            <a:off x="800100" y="4495800"/>
-            <a:ext cx="7905750" cy="400050"/>
-          </a:xfrm>
-          <a:prstGeom xmlns:a="http://schemas.openxmlformats.org/drawingml/2006/main" prst="rect">
-            <a:avLst/>
-          </a:prstGeom>
-          <a:noFill xmlns:a="http://schemas.openxmlformats.org/drawingml/2006/main"/>
-          <a:ln xmlns:a="http://schemas.openxmlformats.org/drawingml/2006/main" w="0">
-            <a:noFill/>
-            <a:prstDash val="solid"/>
-          </a:ln>
-        </p:spPr>
-        <p:txBody>
-          <a:bodyPr xmlns:a="http://schemas.openxmlformats.org/drawingml/2006/main" anchor="t"/>
-          <a:lstStyle xmlns:a="http://schemas.openxmlformats.org/drawingml/2006/main"/>
-          <a:p xmlns:a="http://schemas.openxmlformats.org/drawingml/2006/main">
-            <a:pPr algn="l">
-              <a:buNone/>
-              <a:defRPr sz="2175" b="1" i="0">
-                <a:solidFill>
-                  <a:srgbClr val="163C2C"/>
-                </a:solidFill>
-              </a:defRPr>
-            </a:pPr>
-            <a:r>
-              <a:rPr sz="2175" b="1" i="0">
-                <a:solidFill>
-                  <a:srgbClr val="163C2C"/>
-                </a:solidFill>
-              </a:rPr>
-              <a:t>interrupt • change your mind • force a failure</a:t>
-            </a:r>
-          </a:p>
-        </p:txBody>
-      </p:sp>
-      <p:sp>
-        <p:nvSpPr>
-          <p:cNvPr id="25" name="">
-            <a:extLst xmlns:a="http://schemas.openxmlformats.org/drawingml/2006/main">
-              <a:ext uri="{FF2B5EF4-FFF2-40B4-BE49-F238E27FC236}">
-                <a16:creationId xmlns:a16="http://schemas.microsoft.com/office/drawing/2014/main" id="{32A1CA09-7D2D-4DE6-A806-364CA05F261A}"/>
-              </a:ext>
-            </a:extLst>
-          </p:cNvPr>
-          <p:cNvSpPr>
-            <a:spLocks xmlns:a="http://schemas.openxmlformats.org/drawingml/2006/main" noGrp="1"/>
-          </p:cNvSpPr>
-          <p:nvPr/>
-        </p:nvSpPr>
-        <p:spPr>
-          <a:xfrm xmlns:a="http://schemas.openxmlformats.org/drawingml/2006/main">
-            <a:off x="8572500" y="4057650"/>
-            <a:ext cx="2381250" cy="1104900"/>
+                <a16:creationId xmlns:a16="http://schemas.microsoft.com/office/drawing/2014/main" id="{56A3F148-36A0-4C26-A97B-74DADB45B2DA}"/>
+              </a:ext>
+            </a:extLst>
+          </p:cNvPr>
+          <p:cNvSpPr>
+            <a:spLocks xmlns:a="http://schemas.openxmlformats.org/drawingml/2006/main" noGrp="1"/>
+          </p:cNvSpPr>
+          <p:nvPr/>
+        </p:nvSpPr>
+        <p:spPr>
+          <a:xfrm xmlns:a="http://schemas.openxmlformats.org/drawingml/2006/main">
+            <a:off x="7810500" y="2266950"/>
+            <a:ext cx="3314700" cy="2724150"/>
           </a:xfrm>
           <a:prstGeom xmlns:a="http://schemas.openxmlformats.org/drawingml/2006/main" prst="roundRect">
             <a:avLst>
-              <a:gd name="adj" fmla="val 6897"/>
+              <a:gd name="adj" fmla="val 5594"/>
             </a:avLst>
           </a:prstGeom>
           <a:solidFill xmlns:a="http://schemas.openxmlformats.org/drawingml/2006/main">
@@ -13462,37 +13012,88 @@
       </p:sp>
       <p:sp>
         <p:nvSpPr>
-          <p:cNvPr id="26" name="">
-            <a:extLst xmlns:a="http://schemas.openxmlformats.org/drawingml/2006/main">
-              <a:ext uri="{FF2B5EF4-FFF2-40B4-BE49-F238E27FC236}">
-                <a16:creationId xmlns:a16="http://schemas.microsoft.com/office/drawing/2014/main" id="{7E4C218E-135D-4237-BF3F-6F1F94FCE5B5}"/>
-              </a:ext>
-            </a:extLst>
-          </p:cNvPr>
-          <p:cNvSpPr>
-            <a:spLocks xmlns:a="http://schemas.openxmlformats.org/drawingml/2006/main" noGrp="1"/>
-          </p:cNvSpPr>
-          <p:nvPr/>
-        </p:nvSpPr>
-        <p:spPr>
-          <a:xfrm xmlns:a="http://schemas.openxmlformats.org/drawingml/2006/main">
-            <a:off x="8763000" y="4286250"/>
-            <a:ext cx="2000250" cy="342900"/>
-          </a:xfrm>
-          <a:prstGeom xmlns:a="http://schemas.openxmlformats.org/drawingml/2006/main" prst="rect">
-            <a:avLst/>
-          </a:prstGeom>
-          <a:noFill xmlns:a="http://schemas.openxmlformats.org/drawingml/2006/main"/>
-          <a:ln xmlns:a="http://schemas.openxmlformats.org/drawingml/2006/main" w="0">
-            <a:noFill/>
-            <a:prstDash val="solid"/>
-          </a:ln>
-        </p:spPr>
-        <p:txBody>
-          <a:bodyPr xmlns:a="http://schemas.openxmlformats.org/drawingml/2006/main" anchor="t"/>
-          <a:lstStyle xmlns:a="http://schemas.openxmlformats.org/drawingml/2006/main"/>
-          <a:p xmlns:a="http://schemas.openxmlformats.org/drawingml/2006/main">
-            <a:pPr algn="ctr">
+          <p:cNvPr id="13" name="">
+            <a:extLst xmlns:a="http://schemas.openxmlformats.org/drawingml/2006/main">
+              <a:ext uri="{FF2B5EF4-FFF2-40B4-BE49-F238E27FC236}">
+                <a16:creationId xmlns:a16="http://schemas.microsoft.com/office/drawing/2014/main" id="{1D9CC029-D9E1-478A-B796-B429DE05BA63}"/>
+              </a:ext>
+            </a:extLst>
+          </p:cNvPr>
+          <p:cNvSpPr>
+            <a:spLocks xmlns:a="http://schemas.openxmlformats.org/drawingml/2006/main" noGrp="1"/>
+          </p:cNvSpPr>
+          <p:nvPr/>
+        </p:nvSpPr>
+        <p:spPr>
+          <a:xfrm xmlns:a="http://schemas.openxmlformats.org/drawingml/2006/main">
+            <a:off x="8115300" y="2590800"/>
+            <a:ext cx="2705100" cy="266700"/>
+          </a:xfrm>
+          <a:prstGeom xmlns:a="http://schemas.openxmlformats.org/drawingml/2006/main" prst="rect">
+            <a:avLst/>
+          </a:prstGeom>
+          <a:noFill xmlns:a="http://schemas.openxmlformats.org/drawingml/2006/main"/>
+          <a:ln xmlns:a="http://schemas.openxmlformats.org/drawingml/2006/main" w="0">
+            <a:noFill/>
+            <a:prstDash val="solid"/>
+          </a:ln>
+        </p:spPr>
+        <p:txBody>
+          <a:bodyPr xmlns:a="http://schemas.openxmlformats.org/drawingml/2006/main" anchor="t"/>
+          <a:lstStyle xmlns:a="http://schemas.openxmlformats.org/drawingml/2006/main"/>
+          <a:p xmlns:a="http://schemas.openxmlformats.org/drawingml/2006/main">
+            <a:pPr algn="l">
+              <a:buNone/>
+              <a:defRPr sz="1200" b="1" i="0">
+                <a:solidFill>
+                  <a:srgbClr val="7FA847"/>
+                </a:solidFill>
+              </a:defRPr>
+            </a:pPr>
+            <a:r>
+              <a:rPr sz="1200" b="1" i="0">
+                <a:solidFill>
+                  <a:srgbClr val="7FA847"/>
+                </a:solidFill>
+              </a:rPr>
+              <a:t>EXPECT</a:t>
+            </a:r>
+          </a:p>
+        </p:txBody>
+      </p:sp>
+      <p:sp>
+        <p:nvSpPr>
+          <p:cNvPr id="14" name="">
+            <a:extLst xmlns:a="http://schemas.openxmlformats.org/drawingml/2006/main">
+              <a:ext uri="{FF2B5EF4-FFF2-40B4-BE49-F238E27FC236}">
+                <a16:creationId xmlns:a16="http://schemas.microsoft.com/office/drawing/2014/main" id="{AB1BEC29-F760-41D1-910E-67F863A2180F}"/>
+              </a:ext>
+            </a:extLst>
+          </p:cNvPr>
+          <p:cNvSpPr>
+            <a:spLocks xmlns:a="http://schemas.openxmlformats.org/drawingml/2006/main" noGrp="1"/>
+          </p:cNvSpPr>
+          <p:nvPr/>
+        </p:nvSpPr>
+        <p:spPr>
+          <a:xfrm xmlns:a="http://schemas.openxmlformats.org/drawingml/2006/main">
+            <a:off x="8096250" y="3181350"/>
+            <a:ext cx="438150" cy="400050"/>
+          </a:xfrm>
+          <a:prstGeom xmlns:a="http://schemas.openxmlformats.org/drawingml/2006/main" prst="rect">
+            <a:avLst/>
+          </a:prstGeom>
+          <a:noFill xmlns:a="http://schemas.openxmlformats.org/drawingml/2006/main"/>
+          <a:ln xmlns:a="http://schemas.openxmlformats.org/drawingml/2006/main" w="0">
+            <a:noFill/>
+            <a:prstDash val="solid"/>
+          </a:ln>
+        </p:spPr>
+        <p:txBody>
+          <a:bodyPr xmlns:a="http://schemas.openxmlformats.org/drawingml/2006/main" anchor="t"/>
+          <a:lstStyle xmlns:a="http://schemas.openxmlformats.org/drawingml/2006/main"/>
+          <a:p xmlns:a="http://schemas.openxmlformats.org/drawingml/2006/main">
+            <a:pPr algn="l">
               <a:buNone/>
               <a:defRPr sz="2100" b="1" i="0">
                 <a:solidFill>
@@ -13506,58 +13107,211 @@
                   <a:srgbClr val="48B985"/>
                 </a:solidFill>
               </a:rPr>
-              <a:t>6 minutes</a:t>
-            </a:r>
-          </a:p>
-        </p:txBody>
-      </p:sp>
-      <p:sp>
-        <p:nvSpPr>
-          <p:cNvPr id="27" name="">
-            <a:extLst xmlns:a="http://schemas.openxmlformats.org/drawingml/2006/main">
-              <a:ext uri="{FF2B5EF4-FFF2-40B4-BE49-F238E27FC236}">
-                <a16:creationId xmlns:a16="http://schemas.microsoft.com/office/drawing/2014/main" id="{BA669251-3BAA-4C4E-AE54-E92C4034B6E2}"/>
-              </a:ext>
-            </a:extLst>
-          </p:cNvPr>
-          <p:cNvSpPr>
-            <a:spLocks xmlns:a="http://schemas.openxmlformats.org/drawingml/2006/main" noGrp="1"/>
-          </p:cNvSpPr>
-          <p:nvPr/>
-        </p:nvSpPr>
-        <p:spPr>
-          <a:xfrm xmlns:a="http://schemas.openxmlformats.org/drawingml/2006/main">
-            <a:off x="8763000" y="4705350"/>
-            <a:ext cx="2000250" cy="266700"/>
-          </a:xfrm>
-          <a:prstGeom xmlns:a="http://schemas.openxmlformats.org/drawingml/2006/main" prst="rect">
-            <a:avLst/>
-          </a:prstGeom>
-          <a:noFill xmlns:a="http://schemas.openxmlformats.org/drawingml/2006/main"/>
-          <a:ln xmlns:a="http://schemas.openxmlformats.org/drawingml/2006/main" w="0">
-            <a:noFill/>
-            <a:prstDash val="solid"/>
-          </a:ln>
-        </p:spPr>
-        <p:txBody>
-          <a:bodyPr xmlns:a="http://schemas.openxmlformats.org/drawingml/2006/main" anchor="t"/>
-          <a:lstStyle xmlns:a="http://schemas.openxmlformats.org/drawingml/2006/main"/>
-          <a:p xmlns:a="http://schemas.openxmlformats.org/drawingml/2006/main">
-            <a:pPr algn="ctr">
-              <a:buNone/>
-              <a:defRPr sz="1350" b="0" i="0">
+              <a:t>1</a:t>
+            </a:r>
+          </a:p>
+        </p:txBody>
+      </p:sp>
+      <p:sp>
+        <p:nvSpPr>
+          <p:cNvPr id="15" name="">
+            <a:extLst xmlns:a="http://schemas.openxmlformats.org/drawingml/2006/main">
+              <a:ext uri="{FF2B5EF4-FFF2-40B4-BE49-F238E27FC236}">
+                <a16:creationId xmlns:a16="http://schemas.microsoft.com/office/drawing/2014/main" id="{F2263230-F489-49CE-947A-722140FCA234}"/>
+              </a:ext>
+            </a:extLst>
+          </p:cNvPr>
+          <p:cNvSpPr>
+            <a:spLocks xmlns:a="http://schemas.openxmlformats.org/drawingml/2006/main" noGrp="1"/>
+          </p:cNvSpPr>
+          <p:nvPr/>
+        </p:nvSpPr>
+        <p:spPr>
+          <a:xfrm xmlns:a="http://schemas.openxmlformats.org/drawingml/2006/main">
+            <a:off x="8667750" y="3219450"/>
+            <a:ext cx="2095500" cy="304800"/>
+          </a:xfrm>
+          <a:prstGeom xmlns:a="http://schemas.openxmlformats.org/drawingml/2006/main" prst="rect">
+            <a:avLst/>
+          </a:prstGeom>
+          <a:noFill xmlns:a="http://schemas.openxmlformats.org/drawingml/2006/main"/>
+          <a:ln xmlns:a="http://schemas.openxmlformats.org/drawingml/2006/main" w="0">
+            <a:noFill/>
+            <a:prstDash val="solid"/>
+          </a:ln>
+        </p:spPr>
+        <p:txBody>
+          <a:bodyPr xmlns:a="http://schemas.openxmlformats.org/drawingml/2006/main" anchor="t"/>
+          <a:lstStyle xmlns:a="http://schemas.openxmlformats.org/drawingml/2006/main"/>
+          <a:p xmlns:a="http://schemas.openxmlformats.org/drawingml/2006/main">
+            <a:pPr algn="l">
+              <a:buNone/>
+              <a:defRPr sz="1500" b="0" i="0">
+                <a:solidFill>
+                  <a:srgbClr val="163C2C"/>
+                </a:solidFill>
+              </a:defRPr>
+            </a:pPr>
+            <a:r>
+              <a:rPr sz="1500" b="0" i="0">
+                <a:solidFill>
+                  <a:srgbClr val="163C2C"/>
+                </a:solidFill>
+              </a:rPr>
+              <a:t>Search runs without approval</a:t>
+            </a:r>
+          </a:p>
+        </p:txBody>
+      </p:sp>
+      <p:sp>
+        <p:nvSpPr>
+          <p:cNvPr id="16" name="">
+            <a:extLst xmlns:a="http://schemas.openxmlformats.org/drawingml/2006/main">
+              <a:ext uri="{FF2B5EF4-FFF2-40B4-BE49-F238E27FC236}">
+                <a16:creationId xmlns:a16="http://schemas.microsoft.com/office/drawing/2014/main" id="{8496C6DE-2F27-4D32-930F-22CB4DB2F804}"/>
+              </a:ext>
+            </a:extLst>
+          </p:cNvPr>
+          <p:cNvSpPr>
+            <a:spLocks xmlns:a="http://schemas.openxmlformats.org/drawingml/2006/main" noGrp="1"/>
+          </p:cNvSpPr>
+          <p:nvPr/>
+        </p:nvSpPr>
+        <p:spPr>
+          <a:xfrm xmlns:a="http://schemas.openxmlformats.org/drawingml/2006/main">
+            <a:off x="8096250" y="3848100"/>
+            <a:ext cx="438150" cy="400050"/>
+          </a:xfrm>
+          <a:prstGeom xmlns:a="http://schemas.openxmlformats.org/drawingml/2006/main" prst="rect">
+            <a:avLst/>
+          </a:prstGeom>
+          <a:noFill xmlns:a="http://schemas.openxmlformats.org/drawingml/2006/main"/>
+          <a:ln xmlns:a="http://schemas.openxmlformats.org/drawingml/2006/main" w="0">
+            <a:noFill/>
+            <a:prstDash val="solid"/>
+          </a:ln>
+        </p:spPr>
+        <p:txBody>
+          <a:bodyPr xmlns:a="http://schemas.openxmlformats.org/drawingml/2006/main" anchor="t"/>
+          <a:lstStyle xmlns:a="http://schemas.openxmlformats.org/drawingml/2006/main"/>
+          <a:p xmlns:a="http://schemas.openxmlformats.org/drawingml/2006/main">
+            <a:pPr algn="l">
+              <a:buNone/>
+              <a:defRPr sz="2100" b="1" i="0">
+                <a:solidFill>
+                  <a:srgbClr val="48B985"/>
+                </a:solidFill>
+              </a:defRPr>
+            </a:pPr>
+            <a:r>
+              <a:rPr sz="2100" b="1" i="0">
+                <a:solidFill>
+                  <a:srgbClr val="48B985"/>
+                </a:solidFill>
+              </a:rPr>
+              <a:t>2</a:t>
+            </a:r>
+          </a:p>
+        </p:txBody>
+      </p:sp>
+      <p:sp>
+        <p:nvSpPr>
+          <p:cNvPr id="17" name="">
+            <a:extLst xmlns:a="http://schemas.openxmlformats.org/drawingml/2006/main">
+              <a:ext uri="{FF2B5EF4-FFF2-40B4-BE49-F238E27FC236}">
+                <a16:creationId xmlns:a16="http://schemas.microsoft.com/office/drawing/2014/main" id="{5DD7BEB5-567F-4F0D-A8FC-0E33265140D9}"/>
+              </a:ext>
+            </a:extLst>
+          </p:cNvPr>
+          <p:cNvSpPr>
+            <a:spLocks xmlns:a="http://schemas.openxmlformats.org/drawingml/2006/main" noGrp="1"/>
+          </p:cNvSpPr>
+          <p:nvPr/>
+        </p:nvSpPr>
+        <p:spPr>
+          <a:xfrm xmlns:a="http://schemas.openxmlformats.org/drawingml/2006/main">
+            <a:off x="8667750" y="3886200"/>
+            <a:ext cx="2095500" cy="514350"/>
+          </a:xfrm>
+          <a:prstGeom xmlns:a="http://schemas.openxmlformats.org/drawingml/2006/main" prst="rect">
+            <a:avLst/>
+          </a:prstGeom>
+          <a:noFill xmlns:a="http://schemas.openxmlformats.org/drawingml/2006/main"/>
+          <a:ln xmlns:a="http://schemas.openxmlformats.org/drawingml/2006/main" w="0">
+            <a:noFill/>
+            <a:prstDash val="solid"/>
+          </a:ln>
+        </p:spPr>
+        <p:txBody>
+          <a:bodyPr xmlns:a="http://schemas.openxmlformats.org/drawingml/2006/main" anchor="t"/>
+          <a:lstStyle xmlns:a="http://schemas.openxmlformats.org/drawingml/2006/main"/>
+          <a:p xmlns:a="http://schemas.openxmlformats.org/drawingml/2006/main">
+            <a:pPr algn="l">
+              <a:buNone/>
+              <a:defRPr sz="1500" b="0" i="0">
+                <a:solidFill>
+                  <a:srgbClr val="163C2C"/>
+                </a:solidFill>
+              </a:defRPr>
+            </a:pPr>
+            <a:r>
+              <a:rPr sz="1500" b="0" i="0">
+                <a:solidFill>
+                  <a:srgbClr val="163C2C"/>
+                </a:solidFill>
+              </a:rPr>
+              <a:t>Write opens confirmation</a:t>
+            </a:r>
+          </a:p>
+        </p:txBody>
+      </p:sp>
+      <p:sp>
+        <p:nvSpPr>
+          <p:cNvPr id="18" name="">
+            <a:extLst xmlns:a="http://schemas.openxmlformats.org/drawingml/2006/main">
+              <a:ext uri="{FF2B5EF4-FFF2-40B4-BE49-F238E27FC236}">
+                <a16:creationId xmlns:a16="http://schemas.microsoft.com/office/drawing/2014/main" id="{AADD7583-AFD1-45E9-AA88-A136CEB75337}"/>
+              </a:ext>
+            </a:extLst>
+          </p:cNvPr>
+          <p:cNvSpPr>
+            <a:spLocks xmlns:a="http://schemas.openxmlformats.org/drawingml/2006/main" noGrp="1"/>
+          </p:cNvSpPr>
+          <p:nvPr/>
+        </p:nvSpPr>
+        <p:spPr>
+          <a:xfrm xmlns:a="http://schemas.openxmlformats.org/drawingml/2006/main">
+            <a:off x="800100" y="5314950"/>
+            <a:ext cx="1619250" cy="285750"/>
+          </a:xfrm>
+          <a:prstGeom xmlns:a="http://schemas.openxmlformats.org/drawingml/2006/main" prst="rect">
+            <a:avLst/>
+          </a:prstGeom>
+          <a:noFill xmlns:a="http://schemas.openxmlformats.org/drawingml/2006/main"/>
+          <a:ln xmlns:a="http://schemas.openxmlformats.org/drawingml/2006/main" w="0">
+            <a:noFill/>
+            <a:prstDash val="solid"/>
+          </a:ln>
+        </p:spPr>
+        <p:txBody>
+          <a:bodyPr xmlns:a="http://schemas.openxmlformats.org/drawingml/2006/main" anchor="t"/>
+          <a:lstStyle xmlns:a="http://schemas.openxmlformats.org/drawingml/2006/main"/>
+          <a:p xmlns:a="http://schemas.openxmlformats.org/drawingml/2006/main">
+            <a:pPr algn="l">
+              <a:buNone/>
+              <a:defRPr sz="1500" b="1" i="0">
                 <a:solidFill>
                   <a:srgbClr val="61786E"/>
                 </a:solidFill>
               </a:defRPr>
             </a:pPr>
             <a:r>
-              <a:rPr sz="1350" b="0" i="0">
+              <a:rPr sz="1500" b="1" i="0">
                 <a:solidFill>
                   <a:srgbClr val="61786E"/>
                 </a:solidFill>
               </a:rPr>
-              <a:t>then 2 demos</a:t>
+              <a:t>Reject once. Then approve.</a:t>
             </a:r>
           </a:p>
         </p:txBody>
@@ -13565,7 +13319,7 @@
     </p:spTree>
     <p:extLst>
       <p:ext uri="{BB962C8B-B14F-4D97-AF65-F5344CB8AC3E}">
-        <p14:creationId xmlns:p14="http://schemas.microsoft.com/office/powerpoint/2010/main" val="498246605"/>
+        <p14:creationId xmlns:p14="http://schemas.microsoft.com/office/powerpoint/2010/main" val="252935888"/>
       </p:ext>
     </p:extLst>
   </p:cSld>
@@ -13593,10 +13347,10 @@
       </p:grpSpPr>
       <p:sp>
         <p:nvSpPr>
-          <p:cNvPr id="46" name="">
-            <a:extLst xmlns:a="http://schemas.openxmlformats.org/drawingml/2006/main">
-              <a:ext uri="{FF2B5EF4-FFF2-40B4-BE49-F238E27FC236}">
-                <a16:creationId xmlns:a16="http://schemas.microsoft.com/office/drawing/2014/main" id="{DAD9A697-D667-48D0-96DC-0573D3C583E6}"/>
+          <p:cNvPr id="28" name="">
+            <a:extLst xmlns:a="http://schemas.openxmlformats.org/drawingml/2006/main">
+              <a:ext uri="{FF2B5EF4-FFF2-40B4-BE49-F238E27FC236}">
+                <a16:creationId xmlns:a16="http://schemas.microsoft.com/office/drawing/2014/main" id="{66DD41AC-F0A5-4BC3-BEE1-00E71921AF32}"/>
               </a:ext>
             </a:extLst>
           </p:cNvPr>
@@ -13616,7 +13370,7 @@
             </a:avLst>
           </a:prstGeom>
           <a:solidFill xmlns:a="http://schemas.openxmlformats.org/drawingml/2006/main">
-            <a:srgbClr val="159A64"/>
+            <a:srgbClr val="48B985"/>
           </a:solidFill>
           <a:ln xmlns:a="http://schemas.openxmlformats.org/drawingml/2006/main" w="0">
             <a:noFill/>
@@ -13629,7 +13383,7 @@
           <p:cNvPr id="2" name="">
             <a:extLst xmlns:a="http://schemas.openxmlformats.org/drawingml/2006/main">
               <a:ext uri="{FF2B5EF4-FFF2-40B4-BE49-F238E27FC236}">
-                <a16:creationId xmlns:a16="http://schemas.microsoft.com/office/drawing/2014/main" id="{213C627C-B3F9-456D-9CB3-F60D343E5BFB}"/>
+                <a16:creationId xmlns:a16="http://schemas.microsoft.com/office/drawing/2014/main" id="{FB590C59-0AEE-4824-8DBE-F2ACE15666EB}"/>
               </a:ext>
             </a:extLst>
           </p:cNvPr>
@@ -13660,17 +13414,17 @@
               <a:buNone/>
               <a:defRPr sz="1125" b="1" i="0">
                 <a:solidFill>
-                  <a:srgbClr val="159A64"/>
+                  <a:srgbClr val="48B985"/>
                 </a:solidFill>
               </a:defRPr>
             </a:pPr>
             <a:r>
               <a:rPr sz="1125" b="1" i="0">
                 <a:solidFill>
-                  <a:srgbClr val="159A64"/>
-                </a:solidFill>
-              </a:rPr>
-              <a:t>What to take with you</a:t>
+                  <a:srgbClr val="48B985"/>
+                </a:solidFill>
+              </a:rPr>
+              <a:t>Build one production habit</a:t>
             </a:r>
           </a:p>
         </p:txBody>
@@ -13680,7 +13434,7 @@
           <p:cNvPr id="3" name="">
             <a:extLst xmlns:a="http://schemas.openxmlformats.org/drawingml/2006/main">
               <a:ext uri="{FF2B5EF4-FFF2-40B4-BE49-F238E27FC236}">
-                <a16:creationId xmlns:a16="http://schemas.microsoft.com/office/drawing/2014/main" id="{F60B6C3E-DA0C-4DCA-AC7C-11F5DDAF1BD5}"/>
+                <a16:creationId xmlns:a16="http://schemas.microsoft.com/office/drawing/2014/main" id="{AE0A07A0-CDDB-449F-8221-B925C3C1F958}"/>
               </a:ext>
             </a:extLst>
           </p:cNvPr>
@@ -13721,7 +13475,7 @@
                   <a:srgbClr val="163C2C"/>
                 </a:solidFill>
               </a:rPr>
-              <a:t>You now have the full conversation loop</a:t>
+              <a:t>Mini challenge: make the agent ask before acting</a:t>
             </a:r>
           </a:p>
         </p:txBody>
@@ -13731,7 +13485,7 @@
           <p:cNvPr id="4" name="">
             <a:extLst xmlns:a="http://schemas.openxmlformats.org/drawingml/2006/main">
               <a:ext uri="{FF2B5EF4-FFF2-40B4-BE49-F238E27FC236}">
-                <a16:creationId xmlns:a16="http://schemas.microsoft.com/office/drawing/2014/main" id="{81B9A8AD-D0F2-4100-88D3-E5CAFE9D2D94}"/>
+                <a16:creationId xmlns:a16="http://schemas.microsoft.com/office/drawing/2014/main" id="{3849C590-F089-41A3-B353-F84AEB57B111}"/>
               </a:ext>
             </a:extLst>
           </p:cNvPr>
@@ -13772,7 +13526,7 @@
                   <a:srgbClr val="61786E"/>
                 </a:solidFill>
               </a:rPr>
-              <a:t>Agent → tool → live audio → events → production behavior.</a:t>
+              <a:t>Change one instruction, then test an ambiguous request.</a:t>
             </a:r>
           </a:p>
         </p:txBody>
@@ -13782,7 +13536,7 @@
           <p:cNvPr id="5" name="">
             <a:extLst xmlns:a="http://schemas.openxmlformats.org/drawingml/2006/main">
               <a:ext uri="{FF2B5EF4-FFF2-40B4-BE49-F238E27FC236}">
-                <a16:creationId xmlns:a16="http://schemas.microsoft.com/office/drawing/2014/main" id="{B2803DD0-2389-4236-BCA8-A412A0E04C0B}"/>
+                <a16:creationId xmlns:a16="http://schemas.microsoft.com/office/drawing/2014/main" id="{6C73595A-7837-4124-AB18-97CDF05F4A85}"/>
               </a:ext>
             </a:extLst>
           </p:cNvPr>
@@ -13813,7 +13567,7 @@
           <p:cNvPr id="6" name="">
             <a:extLst xmlns:a="http://schemas.openxmlformats.org/drawingml/2006/main">
               <a:ext uri="{FF2B5EF4-FFF2-40B4-BE49-F238E27FC236}">
-                <a16:creationId xmlns:a16="http://schemas.microsoft.com/office/drawing/2014/main" id="{F2939B21-747E-44BB-A542-84417B69F1EE}"/>
+                <a16:creationId xmlns:a16="http://schemas.microsoft.com/office/drawing/2014/main" id="{A732E4B9-52A2-4490-B437-3131F2381AA4}"/>
               </a:ext>
             </a:extLst>
           </p:cNvPr>
@@ -13864,7 +13618,7 @@
           <p:cNvPr id="7" name="">
             <a:extLst xmlns:a="http://schemas.openxmlformats.org/drawingml/2006/main">
               <a:ext uri="{FF2B5EF4-FFF2-40B4-BE49-F238E27FC236}">
-                <a16:creationId xmlns:a16="http://schemas.microsoft.com/office/drawing/2014/main" id="{29BC5D8A-D749-43EC-87C6-8DDBA608F50D}"/>
+                <a16:creationId xmlns:a16="http://schemas.microsoft.com/office/drawing/2014/main" id="{4C1F1102-653A-41FC-A936-23A975DAD491}"/>
               </a:ext>
             </a:extLst>
           </p:cNvPr>
@@ -13906,6 +13660,1101 @@
                 </a:solidFill>
               </a:rPr>
               <a:t>18</a:t>
+            </a:r>
+          </a:p>
+        </p:txBody>
+      </p:sp>
+      <p:sp>
+        <p:nvSpPr>
+          <p:cNvPr id="8" name="">
+            <a:extLst xmlns:a="http://schemas.openxmlformats.org/drawingml/2006/main">
+              <a:ext uri="{FF2B5EF4-FFF2-40B4-BE49-F238E27FC236}">
+                <a16:creationId xmlns:a16="http://schemas.microsoft.com/office/drawing/2014/main" id="{498DD573-63A1-450A-9EF9-EA44E79D2485}"/>
+              </a:ext>
+            </a:extLst>
+          </p:cNvPr>
+          <p:cNvSpPr>
+            <a:spLocks xmlns:a="http://schemas.openxmlformats.org/drawingml/2006/main" noGrp="1"/>
+          </p:cNvSpPr>
+          <p:nvPr/>
+        </p:nvSpPr>
+        <p:spPr>
+          <a:xfrm xmlns:a="http://schemas.openxmlformats.org/drawingml/2006/main">
+            <a:off x="781050" y="2266950"/>
+            <a:ext cx="552450" cy="552450"/>
+          </a:xfrm>
+          <a:prstGeom xmlns:a="http://schemas.openxmlformats.org/drawingml/2006/main" prst="ellipse">
+            <a:avLst/>
+          </a:prstGeom>
+          <a:solidFill xmlns:a="http://schemas.openxmlformats.org/drawingml/2006/main">
+            <a:srgbClr val="48B985"/>
+          </a:solidFill>
+          <a:ln xmlns:a="http://schemas.openxmlformats.org/drawingml/2006/main" w="0">
+            <a:noFill/>
+            <a:prstDash val="solid"/>
+          </a:ln>
+        </p:spPr>
+      </p:sp>
+      <p:sp>
+        <p:nvSpPr>
+          <p:cNvPr id="9" name="">
+            <a:extLst xmlns:a="http://schemas.openxmlformats.org/drawingml/2006/main">
+              <a:ext uri="{FF2B5EF4-FFF2-40B4-BE49-F238E27FC236}">
+                <a16:creationId xmlns:a16="http://schemas.microsoft.com/office/drawing/2014/main" id="{341CBAF7-AD84-40BE-AD69-836B1BA33B62}"/>
+              </a:ext>
+            </a:extLst>
+          </p:cNvPr>
+          <p:cNvSpPr>
+            <a:spLocks xmlns:a="http://schemas.openxmlformats.org/drawingml/2006/main" noGrp="1"/>
+          </p:cNvSpPr>
+          <p:nvPr/>
+        </p:nvSpPr>
+        <p:spPr>
+          <a:xfrm xmlns:a="http://schemas.openxmlformats.org/drawingml/2006/main">
+            <a:off x="781050" y="2409825"/>
+            <a:ext cx="552450" cy="247650"/>
+          </a:xfrm>
+          <a:prstGeom xmlns:a="http://schemas.openxmlformats.org/drawingml/2006/main" prst="rect">
+            <a:avLst/>
+          </a:prstGeom>
+          <a:noFill xmlns:a="http://schemas.openxmlformats.org/drawingml/2006/main"/>
+          <a:ln xmlns:a="http://schemas.openxmlformats.org/drawingml/2006/main" w="0">
+            <a:noFill/>
+            <a:prstDash val="solid"/>
+          </a:ln>
+        </p:spPr>
+        <p:txBody>
+          <a:bodyPr xmlns:a="http://schemas.openxmlformats.org/drawingml/2006/main" anchor="t"/>
+          <a:lstStyle xmlns:a="http://schemas.openxmlformats.org/drawingml/2006/main"/>
+          <a:p xmlns:a="http://schemas.openxmlformats.org/drawingml/2006/main">
+            <a:pPr algn="ctr">
+              <a:buNone/>
+              <a:defRPr sz="1500" b="1" i="0">
+                <a:solidFill>
+                  <a:srgbClr val="F7FBF8"/>
+                </a:solidFill>
+              </a:defRPr>
+            </a:pPr>
+            <a:r>
+              <a:rPr sz="1500" b="1" i="0">
+                <a:solidFill>
+                  <a:srgbClr val="F7FBF8"/>
+                </a:solidFill>
+              </a:rPr>
+              <a:t>1</a:t>
+            </a:r>
+          </a:p>
+        </p:txBody>
+      </p:sp>
+      <p:sp>
+        <p:nvSpPr>
+          <p:cNvPr id="10" name="">
+            <a:extLst xmlns:a="http://schemas.openxmlformats.org/drawingml/2006/main">
+              <a:ext uri="{FF2B5EF4-FFF2-40B4-BE49-F238E27FC236}">
+                <a16:creationId xmlns:a16="http://schemas.microsoft.com/office/drawing/2014/main" id="{36C1D709-ED43-407D-84D4-E9DCF3435BED}"/>
+              </a:ext>
+            </a:extLst>
+          </p:cNvPr>
+          <p:cNvSpPr>
+            <a:spLocks xmlns:a="http://schemas.openxmlformats.org/drawingml/2006/main" noGrp="1"/>
+          </p:cNvSpPr>
+          <p:nvPr/>
+        </p:nvSpPr>
+        <p:spPr>
+          <a:xfrm xmlns:a="http://schemas.openxmlformats.org/drawingml/2006/main">
+            <a:off x="1524000" y="2305050"/>
+            <a:ext cx="2095500" cy="285750"/>
+          </a:xfrm>
+          <a:prstGeom xmlns:a="http://schemas.openxmlformats.org/drawingml/2006/main" prst="rect">
+            <a:avLst/>
+          </a:prstGeom>
+          <a:noFill xmlns:a="http://schemas.openxmlformats.org/drawingml/2006/main"/>
+          <a:ln xmlns:a="http://schemas.openxmlformats.org/drawingml/2006/main" w="0">
+            <a:noFill/>
+            <a:prstDash val="solid"/>
+          </a:ln>
+        </p:spPr>
+        <p:txBody>
+          <a:bodyPr xmlns:a="http://schemas.openxmlformats.org/drawingml/2006/main" anchor="t"/>
+          <a:lstStyle xmlns:a="http://schemas.openxmlformats.org/drawingml/2006/main"/>
+          <a:p xmlns:a="http://schemas.openxmlformats.org/drawingml/2006/main">
+            <a:pPr algn="l">
+              <a:buNone/>
+              <a:defRPr sz="1575" b="1" i="0">
+                <a:solidFill>
+                  <a:srgbClr val="163C2C"/>
+                </a:solidFill>
+              </a:defRPr>
+            </a:pPr>
+            <a:r>
+              <a:rPr sz="1575" b="1" i="0">
+                <a:solidFill>
+                  <a:srgbClr val="163C2C"/>
+                </a:solidFill>
+              </a:rPr>
+              <a:t>CLARIFY</a:t>
+            </a:r>
+          </a:p>
+        </p:txBody>
+      </p:sp>
+      <p:sp>
+        <p:nvSpPr>
+          <p:cNvPr id="11" name="">
+            <a:extLst xmlns:a="http://schemas.openxmlformats.org/drawingml/2006/main">
+              <a:ext uri="{FF2B5EF4-FFF2-40B4-BE49-F238E27FC236}">
+                <a16:creationId xmlns:a16="http://schemas.microsoft.com/office/drawing/2014/main" id="{84552DCB-EFB4-46F7-B83E-1983F2FE82B0}"/>
+              </a:ext>
+            </a:extLst>
+          </p:cNvPr>
+          <p:cNvSpPr>
+            <a:spLocks xmlns:a="http://schemas.openxmlformats.org/drawingml/2006/main" noGrp="1"/>
+          </p:cNvSpPr>
+          <p:nvPr/>
+        </p:nvSpPr>
+        <p:spPr>
+          <a:xfrm xmlns:a="http://schemas.openxmlformats.org/drawingml/2006/main">
+            <a:off x="1524000" y="2686050"/>
+            <a:ext cx="2324100" cy="533400"/>
+          </a:xfrm>
+          <a:prstGeom xmlns:a="http://schemas.openxmlformats.org/drawingml/2006/main" prst="rect">
+            <a:avLst/>
+          </a:prstGeom>
+          <a:noFill xmlns:a="http://schemas.openxmlformats.org/drawingml/2006/main"/>
+          <a:ln xmlns:a="http://schemas.openxmlformats.org/drawingml/2006/main" w="0">
+            <a:noFill/>
+            <a:prstDash val="solid"/>
+          </a:ln>
+        </p:spPr>
+        <p:txBody>
+          <a:bodyPr xmlns:a="http://schemas.openxmlformats.org/drawingml/2006/main" anchor="t"/>
+          <a:lstStyle xmlns:a="http://schemas.openxmlformats.org/drawingml/2006/main"/>
+          <a:p xmlns:a="http://schemas.openxmlformats.org/drawingml/2006/main">
+            <a:pPr algn="l">
+              <a:buNone/>
+              <a:defRPr sz="1425" b="0" i="0">
+                <a:solidFill>
+                  <a:srgbClr val="61786E"/>
+                </a:solidFill>
+              </a:defRPr>
+            </a:pPr>
+            <a:r>
+              <a:rPr sz="1425" b="0" i="0">
+                <a:solidFill>
+                  <a:srgbClr val="61786E"/>
+                </a:solidFill>
+              </a:rPr>
+              <a:t>Ask for the missing time</a:t>
+            </a:r>
+          </a:p>
+        </p:txBody>
+      </p:sp>
+      <p:sp>
+        <p:nvSpPr>
+          <p:cNvPr id="12" name="">
+            <a:extLst xmlns:a="http://schemas.openxmlformats.org/drawingml/2006/main">
+              <a:ext uri="{FF2B5EF4-FFF2-40B4-BE49-F238E27FC236}">
+                <a16:creationId xmlns:a16="http://schemas.microsoft.com/office/drawing/2014/main" id="{00E8A215-A100-4B14-9B3F-40069F4F5162}"/>
+              </a:ext>
+            </a:extLst>
+          </p:cNvPr>
+          <p:cNvSpPr>
+            <a:spLocks xmlns:a="http://schemas.openxmlformats.org/drawingml/2006/main" noGrp="1"/>
+          </p:cNvSpPr>
+          <p:nvPr/>
+        </p:nvSpPr>
+        <p:spPr>
+          <a:xfrm xmlns:a="http://schemas.openxmlformats.org/drawingml/2006/main">
+            <a:off x="1524000" y="3333750"/>
+            <a:ext cx="2362200" cy="28575"/>
+          </a:xfrm>
+          <a:prstGeom xmlns:a="http://schemas.openxmlformats.org/drawingml/2006/main" prst="rect">
+            <a:avLst/>
+          </a:prstGeom>
+          <a:solidFill xmlns:a="http://schemas.openxmlformats.org/drawingml/2006/main">
+            <a:srgbClr val="48B985"/>
+          </a:solidFill>
+          <a:ln xmlns:a="http://schemas.openxmlformats.org/drawingml/2006/main" w="0">
+            <a:noFill/>
+            <a:prstDash val="solid"/>
+          </a:ln>
+        </p:spPr>
+      </p:sp>
+      <p:sp>
+        <p:nvSpPr>
+          <p:cNvPr id="13" name="">
+            <a:extLst xmlns:a="http://schemas.openxmlformats.org/drawingml/2006/main">
+              <a:ext uri="{FF2B5EF4-FFF2-40B4-BE49-F238E27FC236}">
+                <a16:creationId xmlns:a16="http://schemas.microsoft.com/office/drawing/2014/main" id="{D09B357F-5748-43F6-A396-1CA51025466D}"/>
+              </a:ext>
+            </a:extLst>
+          </p:cNvPr>
+          <p:cNvSpPr>
+            <a:spLocks xmlns:a="http://schemas.openxmlformats.org/drawingml/2006/main" noGrp="1"/>
+          </p:cNvSpPr>
+          <p:nvPr/>
+        </p:nvSpPr>
+        <p:spPr>
+          <a:xfrm xmlns:a="http://schemas.openxmlformats.org/drawingml/2006/main">
+            <a:off x="4381500" y="2266950"/>
+            <a:ext cx="552450" cy="552450"/>
+          </a:xfrm>
+          <a:prstGeom xmlns:a="http://schemas.openxmlformats.org/drawingml/2006/main" prst="ellipse">
+            <a:avLst/>
+          </a:prstGeom>
+          <a:solidFill xmlns:a="http://schemas.openxmlformats.org/drawingml/2006/main">
+            <a:srgbClr val="7FA847"/>
+          </a:solidFill>
+          <a:ln xmlns:a="http://schemas.openxmlformats.org/drawingml/2006/main" w="0">
+            <a:noFill/>
+            <a:prstDash val="solid"/>
+          </a:ln>
+        </p:spPr>
+      </p:sp>
+      <p:sp>
+        <p:nvSpPr>
+          <p:cNvPr id="14" name="">
+            <a:extLst xmlns:a="http://schemas.openxmlformats.org/drawingml/2006/main">
+              <a:ext uri="{FF2B5EF4-FFF2-40B4-BE49-F238E27FC236}">
+                <a16:creationId xmlns:a16="http://schemas.microsoft.com/office/drawing/2014/main" id="{BD295DEA-634C-464F-BC3C-8D3B486E1E93}"/>
+              </a:ext>
+            </a:extLst>
+          </p:cNvPr>
+          <p:cNvSpPr>
+            <a:spLocks xmlns:a="http://schemas.openxmlformats.org/drawingml/2006/main" noGrp="1"/>
+          </p:cNvSpPr>
+          <p:nvPr/>
+        </p:nvSpPr>
+        <p:spPr>
+          <a:xfrm xmlns:a="http://schemas.openxmlformats.org/drawingml/2006/main">
+            <a:off x="4381500" y="2409825"/>
+            <a:ext cx="552450" cy="247650"/>
+          </a:xfrm>
+          <a:prstGeom xmlns:a="http://schemas.openxmlformats.org/drawingml/2006/main" prst="rect">
+            <a:avLst/>
+          </a:prstGeom>
+          <a:noFill xmlns:a="http://schemas.openxmlformats.org/drawingml/2006/main"/>
+          <a:ln xmlns:a="http://schemas.openxmlformats.org/drawingml/2006/main" w="0">
+            <a:noFill/>
+            <a:prstDash val="solid"/>
+          </a:ln>
+        </p:spPr>
+        <p:txBody>
+          <a:bodyPr xmlns:a="http://schemas.openxmlformats.org/drawingml/2006/main" anchor="t"/>
+          <a:lstStyle xmlns:a="http://schemas.openxmlformats.org/drawingml/2006/main"/>
+          <a:p xmlns:a="http://schemas.openxmlformats.org/drawingml/2006/main">
+            <a:pPr algn="ctr">
+              <a:buNone/>
+              <a:defRPr sz="1500" b="1" i="0">
+                <a:solidFill>
+                  <a:srgbClr val="F7FBF8"/>
+                </a:solidFill>
+              </a:defRPr>
+            </a:pPr>
+            <a:r>
+              <a:rPr sz="1500" b="1" i="0">
+                <a:solidFill>
+                  <a:srgbClr val="F7FBF8"/>
+                </a:solidFill>
+              </a:rPr>
+              <a:t>2</a:t>
+            </a:r>
+          </a:p>
+        </p:txBody>
+      </p:sp>
+      <p:sp>
+        <p:nvSpPr>
+          <p:cNvPr id="15" name="">
+            <a:extLst xmlns:a="http://schemas.openxmlformats.org/drawingml/2006/main">
+              <a:ext uri="{FF2B5EF4-FFF2-40B4-BE49-F238E27FC236}">
+                <a16:creationId xmlns:a16="http://schemas.microsoft.com/office/drawing/2014/main" id="{EA82E086-74D3-48B8-94EB-FD699295CA0C}"/>
+              </a:ext>
+            </a:extLst>
+          </p:cNvPr>
+          <p:cNvSpPr>
+            <a:spLocks xmlns:a="http://schemas.openxmlformats.org/drawingml/2006/main" noGrp="1"/>
+          </p:cNvSpPr>
+          <p:nvPr/>
+        </p:nvSpPr>
+        <p:spPr>
+          <a:xfrm xmlns:a="http://schemas.openxmlformats.org/drawingml/2006/main">
+            <a:off x="5124450" y="2305050"/>
+            <a:ext cx="2095500" cy="285750"/>
+          </a:xfrm>
+          <a:prstGeom xmlns:a="http://schemas.openxmlformats.org/drawingml/2006/main" prst="rect">
+            <a:avLst/>
+          </a:prstGeom>
+          <a:noFill xmlns:a="http://schemas.openxmlformats.org/drawingml/2006/main"/>
+          <a:ln xmlns:a="http://schemas.openxmlformats.org/drawingml/2006/main" w="0">
+            <a:noFill/>
+            <a:prstDash val="solid"/>
+          </a:ln>
+        </p:spPr>
+        <p:txBody>
+          <a:bodyPr xmlns:a="http://schemas.openxmlformats.org/drawingml/2006/main" anchor="t"/>
+          <a:lstStyle xmlns:a="http://schemas.openxmlformats.org/drawingml/2006/main"/>
+          <a:p xmlns:a="http://schemas.openxmlformats.org/drawingml/2006/main">
+            <a:pPr algn="l">
+              <a:buNone/>
+              <a:defRPr sz="1575" b="1" i="0">
+                <a:solidFill>
+                  <a:srgbClr val="163C2C"/>
+                </a:solidFill>
+              </a:defRPr>
+            </a:pPr>
+            <a:r>
+              <a:rPr sz="1575" b="1" i="0">
+                <a:solidFill>
+                  <a:srgbClr val="163C2C"/>
+                </a:solidFill>
+              </a:rPr>
+              <a:t>CAPACITY</a:t>
+            </a:r>
+          </a:p>
+        </p:txBody>
+      </p:sp>
+      <p:sp>
+        <p:nvSpPr>
+          <p:cNvPr id="16" name="">
+            <a:extLst xmlns:a="http://schemas.openxmlformats.org/drawingml/2006/main">
+              <a:ext uri="{FF2B5EF4-FFF2-40B4-BE49-F238E27FC236}">
+                <a16:creationId xmlns:a16="http://schemas.microsoft.com/office/drawing/2014/main" id="{33FAB85C-9C54-4AF6-B7DE-4776A393C3D4}"/>
+              </a:ext>
+            </a:extLst>
+          </p:cNvPr>
+          <p:cNvSpPr>
+            <a:spLocks xmlns:a="http://schemas.openxmlformats.org/drawingml/2006/main" noGrp="1"/>
+          </p:cNvSpPr>
+          <p:nvPr/>
+        </p:nvSpPr>
+        <p:spPr>
+          <a:xfrm xmlns:a="http://schemas.openxmlformats.org/drawingml/2006/main">
+            <a:off x="5124450" y="2686050"/>
+            <a:ext cx="2324100" cy="533400"/>
+          </a:xfrm>
+          <a:prstGeom xmlns:a="http://schemas.openxmlformats.org/drawingml/2006/main" prst="rect">
+            <a:avLst/>
+          </a:prstGeom>
+          <a:noFill xmlns:a="http://schemas.openxmlformats.org/drawingml/2006/main"/>
+          <a:ln xmlns:a="http://schemas.openxmlformats.org/drawingml/2006/main" w="0">
+            <a:noFill/>
+            <a:prstDash val="solid"/>
+          </a:ln>
+        </p:spPr>
+        <p:txBody>
+          <a:bodyPr xmlns:a="http://schemas.openxmlformats.org/drawingml/2006/main" anchor="t"/>
+          <a:lstStyle xmlns:a="http://schemas.openxmlformats.org/drawingml/2006/main"/>
+          <a:p xmlns:a="http://schemas.openxmlformats.org/drawingml/2006/main">
+            <a:pPr algn="l">
+              <a:buNone/>
+              <a:defRPr sz="1425" b="0" i="0">
+                <a:solidFill>
+                  <a:srgbClr val="61786E"/>
+                </a:solidFill>
+              </a:defRPr>
+            </a:pPr>
+            <a:r>
+              <a:rPr sz="1425" b="0" i="0">
+                <a:solidFill>
+                  <a:srgbClr val="61786E"/>
+                </a:solidFill>
+              </a:rPr>
+              <a:t>Ask how many people</a:t>
+            </a:r>
+          </a:p>
+        </p:txBody>
+      </p:sp>
+      <p:sp>
+        <p:nvSpPr>
+          <p:cNvPr id="17" name="">
+            <a:extLst xmlns:a="http://schemas.openxmlformats.org/drawingml/2006/main">
+              <a:ext uri="{FF2B5EF4-FFF2-40B4-BE49-F238E27FC236}">
+                <a16:creationId xmlns:a16="http://schemas.microsoft.com/office/drawing/2014/main" id="{CB9159C4-EFBC-4B36-9A6E-E085A3B5AA3E}"/>
+              </a:ext>
+            </a:extLst>
+          </p:cNvPr>
+          <p:cNvSpPr>
+            <a:spLocks xmlns:a="http://schemas.openxmlformats.org/drawingml/2006/main" noGrp="1"/>
+          </p:cNvSpPr>
+          <p:nvPr/>
+        </p:nvSpPr>
+        <p:spPr>
+          <a:xfrm xmlns:a="http://schemas.openxmlformats.org/drawingml/2006/main">
+            <a:off x="5124450" y="3333750"/>
+            <a:ext cx="2362200" cy="28575"/>
+          </a:xfrm>
+          <a:prstGeom xmlns:a="http://schemas.openxmlformats.org/drawingml/2006/main" prst="rect">
+            <a:avLst/>
+          </a:prstGeom>
+          <a:solidFill xmlns:a="http://schemas.openxmlformats.org/drawingml/2006/main">
+            <a:srgbClr val="7FA847"/>
+          </a:solidFill>
+          <a:ln xmlns:a="http://schemas.openxmlformats.org/drawingml/2006/main" w="0">
+            <a:noFill/>
+            <a:prstDash val="solid"/>
+          </a:ln>
+        </p:spPr>
+      </p:sp>
+      <p:sp>
+        <p:nvSpPr>
+          <p:cNvPr id="18" name="">
+            <a:extLst xmlns:a="http://schemas.openxmlformats.org/drawingml/2006/main">
+              <a:ext uri="{FF2B5EF4-FFF2-40B4-BE49-F238E27FC236}">
+                <a16:creationId xmlns:a16="http://schemas.microsoft.com/office/drawing/2014/main" id="{3BB78A7B-0D6D-4D15-B944-F3A61E1D0696}"/>
+              </a:ext>
+            </a:extLst>
+          </p:cNvPr>
+          <p:cNvSpPr>
+            <a:spLocks xmlns:a="http://schemas.openxmlformats.org/drawingml/2006/main" noGrp="1"/>
+          </p:cNvSpPr>
+          <p:nvPr/>
+        </p:nvSpPr>
+        <p:spPr>
+          <a:xfrm xmlns:a="http://schemas.openxmlformats.org/drawingml/2006/main">
+            <a:off x="7981950" y="2266950"/>
+            <a:ext cx="552450" cy="552450"/>
+          </a:xfrm>
+          <a:prstGeom xmlns:a="http://schemas.openxmlformats.org/drawingml/2006/main" prst="ellipse">
+            <a:avLst/>
+          </a:prstGeom>
+          <a:solidFill xmlns:a="http://schemas.openxmlformats.org/drawingml/2006/main">
+            <a:srgbClr val="159A64"/>
+          </a:solidFill>
+          <a:ln xmlns:a="http://schemas.openxmlformats.org/drawingml/2006/main" w="0">
+            <a:noFill/>
+            <a:prstDash val="solid"/>
+          </a:ln>
+        </p:spPr>
+      </p:sp>
+      <p:sp>
+        <p:nvSpPr>
+          <p:cNvPr id="19" name="">
+            <a:extLst xmlns:a="http://schemas.openxmlformats.org/drawingml/2006/main">
+              <a:ext uri="{FF2B5EF4-FFF2-40B4-BE49-F238E27FC236}">
+                <a16:creationId xmlns:a16="http://schemas.microsoft.com/office/drawing/2014/main" id="{2D344159-9DE2-45FA-9A71-8F0256B9CF5E}"/>
+              </a:ext>
+            </a:extLst>
+          </p:cNvPr>
+          <p:cNvSpPr>
+            <a:spLocks xmlns:a="http://schemas.openxmlformats.org/drawingml/2006/main" noGrp="1"/>
+          </p:cNvSpPr>
+          <p:nvPr/>
+        </p:nvSpPr>
+        <p:spPr>
+          <a:xfrm xmlns:a="http://schemas.openxmlformats.org/drawingml/2006/main">
+            <a:off x="7981950" y="2409825"/>
+            <a:ext cx="552450" cy="247650"/>
+          </a:xfrm>
+          <a:prstGeom xmlns:a="http://schemas.openxmlformats.org/drawingml/2006/main" prst="rect">
+            <a:avLst/>
+          </a:prstGeom>
+          <a:noFill xmlns:a="http://schemas.openxmlformats.org/drawingml/2006/main"/>
+          <a:ln xmlns:a="http://schemas.openxmlformats.org/drawingml/2006/main" w="0">
+            <a:noFill/>
+            <a:prstDash val="solid"/>
+          </a:ln>
+        </p:spPr>
+        <p:txBody>
+          <a:bodyPr xmlns:a="http://schemas.openxmlformats.org/drawingml/2006/main" anchor="t"/>
+          <a:lstStyle xmlns:a="http://schemas.openxmlformats.org/drawingml/2006/main"/>
+          <a:p xmlns:a="http://schemas.openxmlformats.org/drawingml/2006/main">
+            <a:pPr algn="ctr">
+              <a:buNone/>
+              <a:defRPr sz="1500" b="1" i="0">
+                <a:solidFill>
+                  <a:srgbClr val="F7FBF8"/>
+                </a:solidFill>
+              </a:defRPr>
+            </a:pPr>
+            <a:r>
+              <a:rPr sz="1500" b="1" i="0">
+                <a:solidFill>
+                  <a:srgbClr val="F7FBF8"/>
+                </a:solidFill>
+              </a:rPr>
+              <a:t>3</a:t>
+            </a:r>
+          </a:p>
+        </p:txBody>
+      </p:sp>
+      <p:sp>
+        <p:nvSpPr>
+          <p:cNvPr id="20" name="">
+            <a:extLst xmlns:a="http://schemas.openxmlformats.org/drawingml/2006/main">
+              <a:ext uri="{FF2B5EF4-FFF2-40B4-BE49-F238E27FC236}">
+                <a16:creationId xmlns:a16="http://schemas.microsoft.com/office/drawing/2014/main" id="{B4E03B82-C2B1-465F-81DA-0CB9C0AD7CB6}"/>
+              </a:ext>
+            </a:extLst>
+          </p:cNvPr>
+          <p:cNvSpPr>
+            <a:spLocks xmlns:a="http://schemas.openxmlformats.org/drawingml/2006/main" noGrp="1"/>
+          </p:cNvSpPr>
+          <p:nvPr/>
+        </p:nvSpPr>
+        <p:spPr>
+          <a:xfrm xmlns:a="http://schemas.openxmlformats.org/drawingml/2006/main">
+            <a:off x="8724900" y="2305050"/>
+            <a:ext cx="2095500" cy="285750"/>
+          </a:xfrm>
+          <a:prstGeom xmlns:a="http://schemas.openxmlformats.org/drawingml/2006/main" prst="rect">
+            <a:avLst/>
+          </a:prstGeom>
+          <a:noFill xmlns:a="http://schemas.openxmlformats.org/drawingml/2006/main"/>
+          <a:ln xmlns:a="http://schemas.openxmlformats.org/drawingml/2006/main" w="0">
+            <a:noFill/>
+            <a:prstDash val="solid"/>
+          </a:ln>
+        </p:spPr>
+        <p:txBody>
+          <a:bodyPr xmlns:a="http://schemas.openxmlformats.org/drawingml/2006/main" anchor="t"/>
+          <a:lstStyle xmlns:a="http://schemas.openxmlformats.org/drawingml/2006/main"/>
+          <a:p xmlns:a="http://schemas.openxmlformats.org/drawingml/2006/main">
+            <a:pPr algn="l">
+              <a:buNone/>
+              <a:defRPr sz="1575" b="1" i="0">
+                <a:solidFill>
+                  <a:srgbClr val="163C2C"/>
+                </a:solidFill>
+              </a:defRPr>
+            </a:pPr>
+            <a:r>
+              <a:rPr sz="1575" b="1" i="0">
+                <a:solidFill>
+                  <a:srgbClr val="163C2C"/>
+                </a:solidFill>
+              </a:rPr>
+              <a:t>CALL TOOL</a:t>
+            </a:r>
+          </a:p>
+        </p:txBody>
+      </p:sp>
+      <p:sp>
+        <p:nvSpPr>
+          <p:cNvPr id="21" name="">
+            <a:extLst xmlns:a="http://schemas.openxmlformats.org/drawingml/2006/main">
+              <a:ext uri="{FF2B5EF4-FFF2-40B4-BE49-F238E27FC236}">
+                <a16:creationId xmlns:a16="http://schemas.microsoft.com/office/drawing/2014/main" id="{D39EC992-99D6-48C5-9D8F-7A64D0ADFADE}"/>
+              </a:ext>
+            </a:extLst>
+          </p:cNvPr>
+          <p:cNvSpPr>
+            <a:spLocks xmlns:a="http://schemas.openxmlformats.org/drawingml/2006/main" noGrp="1"/>
+          </p:cNvSpPr>
+          <p:nvPr/>
+        </p:nvSpPr>
+        <p:spPr>
+          <a:xfrm xmlns:a="http://schemas.openxmlformats.org/drawingml/2006/main">
+            <a:off x="8724900" y="2686050"/>
+            <a:ext cx="2324100" cy="533400"/>
+          </a:xfrm>
+          <a:prstGeom xmlns:a="http://schemas.openxmlformats.org/drawingml/2006/main" prst="rect">
+            <a:avLst/>
+          </a:prstGeom>
+          <a:noFill xmlns:a="http://schemas.openxmlformats.org/drawingml/2006/main"/>
+          <a:ln xmlns:a="http://schemas.openxmlformats.org/drawingml/2006/main" w="0">
+            <a:noFill/>
+            <a:prstDash val="solid"/>
+          </a:ln>
+        </p:spPr>
+        <p:txBody>
+          <a:bodyPr xmlns:a="http://schemas.openxmlformats.org/drawingml/2006/main" anchor="t"/>
+          <a:lstStyle xmlns:a="http://schemas.openxmlformats.org/drawingml/2006/main"/>
+          <a:p xmlns:a="http://schemas.openxmlformats.org/drawingml/2006/main">
+            <a:pPr algn="l">
+              <a:buNone/>
+              <a:defRPr sz="1425" b="0" i="0">
+                <a:solidFill>
+                  <a:srgbClr val="61786E"/>
+                </a:solidFill>
+              </a:defRPr>
+            </a:pPr>
+            <a:r>
+              <a:rPr sz="1425" b="0" i="0">
+                <a:solidFill>
+                  <a:srgbClr val="61786E"/>
+                </a:solidFill>
+              </a:rPr>
+              <a:t>Only when both are known</a:t>
+            </a:r>
+          </a:p>
+        </p:txBody>
+      </p:sp>
+      <p:sp>
+        <p:nvSpPr>
+          <p:cNvPr id="22" name="">
+            <a:extLst xmlns:a="http://schemas.openxmlformats.org/drawingml/2006/main">
+              <a:ext uri="{FF2B5EF4-FFF2-40B4-BE49-F238E27FC236}">
+                <a16:creationId xmlns:a16="http://schemas.microsoft.com/office/drawing/2014/main" id="{C4583855-49CC-4CB7-A2C5-8A85DAE37818}"/>
+              </a:ext>
+            </a:extLst>
+          </p:cNvPr>
+          <p:cNvSpPr>
+            <a:spLocks xmlns:a="http://schemas.openxmlformats.org/drawingml/2006/main" noGrp="1"/>
+          </p:cNvSpPr>
+          <p:nvPr/>
+        </p:nvSpPr>
+        <p:spPr>
+          <a:xfrm xmlns:a="http://schemas.openxmlformats.org/drawingml/2006/main">
+            <a:off x="8724900" y="3333750"/>
+            <a:ext cx="2362200" cy="28575"/>
+          </a:xfrm>
+          <a:prstGeom xmlns:a="http://schemas.openxmlformats.org/drawingml/2006/main" prst="rect">
+            <a:avLst/>
+          </a:prstGeom>
+          <a:solidFill xmlns:a="http://schemas.openxmlformats.org/drawingml/2006/main">
+            <a:srgbClr val="159A64"/>
+          </a:solidFill>
+          <a:ln xmlns:a="http://schemas.openxmlformats.org/drawingml/2006/main" w="0">
+            <a:noFill/>
+            <a:prstDash val="solid"/>
+          </a:ln>
+        </p:spPr>
+      </p:sp>
+      <p:sp>
+        <p:nvSpPr>
+          <p:cNvPr id="23" name="">
+            <a:extLst xmlns:a="http://schemas.openxmlformats.org/drawingml/2006/main">
+              <a:ext uri="{FF2B5EF4-FFF2-40B4-BE49-F238E27FC236}">
+                <a16:creationId xmlns:a16="http://schemas.microsoft.com/office/drawing/2014/main" id="{4C8DE644-80D9-4F6A-AC9B-BD1B6020EC28}"/>
+              </a:ext>
+            </a:extLst>
+          </p:cNvPr>
+          <p:cNvSpPr>
+            <a:spLocks xmlns:a="http://schemas.openxmlformats.org/drawingml/2006/main" noGrp="1"/>
+          </p:cNvSpPr>
+          <p:nvPr/>
+        </p:nvSpPr>
+        <p:spPr>
+          <a:xfrm xmlns:a="http://schemas.openxmlformats.org/drawingml/2006/main">
+            <a:off x="800100" y="4095750"/>
+            <a:ext cx="1524000" cy="266700"/>
+          </a:xfrm>
+          <a:prstGeom xmlns:a="http://schemas.openxmlformats.org/drawingml/2006/main" prst="rect">
+            <a:avLst/>
+          </a:prstGeom>
+          <a:noFill xmlns:a="http://schemas.openxmlformats.org/drawingml/2006/main"/>
+          <a:ln xmlns:a="http://schemas.openxmlformats.org/drawingml/2006/main" w="0">
+            <a:noFill/>
+            <a:prstDash val="solid"/>
+          </a:ln>
+        </p:spPr>
+        <p:txBody>
+          <a:bodyPr xmlns:a="http://schemas.openxmlformats.org/drawingml/2006/main" anchor="t"/>
+          <a:lstStyle xmlns:a="http://schemas.openxmlformats.org/drawingml/2006/main"/>
+          <a:p xmlns:a="http://schemas.openxmlformats.org/drawingml/2006/main">
+            <a:pPr algn="l">
+              <a:buNone/>
+              <a:defRPr sz="1200" b="1" i="0">
+                <a:solidFill>
+                  <a:srgbClr val="D05B65"/>
+                </a:solidFill>
+              </a:defRPr>
+            </a:pPr>
+            <a:r>
+              <a:rPr sz="1200" b="1" i="0">
+                <a:solidFill>
+                  <a:srgbClr val="D05B65"/>
+                </a:solidFill>
+              </a:rPr>
+              <a:t>TEST WITH</a:t>
+            </a:r>
+          </a:p>
+        </p:txBody>
+      </p:sp>
+      <p:sp>
+        <p:nvSpPr>
+          <p:cNvPr id="24" name="">
+            <a:extLst xmlns:a="http://schemas.openxmlformats.org/drawingml/2006/main">
+              <a:ext uri="{FF2B5EF4-FFF2-40B4-BE49-F238E27FC236}">
+                <a16:creationId xmlns:a16="http://schemas.microsoft.com/office/drawing/2014/main" id="{11FA8D27-9A53-40BB-B7C8-EA6F91A92D74}"/>
+              </a:ext>
+            </a:extLst>
+          </p:cNvPr>
+          <p:cNvSpPr>
+            <a:spLocks xmlns:a="http://schemas.openxmlformats.org/drawingml/2006/main" noGrp="1"/>
+          </p:cNvSpPr>
+          <p:nvPr/>
+        </p:nvSpPr>
+        <p:spPr>
+          <a:xfrm xmlns:a="http://schemas.openxmlformats.org/drawingml/2006/main">
+            <a:off x="800100" y="4495800"/>
+            <a:ext cx="7905750" cy="400050"/>
+          </a:xfrm>
+          <a:prstGeom xmlns:a="http://schemas.openxmlformats.org/drawingml/2006/main" prst="rect">
+            <a:avLst/>
+          </a:prstGeom>
+          <a:noFill xmlns:a="http://schemas.openxmlformats.org/drawingml/2006/main"/>
+          <a:ln xmlns:a="http://schemas.openxmlformats.org/drawingml/2006/main" w="0">
+            <a:noFill/>
+            <a:prstDash val="solid"/>
+          </a:ln>
+        </p:spPr>
+        <p:txBody>
+          <a:bodyPr xmlns:a="http://schemas.openxmlformats.org/drawingml/2006/main" anchor="t"/>
+          <a:lstStyle xmlns:a="http://schemas.openxmlformats.org/drawingml/2006/main"/>
+          <a:p xmlns:a="http://schemas.openxmlformats.org/drawingml/2006/main">
+            <a:pPr algn="l">
+              <a:buNone/>
+              <a:defRPr sz="2175" b="1" i="0">
+                <a:solidFill>
+                  <a:srgbClr val="163C2C"/>
+                </a:solidFill>
+              </a:defRPr>
+            </a:pPr>
+            <a:r>
+              <a:rPr sz="2175" b="1" i="0">
+                <a:solidFill>
+                  <a:srgbClr val="163C2C"/>
+                </a:solidFill>
+              </a:rPr>
+              <a:t>“Find me a meeting room this afternoon.”</a:t>
+            </a:r>
+          </a:p>
+        </p:txBody>
+      </p:sp>
+    </p:spTree>
+    <p:extLst>
+      <p:ext uri="{BB962C8B-B14F-4D97-AF65-F5344CB8AC3E}">
+        <p14:creationId xmlns:p14="http://schemas.microsoft.com/office/powerpoint/2010/main" val="498246605"/>
+      </p:ext>
+    </p:extLst>
+  </p:cSld>
+</p:sld>
+</file>
+
+<file path=ppt/slides/slide19.xml><?xml version="1.0" encoding="utf-8"?>
+<p:sld xmlns:p="http://schemas.openxmlformats.org/presentationml/2006/main">
+  <p:cSld>
+    <p:bg>
+      <p:bgPr>
+        <a:solidFill xmlns:a="http://schemas.openxmlformats.org/drawingml/2006/main">
+          <a:srgbClr val="F7FBF8"/>
+        </a:solidFill>
+      </p:bgPr>
+    </p:bg>
+    <p:spTree>
+      <p:nvGrpSpPr>
+        <p:cNvPr id="1" name=""/>
+        <p:cNvGrpSpPr/>
+        <p:nvPr/>
+      </p:nvGrpSpPr>
+      <p:grpSpPr>
+        <a:xfrm xmlns:a="http://schemas.openxmlformats.org/drawingml/2006/main"/>
+      </p:grpSpPr>
+      <p:sp>
+        <p:nvSpPr>
+          <p:cNvPr id="46" name="">
+            <a:extLst xmlns:a="http://schemas.openxmlformats.org/drawingml/2006/main">
+              <a:ext uri="{FF2B5EF4-FFF2-40B4-BE49-F238E27FC236}">
+                <a16:creationId xmlns:a16="http://schemas.microsoft.com/office/drawing/2014/main" id="{DAD9A697-D667-48D0-96DC-0573D3C583E6}"/>
+              </a:ext>
+            </a:extLst>
+          </p:cNvPr>
+          <p:cNvSpPr>
+            <a:spLocks xmlns:a="http://schemas.openxmlformats.org/drawingml/2006/main" noGrp="1"/>
+          </p:cNvSpPr>
+          <p:nvPr/>
+        </p:nvSpPr>
+        <p:spPr>
+          <a:xfrm xmlns:a="http://schemas.openxmlformats.org/drawingml/2006/main">
+            <a:off x="685800" y="514350"/>
+            <a:ext cx="76200" cy="285750"/>
+          </a:xfrm>
+          <a:prstGeom xmlns:a="http://schemas.openxmlformats.org/drawingml/2006/main" prst="roundRect">
+            <a:avLst>
+              <a:gd name="adj" fmla="val 50000"/>
+            </a:avLst>
+          </a:prstGeom>
+          <a:solidFill xmlns:a="http://schemas.openxmlformats.org/drawingml/2006/main">
+            <a:srgbClr val="159A64"/>
+          </a:solidFill>
+          <a:ln xmlns:a="http://schemas.openxmlformats.org/drawingml/2006/main" w="0">
+            <a:noFill/>
+            <a:prstDash val="solid"/>
+          </a:ln>
+        </p:spPr>
+      </p:sp>
+      <p:sp>
+        <p:nvSpPr>
+          <p:cNvPr id="2" name="">
+            <a:extLst xmlns:a="http://schemas.openxmlformats.org/drawingml/2006/main">
+              <a:ext uri="{FF2B5EF4-FFF2-40B4-BE49-F238E27FC236}">
+                <a16:creationId xmlns:a16="http://schemas.microsoft.com/office/drawing/2014/main" id="{213C627C-B3F9-456D-9CB3-F60D343E5BFB}"/>
+              </a:ext>
+            </a:extLst>
+          </p:cNvPr>
+          <p:cNvSpPr>
+            <a:spLocks xmlns:a="http://schemas.openxmlformats.org/drawingml/2006/main" noGrp="1"/>
+          </p:cNvSpPr>
+          <p:nvPr/>
+        </p:nvSpPr>
+        <p:spPr>
+          <a:xfrm xmlns:a="http://schemas.openxmlformats.org/drawingml/2006/main">
+            <a:off x="895350" y="504825"/>
+            <a:ext cx="4000500" cy="285750"/>
+          </a:xfrm>
+          <a:prstGeom xmlns:a="http://schemas.openxmlformats.org/drawingml/2006/main" prst="rect">
+            <a:avLst/>
+          </a:prstGeom>
+          <a:noFill xmlns:a="http://schemas.openxmlformats.org/drawingml/2006/main"/>
+          <a:ln xmlns:a="http://schemas.openxmlformats.org/drawingml/2006/main" w="0">
+            <a:noFill/>
+            <a:prstDash val="solid"/>
+          </a:ln>
+        </p:spPr>
+        <p:txBody>
+          <a:bodyPr xmlns:a="http://schemas.openxmlformats.org/drawingml/2006/main" anchor="t"/>
+          <a:lstStyle xmlns:a="http://schemas.openxmlformats.org/drawingml/2006/main"/>
+          <a:p xmlns:a="http://schemas.openxmlformats.org/drawingml/2006/main">
+            <a:pPr algn="l">
+              <a:buNone/>
+              <a:defRPr sz="1125" b="1" i="0">
+                <a:solidFill>
+                  <a:srgbClr val="159A64"/>
+                </a:solidFill>
+              </a:defRPr>
+            </a:pPr>
+            <a:r>
+              <a:rPr sz="1125" b="1" i="0">
+                <a:solidFill>
+                  <a:srgbClr val="159A64"/>
+                </a:solidFill>
+              </a:rPr>
+              <a:t>What to take with you</a:t>
+            </a:r>
+          </a:p>
+        </p:txBody>
+      </p:sp>
+      <p:sp>
+        <p:nvSpPr>
+          <p:cNvPr id="3" name="">
+            <a:extLst xmlns:a="http://schemas.openxmlformats.org/drawingml/2006/main">
+              <a:ext uri="{FF2B5EF4-FFF2-40B4-BE49-F238E27FC236}">
+                <a16:creationId xmlns:a16="http://schemas.microsoft.com/office/drawing/2014/main" id="{F60B6C3E-DA0C-4DCA-AC7C-11F5DDAF1BD5}"/>
+              </a:ext>
+            </a:extLst>
+          </p:cNvPr>
+          <p:cNvSpPr>
+            <a:spLocks xmlns:a="http://schemas.openxmlformats.org/drawingml/2006/main" noGrp="1"/>
+          </p:cNvSpPr>
+          <p:nvPr/>
+        </p:nvSpPr>
+        <p:spPr>
+          <a:xfrm xmlns:a="http://schemas.openxmlformats.org/drawingml/2006/main">
+            <a:off x="685800" y="933450"/>
+            <a:ext cx="10820400" cy="609600"/>
+          </a:xfrm>
+          <a:prstGeom xmlns:a="http://schemas.openxmlformats.org/drawingml/2006/main" prst="rect">
+            <a:avLst/>
+          </a:prstGeom>
+          <a:noFill xmlns:a="http://schemas.openxmlformats.org/drawingml/2006/main"/>
+          <a:ln xmlns:a="http://schemas.openxmlformats.org/drawingml/2006/main" w="0">
+            <a:noFill/>
+            <a:prstDash val="solid"/>
+          </a:ln>
+        </p:spPr>
+        <p:txBody>
+          <a:bodyPr xmlns:a="http://schemas.openxmlformats.org/drawingml/2006/main" anchor="t"/>
+          <a:lstStyle xmlns:a="http://schemas.openxmlformats.org/drawingml/2006/main"/>
+          <a:p xmlns:a="http://schemas.openxmlformats.org/drawingml/2006/main">
+            <a:pPr algn="l">
+              <a:buNone/>
+              <a:defRPr sz="3150" b="1" i="0">
+                <a:solidFill>
+                  <a:srgbClr val="163C2C"/>
+                </a:solidFill>
+              </a:defRPr>
+            </a:pPr>
+            <a:r>
+              <a:rPr sz="3150" b="1" i="0">
+                <a:solidFill>
+                  <a:srgbClr val="163C2C"/>
+                </a:solidFill>
+              </a:rPr>
+              <a:t>You now have the full conversation loop</a:t>
+            </a:r>
+          </a:p>
+        </p:txBody>
+      </p:sp>
+      <p:sp>
+        <p:nvSpPr>
+          <p:cNvPr id="4" name="">
+            <a:extLst xmlns:a="http://schemas.openxmlformats.org/drawingml/2006/main">
+              <a:ext uri="{FF2B5EF4-FFF2-40B4-BE49-F238E27FC236}">
+                <a16:creationId xmlns:a16="http://schemas.microsoft.com/office/drawing/2014/main" id="{81B9A8AD-D0F2-4100-88D3-E5CAFE9D2D94}"/>
+              </a:ext>
+            </a:extLst>
+          </p:cNvPr>
+          <p:cNvSpPr>
+            <a:spLocks xmlns:a="http://schemas.openxmlformats.org/drawingml/2006/main" noGrp="1"/>
+          </p:cNvSpPr>
+          <p:nvPr/>
+        </p:nvSpPr>
+        <p:spPr>
+          <a:xfrm xmlns:a="http://schemas.openxmlformats.org/drawingml/2006/main">
+            <a:off x="685800" y="1562100"/>
+            <a:ext cx="9906000" cy="438150"/>
+          </a:xfrm>
+          <a:prstGeom xmlns:a="http://schemas.openxmlformats.org/drawingml/2006/main" prst="rect">
+            <a:avLst/>
+          </a:prstGeom>
+          <a:noFill xmlns:a="http://schemas.openxmlformats.org/drawingml/2006/main"/>
+          <a:ln xmlns:a="http://schemas.openxmlformats.org/drawingml/2006/main" w="0">
+            <a:noFill/>
+            <a:prstDash val="solid"/>
+          </a:ln>
+        </p:spPr>
+        <p:txBody>
+          <a:bodyPr xmlns:a="http://schemas.openxmlformats.org/drawingml/2006/main" anchor="t"/>
+          <a:lstStyle xmlns:a="http://schemas.openxmlformats.org/drawingml/2006/main"/>
+          <a:p xmlns:a="http://schemas.openxmlformats.org/drawingml/2006/main">
+            <a:pPr algn="l">
+              <a:buNone/>
+              <a:defRPr sz="1500" b="0" i="0">
+                <a:solidFill>
+                  <a:srgbClr val="61786E"/>
+                </a:solidFill>
+              </a:defRPr>
+            </a:pPr>
+            <a:r>
+              <a:rPr sz="1500" b="0" i="0">
+                <a:solidFill>
+                  <a:srgbClr val="61786E"/>
+                </a:solidFill>
+              </a:rPr>
+              <a:t>Agent → tool → live audio → events → production behavior.</a:t>
+            </a:r>
+          </a:p>
+        </p:txBody>
+      </p:sp>
+      <p:sp>
+        <p:nvSpPr>
+          <p:cNvPr id="5" name="">
+            <a:extLst xmlns:a="http://schemas.openxmlformats.org/drawingml/2006/main">
+              <a:ext uri="{FF2B5EF4-FFF2-40B4-BE49-F238E27FC236}">
+                <a16:creationId xmlns:a16="http://schemas.microsoft.com/office/drawing/2014/main" id="{B2803DD0-2389-4236-BCA8-A412A0E04C0B}"/>
+              </a:ext>
+            </a:extLst>
+          </p:cNvPr>
+          <p:cNvSpPr>
+            <a:spLocks xmlns:a="http://schemas.openxmlformats.org/drawingml/2006/main" noGrp="1"/>
+          </p:cNvSpPr>
+          <p:nvPr/>
+        </p:nvSpPr>
+        <p:spPr>
+          <a:xfrm xmlns:a="http://schemas.openxmlformats.org/drawingml/2006/main">
+            <a:off x="685800" y="6448425"/>
+            <a:ext cx="10820400" cy="9525"/>
+          </a:xfrm>
+          <a:prstGeom xmlns:a="http://schemas.openxmlformats.org/drawingml/2006/main" prst="rect">
+            <a:avLst/>
+          </a:prstGeom>
+          <a:solidFill xmlns:a="http://schemas.openxmlformats.org/drawingml/2006/main">
+            <a:srgbClr val="C9DED2"/>
+          </a:solidFill>
+          <a:ln xmlns:a="http://schemas.openxmlformats.org/drawingml/2006/main" w="0">
+            <a:noFill/>
+            <a:prstDash val="solid"/>
+          </a:ln>
+        </p:spPr>
+      </p:sp>
+      <p:sp>
+        <p:nvSpPr>
+          <p:cNvPr id="6" name="">
+            <a:extLst xmlns:a="http://schemas.openxmlformats.org/drawingml/2006/main">
+              <a:ext uri="{FF2B5EF4-FFF2-40B4-BE49-F238E27FC236}">
+                <a16:creationId xmlns:a16="http://schemas.microsoft.com/office/drawing/2014/main" id="{F2939B21-747E-44BB-A542-84417B69F1EE}"/>
+              </a:ext>
+            </a:extLst>
+          </p:cNvPr>
+          <p:cNvSpPr>
+            <a:spLocks xmlns:a="http://schemas.openxmlformats.org/drawingml/2006/main" noGrp="1"/>
+          </p:cNvSpPr>
+          <p:nvPr/>
+        </p:nvSpPr>
+        <p:spPr>
+          <a:xfrm xmlns:a="http://schemas.openxmlformats.org/drawingml/2006/main">
+            <a:off x="685800" y="6524625"/>
+            <a:ext cx="3429000" cy="190500"/>
+          </a:xfrm>
+          <a:prstGeom xmlns:a="http://schemas.openxmlformats.org/drawingml/2006/main" prst="rect">
+            <a:avLst/>
+          </a:prstGeom>
+          <a:noFill xmlns:a="http://schemas.openxmlformats.org/drawingml/2006/main"/>
+          <a:ln xmlns:a="http://schemas.openxmlformats.org/drawingml/2006/main" w="0">
+            <a:noFill/>
+            <a:prstDash val="solid"/>
+          </a:ln>
+        </p:spPr>
+        <p:txBody>
+          <a:bodyPr xmlns:a="http://schemas.openxmlformats.org/drawingml/2006/main" anchor="t"/>
+          <a:lstStyle xmlns:a="http://schemas.openxmlformats.org/drawingml/2006/main"/>
+          <a:p xmlns:a="http://schemas.openxmlformats.org/drawingml/2006/main">
+            <a:pPr algn="l">
+              <a:buNone/>
+              <a:defRPr sz="900" b="1" i="0">
+                <a:solidFill>
+                  <a:srgbClr val="7F9389"/>
+                </a:solidFill>
+              </a:defRPr>
+            </a:pPr>
+            <a:r>
+              <a:rPr sz="900" b="1" i="0">
+                <a:solidFill>
+                  <a:srgbClr val="7F9389"/>
+                </a:solidFill>
+              </a:rPr>
+              <a:t>VOICE AGENTS × GOOGLE ADK</a:t>
+            </a:r>
+          </a:p>
+        </p:txBody>
+      </p:sp>
+      <p:sp>
+        <p:nvSpPr>
+          <p:cNvPr id="7" name="">
+            <a:extLst xmlns:a="http://schemas.openxmlformats.org/drawingml/2006/main">
+              <a:ext uri="{FF2B5EF4-FFF2-40B4-BE49-F238E27FC236}">
+                <a16:creationId xmlns:a16="http://schemas.microsoft.com/office/drawing/2014/main" id="{29BC5D8A-D749-43EC-87C6-8DDBA608F50D}"/>
+              </a:ext>
+            </a:extLst>
+          </p:cNvPr>
+          <p:cNvSpPr>
+            <a:spLocks xmlns:a="http://schemas.openxmlformats.org/drawingml/2006/main" noGrp="1"/>
+          </p:cNvSpPr>
+          <p:nvPr/>
+        </p:nvSpPr>
+        <p:spPr>
+          <a:xfrm xmlns:a="http://schemas.openxmlformats.org/drawingml/2006/main">
+            <a:off x="10972800" y="6505575"/>
+            <a:ext cx="533400" cy="190500"/>
+          </a:xfrm>
+          <a:prstGeom xmlns:a="http://schemas.openxmlformats.org/drawingml/2006/main" prst="rect">
+            <a:avLst/>
+          </a:prstGeom>
+          <a:noFill xmlns:a="http://schemas.openxmlformats.org/drawingml/2006/main"/>
+          <a:ln xmlns:a="http://schemas.openxmlformats.org/drawingml/2006/main" w="0">
+            <a:noFill/>
+            <a:prstDash val="solid"/>
+          </a:ln>
+        </p:spPr>
+        <p:txBody>
+          <a:bodyPr xmlns:a="http://schemas.openxmlformats.org/drawingml/2006/main" anchor="t"/>
+          <a:lstStyle xmlns:a="http://schemas.openxmlformats.org/drawingml/2006/main"/>
+          <a:p xmlns:a="http://schemas.openxmlformats.org/drawingml/2006/main">
+            <a:pPr algn="r">
+              <a:buNone/>
+              <a:defRPr sz="900" b="1" i="0">
+                <a:solidFill>
+                  <a:srgbClr val="7F9389"/>
+                </a:solidFill>
+              </a:defRPr>
+            </a:pPr>
+            <a:r>
+              <a:rPr sz="900" b="1" i="0">
+                <a:solidFill>
+                  <a:srgbClr val="7F9389"/>
+                </a:solidFill>
+              </a:rPr>
+              <a:t>19</a:t>
             </a:r>
           </a:p>
         </p:txBody>
@@ -17576,57 +18425,6 @@
           </a:p>
         </p:txBody>
       </p:sp>
-      <p:sp>
-        <p:nvSpPr>
-          <p:cNvPr id="25" name="">
-            <a:extLst xmlns:a="http://schemas.openxmlformats.org/drawingml/2006/main">
-              <a:ext uri="{FF2B5EF4-FFF2-40B4-BE49-F238E27FC236}">
-                <a16:creationId xmlns:a16="http://schemas.microsoft.com/office/drawing/2014/main" id="{3ACE31F8-FF5A-4387-9130-C446DD721C44}"/>
-              </a:ext>
-            </a:extLst>
-          </p:cNvPr>
-          <p:cNvSpPr>
-            <a:spLocks xmlns:a="http://schemas.openxmlformats.org/drawingml/2006/main" noGrp="1"/>
-          </p:cNvSpPr>
-          <p:nvPr/>
-        </p:nvSpPr>
-        <p:spPr>
-          <a:xfrm xmlns:a="http://schemas.openxmlformats.org/drawingml/2006/main">
-            <a:off x="990600" y="4476750"/>
-            <a:ext cx="9620250" cy="571500"/>
-          </a:xfrm>
-          <a:prstGeom xmlns:a="http://schemas.openxmlformats.org/drawingml/2006/main" prst="rect">
-            <a:avLst/>
-          </a:prstGeom>
-          <a:noFill xmlns:a="http://schemas.openxmlformats.org/drawingml/2006/main"/>
-          <a:ln xmlns:a="http://schemas.openxmlformats.org/drawingml/2006/main" w="0">
-            <a:noFill/>
-            <a:prstDash val="solid"/>
-          </a:ln>
-        </p:spPr>
-        <p:txBody>
-          <a:bodyPr xmlns:a="http://schemas.openxmlformats.org/drawingml/2006/main" anchor="t"/>
-          <a:lstStyle xmlns:a="http://schemas.openxmlformats.org/drawingml/2006/main"/>
-          <a:p xmlns:a="http://schemas.openxmlformats.org/drawingml/2006/main">
-            <a:pPr algn="ctr">
-              <a:buNone/>
-              <a:defRPr sz="2100" b="1" i="0">
-                <a:solidFill>
-                  <a:srgbClr val="48B985"/>
-                </a:solidFill>
-              </a:defRPr>
-            </a:pPr>
-            <a:r>
-              <a:rPr sz="2100" b="1" i="0">
-                <a:solidFill>
-                  <a:srgbClr val="48B985"/>
-                </a:solidFill>
-              </a:rPr>
-              <a:t>You type only the pieces that teach the idea. Checkpoints carry the rest.</a:t>
-            </a:r>
-          </a:p>
-        </p:txBody>
-      </p:sp>
     </p:spTree>
     <p:extLst>
       <p:ext uri="{BB962C8B-B14F-4D97-AF65-F5344CB8AC3E}">
@@ -18645,14 +19443,14 @@
       </p:sp>
       <p:pic>
         <p:nvPicPr>
-          <p:cNvPr id="46" name=""/>
+          <p:cNvPr id="47" name=""/>
           <p:cNvPicPr>
             <a:picLocks xmlns:a="http://schemas.openxmlformats.org/drawingml/2006/main" noChangeAspect="1"/>
           </p:cNvPicPr>
           <p:nvPr/>
         </p:nvPicPr>
         <p:blipFill>
-          <a:blip xmlns:r="http://schemas.openxmlformats.org/officeDocument/2006/relationships" xmlns:a="http://schemas.openxmlformats.org/drawingml/2006/main" r:embed="Ra3fde7d295294840"/>
+          <a:blip xmlns:r="http://schemas.openxmlformats.org/officeDocument/2006/relationships" xmlns:a="http://schemas.openxmlformats.org/drawingml/2006/main" r:embed="R03844162e0954ff4"/>
           <a:stretch xmlns:a="http://schemas.openxmlformats.org/drawingml/2006/main"/>
         </p:blipFill>
         <p:spPr>
@@ -18698,6 +19496,7 @@
           <a:lstStyle xmlns:a="http://schemas.openxmlformats.org/drawingml/2006/main"/>
           <a:p xmlns:a="http://schemas.openxmlformats.org/drawingml/2006/main">
             <a:pPr algn="ctr">
+              <a:buNone/>
               <a:defRPr sz="900" b="1">
                 <a:solidFill>
                   <a:srgbClr val="159A64"/>
@@ -18715,6 +19514,7 @@
           </a:p>
           <a:p xmlns:a="http://schemas.openxmlformats.org/drawingml/2006/main">
             <a:pPr algn="ctr">
+              <a:buNone/>
               <a:defRPr sz="900" b="1">
                 <a:solidFill>
                   <a:srgbClr val="159A64"/>
@@ -18726,7 +19526,7 @@
                 <a:solidFill>
                   <a:srgbClr val="159A64"/>
                 </a:solidFill>
-                <a:hlinkClick xmlns:r="http://schemas.openxmlformats.org/officeDocument/2006/relationships" r:id="R2bc4222718734fab"/>
+                <a:hlinkClick xmlns:r="http://schemas.openxmlformats.org/officeDocument/2006/relationships" r:id="Ra12e7660b6c842ae"/>
               </a:rPr>
               <a:t>github.com/aswincsekar/adk-voice-workshop</a:t>
             </a:r>
@@ -20212,57 +21012,6 @@
                 </a:solidFill>
               </a:rPr>
               <a:t>46–58 min</a:t>
-            </a:r>
-          </a:p>
-        </p:txBody>
-      </p:sp>
-      <p:sp>
-        <p:nvSpPr>
-          <p:cNvPr id="33" name="">
-            <a:extLst xmlns:a="http://schemas.openxmlformats.org/drawingml/2006/main">
-              <a:ext uri="{FF2B5EF4-FFF2-40B4-BE49-F238E27FC236}">
-                <a16:creationId xmlns:a16="http://schemas.microsoft.com/office/drawing/2014/main" id="{F1971BA3-47E2-49A9-BB07-AC1B476A77F2}"/>
-              </a:ext>
-            </a:extLst>
-          </p:cNvPr>
-          <p:cNvSpPr>
-            <a:spLocks xmlns:a="http://schemas.openxmlformats.org/drawingml/2006/main" noGrp="1"/>
-          </p:cNvSpPr>
-          <p:nvPr/>
-        </p:nvSpPr>
-        <p:spPr>
-          <a:xfrm xmlns:a="http://schemas.openxmlformats.org/drawingml/2006/main">
-            <a:off x="1314450" y="4914900"/>
-            <a:ext cx="9563100" cy="438150"/>
-          </a:xfrm>
-          <a:prstGeom xmlns:a="http://schemas.openxmlformats.org/drawingml/2006/main" prst="rect">
-            <a:avLst/>
-          </a:prstGeom>
-          <a:noFill xmlns:a="http://schemas.openxmlformats.org/drawingml/2006/main"/>
-          <a:ln xmlns:a="http://schemas.openxmlformats.org/drawingml/2006/main" w="0">
-            <a:noFill/>
-            <a:prstDash val="solid"/>
-          </a:ln>
-        </p:spPr>
-        <p:txBody>
-          <a:bodyPr xmlns:a="http://schemas.openxmlformats.org/drawingml/2006/main" anchor="t"/>
-          <a:lstStyle xmlns:a="http://schemas.openxmlformats.org/drawingml/2006/main"/>
-          <a:p xmlns:a="http://schemas.openxmlformats.org/drawingml/2006/main">
-            <a:pPr algn="ctr">
-              <a:buNone/>
-              <a:defRPr sz="1800" b="1" i="0">
-                <a:solidFill>
-                  <a:srgbClr val="48B985"/>
-                </a:solidFill>
-              </a:defRPr>
-            </a:pPr>
-            <a:r>
-              <a:rPr sz="1800" b="1" i="0">
-                <a:solidFill>
-                  <a:srgbClr val="48B985"/>
-                </a:solidFill>
-              </a:rPr>
-              <a:t>If time is tight: skip the custom WebSocket code walkthrough, not the hands-on voice test.</a:t>
             </a:r>
           </a:p>
         </p:txBody>
